--- a/advisor_meeting.pptx
+++ b/advisor_meeting.pptx
@@ -3428,7 +3428,7 @@
                 </a:solidFill>
                 <a:latin typeface="Calibri"/>
               </a:rPr>
-              <a:t>16 defense and attack pairs. 94 measured conditions. Four attacks. Five defenses. Three models.</a:t>
+              <a:t>18 defense and attack pairs. 104 measured conditions. Four attacks. Five defenses. Three models.</a:t>
             </a:r>
           </a:p>
           <a:p>
@@ -4179,7 +4179,7 @@
                 </a:solidFill>
                 <a:latin typeface="Calibri"/>
               </a:rPr>
-              <a:t>0 of 8</a:t>
+              <a:t>0 of 10</a:t>
             </a:r>
           </a:p>
         </p:txBody>
@@ -4500,8 +4500,8 @@
         </p:nvSpPr>
         <p:spPr>
           <a:xfrm>
-            <a:off x="731520" y="2267712"/>
-            <a:ext cx="3931920" cy="274320"/>
+            <a:off x="731520" y="2103120"/>
+            <a:ext cx="2926080" cy="274320"/>
           </a:xfrm>
           <a:prstGeom prst="rect">
             <a:avLst/>
@@ -4542,8 +4542,8 @@
         </p:nvSpPr>
         <p:spPr>
           <a:xfrm>
-            <a:off x="4754880" y="2267712"/>
-            <a:ext cx="2103120" cy="274320"/>
+            <a:off x="3749039" y="2103120"/>
+            <a:ext cx="2377440" cy="274320"/>
           </a:xfrm>
           <a:prstGeom prst="rect">
             <a:avLst/>
@@ -4584,8 +4584,8 @@
         </p:nvSpPr>
         <p:spPr>
           <a:xfrm>
-            <a:off x="7040880" y="2267712"/>
-            <a:ext cx="1463040" cy="274320"/>
+            <a:off x="6309359" y="2103120"/>
+            <a:ext cx="1645920" cy="274320"/>
           </a:xfrm>
           <a:prstGeom prst="rect">
             <a:avLst/>
@@ -4626,8 +4626,8 @@
         </p:nvSpPr>
         <p:spPr>
           <a:xfrm>
-            <a:off x="8686800" y="2267712"/>
-            <a:ext cx="1828800" cy="274320"/>
+            <a:off x="8138160" y="2103120"/>
+            <a:ext cx="2011680" cy="274320"/>
           </a:xfrm>
           <a:prstGeom prst="rect">
             <a:avLst/>
@@ -4668,8 +4668,8 @@
         </p:nvSpPr>
         <p:spPr>
           <a:xfrm>
-            <a:off x="10698480" y="2267712"/>
-            <a:ext cx="1097280" cy="274320"/>
+            <a:off x="10332720" y="2103120"/>
+            <a:ext cx="1280160" cy="274320"/>
           </a:xfrm>
           <a:prstGeom prst="rect">
             <a:avLst/>
@@ -4710,8 +4710,8 @@
         </p:nvSpPr>
         <p:spPr>
           <a:xfrm>
-            <a:off x="731520" y="2615184"/>
-            <a:ext cx="3931920" cy="310896"/>
+            <a:off x="731520" y="2450592"/>
+            <a:ext cx="2926080" cy="310896"/>
           </a:xfrm>
           <a:prstGeom prst="rect">
             <a:avLst/>
@@ -4752,8 +4752,8 @@
         </p:nvSpPr>
         <p:spPr>
           <a:xfrm>
-            <a:off x="4754880" y="2615184"/>
-            <a:ext cx="2103120" cy="310896"/>
+            <a:off x="3749039" y="2450592"/>
+            <a:ext cx="2377440" cy="310896"/>
           </a:xfrm>
           <a:prstGeom prst="rect">
             <a:avLst/>
@@ -4794,8 +4794,8 @@
         </p:nvSpPr>
         <p:spPr>
           <a:xfrm>
-            <a:off x="7040880" y="2615184"/>
-            <a:ext cx="1463040" cy="310896"/>
+            <a:off x="6309359" y="2450592"/>
+            <a:ext cx="1645920" cy="310896"/>
           </a:xfrm>
           <a:prstGeom prst="rect">
             <a:avLst/>
@@ -4836,8 +4836,8 @@
         </p:nvSpPr>
         <p:spPr>
           <a:xfrm>
-            <a:off x="8686800" y="2615184"/>
-            <a:ext cx="1828800" cy="310896"/>
+            <a:off x="8138160" y="2450592"/>
+            <a:ext cx="2011680" cy="310896"/>
           </a:xfrm>
           <a:prstGeom prst="rect">
             <a:avLst/>
@@ -4878,8 +4878,8 @@
         </p:nvSpPr>
         <p:spPr>
           <a:xfrm>
-            <a:off x="10698480" y="2615184"/>
-            <a:ext cx="1097280" cy="310896"/>
+            <a:off x="10332720" y="2450592"/>
+            <a:ext cx="1280160" cy="310896"/>
           </a:xfrm>
           <a:prstGeom prst="rect">
             <a:avLst/>
@@ -4920,8 +4920,8 @@
         </p:nvSpPr>
         <p:spPr>
           <a:xfrm>
-            <a:off x="731520" y="3090672"/>
-            <a:ext cx="3931920" cy="310896"/>
+            <a:off x="731520" y="2926080"/>
+            <a:ext cx="2926080" cy="310896"/>
           </a:xfrm>
           <a:prstGeom prst="rect">
             <a:avLst/>
@@ -4962,8 +4962,8 @@
         </p:nvSpPr>
         <p:spPr>
           <a:xfrm>
-            <a:off x="4754880" y="3090672"/>
-            <a:ext cx="2103120" cy="310896"/>
+            <a:off x="3749039" y="2926080"/>
+            <a:ext cx="2377440" cy="310896"/>
           </a:xfrm>
           <a:prstGeom prst="rect">
             <a:avLst/>
@@ -5004,8 +5004,8 @@
         </p:nvSpPr>
         <p:spPr>
           <a:xfrm>
-            <a:off x="7040880" y="3090672"/>
-            <a:ext cx="1463040" cy="310896"/>
+            <a:off x="6309359" y="2926080"/>
+            <a:ext cx="1645920" cy="310896"/>
           </a:xfrm>
           <a:prstGeom prst="rect">
             <a:avLst/>
@@ -5046,8 +5046,8 @@
         </p:nvSpPr>
         <p:spPr>
           <a:xfrm>
-            <a:off x="8686800" y="3090672"/>
-            <a:ext cx="1828800" cy="310896"/>
+            <a:off x="8138160" y="2926080"/>
+            <a:ext cx="2011680" cy="310896"/>
           </a:xfrm>
           <a:prstGeom prst="rect">
             <a:avLst/>
@@ -5088,8 +5088,8 @@
         </p:nvSpPr>
         <p:spPr>
           <a:xfrm>
-            <a:off x="10698480" y="3090672"/>
-            <a:ext cx="1097280" cy="310896"/>
+            <a:off x="10332720" y="2926080"/>
+            <a:ext cx="1280160" cy="310896"/>
           </a:xfrm>
           <a:prstGeom prst="rect">
             <a:avLst/>
@@ -5130,8 +5130,8 @@
         </p:nvSpPr>
         <p:spPr>
           <a:xfrm>
-            <a:off x="731520" y="3566160"/>
-            <a:ext cx="3931920" cy="310896"/>
+            <a:off x="731520" y="3401568"/>
+            <a:ext cx="2926080" cy="310896"/>
           </a:xfrm>
           <a:prstGeom prst="rect">
             <a:avLst/>
@@ -5159,7 +5159,7 @@
                 </a:solidFill>
                 <a:latin typeface="Calibri"/>
               </a:rPr>
-              <a:t>RobustRAG, on Llama-3</a:t>
+              <a:t>ParamMute</a:t>
             </a:r>
           </a:p>
         </p:txBody>
@@ -5172,8 +5172,8 @@
         </p:nvSpPr>
         <p:spPr>
           <a:xfrm>
-            <a:off x="4754880" y="3566160"/>
-            <a:ext cx="2103120" cy="310896"/>
+            <a:off x="3749039" y="3401568"/>
+            <a:ext cx="2377440" cy="310896"/>
           </a:xfrm>
           <a:prstGeom prst="rect">
             <a:avLst/>
@@ -5201,7 +5201,7 @@
                 </a:solidFill>
                 <a:latin typeface="Calibri"/>
               </a:rPr>
-              <a:t>refusal</a:t>
+              <a:t>tone steering</a:t>
             </a:r>
           </a:p>
         </p:txBody>
@@ -5214,8 +5214,8 @@
         </p:nvSpPr>
         <p:spPr>
           <a:xfrm>
-            <a:off x="7040880" y="3566160"/>
-            <a:ext cx="1463040" cy="310896"/>
+            <a:off x="6309359" y="3401568"/>
+            <a:ext cx="1645920" cy="310896"/>
           </a:xfrm>
           <a:prstGeom prst="rect">
             <a:avLst/>
@@ -5243,7 +5243,7 @@
                 </a:solidFill>
                 <a:latin typeface="Calibri"/>
               </a:rPr>
-              <a:t>0.0 %</a:t>
+              <a:t>3.4 %</a:t>
             </a:r>
           </a:p>
         </p:txBody>
@@ -5256,8 +5256,8 @@
         </p:nvSpPr>
         <p:spPr>
           <a:xfrm>
-            <a:off x="8686800" y="3566160"/>
-            <a:ext cx="1828800" cy="310896"/>
+            <a:off x="8138160" y="3401568"/>
+            <a:ext cx="2011680" cy="310896"/>
           </a:xfrm>
           <a:prstGeom prst="rect">
             <a:avLst/>
@@ -5285,7 +5285,7 @@
                 </a:solidFill>
                 <a:latin typeface="Calibri"/>
               </a:rPr>
-              <a:t>85.0 %</a:t>
+              <a:t>28.8 %</a:t>
             </a:r>
           </a:p>
         </p:txBody>
@@ -5298,8 +5298,8 @@
         </p:nvSpPr>
         <p:spPr>
           <a:xfrm>
-            <a:off x="10698480" y="3566160"/>
-            <a:ext cx="1097280" cy="310896"/>
+            <a:off x="10332720" y="3401568"/>
+            <a:ext cx="1280160" cy="310896"/>
           </a:xfrm>
           <a:prstGeom prst="rect">
             <a:avLst/>
@@ -5327,7 +5327,7 @@
                 </a:solidFill>
                 <a:latin typeface="Calibri"/>
               </a:rPr>
-              <a:t>9 of 10</a:t>
+              <a:t>10 of 10</a:t>
             </a:r>
           </a:p>
         </p:txBody>
@@ -5340,36 +5340,93 @@
         </p:nvSpPr>
         <p:spPr>
           <a:xfrm>
-            <a:off x="731520" y="4041648"/>
-            <a:ext cx="3931920" cy="310896"/>
-          </a:xfrm>
-          <a:prstGeom prst="rect">
-            <a:avLst/>
-          </a:prstGeom>
-          <a:noFill/>
-        </p:spPr>
-        <p:txBody>
-          <a:bodyPr wrap="square" lIns="0" rIns="0" tIns="0" bIns="0" anchor="t">
-            <a:spAutoFit/>
-          </a:bodyPr>
-          <a:lstStyle/>
-          <a:p>
-            <a:pPr algn="l">
-              <a:lnSpc>
-                <a:spcPct val="106000"/>
-              </a:lnSpc>
-              <a:spcAft>
-                <a:spcPts val="0"/>
-              </a:spcAft>
-            </a:pPr>
-            <a:r>
-              <a:rPr sz="1350" b="0" i="0">
+            <a:off x="731520" y="4114800"/>
+            <a:ext cx="10725912" cy="2286000"/>
+          </a:xfrm>
+          <a:prstGeom prst="rect">
+            <a:avLst/>
+          </a:prstGeom>
+          <a:noFill/>
+        </p:spPr>
+        <p:txBody>
+          <a:bodyPr wrap="square" lIns="0" rIns="0" tIns="0" bIns="0" anchor="t">
+            <a:spAutoFit/>
+          </a:bodyPr>
+          <a:lstStyle/>
+          <a:p>
+            <a:pPr algn="l">
+              <a:lnSpc>
+                <a:spcPct val="110000"/>
+              </a:lnSpc>
+              <a:spcAft>
+                <a:spcPts val="1100"/>
+              </a:spcAft>
+            </a:pPr>
+            <a:r>
+              <a:rPr sz="1500" b="1" i="0">
+                <a:solidFill>
+                  <a:srgbClr val="111111"/>
+                </a:solidFill>
+                <a:latin typeface="Calibri"/>
+              </a:rPr>
+              <a:t>With no defense the attack stays at or near zero. It only works once the defense is switched on.</a:t>
+            </a:r>
+          </a:p>
+          <a:p>
+            <a:pPr>
+              <a:lnSpc>
+                <a:spcPct val="110000"/>
+              </a:lnSpc>
+              <a:spcAft>
+                <a:spcPts val="1100"/>
+              </a:spcAft>
+            </a:pPr>
+            <a:r>
+              <a:rPr sz="1500" b="0" i="0">
                 <a:solidFill>
                   <a:srgbClr val="444444"/>
                 </a:solidFill>
                 <a:latin typeface="Calibri"/>
               </a:rPr>
-              <a:t>RobustRAG, on Mistral</a:t>
+              <a:t>One poisoned passage out of ten is enough. The undefended model ignores it completely.</a:t>
+            </a:r>
+          </a:p>
+          <a:p>
+            <a:pPr>
+              <a:lnSpc>
+                <a:spcPct val="110000"/>
+              </a:lnSpc>
+              <a:spcAft>
+                <a:spcPts val="1100"/>
+              </a:spcAft>
+            </a:pPr>
+            <a:r>
+              <a:rPr sz="1500" b="0" i="0">
+                <a:solidFill>
+                  <a:srgbClr val="444444"/>
+                </a:solidFill>
+                <a:latin typeface="Calibri"/>
+              </a:rPr>
+              <a:t>The reason is uncomfortable. Tone steering does not change the answer, so a defense that pushes the model to follow the retrieved text follows the slant as well, and scores itself as working perfectly. The attack and the defense want the same thing.</a:t>
+            </a:r>
+          </a:p>
+          <a:p>
+            <a:pPr>
+              <a:lnSpc>
+                <a:spcPct val="110000"/>
+              </a:lnSpc>
+              <a:spcAft>
+                <a:spcPts val="1100"/>
+              </a:spcAft>
+            </a:pPr>
+            <a:r>
+              <a:rPr sz="1500" b="1" i="0">
+                <a:solidFill>
+                  <a:srgbClr val="111111"/>
+                </a:solidFill>
+                <a:latin typeface="Calibri"/>
+              </a:rPr>
+              <a:t>A defense can be the reason an attack succeeds. That is a security finding, not a performance note.</a:t>
             </a:r>
           </a:p>
         </p:txBody>
@@ -5377,254 +5434,6 @@
       <p:sp>
         <p:nvSpPr>
           <p:cNvPr id="26" name="TextBox 25"/>
-          <p:cNvSpPr txBox="1"/>
-          <p:nvPr/>
-        </p:nvSpPr>
-        <p:spPr>
-          <a:xfrm>
-            <a:off x="4754880" y="4041648"/>
-            <a:ext cx="2103120" cy="310896"/>
-          </a:xfrm>
-          <a:prstGeom prst="rect">
-            <a:avLst/>
-          </a:prstGeom>
-          <a:noFill/>
-        </p:spPr>
-        <p:txBody>
-          <a:bodyPr wrap="square" lIns="0" rIns="0" tIns="0" bIns="0" anchor="t">
-            <a:spAutoFit/>
-          </a:bodyPr>
-          <a:lstStyle/>
-          <a:p>
-            <a:pPr algn="l">
-              <a:lnSpc>
-                <a:spcPct val="106000"/>
-              </a:lnSpc>
-              <a:spcAft>
-                <a:spcPts val="0"/>
-              </a:spcAft>
-            </a:pPr>
-            <a:r>
-              <a:rPr sz="1350" b="0" i="0">
-                <a:solidFill>
-                  <a:srgbClr val="444444"/>
-                </a:solidFill>
-                <a:latin typeface="Calibri"/>
-              </a:rPr>
-              <a:t>refusal</a:t>
-            </a:r>
-          </a:p>
-        </p:txBody>
-      </p:sp>
-      <p:sp>
-        <p:nvSpPr>
-          <p:cNvPr id="27" name="TextBox 26"/>
-          <p:cNvSpPr txBox="1"/>
-          <p:nvPr/>
-        </p:nvSpPr>
-        <p:spPr>
-          <a:xfrm>
-            <a:off x="7040880" y="4041648"/>
-            <a:ext cx="1463040" cy="310896"/>
-          </a:xfrm>
-          <a:prstGeom prst="rect">
-            <a:avLst/>
-          </a:prstGeom>
-          <a:noFill/>
-        </p:spPr>
-        <p:txBody>
-          <a:bodyPr wrap="square" lIns="0" rIns="0" tIns="0" bIns="0" anchor="t">
-            <a:spAutoFit/>
-          </a:bodyPr>
-          <a:lstStyle/>
-          <a:p>
-            <a:pPr algn="l">
-              <a:lnSpc>
-                <a:spcPct val="106000"/>
-              </a:lnSpc>
-              <a:spcAft>
-                <a:spcPts val="0"/>
-              </a:spcAft>
-            </a:pPr>
-            <a:r>
-              <a:rPr sz="1350" b="0" i="0">
-                <a:solidFill>
-                  <a:srgbClr val="444444"/>
-                </a:solidFill>
-                <a:latin typeface="Calibri"/>
-              </a:rPr>
-              <a:t>0.0 %</a:t>
-            </a:r>
-          </a:p>
-        </p:txBody>
-      </p:sp>
-      <p:sp>
-        <p:nvSpPr>
-          <p:cNvPr id="28" name="TextBox 27"/>
-          <p:cNvSpPr txBox="1"/>
-          <p:nvPr/>
-        </p:nvSpPr>
-        <p:spPr>
-          <a:xfrm>
-            <a:off x="8686800" y="4041648"/>
-            <a:ext cx="1828800" cy="310896"/>
-          </a:xfrm>
-          <a:prstGeom prst="rect">
-            <a:avLst/>
-          </a:prstGeom>
-          <a:noFill/>
-        </p:spPr>
-        <p:txBody>
-          <a:bodyPr wrap="square" lIns="0" rIns="0" tIns="0" bIns="0" anchor="t">
-            <a:spAutoFit/>
-          </a:bodyPr>
-          <a:lstStyle/>
-          <a:p>
-            <a:pPr algn="l">
-              <a:lnSpc>
-                <a:spcPct val="106000"/>
-              </a:lnSpc>
-              <a:spcAft>
-                <a:spcPts val="0"/>
-              </a:spcAft>
-            </a:pPr>
-            <a:r>
-              <a:rPr sz="1350" b="1" i="0">
-                <a:solidFill>
-                  <a:srgbClr val="111111"/>
-                </a:solidFill>
-                <a:latin typeface="Calibri"/>
-              </a:rPr>
-              <a:t>5.7 %</a:t>
-            </a:r>
-          </a:p>
-        </p:txBody>
-      </p:sp>
-      <p:sp>
-        <p:nvSpPr>
-          <p:cNvPr id="29" name="TextBox 28"/>
-          <p:cNvSpPr txBox="1"/>
-          <p:nvPr/>
-        </p:nvSpPr>
-        <p:spPr>
-          <a:xfrm>
-            <a:off x="10698480" y="4041648"/>
-            <a:ext cx="1097280" cy="310896"/>
-          </a:xfrm>
-          <a:prstGeom prst="rect">
-            <a:avLst/>
-          </a:prstGeom>
-          <a:noFill/>
-        </p:spPr>
-        <p:txBody>
-          <a:bodyPr wrap="square" lIns="0" rIns="0" tIns="0" bIns="0" anchor="t">
-            <a:spAutoFit/>
-          </a:bodyPr>
-          <a:lstStyle/>
-          <a:p>
-            <a:pPr algn="l">
-              <a:lnSpc>
-                <a:spcPct val="106000"/>
-              </a:lnSpc>
-              <a:spcAft>
-                <a:spcPts val="0"/>
-              </a:spcAft>
-            </a:pPr>
-            <a:r>
-              <a:rPr sz="1350" b="0" i="0">
-                <a:solidFill>
-                  <a:srgbClr val="444444"/>
-                </a:solidFill>
-                <a:latin typeface="Calibri"/>
-              </a:rPr>
-              <a:t>9 of 10</a:t>
-            </a:r>
-          </a:p>
-        </p:txBody>
-      </p:sp>
-      <p:sp>
-        <p:nvSpPr>
-          <p:cNvPr id="30" name="TextBox 29"/>
-          <p:cNvSpPr txBox="1"/>
-          <p:nvPr/>
-        </p:nvSpPr>
-        <p:spPr>
-          <a:xfrm>
-            <a:off x="731520" y="4709160"/>
-            <a:ext cx="10725912" cy="1691639"/>
-          </a:xfrm>
-          <a:prstGeom prst="rect">
-            <a:avLst/>
-          </a:prstGeom>
-          <a:noFill/>
-        </p:spPr>
-        <p:txBody>
-          <a:bodyPr wrap="square" lIns="0" rIns="0" tIns="0" bIns="0" anchor="t">
-            <a:spAutoFit/>
-          </a:bodyPr>
-          <a:lstStyle/>
-          <a:p>
-            <a:pPr algn="l">
-              <a:lnSpc>
-                <a:spcPct val="110000"/>
-              </a:lnSpc>
-              <a:spcAft>
-                <a:spcPts val="1100"/>
-              </a:spcAft>
-            </a:pPr>
-            <a:r>
-              <a:rPr sz="1500" b="1" i="0">
-                <a:solidFill>
-                  <a:srgbClr val="111111"/>
-                </a:solidFill>
-                <a:latin typeface="Calibri"/>
-              </a:rPr>
-              <a:t>With no defense the attack stays at or near zero. It only works once the defense is switched on.</a:t>
-            </a:r>
-          </a:p>
-          <a:p>
-            <a:pPr>
-              <a:lnSpc>
-                <a:spcPct val="110000"/>
-              </a:lnSpc>
-              <a:spcAft>
-                <a:spcPts val="1100"/>
-              </a:spcAft>
-            </a:pPr>
-            <a:r>
-              <a:rPr sz="1500" b="0" i="0">
-                <a:solidFill>
-                  <a:srgbClr val="444444"/>
-                </a:solidFill>
-                <a:latin typeface="Calibri"/>
-              </a:rPr>
-              <a:t>Tone steering does not change the answer, so a defense that pushes the model to follow the retrieved text follows the slant as well, and scores itself as working.</a:t>
-            </a:r>
-          </a:p>
-          <a:p>
-            <a:pPr>
-              <a:lnSpc>
-                <a:spcPct val="110000"/>
-              </a:lnSpc>
-              <a:spcAft>
-                <a:spcPts val="1100"/>
-              </a:spcAft>
-            </a:pPr>
-            <a:r>
-              <a:rPr sz="1500" b="1" i="0">
-                <a:solidFill>
-                  <a:srgbClr val="111111"/>
-                </a:solidFill>
-                <a:latin typeface="Calibri"/>
-              </a:rPr>
-              <a:t>The last two rows are the same defense and the same attack on two models. It protects on one and does harm on the other. The model is part of the threat model.</a:t>
-            </a:r>
-          </a:p>
-        </p:txBody>
-      </p:sp>
-      <p:sp>
-        <p:nvSpPr>
-          <p:cNvPr id="31" name="TextBox 30"/>
           <p:cNvSpPr txBox="1"/>
           <p:nvPr/>
         </p:nvSpPr>
@@ -5659,7 +5468,7 @@
                 </a:solidFill>
                 <a:latin typeface="Calibri"/>
               </a:rPr>
-              <a:t>BadRAG Xue et al., 2024, arXiv:2406.00083   ·   RobustRAG Xiang et al., 2024, arXiv:2405.15556   ·   Measurements: this work</a:t>
+              <a:t>BadRAG Xue et al., 2024   ·   ParamMute Huang et al., NeurIPS 2025   ·   Measurements: this work</a:t>
             </a:r>
           </a:p>
         </p:txBody>
@@ -5761,7 +5570,7 @@
                 </a:solidFill>
                 <a:latin typeface="Cambria"/>
               </a:rPr>
-              <a:t>Two versions of one defense give opposite answers</a:t>
+              <a:t>One defense, two models, opposite results</a:t>
             </a:r>
           </a:p>
         </p:txBody>
@@ -5816,7 +5625,7 @@
         </p:nvSpPr>
         <p:spPr>
           <a:xfrm>
-            <a:off x="731520" y="2240280"/>
+            <a:off x="731520" y="1828800"/>
             <a:ext cx="10725912" cy="365760"/>
           </a:xfrm>
           <a:prstGeom prst="rect">
@@ -5845,7 +5654,7 @@
                 </a:solidFill>
                 <a:latin typeface="Calibri"/>
               </a:rPr>
-              <a:t>Both ship in the same paper. They isolate the same way. They differ only in how they join the answers.</a:t>
+              <a:t>One defense family, two versions of it, two models. Nine poisoned passages of ten. The number is how often the agent refuses to answer.</a:t>
             </a:r>
           </a:p>
         </p:txBody>
@@ -5858,7 +5667,7 @@
         </p:nvSpPr>
         <p:spPr>
           <a:xfrm>
-            <a:off x="731520" y="2697480"/>
+            <a:off x="731520" y="2395728"/>
             <a:ext cx="3291840" cy="274320"/>
           </a:xfrm>
           <a:prstGeom prst="rect">
@@ -5881,13 +5690,13 @@
               </a:spcAft>
             </a:pPr>
             <a:r>
-              <a:rPr sz="1200" b="1" i="0">
+              <a:rPr sz="1150" b="1" i="0">
                 <a:solidFill>
                   <a:srgbClr val="777777"/>
                 </a:solidFill>
                 <a:latin typeface="Calibri"/>
               </a:rPr>
-              <a:t>Poisoned passages of 10</a:t>
+              <a:t>Model</a:t>
             </a:r>
           </a:p>
         </p:txBody>
@@ -5900,36 +5709,36 @@
         </p:nvSpPr>
         <p:spPr>
           <a:xfrm>
-            <a:off x="4297680" y="2697480"/>
-            <a:ext cx="914400" cy="274320"/>
-          </a:xfrm>
-          <a:prstGeom prst="rect">
-            <a:avLst/>
-          </a:prstGeom>
-          <a:noFill/>
-        </p:spPr>
-        <p:txBody>
-          <a:bodyPr wrap="square" lIns="0" rIns="0" tIns="0" bIns="0" anchor="t">
-            <a:spAutoFit/>
-          </a:bodyPr>
-          <a:lstStyle/>
-          <a:p>
-            <a:pPr algn="ctr">
-              <a:lnSpc>
-                <a:spcPct val="106000"/>
-              </a:lnSpc>
-              <a:spcAft>
-                <a:spcPts val="0"/>
-              </a:spcAft>
-            </a:pPr>
-            <a:r>
-              <a:rPr sz="1200" b="1" i="0">
+            <a:off x="4114800" y="2395728"/>
+            <a:ext cx="3108960" cy="274320"/>
+          </a:xfrm>
+          <a:prstGeom prst="rect">
+            <a:avLst/>
+          </a:prstGeom>
+          <a:noFill/>
+        </p:spPr>
+        <p:txBody>
+          <a:bodyPr wrap="square" lIns="0" rIns="0" tIns="0" bIns="0" anchor="t">
+            <a:spAutoFit/>
+          </a:bodyPr>
+          <a:lstStyle/>
+          <a:p>
+            <a:pPr algn="l">
+              <a:lnSpc>
+                <a:spcPct val="106000"/>
+              </a:lnSpc>
+              <a:spcAft>
+                <a:spcPts val="0"/>
+              </a:spcAft>
+            </a:pPr>
+            <a:r>
+              <a:rPr sz="1150" b="1" i="0">
                 <a:solidFill>
                   <a:srgbClr val="777777"/>
                 </a:solidFill>
                 <a:latin typeface="Calibri"/>
               </a:rPr>
-              <a:t>1</a:t>
+              <a:t>Version of the defense</a:t>
             </a:r>
           </a:p>
         </p:txBody>
@@ -5942,36 +5751,36 @@
         </p:nvSpPr>
         <p:spPr>
           <a:xfrm>
-            <a:off x="5330952" y="2697480"/>
-            <a:ext cx="914400" cy="274320"/>
-          </a:xfrm>
-          <a:prstGeom prst="rect">
-            <a:avLst/>
-          </a:prstGeom>
-          <a:noFill/>
-        </p:spPr>
-        <p:txBody>
-          <a:bodyPr wrap="square" lIns="0" rIns="0" tIns="0" bIns="0" anchor="t">
-            <a:spAutoFit/>
-          </a:bodyPr>
-          <a:lstStyle/>
-          <a:p>
-            <a:pPr algn="ctr">
-              <a:lnSpc>
-                <a:spcPct val="106000"/>
-              </a:lnSpc>
-              <a:spcAft>
-                <a:spcPts val="0"/>
-              </a:spcAft>
-            </a:pPr>
-            <a:r>
-              <a:rPr sz="1200" b="1" i="0">
+            <a:off x="7406640" y="2395728"/>
+            <a:ext cx="1828800" cy="274320"/>
+          </a:xfrm>
+          <a:prstGeom prst="rect">
+            <a:avLst/>
+          </a:prstGeom>
+          <a:noFill/>
+        </p:spPr>
+        <p:txBody>
+          <a:bodyPr wrap="square" lIns="0" rIns="0" tIns="0" bIns="0" anchor="t">
+            <a:spAutoFit/>
+          </a:bodyPr>
+          <a:lstStyle/>
+          <a:p>
+            <a:pPr algn="l">
+              <a:lnSpc>
+                <a:spcPct val="106000"/>
+              </a:lnSpc>
+              <a:spcAft>
+                <a:spcPts val="0"/>
+              </a:spcAft>
+            </a:pPr>
+            <a:r>
+              <a:rPr sz="1150" b="1" i="0">
                 <a:solidFill>
                   <a:srgbClr val="777777"/>
                 </a:solidFill>
                 <a:latin typeface="Calibri"/>
               </a:rPr>
-              <a:t>5</a:t>
+              <a:t>No defense</a:t>
             </a:r>
           </a:p>
         </p:txBody>
@@ -5984,36 +5793,36 @@
         </p:nvSpPr>
         <p:spPr>
           <a:xfrm>
-            <a:off x="6364224" y="2697480"/>
-            <a:ext cx="914400" cy="274320"/>
-          </a:xfrm>
-          <a:prstGeom prst="rect">
-            <a:avLst/>
-          </a:prstGeom>
-          <a:noFill/>
-        </p:spPr>
-        <p:txBody>
-          <a:bodyPr wrap="square" lIns="0" rIns="0" tIns="0" bIns="0" anchor="t">
-            <a:spAutoFit/>
-          </a:bodyPr>
-          <a:lstStyle/>
-          <a:p>
-            <a:pPr algn="ctr">
-              <a:lnSpc>
-                <a:spcPct val="106000"/>
-              </a:lnSpc>
-              <a:spcAft>
-                <a:spcPts val="0"/>
-              </a:spcAft>
-            </a:pPr>
-            <a:r>
-              <a:rPr sz="1200" b="1" i="0">
+            <a:off x="9418320" y="2395728"/>
+            <a:ext cx="2103120" cy="274320"/>
+          </a:xfrm>
+          <a:prstGeom prst="rect">
+            <a:avLst/>
+          </a:prstGeom>
+          <a:noFill/>
+        </p:spPr>
+        <p:txBody>
+          <a:bodyPr wrap="square" lIns="0" rIns="0" tIns="0" bIns="0" anchor="t">
+            <a:spAutoFit/>
+          </a:bodyPr>
+          <a:lstStyle/>
+          <a:p>
+            <a:pPr algn="l">
+              <a:lnSpc>
+                <a:spcPct val="106000"/>
+              </a:lnSpc>
+              <a:spcAft>
+                <a:spcPts val="0"/>
+              </a:spcAft>
+            </a:pPr>
+            <a:r>
+              <a:rPr sz="1150" b="1" i="0">
                 <a:solidFill>
                   <a:srgbClr val="777777"/>
                 </a:solidFill>
                 <a:latin typeface="Calibri"/>
               </a:rPr>
-              <a:t>6</a:t>
+              <a:t>With the defense</a:t>
             </a:r>
           </a:p>
         </p:txBody>
@@ -6026,36 +5835,36 @@
         </p:nvSpPr>
         <p:spPr>
           <a:xfrm>
-            <a:off x="7397496" y="2697480"/>
-            <a:ext cx="914400" cy="274320"/>
-          </a:xfrm>
-          <a:prstGeom prst="rect">
-            <a:avLst/>
-          </a:prstGeom>
-          <a:noFill/>
-        </p:spPr>
-        <p:txBody>
-          <a:bodyPr wrap="square" lIns="0" rIns="0" tIns="0" bIns="0" anchor="t">
-            <a:spAutoFit/>
-          </a:bodyPr>
-          <a:lstStyle/>
-          <a:p>
-            <a:pPr algn="ctr">
-              <a:lnSpc>
-                <a:spcPct val="106000"/>
-              </a:lnSpc>
-              <a:spcAft>
-                <a:spcPts val="0"/>
-              </a:spcAft>
-            </a:pPr>
-            <a:r>
-              <a:rPr sz="1200" b="1" i="0">
-                <a:solidFill>
-                  <a:srgbClr val="777777"/>
-                </a:solidFill>
-                <a:latin typeface="Calibri"/>
-              </a:rPr>
-              <a:t>7</a:t>
+            <a:off x="731520" y="2743200"/>
+            <a:ext cx="3291840" cy="310896"/>
+          </a:xfrm>
+          <a:prstGeom prst="rect">
+            <a:avLst/>
+          </a:prstGeom>
+          <a:noFill/>
+        </p:spPr>
+        <p:txBody>
+          <a:bodyPr wrap="square" lIns="0" rIns="0" tIns="0" bIns="0" anchor="t">
+            <a:spAutoFit/>
+          </a:bodyPr>
+          <a:lstStyle/>
+          <a:p>
+            <a:pPr algn="l">
+              <a:lnSpc>
+                <a:spcPct val="106000"/>
+              </a:lnSpc>
+              <a:spcAft>
+                <a:spcPts val="0"/>
+              </a:spcAft>
+            </a:pPr>
+            <a:r>
+              <a:rPr sz="1350" b="0" i="0">
+                <a:solidFill>
+                  <a:srgbClr val="444444"/>
+                </a:solidFill>
+                <a:latin typeface="Calibri"/>
+              </a:rPr>
+              <a:t>Mistral-7B</a:t>
             </a:r>
           </a:p>
         </p:txBody>
@@ -6068,36 +5877,36 @@
         </p:nvSpPr>
         <p:spPr>
           <a:xfrm>
-            <a:off x="8430767" y="2697480"/>
-            <a:ext cx="914400" cy="274320"/>
-          </a:xfrm>
-          <a:prstGeom prst="rect">
-            <a:avLst/>
-          </a:prstGeom>
-          <a:noFill/>
-        </p:spPr>
-        <p:txBody>
-          <a:bodyPr wrap="square" lIns="0" rIns="0" tIns="0" bIns="0" anchor="t">
-            <a:spAutoFit/>
-          </a:bodyPr>
-          <a:lstStyle/>
-          <a:p>
-            <a:pPr algn="ctr">
-              <a:lnSpc>
-                <a:spcPct val="106000"/>
-              </a:lnSpc>
-              <a:spcAft>
-                <a:spcPts val="0"/>
-              </a:spcAft>
-            </a:pPr>
-            <a:r>
-              <a:rPr sz="1200" b="1" i="0">
-                <a:solidFill>
-                  <a:srgbClr val="777777"/>
-                </a:solidFill>
-                <a:latin typeface="Calibri"/>
-              </a:rPr>
-              <a:t>8</a:t>
+            <a:off x="4114800" y="2743200"/>
+            <a:ext cx="3108960" cy="310896"/>
+          </a:xfrm>
+          <a:prstGeom prst="rect">
+            <a:avLst/>
+          </a:prstGeom>
+          <a:noFill/>
+        </p:spPr>
+        <p:txBody>
+          <a:bodyPr wrap="square" lIns="0" rIns="0" tIns="0" bIns="0" anchor="t">
+            <a:spAutoFit/>
+          </a:bodyPr>
+          <a:lstStyle/>
+          <a:p>
+            <a:pPr algn="l">
+              <a:lnSpc>
+                <a:spcPct val="106000"/>
+              </a:lnSpc>
+              <a:spcAft>
+                <a:spcPts val="0"/>
+              </a:spcAft>
+            </a:pPr>
+            <a:r>
+              <a:rPr sz="1350" b="0" i="0">
+                <a:solidFill>
+                  <a:srgbClr val="444444"/>
+                </a:solidFill>
+                <a:latin typeface="Calibri"/>
+              </a:rPr>
+              <a:t>KeywordAgg</a:t>
             </a:r>
           </a:p>
         </p:txBody>
@@ -6110,36 +5919,36 @@
         </p:nvSpPr>
         <p:spPr>
           <a:xfrm>
-            <a:off x="9464040" y="2697480"/>
-            <a:ext cx="914400" cy="274320"/>
-          </a:xfrm>
-          <a:prstGeom prst="rect">
-            <a:avLst/>
-          </a:prstGeom>
-          <a:noFill/>
-        </p:spPr>
-        <p:txBody>
-          <a:bodyPr wrap="square" lIns="0" rIns="0" tIns="0" bIns="0" anchor="t">
-            <a:spAutoFit/>
-          </a:bodyPr>
-          <a:lstStyle/>
-          <a:p>
-            <a:pPr algn="ctr">
-              <a:lnSpc>
-                <a:spcPct val="106000"/>
-              </a:lnSpc>
-              <a:spcAft>
-                <a:spcPts val="0"/>
-              </a:spcAft>
-            </a:pPr>
-            <a:r>
-              <a:rPr sz="1200" b="1" i="0">
-                <a:solidFill>
-                  <a:srgbClr val="777777"/>
-                </a:solidFill>
-                <a:latin typeface="Calibri"/>
-              </a:rPr>
-              <a:t>9</a:t>
+            <a:off x="7406640" y="2743200"/>
+            <a:ext cx="1828800" cy="310896"/>
+          </a:xfrm>
+          <a:prstGeom prst="rect">
+            <a:avLst/>
+          </a:prstGeom>
+          <a:noFill/>
+        </p:spPr>
+        <p:txBody>
+          <a:bodyPr wrap="square" lIns="0" rIns="0" tIns="0" bIns="0" anchor="t">
+            <a:spAutoFit/>
+          </a:bodyPr>
+          <a:lstStyle/>
+          <a:p>
+            <a:pPr algn="l">
+              <a:lnSpc>
+                <a:spcPct val="106000"/>
+              </a:lnSpc>
+              <a:spcAft>
+                <a:spcPts val="0"/>
+              </a:spcAft>
+            </a:pPr>
+            <a:r>
+              <a:rPr sz="1350" b="0" i="0">
+                <a:solidFill>
+                  <a:srgbClr val="444444"/>
+                </a:solidFill>
+                <a:latin typeface="Calibri"/>
+              </a:rPr>
+              <a:t>0.0 %</a:t>
             </a:r>
           </a:p>
         </p:txBody>
@@ -6152,36 +5961,36 @@
         </p:nvSpPr>
         <p:spPr>
           <a:xfrm>
-            <a:off x="10497312" y="2697480"/>
-            <a:ext cx="914400" cy="274320"/>
-          </a:xfrm>
-          <a:prstGeom prst="rect">
-            <a:avLst/>
-          </a:prstGeom>
-          <a:noFill/>
-        </p:spPr>
-        <p:txBody>
-          <a:bodyPr wrap="square" lIns="0" rIns="0" tIns="0" bIns="0" anchor="t">
-            <a:spAutoFit/>
-          </a:bodyPr>
-          <a:lstStyle/>
-          <a:p>
-            <a:pPr algn="ctr">
-              <a:lnSpc>
-                <a:spcPct val="106000"/>
-              </a:lnSpc>
-              <a:spcAft>
-                <a:spcPts val="0"/>
-              </a:spcAft>
-            </a:pPr>
-            <a:r>
-              <a:rPr sz="1200" b="1" i="0">
-                <a:solidFill>
-                  <a:srgbClr val="777777"/>
-                </a:solidFill>
-                <a:latin typeface="Calibri"/>
-              </a:rPr>
-              <a:t>10</a:t>
+            <a:off x="9418320" y="2743200"/>
+            <a:ext cx="2103120" cy="310896"/>
+          </a:xfrm>
+          <a:prstGeom prst="rect">
+            <a:avLst/>
+          </a:prstGeom>
+          <a:noFill/>
+        </p:spPr>
+        <p:txBody>
+          <a:bodyPr wrap="square" lIns="0" rIns="0" tIns="0" bIns="0" anchor="t">
+            <a:spAutoFit/>
+          </a:bodyPr>
+          <a:lstStyle/>
+          <a:p>
+            <a:pPr algn="l">
+              <a:lnSpc>
+                <a:spcPct val="106000"/>
+              </a:lnSpc>
+              <a:spcAft>
+                <a:spcPts val="0"/>
+              </a:spcAft>
+            </a:pPr>
+            <a:r>
+              <a:rPr sz="1350" b="1" i="0">
+                <a:solidFill>
+                  <a:srgbClr val="111111"/>
+                </a:solidFill>
+                <a:latin typeface="Calibri"/>
+              </a:rPr>
+              <a:t>5.7 %</a:t>
             </a:r>
           </a:p>
         </p:txBody>
@@ -6194,8 +6003,8 @@
         </p:nvSpPr>
         <p:spPr>
           <a:xfrm>
-            <a:off x="731520" y="3090672"/>
-            <a:ext cx="3291840" cy="292608"/>
+            <a:off x="731520" y="3200400"/>
+            <a:ext cx="3291840" cy="310896"/>
           </a:xfrm>
           <a:prstGeom prst="rect">
             <a:avLst/>
@@ -6223,7 +6032,7 @@
                 </a:solidFill>
                 <a:latin typeface="Calibri"/>
               </a:rPr>
-              <a:t>Keyword filter</a:t>
+              <a:t>Mistral-7B</a:t>
             </a:r>
           </a:p>
         </p:txBody>
@@ -6236,21 +6045,21 @@
         </p:nvSpPr>
         <p:spPr>
           <a:xfrm>
-            <a:off x="4297680" y="3090672"/>
-            <a:ext cx="914400" cy="292608"/>
-          </a:xfrm>
-          <a:prstGeom prst="rect">
-            <a:avLst/>
-          </a:prstGeom>
-          <a:noFill/>
-        </p:spPr>
-        <p:txBody>
-          <a:bodyPr wrap="square" lIns="0" rIns="0" tIns="0" bIns="0" anchor="t">
-            <a:spAutoFit/>
-          </a:bodyPr>
-          <a:lstStyle/>
-          <a:p>
-            <a:pPr algn="ctr">
+            <a:off x="4114800" y="3200400"/>
+            <a:ext cx="3108960" cy="310896"/>
+          </a:xfrm>
+          <a:prstGeom prst="rect">
+            <a:avLst/>
+          </a:prstGeom>
+          <a:noFill/>
+        </p:spPr>
+        <p:txBody>
+          <a:bodyPr wrap="square" lIns="0" rIns="0" tIns="0" bIns="0" anchor="t">
+            <a:spAutoFit/>
+          </a:bodyPr>
+          <a:lstStyle/>
+          <a:p>
+            <a:pPr algn="l">
               <a:lnSpc>
                 <a:spcPct val="106000"/>
               </a:lnSpc>
@@ -6265,7 +6074,7 @@
                 </a:solidFill>
                 <a:latin typeface="Calibri"/>
               </a:rPr>
-              <a:t>+7.3</a:t>
+              <a:t>DecodingAgg</a:t>
             </a:r>
           </a:p>
         </p:txBody>
@@ -6278,21 +6087,21 @@
         </p:nvSpPr>
         <p:spPr>
           <a:xfrm>
-            <a:off x="5330952" y="3090672"/>
-            <a:ext cx="914400" cy="292608"/>
-          </a:xfrm>
-          <a:prstGeom prst="rect">
-            <a:avLst/>
-          </a:prstGeom>
-          <a:noFill/>
-        </p:spPr>
-        <p:txBody>
-          <a:bodyPr wrap="square" lIns="0" rIns="0" tIns="0" bIns="0" anchor="t">
-            <a:spAutoFit/>
-          </a:bodyPr>
-          <a:lstStyle/>
-          <a:p>
-            <a:pPr algn="ctr">
+            <a:off x="7406640" y="3200400"/>
+            <a:ext cx="1828800" cy="310896"/>
+          </a:xfrm>
+          <a:prstGeom prst="rect">
+            <a:avLst/>
+          </a:prstGeom>
+          <a:noFill/>
+        </p:spPr>
+        <p:txBody>
+          <a:bodyPr wrap="square" lIns="0" rIns="0" tIns="0" bIns="0" anchor="t">
+            <a:spAutoFit/>
+          </a:bodyPr>
+          <a:lstStyle/>
+          <a:p>
+            <a:pPr algn="l">
               <a:lnSpc>
                 <a:spcPct val="106000"/>
               </a:lnSpc>
@@ -6307,7 +6116,7 @@
                 </a:solidFill>
                 <a:latin typeface="Calibri"/>
               </a:rPr>
-              <a:t>+4.0</a:t>
+              <a:t>0.0 %</a:t>
             </a:r>
           </a:p>
         </p:txBody>
@@ -6320,21 +6129,63 @@
         </p:nvSpPr>
         <p:spPr>
           <a:xfrm>
-            <a:off x="6364224" y="3090672"/>
-            <a:ext cx="914400" cy="292608"/>
-          </a:xfrm>
-          <a:prstGeom prst="rect">
-            <a:avLst/>
-          </a:prstGeom>
-          <a:noFill/>
-        </p:spPr>
-        <p:txBody>
-          <a:bodyPr wrap="square" lIns="0" rIns="0" tIns="0" bIns="0" anchor="t">
-            <a:spAutoFit/>
-          </a:bodyPr>
-          <a:lstStyle/>
-          <a:p>
-            <a:pPr algn="ctr">
+            <a:off x="9418320" y="3200400"/>
+            <a:ext cx="2103120" cy="310896"/>
+          </a:xfrm>
+          <a:prstGeom prst="rect">
+            <a:avLst/>
+          </a:prstGeom>
+          <a:noFill/>
+        </p:spPr>
+        <p:txBody>
+          <a:bodyPr wrap="square" lIns="0" rIns="0" tIns="0" bIns="0" anchor="t">
+            <a:spAutoFit/>
+          </a:bodyPr>
+          <a:lstStyle/>
+          <a:p>
+            <a:pPr algn="l">
+              <a:lnSpc>
+                <a:spcPct val="106000"/>
+              </a:lnSpc>
+              <a:spcAft>
+                <a:spcPts val="0"/>
+              </a:spcAft>
+            </a:pPr>
+            <a:r>
+              <a:rPr sz="1350" b="1" i="0">
+                <a:solidFill>
+                  <a:srgbClr val="111111"/>
+                </a:solidFill>
+                <a:latin typeface="Calibri"/>
+              </a:rPr>
+              <a:t>3.7 %</a:t>
+            </a:r>
+          </a:p>
+        </p:txBody>
+      </p:sp>
+      <p:sp>
+        <p:nvSpPr>
+          <p:cNvPr id="18" name="TextBox 17"/>
+          <p:cNvSpPr txBox="1"/>
+          <p:nvPr/>
+        </p:nvSpPr>
+        <p:spPr>
+          <a:xfrm>
+            <a:off x="731520" y="3657600"/>
+            <a:ext cx="3291840" cy="310896"/>
+          </a:xfrm>
+          <a:prstGeom prst="rect">
+            <a:avLst/>
+          </a:prstGeom>
+          <a:noFill/>
+        </p:spPr>
+        <p:txBody>
+          <a:bodyPr wrap="square" lIns="0" rIns="0" tIns="0" bIns="0" anchor="t">
+            <a:spAutoFit/>
+          </a:bodyPr>
+          <a:lstStyle/>
+          <a:p>
+            <a:pPr algn="l">
               <a:lnSpc>
                 <a:spcPct val="106000"/>
               </a:lnSpc>
@@ -6349,34 +6200,34 @@
                 </a:solidFill>
                 <a:latin typeface="Calibri"/>
               </a:rPr>
-              <a:t>+4.0</a:t>
-            </a:r>
-          </a:p>
-        </p:txBody>
-      </p:sp>
-      <p:sp>
-        <p:nvSpPr>
-          <p:cNvPr id="18" name="TextBox 17"/>
-          <p:cNvSpPr txBox="1"/>
-          <p:nvPr/>
-        </p:nvSpPr>
-        <p:spPr>
-          <a:xfrm>
-            <a:off x="7397496" y="3090672"/>
-            <a:ext cx="914400" cy="292608"/>
-          </a:xfrm>
-          <a:prstGeom prst="rect">
-            <a:avLst/>
-          </a:prstGeom>
-          <a:noFill/>
-        </p:spPr>
-        <p:txBody>
-          <a:bodyPr wrap="square" lIns="0" rIns="0" tIns="0" bIns="0" anchor="t">
-            <a:spAutoFit/>
-          </a:bodyPr>
-          <a:lstStyle/>
-          <a:p>
-            <a:pPr algn="ctr">
+              <a:t>Llama-3-8B</a:t>
+            </a:r>
+          </a:p>
+        </p:txBody>
+      </p:sp>
+      <p:sp>
+        <p:nvSpPr>
+          <p:cNvPr id="19" name="TextBox 18"/>
+          <p:cNvSpPr txBox="1"/>
+          <p:nvPr/>
+        </p:nvSpPr>
+        <p:spPr>
+          <a:xfrm>
+            <a:off x="4114800" y="3657600"/>
+            <a:ext cx="3108960" cy="310896"/>
+          </a:xfrm>
+          <a:prstGeom prst="rect">
+            <a:avLst/>
+          </a:prstGeom>
+          <a:noFill/>
+        </p:spPr>
+        <p:txBody>
+          <a:bodyPr wrap="square" lIns="0" rIns="0" tIns="0" bIns="0" anchor="t">
+            <a:spAutoFit/>
+          </a:bodyPr>
+          <a:lstStyle/>
+          <a:p>
+            <a:pPr algn="l">
               <a:lnSpc>
                 <a:spcPct val="106000"/>
               </a:lnSpc>
@@ -6391,34 +6242,34 @@
                 </a:solidFill>
                 <a:latin typeface="Calibri"/>
               </a:rPr>
-              <a:t>+5.7</a:t>
-            </a:r>
-          </a:p>
-        </p:txBody>
-      </p:sp>
-      <p:sp>
-        <p:nvSpPr>
-          <p:cNvPr id="19" name="TextBox 18"/>
-          <p:cNvSpPr txBox="1"/>
-          <p:nvPr/>
-        </p:nvSpPr>
-        <p:spPr>
-          <a:xfrm>
-            <a:off x="8430767" y="3090672"/>
-            <a:ext cx="914400" cy="292608"/>
-          </a:xfrm>
-          <a:prstGeom prst="rect">
-            <a:avLst/>
-          </a:prstGeom>
-          <a:noFill/>
-        </p:spPr>
-        <p:txBody>
-          <a:bodyPr wrap="square" lIns="0" rIns="0" tIns="0" bIns="0" anchor="t">
-            <a:spAutoFit/>
-          </a:bodyPr>
-          <a:lstStyle/>
-          <a:p>
-            <a:pPr algn="ctr">
+              <a:t>KeywordAgg</a:t>
+            </a:r>
+          </a:p>
+        </p:txBody>
+      </p:sp>
+      <p:sp>
+        <p:nvSpPr>
+          <p:cNvPr id="20" name="TextBox 19"/>
+          <p:cNvSpPr txBox="1"/>
+          <p:nvPr/>
+        </p:nvSpPr>
+        <p:spPr>
+          <a:xfrm>
+            <a:off x="7406640" y="3657600"/>
+            <a:ext cx="1828800" cy="310896"/>
+          </a:xfrm>
+          <a:prstGeom prst="rect">
+            <a:avLst/>
+          </a:prstGeom>
+          <a:noFill/>
+        </p:spPr>
+        <p:txBody>
+          <a:bodyPr wrap="square" lIns="0" rIns="0" tIns="0" bIns="0" anchor="t">
+            <a:spAutoFit/>
+          </a:bodyPr>
+          <a:lstStyle/>
+          <a:p>
+            <a:pPr algn="l">
               <a:lnSpc>
                 <a:spcPct val="106000"/>
               </a:lnSpc>
@@ -6433,34 +6284,76 @@
                 </a:solidFill>
                 <a:latin typeface="Calibri"/>
               </a:rPr>
-              <a:t>+6.7</a:t>
-            </a:r>
-          </a:p>
-        </p:txBody>
-      </p:sp>
-      <p:sp>
-        <p:nvSpPr>
-          <p:cNvPr id="20" name="TextBox 19"/>
-          <p:cNvSpPr txBox="1"/>
-          <p:nvPr/>
-        </p:nvSpPr>
-        <p:spPr>
-          <a:xfrm>
-            <a:off x="9464040" y="3090672"/>
-            <a:ext cx="914400" cy="292608"/>
-          </a:xfrm>
-          <a:prstGeom prst="rect">
-            <a:avLst/>
-          </a:prstGeom>
-          <a:noFill/>
-        </p:spPr>
-        <p:txBody>
-          <a:bodyPr wrap="square" lIns="0" rIns="0" tIns="0" bIns="0" anchor="t">
-            <a:spAutoFit/>
-          </a:bodyPr>
-          <a:lstStyle/>
-          <a:p>
-            <a:pPr algn="ctr">
+              <a:t>0.0 %</a:t>
+            </a:r>
+          </a:p>
+        </p:txBody>
+      </p:sp>
+      <p:sp>
+        <p:nvSpPr>
+          <p:cNvPr id="21" name="TextBox 20"/>
+          <p:cNvSpPr txBox="1"/>
+          <p:nvPr/>
+        </p:nvSpPr>
+        <p:spPr>
+          <a:xfrm>
+            <a:off x="9418320" y="3657600"/>
+            <a:ext cx="2103120" cy="310896"/>
+          </a:xfrm>
+          <a:prstGeom prst="rect">
+            <a:avLst/>
+          </a:prstGeom>
+          <a:noFill/>
+        </p:spPr>
+        <p:txBody>
+          <a:bodyPr wrap="square" lIns="0" rIns="0" tIns="0" bIns="0" anchor="t">
+            <a:spAutoFit/>
+          </a:bodyPr>
+          <a:lstStyle/>
+          <a:p>
+            <a:pPr algn="l">
+              <a:lnSpc>
+                <a:spcPct val="106000"/>
+              </a:lnSpc>
+              <a:spcAft>
+                <a:spcPts val="0"/>
+              </a:spcAft>
+            </a:pPr>
+            <a:r>
+              <a:rPr sz="1350" b="1" i="0">
+                <a:solidFill>
+                  <a:srgbClr val="111111"/>
+                </a:solidFill>
+                <a:latin typeface="Calibri"/>
+              </a:rPr>
+              <a:t>85.0 %</a:t>
+            </a:r>
+          </a:p>
+        </p:txBody>
+      </p:sp>
+      <p:sp>
+        <p:nvSpPr>
+          <p:cNvPr id="22" name="TextBox 21"/>
+          <p:cNvSpPr txBox="1"/>
+          <p:nvPr/>
+        </p:nvSpPr>
+        <p:spPr>
+          <a:xfrm>
+            <a:off x="731520" y="4114800"/>
+            <a:ext cx="3291840" cy="310896"/>
+          </a:xfrm>
+          <a:prstGeom prst="rect">
+            <a:avLst/>
+          </a:prstGeom>
+          <a:noFill/>
+        </p:spPr>
+        <p:txBody>
+          <a:bodyPr wrap="square" lIns="0" rIns="0" tIns="0" bIns="0" anchor="t">
+            <a:spAutoFit/>
+          </a:bodyPr>
+          <a:lstStyle/>
+          <a:p>
+            <a:pPr algn="l">
               <a:lnSpc>
                 <a:spcPct val="106000"/>
               </a:lnSpc>
@@ -6475,34 +6368,34 @@
                 </a:solidFill>
                 <a:latin typeface="Calibri"/>
               </a:rPr>
-              <a:t>+12.3</a:t>
-            </a:r>
-          </a:p>
-        </p:txBody>
-      </p:sp>
-      <p:sp>
-        <p:nvSpPr>
-          <p:cNvPr id="21" name="TextBox 20"/>
-          <p:cNvSpPr txBox="1"/>
-          <p:nvPr/>
-        </p:nvSpPr>
-        <p:spPr>
-          <a:xfrm>
-            <a:off x="10497312" y="3090672"/>
-            <a:ext cx="914400" cy="292608"/>
-          </a:xfrm>
-          <a:prstGeom prst="rect">
-            <a:avLst/>
-          </a:prstGeom>
-          <a:noFill/>
-        </p:spPr>
-        <p:txBody>
-          <a:bodyPr wrap="square" lIns="0" rIns="0" tIns="0" bIns="0" anchor="t">
-            <a:spAutoFit/>
-          </a:bodyPr>
-          <a:lstStyle/>
-          <a:p>
-            <a:pPr algn="ctr">
+              <a:t>Llama-3-8B</a:t>
+            </a:r>
+          </a:p>
+        </p:txBody>
+      </p:sp>
+      <p:sp>
+        <p:nvSpPr>
+          <p:cNvPr id="23" name="TextBox 22"/>
+          <p:cNvSpPr txBox="1"/>
+          <p:nvPr/>
+        </p:nvSpPr>
+        <p:spPr>
+          <a:xfrm>
+            <a:off x="4114800" y="4114800"/>
+            <a:ext cx="3108960" cy="310896"/>
+          </a:xfrm>
+          <a:prstGeom prst="rect">
+            <a:avLst/>
+          </a:prstGeom>
+          <a:noFill/>
+        </p:spPr>
+        <p:txBody>
+          <a:bodyPr wrap="square" lIns="0" rIns="0" tIns="0" bIns="0" anchor="t">
+            <a:spAutoFit/>
+          </a:bodyPr>
+          <a:lstStyle/>
+          <a:p>
+            <a:pPr algn="l">
               <a:lnSpc>
                 <a:spcPct val="106000"/>
               </a:lnSpc>
@@ -6517,21 +6410,21 @@
                 </a:solidFill>
                 <a:latin typeface="Calibri"/>
               </a:rPr>
-              <a:t>-5.7</a:t>
-            </a:r>
-          </a:p>
-        </p:txBody>
-      </p:sp>
-      <p:sp>
-        <p:nvSpPr>
-          <p:cNvPr id="22" name="TextBox 21"/>
-          <p:cNvSpPr txBox="1"/>
-          <p:nvPr/>
-        </p:nvSpPr>
-        <p:spPr>
-          <a:xfrm>
-            <a:off x="731520" y="3511296"/>
-            <a:ext cx="3291840" cy="292608"/>
+              <a:t>DecodingAgg</a:t>
+            </a:r>
+          </a:p>
+        </p:txBody>
+      </p:sp>
+      <p:sp>
+        <p:nvSpPr>
+          <p:cNvPr id="24" name="TextBox 23"/>
+          <p:cNvSpPr txBox="1"/>
+          <p:nvPr/>
+        </p:nvSpPr>
+        <p:spPr>
+          <a:xfrm>
+            <a:off x="7406640" y="4114800"/>
+            <a:ext cx="1828800" cy="310896"/>
           </a:xfrm>
           <a:prstGeom prst="rect">
             <a:avLst/>
@@ -6559,175 +6452,129 @@
                 </a:solidFill>
                 <a:latin typeface="Calibri"/>
               </a:rPr>
-              <a:t>Averaged output</a:t>
-            </a:r>
-          </a:p>
-        </p:txBody>
-      </p:sp>
-      <p:sp>
-        <p:nvSpPr>
-          <p:cNvPr id="23" name="TextBox 22"/>
-          <p:cNvSpPr txBox="1"/>
-          <p:nvPr/>
-        </p:nvSpPr>
-        <p:spPr>
-          <a:xfrm>
-            <a:off x="4297680" y="3511296"/>
-            <a:ext cx="914400" cy="292608"/>
-          </a:xfrm>
-          <a:prstGeom prst="rect">
-            <a:avLst/>
-          </a:prstGeom>
-          <a:noFill/>
-        </p:spPr>
-        <p:txBody>
-          <a:bodyPr wrap="square" lIns="0" rIns="0" tIns="0" bIns="0" anchor="t">
-            <a:spAutoFit/>
-          </a:bodyPr>
-          <a:lstStyle/>
-          <a:p>
-            <a:pPr algn="ctr">
-              <a:lnSpc>
-                <a:spcPct val="106000"/>
-              </a:lnSpc>
-              <a:spcAft>
-                <a:spcPts val="0"/>
-              </a:spcAft>
-            </a:pPr>
-            <a:r>
-              <a:rPr sz="1350" b="0" i="0">
+              <a:t>0.0 %</a:t>
+            </a:r>
+          </a:p>
+        </p:txBody>
+      </p:sp>
+      <p:sp>
+        <p:nvSpPr>
+          <p:cNvPr id="25" name="TextBox 24"/>
+          <p:cNvSpPr txBox="1"/>
+          <p:nvPr/>
+        </p:nvSpPr>
+        <p:spPr>
+          <a:xfrm>
+            <a:off x="9418320" y="4114800"/>
+            <a:ext cx="2103120" cy="310896"/>
+          </a:xfrm>
+          <a:prstGeom prst="rect">
+            <a:avLst/>
+          </a:prstGeom>
+          <a:noFill/>
+        </p:spPr>
+        <p:txBody>
+          <a:bodyPr wrap="square" lIns="0" rIns="0" tIns="0" bIns="0" anchor="t">
+            <a:spAutoFit/>
+          </a:bodyPr>
+          <a:lstStyle/>
+          <a:p>
+            <a:pPr algn="l">
+              <a:lnSpc>
+                <a:spcPct val="106000"/>
+              </a:lnSpc>
+              <a:spcAft>
+                <a:spcPts val="0"/>
+              </a:spcAft>
+            </a:pPr>
+            <a:r>
+              <a:rPr sz="1350" b="1" i="0">
+                <a:solidFill>
+                  <a:srgbClr val="111111"/>
+                </a:solidFill>
+                <a:latin typeface="Calibri"/>
+              </a:rPr>
+              <a:t>85.3 %</a:t>
+            </a:r>
+          </a:p>
+        </p:txBody>
+      </p:sp>
+      <p:sp>
+        <p:nvSpPr>
+          <p:cNvPr id="26" name="TextBox 25"/>
+          <p:cNvSpPr txBox="1"/>
+          <p:nvPr/>
+        </p:nvSpPr>
+        <p:spPr>
+          <a:xfrm>
+            <a:off x="731520" y="4663440"/>
+            <a:ext cx="10725912" cy="1737360"/>
+          </a:xfrm>
+          <a:prstGeom prst="rect">
+            <a:avLst/>
+          </a:prstGeom>
+          <a:noFill/>
+        </p:spPr>
+        <p:txBody>
+          <a:bodyPr wrap="square" lIns="0" rIns="0" tIns="0" bIns="0" anchor="t">
+            <a:spAutoFit/>
+          </a:bodyPr>
+          <a:lstStyle/>
+          <a:p>
+            <a:pPr algn="l">
+              <a:lnSpc>
+                <a:spcPct val="110000"/>
+              </a:lnSpc>
+              <a:spcAft>
+                <a:spcPts val="900"/>
+              </a:spcAft>
+            </a:pPr>
+            <a:r>
+              <a:rPr sz="1500" b="1" i="0">
+                <a:solidFill>
+                  <a:srgbClr val="111111"/>
+                </a:solidFill>
+                <a:latin typeface="Calibri"/>
+              </a:rPr>
+              <a:t>The undefended model never refuses. Not once, on either model, at any dose.</a:t>
+            </a:r>
+          </a:p>
+          <a:p>
+            <a:pPr>
+              <a:lnSpc>
+                <a:spcPct val="110000"/>
+              </a:lnSpc>
+              <a:spcAft>
+                <a:spcPts val="900"/>
+              </a:spcAft>
+            </a:pPr>
+            <a:r>
+              <a:rPr sz="1500" b="0" i="0">
                 <a:solidFill>
                   <a:srgbClr val="444444"/>
                 </a:solidFill>
                 <a:latin typeface="Calibri"/>
               </a:rPr>
-              <a:t>+8.7</a:t>
-            </a:r>
-          </a:p>
-        </p:txBody>
-      </p:sp>
-      <p:sp>
-        <p:nvSpPr>
-          <p:cNvPr id="24" name="TextBox 23"/>
-          <p:cNvSpPr txBox="1"/>
-          <p:nvPr/>
-        </p:nvSpPr>
-        <p:spPr>
-          <a:xfrm>
-            <a:off x="5330952" y="3511296"/>
-            <a:ext cx="914400" cy="292608"/>
-          </a:xfrm>
-          <a:prstGeom prst="rect">
-            <a:avLst/>
-          </a:prstGeom>
-          <a:noFill/>
-        </p:spPr>
-        <p:txBody>
-          <a:bodyPr wrap="square" lIns="0" rIns="0" tIns="0" bIns="0" anchor="t">
-            <a:spAutoFit/>
-          </a:bodyPr>
-          <a:lstStyle/>
-          <a:p>
-            <a:pPr algn="ctr">
-              <a:lnSpc>
-                <a:spcPct val="106000"/>
-              </a:lnSpc>
-              <a:spcAft>
-                <a:spcPts val="0"/>
-              </a:spcAft>
-            </a:pPr>
-            <a:r>
-              <a:rPr sz="1350" b="0" i="0">
-                <a:solidFill>
-                  <a:srgbClr val="444444"/>
-                </a:solidFill>
-                <a:latin typeface="Calibri"/>
-              </a:rPr>
-              <a:t>-9.0</a:t>
-            </a:r>
-          </a:p>
-        </p:txBody>
-      </p:sp>
-      <p:sp>
-        <p:nvSpPr>
-          <p:cNvPr id="25" name="TextBox 24"/>
-          <p:cNvSpPr txBox="1"/>
-          <p:nvPr/>
-        </p:nvSpPr>
-        <p:spPr>
-          <a:xfrm>
-            <a:off x="6364224" y="3511296"/>
-            <a:ext cx="914400" cy="292608"/>
-          </a:xfrm>
-          <a:prstGeom prst="rect">
-            <a:avLst/>
-          </a:prstGeom>
-          <a:noFill/>
-        </p:spPr>
-        <p:txBody>
-          <a:bodyPr wrap="square" lIns="0" rIns="0" tIns="0" bIns="0" anchor="t">
-            <a:spAutoFit/>
-          </a:bodyPr>
-          <a:lstStyle/>
-          <a:p>
-            <a:pPr algn="ctr">
-              <a:lnSpc>
-                <a:spcPct val="106000"/>
-              </a:lnSpc>
-              <a:spcAft>
-                <a:spcPts val="0"/>
-              </a:spcAft>
-            </a:pPr>
-            <a:r>
-              <a:rPr sz="1350" b="0" i="0">
-                <a:solidFill>
-                  <a:srgbClr val="444444"/>
-                </a:solidFill>
-                <a:latin typeface="Calibri"/>
-              </a:rPr>
-              <a:t>-14.0</a:t>
-            </a:r>
-          </a:p>
-        </p:txBody>
-      </p:sp>
-      <p:sp>
-        <p:nvSpPr>
-          <p:cNvPr id="26" name="TextBox 25"/>
-          <p:cNvSpPr txBox="1"/>
-          <p:nvPr/>
-        </p:nvSpPr>
-        <p:spPr>
-          <a:xfrm>
-            <a:off x="7397496" y="3511296"/>
-            <a:ext cx="914400" cy="292608"/>
-          </a:xfrm>
-          <a:prstGeom prst="rect">
-            <a:avLst/>
-          </a:prstGeom>
-          <a:noFill/>
-        </p:spPr>
-        <p:txBody>
-          <a:bodyPr wrap="square" lIns="0" rIns="0" tIns="0" bIns="0" anchor="t">
-            <a:spAutoFit/>
-          </a:bodyPr>
-          <a:lstStyle/>
-          <a:p>
-            <a:pPr algn="ctr">
-              <a:lnSpc>
-                <a:spcPct val="106000"/>
-              </a:lnSpc>
-              <a:spcAft>
-                <a:spcPts val="0"/>
-              </a:spcAft>
-            </a:pPr>
-            <a:r>
-              <a:rPr sz="1350" b="0" i="0">
-                <a:solidFill>
-                  <a:srgbClr val="444444"/>
-                </a:solidFill>
-                <a:latin typeface="Calibri"/>
-              </a:rPr>
-              <a:t>-18.3</a:t>
+              <a:t>The cause is the defense's own design. It answers from each passage alone, so a passage that says “refuse” gets an unopposed hearing. The undefended model reads all ten passages together, where nine honest ones drown it out.</a:t>
+            </a:r>
+          </a:p>
+          <a:p>
+            <a:pPr>
+              <a:lnSpc>
+                <a:spcPct val="110000"/>
+              </a:lnSpc>
+              <a:spcAft>
+                <a:spcPts val="900"/>
+              </a:spcAft>
+            </a:pPr>
+            <a:r>
+              <a:rPr sz="1500" b="1" i="0">
+                <a:solidFill>
+                  <a:srgbClr val="111111"/>
+                </a:solidFill>
+                <a:latin typeface="Calibri"/>
+              </a:rPr>
+              <a:t>It is the same property that makes this family resist tone steering. One trade, not two results, and the model decides which way it falls.</a:t>
             </a:r>
           </a:p>
         </p:txBody>
@@ -6735,590 +6582,6 @@
       <p:sp>
         <p:nvSpPr>
           <p:cNvPr id="27" name="TextBox 26"/>
-          <p:cNvSpPr txBox="1"/>
-          <p:nvPr/>
-        </p:nvSpPr>
-        <p:spPr>
-          <a:xfrm>
-            <a:off x="8430767" y="3511296"/>
-            <a:ext cx="914400" cy="292608"/>
-          </a:xfrm>
-          <a:prstGeom prst="rect">
-            <a:avLst/>
-          </a:prstGeom>
-          <a:noFill/>
-        </p:spPr>
-        <p:txBody>
-          <a:bodyPr wrap="square" lIns="0" rIns="0" tIns="0" bIns="0" anchor="t">
-            <a:spAutoFit/>
-          </a:bodyPr>
-          <a:lstStyle/>
-          <a:p>
-            <a:pPr algn="ctr">
-              <a:lnSpc>
-                <a:spcPct val="106000"/>
-              </a:lnSpc>
-              <a:spcAft>
-                <a:spcPts val="0"/>
-              </a:spcAft>
-            </a:pPr>
-            <a:r>
-              <a:rPr sz="1350" b="0" i="0">
-                <a:solidFill>
-                  <a:srgbClr val="444444"/>
-                </a:solidFill>
-                <a:latin typeface="Calibri"/>
-              </a:rPr>
-              <a:t>-20.3</a:t>
-            </a:r>
-          </a:p>
-        </p:txBody>
-      </p:sp>
-      <p:sp>
-        <p:nvSpPr>
-          <p:cNvPr id="28" name="TextBox 27"/>
-          <p:cNvSpPr txBox="1"/>
-          <p:nvPr/>
-        </p:nvSpPr>
-        <p:spPr>
-          <a:xfrm>
-            <a:off x="9464040" y="3511296"/>
-            <a:ext cx="914400" cy="292608"/>
-          </a:xfrm>
-          <a:prstGeom prst="rect">
-            <a:avLst/>
-          </a:prstGeom>
-          <a:noFill/>
-        </p:spPr>
-        <p:txBody>
-          <a:bodyPr wrap="square" lIns="0" rIns="0" tIns="0" bIns="0" anchor="t">
-            <a:spAutoFit/>
-          </a:bodyPr>
-          <a:lstStyle/>
-          <a:p>
-            <a:pPr algn="ctr">
-              <a:lnSpc>
-                <a:spcPct val="106000"/>
-              </a:lnSpc>
-              <a:spcAft>
-                <a:spcPts val="0"/>
-              </a:spcAft>
-            </a:pPr>
-            <a:r>
-              <a:rPr sz="1350" b="0" i="0">
-                <a:solidFill>
-                  <a:srgbClr val="444444"/>
-                </a:solidFill>
-                <a:latin typeface="Calibri"/>
-              </a:rPr>
-              <a:t>-17.3</a:t>
-            </a:r>
-          </a:p>
-        </p:txBody>
-      </p:sp>
-      <p:sp>
-        <p:nvSpPr>
-          <p:cNvPr id="29" name="TextBox 28"/>
-          <p:cNvSpPr txBox="1"/>
-          <p:nvPr/>
-        </p:nvSpPr>
-        <p:spPr>
-          <a:xfrm>
-            <a:off x="10497312" y="3511296"/>
-            <a:ext cx="914400" cy="292608"/>
-          </a:xfrm>
-          <a:prstGeom prst="rect">
-            <a:avLst/>
-          </a:prstGeom>
-          <a:noFill/>
-        </p:spPr>
-        <p:txBody>
-          <a:bodyPr wrap="square" lIns="0" rIns="0" tIns="0" bIns="0" anchor="t">
-            <a:spAutoFit/>
-          </a:bodyPr>
-          <a:lstStyle/>
-          <a:p>
-            <a:pPr algn="ctr">
-              <a:lnSpc>
-                <a:spcPct val="106000"/>
-              </a:lnSpc>
-              <a:spcAft>
-                <a:spcPts val="0"/>
-              </a:spcAft>
-            </a:pPr>
-            <a:r>
-              <a:rPr sz="1350" b="0" i="0">
-                <a:solidFill>
-                  <a:srgbClr val="444444"/>
-                </a:solidFill>
-                <a:latin typeface="Calibri"/>
-              </a:rPr>
-              <a:t>-4.0</a:t>
-            </a:r>
-          </a:p>
-        </p:txBody>
-      </p:sp>
-      <p:sp>
-        <p:nvSpPr>
-          <p:cNvPr id="30" name="TextBox 29"/>
-          <p:cNvSpPr txBox="1"/>
-          <p:nvPr/>
-        </p:nvSpPr>
-        <p:spPr>
-          <a:xfrm>
-            <a:off x="731520" y="3931920"/>
-            <a:ext cx="3291840" cy="292608"/>
-          </a:xfrm>
-          <a:prstGeom prst="rect">
-            <a:avLst/>
-          </a:prstGeom>
-          <a:noFill/>
-        </p:spPr>
-        <p:txBody>
-          <a:bodyPr wrap="square" lIns="0" rIns="0" tIns="0" bIns="0" anchor="t">
-            <a:spAutoFit/>
-          </a:bodyPr>
-          <a:lstStyle/>
-          <a:p>
-            <a:pPr algn="l">
-              <a:lnSpc>
-                <a:spcPct val="106000"/>
-              </a:lnSpc>
-              <a:spcAft>
-                <a:spcPts val="0"/>
-              </a:spcAft>
-            </a:pPr>
-            <a:r>
-              <a:rPr sz="1350" b="1" i="0">
-                <a:solidFill>
-                  <a:srgbClr val="111111"/>
-                </a:solidFill>
-                <a:latin typeface="Calibri"/>
-              </a:rPr>
-              <a:t>Difference</a:t>
-            </a:r>
-          </a:p>
-        </p:txBody>
-      </p:sp>
-      <p:sp>
-        <p:nvSpPr>
-          <p:cNvPr id="31" name="TextBox 30"/>
-          <p:cNvSpPr txBox="1"/>
-          <p:nvPr/>
-        </p:nvSpPr>
-        <p:spPr>
-          <a:xfrm>
-            <a:off x="4297680" y="3931920"/>
-            <a:ext cx="914400" cy="292608"/>
-          </a:xfrm>
-          <a:prstGeom prst="rect">
-            <a:avLst/>
-          </a:prstGeom>
-          <a:noFill/>
-        </p:spPr>
-        <p:txBody>
-          <a:bodyPr wrap="square" lIns="0" rIns="0" tIns="0" bIns="0" anchor="t">
-            <a:spAutoFit/>
-          </a:bodyPr>
-          <a:lstStyle/>
-          <a:p>
-            <a:pPr algn="ctr">
-              <a:lnSpc>
-                <a:spcPct val="106000"/>
-              </a:lnSpc>
-              <a:spcAft>
-                <a:spcPts val="0"/>
-              </a:spcAft>
-            </a:pPr>
-            <a:r>
-              <a:rPr sz="1350" b="1" i="0">
-                <a:solidFill>
-                  <a:srgbClr val="111111"/>
-                </a:solidFill>
-                <a:latin typeface="Calibri"/>
-              </a:rPr>
-              <a:t>1.4</a:t>
-            </a:r>
-          </a:p>
-        </p:txBody>
-      </p:sp>
-      <p:sp>
-        <p:nvSpPr>
-          <p:cNvPr id="32" name="TextBox 31"/>
-          <p:cNvSpPr txBox="1"/>
-          <p:nvPr/>
-        </p:nvSpPr>
-        <p:spPr>
-          <a:xfrm>
-            <a:off x="5330952" y="3931920"/>
-            <a:ext cx="914400" cy="292608"/>
-          </a:xfrm>
-          <a:prstGeom prst="rect">
-            <a:avLst/>
-          </a:prstGeom>
-          <a:noFill/>
-        </p:spPr>
-        <p:txBody>
-          <a:bodyPr wrap="square" lIns="0" rIns="0" tIns="0" bIns="0" anchor="t">
-            <a:spAutoFit/>
-          </a:bodyPr>
-          <a:lstStyle/>
-          <a:p>
-            <a:pPr algn="ctr">
-              <a:lnSpc>
-                <a:spcPct val="106000"/>
-              </a:lnSpc>
-              <a:spcAft>
-                <a:spcPts val="0"/>
-              </a:spcAft>
-            </a:pPr>
-            <a:r>
-              <a:rPr sz="1350" b="1" i="0">
-                <a:solidFill>
-                  <a:srgbClr val="111111"/>
-                </a:solidFill>
-                <a:latin typeface="Calibri"/>
-              </a:rPr>
-              <a:t>13.0</a:t>
-            </a:r>
-          </a:p>
-        </p:txBody>
-      </p:sp>
-      <p:sp>
-        <p:nvSpPr>
-          <p:cNvPr id="33" name="TextBox 32"/>
-          <p:cNvSpPr txBox="1"/>
-          <p:nvPr/>
-        </p:nvSpPr>
-        <p:spPr>
-          <a:xfrm>
-            <a:off x="6364224" y="3931920"/>
-            <a:ext cx="914400" cy="292608"/>
-          </a:xfrm>
-          <a:prstGeom prst="rect">
-            <a:avLst/>
-          </a:prstGeom>
-          <a:noFill/>
-        </p:spPr>
-        <p:txBody>
-          <a:bodyPr wrap="square" lIns="0" rIns="0" tIns="0" bIns="0" anchor="t">
-            <a:spAutoFit/>
-          </a:bodyPr>
-          <a:lstStyle/>
-          <a:p>
-            <a:pPr algn="ctr">
-              <a:lnSpc>
-                <a:spcPct val="106000"/>
-              </a:lnSpc>
-              <a:spcAft>
-                <a:spcPts val="0"/>
-              </a:spcAft>
-            </a:pPr>
-            <a:r>
-              <a:rPr sz="1350" b="1" i="0">
-                <a:solidFill>
-                  <a:srgbClr val="111111"/>
-                </a:solidFill>
-                <a:latin typeface="Calibri"/>
-              </a:rPr>
-              <a:t>18.0</a:t>
-            </a:r>
-          </a:p>
-        </p:txBody>
-      </p:sp>
-      <p:sp>
-        <p:nvSpPr>
-          <p:cNvPr id="34" name="TextBox 33"/>
-          <p:cNvSpPr txBox="1"/>
-          <p:nvPr/>
-        </p:nvSpPr>
-        <p:spPr>
-          <a:xfrm>
-            <a:off x="7397496" y="3931920"/>
-            <a:ext cx="914400" cy="292608"/>
-          </a:xfrm>
-          <a:prstGeom prst="rect">
-            <a:avLst/>
-          </a:prstGeom>
-          <a:noFill/>
-        </p:spPr>
-        <p:txBody>
-          <a:bodyPr wrap="square" lIns="0" rIns="0" tIns="0" bIns="0" anchor="t">
-            <a:spAutoFit/>
-          </a:bodyPr>
-          <a:lstStyle/>
-          <a:p>
-            <a:pPr algn="ctr">
-              <a:lnSpc>
-                <a:spcPct val="106000"/>
-              </a:lnSpc>
-              <a:spcAft>
-                <a:spcPts val="0"/>
-              </a:spcAft>
-            </a:pPr>
-            <a:r>
-              <a:rPr sz="1350" b="1" i="0">
-                <a:solidFill>
-                  <a:srgbClr val="111111"/>
-                </a:solidFill>
-                <a:latin typeface="Calibri"/>
-              </a:rPr>
-              <a:t>24.0</a:t>
-            </a:r>
-          </a:p>
-        </p:txBody>
-      </p:sp>
-      <p:sp>
-        <p:nvSpPr>
-          <p:cNvPr id="35" name="TextBox 34"/>
-          <p:cNvSpPr txBox="1"/>
-          <p:nvPr/>
-        </p:nvSpPr>
-        <p:spPr>
-          <a:xfrm>
-            <a:off x="8430767" y="3931920"/>
-            <a:ext cx="914400" cy="292608"/>
-          </a:xfrm>
-          <a:prstGeom prst="rect">
-            <a:avLst/>
-          </a:prstGeom>
-          <a:noFill/>
-        </p:spPr>
-        <p:txBody>
-          <a:bodyPr wrap="square" lIns="0" rIns="0" tIns="0" bIns="0" anchor="t">
-            <a:spAutoFit/>
-          </a:bodyPr>
-          <a:lstStyle/>
-          <a:p>
-            <a:pPr algn="ctr">
-              <a:lnSpc>
-                <a:spcPct val="106000"/>
-              </a:lnSpc>
-              <a:spcAft>
-                <a:spcPts val="0"/>
-              </a:spcAft>
-            </a:pPr>
-            <a:r>
-              <a:rPr sz="1350" b="1" i="0">
-                <a:solidFill>
-                  <a:srgbClr val="111111"/>
-                </a:solidFill>
-                <a:latin typeface="Calibri"/>
-              </a:rPr>
-              <a:t>27.0</a:t>
-            </a:r>
-          </a:p>
-        </p:txBody>
-      </p:sp>
-      <p:sp>
-        <p:nvSpPr>
-          <p:cNvPr id="36" name="TextBox 35"/>
-          <p:cNvSpPr txBox="1"/>
-          <p:nvPr/>
-        </p:nvSpPr>
-        <p:spPr>
-          <a:xfrm>
-            <a:off x="9464040" y="3931920"/>
-            <a:ext cx="914400" cy="292608"/>
-          </a:xfrm>
-          <a:prstGeom prst="rect">
-            <a:avLst/>
-          </a:prstGeom>
-          <a:noFill/>
-        </p:spPr>
-        <p:txBody>
-          <a:bodyPr wrap="square" lIns="0" rIns="0" tIns="0" bIns="0" anchor="t">
-            <a:spAutoFit/>
-          </a:bodyPr>
-          <a:lstStyle/>
-          <a:p>
-            <a:pPr algn="ctr">
-              <a:lnSpc>
-                <a:spcPct val="106000"/>
-              </a:lnSpc>
-              <a:spcAft>
-                <a:spcPts val="0"/>
-              </a:spcAft>
-            </a:pPr>
-            <a:r>
-              <a:rPr sz="1350" b="1" i="0">
-                <a:solidFill>
-                  <a:srgbClr val="111111"/>
-                </a:solidFill>
-                <a:latin typeface="Calibri"/>
-              </a:rPr>
-              <a:t>29.6</a:t>
-            </a:r>
-          </a:p>
-        </p:txBody>
-      </p:sp>
-      <p:sp>
-        <p:nvSpPr>
-          <p:cNvPr id="37" name="TextBox 36"/>
-          <p:cNvSpPr txBox="1"/>
-          <p:nvPr/>
-        </p:nvSpPr>
-        <p:spPr>
-          <a:xfrm>
-            <a:off x="10497312" y="3931920"/>
-            <a:ext cx="914400" cy="292608"/>
-          </a:xfrm>
-          <a:prstGeom prst="rect">
-            <a:avLst/>
-          </a:prstGeom>
-          <a:noFill/>
-        </p:spPr>
-        <p:txBody>
-          <a:bodyPr wrap="square" lIns="0" rIns="0" tIns="0" bIns="0" anchor="t">
-            <a:spAutoFit/>
-          </a:bodyPr>
-          <a:lstStyle/>
-          <a:p>
-            <a:pPr algn="ctr">
-              <a:lnSpc>
-                <a:spcPct val="106000"/>
-              </a:lnSpc>
-              <a:spcAft>
-                <a:spcPts val="0"/>
-              </a:spcAft>
-            </a:pPr>
-            <a:r>
-              <a:rPr sz="1350" b="1" i="0">
-                <a:solidFill>
-                  <a:srgbClr val="111111"/>
-                </a:solidFill>
-                <a:latin typeface="Calibri"/>
-              </a:rPr>
-              <a:t>1.7</a:t>
-            </a:r>
-          </a:p>
-        </p:txBody>
-      </p:sp>
-      <p:sp>
-        <p:nvSpPr>
-          <p:cNvPr id="38" name="TextBox 37"/>
-          <p:cNvSpPr txBox="1"/>
-          <p:nvPr/>
-        </p:nvSpPr>
-        <p:spPr>
-          <a:xfrm>
-            <a:off x="731520" y="4389120"/>
-            <a:ext cx="10725912" cy="274320"/>
-          </a:xfrm>
-          <a:prstGeom prst="rect">
-            <a:avLst/>
-          </a:prstGeom>
-          <a:noFill/>
-        </p:spPr>
-        <p:txBody>
-          <a:bodyPr wrap="square" lIns="0" rIns="0" tIns="0" bIns="0" anchor="t">
-            <a:spAutoFit/>
-          </a:bodyPr>
-          <a:lstStyle/>
-          <a:p>
-            <a:pPr algn="l">
-              <a:lnSpc>
-                <a:spcPct val="106000"/>
-              </a:lnSpc>
-              <a:spcAft>
-                <a:spcPts val="0"/>
-              </a:spcAft>
-            </a:pPr>
-            <a:r>
-              <a:rPr sz="1150" b="0" i="0">
-                <a:solidFill>
-                  <a:srgbClr val="777777"/>
-                </a:solidFill>
-                <a:latin typeface="Calibri"/>
-              </a:rPr>
-              <a:t>change in accuracy, in points, against the undefended model</a:t>
-            </a:r>
-          </a:p>
-        </p:txBody>
-      </p:sp>
-      <p:sp>
-        <p:nvSpPr>
-          <p:cNvPr id="39" name="TextBox 38"/>
-          <p:cNvSpPr txBox="1"/>
-          <p:nvPr/>
-        </p:nvSpPr>
-        <p:spPr>
-          <a:xfrm>
-            <a:off x="731520" y="4590288"/>
-            <a:ext cx="10725912" cy="1810512"/>
-          </a:xfrm>
-          <a:prstGeom prst="rect">
-            <a:avLst/>
-          </a:prstGeom>
-          <a:noFill/>
-        </p:spPr>
-        <p:txBody>
-          <a:bodyPr wrap="square" lIns="0" rIns="0" tIns="0" bIns="0" anchor="t">
-            <a:spAutoFit/>
-          </a:bodyPr>
-          <a:lstStyle/>
-          <a:p>
-            <a:pPr algn="l">
-              <a:lnSpc>
-                <a:spcPct val="110000"/>
-              </a:lnSpc>
-              <a:spcAft>
-                <a:spcPts val="800"/>
-              </a:spcAft>
-            </a:pPr>
-            <a:r>
-              <a:rPr sz="1500" b="1" i="0">
-                <a:solidFill>
-                  <a:srgbClr val="111111"/>
-                </a:solidFill>
-                <a:latin typeface="Calibri"/>
-              </a:rPr>
-              <a:t>At nine poisoned passages of ten, one version helps and the other does harm. They are 29.6 points apart.</a:t>
-            </a:r>
-          </a:p>
-          <a:p>
-            <a:pPr>
-              <a:lnSpc>
-                <a:spcPct val="110000"/>
-              </a:lnSpc>
-              <a:spcAft>
-                <a:spcPts val="800"/>
-              </a:spcAft>
-            </a:pPr>
-            <a:r>
-              <a:rPr sz="1500" b="0" i="0">
-                <a:solidFill>
-                  <a:srgbClr val="444444"/>
-                </a:solidFill>
-                <a:latin typeface="Calibri"/>
-              </a:rPr>
-              <a:t>We wrote the cause down before we ran the test. A keyword filter throws away a passage that carries no answer, so one honest passage still carries it. An average lets nine bad passages drown it.</a:t>
-            </a:r>
-          </a:p>
-          <a:p>
-            <a:pPr>
-              <a:lnSpc>
-                <a:spcPct val="110000"/>
-              </a:lnSpc>
-              <a:spcAft>
-                <a:spcPts val="800"/>
-              </a:spcAft>
-            </a:pPr>
-            <a:r>
-              <a:rPr sz="1500" b="1" i="0">
-                <a:solidFill>
-                  <a:srgbClr val="111111"/>
-                </a:solidFill>
-                <a:latin typeface="Calibri"/>
-              </a:rPr>
-              <a:t>The difference should therefore grow as honest passages are removed, and vanish when none are left. It does both.</a:t>
-            </a:r>
-          </a:p>
-        </p:txBody>
-      </p:sp>
-      <p:sp>
-        <p:nvSpPr>
-          <p:cNvPr id="40" name="TextBox 39"/>
           <p:cNvSpPr txBox="1"/>
           <p:nvPr/>
         </p:nvSpPr>
@@ -7353,7 +6616,7 @@
                 </a:solidFill>
                 <a:latin typeface="Calibri"/>
               </a:rPr>
-              <a:t>Both versions ship in Xiang et al., 2024, arXiv:2405.15556   ·   BadRAG Xue et al., 2024, arXiv:2406.00083   ·   Measurements: this work</a:t>
+              <a:t>RobustRAG, both versions Xiang et al., 2024   ·   BadRAG Xue et al., 2024   ·   Measurements: this work</a:t>
             </a:r>
           </a:p>
         </p:txBody>

--- a/advisor_meeting.pptx
+++ b/advisor_meeting.pptx
@@ -19,6 +19,7 @@
     <p:sldId id="267" r:id="rId18"/>
     <p:sldId id="268" r:id="rId19"/>
     <p:sldId id="269" r:id="rId20"/>
+    <p:sldId id="270" r:id="rId21"/>
   </p:sldIdLst>
   <p:sldSz cx="12188952" cy="6858000" type="screen4x3"/>
   <p:notesSz cx="6858000" cy="9144000"/>
@@ -3283,7 +3284,7 @@
                 </a:solidFill>
                 <a:latin typeface="Calibri"/>
               </a:rPr>
-              <a:t>WHAT WE DID NEXT</a:t>
+              <a:t>THE GAP, IN DETAIL</a:t>
             </a:r>
           </a:p>
         </p:txBody>
@@ -3325,7 +3326,7 @@
                 </a:solidFill>
                 <a:latin typeface="Cambria"/>
               </a:rPr>
-              <a:t>We ran the tests the field never ran</a:t>
+              <a:t>Where an untested pair is waiting</a:t>
             </a:r>
           </a:p>
         </p:txBody>
@@ -3380,8 +3381,50 @@
         </p:nvSpPr>
         <p:spPr>
           <a:xfrm>
-            <a:off x="731520" y="1965960"/>
-            <a:ext cx="10725912" cy="4434840"/>
+            <a:off x="731520" y="1920240"/>
+            <a:ext cx="10725912" cy="411480"/>
+          </a:xfrm>
+          <a:prstGeom prst="rect">
+            <a:avLst/>
+          </a:prstGeom>
+          <a:noFill/>
+        </p:spPr>
+        <p:txBody>
+          <a:bodyPr wrap="square" lIns="0" rIns="0" tIns="0" bIns="0" anchor="t">
+            <a:spAutoFit/>
+          </a:bodyPr>
+          <a:lstStyle/>
+          <a:p>
+            <a:pPr algn="l">
+              <a:lnSpc>
+                <a:spcPct val="106000"/>
+              </a:lnSpc>
+              <a:spcAft>
+                <a:spcPts val="0"/>
+              </a:spcAft>
+            </a:pPr>
+            <a:r>
+              <a:rPr sz="1400" b="0" i="0">
+                <a:solidFill>
+                  <a:srgbClr val="444444"/>
+                </a:solidFill>
+                <a:latin typeface="Calibri"/>
+              </a:rPr>
+              <a:t>Each row is one route and one failure. The attacks are the deliberate ones. The defenses are the ones built for the same failure happening by accident.</a:t>
+            </a:r>
+          </a:p>
+        </p:txBody>
+      </p:sp>
+      <p:sp>
+        <p:nvSpPr>
+          <p:cNvPr id="6" name="TextBox 5"/>
+          <p:cNvSpPr txBox="1"/>
+          <p:nvPr/>
+        </p:nvSpPr>
+        <p:spPr>
+          <a:xfrm>
+            <a:off x="731520" y="2414016"/>
+            <a:ext cx="2468880" cy="457200"/>
           </a:xfrm>
           <a:prstGeom prst="rect">
             <a:avLst/>
@@ -3399,17 +3442,1754 @@
                 <a:spcPct val="110000"/>
               </a:lnSpc>
               <a:spcAft>
-                <a:spcPts val="1100"/>
-              </a:spcAft>
-            </a:pPr>
-            <a:r>
-              <a:rPr sz="1500" b="1" i="0">
+                <a:spcPts val="0"/>
+              </a:spcAft>
+            </a:pPr>
+            <a:r>
+              <a:rPr sz="1150" b="1" i="0">
+                <a:solidFill>
+                  <a:srgbClr val="777777"/>
+                </a:solidFill>
+                <a:latin typeface="Calibri"/>
+              </a:rPr>
+              <a:t>Route in</a:t>
+            </a:r>
+          </a:p>
+        </p:txBody>
+      </p:sp>
+      <p:sp>
+        <p:nvSpPr>
+          <p:cNvPr id="7" name="TextBox 6"/>
+          <p:cNvSpPr txBox="1"/>
+          <p:nvPr/>
+        </p:nvSpPr>
+        <p:spPr>
+          <a:xfrm>
+            <a:off x="3291839" y="2414016"/>
+            <a:ext cx="3017520" cy="457200"/>
+          </a:xfrm>
+          <a:prstGeom prst="rect">
+            <a:avLst/>
+          </a:prstGeom>
+          <a:noFill/>
+        </p:spPr>
+        <p:txBody>
+          <a:bodyPr wrap="square" lIns="0" rIns="0" tIns="0" bIns="0" anchor="t">
+            <a:spAutoFit/>
+          </a:bodyPr>
+          <a:lstStyle/>
+          <a:p>
+            <a:pPr algn="l">
+              <a:lnSpc>
+                <a:spcPct val="110000"/>
+              </a:lnSpc>
+              <a:spcAft>
+                <a:spcPts val="0"/>
+              </a:spcAft>
+            </a:pPr>
+            <a:r>
+              <a:rPr sz="1150" b="1" i="0">
+                <a:solidFill>
+                  <a:srgbClr val="777777"/>
+                </a:solidFill>
+                <a:latin typeface="Calibri"/>
+              </a:rPr>
+              <a:t>What goes wrong</a:t>
+            </a:r>
+          </a:p>
+        </p:txBody>
+      </p:sp>
+      <p:sp>
+        <p:nvSpPr>
+          <p:cNvPr id="8" name="TextBox 7"/>
+          <p:cNvSpPr txBox="1"/>
+          <p:nvPr/>
+        </p:nvSpPr>
+        <p:spPr>
+          <a:xfrm>
+            <a:off x="6492240" y="2414016"/>
+            <a:ext cx="1371600" cy="457200"/>
+          </a:xfrm>
+          <a:prstGeom prst="rect">
+            <a:avLst/>
+          </a:prstGeom>
+          <a:noFill/>
+        </p:spPr>
+        <p:txBody>
+          <a:bodyPr wrap="square" lIns="0" rIns="0" tIns="0" bIns="0" anchor="t">
+            <a:spAutoFit/>
+          </a:bodyPr>
+          <a:lstStyle/>
+          <a:p>
+            <a:pPr algn="l">
+              <a:lnSpc>
+                <a:spcPct val="110000"/>
+              </a:lnSpc>
+              <a:spcAft>
+                <a:spcPts val="0"/>
+              </a:spcAft>
+            </a:pPr>
+            <a:r>
+              <a:rPr sz="1150" b="1" i="0">
+                <a:solidFill>
+                  <a:srgbClr val="777777"/>
+                </a:solidFill>
+                <a:latin typeface="Calibri"/>
+              </a:rPr>
+              <a:t>Deliberate</a:t>
+            </a:r>
+          </a:p>
+          <a:p>
+            <a:pPr>
+              <a:lnSpc>
+                <a:spcPct val="110000"/>
+              </a:lnSpc>
+              <a:spcAft>
+                <a:spcPts val="0"/>
+              </a:spcAft>
+            </a:pPr>
+            <a:r>
+              <a:rPr sz="1150" b="1" i="0">
+                <a:solidFill>
+                  <a:srgbClr val="777777"/>
+                </a:solidFill>
+                <a:latin typeface="Calibri"/>
+              </a:rPr>
+              <a:t>attacks</a:t>
+            </a:r>
+          </a:p>
+        </p:txBody>
+      </p:sp>
+      <p:sp>
+        <p:nvSpPr>
+          <p:cNvPr id="9" name="TextBox 8"/>
+          <p:cNvSpPr txBox="1"/>
+          <p:nvPr/>
+        </p:nvSpPr>
+        <p:spPr>
+          <a:xfrm>
+            <a:off x="8046720" y="2414016"/>
+            <a:ext cx="1463040" cy="457200"/>
+          </a:xfrm>
+          <a:prstGeom prst="rect">
+            <a:avLst/>
+          </a:prstGeom>
+          <a:noFill/>
+        </p:spPr>
+        <p:txBody>
+          <a:bodyPr wrap="square" lIns="0" rIns="0" tIns="0" bIns="0" anchor="t">
+            <a:spAutoFit/>
+          </a:bodyPr>
+          <a:lstStyle/>
+          <a:p>
+            <a:pPr algn="l">
+              <a:lnSpc>
+                <a:spcPct val="110000"/>
+              </a:lnSpc>
+              <a:spcAft>
+                <a:spcPts val="0"/>
+              </a:spcAft>
+            </a:pPr>
+            <a:r>
+              <a:rPr sz="1150" b="1" i="0">
+                <a:solidFill>
+                  <a:srgbClr val="777777"/>
+                </a:solidFill>
+                <a:latin typeface="Calibri"/>
+              </a:rPr>
+              <a:t>Accidental</a:t>
+            </a:r>
+          </a:p>
+          <a:p>
+            <a:pPr>
+              <a:lnSpc>
+                <a:spcPct val="110000"/>
+              </a:lnSpc>
+              <a:spcAft>
+                <a:spcPts val="0"/>
+              </a:spcAft>
+            </a:pPr>
+            <a:r>
+              <a:rPr sz="1150" b="1" i="0">
+                <a:solidFill>
+                  <a:srgbClr val="777777"/>
+                </a:solidFill>
+                <a:latin typeface="Calibri"/>
+              </a:rPr>
+              <a:t>defenses</a:t>
+            </a:r>
+          </a:p>
+        </p:txBody>
+      </p:sp>
+      <p:sp>
+        <p:nvSpPr>
+          <p:cNvPr id="10" name="TextBox 9"/>
+          <p:cNvSpPr txBox="1"/>
+          <p:nvPr/>
+        </p:nvSpPr>
+        <p:spPr>
+          <a:xfrm>
+            <a:off x="9692640" y="2414016"/>
+            <a:ext cx="2011680" cy="457200"/>
+          </a:xfrm>
+          <a:prstGeom prst="rect">
+            <a:avLst/>
+          </a:prstGeom>
+          <a:noFill/>
+        </p:spPr>
+        <p:txBody>
+          <a:bodyPr wrap="square" lIns="0" rIns="0" tIns="0" bIns="0" anchor="t">
+            <a:spAutoFit/>
+          </a:bodyPr>
+          <a:lstStyle/>
+          <a:p>
+            <a:pPr algn="l">
+              <a:lnSpc>
+                <a:spcPct val="110000"/>
+              </a:lnSpc>
+              <a:spcAft>
+                <a:spcPts val="0"/>
+              </a:spcAft>
+            </a:pPr>
+            <a:r>
+              <a:rPr sz="1150" b="1" i="0">
+                <a:solidFill>
+                  <a:srgbClr val="777777"/>
+                </a:solidFill>
+                <a:latin typeface="Calibri"/>
+              </a:rPr>
+              <a:t>Ever tested</a:t>
+            </a:r>
+          </a:p>
+          <a:p>
+            <a:pPr>
+              <a:lnSpc>
+                <a:spcPct val="110000"/>
+              </a:lnSpc>
+              <a:spcAft>
+                <a:spcPts val="0"/>
+              </a:spcAft>
+            </a:pPr>
+            <a:r>
+              <a:rPr sz="1150" b="1" i="0">
+                <a:solidFill>
+                  <a:srgbClr val="777777"/>
+                </a:solidFill>
+                <a:latin typeface="Calibri"/>
+              </a:rPr>
+              <a:t>against each other</a:t>
+            </a:r>
+          </a:p>
+        </p:txBody>
+      </p:sp>
+      <p:sp>
+        <p:nvSpPr>
+          <p:cNvPr id="11" name="TextBox 10"/>
+          <p:cNvSpPr txBox="1"/>
+          <p:nvPr/>
+        </p:nvSpPr>
+        <p:spPr>
+          <a:xfrm>
+            <a:off x="731520" y="2926080"/>
+            <a:ext cx="2468880" cy="292608"/>
+          </a:xfrm>
+          <a:prstGeom prst="rect">
+            <a:avLst/>
+          </a:prstGeom>
+          <a:noFill/>
+        </p:spPr>
+        <p:txBody>
+          <a:bodyPr wrap="square" lIns="0" rIns="0" tIns="0" bIns="0" anchor="t">
+            <a:spAutoFit/>
+          </a:bodyPr>
+          <a:lstStyle/>
+          <a:p>
+            <a:pPr algn="l">
+              <a:lnSpc>
+                <a:spcPct val="106000"/>
+              </a:lnSpc>
+              <a:spcAft>
+                <a:spcPts val="0"/>
+              </a:spcAft>
+            </a:pPr>
+            <a:r>
+              <a:rPr sz="1300" b="0" i="0">
+                <a:solidFill>
+                  <a:srgbClr val="444444"/>
+                </a:solidFill>
+                <a:latin typeface="Calibri"/>
+              </a:rPr>
+              <a:t>direct-input</a:t>
+            </a:r>
+          </a:p>
+        </p:txBody>
+      </p:sp>
+      <p:sp>
+        <p:nvSpPr>
+          <p:cNvPr id="12" name="TextBox 11"/>
+          <p:cNvSpPr txBox="1"/>
+          <p:nvPr/>
+        </p:nvSpPr>
+        <p:spPr>
+          <a:xfrm>
+            <a:off x="3291839" y="2926080"/>
+            <a:ext cx="3017520" cy="292608"/>
+          </a:xfrm>
+          <a:prstGeom prst="rect">
+            <a:avLst/>
+          </a:prstGeom>
+          <a:noFill/>
+        </p:spPr>
+        <p:txBody>
+          <a:bodyPr wrap="square" lIns="0" rIns="0" tIns="0" bIns="0" anchor="t">
+            <a:spAutoFit/>
+          </a:bodyPr>
+          <a:lstStyle/>
+          <a:p>
+            <a:pPr algn="l">
+              <a:lnSpc>
+                <a:spcPct val="106000"/>
+              </a:lnSpc>
+              <a:spcAft>
+                <a:spcPts val="0"/>
+              </a:spcAft>
+            </a:pPr>
+            <a:r>
+              <a:rPr sz="1300" b="0" i="0">
+                <a:solidFill>
+                  <a:srgbClr val="444444"/>
+                </a:solidFill>
+                <a:latin typeface="Calibri"/>
+              </a:rPr>
+              <a:t>reasoning-corruption</a:t>
+            </a:r>
+          </a:p>
+        </p:txBody>
+      </p:sp>
+      <p:sp>
+        <p:nvSpPr>
+          <p:cNvPr id="13" name="TextBox 12"/>
+          <p:cNvSpPr txBox="1"/>
+          <p:nvPr/>
+        </p:nvSpPr>
+        <p:spPr>
+          <a:xfrm>
+            <a:off x="6492240" y="2926080"/>
+            <a:ext cx="1371600" cy="292608"/>
+          </a:xfrm>
+          <a:prstGeom prst="rect">
+            <a:avLst/>
+          </a:prstGeom>
+          <a:noFill/>
+        </p:spPr>
+        <p:txBody>
+          <a:bodyPr wrap="square" lIns="0" rIns="0" tIns="0" bIns="0" anchor="t">
+            <a:spAutoFit/>
+          </a:bodyPr>
+          <a:lstStyle/>
+          <a:p>
+            <a:pPr algn="l">
+              <a:lnSpc>
+                <a:spcPct val="106000"/>
+              </a:lnSpc>
+              <a:spcAft>
+                <a:spcPts val="0"/>
+              </a:spcAft>
+            </a:pPr>
+            <a:r>
+              <a:rPr sz="1300" b="0" i="0">
+                <a:solidFill>
+                  <a:srgbClr val="444444"/>
+                </a:solidFill>
+                <a:latin typeface="Calibri"/>
+              </a:rPr>
+              <a:t>4</a:t>
+            </a:r>
+          </a:p>
+        </p:txBody>
+      </p:sp>
+      <p:sp>
+        <p:nvSpPr>
+          <p:cNvPr id="14" name="TextBox 13"/>
+          <p:cNvSpPr txBox="1"/>
+          <p:nvPr/>
+        </p:nvSpPr>
+        <p:spPr>
+          <a:xfrm>
+            <a:off x="8046720" y="2926080"/>
+            <a:ext cx="1463040" cy="292608"/>
+          </a:xfrm>
+          <a:prstGeom prst="rect">
+            <a:avLst/>
+          </a:prstGeom>
+          <a:noFill/>
+        </p:spPr>
+        <p:txBody>
+          <a:bodyPr wrap="square" lIns="0" rIns="0" tIns="0" bIns="0" anchor="t">
+            <a:spAutoFit/>
+          </a:bodyPr>
+          <a:lstStyle/>
+          <a:p>
+            <a:pPr algn="l">
+              <a:lnSpc>
+                <a:spcPct val="106000"/>
+              </a:lnSpc>
+              <a:spcAft>
+                <a:spcPts val="0"/>
+              </a:spcAft>
+            </a:pPr>
+            <a:r>
+              <a:rPr sz="1300" b="0" i="0">
+                <a:solidFill>
+                  <a:srgbClr val="444444"/>
+                </a:solidFill>
+                <a:latin typeface="Calibri"/>
+              </a:rPr>
+              <a:t>79</a:t>
+            </a:r>
+          </a:p>
+        </p:txBody>
+      </p:sp>
+      <p:sp>
+        <p:nvSpPr>
+          <p:cNvPr id="15" name="TextBox 14"/>
+          <p:cNvSpPr txBox="1"/>
+          <p:nvPr/>
+        </p:nvSpPr>
+        <p:spPr>
+          <a:xfrm>
+            <a:off x="9692640" y="2926080"/>
+            <a:ext cx="2011680" cy="292608"/>
+          </a:xfrm>
+          <a:prstGeom prst="rect">
+            <a:avLst/>
+          </a:prstGeom>
+          <a:noFill/>
+        </p:spPr>
+        <p:txBody>
+          <a:bodyPr wrap="square" lIns="0" rIns="0" tIns="0" bIns="0" anchor="t">
+            <a:spAutoFit/>
+          </a:bodyPr>
+          <a:lstStyle/>
+          <a:p>
+            <a:pPr algn="l">
+              <a:lnSpc>
+                <a:spcPct val="106000"/>
+              </a:lnSpc>
+              <a:spcAft>
+                <a:spcPts val="0"/>
+              </a:spcAft>
+            </a:pPr>
+            <a:r>
+              <a:rPr sz="1300" b="1" i="0">
                 <a:solidFill>
                   <a:srgbClr val="111111"/>
                 </a:solidFill>
                 <a:latin typeface="Calibri"/>
               </a:rPr>
-              <a:t>We took defenses with released code, and attacks with released code, and ran the pairs that no paper reports.</a:t>
+              <a:t>0</a:t>
+            </a:r>
+          </a:p>
+        </p:txBody>
+      </p:sp>
+      <p:sp>
+        <p:nvSpPr>
+          <p:cNvPr id="16" name="TextBox 15"/>
+          <p:cNvSpPr txBox="1"/>
+          <p:nvPr/>
+        </p:nvSpPr>
+        <p:spPr>
+          <a:xfrm>
+            <a:off x="731520" y="3291840"/>
+            <a:ext cx="2468880" cy="292608"/>
+          </a:xfrm>
+          <a:prstGeom prst="rect">
+            <a:avLst/>
+          </a:prstGeom>
+          <a:noFill/>
+        </p:spPr>
+        <p:txBody>
+          <a:bodyPr wrap="square" lIns="0" rIns="0" tIns="0" bIns="0" anchor="t">
+            <a:spAutoFit/>
+          </a:bodyPr>
+          <a:lstStyle/>
+          <a:p>
+            <a:pPr algn="l">
+              <a:lnSpc>
+                <a:spcPct val="106000"/>
+              </a:lnSpc>
+              <a:spcAft>
+                <a:spcPts val="0"/>
+              </a:spcAft>
+            </a:pPr>
+            <a:r>
+              <a:rPr sz="1300" b="0" i="0">
+                <a:solidFill>
+                  <a:srgbClr val="444444"/>
+                </a:solidFill>
+                <a:latin typeface="Calibri"/>
+              </a:rPr>
+              <a:t>RAG</a:t>
+            </a:r>
+          </a:p>
+        </p:txBody>
+      </p:sp>
+      <p:sp>
+        <p:nvSpPr>
+          <p:cNvPr id="17" name="TextBox 16"/>
+          <p:cNvSpPr txBox="1"/>
+          <p:nvPr/>
+        </p:nvSpPr>
+        <p:spPr>
+          <a:xfrm>
+            <a:off x="3291839" y="3291840"/>
+            <a:ext cx="3017520" cy="292608"/>
+          </a:xfrm>
+          <a:prstGeom prst="rect">
+            <a:avLst/>
+          </a:prstGeom>
+          <a:noFill/>
+        </p:spPr>
+        <p:txBody>
+          <a:bodyPr wrap="square" lIns="0" rIns="0" tIns="0" bIns="0" anchor="t">
+            <a:spAutoFit/>
+          </a:bodyPr>
+          <a:lstStyle/>
+          <a:p>
+            <a:pPr algn="l">
+              <a:lnSpc>
+                <a:spcPct val="106000"/>
+              </a:lnSpc>
+              <a:spcAft>
+                <a:spcPts val="0"/>
+              </a:spcAft>
+            </a:pPr>
+            <a:r>
+              <a:rPr sz="1300" b="0" i="0">
+                <a:solidFill>
+                  <a:srgbClr val="444444"/>
+                </a:solidFill>
+                <a:latin typeface="Calibri"/>
+              </a:rPr>
+              <a:t>silent-corruption</a:t>
+            </a:r>
+          </a:p>
+        </p:txBody>
+      </p:sp>
+      <p:sp>
+        <p:nvSpPr>
+          <p:cNvPr id="18" name="TextBox 17"/>
+          <p:cNvSpPr txBox="1"/>
+          <p:nvPr/>
+        </p:nvSpPr>
+        <p:spPr>
+          <a:xfrm>
+            <a:off x="6492240" y="3291840"/>
+            <a:ext cx="1371600" cy="292608"/>
+          </a:xfrm>
+          <a:prstGeom prst="rect">
+            <a:avLst/>
+          </a:prstGeom>
+          <a:noFill/>
+        </p:spPr>
+        <p:txBody>
+          <a:bodyPr wrap="square" lIns="0" rIns="0" tIns="0" bIns="0" anchor="t">
+            <a:spAutoFit/>
+          </a:bodyPr>
+          <a:lstStyle/>
+          <a:p>
+            <a:pPr algn="l">
+              <a:lnSpc>
+                <a:spcPct val="106000"/>
+              </a:lnSpc>
+              <a:spcAft>
+                <a:spcPts val="0"/>
+              </a:spcAft>
+            </a:pPr>
+            <a:r>
+              <a:rPr sz="1300" b="0" i="0">
+                <a:solidFill>
+                  <a:srgbClr val="444444"/>
+                </a:solidFill>
+                <a:latin typeface="Calibri"/>
+              </a:rPr>
+              <a:t>3</a:t>
+            </a:r>
+          </a:p>
+        </p:txBody>
+      </p:sp>
+      <p:sp>
+        <p:nvSpPr>
+          <p:cNvPr id="19" name="TextBox 18"/>
+          <p:cNvSpPr txBox="1"/>
+          <p:nvPr/>
+        </p:nvSpPr>
+        <p:spPr>
+          <a:xfrm>
+            <a:off x="8046720" y="3291840"/>
+            <a:ext cx="1463040" cy="292608"/>
+          </a:xfrm>
+          <a:prstGeom prst="rect">
+            <a:avLst/>
+          </a:prstGeom>
+          <a:noFill/>
+        </p:spPr>
+        <p:txBody>
+          <a:bodyPr wrap="square" lIns="0" rIns="0" tIns="0" bIns="0" anchor="t">
+            <a:spAutoFit/>
+          </a:bodyPr>
+          <a:lstStyle/>
+          <a:p>
+            <a:pPr algn="l">
+              <a:lnSpc>
+                <a:spcPct val="106000"/>
+              </a:lnSpc>
+              <a:spcAft>
+                <a:spcPts val="0"/>
+              </a:spcAft>
+            </a:pPr>
+            <a:r>
+              <a:rPr sz="1300" b="0" i="0">
+                <a:solidFill>
+                  <a:srgbClr val="444444"/>
+                </a:solidFill>
+                <a:latin typeface="Calibri"/>
+              </a:rPr>
+              <a:t>42</a:t>
+            </a:r>
+          </a:p>
+        </p:txBody>
+      </p:sp>
+      <p:sp>
+        <p:nvSpPr>
+          <p:cNvPr id="20" name="TextBox 19"/>
+          <p:cNvSpPr txBox="1"/>
+          <p:nvPr/>
+        </p:nvSpPr>
+        <p:spPr>
+          <a:xfrm>
+            <a:off x="9692640" y="3291840"/>
+            <a:ext cx="2011680" cy="292608"/>
+          </a:xfrm>
+          <a:prstGeom prst="rect">
+            <a:avLst/>
+          </a:prstGeom>
+          <a:noFill/>
+        </p:spPr>
+        <p:txBody>
+          <a:bodyPr wrap="square" lIns="0" rIns="0" tIns="0" bIns="0" anchor="t">
+            <a:spAutoFit/>
+          </a:bodyPr>
+          <a:lstStyle/>
+          <a:p>
+            <a:pPr algn="l">
+              <a:lnSpc>
+                <a:spcPct val="106000"/>
+              </a:lnSpc>
+              <a:spcAft>
+                <a:spcPts val="0"/>
+              </a:spcAft>
+            </a:pPr>
+            <a:r>
+              <a:rPr sz="1300" b="1" i="0">
+                <a:solidFill>
+                  <a:srgbClr val="111111"/>
+                </a:solidFill>
+                <a:latin typeface="Calibri"/>
+              </a:rPr>
+              <a:t>0</a:t>
+            </a:r>
+          </a:p>
+        </p:txBody>
+      </p:sp>
+      <p:sp>
+        <p:nvSpPr>
+          <p:cNvPr id="21" name="TextBox 20"/>
+          <p:cNvSpPr txBox="1"/>
+          <p:nvPr/>
+        </p:nvSpPr>
+        <p:spPr>
+          <a:xfrm>
+            <a:off x="731520" y="3657600"/>
+            <a:ext cx="2468880" cy="292608"/>
+          </a:xfrm>
+          <a:prstGeom prst="rect">
+            <a:avLst/>
+          </a:prstGeom>
+          <a:noFill/>
+        </p:spPr>
+        <p:txBody>
+          <a:bodyPr wrap="square" lIns="0" rIns="0" tIns="0" bIns="0" anchor="t">
+            <a:spAutoFit/>
+          </a:bodyPr>
+          <a:lstStyle/>
+          <a:p>
+            <a:pPr algn="l">
+              <a:lnSpc>
+                <a:spcPct val="106000"/>
+              </a:lnSpc>
+              <a:spcAft>
+                <a:spcPts val="0"/>
+              </a:spcAft>
+            </a:pPr>
+            <a:r>
+              <a:rPr sz="1300" b="0" i="0">
+                <a:solidFill>
+                  <a:srgbClr val="444444"/>
+                </a:solidFill>
+                <a:latin typeface="Calibri"/>
+              </a:rPr>
+              <a:t>tool-output</a:t>
+            </a:r>
+          </a:p>
+        </p:txBody>
+      </p:sp>
+      <p:sp>
+        <p:nvSpPr>
+          <p:cNvPr id="22" name="TextBox 21"/>
+          <p:cNvSpPr txBox="1"/>
+          <p:nvPr/>
+        </p:nvSpPr>
+        <p:spPr>
+          <a:xfrm>
+            <a:off x="3291839" y="3657600"/>
+            <a:ext cx="3017520" cy="292608"/>
+          </a:xfrm>
+          <a:prstGeom prst="rect">
+            <a:avLst/>
+          </a:prstGeom>
+          <a:noFill/>
+        </p:spPr>
+        <p:txBody>
+          <a:bodyPr wrap="square" lIns="0" rIns="0" tIns="0" bIns="0" anchor="t">
+            <a:spAutoFit/>
+          </a:bodyPr>
+          <a:lstStyle/>
+          <a:p>
+            <a:pPr algn="l">
+              <a:lnSpc>
+                <a:spcPct val="106000"/>
+              </a:lnSpc>
+              <a:spcAft>
+                <a:spcPts val="0"/>
+              </a:spcAft>
+            </a:pPr>
+            <a:r>
+              <a:rPr sz="1300" b="0" i="0">
+                <a:solidFill>
+                  <a:srgbClr val="444444"/>
+                </a:solidFill>
+                <a:latin typeface="Calibri"/>
+              </a:rPr>
+              <a:t>goal-hijack</a:t>
+            </a:r>
+          </a:p>
+        </p:txBody>
+      </p:sp>
+      <p:sp>
+        <p:nvSpPr>
+          <p:cNvPr id="23" name="TextBox 22"/>
+          <p:cNvSpPr txBox="1"/>
+          <p:nvPr/>
+        </p:nvSpPr>
+        <p:spPr>
+          <a:xfrm>
+            <a:off x="6492240" y="3657600"/>
+            <a:ext cx="1371600" cy="292608"/>
+          </a:xfrm>
+          <a:prstGeom prst="rect">
+            <a:avLst/>
+          </a:prstGeom>
+          <a:noFill/>
+        </p:spPr>
+        <p:txBody>
+          <a:bodyPr wrap="square" lIns="0" rIns="0" tIns="0" bIns="0" anchor="t">
+            <a:spAutoFit/>
+          </a:bodyPr>
+          <a:lstStyle/>
+          <a:p>
+            <a:pPr algn="l">
+              <a:lnSpc>
+                <a:spcPct val="106000"/>
+              </a:lnSpc>
+              <a:spcAft>
+                <a:spcPts val="0"/>
+              </a:spcAft>
+            </a:pPr>
+            <a:r>
+              <a:rPr sz="1300" b="0" i="0">
+                <a:solidFill>
+                  <a:srgbClr val="444444"/>
+                </a:solidFill>
+                <a:latin typeface="Calibri"/>
+              </a:rPr>
+              <a:t>61</a:t>
+            </a:r>
+          </a:p>
+        </p:txBody>
+      </p:sp>
+      <p:sp>
+        <p:nvSpPr>
+          <p:cNvPr id="24" name="TextBox 23"/>
+          <p:cNvSpPr txBox="1"/>
+          <p:nvPr/>
+        </p:nvSpPr>
+        <p:spPr>
+          <a:xfrm>
+            <a:off x="8046720" y="3657600"/>
+            <a:ext cx="1463040" cy="292608"/>
+          </a:xfrm>
+          <a:prstGeom prst="rect">
+            <a:avLst/>
+          </a:prstGeom>
+          <a:noFill/>
+        </p:spPr>
+        <p:txBody>
+          <a:bodyPr wrap="square" lIns="0" rIns="0" tIns="0" bIns="0" anchor="t">
+            <a:spAutoFit/>
+          </a:bodyPr>
+          <a:lstStyle/>
+          <a:p>
+            <a:pPr algn="l">
+              <a:lnSpc>
+                <a:spcPct val="106000"/>
+              </a:lnSpc>
+              <a:spcAft>
+                <a:spcPts val="0"/>
+              </a:spcAft>
+            </a:pPr>
+            <a:r>
+              <a:rPr sz="1300" b="0" i="0">
+                <a:solidFill>
+                  <a:srgbClr val="444444"/>
+                </a:solidFill>
+                <a:latin typeface="Calibri"/>
+              </a:rPr>
+              <a:t>1</a:t>
+            </a:r>
+          </a:p>
+        </p:txBody>
+      </p:sp>
+      <p:sp>
+        <p:nvSpPr>
+          <p:cNvPr id="25" name="TextBox 24"/>
+          <p:cNvSpPr txBox="1"/>
+          <p:nvPr/>
+        </p:nvSpPr>
+        <p:spPr>
+          <a:xfrm>
+            <a:off x="9692640" y="3657600"/>
+            <a:ext cx="2011680" cy="292608"/>
+          </a:xfrm>
+          <a:prstGeom prst="rect">
+            <a:avLst/>
+          </a:prstGeom>
+          <a:noFill/>
+        </p:spPr>
+        <p:txBody>
+          <a:bodyPr wrap="square" lIns="0" rIns="0" tIns="0" bIns="0" anchor="t">
+            <a:spAutoFit/>
+          </a:bodyPr>
+          <a:lstStyle/>
+          <a:p>
+            <a:pPr algn="l">
+              <a:lnSpc>
+                <a:spcPct val="106000"/>
+              </a:lnSpc>
+              <a:spcAft>
+                <a:spcPts val="0"/>
+              </a:spcAft>
+            </a:pPr>
+            <a:r>
+              <a:rPr sz="1300" b="1" i="0">
+                <a:solidFill>
+                  <a:srgbClr val="111111"/>
+                </a:solidFill>
+                <a:latin typeface="Calibri"/>
+              </a:rPr>
+              <a:t>0</a:t>
+            </a:r>
+          </a:p>
+        </p:txBody>
+      </p:sp>
+      <p:sp>
+        <p:nvSpPr>
+          <p:cNvPr id="26" name="TextBox 25"/>
+          <p:cNvSpPr txBox="1"/>
+          <p:nvPr/>
+        </p:nvSpPr>
+        <p:spPr>
+          <a:xfrm>
+            <a:off x="731520" y="4023360"/>
+            <a:ext cx="2468880" cy="292608"/>
+          </a:xfrm>
+          <a:prstGeom prst="rect">
+            <a:avLst/>
+          </a:prstGeom>
+          <a:noFill/>
+        </p:spPr>
+        <p:txBody>
+          <a:bodyPr wrap="square" lIns="0" rIns="0" tIns="0" bIns="0" anchor="t">
+            <a:spAutoFit/>
+          </a:bodyPr>
+          <a:lstStyle/>
+          <a:p>
+            <a:pPr algn="l">
+              <a:lnSpc>
+                <a:spcPct val="106000"/>
+              </a:lnSpc>
+              <a:spcAft>
+                <a:spcPts val="0"/>
+              </a:spcAft>
+            </a:pPr>
+            <a:r>
+              <a:rPr sz="1300" b="0" i="0">
+                <a:solidFill>
+                  <a:srgbClr val="444444"/>
+                </a:solidFill>
+                <a:latin typeface="Calibri"/>
+              </a:rPr>
+              <a:t>RAG</a:t>
+            </a:r>
+          </a:p>
+        </p:txBody>
+      </p:sp>
+      <p:sp>
+        <p:nvSpPr>
+          <p:cNvPr id="27" name="TextBox 26"/>
+          <p:cNvSpPr txBox="1"/>
+          <p:nvPr/>
+        </p:nvSpPr>
+        <p:spPr>
+          <a:xfrm>
+            <a:off x="3291839" y="4023360"/>
+            <a:ext cx="3017520" cy="292608"/>
+          </a:xfrm>
+          <a:prstGeom prst="rect">
+            <a:avLst/>
+          </a:prstGeom>
+          <a:noFill/>
+        </p:spPr>
+        <p:txBody>
+          <a:bodyPr wrap="square" lIns="0" rIns="0" tIns="0" bIns="0" anchor="t">
+            <a:spAutoFit/>
+          </a:bodyPr>
+          <a:lstStyle/>
+          <a:p>
+            <a:pPr algn="l">
+              <a:lnSpc>
+                <a:spcPct val="106000"/>
+              </a:lnSpc>
+              <a:spcAft>
+                <a:spcPts val="0"/>
+              </a:spcAft>
+            </a:pPr>
+            <a:r>
+              <a:rPr sz="1300" b="0" i="0">
+                <a:solidFill>
+                  <a:srgbClr val="444444"/>
+                </a:solidFill>
+                <a:latin typeface="Calibri"/>
+              </a:rPr>
+              <a:t>reasoning-corruption</a:t>
+            </a:r>
+          </a:p>
+        </p:txBody>
+      </p:sp>
+      <p:sp>
+        <p:nvSpPr>
+          <p:cNvPr id="28" name="TextBox 27"/>
+          <p:cNvSpPr txBox="1"/>
+          <p:nvPr/>
+        </p:nvSpPr>
+        <p:spPr>
+          <a:xfrm>
+            <a:off x="6492240" y="4023360"/>
+            <a:ext cx="1371600" cy="292608"/>
+          </a:xfrm>
+          <a:prstGeom prst="rect">
+            <a:avLst/>
+          </a:prstGeom>
+          <a:noFill/>
+        </p:spPr>
+        <p:txBody>
+          <a:bodyPr wrap="square" lIns="0" rIns="0" tIns="0" bIns="0" anchor="t">
+            <a:spAutoFit/>
+          </a:bodyPr>
+          <a:lstStyle/>
+          <a:p>
+            <a:pPr algn="l">
+              <a:lnSpc>
+                <a:spcPct val="106000"/>
+              </a:lnSpc>
+              <a:spcAft>
+                <a:spcPts val="0"/>
+              </a:spcAft>
+            </a:pPr>
+            <a:r>
+              <a:rPr sz="1300" b="0" i="0">
+                <a:solidFill>
+                  <a:srgbClr val="444444"/>
+                </a:solidFill>
+                <a:latin typeface="Calibri"/>
+              </a:rPr>
+              <a:t>2</a:t>
+            </a:r>
+          </a:p>
+        </p:txBody>
+      </p:sp>
+      <p:sp>
+        <p:nvSpPr>
+          <p:cNvPr id="29" name="TextBox 28"/>
+          <p:cNvSpPr txBox="1"/>
+          <p:nvPr/>
+        </p:nvSpPr>
+        <p:spPr>
+          <a:xfrm>
+            <a:off x="8046720" y="4023360"/>
+            <a:ext cx="1463040" cy="292608"/>
+          </a:xfrm>
+          <a:prstGeom prst="rect">
+            <a:avLst/>
+          </a:prstGeom>
+          <a:noFill/>
+        </p:spPr>
+        <p:txBody>
+          <a:bodyPr wrap="square" lIns="0" rIns="0" tIns="0" bIns="0" anchor="t">
+            <a:spAutoFit/>
+          </a:bodyPr>
+          <a:lstStyle/>
+          <a:p>
+            <a:pPr algn="l">
+              <a:lnSpc>
+                <a:spcPct val="106000"/>
+              </a:lnSpc>
+              <a:spcAft>
+                <a:spcPts val="0"/>
+              </a:spcAft>
+            </a:pPr>
+            <a:r>
+              <a:rPr sz="1300" b="0" i="0">
+                <a:solidFill>
+                  <a:srgbClr val="444444"/>
+                </a:solidFill>
+                <a:latin typeface="Calibri"/>
+              </a:rPr>
+              <a:t>17</a:t>
+            </a:r>
+          </a:p>
+        </p:txBody>
+      </p:sp>
+      <p:sp>
+        <p:nvSpPr>
+          <p:cNvPr id="30" name="TextBox 29"/>
+          <p:cNvSpPr txBox="1"/>
+          <p:nvPr/>
+        </p:nvSpPr>
+        <p:spPr>
+          <a:xfrm>
+            <a:off x="9692640" y="4023360"/>
+            <a:ext cx="2011680" cy="292608"/>
+          </a:xfrm>
+          <a:prstGeom prst="rect">
+            <a:avLst/>
+          </a:prstGeom>
+          <a:noFill/>
+        </p:spPr>
+        <p:txBody>
+          <a:bodyPr wrap="square" lIns="0" rIns="0" tIns="0" bIns="0" anchor="t">
+            <a:spAutoFit/>
+          </a:bodyPr>
+          <a:lstStyle/>
+          <a:p>
+            <a:pPr algn="l">
+              <a:lnSpc>
+                <a:spcPct val="106000"/>
+              </a:lnSpc>
+              <a:spcAft>
+                <a:spcPts val="0"/>
+              </a:spcAft>
+            </a:pPr>
+            <a:r>
+              <a:rPr sz="1300" b="1" i="0">
+                <a:solidFill>
+                  <a:srgbClr val="111111"/>
+                </a:solidFill>
+                <a:latin typeface="Calibri"/>
+              </a:rPr>
+              <a:t>0</a:t>
+            </a:r>
+          </a:p>
+        </p:txBody>
+      </p:sp>
+      <p:sp>
+        <p:nvSpPr>
+          <p:cNvPr id="31" name="TextBox 30"/>
+          <p:cNvSpPr txBox="1"/>
+          <p:nvPr/>
+        </p:nvSpPr>
+        <p:spPr>
+          <a:xfrm>
+            <a:off x="731520" y="4389120"/>
+            <a:ext cx="2468880" cy="292608"/>
+          </a:xfrm>
+          <a:prstGeom prst="rect">
+            <a:avLst/>
+          </a:prstGeom>
+          <a:noFill/>
+        </p:spPr>
+        <p:txBody>
+          <a:bodyPr wrap="square" lIns="0" rIns="0" tIns="0" bIns="0" anchor="t">
+            <a:spAutoFit/>
+          </a:bodyPr>
+          <a:lstStyle/>
+          <a:p>
+            <a:pPr algn="l">
+              <a:lnSpc>
+                <a:spcPct val="106000"/>
+              </a:lnSpc>
+              <a:spcAft>
+                <a:spcPts val="0"/>
+              </a:spcAft>
+            </a:pPr>
+            <a:r>
+              <a:rPr sz="1300" b="0" i="0">
+                <a:solidFill>
+                  <a:srgbClr val="444444"/>
+                </a:solidFill>
+                <a:latin typeface="Calibri"/>
+              </a:rPr>
+              <a:t>direct-input</a:t>
+            </a:r>
+          </a:p>
+        </p:txBody>
+      </p:sp>
+      <p:sp>
+        <p:nvSpPr>
+          <p:cNvPr id="32" name="TextBox 31"/>
+          <p:cNvSpPr txBox="1"/>
+          <p:nvPr/>
+        </p:nvSpPr>
+        <p:spPr>
+          <a:xfrm>
+            <a:off x="3291839" y="4389120"/>
+            <a:ext cx="3017520" cy="292608"/>
+          </a:xfrm>
+          <a:prstGeom prst="rect">
+            <a:avLst/>
+          </a:prstGeom>
+          <a:noFill/>
+        </p:spPr>
+        <p:txBody>
+          <a:bodyPr wrap="square" lIns="0" rIns="0" tIns="0" bIns="0" anchor="t">
+            <a:spAutoFit/>
+          </a:bodyPr>
+          <a:lstStyle/>
+          <a:p>
+            <a:pPr algn="l">
+              <a:lnSpc>
+                <a:spcPct val="106000"/>
+              </a:lnSpc>
+              <a:spcAft>
+                <a:spcPts val="0"/>
+              </a:spcAft>
+            </a:pPr>
+            <a:r>
+              <a:rPr sz="1300" b="0" i="0">
+                <a:solidFill>
+                  <a:srgbClr val="444444"/>
+                </a:solidFill>
+                <a:latin typeface="Calibri"/>
+              </a:rPr>
+              <a:t>goal-hijack</a:t>
+            </a:r>
+          </a:p>
+        </p:txBody>
+      </p:sp>
+      <p:sp>
+        <p:nvSpPr>
+          <p:cNvPr id="33" name="TextBox 32"/>
+          <p:cNvSpPr txBox="1"/>
+          <p:nvPr/>
+        </p:nvSpPr>
+        <p:spPr>
+          <a:xfrm>
+            <a:off x="6492240" y="4389120"/>
+            <a:ext cx="1371600" cy="292608"/>
+          </a:xfrm>
+          <a:prstGeom prst="rect">
+            <a:avLst/>
+          </a:prstGeom>
+          <a:noFill/>
+        </p:spPr>
+        <p:txBody>
+          <a:bodyPr wrap="square" lIns="0" rIns="0" tIns="0" bIns="0" anchor="t">
+            <a:spAutoFit/>
+          </a:bodyPr>
+          <a:lstStyle/>
+          <a:p>
+            <a:pPr algn="l">
+              <a:lnSpc>
+                <a:spcPct val="106000"/>
+              </a:lnSpc>
+              <a:spcAft>
+                <a:spcPts val="0"/>
+              </a:spcAft>
+            </a:pPr>
+            <a:r>
+              <a:rPr sz="1300" b="0" i="0">
+                <a:solidFill>
+                  <a:srgbClr val="444444"/>
+                </a:solidFill>
+                <a:latin typeface="Calibri"/>
+              </a:rPr>
+              <a:t>27</a:t>
+            </a:r>
+          </a:p>
+        </p:txBody>
+      </p:sp>
+      <p:sp>
+        <p:nvSpPr>
+          <p:cNvPr id="34" name="TextBox 33"/>
+          <p:cNvSpPr txBox="1"/>
+          <p:nvPr/>
+        </p:nvSpPr>
+        <p:spPr>
+          <a:xfrm>
+            <a:off x="8046720" y="4389120"/>
+            <a:ext cx="1463040" cy="292608"/>
+          </a:xfrm>
+          <a:prstGeom prst="rect">
+            <a:avLst/>
+          </a:prstGeom>
+          <a:noFill/>
+        </p:spPr>
+        <p:txBody>
+          <a:bodyPr wrap="square" lIns="0" rIns="0" tIns="0" bIns="0" anchor="t">
+            <a:spAutoFit/>
+          </a:bodyPr>
+          <a:lstStyle/>
+          <a:p>
+            <a:pPr algn="l">
+              <a:lnSpc>
+                <a:spcPct val="106000"/>
+              </a:lnSpc>
+              <a:spcAft>
+                <a:spcPts val="0"/>
+              </a:spcAft>
+            </a:pPr>
+            <a:r>
+              <a:rPr sz="1300" b="0" i="0">
+                <a:solidFill>
+                  <a:srgbClr val="444444"/>
+                </a:solidFill>
+                <a:latin typeface="Calibri"/>
+              </a:rPr>
+              <a:t>1</a:t>
+            </a:r>
+          </a:p>
+        </p:txBody>
+      </p:sp>
+      <p:sp>
+        <p:nvSpPr>
+          <p:cNvPr id="35" name="TextBox 34"/>
+          <p:cNvSpPr txBox="1"/>
+          <p:nvPr/>
+        </p:nvSpPr>
+        <p:spPr>
+          <a:xfrm>
+            <a:off x="9692640" y="4389120"/>
+            <a:ext cx="2011680" cy="292608"/>
+          </a:xfrm>
+          <a:prstGeom prst="rect">
+            <a:avLst/>
+          </a:prstGeom>
+          <a:noFill/>
+        </p:spPr>
+        <p:txBody>
+          <a:bodyPr wrap="square" lIns="0" rIns="0" tIns="0" bIns="0" anchor="t">
+            <a:spAutoFit/>
+          </a:bodyPr>
+          <a:lstStyle/>
+          <a:p>
+            <a:pPr algn="l">
+              <a:lnSpc>
+                <a:spcPct val="106000"/>
+              </a:lnSpc>
+              <a:spcAft>
+                <a:spcPts val="0"/>
+              </a:spcAft>
+            </a:pPr>
+            <a:r>
+              <a:rPr sz="1300" b="1" i="0">
+                <a:solidFill>
+                  <a:srgbClr val="111111"/>
+                </a:solidFill>
+                <a:latin typeface="Calibri"/>
+              </a:rPr>
+              <a:t>0</a:t>
+            </a:r>
+          </a:p>
+        </p:txBody>
+      </p:sp>
+      <p:sp>
+        <p:nvSpPr>
+          <p:cNvPr id="36" name="TextBox 35"/>
+          <p:cNvSpPr txBox="1"/>
+          <p:nvPr/>
+        </p:nvSpPr>
+        <p:spPr>
+          <a:xfrm>
+            <a:off x="731520" y="4754880"/>
+            <a:ext cx="2468880" cy="292608"/>
+          </a:xfrm>
+          <a:prstGeom prst="rect">
+            <a:avLst/>
+          </a:prstGeom>
+          <a:noFill/>
+        </p:spPr>
+        <p:txBody>
+          <a:bodyPr wrap="square" lIns="0" rIns="0" tIns="0" bIns="0" anchor="t">
+            <a:spAutoFit/>
+          </a:bodyPr>
+          <a:lstStyle/>
+          <a:p>
+            <a:pPr algn="l">
+              <a:lnSpc>
+                <a:spcPct val="106000"/>
+              </a:lnSpc>
+              <a:spcAft>
+                <a:spcPts val="0"/>
+              </a:spcAft>
+            </a:pPr>
+            <a:r>
+              <a:rPr sz="1300" b="0" i="0">
+                <a:solidFill>
+                  <a:srgbClr val="444444"/>
+                </a:solidFill>
+                <a:latin typeface="Calibri"/>
+              </a:rPr>
+              <a:t>direct-input</a:t>
+            </a:r>
+          </a:p>
+        </p:txBody>
+      </p:sp>
+      <p:sp>
+        <p:nvSpPr>
+          <p:cNvPr id="37" name="TextBox 36"/>
+          <p:cNvSpPr txBox="1"/>
+          <p:nvPr/>
+        </p:nvSpPr>
+        <p:spPr>
+          <a:xfrm>
+            <a:off x="3291839" y="4754880"/>
+            <a:ext cx="3017520" cy="292608"/>
+          </a:xfrm>
+          <a:prstGeom prst="rect">
+            <a:avLst/>
+          </a:prstGeom>
+          <a:noFill/>
+        </p:spPr>
+        <p:txBody>
+          <a:bodyPr wrap="square" lIns="0" rIns="0" tIns="0" bIns="0" anchor="t">
+            <a:spAutoFit/>
+          </a:bodyPr>
+          <a:lstStyle/>
+          <a:p>
+            <a:pPr algn="l">
+              <a:lnSpc>
+                <a:spcPct val="106000"/>
+              </a:lnSpc>
+              <a:spcAft>
+                <a:spcPts val="0"/>
+              </a:spcAft>
+            </a:pPr>
+            <a:r>
+              <a:rPr sz="1300" b="0" i="0">
+                <a:solidFill>
+                  <a:srgbClr val="444444"/>
+                </a:solidFill>
+                <a:latin typeface="Calibri"/>
+              </a:rPr>
+              <a:t>silent-corruption</a:t>
+            </a:r>
+          </a:p>
+        </p:txBody>
+      </p:sp>
+      <p:sp>
+        <p:nvSpPr>
+          <p:cNvPr id="38" name="TextBox 37"/>
+          <p:cNvSpPr txBox="1"/>
+          <p:nvPr/>
+        </p:nvSpPr>
+        <p:spPr>
+          <a:xfrm>
+            <a:off x="6492240" y="4754880"/>
+            <a:ext cx="1371600" cy="292608"/>
+          </a:xfrm>
+          <a:prstGeom prst="rect">
+            <a:avLst/>
+          </a:prstGeom>
+          <a:noFill/>
+        </p:spPr>
+        <p:txBody>
+          <a:bodyPr wrap="square" lIns="0" rIns="0" tIns="0" bIns="0" anchor="t">
+            <a:spAutoFit/>
+          </a:bodyPr>
+          <a:lstStyle/>
+          <a:p>
+            <a:pPr algn="l">
+              <a:lnSpc>
+                <a:spcPct val="106000"/>
+              </a:lnSpc>
+              <a:spcAft>
+                <a:spcPts val="0"/>
+              </a:spcAft>
+            </a:pPr>
+            <a:r>
+              <a:rPr sz="1300" b="0" i="0">
+                <a:solidFill>
+                  <a:srgbClr val="444444"/>
+                </a:solidFill>
+                <a:latin typeface="Calibri"/>
+              </a:rPr>
+              <a:t>1</a:t>
+            </a:r>
+          </a:p>
+        </p:txBody>
+      </p:sp>
+      <p:sp>
+        <p:nvSpPr>
+          <p:cNvPr id="39" name="TextBox 38"/>
+          <p:cNvSpPr txBox="1"/>
+          <p:nvPr/>
+        </p:nvSpPr>
+        <p:spPr>
+          <a:xfrm>
+            <a:off x="8046720" y="4754880"/>
+            <a:ext cx="1463040" cy="292608"/>
+          </a:xfrm>
+          <a:prstGeom prst="rect">
+            <a:avLst/>
+          </a:prstGeom>
+          <a:noFill/>
+        </p:spPr>
+        <p:txBody>
+          <a:bodyPr wrap="square" lIns="0" rIns="0" tIns="0" bIns="0" anchor="t">
+            <a:spAutoFit/>
+          </a:bodyPr>
+          <a:lstStyle/>
+          <a:p>
+            <a:pPr algn="l">
+              <a:lnSpc>
+                <a:spcPct val="106000"/>
+              </a:lnSpc>
+              <a:spcAft>
+                <a:spcPts val="0"/>
+              </a:spcAft>
+            </a:pPr>
+            <a:r>
+              <a:rPr sz="1300" b="0" i="0">
+                <a:solidFill>
+                  <a:srgbClr val="444444"/>
+                </a:solidFill>
+                <a:latin typeface="Calibri"/>
+              </a:rPr>
+              <a:t>11</a:t>
+            </a:r>
+          </a:p>
+        </p:txBody>
+      </p:sp>
+      <p:sp>
+        <p:nvSpPr>
+          <p:cNvPr id="40" name="TextBox 39"/>
+          <p:cNvSpPr txBox="1"/>
+          <p:nvPr/>
+        </p:nvSpPr>
+        <p:spPr>
+          <a:xfrm>
+            <a:off x="9692640" y="4754880"/>
+            <a:ext cx="2011680" cy="292608"/>
+          </a:xfrm>
+          <a:prstGeom prst="rect">
+            <a:avLst/>
+          </a:prstGeom>
+          <a:noFill/>
+        </p:spPr>
+        <p:txBody>
+          <a:bodyPr wrap="square" lIns="0" rIns="0" tIns="0" bIns="0" anchor="t">
+            <a:spAutoFit/>
+          </a:bodyPr>
+          <a:lstStyle/>
+          <a:p>
+            <a:pPr algn="l">
+              <a:lnSpc>
+                <a:spcPct val="106000"/>
+              </a:lnSpc>
+              <a:spcAft>
+                <a:spcPts val="0"/>
+              </a:spcAft>
+            </a:pPr>
+            <a:r>
+              <a:rPr sz="1300" b="1" i="0">
+                <a:solidFill>
+                  <a:srgbClr val="111111"/>
+                </a:solidFill>
+                <a:latin typeface="Calibri"/>
+              </a:rPr>
+              <a:t>0</a:t>
+            </a:r>
+          </a:p>
+        </p:txBody>
+      </p:sp>
+      <p:sp>
+        <p:nvSpPr>
+          <p:cNvPr id="41" name="TextBox 40"/>
+          <p:cNvSpPr txBox="1"/>
+          <p:nvPr/>
+        </p:nvSpPr>
+        <p:spPr>
+          <a:xfrm>
+            <a:off x="731520" y="5120640"/>
+            <a:ext cx="2468880" cy="292608"/>
+          </a:xfrm>
+          <a:prstGeom prst="rect">
+            <a:avLst/>
+          </a:prstGeom>
+          <a:noFill/>
+        </p:spPr>
+        <p:txBody>
+          <a:bodyPr wrap="square" lIns="0" rIns="0" tIns="0" bIns="0" anchor="t">
+            <a:spAutoFit/>
+          </a:bodyPr>
+          <a:lstStyle/>
+          <a:p>
+            <a:pPr algn="l">
+              <a:lnSpc>
+                <a:spcPct val="106000"/>
+              </a:lnSpc>
+              <a:spcAft>
+                <a:spcPts val="0"/>
+              </a:spcAft>
+            </a:pPr>
+            <a:r>
+              <a:rPr sz="1300" b="0" i="0">
+                <a:solidFill>
+                  <a:srgbClr val="444444"/>
+                </a:solidFill>
+                <a:latin typeface="Calibri"/>
+              </a:rPr>
+              <a:t>memory</a:t>
+            </a:r>
+          </a:p>
+        </p:txBody>
+      </p:sp>
+      <p:sp>
+        <p:nvSpPr>
+          <p:cNvPr id="42" name="TextBox 41"/>
+          <p:cNvSpPr txBox="1"/>
+          <p:nvPr/>
+        </p:nvSpPr>
+        <p:spPr>
+          <a:xfrm>
+            <a:off x="3291839" y="5120640"/>
+            <a:ext cx="3017520" cy="292608"/>
+          </a:xfrm>
+          <a:prstGeom prst="rect">
+            <a:avLst/>
+          </a:prstGeom>
+          <a:noFill/>
+        </p:spPr>
+        <p:txBody>
+          <a:bodyPr wrap="square" lIns="0" rIns="0" tIns="0" bIns="0" anchor="t">
+            <a:spAutoFit/>
+          </a:bodyPr>
+          <a:lstStyle/>
+          <a:p>
+            <a:pPr algn="l">
+              <a:lnSpc>
+                <a:spcPct val="106000"/>
+              </a:lnSpc>
+              <a:spcAft>
+                <a:spcPts val="0"/>
+              </a:spcAft>
+            </a:pPr>
+            <a:r>
+              <a:rPr sz="1300" b="0" i="0">
+                <a:solidFill>
+                  <a:srgbClr val="444444"/>
+                </a:solidFill>
+                <a:latin typeface="Calibri"/>
+              </a:rPr>
+              <a:t>persistence-backdoor</a:t>
+            </a:r>
+          </a:p>
+        </p:txBody>
+      </p:sp>
+      <p:sp>
+        <p:nvSpPr>
+          <p:cNvPr id="43" name="TextBox 42"/>
+          <p:cNvSpPr txBox="1"/>
+          <p:nvPr/>
+        </p:nvSpPr>
+        <p:spPr>
+          <a:xfrm>
+            <a:off x="6492240" y="5120640"/>
+            <a:ext cx="1371600" cy="292608"/>
+          </a:xfrm>
+          <a:prstGeom prst="rect">
+            <a:avLst/>
+          </a:prstGeom>
+          <a:noFill/>
+        </p:spPr>
+        <p:txBody>
+          <a:bodyPr wrap="square" lIns="0" rIns="0" tIns="0" bIns="0" anchor="t">
+            <a:spAutoFit/>
+          </a:bodyPr>
+          <a:lstStyle/>
+          <a:p>
+            <a:pPr algn="l">
+              <a:lnSpc>
+                <a:spcPct val="106000"/>
+              </a:lnSpc>
+              <a:spcAft>
+                <a:spcPts val="0"/>
+              </a:spcAft>
+            </a:pPr>
+            <a:r>
+              <a:rPr sz="1300" b="0" i="0">
+                <a:solidFill>
+                  <a:srgbClr val="444444"/>
+                </a:solidFill>
+                <a:latin typeface="Calibri"/>
+              </a:rPr>
+              <a:t>7</a:t>
+            </a:r>
+          </a:p>
+        </p:txBody>
+      </p:sp>
+      <p:sp>
+        <p:nvSpPr>
+          <p:cNvPr id="44" name="TextBox 43"/>
+          <p:cNvSpPr txBox="1"/>
+          <p:nvPr/>
+        </p:nvSpPr>
+        <p:spPr>
+          <a:xfrm>
+            <a:off x="8046720" y="5120640"/>
+            <a:ext cx="1463040" cy="292608"/>
+          </a:xfrm>
+          <a:prstGeom prst="rect">
+            <a:avLst/>
+          </a:prstGeom>
+          <a:noFill/>
+        </p:spPr>
+        <p:txBody>
+          <a:bodyPr wrap="square" lIns="0" rIns="0" tIns="0" bIns="0" anchor="t">
+            <a:spAutoFit/>
+          </a:bodyPr>
+          <a:lstStyle/>
+          <a:p>
+            <a:pPr algn="l">
+              <a:lnSpc>
+                <a:spcPct val="106000"/>
+              </a:lnSpc>
+              <a:spcAft>
+                <a:spcPts val="0"/>
+              </a:spcAft>
+            </a:pPr>
+            <a:r>
+              <a:rPr sz="1300" b="0" i="0">
+                <a:solidFill>
+                  <a:srgbClr val="444444"/>
+                </a:solidFill>
+                <a:latin typeface="Calibri"/>
+              </a:rPr>
+              <a:t>1</a:t>
+            </a:r>
+          </a:p>
+        </p:txBody>
+      </p:sp>
+      <p:sp>
+        <p:nvSpPr>
+          <p:cNvPr id="45" name="TextBox 44"/>
+          <p:cNvSpPr txBox="1"/>
+          <p:nvPr/>
+        </p:nvSpPr>
+        <p:spPr>
+          <a:xfrm>
+            <a:off x="9692640" y="5120640"/>
+            <a:ext cx="2011680" cy="292608"/>
+          </a:xfrm>
+          <a:prstGeom prst="rect">
+            <a:avLst/>
+          </a:prstGeom>
+          <a:noFill/>
+        </p:spPr>
+        <p:txBody>
+          <a:bodyPr wrap="square" lIns="0" rIns="0" tIns="0" bIns="0" anchor="t">
+            <a:spAutoFit/>
+          </a:bodyPr>
+          <a:lstStyle/>
+          <a:p>
+            <a:pPr algn="l">
+              <a:lnSpc>
+                <a:spcPct val="106000"/>
+              </a:lnSpc>
+              <a:spcAft>
+                <a:spcPts val="0"/>
+              </a:spcAft>
+            </a:pPr>
+            <a:r>
+              <a:rPr sz="1300" b="1" i="0">
+                <a:solidFill>
+                  <a:srgbClr val="111111"/>
+                </a:solidFill>
+                <a:latin typeface="Calibri"/>
+              </a:rPr>
+              <a:t>0</a:t>
+            </a:r>
+          </a:p>
+        </p:txBody>
+      </p:sp>
+      <p:sp>
+        <p:nvSpPr>
+          <p:cNvPr id="46" name="TextBox 45"/>
+          <p:cNvSpPr txBox="1"/>
+          <p:nvPr/>
+        </p:nvSpPr>
+        <p:spPr>
+          <a:xfrm>
+            <a:off x="731520" y="5504688"/>
+            <a:ext cx="10725912" cy="896112"/>
+          </a:xfrm>
+          <a:prstGeom prst="rect">
+            <a:avLst/>
+          </a:prstGeom>
+          <a:noFill/>
+        </p:spPr>
+        <p:txBody>
+          <a:bodyPr wrap="square" lIns="0" rIns="0" tIns="0" bIns="0" anchor="t">
+            <a:spAutoFit/>
+          </a:bodyPr>
+          <a:lstStyle/>
+          <a:p>
+            <a:pPr algn="l">
+              <a:lnSpc>
+                <a:spcPct val="110000"/>
+              </a:lnSpc>
+              <a:spcAft>
+                <a:spcPts val="600"/>
+              </a:spcAft>
+            </a:pPr>
+            <a:r>
+              <a:rPr sz="1350" b="1" i="0">
+                <a:solidFill>
+                  <a:srgbClr val="111111"/>
+                </a:solidFill>
+                <a:latin typeface="Calibri"/>
+              </a:rPr>
+              <a:t>Every row is zero. Not one of these pairs has been tested by anybody.</a:t>
             </a:r>
           </a:p>
           <a:p>
@@ -3418,17 +5198,17 @@
                 <a:spcPct val="110000"/>
               </a:lnSpc>
               <a:spcAft>
-                <a:spcPts val="1100"/>
-              </a:spcAft>
-            </a:pPr>
-            <a:r>
-              <a:rPr sz="1500" b="0" i="0">
+                <a:spcPts val="600"/>
+              </a:spcAft>
+            </a:pPr>
+            <a:r>
+              <a:rPr sz="1350" b="0" i="0">
                 <a:solidFill>
                   <a:srgbClr val="444444"/>
                 </a:solidFill>
                 <a:latin typeface="Calibri"/>
               </a:rPr>
-              <a:t>18 defense and attack pairs. 104 measured conditions. Four attacks. Five defenses. Three models.</a:t>
+              <a:t>These cells are not ignored. tool-output and goal-hijack alone holds 169 tested pairs. But each one is a security defense against a security attack, or an accident defense against an accident. Nothing crosses.</a:t>
             </a:r>
           </a:p>
           <a:p>
@@ -3437,311 +5217,17 @@
                 <a:spcPct val="110000"/>
               </a:lnSpc>
               <a:spcAft>
-                <a:spcPts val="1100"/>
-              </a:spcAft>
-            </a:pPr>
-            <a:r>
-              <a:rPr sz="1500" b="0" i="0">
+                <a:spcPts val="600"/>
+              </a:spcAft>
+            </a:pPr>
+            <a:r>
+              <a:rPr sz="1350" b="0" i="0">
                 <a:solidFill>
                   <a:srgbClr val="444444"/>
                 </a:solidFill>
                 <a:latin typeface="Calibri"/>
               </a:rPr>
-              <a:t>We raise the attack dose from zero to ten poisoned passages out of ten, so each pair gives a curve and not a single point.</a:t>
-            </a:r>
-          </a:p>
-        </p:txBody>
-      </p:sp>
-      <p:sp>
-        <p:nvSpPr>
-          <p:cNvPr id="6" name="TextBox 5"/>
-          <p:cNvSpPr txBox="1"/>
-          <p:nvPr/>
-        </p:nvSpPr>
-        <p:spPr>
-          <a:xfrm>
-            <a:off x="731520" y="3749039"/>
-            <a:ext cx="10725912" cy="320040"/>
-          </a:xfrm>
-          <a:prstGeom prst="rect">
-            <a:avLst/>
-          </a:prstGeom>
-          <a:noFill/>
-        </p:spPr>
-        <p:txBody>
-          <a:bodyPr wrap="square" lIns="0" rIns="0" tIns="0" bIns="0" anchor="t">
-            <a:spAutoFit/>
-          </a:bodyPr>
-          <a:lstStyle/>
-          <a:p>
-            <a:pPr algn="l">
-              <a:lnSpc>
-                <a:spcPct val="106000"/>
-              </a:lnSpc>
-              <a:spcAft>
-                <a:spcPts val="1000"/>
-              </a:spcAft>
-            </a:pPr>
-            <a:r>
-              <a:rPr sz="1500" b="1" i="0">
-                <a:solidFill>
-                  <a:srgbClr val="111111"/>
-                </a:solidFill>
-                <a:latin typeface="Calibri"/>
-              </a:rPr>
-              <a:t>Two rules decide what we are allowed to claim.</a:t>
-            </a:r>
-          </a:p>
-        </p:txBody>
-      </p:sp>
-      <p:sp>
-        <p:nvSpPr>
-          <p:cNvPr id="7" name="TextBox 6"/>
-          <p:cNvSpPr txBox="1"/>
-          <p:nvPr/>
-        </p:nvSpPr>
-        <p:spPr>
-          <a:xfrm>
-            <a:off x="731520" y="4133087"/>
-            <a:ext cx="2651760" cy="310896"/>
-          </a:xfrm>
-          <a:prstGeom prst="rect">
-            <a:avLst/>
-          </a:prstGeom>
-          <a:noFill/>
-        </p:spPr>
-        <p:txBody>
-          <a:bodyPr wrap="square" lIns="0" rIns="0" tIns="0" bIns="0" anchor="t">
-            <a:spAutoFit/>
-          </a:bodyPr>
-          <a:lstStyle/>
-          <a:p>
-            <a:pPr algn="l">
-              <a:lnSpc>
-                <a:spcPct val="106000"/>
-              </a:lnSpc>
-              <a:spcAft>
-                <a:spcPts val="0"/>
-              </a:spcAft>
-            </a:pPr>
-            <a:r>
-              <a:rPr sz="1400" b="1" i="0">
-                <a:solidFill>
-                  <a:srgbClr val="111111"/>
-                </a:solidFill>
-                <a:latin typeface="Calibri"/>
-              </a:rPr>
-              <a:t>The control first</a:t>
-            </a:r>
-          </a:p>
-        </p:txBody>
-      </p:sp>
-      <p:sp>
-        <p:nvSpPr>
-          <p:cNvPr id="8" name="TextBox 7"/>
-          <p:cNvSpPr txBox="1"/>
-          <p:nvPr/>
-        </p:nvSpPr>
-        <p:spPr>
-          <a:xfrm>
-            <a:off x="3383280" y="4133087"/>
-            <a:ext cx="8074152" cy="310896"/>
-          </a:xfrm>
-          <a:prstGeom prst="rect">
-            <a:avLst/>
-          </a:prstGeom>
-          <a:noFill/>
-        </p:spPr>
-        <p:txBody>
-          <a:bodyPr wrap="square" lIns="0" rIns="0" tIns="0" bIns="0" anchor="t">
-            <a:spAutoFit/>
-          </a:bodyPr>
-          <a:lstStyle/>
-          <a:p>
-            <a:pPr algn="l">
-              <a:lnSpc>
-                <a:spcPct val="106000"/>
-              </a:lnSpc>
-              <a:spcAft>
-                <a:spcPts val="0"/>
-              </a:spcAft>
-            </a:pPr>
-            <a:r>
-              <a:rPr sz="1400" b="0" i="0">
-                <a:solidFill>
-                  <a:srgbClr val="444444"/>
-                </a:solidFill>
-                <a:latin typeface="Calibri"/>
-              </a:rPr>
-              <a:t>A defense must show its own benefit on its own task before we read anything else from it.</a:t>
-            </a:r>
-          </a:p>
-        </p:txBody>
-      </p:sp>
-      <p:sp>
-        <p:nvSpPr>
-          <p:cNvPr id="9" name="TextBox 8"/>
-          <p:cNvSpPr txBox="1"/>
-          <p:nvPr/>
-        </p:nvSpPr>
-        <p:spPr>
-          <a:xfrm>
-            <a:off x="731520" y="4773168"/>
-            <a:ext cx="2651760" cy="310896"/>
-          </a:xfrm>
-          <a:prstGeom prst="rect">
-            <a:avLst/>
-          </a:prstGeom>
-          <a:noFill/>
-        </p:spPr>
-        <p:txBody>
-          <a:bodyPr wrap="square" lIns="0" rIns="0" tIns="0" bIns="0" anchor="t">
-            <a:spAutoFit/>
-          </a:bodyPr>
-          <a:lstStyle/>
-          <a:p>
-            <a:pPr algn="l">
-              <a:lnSpc>
-                <a:spcPct val="106000"/>
-              </a:lnSpc>
-              <a:spcAft>
-                <a:spcPts val="0"/>
-              </a:spcAft>
-            </a:pPr>
-            <a:r>
-              <a:rPr sz="1400" b="1" i="0">
-                <a:solidFill>
-                  <a:srgbClr val="111111"/>
-                </a:solidFill>
-                <a:latin typeface="Calibri"/>
-              </a:rPr>
-              <a:t>A size floor</a:t>
-            </a:r>
-          </a:p>
-        </p:txBody>
-      </p:sp>
-      <p:sp>
-        <p:nvSpPr>
-          <p:cNvPr id="10" name="TextBox 9"/>
-          <p:cNvSpPr txBox="1"/>
-          <p:nvPr/>
-        </p:nvSpPr>
-        <p:spPr>
-          <a:xfrm>
-            <a:off x="3383280" y="4773168"/>
-            <a:ext cx="8074152" cy="310896"/>
-          </a:xfrm>
-          <a:prstGeom prst="rect">
-            <a:avLst/>
-          </a:prstGeom>
-          <a:noFill/>
-        </p:spPr>
-        <p:txBody>
-          <a:bodyPr wrap="square" lIns="0" rIns="0" tIns="0" bIns="0" anchor="t">
-            <a:spAutoFit/>
-          </a:bodyPr>
-          <a:lstStyle/>
-          <a:p>
-            <a:pPr algn="l">
-              <a:lnSpc>
-                <a:spcPct val="106000"/>
-              </a:lnSpc>
-              <a:spcAft>
-                <a:spcPts val="0"/>
-              </a:spcAft>
-            </a:pPr>
-            <a:r>
-              <a:rPr sz="1400" b="0" i="0">
-                <a:solidFill>
-                  <a:srgbClr val="444444"/>
-                </a:solidFill>
-                <a:latin typeface="Calibri"/>
-              </a:rPr>
-              <a:t>We fix the smallest change the sample can detect. Below that we report nothing, in either direction.</a:t>
-            </a:r>
-          </a:p>
-        </p:txBody>
-      </p:sp>
-      <p:sp>
-        <p:nvSpPr>
-          <p:cNvPr id="11" name="TextBox 10"/>
-          <p:cNvSpPr txBox="1"/>
-          <p:nvPr/>
-        </p:nvSpPr>
-        <p:spPr>
-          <a:xfrm>
-            <a:off x="731520" y="5532120"/>
-            <a:ext cx="10725912" cy="365760"/>
-          </a:xfrm>
-          <a:prstGeom prst="rect">
-            <a:avLst/>
-          </a:prstGeom>
-          <a:noFill/>
-        </p:spPr>
-        <p:txBody>
-          <a:bodyPr wrap="square" lIns="0" rIns="0" tIns="0" bIns="0" anchor="t">
-            <a:spAutoFit/>
-          </a:bodyPr>
-          <a:lstStyle/>
-          <a:p>
-            <a:pPr algn="l">
-              <a:lnSpc>
-                <a:spcPct val="106000"/>
-              </a:lnSpc>
-              <a:spcAft>
-                <a:spcPts val="0"/>
-              </a:spcAft>
-            </a:pPr>
-            <a:r>
-              <a:rPr sz="1300" b="0" i="0">
-                <a:solidFill>
-                  <a:srgbClr val="444444"/>
-                </a:solidFill>
-                <a:latin typeface="Calibri"/>
-              </a:rPr>
-              <a:t>Scoring comes from each paper's own code, unchanged.</a:t>
-            </a:r>
-          </a:p>
-        </p:txBody>
-      </p:sp>
-      <p:sp>
-        <p:nvSpPr>
-          <p:cNvPr id="12" name="TextBox 11"/>
-          <p:cNvSpPr txBox="1"/>
-          <p:nvPr/>
-        </p:nvSpPr>
-        <p:spPr>
-          <a:xfrm>
-            <a:off x="731520" y="6400800"/>
-            <a:ext cx="10040112" cy="402336"/>
-          </a:xfrm>
-          <a:prstGeom prst="rect">
-            <a:avLst/>
-          </a:prstGeom>
-          <a:noFill/>
-        </p:spPr>
-        <p:txBody>
-          <a:bodyPr wrap="square" lIns="0" rIns="0" tIns="0" bIns="0" anchor="t">
-            <a:spAutoFit/>
-          </a:bodyPr>
-          <a:lstStyle/>
-          <a:p>
-            <a:pPr algn="l">
-              <a:lnSpc>
-                <a:spcPct val="115000"/>
-              </a:lnSpc>
-              <a:spcAft>
-                <a:spcPts val="0"/>
-              </a:spcAft>
-            </a:pPr>
-            <a:r>
-              <a:rPr sz="850" b="0" i="0">
-                <a:solidFill>
-                  <a:srgbClr val="999999"/>
-                </a:solidFill>
-                <a:latin typeface="Calibri"/>
-              </a:rPr>
-              <a:t>PoisonedRAG Zou et al., USENIX Security 2024   ·   BadRAG Xue et al., 2024   ·   RobustRAG Xiang et al., 2024   ·   ParamMute Huang et al., NeurIPS 2025</a:t>
+              <a:t>The RAG row is 3 attacks against 42 defenses. 126 possible tests. None run.</a:t>
             </a:r>
           </a:p>
         </p:txBody>
@@ -3801,7 +5287,7 @@
                 </a:solidFill>
                 <a:latin typeface="Calibri"/>
               </a:rPr>
-              <a:t>RESULT 1</a:t>
+              <a:t>WHAT WE CAN REBUILD</a:t>
             </a:r>
           </a:p>
         </p:txBody>
@@ -3843,7 +5329,7 @@
                 </a:solidFill>
                 <a:latin typeface="Cambria"/>
               </a:rPr>
-              <a:t>One family of defenses fails under pressure. The other does not.</a:t>
+              <a:t>Released code is not the same as working code</a:t>
             </a:r>
           </a:p>
         </p:txBody>
@@ -3898,7 +5384,7 @@
         </p:nvSpPr>
         <p:spPr>
           <a:xfrm>
-            <a:off x="731520" y="2240280"/>
+            <a:off x="731520" y="1920240"/>
             <a:ext cx="10725912" cy="365760"/>
           </a:xfrm>
           <a:prstGeom prst="rect">
@@ -3921,13 +5407,13 @@
               </a:spcAft>
             </a:pPr>
             <a:r>
-              <a:rPr sz="1450" b="0" i="0">
+              <a:rPr sz="1400" b="0" i="0">
                 <a:solidFill>
                   <a:srgbClr val="444444"/>
                 </a:solidFill>
                 <a:latin typeface="Calibri"/>
               </a:rPr>
-              <a:t>When every retrieved passage belongs to the attacker:</a:t>
+              <a:t>We only report a number if we can run the authors' own code. So the first question is which code runs at all.</a:t>
             </a:r>
           </a:p>
         </p:txBody>
@@ -3940,8 +5426,8 @@
         </p:nvSpPr>
         <p:spPr>
           <a:xfrm>
-            <a:off x="731520" y="2697480"/>
-            <a:ext cx="3200400" cy="310896"/>
+            <a:off x="731520" y="2432304"/>
+            <a:ext cx="4937760" cy="292608"/>
           </a:xfrm>
           <a:prstGeom prst="rect">
             <a:avLst/>
@@ -3969,7 +5455,7 @@
                 </a:solidFill>
                 <a:latin typeface="Calibri"/>
               </a:rPr>
-              <a:t>Context-reliance</a:t>
+              <a:t>Attacks we rebuilt</a:t>
             </a:r>
           </a:p>
         </p:txBody>
@@ -3982,26 +5468,675 @@
         </p:nvSpPr>
         <p:spPr>
           <a:xfrm>
-            <a:off x="3931920" y="2697480"/>
-            <a:ext cx="6702552" cy="310896"/>
-          </a:xfrm>
-          <a:prstGeom prst="rect">
-            <a:avLst/>
-          </a:prstGeom>
-          <a:noFill/>
-        </p:spPr>
-        <p:txBody>
-          <a:bodyPr wrap="square" lIns="0" rIns="0" tIns="0" bIns="0" anchor="t">
-            <a:spAutoFit/>
-          </a:bodyPr>
-          <a:lstStyle/>
-          <a:p>
-            <a:pPr algn="l">
-              <a:lnSpc>
-                <a:spcPct val="106000"/>
-              </a:lnSpc>
-              <a:spcAft>
-                <a:spcPts val="0"/>
+            <a:off x="731520" y="2798064"/>
+            <a:ext cx="2286000" cy="310896"/>
+          </a:xfrm>
+          <a:prstGeom prst="rect">
+            <a:avLst/>
+          </a:prstGeom>
+          <a:noFill/>
+        </p:spPr>
+        <p:txBody>
+          <a:bodyPr wrap="square" lIns="0" rIns="0" tIns="0" bIns="0" anchor="t">
+            <a:spAutoFit/>
+          </a:bodyPr>
+          <a:lstStyle/>
+          <a:p>
+            <a:pPr algn="l">
+              <a:lnSpc>
+                <a:spcPct val="106000"/>
+              </a:lnSpc>
+              <a:spcAft>
+                <a:spcPts val="0"/>
+              </a:spcAft>
+            </a:pPr>
+            <a:r>
+              <a:rPr sz="1300" b="1" i="0">
+                <a:solidFill>
+                  <a:srgbClr val="111111"/>
+                </a:solidFill>
+                <a:latin typeface="Calibri"/>
+              </a:rPr>
+              <a:t>Removes the answer</a:t>
+            </a:r>
+          </a:p>
+        </p:txBody>
+      </p:sp>
+      <p:sp>
+        <p:nvSpPr>
+          <p:cNvPr id="8" name="TextBox 7"/>
+          <p:cNvSpPr txBox="1"/>
+          <p:nvPr/>
+        </p:nvSpPr>
+        <p:spPr>
+          <a:xfrm>
+            <a:off x="3017520" y="2798064"/>
+            <a:ext cx="2651760" cy="310896"/>
+          </a:xfrm>
+          <a:prstGeom prst="rect">
+            <a:avLst/>
+          </a:prstGeom>
+          <a:noFill/>
+        </p:spPr>
+        <p:txBody>
+          <a:bodyPr wrap="square" lIns="0" rIns="0" tIns="0" bIns="0" anchor="t">
+            <a:spAutoFit/>
+          </a:bodyPr>
+          <a:lstStyle/>
+          <a:p>
+            <a:pPr algn="l">
+              <a:lnSpc>
+                <a:spcPct val="106000"/>
+              </a:lnSpc>
+              <a:spcAft>
+                <a:spcPts val="0"/>
+              </a:spcAft>
+            </a:pPr>
+            <a:r>
+              <a:rPr sz="1300" b="0" i="0">
+                <a:solidFill>
+                  <a:srgbClr val="444444"/>
+                </a:solidFill>
+                <a:latin typeface="Calibri"/>
+              </a:rPr>
+              <a:t>corpus poisoning</a:t>
+            </a:r>
+          </a:p>
+        </p:txBody>
+      </p:sp>
+      <p:sp>
+        <p:nvSpPr>
+          <p:cNvPr id="9" name="TextBox 8"/>
+          <p:cNvSpPr txBox="1"/>
+          <p:nvPr/>
+        </p:nvSpPr>
+        <p:spPr>
+          <a:xfrm>
+            <a:off x="731520" y="3218688"/>
+            <a:ext cx="2286000" cy="310896"/>
+          </a:xfrm>
+          <a:prstGeom prst="rect">
+            <a:avLst/>
+          </a:prstGeom>
+          <a:noFill/>
+        </p:spPr>
+        <p:txBody>
+          <a:bodyPr wrap="square" lIns="0" rIns="0" tIns="0" bIns="0" anchor="t">
+            <a:spAutoFit/>
+          </a:bodyPr>
+          <a:lstStyle/>
+          <a:p>
+            <a:pPr algn="l">
+              <a:lnSpc>
+                <a:spcPct val="106000"/>
+              </a:lnSpc>
+              <a:spcAft>
+                <a:spcPts val="0"/>
+              </a:spcAft>
+            </a:pPr>
+            <a:r>
+              <a:rPr sz="1300" b="1" i="0">
+                <a:solidFill>
+                  <a:srgbClr val="111111"/>
+                </a:solidFill>
+                <a:latin typeface="Calibri"/>
+              </a:rPr>
+              <a:t>Inserts a false answer</a:t>
+            </a:r>
+          </a:p>
+        </p:txBody>
+      </p:sp>
+      <p:sp>
+        <p:nvSpPr>
+          <p:cNvPr id="10" name="TextBox 9"/>
+          <p:cNvSpPr txBox="1"/>
+          <p:nvPr/>
+        </p:nvSpPr>
+        <p:spPr>
+          <a:xfrm>
+            <a:off x="3017520" y="3218688"/>
+            <a:ext cx="2651760" cy="310896"/>
+          </a:xfrm>
+          <a:prstGeom prst="rect">
+            <a:avLst/>
+          </a:prstGeom>
+          <a:noFill/>
+        </p:spPr>
+        <p:txBody>
+          <a:bodyPr wrap="square" lIns="0" rIns="0" tIns="0" bIns="0" anchor="t">
+            <a:spAutoFit/>
+          </a:bodyPr>
+          <a:lstStyle/>
+          <a:p>
+            <a:pPr algn="l">
+              <a:lnSpc>
+                <a:spcPct val="106000"/>
+              </a:lnSpc>
+              <a:spcAft>
+                <a:spcPts val="0"/>
+              </a:spcAft>
+            </a:pPr>
+            <a:r>
+              <a:rPr sz="1300" b="0" i="0">
+                <a:solidFill>
+                  <a:srgbClr val="444444"/>
+                </a:solidFill>
+                <a:latin typeface="Calibri"/>
+              </a:rPr>
+              <a:t>PoisonedRAG</a:t>
+            </a:r>
+          </a:p>
+        </p:txBody>
+      </p:sp>
+      <p:sp>
+        <p:nvSpPr>
+          <p:cNvPr id="11" name="TextBox 10"/>
+          <p:cNvSpPr txBox="1"/>
+          <p:nvPr/>
+        </p:nvSpPr>
+        <p:spPr>
+          <a:xfrm>
+            <a:off x="731520" y="3639312"/>
+            <a:ext cx="2286000" cy="310896"/>
+          </a:xfrm>
+          <a:prstGeom prst="rect">
+            <a:avLst/>
+          </a:prstGeom>
+          <a:noFill/>
+        </p:spPr>
+        <p:txBody>
+          <a:bodyPr wrap="square" lIns="0" rIns="0" tIns="0" bIns="0" anchor="t">
+            <a:spAutoFit/>
+          </a:bodyPr>
+          <a:lstStyle/>
+          <a:p>
+            <a:pPr algn="l">
+              <a:lnSpc>
+                <a:spcPct val="106000"/>
+              </a:lnSpc>
+              <a:spcAft>
+                <a:spcPts val="0"/>
+              </a:spcAft>
+            </a:pPr>
+            <a:r>
+              <a:rPr sz="1300" b="1" i="0">
+                <a:solidFill>
+                  <a:srgbClr val="111111"/>
+                </a:solidFill>
+                <a:latin typeface="Calibri"/>
+              </a:rPr>
+              <a:t>Forces a refusal</a:t>
+            </a:r>
+          </a:p>
+        </p:txBody>
+      </p:sp>
+      <p:sp>
+        <p:nvSpPr>
+          <p:cNvPr id="12" name="TextBox 11"/>
+          <p:cNvSpPr txBox="1"/>
+          <p:nvPr/>
+        </p:nvSpPr>
+        <p:spPr>
+          <a:xfrm>
+            <a:off x="3017520" y="3639312"/>
+            <a:ext cx="2651760" cy="310896"/>
+          </a:xfrm>
+          <a:prstGeom prst="rect">
+            <a:avLst/>
+          </a:prstGeom>
+          <a:noFill/>
+        </p:spPr>
+        <p:txBody>
+          <a:bodyPr wrap="square" lIns="0" rIns="0" tIns="0" bIns="0" anchor="t">
+            <a:spAutoFit/>
+          </a:bodyPr>
+          <a:lstStyle/>
+          <a:p>
+            <a:pPr algn="l">
+              <a:lnSpc>
+                <a:spcPct val="106000"/>
+              </a:lnSpc>
+              <a:spcAft>
+                <a:spcPts val="0"/>
+              </a:spcAft>
+            </a:pPr>
+            <a:r>
+              <a:rPr sz="1300" b="0" i="0">
+                <a:solidFill>
+                  <a:srgbClr val="444444"/>
+                </a:solidFill>
+                <a:latin typeface="Calibri"/>
+              </a:rPr>
+              <a:t>BadRAG DoS</a:t>
+            </a:r>
+          </a:p>
+        </p:txBody>
+      </p:sp>
+      <p:sp>
+        <p:nvSpPr>
+          <p:cNvPr id="13" name="TextBox 12"/>
+          <p:cNvSpPr txBox="1"/>
+          <p:nvPr/>
+        </p:nvSpPr>
+        <p:spPr>
+          <a:xfrm>
+            <a:off x="731520" y="4059936"/>
+            <a:ext cx="2286000" cy="310896"/>
+          </a:xfrm>
+          <a:prstGeom prst="rect">
+            <a:avLst/>
+          </a:prstGeom>
+          <a:noFill/>
+        </p:spPr>
+        <p:txBody>
+          <a:bodyPr wrap="square" lIns="0" rIns="0" tIns="0" bIns="0" anchor="t">
+            <a:spAutoFit/>
+          </a:bodyPr>
+          <a:lstStyle/>
+          <a:p>
+            <a:pPr algn="l">
+              <a:lnSpc>
+                <a:spcPct val="106000"/>
+              </a:lnSpc>
+              <a:spcAft>
+                <a:spcPts val="0"/>
+              </a:spcAft>
+            </a:pPr>
+            <a:r>
+              <a:rPr sz="1300" b="1" i="0">
+                <a:solidFill>
+                  <a:srgbClr val="111111"/>
+                </a:solidFill>
+                <a:latin typeface="Calibri"/>
+              </a:rPr>
+              <a:t>Changes only the tone</a:t>
+            </a:r>
+          </a:p>
+        </p:txBody>
+      </p:sp>
+      <p:sp>
+        <p:nvSpPr>
+          <p:cNvPr id="14" name="TextBox 13"/>
+          <p:cNvSpPr txBox="1"/>
+          <p:nvPr/>
+        </p:nvSpPr>
+        <p:spPr>
+          <a:xfrm>
+            <a:off x="3017520" y="4059936"/>
+            <a:ext cx="2651760" cy="310896"/>
+          </a:xfrm>
+          <a:prstGeom prst="rect">
+            <a:avLst/>
+          </a:prstGeom>
+          <a:noFill/>
+        </p:spPr>
+        <p:txBody>
+          <a:bodyPr wrap="square" lIns="0" rIns="0" tIns="0" bIns="0" anchor="t">
+            <a:spAutoFit/>
+          </a:bodyPr>
+          <a:lstStyle/>
+          <a:p>
+            <a:pPr algn="l">
+              <a:lnSpc>
+                <a:spcPct val="106000"/>
+              </a:lnSpc>
+              <a:spcAft>
+                <a:spcPts val="0"/>
+              </a:spcAft>
+            </a:pPr>
+            <a:r>
+              <a:rPr sz="1300" b="0" i="0">
+                <a:solidFill>
+                  <a:srgbClr val="444444"/>
+                </a:solidFill>
+                <a:latin typeface="Calibri"/>
+              </a:rPr>
+              <a:t>BadRAG Selective-Fact</a:t>
+            </a:r>
+          </a:p>
+        </p:txBody>
+      </p:sp>
+      <p:sp>
+        <p:nvSpPr>
+          <p:cNvPr id="15" name="TextBox 14"/>
+          <p:cNvSpPr txBox="1"/>
+          <p:nvPr/>
+        </p:nvSpPr>
+        <p:spPr>
+          <a:xfrm>
+            <a:off x="6492240" y="2432304"/>
+            <a:ext cx="4937760" cy="292608"/>
+          </a:xfrm>
+          <a:prstGeom prst="rect">
+            <a:avLst/>
+          </a:prstGeom>
+          <a:noFill/>
+        </p:spPr>
+        <p:txBody>
+          <a:bodyPr wrap="square" lIns="0" rIns="0" tIns="0" bIns="0" anchor="t">
+            <a:spAutoFit/>
+          </a:bodyPr>
+          <a:lstStyle/>
+          <a:p>
+            <a:pPr algn="l">
+              <a:lnSpc>
+                <a:spcPct val="106000"/>
+              </a:lnSpc>
+              <a:spcAft>
+                <a:spcPts val="0"/>
+              </a:spcAft>
+            </a:pPr>
+            <a:r>
+              <a:rPr sz="1500" b="1" i="0">
+                <a:solidFill>
+                  <a:srgbClr val="111111"/>
+                </a:solidFill>
+                <a:latin typeface="Calibri"/>
+              </a:rPr>
+              <a:t>Defense codebases we opened</a:t>
+            </a:r>
+          </a:p>
+        </p:txBody>
+      </p:sp>
+      <p:sp>
+        <p:nvSpPr>
+          <p:cNvPr id="16" name="TextBox 15"/>
+          <p:cNvSpPr txBox="1"/>
+          <p:nvPr/>
+        </p:nvSpPr>
+        <p:spPr>
+          <a:xfrm>
+            <a:off x="6492240" y="2798064"/>
+            <a:ext cx="1554480" cy="310896"/>
+          </a:xfrm>
+          <a:prstGeom prst="rect">
+            <a:avLst/>
+          </a:prstGeom>
+          <a:noFill/>
+        </p:spPr>
+        <p:txBody>
+          <a:bodyPr wrap="square" lIns="0" rIns="0" tIns="0" bIns="0" anchor="t">
+            <a:spAutoFit/>
+          </a:bodyPr>
+          <a:lstStyle/>
+          <a:p>
+            <a:pPr algn="l">
+              <a:lnSpc>
+                <a:spcPct val="106000"/>
+              </a:lnSpc>
+              <a:spcAft>
+                <a:spcPts val="0"/>
+              </a:spcAft>
+            </a:pPr>
+            <a:r>
+              <a:rPr sz="1300" b="1" i="0">
+                <a:solidFill>
+                  <a:srgbClr val="111111"/>
+                </a:solidFill>
+                <a:latin typeface="Calibri"/>
+              </a:rPr>
+              <a:t>4 run</a:t>
+            </a:r>
+          </a:p>
+        </p:txBody>
+      </p:sp>
+      <p:sp>
+        <p:nvSpPr>
+          <p:cNvPr id="17" name="TextBox 16"/>
+          <p:cNvSpPr txBox="1"/>
+          <p:nvPr/>
+        </p:nvSpPr>
+        <p:spPr>
+          <a:xfrm>
+            <a:off x="8046719" y="2798064"/>
+            <a:ext cx="3383280" cy="310896"/>
+          </a:xfrm>
+          <a:prstGeom prst="rect">
+            <a:avLst/>
+          </a:prstGeom>
+          <a:noFill/>
+        </p:spPr>
+        <p:txBody>
+          <a:bodyPr wrap="square" lIns="0" rIns="0" tIns="0" bIns="0" anchor="t">
+            <a:spAutoFit/>
+          </a:bodyPr>
+          <a:lstStyle/>
+          <a:p>
+            <a:pPr algn="l">
+              <a:lnSpc>
+                <a:spcPct val="106000"/>
+              </a:lnSpc>
+              <a:spcAft>
+                <a:spcPts val="0"/>
+              </a:spcAft>
+            </a:pPr>
+            <a:r>
+              <a:rPr sz="1300" b="0" i="0">
+                <a:solidFill>
+                  <a:srgbClr val="444444"/>
+                </a:solidFill>
+                <a:latin typeface="Calibri"/>
+              </a:rPr>
+              <a:t>and give a usable measurement</a:t>
+            </a:r>
+          </a:p>
+        </p:txBody>
+      </p:sp>
+      <p:sp>
+        <p:nvSpPr>
+          <p:cNvPr id="18" name="TextBox 17"/>
+          <p:cNvSpPr txBox="1"/>
+          <p:nvPr/>
+        </p:nvSpPr>
+        <p:spPr>
+          <a:xfrm>
+            <a:off x="6492240" y="3438144"/>
+            <a:ext cx="1554480" cy="310896"/>
+          </a:xfrm>
+          <a:prstGeom prst="rect">
+            <a:avLst/>
+          </a:prstGeom>
+          <a:noFill/>
+        </p:spPr>
+        <p:txBody>
+          <a:bodyPr wrap="square" lIns="0" rIns="0" tIns="0" bIns="0" anchor="t">
+            <a:spAutoFit/>
+          </a:bodyPr>
+          <a:lstStyle/>
+          <a:p>
+            <a:pPr algn="l">
+              <a:lnSpc>
+                <a:spcPct val="106000"/>
+              </a:lnSpc>
+              <a:spcAft>
+                <a:spcPts val="0"/>
+              </a:spcAft>
+            </a:pPr>
+            <a:r>
+              <a:rPr sz="1300" b="1" i="0">
+                <a:solidFill>
+                  <a:srgbClr val="111111"/>
+                </a:solidFill>
+                <a:latin typeface="Calibri"/>
+              </a:rPr>
+              <a:t>1 runs</a:t>
+            </a:r>
+          </a:p>
+        </p:txBody>
+      </p:sp>
+      <p:sp>
+        <p:nvSpPr>
+          <p:cNvPr id="19" name="TextBox 18"/>
+          <p:cNvSpPr txBox="1"/>
+          <p:nvPr/>
+        </p:nvSpPr>
+        <p:spPr>
+          <a:xfrm>
+            <a:off x="8046719" y="3438144"/>
+            <a:ext cx="3383280" cy="310896"/>
+          </a:xfrm>
+          <a:prstGeom prst="rect">
+            <a:avLst/>
+          </a:prstGeom>
+          <a:noFill/>
+        </p:spPr>
+        <p:txBody>
+          <a:bodyPr wrap="square" lIns="0" rIns="0" tIns="0" bIns="0" anchor="t">
+            <a:spAutoFit/>
+          </a:bodyPr>
+          <a:lstStyle/>
+          <a:p>
+            <a:pPr algn="l">
+              <a:lnSpc>
+                <a:spcPct val="106000"/>
+              </a:lnSpc>
+              <a:spcAft>
+                <a:spcPts val="0"/>
+              </a:spcAft>
+            </a:pPr>
+            <a:r>
+              <a:rPr sz="1300" b="0" i="0">
+                <a:solidFill>
+                  <a:srgbClr val="444444"/>
+                </a:solidFill>
+                <a:latin typeface="Calibri"/>
+              </a:rPr>
+              <a:t>but cannot reproduce its own published benefit</a:t>
+            </a:r>
+          </a:p>
+        </p:txBody>
+      </p:sp>
+      <p:sp>
+        <p:nvSpPr>
+          <p:cNvPr id="20" name="TextBox 19"/>
+          <p:cNvSpPr txBox="1"/>
+          <p:nvPr/>
+        </p:nvSpPr>
+        <p:spPr>
+          <a:xfrm>
+            <a:off x="6492240" y="4078224"/>
+            <a:ext cx="1554480" cy="310896"/>
+          </a:xfrm>
+          <a:prstGeom prst="rect">
+            <a:avLst/>
+          </a:prstGeom>
+          <a:noFill/>
+        </p:spPr>
+        <p:txBody>
+          <a:bodyPr wrap="square" lIns="0" rIns="0" tIns="0" bIns="0" anchor="t">
+            <a:spAutoFit/>
+          </a:bodyPr>
+          <a:lstStyle/>
+          <a:p>
+            <a:pPr algn="l">
+              <a:lnSpc>
+                <a:spcPct val="106000"/>
+              </a:lnSpc>
+              <a:spcAft>
+                <a:spcPts val="0"/>
+              </a:spcAft>
+            </a:pPr>
+            <a:r>
+              <a:rPr sz="1300" b="1" i="0">
+                <a:solidFill>
+                  <a:srgbClr val="111111"/>
+                </a:solidFill>
+                <a:latin typeface="Calibri"/>
+              </a:rPr>
+              <a:t>4 do not run</a:t>
+            </a:r>
+          </a:p>
+        </p:txBody>
+      </p:sp>
+      <p:sp>
+        <p:nvSpPr>
+          <p:cNvPr id="21" name="TextBox 20"/>
+          <p:cNvSpPr txBox="1"/>
+          <p:nvPr/>
+        </p:nvSpPr>
+        <p:spPr>
+          <a:xfrm>
+            <a:off x="8046719" y="4078224"/>
+            <a:ext cx="3383280" cy="310896"/>
+          </a:xfrm>
+          <a:prstGeom prst="rect">
+            <a:avLst/>
+          </a:prstGeom>
+          <a:noFill/>
+        </p:spPr>
+        <p:txBody>
+          <a:bodyPr wrap="square" lIns="0" rIns="0" tIns="0" bIns="0" anchor="t">
+            <a:spAutoFit/>
+          </a:bodyPr>
+          <a:lstStyle/>
+          <a:p>
+            <a:pPr algn="l">
+              <a:lnSpc>
+                <a:spcPct val="106000"/>
+              </a:lnSpc>
+              <a:spcAft>
+                <a:spcPts val="0"/>
+              </a:spcAft>
+            </a:pPr>
+            <a:r>
+              <a:rPr sz="1300" b="0" i="0">
+                <a:solidFill>
+                  <a:srgbClr val="444444"/>
+                </a:solidFill>
+                <a:latin typeface="Calibri"/>
+              </a:rPr>
+              <a:t>missing data, a missing prompt file, a checkpoint with no tokenizer</a:t>
+            </a:r>
+          </a:p>
+        </p:txBody>
+      </p:sp>
+      <p:sp>
+        <p:nvSpPr>
+          <p:cNvPr id="22" name="TextBox 21"/>
+          <p:cNvSpPr txBox="1"/>
+          <p:nvPr/>
+        </p:nvSpPr>
+        <p:spPr>
+          <a:xfrm>
+            <a:off x="731520" y="4937760"/>
+            <a:ext cx="10725912" cy="1463039"/>
+          </a:xfrm>
+          <a:prstGeom prst="rect">
+            <a:avLst/>
+          </a:prstGeom>
+          <a:noFill/>
+        </p:spPr>
+        <p:txBody>
+          <a:bodyPr wrap="square" lIns="0" rIns="0" tIns="0" bIns="0" anchor="t">
+            <a:spAutoFit/>
+          </a:bodyPr>
+          <a:lstStyle/>
+          <a:p>
+            <a:pPr algn="l">
+              <a:lnSpc>
+                <a:spcPct val="110000"/>
+              </a:lnSpc>
+              <a:spcAft>
+                <a:spcPts val="800"/>
+              </a:spcAft>
+            </a:pPr>
+            <a:r>
+              <a:rPr sz="1500" b="1" i="0">
+                <a:solidFill>
+                  <a:srgbClr val="111111"/>
+                </a:solidFill>
+                <a:latin typeface="Calibri"/>
+              </a:rPr>
+              <a:t>Nine defense codebases attempted. Four produced a measurement.</a:t>
+            </a:r>
+          </a:p>
+          <a:p>
+            <a:pPr>
+              <a:lnSpc>
+                <a:spcPct val="110000"/>
+              </a:lnSpc>
+              <a:spcAft>
+                <a:spcPts val="800"/>
               </a:spcAft>
             </a:pPr>
             <a:r>
@@ -4011,339 +6146,7 @@
                 </a:solidFill>
                 <a:latin typeface="Calibri"/>
               </a:rPr>
-              <a:t>It holds down the model's own memory so the model follows the retrieved text.</a:t>
-            </a:r>
-          </a:p>
-        </p:txBody>
-      </p:sp>
-      <p:sp>
-        <p:nvSpPr>
-          <p:cNvPr id="8" name="TextBox 7"/>
-          <p:cNvSpPr txBox="1"/>
-          <p:nvPr/>
-        </p:nvSpPr>
-        <p:spPr>
-          <a:xfrm>
-            <a:off x="10680192" y="2697480"/>
-            <a:ext cx="777240" cy="310896"/>
-          </a:xfrm>
-          <a:prstGeom prst="rect">
-            <a:avLst/>
-          </a:prstGeom>
-          <a:noFill/>
-        </p:spPr>
-        <p:txBody>
-          <a:bodyPr wrap="square" lIns="0" rIns="0" tIns="0" bIns="0" anchor="t">
-            <a:spAutoFit/>
-          </a:bodyPr>
-          <a:lstStyle/>
-          <a:p>
-            <a:pPr algn="r">
-              <a:lnSpc>
-                <a:spcPct val="106000"/>
-              </a:lnSpc>
-              <a:spcAft>
-                <a:spcPts val="0"/>
-              </a:spcAft>
-            </a:pPr>
-            <a:r>
-              <a:rPr sz="1500" b="1" i="0">
-                <a:solidFill>
-                  <a:srgbClr val="111111"/>
-                </a:solidFill>
-                <a:latin typeface="Calibri"/>
-              </a:rPr>
-              <a:t>4 of 5</a:t>
-            </a:r>
-          </a:p>
-        </p:txBody>
-      </p:sp>
-      <p:sp>
-        <p:nvSpPr>
-          <p:cNvPr id="9" name="TextBox 8"/>
-          <p:cNvSpPr txBox="1"/>
-          <p:nvPr/>
-        </p:nvSpPr>
-        <p:spPr>
-          <a:xfrm>
-            <a:off x="731520" y="3355848"/>
-            <a:ext cx="3200400" cy="310896"/>
-          </a:xfrm>
-          <a:prstGeom prst="rect">
-            <a:avLst/>
-          </a:prstGeom>
-          <a:noFill/>
-        </p:spPr>
-        <p:txBody>
-          <a:bodyPr wrap="square" lIns="0" rIns="0" tIns="0" bIns="0" anchor="t">
-            <a:spAutoFit/>
-          </a:bodyPr>
-          <a:lstStyle/>
-          <a:p>
-            <a:pPr algn="l">
-              <a:lnSpc>
-                <a:spcPct val="106000"/>
-              </a:lnSpc>
-              <a:spcAft>
-                <a:spcPts val="0"/>
-              </a:spcAft>
-            </a:pPr>
-            <a:r>
-              <a:rPr sz="1500" b="1" i="0">
-                <a:solidFill>
-                  <a:srgbClr val="111111"/>
-                </a:solidFill>
-                <a:latin typeface="Calibri"/>
-              </a:rPr>
-              <a:t>Isolate-then-aggregate</a:t>
-            </a:r>
-          </a:p>
-        </p:txBody>
-      </p:sp>
-      <p:sp>
-        <p:nvSpPr>
-          <p:cNvPr id="10" name="TextBox 9"/>
-          <p:cNvSpPr txBox="1"/>
-          <p:nvPr/>
-        </p:nvSpPr>
-        <p:spPr>
-          <a:xfrm>
-            <a:off x="3931920" y="3355848"/>
-            <a:ext cx="6702552" cy="310896"/>
-          </a:xfrm>
-          <a:prstGeom prst="rect">
-            <a:avLst/>
-          </a:prstGeom>
-          <a:noFill/>
-        </p:spPr>
-        <p:txBody>
-          <a:bodyPr wrap="square" lIns="0" rIns="0" tIns="0" bIns="0" anchor="t">
-            <a:spAutoFit/>
-          </a:bodyPr>
-          <a:lstStyle/>
-          <a:p>
-            <a:pPr algn="l">
-              <a:lnSpc>
-                <a:spcPct val="106000"/>
-              </a:lnSpc>
-              <a:spcAft>
-                <a:spcPts val="0"/>
-              </a:spcAft>
-            </a:pPr>
-            <a:r>
-              <a:rPr sz="1500" b="0" i="0">
-                <a:solidFill>
-                  <a:srgbClr val="444444"/>
-                </a:solidFill>
-                <a:latin typeface="Calibri"/>
-              </a:rPr>
-              <a:t>It answers from each passage alone, then joins the answers.</a:t>
-            </a:r>
-          </a:p>
-        </p:txBody>
-      </p:sp>
-      <p:sp>
-        <p:nvSpPr>
-          <p:cNvPr id="11" name="TextBox 10"/>
-          <p:cNvSpPr txBox="1"/>
-          <p:nvPr/>
-        </p:nvSpPr>
-        <p:spPr>
-          <a:xfrm>
-            <a:off x="10680192" y="3355848"/>
-            <a:ext cx="777240" cy="310896"/>
-          </a:xfrm>
-          <a:prstGeom prst="rect">
-            <a:avLst/>
-          </a:prstGeom>
-          <a:noFill/>
-        </p:spPr>
-        <p:txBody>
-          <a:bodyPr wrap="square" lIns="0" rIns="0" tIns="0" bIns="0" anchor="t">
-            <a:spAutoFit/>
-          </a:bodyPr>
-          <a:lstStyle/>
-          <a:p>
-            <a:pPr algn="r">
-              <a:lnSpc>
-                <a:spcPct val="106000"/>
-              </a:lnSpc>
-              <a:spcAft>
-                <a:spcPts val="0"/>
-              </a:spcAft>
-            </a:pPr>
-            <a:r>
-              <a:rPr sz="1500" b="1" i="0">
-                <a:solidFill>
-                  <a:srgbClr val="111111"/>
-                </a:solidFill>
-                <a:latin typeface="Calibri"/>
-              </a:rPr>
-              <a:t>0 of 10</a:t>
-            </a:r>
-          </a:p>
-        </p:txBody>
-      </p:sp>
-      <p:sp>
-        <p:nvSpPr>
-          <p:cNvPr id="12" name="TextBox 11"/>
-          <p:cNvSpPr txBox="1"/>
-          <p:nvPr/>
-        </p:nvSpPr>
-        <p:spPr>
-          <a:xfrm>
-            <a:off x="8348472" y="4069080"/>
-            <a:ext cx="3108960" cy="274320"/>
-          </a:xfrm>
-          <a:prstGeom prst="rect">
-            <a:avLst/>
-          </a:prstGeom>
-          <a:noFill/>
-        </p:spPr>
-        <p:txBody>
-          <a:bodyPr wrap="square" lIns="0" rIns="0" tIns="0" bIns="0" anchor="t">
-            <a:spAutoFit/>
-          </a:bodyPr>
-          <a:lstStyle/>
-          <a:p>
-            <a:pPr algn="l">
-              <a:lnSpc>
-                <a:spcPct val="106000"/>
-              </a:lnSpc>
-              <a:spcAft>
-                <a:spcPts val="0"/>
-              </a:spcAft>
-            </a:pPr>
-            <a:r>
-              <a:rPr sz="1150" b="0" i="0">
-                <a:solidFill>
-                  <a:srgbClr val="777777"/>
-                </a:solidFill>
-                <a:latin typeface="Calibri"/>
-              </a:rPr>
-              <a:t>readable cases that lose accuracy</a:t>
-            </a:r>
-          </a:p>
-        </p:txBody>
-      </p:sp>
-      <p:sp>
-        <p:nvSpPr>
-          <p:cNvPr id="13" name="TextBox 12"/>
-          <p:cNvSpPr txBox="1"/>
-          <p:nvPr/>
-        </p:nvSpPr>
-        <p:spPr>
-          <a:xfrm>
-            <a:off x="731520" y="4526280"/>
-            <a:ext cx="10725912" cy="1874519"/>
-          </a:xfrm>
-          <a:prstGeom prst="rect">
-            <a:avLst/>
-          </a:prstGeom>
-          <a:noFill/>
-        </p:spPr>
-        <p:txBody>
-          <a:bodyPr wrap="square" lIns="0" rIns="0" tIns="0" bIns="0" anchor="t">
-            <a:spAutoFit/>
-          </a:bodyPr>
-          <a:lstStyle/>
-          <a:p>
-            <a:pPr algn="l">
-              <a:lnSpc>
-                <a:spcPct val="110000"/>
-              </a:lnSpc>
-              <a:spcAft>
-                <a:spcPts val="1100"/>
-              </a:spcAft>
-            </a:pPr>
-            <a:r>
-              <a:rPr sz="1500" b="1" i="0">
-                <a:solidFill>
-                  <a:srgbClr val="111111"/>
-                </a:solidFill>
-                <a:latin typeface="Calibri"/>
-              </a:rPr>
-              <a:t>The loss is the same size every time: about 32 points, on two defenses, two attacks and two models.</a:t>
-            </a:r>
-          </a:p>
-          <a:p>
-            <a:pPr>
-              <a:lnSpc>
-                <a:spcPct val="110000"/>
-              </a:lnSpc>
-              <a:spcAft>
-                <a:spcPts val="1100"/>
-              </a:spcAft>
-            </a:pPr>
-            <a:r>
-              <a:rPr sz="1500" b="0" i="0">
-                <a:solidFill>
-                  <a:srgbClr val="444444"/>
-                </a:solidFill>
-                <a:latin typeface="Calibri"/>
-              </a:rPr>
-              <a:t>Against a false passage the loss begins at eight poisoned passages of ten. It does not wait for all ten.</a:t>
-            </a:r>
-          </a:p>
-          <a:p>
-            <a:pPr>
-              <a:lnSpc>
-                <a:spcPct val="110000"/>
-              </a:lnSpc>
-              <a:spcAft>
-                <a:spcPts val="1100"/>
-              </a:spcAft>
-            </a:pPr>
-            <a:r>
-              <a:rPr sz="1500" b="1" i="0">
-                <a:solidFill>
-                  <a:srgbClr val="111111"/>
-                </a:solidFill>
-                <a:latin typeface="Calibri"/>
-              </a:rPr>
-              <a:t>The design rule that follows: do not suppress the model's own memory. It is the only thing left when the evidence runs out.</a:t>
-            </a:r>
-          </a:p>
-        </p:txBody>
-      </p:sp>
-      <p:sp>
-        <p:nvSpPr>
-          <p:cNvPr id="14" name="TextBox 13"/>
-          <p:cNvSpPr txBox="1"/>
-          <p:nvPr/>
-        </p:nvSpPr>
-        <p:spPr>
-          <a:xfrm>
-            <a:off x="731520" y="6400800"/>
-            <a:ext cx="10040112" cy="402336"/>
-          </a:xfrm>
-          <a:prstGeom prst="rect">
-            <a:avLst/>
-          </a:prstGeom>
-          <a:noFill/>
-        </p:spPr>
-        <p:txBody>
-          <a:bodyPr wrap="square" lIns="0" rIns="0" tIns="0" bIns="0" anchor="t">
-            <a:spAutoFit/>
-          </a:bodyPr>
-          <a:lstStyle/>
-          <a:p>
-            <a:pPr algn="l">
-              <a:lnSpc>
-                <a:spcPct val="115000"/>
-              </a:lnSpc>
-              <a:spcAft>
-                <a:spcPts val="0"/>
-              </a:spcAft>
-            </a:pPr>
-            <a:r>
-              <a:rPr sz="850" b="0" i="0">
-                <a:solidFill>
-                  <a:srgbClr val="999999"/>
-                </a:solidFill>
-                <a:latin typeface="Calibri"/>
-              </a:rPr>
-              <a:t>ParamMute Huang et al., NeurIPS 2025   ·   RobustRAG Xiang et al., 2024   ·   PoisonedRAG Zou et al., USENIX Security 2024   ·   BadRAG Xue et al., 2024   ·   Measurements: this work</a:t>
+              <a:t>That is not a complaint about other people's repositories. It sets the size of what this work can honestly cover, and it is a result the field should know.</a:t>
             </a:r>
           </a:p>
         </p:txBody>
@@ -4403,7 +6206,7 @@
                 </a:solidFill>
                 <a:latin typeface="Calibri"/>
               </a:rPr>
-              <a:t>RESULT 2</a:t>
+              <a:t>HOW WE CHOOSE A PAIR</a:t>
             </a:r>
           </a:p>
         </p:txBody>
@@ -4445,7 +6248,7 @@
                 </a:solidFill>
                 <a:latin typeface="Cambria"/>
               </a:rPr>
-              <a:t>Some defenses make an attack work that otherwise does nothing</a:t>
+              <a:t>The map tells us which pairs can even be run</a:t>
             </a:r>
           </a:p>
         </p:txBody>
@@ -4500,36 +6303,55 @@
         </p:nvSpPr>
         <p:spPr>
           <a:xfrm>
-            <a:off x="731520" y="2103120"/>
-            <a:ext cx="2926080" cy="274320"/>
-          </a:xfrm>
-          <a:prstGeom prst="rect">
-            <a:avLst/>
-          </a:prstGeom>
-          <a:noFill/>
-        </p:spPr>
-        <p:txBody>
-          <a:bodyPr wrap="square" lIns="0" rIns="0" tIns="0" bIns="0" anchor="t">
-            <a:spAutoFit/>
-          </a:bodyPr>
-          <a:lstStyle/>
-          <a:p>
-            <a:pPr algn="l">
-              <a:lnSpc>
-                <a:spcPct val="106000"/>
-              </a:lnSpc>
-              <a:spcAft>
-                <a:spcPts val="0"/>
-              </a:spcAft>
-            </a:pPr>
-            <a:r>
-              <a:rPr sz="1150" b="1" i="0">
-                <a:solidFill>
-                  <a:srgbClr val="777777"/>
-                </a:solidFill>
-                <a:latin typeface="Calibri"/>
-              </a:rPr>
-              <a:t>Defense</a:t>
+            <a:off x="731520" y="1920240"/>
+            <a:ext cx="10725912" cy="4480560"/>
+          </a:xfrm>
+          <a:prstGeom prst="rect">
+            <a:avLst/>
+          </a:prstGeom>
+          <a:noFill/>
+        </p:spPr>
+        <p:txBody>
+          <a:bodyPr wrap="square" lIns="0" rIns="0" tIns="0" bIns="0" anchor="t">
+            <a:spAutoFit/>
+          </a:bodyPr>
+          <a:lstStyle/>
+          <a:p>
+            <a:pPr algn="l">
+              <a:lnSpc>
+                <a:spcPct val="110000"/>
+              </a:lnSpc>
+              <a:spcAft>
+                <a:spcPts val="900"/>
+              </a:spcAft>
+            </a:pPr>
+            <a:r>
+              <a:rPr sz="1500" b="1" i="0">
+                <a:solidFill>
+                  <a:srgbClr val="111111"/>
+                </a:solidFill>
+                <a:latin typeface="Calibri"/>
+              </a:rPr>
+              <a:t>A defense and an attack belong together when they sit in the same place on the map: the same route in, and the same thing going wrong.</a:t>
+            </a:r>
+          </a:p>
+          <a:p>
+            <a:pPr>
+              <a:lnSpc>
+                <a:spcPct val="110000"/>
+              </a:lnSpc>
+              <a:spcAft>
+                <a:spcPts val="900"/>
+              </a:spcAft>
+            </a:pPr>
+            <a:r>
+              <a:rPr sz="1500" b="0" i="0">
+                <a:solidFill>
+                  <a:srgbClr val="444444"/>
+                </a:solidFill>
+                <a:latin typeface="Calibri"/>
+              </a:rPr>
+              <a:t>If a defense was built for a failure that happens by accident, and an attack causes the same failure on purpose through the same route, then the defense has a claim to answer. Nobody has made it answer.</a:t>
             </a:r>
           </a:p>
         </p:txBody>
@@ -4542,36 +6364,36 @@
         </p:nvSpPr>
         <p:spPr>
           <a:xfrm>
-            <a:off x="3749039" y="2103120"/>
-            <a:ext cx="2377440" cy="274320"/>
-          </a:xfrm>
-          <a:prstGeom prst="rect">
-            <a:avLst/>
-          </a:prstGeom>
-          <a:noFill/>
-        </p:spPr>
-        <p:txBody>
-          <a:bodyPr wrap="square" lIns="0" rIns="0" tIns="0" bIns="0" anchor="t">
-            <a:spAutoFit/>
-          </a:bodyPr>
-          <a:lstStyle/>
-          <a:p>
-            <a:pPr algn="l">
-              <a:lnSpc>
-                <a:spcPct val="106000"/>
-              </a:lnSpc>
-              <a:spcAft>
-                <a:spcPts val="0"/>
-              </a:spcAft>
-            </a:pPr>
-            <a:r>
-              <a:rPr sz="1150" b="1" i="0">
-                <a:solidFill>
-                  <a:srgbClr val="777777"/>
-                </a:solidFill>
-                <a:latin typeface="Calibri"/>
-              </a:rPr>
-              <a:t>Attack</a:t>
+            <a:off x="731520" y="3218688"/>
+            <a:ext cx="10725912" cy="310896"/>
+          </a:xfrm>
+          <a:prstGeom prst="rect">
+            <a:avLst/>
+          </a:prstGeom>
+          <a:noFill/>
+        </p:spPr>
+        <p:txBody>
+          <a:bodyPr wrap="square" lIns="0" rIns="0" tIns="0" bIns="0" anchor="t">
+            <a:spAutoFit/>
+          </a:bodyPr>
+          <a:lstStyle/>
+          <a:p>
+            <a:pPr algn="l">
+              <a:lnSpc>
+                <a:spcPct val="106000"/>
+              </a:lnSpc>
+              <a:spcAft>
+                <a:spcPts val="800"/>
+              </a:spcAft>
+            </a:pPr>
+            <a:r>
+              <a:rPr sz="1500" b="1" i="0">
+                <a:solidFill>
+                  <a:srgbClr val="111111"/>
+                </a:solidFill>
+                <a:latin typeface="Calibri"/>
+              </a:rPr>
+              <a:t>The cell we worked in</a:t>
             </a:r>
           </a:p>
         </p:txBody>
@@ -4584,36 +6406,36 @@
         </p:nvSpPr>
         <p:spPr>
           <a:xfrm>
-            <a:off x="6309359" y="2103120"/>
-            <a:ext cx="1645920" cy="274320"/>
-          </a:xfrm>
-          <a:prstGeom prst="rect">
-            <a:avLst/>
-          </a:prstGeom>
-          <a:noFill/>
-        </p:spPr>
-        <p:txBody>
-          <a:bodyPr wrap="square" lIns="0" rIns="0" tIns="0" bIns="0" anchor="t">
-            <a:spAutoFit/>
-          </a:bodyPr>
-          <a:lstStyle/>
-          <a:p>
-            <a:pPr algn="l">
-              <a:lnSpc>
-                <a:spcPct val="106000"/>
-              </a:lnSpc>
-              <a:spcAft>
-                <a:spcPts val="0"/>
-              </a:spcAft>
-            </a:pPr>
-            <a:r>
-              <a:rPr sz="1150" b="1" i="0">
-                <a:solidFill>
-                  <a:srgbClr val="777777"/>
-                </a:solidFill>
-                <a:latin typeface="Calibri"/>
-              </a:rPr>
-              <a:t>No defense</a:t>
+            <a:off x="731520" y="3602736"/>
+            <a:ext cx="3291840" cy="310896"/>
+          </a:xfrm>
+          <a:prstGeom prst="rect">
+            <a:avLst/>
+          </a:prstGeom>
+          <a:noFill/>
+        </p:spPr>
+        <p:txBody>
+          <a:bodyPr wrap="square" lIns="0" rIns="0" tIns="0" bIns="0" anchor="t">
+            <a:spAutoFit/>
+          </a:bodyPr>
+          <a:lstStyle/>
+          <a:p>
+            <a:pPr algn="l">
+              <a:lnSpc>
+                <a:spcPct val="106000"/>
+              </a:lnSpc>
+              <a:spcAft>
+                <a:spcPts val="0"/>
+              </a:spcAft>
+            </a:pPr>
+            <a:r>
+              <a:rPr sz="1350" b="1" i="0">
+                <a:solidFill>
+                  <a:srgbClr val="111111"/>
+                </a:solidFill>
+                <a:latin typeface="Calibri"/>
+              </a:rPr>
+              <a:t>Route in</a:t>
             </a:r>
           </a:p>
         </p:txBody>
@@ -4626,36 +6448,36 @@
         </p:nvSpPr>
         <p:spPr>
           <a:xfrm>
-            <a:off x="8138160" y="2103120"/>
-            <a:ext cx="2011680" cy="274320"/>
-          </a:xfrm>
-          <a:prstGeom prst="rect">
-            <a:avLst/>
-          </a:prstGeom>
-          <a:noFill/>
-        </p:spPr>
-        <p:txBody>
-          <a:bodyPr wrap="square" lIns="0" rIns="0" tIns="0" bIns="0" anchor="t">
-            <a:spAutoFit/>
-          </a:bodyPr>
-          <a:lstStyle/>
-          <a:p>
-            <a:pPr algn="l">
-              <a:lnSpc>
-                <a:spcPct val="106000"/>
-              </a:lnSpc>
-              <a:spcAft>
-                <a:spcPts val="0"/>
-              </a:spcAft>
-            </a:pPr>
-            <a:r>
-              <a:rPr sz="1150" b="1" i="0">
-                <a:solidFill>
-                  <a:srgbClr val="777777"/>
-                </a:solidFill>
-                <a:latin typeface="Calibri"/>
-              </a:rPr>
-              <a:t>With the defense</a:t>
+            <a:off x="4023360" y="3602736"/>
+            <a:ext cx="7434072" cy="310896"/>
+          </a:xfrm>
+          <a:prstGeom prst="rect">
+            <a:avLst/>
+          </a:prstGeom>
+          <a:noFill/>
+        </p:spPr>
+        <p:txBody>
+          <a:bodyPr wrap="square" lIns="0" rIns="0" tIns="0" bIns="0" anchor="t">
+            <a:spAutoFit/>
+          </a:bodyPr>
+          <a:lstStyle/>
+          <a:p>
+            <a:pPr algn="l">
+              <a:lnSpc>
+                <a:spcPct val="106000"/>
+              </a:lnSpc>
+              <a:spcAft>
+                <a:spcPts val="0"/>
+              </a:spcAft>
+            </a:pPr>
+            <a:r>
+              <a:rPr sz="1350" b="0" i="0">
+                <a:solidFill>
+                  <a:srgbClr val="444444"/>
+                </a:solidFill>
+                <a:latin typeface="Calibri"/>
+              </a:rPr>
+              <a:t>a document returned by a search step</a:t>
             </a:r>
           </a:p>
         </p:txBody>
@@ -4668,36 +6490,36 @@
         </p:nvSpPr>
         <p:spPr>
           <a:xfrm>
-            <a:off x="10332720" y="2103120"/>
-            <a:ext cx="1280160" cy="274320"/>
-          </a:xfrm>
-          <a:prstGeom prst="rect">
-            <a:avLst/>
-          </a:prstGeom>
-          <a:noFill/>
-        </p:spPr>
-        <p:txBody>
-          <a:bodyPr wrap="square" lIns="0" rIns="0" tIns="0" bIns="0" anchor="t">
-            <a:spAutoFit/>
-          </a:bodyPr>
-          <a:lstStyle/>
-          <a:p>
-            <a:pPr algn="l">
-              <a:lnSpc>
-                <a:spcPct val="106000"/>
-              </a:lnSpc>
-              <a:spcAft>
-                <a:spcPts val="0"/>
-              </a:spcAft>
-            </a:pPr>
-            <a:r>
-              <a:rPr sz="1150" b="1" i="0">
-                <a:solidFill>
-                  <a:srgbClr val="777777"/>
-                </a:solidFill>
-                <a:latin typeface="Calibri"/>
-              </a:rPr>
-              <a:t>Poisoned</a:t>
+            <a:off x="731520" y="4041648"/>
+            <a:ext cx="3291840" cy="310896"/>
+          </a:xfrm>
+          <a:prstGeom prst="rect">
+            <a:avLst/>
+          </a:prstGeom>
+          <a:noFill/>
+        </p:spPr>
+        <p:txBody>
+          <a:bodyPr wrap="square" lIns="0" rIns="0" tIns="0" bIns="0" anchor="t">
+            <a:spAutoFit/>
+          </a:bodyPr>
+          <a:lstStyle/>
+          <a:p>
+            <a:pPr algn="l">
+              <a:lnSpc>
+                <a:spcPct val="106000"/>
+              </a:lnSpc>
+              <a:spcAft>
+                <a:spcPts val="0"/>
+              </a:spcAft>
+            </a:pPr>
+            <a:r>
+              <a:rPr sz="1350" b="1" i="0">
+                <a:solidFill>
+                  <a:srgbClr val="111111"/>
+                </a:solidFill>
+                <a:latin typeface="Calibri"/>
+              </a:rPr>
+              <a:t>What goes wrong</a:t>
             </a:r>
           </a:p>
         </p:txBody>
@@ -4710,8 +6532,8 @@
         </p:nvSpPr>
         <p:spPr>
           <a:xfrm>
-            <a:off x="731520" y="2450592"/>
-            <a:ext cx="2926080" cy="310896"/>
+            <a:off x="4023360" y="4041648"/>
+            <a:ext cx="7434072" cy="310896"/>
           </a:xfrm>
           <a:prstGeom prst="rect">
             <a:avLst/>
@@ -4739,7 +6561,7 @@
                 </a:solidFill>
                 <a:latin typeface="Calibri"/>
               </a:rPr>
-              <a:t>CK-PLUG</a:t>
+              <a:t>the agent answers from false content and nothing signals it</a:t>
             </a:r>
           </a:p>
         </p:txBody>
@@ -4752,8 +6574,50 @@
         </p:nvSpPr>
         <p:spPr>
           <a:xfrm>
-            <a:off x="3749039" y="2450592"/>
-            <a:ext cx="2377440" cy="310896"/>
+            <a:off x="731520" y="4480560"/>
+            <a:ext cx="3291840" cy="310896"/>
+          </a:xfrm>
+          <a:prstGeom prst="rect">
+            <a:avLst/>
+          </a:prstGeom>
+          <a:noFill/>
+        </p:spPr>
+        <p:txBody>
+          <a:bodyPr wrap="square" lIns="0" rIns="0" tIns="0" bIns="0" anchor="t">
+            <a:spAutoFit/>
+          </a:bodyPr>
+          <a:lstStyle/>
+          <a:p>
+            <a:pPr algn="l">
+              <a:lnSpc>
+                <a:spcPct val="106000"/>
+              </a:lnSpc>
+              <a:spcAft>
+                <a:spcPts val="0"/>
+              </a:spcAft>
+            </a:pPr>
+            <a:r>
+              <a:rPr sz="1350" b="1" i="0">
+                <a:solidFill>
+                  <a:srgbClr val="111111"/>
+                </a:solidFill>
+                <a:latin typeface="Calibri"/>
+              </a:rPr>
+              <a:t>On the attack side</a:t>
+            </a:r>
+          </a:p>
+        </p:txBody>
+      </p:sp>
+      <p:sp>
+        <p:nvSpPr>
+          <p:cNvPr id="12" name="TextBox 11"/>
+          <p:cNvSpPr txBox="1"/>
+          <p:nvPr/>
+        </p:nvSpPr>
+        <p:spPr>
+          <a:xfrm>
+            <a:off x="4023360" y="4480560"/>
+            <a:ext cx="7434072" cy="310896"/>
           </a:xfrm>
           <a:prstGeom prst="rect">
             <a:avLst/>
@@ -4781,21 +6645,63 @@
                 </a:solidFill>
                 <a:latin typeface="Calibri"/>
               </a:rPr>
-              <a:t>tone steering</a:t>
-            </a:r>
-          </a:p>
-        </p:txBody>
-      </p:sp>
-      <p:sp>
-        <p:nvSpPr>
-          <p:cNvPr id="12" name="TextBox 11"/>
-          <p:cNvSpPr txBox="1"/>
-          <p:nvPr/>
-        </p:nvSpPr>
-        <p:spPr>
-          <a:xfrm>
-            <a:off x="6309359" y="2450592"/>
-            <a:ext cx="1645920" cy="310896"/>
+              <a:t>3 named attacks, all deliberate</a:t>
+            </a:r>
+          </a:p>
+        </p:txBody>
+      </p:sp>
+      <p:sp>
+        <p:nvSpPr>
+          <p:cNvPr id="13" name="TextBox 12"/>
+          <p:cNvSpPr txBox="1"/>
+          <p:nvPr/>
+        </p:nvSpPr>
+        <p:spPr>
+          <a:xfrm>
+            <a:off x="731520" y="4919472"/>
+            <a:ext cx="3291840" cy="310896"/>
+          </a:xfrm>
+          <a:prstGeom prst="rect">
+            <a:avLst/>
+          </a:prstGeom>
+          <a:noFill/>
+        </p:spPr>
+        <p:txBody>
+          <a:bodyPr wrap="square" lIns="0" rIns="0" tIns="0" bIns="0" anchor="t">
+            <a:spAutoFit/>
+          </a:bodyPr>
+          <a:lstStyle/>
+          <a:p>
+            <a:pPr algn="l">
+              <a:lnSpc>
+                <a:spcPct val="106000"/>
+              </a:lnSpc>
+              <a:spcAft>
+                <a:spcPts val="0"/>
+              </a:spcAft>
+            </a:pPr>
+            <a:r>
+              <a:rPr sz="1350" b="1" i="0">
+                <a:solidFill>
+                  <a:srgbClr val="111111"/>
+                </a:solidFill>
+                <a:latin typeface="Calibri"/>
+              </a:rPr>
+              <a:t>On the defense side</a:t>
+            </a:r>
+          </a:p>
+        </p:txBody>
+      </p:sp>
+      <p:sp>
+        <p:nvSpPr>
+          <p:cNvPr id="14" name="TextBox 13"/>
+          <p:cNvSpPr txBox="1"/>
+          <p:nvPr/>
+        </p:nvSpPr>
+        <p:spPr>
+          <a:xfrm>
+            <a:off x="4023360" y="4919472"/>
+            <a:ext cx="7434072" cy="310896"/>
           </a:xfrm>
           <a:prstGeom prst="rect">
             <a:avLst/>
@@ -4823,21 +6729,21 @@
                 </a:solidFill>
                 <a:latin typeface="Calibri"/>
               </a:rPr>
-              <a:t>0.0 %</a:t>
-            </a:r>
-          </a:p>
-        </p:txBody>
-      </p:sp>
-      <p:sp>
-        <p:nvSpPr>
-          <p:cNvPr id="13" name="TextBox 12"/>
-          <p:cNvSpPr txBox="1"/>
-          <p:nvPr/>
-        </p:nvSpPr>
-        <p:spPr>
-          <a:xfrm>
-            <a:off x="8138160" y="2450592"/>
-            <a:ext cx="2011680" cy="310896"/>
+              <a:t>42 named defenses, all built for the accidental version</a:t>
+            </a:r>
+          </a:p>
+        </p:txBody>
+      </p:sp>
+      <p:sp>
+        <p:nvSpPr>
+          <p:cNvPr id="15" name="TextBox 14"/>
+          <p:cNvSpPr txBox="1"/>
+          <p:nvPr/>
+        </p:nvSpPr>
+        <p:spPr>
+          <a:xfrm>
+            <a:off x="731520" y="5358383"/>
+            <a:ext cx="3291840" cy="310896"/>
           </a:xfrm>
           <a:prstGeom prst="rect">
             <a:avLst/>
@@ -4865,21 +6771,21 @@
                 </a:solidFill>
                 <a:latin typeface="Calibri"/>
               </a:rPr>
-              <a:t>78.2 %</a:t>
-            </a:r>
-          </a:p>
-        </p:txBody>
-      </p:sp>
-      <p:sp>
-        <p:nvSpPr>
-          <p:cNvPr id="14" name="TextBox 13"/>
-          <p:cNvSpPr txBox="1"/>
-          <p:nvPr/>
-        </p:nvSpPr>
-        <p:spPr>
-          <a:xfrm>
-            <a:off x="10332720" y="2450592"/>
-            <a:ext cx="1280160" cy="310896"/>
+              <a:t>Tested against each other</a:t>
+            </a:r>
+          </a:p>
+        </p:txBody>
+      </p:sp>
+      <p:sp>
+        <p:nvSpPr>
+          <p:cNvPr id="16" name="TextBox 15"/>
+          <p:cNvSpPr txBox="1"/>
+          <p:nvPr/>
+        </p:nvSpPr>
+        <p:spPr>
+          <a:xfrm>
+            <a:off x="4023360" y="5358383"/>
+            <a:ext cx="7434072" cy="310896"/>
           </a:xfrm>
           <a:prstGeom prst="rect">
             <a:avLst/>
@@ -4907,91 +6813,7 @@
                 </a:solidFill>
                 <a:latin typeface="Calibri"/>
               </a:rPr>
-              <a:t>1 of 10</a:t>
-            </a:r>
-          </a:p>
-        </p:txBody>
-      </p:sp>
-      <p:sp>
-        <p:nvSpPr>
-          <p:cNvPr id="15" name="TextBox 14"/>
-          <p:cNvSpPr txBox="1"/>
-          <p:nvPr/>
-        </p:nvSpPr>
-        <p:spPr>
-          <a:xfrm>
-            <a:off x="731520" y="2926080"/>
-            <a:ext cx="2926080" cy="310896"/>
-          </a:xfrm>
-          <a:prstGeom prst="rect">
-            <a:avLst/>
-          </a:prstGeom>
-          <a:noFill/>
-        </p:spPr>
-        <p:txBody>
-          <a:bodyPr wrap="square" lIns="0" rIns="0" tIns="0" bIns="0" anchor="t">
-            <a:spAutoFit/>
-          </a:bodyPr>
-          <a:lstStyle/>
-          <a:p>
-            <a:pPr algn="l">
-              <a:lnSpc>
-                <a:spcPct val="106000"/>
-              </a:lnSpc>
-              <a:spcAft>
-                <a:spcPts val="0"/>
-              </a:spcAft>
-            </a:pPr>
-            <a:r>
-              <a:rPr sz="1350" b="0" i="0">
-                <a:solidFill>
-                  <a:srgbClr val="444444"/>
-                </a:solidFill>
-                <a:latin typeface="Calibri"/>
-              </a:rPr>
-              <a:t>CK-PLUG</a:t>
-            </a:r>
-          </a:p>
-        </p:txBody>
-      </p:sp>
-      <p:sp>
-        <p:nvSpPr>
-          <p:cNvPr id="16" name="TextBox 15"/>
-          <p:cNvSpPr txBox="1"/>
-          <p:nvPr/>
-        </p:nvSpPr>
-        <p:spPr>
-          <a:xfrm>
-            <a:off x="3749039" y="2926080"/>
-            <a:ext cx="2377440" cy="310896"/>
-          </a:xfrm>
-          <a:prstGeom prst="rect">
-            <a:avLst/>
-          </a:prstGeom>
-          <a:noFill/>
-        </p:spPr>
-        <p:txBody>
-          <a:bodyPr wrap="square" lIns="0" rIns="0" tIns="0" bIns="0" anchor="t">
-            <a:spAutoFit/>
-          </a:bodyPr>
-          <a:lstStyle/>
-          <a:p>
-            <a:pPr algn="l">
-              <a:lnSpc>
-                <a:spcPct val="106000"/>
-              </a:lnSpc>
-              <a:spcAft>
-                <a:spcPts val="0"/>
-              </a:spcAft>
-            </a:pPr>
-            <a:r>
-              <a:rPr sz="1350" b="0" i="0">
-                <a:solidFill>
-                  <a:srgbClr val="444444"/>
-                </a:solidFill>
-                <a:latin typeface="Calibri"/>
-              </a:rPr>
-              <a:t>tone steering</a:t>
+              <a:t>none of them, by anyone</a:t>
             </a:r>
           </a:p>
         </p:txBody>
@@ -5004,471 +6826,36 @@
         </p:nvSpPr>
         <p:spPr>
           <a:xfrm>
-            <a:off x="6309359" y="2926080"/>
-            <a:ext cx="1645920" cy="310896"/>
-          </a:xfrm>
-          <a:prstGeom prst="rect">
-            <a:avLst/>
-          </a:prstGeom>
-          <a:noFill/>
-        </p:spPr>
-        <p:txBody>
-          <a:bodyPr wrap="square" lIns="0" rIns="0" tIns="0" bIns="0" anchor="t">
-            <a:spAutoFit/>
-          </a:bodyPr>
-          <a:lstStyle/>
-          <a:p>
-            <a:pPr algn="l">
-              <a:lnSpc>
-                <a:spcPct val="106000"/>
-              </a:lnSpc>
-              <a:spcAft>
-                <a:spcPts val="0"/>
-              </a:spcAft>
-            </a:pPr>
-            <a:r>
-              <a:rPr sz="1350" b="0" i="0">
-                <a:solidFill>
-                  <a:srgbClr val="444444"/>
-                </a:solidFill>
-                <a:latin typeface="Calibri"/>
-              </a:rPr>
-              <a:t>4.0 %</a:t>
-            </a:r>
-          </a:p>
-        </p:txBody>
-      </p:sp>
-      <p:sp>
-        <p:nvSpPr>
-          <p:cNvPr id="18" name="TextBox 17"/>
-          <p:cNvSpPr txBox="1"/>
-          <p:nvPr/>
-        </p:nvSpPr>
-        <p:spPr>
-          <a:xfrm>
-            <a:off x="8138160" y="2926080"/>
-            <a:ext cx="2011680" cy="310896"/>
-          </a:xfrm>
-          <a:prstGeom prst="rect">
-            <a:avLst/>
-          </a:prstGeom>
-          <a:noFill/>
-        </p:spPr>
-        <p:txBody>
-          <a:bodyPr wrap="square" lIns="0" rIns="0" tIns="0" bIns="0" anchor="t">
-            <a:spAutoFit/>
-          </a:bodyPr>
-          <a:lstStyle/>
-          <a:p>
-            <a:pPr algn="l">
-              <a:lnSpc>
-                <a:spcPct val="106000"/>
-              </a:lnSpc>
-              <a:spcAft>
-                <a:spcPts val="0"/>
-              </a:spcAft>
-            </a:pPr>
-            <a:r>
-              <a:rPr sz="1350" b="1" i="0">
+            <a:off x="731520" y="5907024"/>
+            <a:ext cx="10725912" cy="493776"/>
+          </a:xfrm>
+          <a:prstGeom prst="rect">
+            <a:avLst/>
+          </a:prstGeom>
+          <a:noFill/>
+        </p:spPr>
+        <p:txBody>
+          <a:bodyPr wrap="square" lIns="0" rIns="0" tIns="0" bIns="0" anchor="t">
+            <a:spAutoFit/>
+          </a:bodyPr>
+          <a:lstStyle/>
+          <a:p>
+            <a:pPr algn="l">
+              <a:lnSpc>
+                <a:spcPct val="110000"/>
+              </a:lnSpc>
+              <a:spcAft>
+                <a:spcPts val="600"/>
+              </a:spcAft>
+            </a:pPr>
+            <a:r>
+              <a:rPr sz="1500" b="1" i="0">
                 <a:solidFill>
                   <a:srgbClr val="111111"/>
                 </a:solidFill>
                 <a:latin typeface="Calibri"/>
               </a:rPr>
-              <a:t>99.0 %</a:t>
-            </a:r>
-          </a:p>
-        </p:txBody>
-      </p:sp>
-      <p:sp>
-        <p:nvSpPr>
-          <p:cNvPr id="19" name="TextBox 18"/>
-          <p:cNvSpPr txBox="1"/>
-          <p:nvPr/>
-        </p:nvSpPr>
-        <p:spPr>
-          <a:xfrm>
-            <a:off x="10332720" y="2926080"/>
-            <a:ext cx="1280160" cy="310896"/>
-          </a:xfrm>
-          <a:prstGeom prst="rect">
-            <a:avLst/>
-          </a:prstGeom>
-          <a:noFill/>
-        </p:spPr>
-        <p:txBody>
-          <a:bodyPr wrap="square" lIns="0" rIns="0" tIns="0" bIns="0" anchor="t">
-            <a:spAutoFit/>
-          </a:bodyPr>
-          <a:lstStyle/>
-          <a:p>
-            <a:pPr algn="l">
-              <a:lnSpc>
-                <a:spcPct val="106000"/>
-              </a:lnSpc>
-              <a:spcAft>
-                <a:spcPts val="0"/>
-              </a:spcAft>
-            </a:pPr>
-            <a:r>
-              <a:rPr sz="1350" b="0" i="0">
-                <a:solidFill>
-                  <a:srgbClr val="444444"/>
-                </a:solidFill>
-                <a:latin typeface="Calibri"/>
-              </a:rPr>
-              <a:t>10 of 10</a:t>
-            </a:r>
-          </a:p>
-        </p:txBody>
-      </p:sp>
-      <p:sp>
-        <p:nvSpPr>
-          <p:cNvPr id="20" name="TextBox 19"/>
-          <p:cNvSpPr txBox="1"/>
-          <p:nvPr/>
-        </p:nvSpPr>
-        <p:spPr>
-          <a:xfrm>
-            <a:off x="731520" y="3401568"/>
-            <a:ext cx="2926080" cy="310896"/>
-          </a:xfrm>
-          <a:prstGeom prst="rect">
-            <a:avLst/>
-          </a:prstGeom>
-          <a:noFill/>
-        </p:spPr>
-        <p:txBody>
-          <a:bodyPr wrap="square" lIns="0" rIns="0" tIns="0" bIns="0" anchor="t">
-            <a:spAutoFit/>
-          </a:bodyPr>
-          <a:lstStyle/>
-          <a:p>
-            <a:pPr algn="l">
-              <a:lnSpc>
-                <a:spcPct val="106000"/>
-              </a:lnSpc>
-              <a:spcAft>
-                <a:spcPts val="0"/>
-              </a:spcAft>
-            </a:pPr>
-            <a:r>
-              <a:rPr sz="1350" b="0" i="0">
-                <a:solidFill>
-                  <a:srgbClr val="444444"/>
-                </a:solidFill>
-                <a:latin typeface="Calibri"/>
-              </a:rPr>
-              <a:t>ParamMute</a:t>
-            </a:r>
-          </a:p>
-        </p:txBody>
-      </p:sp>
-      <p:sp>
-        <p:nvSpPr>
-          <p:cNvPr id="21" name="TextBox 20"/>
-          <p:cNvSpPr txBox="1"/>
-          <p:nvPr/>
-        </p:nvSpPr>
-        <p:spPr>
-          <a:xfrm>
-            <a:off x="3749039" y="3401568"/>
-            <a:ext cx="2377440" cy="310896"/>
-          </a:xfrm>
-          <a:prstGeom prst="rect">
-            <a:avLst/>
-          </a:prstGeom>
-          <a:noFill/>
-        </p:spPr>
-        <p:txBody>
-          <a:bodyPr wrap="square" lIns="0" rIns="0" tIns="0" bIns="0" anchor="t">
-            <a:spAutoFit/>
-          </a:bodyPr>
-          <a:lstStyle/>
-          <a:p>
-            <a:pPr algn="l">
-              <a:lnSpc>
-                <a:spcPct val="106000"/>
-              </a:lnSpc>
-              <a:spcAft>
-                <a:spcPts val="0"/>
-              </a:spcAft>
-            </a:pPr>
-            <a:r>
-              <a:rPr sz="1350" b="0" i="0">
-                <a:solidFill>
-                  <a:srgbClr val="444444"/>
-                </a:solidFill>
-                <a:latin typeface="Calibri"/>
-              </a:rPr>
-              <a:t>tone steering</a:t>
-            </a:r>
-          </a:p>
-        </p:txBody>
-      </p:sp>
-      <p:sp>
-        <p:nvSpPr>
-          <p:cNvPr id="22" name="TextBox 21"/>
-          <p:cNvSpPr txBox="1"/>
-          <p:nvPr/>
-        </p:nvSpPr>
-        <p:spPr>
-          <a:xfrm>
-            <a:off x="6309359" y="3401568"/>
-            <a:ext cx="1645920" cy="310896"/>
-          </a:xfrm>
-          <a:prstGeom prst="rect">
-            <a:avLst/>
-          </a:prstGeom>
-          <a:noFill/>
-        </p:spPr>
-        <p:txBody>
-          <a:bodyPr wrap="square" lIns="0" rIns="0" tIns="0" bIns="0" anchor="t">
-            <a:spAutoFit/>
-          </a:bodyPr>
-          <a:lstStyle/>
-          <a:p>
-            <a:pPr algn="l">
-              <a:lnSpc>
-                <a:spcPct val="106000"/>
-              </a:lnSpc>
-              <a:spcAft>
-                <a:spcPts val="0"/>
-              </a:spcAft>
-            </a:pPr>
-            <a:r>
-              <a:rPr sz="1350" b="0" i="0">
-                <a:solidFill>
-                  <a:srgbClr val="444444"/>
-                </a:solidFill>
-                <a:latin typeface="Calibri"/>
-              </a:rPr>
-              <a:t>3.4 %</a:t>
-            </a:r>
-          </a:p>
-        </p:txBody>
-      </p:sp>
-      <p:sp>
-        <p:nvSpPr>
-          <p:cNvPr id="23" name="TextBox 22"/>
-          <p:cNvSpPr txBox="1"/>
-          <p:nvPr/>
-        </p:nvSpPr>
-        <p:spPr>
-          <a:xfrm>
-            <a:off x="8138160" y="3401568"/>
-            <a:ext cx="2011680" cy="310896"/>
-          </a:xfrm>
-          <a:prstGeom prst="rect">
-            <a:avLst/>
-          </a:prstGeom>
-          <a:noFill/>
-        </p:spPr>
-        <p:txBody>
-          <a:bodyPr wrap="square" lIns="0" rIns="0" tIns="0" bIns="0" anchor="t">
-            <a:spAutoFit/>
-          </a:bodyPr>
-          <a:lstStyle/>
-          <a:p>
-            <a:pPr algn="l">
-              <a:lnSpc>
-                <a:spcPct val="106000"/>
-              </a:lnSpc>
-              <a:spcAft>
-                <a:spcPts val="0"/>
-              </a:spcAft>
-            </a:pPr>
-            <a:r>
-              <a:rPr sz="1350" b="1" i="0">
-                <a:solidFill>
-                  <a:srgbClr val="111111"/>
-                </a:solidFill>
-                <a:latin typeface="Calibri"/>
-              </a:rPr>
-              <a:t>28.8 %</a:t>
-            </a:r>
-          </a:p>
-        </p:txBody>
-      </p:sp>
-      <p:sp>
-        <p:nvSpPr>
-          <p:cNvPr id="24" name="TextBox 23"/>
-          <p:cNvSpPr txBox="1"/>
-          <p:nvPr/>
-        </p:nvSpPr>
-        <p:spPr>
-          <a:xfrm>
-            <a:off x="10332720" y="3401568"/>
-            <a:ext cx="1280160" cy="310896"/>
-          </a:xfrm>
-          <a:prstGeom prst="rect">
-            <a:avLst/>
-          </a:prstGeom>
-          <a:noFill/>
-        </p:spPr>
-        <p:txBody>
-          <a:bodyPr wrap="square" lIns="0" rIns="0" tIns="0" bIns="0" anchor="t">
-            <a:spAutoFit/>
-          </a:bodyPr>
-          <a:lstStyle/>
-          <a:p>
-            <a:pPr algn="l">
-              <a:lnSpc>
-                <a:spcPct val="106000"/>
-              </a:lnSpc>
-              <a:spcAft>
-                <a:spcPts val="0"/>
-              </a:spcAft>
-            </a:pPr>
-            <a:r>
-              <a:rPr sz="1350" b="0" i="0">
-                <a:solidFill>
-                  <a:srgbClr val="444444"/>
-                </a:solidFill>
-                <a:latin typeface="Calibri"/>
-              </a:rPr>
-              <a:t>10 of 10</a:t>
-            </a:r>
-          </a:p>
-        </p:txBody>
-      </p:sp>
-      <p:sp>
-        <p:nvSpPr>
-          <p:cNvPr id="25" name="TextBox 24"/>
-          <p:cNvSpPr txBox="1"/>
-          <p:nvPr/>
-        </p:nvSpPr>
-        <p:spPr>
-          <a:xfrm>
-            <a:off x="731520" y="4114800"/>
-            <a:ext cx="10725912" cy="2286000"/>
-          </a:xfrm>
-          <a:prstGeom prst="rect">
-            <a:avLst/>
-          </a:prstGeom>
-          <a:noFill/>
-        </p:spPr>
-        <p:txBody>
-          <a:bodyPr wrap="square" lIns="0" rIns="0" tIns="0" bIns="0" anchor="t">
-            <a:spAutoFit/>
-          </a:bodyPr>
-          <a:lstStyle/>
-          <a:p>
-            <a:pPr algn="l">
-              <a:lnSpc>
-                <a:spcPct val="110000"/>
-              </a:lnSpc>
-              <a:spcAft>
-                <a:spcPts val="1100"/>
-              </a:spcAft>
-            </a:pPr>
-            <a:r>
-              <a:rPr sz="1500" b="1" i="0">
-                <a:solidFill>
-                  <a:srgbClr val="111111"/>
-                </a:solidFill>
-                <a:latin typeface="Calibri"/>
-              </a:rPr>
-              <a:t>With no defense the attack stays at or near zero. It only works once the defense is switched on.</a:t>
-            </a:r>
-          </a:p>
-          <a:p>
-            <a:pPr>
-              <a:lnSpc>
-                <a:spcPct val="110000"/>
-              </a:lnSpc>
-              <a:spcAft>
-                <a:spcPts val="1100"/>
-              </a:spcAft>
-            </a:pPr>
-            <a:r>
-              <a:rPr sz="1500" b="0" i="0">
-                <a:solidFill>
-                  <a:srgbClr val="444444"/>
-                </a:solidFill>
-                <a:latin typeface="Calibri"/>
-              </a:rPr>
-              <a:t>One poisoned passage out of ten is enough. The undefended model ignores it completely.</a:t>
-            </a:r>
-          </a:p>
-          <a:p>
-            <a:pPr>
-              <a:lnSpc>
-                <a:spcPct val="110000"/>
-              </a:lnSpc>
-              <a:spcAft>
-                <a:spcPts val="1100"/>
-              </a:spcAft>
-            </a:pPr>
-            <a:r>
-              <a:rPr sz="1500" b="0" i="0">
-                <a:solidFill>
-                  <a:srgbClr val="444444"/>
-                </a:solidFill>
-                <a:latin typeface="Calibri"/>
-              </a:rPr>
-              <a:t>The reason is uncomfortable. Tone steering does not change the answer, so a defense that pushes the model to follow the retrieved text follows the slant as well, and scores itself as working perfectly. The attack and the defense want the same thing.</a:t>
-            </a:r>
-          </a:p>
-          <a:p>
-            <a:pPr>
-              <a:lnSpc>
-                <a:spcPct val="110000"/>
-              </a:lnSpc>
-              <a:spcAft>
-                <a:spcPts val="1100"/>
-              </a:spcAft>
-            </a:pPr>
-            <a:r>
-              <a:rPr sz="1500" b="1" i="0">
-                <a:solidFill>
-                  <a:srgbClr val="111111"/>
-                </a:solidFill>
-                <a:latin typeface="Calibri"/>
-              </a:rPr>
-              <a:t>A defense can be the reason an attack succeeds. That is a security finding, not a performance note.</a:t>
-            </a:r>
-          </a:p>
-        </p:txBody>
-      </p:sp>
-      <p:sp>
-        <p:nvSpPr>
-          <p:cNvPr id="26" name="TextBox 25"/>
-          <p:cNvSpPr txBox="1"/>
-          <p:nvPr/>
-        </p:nvSpPr>
-        <p:spPr>
-          <a:xfrm>
-            <a:off x="731520" y="6400800"/>
-            <a:ext cx="10040112" cy="402336"/>
-          </a:xfrm>
-          <a:prstGeom prst="rect">
-            <a:avLst/>
-          </a:prstGeom>
-          <a:noFill/>
-        </p:spPr>
-        <p:txBody>
-          <a:bodyPr wrap="square" lIns="0" rIns="0" tIns="0" bIns="0" anchor="t">
-            <a:spAutoFit/>
-          </a:bodyPr>
-          <a:lstStyle/>
-          <a:p>
-            <a:pPr algn="l">
-              <a:lnSpc>
-                <a:spcPct val="115000"/>
-              </a:lnSpc>
-              <a:spcAft>
-                <a:spcPts val="0"/>
-              </a:spcAft>
-            </a:pPr>
-            <a:r>
-              <a:rPr sz="850" b="0" i="0">
-                <a:solidFill>
-                  <a:srgbClr val="999999"/>
-                </a:solidFill>
-                <a:latin typeface="Calibri"/>
-              </a:rPr>
-              <a:t>BadRAG Xue et al., 2024   ·   ParamMute Huang et al., NeurIPS 2025   ·   Measurements: this work</a:t>
+              <a:t>Every defense we ran lives in that cell. So does every attack. We did not pick them because they looked promising. The map picked them.</a:t>
             </a:r>
           </a:p>
         </p:txBody>
@@ -5528,7 +6915,7 @@
                 </a:solidFill>
                 <a:latin typeface="Calibri"/>
               </a:rPr>
-              <a:t>RESULT 3</a:t>
+              <a:t>WHAT WE RAN</a:t>
             </a:r>
           </a:p>
         </p:txBody>
@@ -5570,7 +6957,7 @@
                 </a:solidFill>
                 <a:latin typeface="Cambria"/>
               </a:rPr>
-              <a:t>One defense, two models, opposite results</a:t>
+              <a:t>The first measurements anyone has taken in that cell</a:t>
             </a:r>
           </a:p>
         </p:txBody>
@@ -5625,78 +7012,78 @@
         </p:nvSpPr>
         <p:spPr>
           <a:xfrm>
-            <a:off x="731520" y="1828800"/>
-            <a:ext cx="10725912" cy="365760"/>
-          </a:xfrm>
-          <a:prstGeom prst="rect">
-            <a:avLst/>
-          </a:prstGeom>
-          <a:noFill/>
-        </p:spPr>
-        <p:txBody>
-          <a:bodyPr wrap="square" lIns="0" rIns="0" tIns="0" bIns="0" anchor="t">
-            <a:spAutoFit/>
-          </a:bodyPr>
-          <a:lstStyle/>
-          <a:p>
-            <a:pPr algn="l">
-              <a:lnSpc>
-                <a:spcPct val="106000"/>
-              </a:lnSpc>
-              <a:spcAft>
-                <a:spcPts val="0"/>
-              </a:spcAft>
-            </a:pPr>
-            <a:r>
-              <a:rPr sz="1400" b="0" i="0">
+            <a:off x="731520" y="1965960"/>
+            <a:ext cx="2743200" cy="310896"/>
+          </a:xfrm>
+          <a:prstGeom prst="rect">
+            <a:avLst/>
+          </a:prstGeom>
+          <a:noFill/>
+        </p:spPr>
+        <p:txBody>
+          <a:bodyPr wrap="square" lIns="0" rIns="0" tIns="0" bIns="0" anchor="t">
+            <a:spAutoFit/>
+          </a:bodyPr>
+          <a:lstStyle/>
+          <a:p>
+            <a:pPr algn="l">
+              <a:lnSpc>
+                <a:spcPct val="106000"/>
+              </a:lnSpc>
+              <a:spcAft>
+                <a:spcPts val="0"/>
+              </a:spcAft>
+            </a:pPr>
+            <a:r>
+              <a:rPr sz="1500" b="1" i="0">
+                <a:solidFill>
+                  <a:srgbClr val="111111"/>
+                </a:solidFill>
+                <a:latin typeface="Calibri"/>
+              </a:rPr>
+              <a:t>4 attacks</a:t>
+            </a:r>
+          </a:p>
+        </p:txBody>
+      </p:sp>
+      <p:sp>
+        <p:nvSpPr>
+          <p:cNvPr id="6" name="TextBox 5"/>
+          <p:cNvSpPr txBox="1"/>
+          <p:nvPr/>
+        </p:nvSpPr>
+        <p:spPr>
+          <a:xfrm>
+            <a:off x="3474720" y="1965960"/>
+            <a:ext cx="7982712" cy="310896"/>
+          </a:xfrm>
+          <a:prstGeom prst="rect">
+            <a:avLst/>
+          </a:prstGeom>
+          <a:noFill/>
+        </p:spPr>
+        <p:txBody>
+          <a:bodyPr wrap="square" lIns="0" rIns="0" tIns="0" bIns="0" anchor="t">
+            <a:spAutoFit/>
+          </a:bodyPr>
+          <a:lstStyle/>
+          <a:p>
+            <a:pPr algn="l">
+              <a:lnSpc>
+                <a:spcPct val="106000"/>
+              </a:lnSpc>
+              <a:spcAft>
+                <a:spcPts val="0"/>
+              </a:spcAft>
+            </a:pPr>
+            <a:r>
+              <a:rPr sz="1500" b="0" i="0">
                 <a:solidFill>
                   <a:srgbClr val="444444"/>
                 </a:solidFill>
                 <a:latin typeface="Calibri"/>
               </a:rPr>
-              <a:t>One defense family, two versions of it, two models. Nine poisoned passages of ten. The number is how often the agent refuses to answer.</a:t>
-            </a:r>
-          </a:p>
-        </p:txBody>
-      </p:sp>
-      <p:sp>
-        <p:nvSpPr>
-          <p:cNvPr id="6" name="TextBox 5"/>
-          <p:cNvSpPr txBox="1"/>
-          <p:nvPr/>
-        </p:nvSpPr>
-        <p:spPr>
-          <a:xfrm>
-            <a:off x="731520" y="2395728"/>
-            <a:ext cx="3291840" cy="274320"/>
-          </a:xfrm>
-          <a:prstGeom prst="rect">
-            <a:avLst/>
-          </a:prstGeom>
-          <a:noFill/>
-        </p:spPr>
-        <p:txBody>
-          <a:bodyPr wrap="square" lIns="0" rIns="0" tIns="0" bIns="0" anchor="t">
-            <a:spAutoFit/>
-          </a:bodyPr>
-          <a:lstStyle/>
-          <a:p>
-            <a:pPr algn="l">
-              <a:lnSpc>
-                <a:spcPct val="106000"/>
-              </a:lnSpc>
-              <a:spcAft>
-                <a:spcPts val="0"/>
-              </a:spcAft>
-            </a:pPr>
-            <a:r>
-              <a:rPr sz="1150" b="1" i="0">
-                <a:solidFill>
-                  <a:srgbClr val="777777"/>
-                </a:solidFill>
-                <a:latin typeface="Calibri"/>
-              </a:rPr>
-              <a:t>Model</a:t>
+              <a:t>rebuilt from released code and papers</a:t>
             </a:r>
           </a:p>
         </p:txBody>
@@ -5709,36 +7096,36 @@
         </p:nvSpPr>
         <p:spPr>
           <a:xfrm>
-            <a:off x="4114800" y="2395728"/>
-            <a:ext cx="3108960" cy="274320"/>
-          </a:xfrm>
-          <a:prstGeom prst="rect">
-            <a:avLst/>
-          </a:prstGeom>
-          <a:noFill/>
-        </p:spPr>
-        <p:txBody>
-          <a:bodyPr wrap="square" lIns="0" rIns="0" tIns="0" bIns="0" anchor="t">
-            <a:spAutoFit/>
-          </a:bodyPr>
-          <a:lstStyle/>
-          <a:p>
-            <a:pPr algn="l">
-              <a:lnSpc>
-                <a:spcPct val="106000"/>
-              </a:lnSpc>
-              <a:spcAft>
-                <a:spcPts val="0"/>
-              </a:spcAft>
-            </a:pPr>
-            <a:r>
-              <a:rPr sz="1150" b="1" i="0">
-                <a:solidFill>
-                  <a:srgbClr val="777777"/>
-                </a:solidFill>
-                <a:latin typeface="Calibri"/>
-              </a:rPr>
-              <a:t>Version of the defense</a:t>
+            <a:off x="731520" y="2532888"/>
+            <a:ext cx="2743200" cy="310896"/>
+          </a:xfrm>
+          <a:prstGeom prst="rect">
+            <a:avLst/>
+          </a:prstGeom>
+          <a:noFill/>
+        </p:spPr>
+        <p:txBody>
+          <a:bodyPr wrap="square" lIns="0" rIns="0" tIns="0" bIns="0" anchor="t">
+            <a:spAutoFit/>
+          </a:bodyPr>
+          <a:lstStyle/>
+          <a:p>
+            <a:pPr algn="l">
+              <a:lnSpc>
+                <a:spcPct val="106000"/>
+              </a:lnSpc>
+              <a:spcAft>
+                <a:spcPts val="0"/>
+              </a:spcAft>
+            </a:pPr>
+            <a:r>
+              <a:rPr sz="1500" b="1" i="0">
+                <a:solidFill>
+                  <a:srgbClr val="111111"/>
+                </a:solidFill>
+                <a:latin typeface="Calibri"/>
+              </a:rPr>
+              <a:t>5 defenses</a:t>
             </a:r>
           </a:p>
         </p:txBody>
@@ -5751,36 +7138,36 @@
         </p:nvSpPr>
         <p:spPr>
           <a:xfrm>
-            <a:off x="7406640" y="2395728"/>
-            <a:ext cx="1828800" cy="274320"/>
-          </a:xfrm>
-          <a:prstGeom prst="rect">
-            <a:avLst/>
-          </a:prstGeom>
-          <a:noFill/>
-        </p:spPr>
-        <p:txBody>
-          <a:bodyPr wrap="square" lIns="0" rIns="0" tIns="0" bIns="0" anchor="t">
-            <a:spAutoFit/>
-          </a:bodyPr>
-          <a:lstStyle/>
-          <a:p>
-            <a:pPr algn="l">
-              <a:lnSpc>
-                <a:spcPct val="106000"/>
-              </a:lnSpc>
-              <a:spcAft>
-                <a:spcPts val="0"/>
-              </a:spcAft>
-            </a:pPr>
-            <a:r>
-              <a:rPr sz="1150" b="1" i="0">
-                <a:solidFill>
-                  <a:srgbClr val="777777"/>
-                </a:solidFill>
-                <a:latin typeface="Calibri"/>
-              </a:rPr>
-              <a:t>No defense</a:t>
+            <a:off x="3474720" y="2532888"/>
+            <a:ext cx="7982712" cy="310896"/>
+          </a:xfrm>
+          <a:prstGeom prst="rect">
+            <a:avLst/>
+          </a:prstGeom>
+          <a:noFill/>
+        </p:spPr>
+        <p:txBody>
+          <a:bodyPr wrap="square" lIns="0" rIns="0" tIns="0" bIns="0" anchor="t">
+            <a:spAutoFit/>
+          </a:bodyPr>
+          <a:lstStyle/>
+          <a:p>
+            <a:pPr algn="l">
+              <a:lnSpc>
+                <a:spcPct val="106000"/>
+              </a:lnSpc>
+              <a:spcAft>
+                <a:spcPts val="0"/>
+              </a:spcAft>
+            </a:pPr>
+            <a:r>
+              <a:rPr sz="1500" b="0" i="0">
+                <a:solidFill>
+                  <a:srgbClr val="444444"/>
+                </a:solidFill>
+                <a:latin typeface="Calibri"/>
+              </a:rPr>
+              <a:t>counting two versions of one of them, all from released code</a:t>
             </a:r>
           </a:p>
         </p:txBody>
@@ -5793,36 +7180,36 @@
         </p:nvSpPr>
         <p:spPr>
           <a:xfrm>
-            <a:off x="9418320" y="2395728"/>
-            <a:ext cx="2103120" cy="274320"/>
-          </a:xfrm>
-          <a:prstGeom prst="rect">
-            <a:avLst/>
-          </a:prstGeom>
-          <a:noFill/>
-        </p:spPr>
-        <p:txBody>
-          <a:bodyPr wrap="square" lIns="0" rIns="0" tIns="0" bIns="0" anchor="t">
-            <a:spAutoFit/>
-          </a:bodyPr>
-          <a:lstStyle/>
-          <a:p>
-            <a:pPr algn="l">
-              <a:lnSpc>
-                <a:spcPct val="106000"/>
-              </a:lnSpc>
-              <a:spcAft>
-                <a:spcPts val="0"/>
-              </a:spcAft>
-            </a:pPr>
-            <a:r>
-              <a:rPr sz="1150" b="1" i="0">
-                <a:solidFill>
-                  <a:srgbClr val="777777"/>
-                </a:solidFill>
-                <a:latin typeface="Calibri"/>
-              </a:rPr>
-              <a:t>With the defense</a:t>
+            <a:off x="731520" y="3099815"/>
+            <a:ext cx="2743200" cy="310896"/>
+          </a:xfrm>
+          <a:prstGeom prst="rect">
+            <a:avLst/>
+          </a:prstGeom>
+          <a:noFill/>
+        </p:spPr>
+        <p:txBody>
+          <a:bodyPr wrap="square" lIns="0" rIns="0" tIns="0" bIns="0" anchor="t">
+            <a:spAutoFit/>
+          </a:bodyPr>
+          <a:lstStyle/>
+          <a:p>
+            <a:pPr algn="l">
+              <a:lnSpc>
+                <a:spcPct val="106000"/>
+              </a:lnSpc>
+              <a:spcAft>
+                <a:spcPts val="0"/>
+              </a:spcAft>
+            </a:pPr>
+            <a:r>
+              <a:rPr sz="1500" b="1" i="0">
+                <a:solidFill>
+                  <a:srgbClr val="111111"/>
+                </a:solidFill>
+                <a:latin typeface="Calibri"/>
+              </a:rPr>
+              <a:t>18 pairs</a:t>
             </a:r>
           </a:p>
         </p:txBody>
@@ -5835,36 +7222,36 @@
         </p:nvSpPr>
         <p:spPr>
           <a:xfrm>
-            <a:off x="731520" y="2743200"/>
-            <a:ext cx="3291840" cy="310896"/>
-          </a:xfrm>
-          <a:prstGeom prst="rect">
-            <a:avLst/>
-          </a:prstGeom>
-          <a:noFill/>
-        </p:spPr>
-        <p:txBody>
-          <a:bodyPr wrap="square" lIns="0" rIns="0" tIns="0" bIns="0" anchor="t">
-            <a:spAutoFit/>
-          </a:bodyPr>
-          <a:lstStyle/>
-          <a:p>
-            <a:pPr algn="l">
-              <a:lnSpc>
-                <a:spcPct val="106000"/>
-              </a:lnSpc>
-              <a:spcAft>
-                <a:spcPts val="0"/>
-              </a:spcAft>
-            </a:pPr>
-            <a:r>
-              <a:rPr sz="1350" b="0" i="0">
+            <a:off x="3474720" y="3099815"/>
+            <a:ext cx="7982712" cy="310896"/>
+          </a:xfrm>
+          <a:prstGeom prst="rect">
+            <a:avLst/>
+          </a:prstGeom>
+          <a:noFill/>
+        </p:spPr>
+        <p:txBody>
+          <a:bodyPr wrap="square" lIns="0" rIns="0" tIns="0" bIns="0" anchor="t">
+            <a:spAutoFit/>
+          </a:bodyPr>
+          <a:lstStyle/>
+          <a:p>
+            <a:pPr algn="l">
+              <a:lnSpc>
+                <a:spcPct val="106000"/>
+              </a:lnSpc>
+              <a:spcAft>
+                <a:spcPts val="0"/>
+              </a:spcAft>
+            </a:pPr>
+            <a:r>
+              <a:rPr sz="1500" b="0" i="0">
                 <a:solidFill>
                   <a:srgbClr val="444444"/>
                 </a:solidFill>
                 <a:latin typeface="Calibri"/>
               </a:rPr>
-              <a:t>Mistral-7B</a:t>
+              <a:t>defense against attack, on three models, none of them reported anywhere</a:t>
             </a:r>
           </a:p>
         </p:txBody>
@@ -5877,746 +7264,177 @@
         </p:nvSpPr>
         <p:spPr>
           <a:xfrm>
-            <a:off x="4114800" y="2743200"/>
-            <a:ext cx="3108960" cy="310896"/>
-          </a:xfrm>
-          <a:prstGeom prst="rect">
-            <a:avLst/>
-          </a:prstGeom>
-          <a:noFill/>
-        </p:spPr>
-        <p:txBody>
-          <a:bodyPr wrap="square" lIns="0" rIns="0" tIns="0" bIns="0" anchor="t">
-            <a:spAutoFit/>
-          </a:bodyPr>
-          <a:lstStyle/>
-          <a:p>
-            <a:pPr algn="l">
-              <a:lnSpc>
-                <a:spcPct val="106000"/>
-              </a:lnSpc>
-              <a:spcAft>
-                <a:spcPts val="0"/>
-              </a:spcAft>
-            </a:pPr>
-            <a:r>
-              <a:rPr sz="1350" b="0" i="0">
+            <a:off x="731520" y="3666744"/>
+            <a:ext cx="2743200" cy="310896"/>
+          </a:xfrm>
+          <a:prstGeom prst="rect">
+            <a:avLst/>
+          </a:prstGeom>
+          <a:noFill/>
+        </p:spPr>
+        <p:txBody>
+          <a:bodyPr wrap="square" lIns="0" rIns="0" tIns="0" bIns="0" anchor="t">
+            <a:spAutoFit/>
+          </a:bodyPr>
+          <a:lstStyle/>
+          <a:p>
+            <a:pPr algn="l">
+              <a:lnSpc>
+                <a:spcPct val="106000"/>
+              </a:lnSpc>
+              <a:spcAft>
+                <a:spcPts val="0"/>
+              </a:spcAft>
+            </a:pPr>
+            <a:r>
+              <a:rPr sz="1500" b="1" i="0">
+                <a:solidFill>
+                  <a:srgbClr val="111111"/>
+                </a:solidFill>
+                <a:latin typeface="Calibri"/>
+              </a:rPr>
+              <a:t>104 conditions</a:t>
+            </a:r>
+          </a:p>
+        </p:txBody>
+      </p:sp>
+      <p:sp>
+        <p:nvSpPr>
+          <p:cNvPr id="12" name="TextBox 11"/>
+          <p:cNvSpPr txBox="1"/>
+          <p:nvPr/>
+        </p:nvSpPr>
+        <p:spPr>
+          <a:xfrm>
+            <a:off x="3474720" y="3666744"/>
+            <a:ext cx="7982712" cy="310896"/>
+          </a:xfrm>
+          <a:prstGeom prst="rect">
+            <a:avLst/>
+          </a:prstGeom>
+          <a:noFill/>
+        </p:spPr>
+        <p:txBody>
+          <a:bodyPr wrap="square" lIns="0" rIns="0" tIns="0" bIns="0" anchor="t">
+            <a:spAutoFit/>
+          </a:bodyPr>
+          <a:lstStyle/>
+          <a:p>
+            <a:pPr algn="l">
+              <a:lnSpc>
+                <a:spcPct val="106000"/>
+              </a:lnSpc>
+              <a:spcAft>
+                <a:spcPts val="0"/>
+              </a:spcAft>
+            </a:pPr>
+            <a:r>
+              <a:rPr sz="1500" b="0" i="0">
                 <a:solidFill>
                   <a:srgbClr val="444444"/>
                 </a:solidFill>
                 <a:latin typeface="Calibri"/>
               </a:rPr>
-              <a:t>KeywordAgg</a:t>
-            </a:r>
-          </a:p>
-        </p:txBody>
-      </p:sp>
-      <p:sp>
-        <p:nvSpPr>
-          <p:cNvPr id="12" name="TextBox 11"/>
-          <p:cNvSpPr txBox="1"/>
-          <p:nvPr/>
-        </p:nvSpPr>
-        <p:spPr>
-          <a:xfrm>
-            <a:off x="7406640" y="2743200"/>
-            <a:ext cx="1828800" cy="310896"/>
-          </a:xfrm>
-          <a:prstGeom prst="rect">
-            <a:avLst/>
-          </a:prstGeom>
-          <a:noFill/>
-        </p:spPr>
-        <p:txBody>
-          <a:bodyPr wrap="square" lIns="0" rIns="0" tIns="0" bIns="0" anchor="t">
-            <a:spAutoFit/>
-          </a:bodyPr>
-          <a:lstStyle/>
-          <a:p>
-            <a:pPr algn="l">
-              <a:lnSpc>
-                <a:spcPct val="106000"/>
-              </a:lnSpc>
-              <a:spcAft>
-                <a:spcPts val="0"/>
-              </a:spcAft>
-            </a:pPr>
-            <a:r>
-              <a:rPr sz="1350" b="0" i="0">
+              <a:t>each pair run at several attack strengths, not one</a:t>
+            </a:r>
+          </a:p>
+        </p:txBody>
+      </p:sp>
+      <p:sp>
+        <p:nvSpPr>
+          <p:cNvPr id="13" name="TextBox 12"/>
+          <p:cNvSpPr txBox="1"/>
+          <p:nvPr/>
+        </p:nvSpPr>
+        <p:spPr>
+          <a:xfrm>
+            <a:off x="731520" y="4526280"/>
+            <a:ext cx="10725912" cy="1874519"/>
+          </a:xfrm>
+          <a:prstGeom prst="rect">
+            <a:avLst/>
+          </a:prstGeom>
+          <a:noFill/>
+        </p:spPr>
+        <p:txBody>
+          <a:bodyPr wrap="square" lIns="0" rIns="0" tIns="0" bIns="0" anchor="t">
+            <a:spAutoFit/>
+          </a:bodyPr>
+          <a:lstStyle/>
+          <a:p>
+            <a:pPr algn="l">
+              <a:lnSpc>
+                <a:spcPct val="110000"/>
+              </a:lnSpc>
+              <a:spcAft>
+                <a:spcPts val="800"/>
+              </a:spcAft>
+            </a:pPr>
+            <a:r>
+              <a:rPr sz="1500" b="1" i="0">
+                <a:solidFill>
+                  <a:srgbClr val="111111"/>
+                </a:solidFill>
+                <a:latin typeface="Calibri"/>
+              </a:rPr>
+              <a:t>Two rules decide whether we are allowed to claim anything.</a:t>
+            </a:r>
+          </a:p>
+          <a:p>
+            <a:pPr>
+              <a:lnSpc>
+                <a:spcPct val="110000"/>
+              </a:lnSpc>
+              <a:spcAft>
+                <a:spcPts val="800"/>
+              </a:spcAft>
+            </a:pPr>
+            <a:r>
+              <a:rPr sz="1500" b="0" i="0">
                 <a:solidFill>
                   <a:srgbClr val="444444"/>
                 </a:solidFill>
                 <a:latin typeface="Calibri"/>
               </a:rPr>
-              <a:t>0.0 %</a:t>
-            </a:r>
-          </a:p>
-        </p:txBody>
-      </p:sp>
-      <p:sp>
-        <p:nvSpPr>
-          <p:cNvPr id="13" name="TextBox 12"/>
-          <p:cNvSpPr txBox="1"/>
-          <p:nvPr/>
-        </p:nvSpPr>
-        <p:spPr>
-          <a:xfrm>
-            <a:off x="9418320" y="2743200"/>
-            <a:ext cx="2103120" cy="310896"/>
-          </a:xfrm>
-          <a:prstGeom prst="rect">
-            <a:avLst/>
-          </a:prstGeom>
-          <a:noFill/>
-        </p:spPr>
-        <p:txBody>
-          <a:bodyPr wrap="square" lIns="0" rIns="0" tIns="0" bIns="0" anchor="t">
-            <a:spAutoFit/>
-          </a:bodyPr>
-          <a:lstStyle/>
-          <a:p>
-            <a:pPr algn="l">
-              <a:lnSpc>
-                <a:spcPct val="106000"/>
-              </a:lnSpc>
-              <a:spcAft>
-                <a:spcPts val="0"/>
-              </a:spcAft>
-            </a:pPr>
-            <a:r>
-              <a:rPr sz="1350" b="1" i="0">
-                <a:solidFill>
-                  <a:srgbClr val="111111"/>
-                </a:solidFill>
-                <a:latin typeface="Calibri"/>
-              </a:rPr>
-              <a:t>5.7 %</a:t>
-            </a:r>
-          </a:p>
-        </p:txBody>
-      </p:sp>
-      <p:sp>
-        <p:nvSpPr>
-          <p:cNvPr id="14" name="TextBox 13"/>
-          <p:cNvSpPr txBox="1"/>
-          <p:nvPr/>
-        </p:nvSpPr>
-        <p:spPr>
-          <a:xfrm>
-            <a:off x="731520" y="3200400"/>
-            <a:ext cx="3291840" cy="310896"/>
-          </a:xfrm>
-          <a:prstGeom prst="rect">
-            <a:avLst/>
-          </a:prstGeom>
-          <a:noFill/>
-        </p:spPr>
-        <p:txBody>
-          <a:bodyPr wrap="square" lIns="0" rIns="0" tIns="0" bIns="0" anchor="t">
-            <a:spAutoFit/>
-          </a:bodyPr>
-          <a:lstStyle/>
-          <a:p>
-            <a:pPr algn="l">
-              <a:lnSpc>
-                <a:spcPct val="106000"/>
-              </a:lnSpc>
-              <a:spcAft>
-                <a:spcPts val="0"/>
-              </a:spcAft>
-            </a:pPr>
-            <a:r>
-              <a:rPr sz="1350" b="0" i="0">
+              <a:t>A defense must first show its own benefit on its own task. If it cannot, we report nothing from it.</a:t>
+            </a:r>
+          </a:p>
+          <a:p>
+            <a:pPr>
+              <a:lnSpc>
+                <a:spcPct val="110000"/>
+              </a:lnSpc>
+              <a:spcAft>
+                <a:spcPts val="800"/>
+              </a:spcAft>
+            </a:pPr>
+            <a:r>
+              <a:rPr sz="1500" b="0" i="0">
                 <a:solidFill>
                   <a:srgbClr val="444444"/>
                 </a:solidFill>
                 <a:latin typeface="Calibri"/>
               </a:rPr>
-              <a:t>Mistral-7B</a:t>
-            </a:r>
-          </a:p>
-        </p:txBody>
-      </p:sp>
-      <p:sp>
-        <p:nvSpPr>
-          <p:cNvPr id="15" name="TextBox 14"/>
-          <p:cNvSpPr txBox="1"/>
-          <p:nvPr/>
-        </p:nvSpPr>
-        <p:spPr>
-          <a:xfrm>
-            <a:off x="4114800" y="3200400"/>
-            <a:ext cx="3108960" cy="310896"/>
-          </a:xfrm>
-          <a:prstGeom prst="rect">
-            <a:avLst/>
-          </a:prstGeom>
-          <a:noFill/>
-        </p:spPr>
-        <p:txBody>
-          <a:bodyPr wrap="square" lIns="0" rIns="0" tIns="0" bIns="0" anchor="t">
-            <a:spAutoFit/>
-          </a:bodyPr>
-          <a:lstStyle/>
-          <a:p>
-            <a:pPr algn="l">
-              <a:lnSpc>
-                <a:spcPct val="106000"/>
-              </a:lnSpc>
-              <a:spcAft>
-                <a:spcPts val="0"/>
-              </a:spcAft>
-            </a:pPr>
-            <a:r>
-              <a:rPr sz="1350" b="0" i="0">
+              <a:t>We fix in advance the smallest change the sample can detect. Below that we say nothing, in either direction.</a:t>
+            </a:r>
+          </a:p>
+          <a:p>
+            <a:pPr>
+              <a:lnSpc>
+                <a:spcPct val="110000"/>
+              </a:lnSpc>
+              <a:spcAft>
+                <a:spcPts val="800"/>
+              </a:spcAft>
+            </a:pPr>
+            <a:r>
+              <a:rPr sz="1500" b="0" i="0">
                 <a:solidFill>
                   <a:srgbClr val="444444"/>
                 </a:solidFill>
                 <a:latin typeface="Calibri"/>
               </a:rPr>
-              <a:t>DecodingAgg</a:t>
-            </a:r>
-          </a:p>
-        </p:txBody>
-      </p:sp>
-      <p:sp>
-        <p:nvSpPr>
-          <p:cNvPr id="16" name="TextBox 15"/>
-          <p:cNvSpPr txBox="1"/>
-          <p:nvPr/>
-        </p:nvSpPr>
-        <p:spPr>
-          <a:xfrm>
-            <a:off x="7406640" y="3200400"/>
-            <a:ext cx="1828800" cy="310896"/>
-          </a:xfrm>
-          <a:prstGeom prst="rect">
-            <a:avLst/>
-          </a:prstGeom>
-          <a:noFill/>
-        </p:spPr>
-        <p:txBody>
-          <a:bodyPr wrap="square" lIns="0" rIns="0" tIns="0" bIns="0" anchor="t">
-            <a:spAutoFit/>
-          </a:bodyPr>
-          <a:lstStyle/>
-          <a:p>
-            <a:pPr algn="l">
-              <a:lnSpc>
-                <a:spcPct val="106000"/>
-              </a:lnSpc>
-              <a:spcAft>
-                <a:spcPts val="0"/>
-              </a:spcAft>
-            </a:pPr>
-            <a:r>
-              <a:rPr sz="1350" b="0" i="0">
-                <a:solidFill>
-                  <a:srgbClr val="444444"/>
-                </a:solidFill>
-                <a:latin typeface="Calibri"/>
-              </a:rPr>
-              <a:t>0.0 %</a:t>
-            </a:r>
-          </a:p>
-        </p:txBody>
-      </p:sp>
-      <p:sp>
-        <p:nvSpPr>
-          <p:cNvPr id="17" name="TextBox 16"/>
-          <p:cNvSpPr txBox="1"/>
-          <p:nvPr/>
-        </p:nvSpPr>
-        <p:spPr>
-          <a:xfrm>
-            <a:off x="9418320" y="3200400"/>
-            <a:ext cx="2103120" cy="310896"/>
-          </a:xfrm>
-          <a:prstGeom prst="rect">
-            <a:avLst/>
-          </a:prstGeom>
-          <a:noFill/>
-        </p:spPr>
-        <p:txBody>
-          <a:bodyPr wrap="square" lIns="0" rIns="0" tIns="0" bIns="0" anchor="t">
-            <a:spAutoFit/>
-          </a:bodyPr>
-          <a:lstStyle/>
-          <a:p>
-            <a:pPr algn="l">
-              <a:lnSpc>
-                <a:spcPct val="106000"/>
-              </a:lnSpc>
-              <a:spcAft>
-                <a:spcPts val="0"/>
-              </a:spcAft>
-            </a:pPr>
-            <a:r>
-              <a:rPr sz="1350" b="1" i="0">
-                <a:solidFill>
-                  <a:srgbClr val="111111"/>
-                </a:solidFill>
-                <a:latin typeface="Calibri"/>
-              </a:rPr>
-              <a:t>3.7 %</a:t>
-            </a:r>
-          </a:p>
-        </p:txBody>
-      </p:sp>
-      <p:sp>
-        <p:nvSpPr>
-          <p:cNvPr id="18" name="TextBox 17"/>
-          <p:cNvSpPr txBox="1"/>
-          <p:nvPr/>
-        </p:nvSpPr>
-        <p:spPr>
-          <a:xfrm>
-            <a:off x="731520" y="3657600"/>
-            <a:ext cx="3291840" cy="310896"/>
-          </a:xfrm>
-          <a:prstGeom prst="rect">
-            <a:avLst/>
-          </a:prstGeom>
-          <a:noFill/>
-        </p:spPr>
-        <p:txBody>
-          <a:bodyPr wrap="square" lIns="0" rIns="0" tIns="0" bIns="0" anchor="t">
-            <a:spAutoFit/>
-          </a:bodyPr>
-          <a:lstStyle/>
-          <a:p>
-            <a:pPr algn="l">
-              <a:lnSpc>
-                <a:spcPct val="106000"/>
-              </a:lnSpc>
-              <a:spcAft>
-                <a:spcPts val="0"/>
-              </a:spcAft>
-            </a:pPr>
-            <a:r>
-              <a:rPr sz="1350" b="0" i="0">
-                <a:solidFill>
-                  <a:srgbClr val="444444"/>
-                </a:solidFill>
-                <a:latin typeface="Calibri"/>
-              </a:rPr>
-              <a:t>Llama-3-8B</a:t>
-            </a:r>
-          </a:p>
-        </p:txBody>
-      </p:sp>
-      <p:sp>
-        <p:nvSpPr>
-          <p:cNvPr id="19" name="TextBox 18"/>
-          <p:cNvSpPr txBox="1"/>
-          <p:nvPr/>
-        </p:nvSpPr>
-        <p:spPr>
-          <a:xfrm>
-            <a:off x="4114800" y="3657600"/>
-            <a:ext cx="3108960" cy="310896"/>
-          </a:xfrm>
-          <a:prstGeom prst="rect">
-            <a:avLst/>
-          </a:prstGeom>
-          <a:noFill/>
-        </p:spPr>
-        <p:txBody>
-          <a:bodyPr wrap="square" lIns="0" rIns="0" tIns="0" bIns="0" anchor="t">
-            <a:spAutoFit/>
-          </a:bodyPr>
-          <a:lstStyle/>
-          <a:p>
-            <a:pPr algn="l">
-              <a:lnSpc>
-                <a:spcPct val="106000"/>
-              </a:lnSpc>
-              <a:spcAft>
-                <a:spcPts val="0"/>
-              </a:spcAft>
-            </a:pPr>
-            <a:r>
-              <a:rPr sz="1350" b="0" i="0">
-                <a:solidFill>
-                  <a:srgbClr val="444444"/>
-                </a:solidFill>
-                <a:latin typeface="Calibri"/>
-              </a:rPr>
-              <a:t>KeywordAgg</a:t>
-            </a:r>
-          </a:p>
-        </p:txBody>
-      </p:sp>
-      <p:sp>
-        <p:nvSpPr>
-          <p:cNvPr id="20" name="TextBox 19"/>
-          <p:cNvSpPr txBox="1"/>
-          <p:nvPr/>
-        </p:nvSpPr>
-        <p:spPr>
-          <a:xfrm>
-            <a:off x="7406640" y="3657600"/>
-            <a:ext cx="1828800" cy="310896"/>
-          </a:xfrm>
-          <a:prstGeom prst="rect">
-            <a:avLst/>
-          </a:prstGeom>
-          <a:noFill/>
-        </p:spPr>
-        <p:txBody>
-          <a:bodyPr wrap="square" lIns="0" rIns="0" tIns="0" bIns="0" anchor="t">
-            <a:spAutoFit/>
-          </a:bodyPr>
-          <a:lstStyle/>
-          <a:p>
-            <a:pPr algn="l">
-              <a:lnSpc>
-                <a:spcPct val="106000"/>
-              </a:lnSpc>
-              <a:spcAft>
-                <a:spcPts val="0"/>
-              </a:spcAft>
-            </a:pPr>
-            <a:r>
-              <a:rPr sz="1350" b="0" i="0">
-                <a:solidFill>
-                  <a:srgbClr val="444444"/>
-                </a:solidFill>
-                <a:latin typeface="Calibri"/>
-              </a:rPr>
-              <a:t>0.0 %</a:t>
-            </a:r>
-          </a:p>
-        </p:txBody>
-      </p:sp>
-      <p:sp>
-        <p:nvSpPr>
-          <p:cNvPr id="21" name="TextBox 20"/>
-          <p:cNvSpPr txBox="1"/>
-          <p:nvPr/>
-        </p:nvSpPr>
-        <p:spPr>
-          <a:xfrm>
-            <a:off x="9418320" y="3657600"/>
-            <a:ext cx="2103120" cy="310896"/>
-          </a:xfrm>
-          <a:prstGeom prst="rect">
-            <a:avLst/>
-          </a:prstGeom>
-          <a:noFill/>
-        </p:spPr>
-        <p:txBody>
-          <a:bodyPr wrap="square" lIns="0" rIns="0" tIns="0" bIns="0" anchor="t">
-            <a:spAutoFit/>
-          </a:bodyPr>
-          <a:lstStyle/>
-          <a:p>
-            <a:pPr algn="l">
-              <a:lnSpc>
-                <a:spcPct val="106000"/>
-              </a:lnSpc>
-              <a:spcAft>
-                <a:spcPts val="0"/>
-              </a:spcAft>
-            </a:pPr>
-            <a:r>
-              <a:rPr sz="1350" b="1" i="0">
-                <a:solidFill>
-                  <a:srgbClr val="111111"/>
-                </a:solidFill>
-                <a:latin typeface="Calibri"/>
-              </a:rPr>
-              <a:t>85.0 %</a:t>
-            </a:r>
-          </a:p>
-        </p:txBody>
-      </p:sp>
-      <p:sp>
-        <p:nvSpPr>
-          <p:cNvPr id="22" name="TextBox 21"/>
-          <p:cNvSpPr txBox="1"/>
-          <p:nvPr/>
-        </p:nvSpPr>
-        <p:spPr>
-          <a:xfrm>
-            <a:off x="731520" y="4114800"/>
-            <a:ext cx="3291840" cy="310896"/>
-          </a:xfrm>
-          <a:prstGeom prst="rect">
-            <a:avLst/>
-          </a:prstGeom>
-          <a:noFill/>
-        </p:spPr>
-        <p:txBody>
-          <a:bodyPr wrap="square" lIns="0" rIns="0" tIns="0" bIns="0" anchor="t">
-            <a:spAutoFit/>
-          </a:bodyPr>
-          <a:lstStyle/>
-          <a:p>
-            <a:pPr algn="l">
-              <a:lnSpc>
-                <a:spcPct val="106000"/>
-              </a:lnSpc>
-              <a:spcAft>
-                <a:spcPts val="0"/>
-              </a:spcAft>
-            </a:pPr>
-            <a:r>
-              <a:rPr sz="1350" b="0" i="0">
-                <a:solidFill>
-                  <a:srgbClr val="444444"/>
-                </a:solidFill>
-                <a:latin typeface="Calibri"/>
-              </a:rPr>
-              <a:t>Llama-3-8B</a:t>
-            </a:r>
-          </a:p>
-        </p:txBody>
-      </p:sp>
-      <p:sp>
-        <p:nvSpPr>
-          <p:cNvPr id="23" name="TextBox 22"/>
-          <p:cNvSpPr txBox="1"/>
-          <p:nvPr/>
-        </p:nvSpPr>
-        <p:spPr>
-          <a:xfrm>
-            <a:off x="4114800" y="4114800"/>
-            <a:ext cx="3108960" cy="310896"/>
-          </a:xfrm>
-          <a:prstGeom prst="rect">
-            <a:avLst/>
-          </a:prstGeom>
-          <a:noFill/>
-        </p:spPr>
-        <p:txBody>
-          <a:bodyPr wrap="square" lIns="0" rIns="0" tIns="0" bIns="0" anchor="t">
-            <a:spAutoFit/>
-          </a:bodyPr>
-          <a:lstStyle/>
-          <a:p>
-            <a:pPr algn="l">
-              <a:lnSpc>
-                <a:spcPct val="106000"/>
-              </a:lnSpc>
-              <a:spcAft>
-                <a:spcPts val="0"/>
-              </a:spcAft>
-            </a:pPr>
-            <a:r>
-              <a:rPr sz="1350" b="0" i="0">
-                <a:solidFill>
-                  <a:srgbClr val="444444"/>
-                </a:solidFill>
-                <a:latin typeface="Calibri"/>
-              </a:rPr>
-              <a:t>DecodingAgg</a:t>
-            </a:r>
-          </a:p>
-        </p:txBody>
-      </p:sp>
-      <p:sp>
-        <p:nvSpPr>
-          <p:cNvPr id="24" name="TextBox 23"/>
-          <p:cNvSpPr txBox="1"/>
-          <p:nvPr/>
-        </p:nvSpPr>
-        <p:spPr>
-          <a:xfrm>
-            <a:off x="7406640" y="4114800"/>
-            <a:ext cx="1828800" cy="310896"/>
-          </a:xfrm>
-          <a:prstGeom prst="rect">
-            <a:avLst/>
-          </a:prstGeom>
-          <a:noFill/>
-        </p:spPr>
-        <p:txBody>
-          <a:bodyPr wrap="square" lIns="0" rIns="0" tIns="0" bIns="0" anchor="t">
-            <a:spAutoFit/>
-          </a:bodyPr>
-          <a:lstStyle/>
-          <a:p>
-            <a:pPr algn="l">
-              <a:lnSpc>
-                <a:spcPct val="106000"/>
-              </a:lnSpc>
-              <a:spcAft>
-                <a:spcPts val="0"/>
-              </a:spcAft>
-            </a:pPr>
-            <a:r>
-              <a:rPr sz="1350" b="0" i="0">
-                <a:solidFill>
-                  <a:srgbClr val="444444"/>
-                </a:solidFill>
-                <a:latin typeface="Calibri"/>
-              </a:rPr>
-              <a:t>0.0 %</a:t>
-            </a:r>
-          </a:p>
-        </p:txBody>
-      </p:sp>
-      <p:sp>
-        <p:nvSpPr>
-          <p:cNvPr id="25" name="TextBox 24"/>
-          <p:cNvSpPr txBox="1"/>
-          <p:nvPr/>
-        </p:nvSpPr>
-        <p:spPr>
-          <a:xfrm>
-            <a:off x="9418320" y="4114800"/>
-            <a:ext cx="2103120" cy="310896"/>
-          </a:xfrm>
-          <a:prstGeom prst="rect">
-            <a:avLst/>
-          </a:prstGeom>
-          <a:noFill/>
-        </p:spPr>
-        <p:txBody>
-          <a:bodyPr wrap="square" lIns="0" rIns="0" tIns="0" bIns="0" anchor="t">
-            <a:spAutoFit/>
-          </a:bodyPr>
-          <a:lstStyle/>
-          <a:p>
-            <a:pPr algn="l">
-              <a:lnSpc>
-                <a:spcPct val="106000"/>
-              </a:lnSpc>
-              <a:spcAft>
-                <a:spcPts val="0"/>
-              </a:spcAft>
-            </a:pPr>
-            <a:r>
-              <a:rPr sz="1350" b="1" i="0">
-                <a:solidFill>
-                  <a:srgbClr val="111111"/>
-                </a:solidFill>
-                <a:latin typeface="Calibri"/>
-              </a:rPr>
-              <a:t>85.3 %</a:t>
-            </a:r>
-          </a:p>
-        </p:txBody>
-      </p:sp>
-      <p:sp>
-        <p:nvSpPr>
-          <p:cNvPr id="26" name="TextBox 25"/>
-          <p:cNvSpPr txBox="1"/>
-          <p:nvPr/>
-        </p:nvSpPr>
-        <p:spPr>
-          <a:xfrm>
-            <a:off x="731520" y="4663440"/>
-            <a:ext cx="10725912" cy="1737360"/>
-          </a:xfrm>
-          <a:prstGeom prst="rect">
-            <a:avLst/>
-          </a:prstGeom>
-          <a:noFill/>
-        </p:spPr>
-        <p:txBody>
-          <a:bodyPr wrap="square" lIns="0" rIns="0" tIns="0" bIns="0" anchor="t">
-            <a:spAutoFit/>
-          </a:bodyPr>
-          <a:lstStyle/>
-          <a:p>
-            <a:pPr algn="l">
-              <a:lnSpc>
-                <a:spcPct val="110000"/>
-              </a:lnSpc>
-              <a:spcAft>
-                <a:spcPts val="900"/>
-              </a:spcAft>
-            </a:pPr>
-            <a:r>
-              <a:rPr sz="1500" b="1" i="0">
-                <a:solidFill>
-                  <a:srgbClr val="111111"/>
-                </a:solidFill>
-                <a:latin typeface="Calibri"/>
-              </a:rPr>
-              <a:t>The undefended model never refuses. Not once, on either model, at any dose.</a:t>
-            </a:r>
-          </a:p>
-          <a:p>
-            <a:pPr>
-              <a:lnSpc>
-                <a:spcPct val="110000"/>
-              </a:lnSpc>
-              <a:spcAft>
-                <a:spcPts val="900"/>
-              </a:spcAft>
-            </a:pPr>
-            <a:r>
-              <a:rPr sz="1500" b="0" i="0">
-                <a:solidFill>
-                  <a:srgbClr val="444444"/>
-                </a:solidFill>
-                <a:latin typeface="Calibri"/>
-              </a:rPr>
-              <a:t>The cause is the defense's own design. It answers from each passage alone, so a passage that says “refuse” gets an unopposed hearing. The undefended model reads all ten passages together, where nine honest ones drown it out.</a:t>
-            </a:r>
-          </a:p>
-          <a:p>
-            <a:pPr>
-              <a:lnSpc>
-                <a:spcPct val="110000"/>
-              </a:lnSpc>
-              <a:spcAft>
-                <a:spcPts val="900"/>
-              </a:spcAft>
-            </a:pPr>
-            <a:r>
-              <a:rPr sz="1500" b="1" i="0">
-                <a:solidFill>
-                  <a:srgbClr val="111111"/>
-                </a:solidFill>
-                <a:latin typeface="Calibri"/>
-              </a:rPr>
-              <a:t>It is the same property that makes this family resist tone steering. One trade, not two results, and the model decides which way it falls.</a:t>
-            </a:r>
-          </a:p>
-        </p:txBody>
-      </p:sp>
-      <p:sp>
-        <p:nvSpPr>
-          <p:cNvPr id="27" name="TextBox 26"/>
-          <p:cNvSpPr txBox="1"/>
-          <p:nvPr/>
-        </p:nvSpPr>
-        <p:spPr>
-          <a:xfrm>
-            <a:off x="731520" y="6400800"/>
-            <a:ext cx="10040112" cy="402336"/>
-          </a:xfrm>
-          <a:prstGeom prst="rect">
-            <a:avLst/>
-          </a:prstGeom>
-          <a:noFill/>
-        </p:spPr>
-        <p:txBody>
-          <a:bodyPr wrap="square" lIns="0" rIns="0" tIns="0" bIns="0" anchor="t">
-            <a:spAutoFit/>
-          </a:bodyPr>
-          <a:lstStyle/>
-          <a:p>
-            <a:pPr algn="l">
-              <a:lnSpc>
-                <a:spcPct val="115000"/>
-              </a:lnSpc>
-              <a:spcAft>
-                <a:spcPts val="0"/>
-              </a:spcAft>
-            </a:pPr>
-            <a:r>
-              <a:rPr sz="850" b="0" i="0">
-                <a:solidFill>
-                  <a:srgbClr val="999999"/>
-                </a:solidFill>
-                <a:latin typeface="Calibri"/>
-              </a:rPr>
-              <a:t>RobustRAG, both versions Xiang et al., 2024   ·   BadRAG Xue et al., 2024   ·   Measurements: this work</a:t>
+              <a:t>Scoring is the authors' own code, unchanged.</a:t>
             </a:r>
           </a:p>
         </p:txBody>
@@ -6676,7 +7494,7 @@
                 </a:solidFill>
                 <a:latin typeface="Calibri"/>
               </a:rPr>
-              <a:t>WHY THIS IS WORTH FINISHING</a:t>
+              <a:t>THE RESULT</a:t>
             </a:r>
           </a:p>
         </p:txBody>
@@ -6718,7 +7536,7 @@
                 </a:solidFill>
                 <a:latin typeface="Cambria"/>
               </a:rPr>
-              <a:t>A survey found the gap. Running the code showed what is in it.</a:t>
+              <a:t>Does the defense stop the attack?</a:t>
             </a:r>
           </a:p>
         </p:txBody>
@@ -6773,36 +7591,36 @@
         </p:nvSpPr>
         <p:spPr>
           <a:xfrm>
-            <a:off x="731520" y="2011680"/>
-            <a:ext cx="3566160" cy="310896"/>
-          </a:xfrm>
-          <a:prstGeom prst="rect">
-            <a:avLst/>
-          </a:prstGeom>
-          <a:noFill/>
-        </p:spPr>
-        <p:txBody>
-          <a:bodyPr wrap="square" lIns="0" rIns="0" tIns="0" bIns="0" anchor="t">
-            <a:spAutoFit/>
-          </a:bodyPr>
-          <a:lstStyle/>
-          <a:p>
-            <a:pPr algn="l">
-              <a:lnSpc>
-                <a:spcPct val="106000"/>
-              </a:lnSpc>
-              <a:spcAft>
-                <a:spcPts val="0"/>
-              </a:spcAft>
-            </a:pPr>
-            <a:r>
-              <a:rPr sz="1450" b="1" i="0">
+            <a:off x="731520" y="2057400"/>
+            <a:ext cx="4206240" cy="310896"/>
+          </a:xfrm>
+          <a:prstGeom prst="rect">
+            <a:avLst/>
+          </a:prstGeom>
+          <a:noFill/>
+        </p:spPr>
+        <p:txBody>
+          <a:bodyPr wrap="square" lIns="0" rIns="0" tIns="0" bIns="0" anchor="t">
+            <a:spAutoFit/>
+          </a:bodyPr>
+          <a:lstStyle/>
+          <a:p>
+            <a:pPr algn="l">
+              <a:lnSpc>
+                <a:spcPct val="106000"/>
+              </a:lnSpc>
+              <a:spcAft>
+                <a:spcPts val="0"/>
+              </a:spcAft>
+            </a:pPr>
+            <a:r>
+              <a:rPr sz="1550" b="1" i="0">
                 <a:solidFill>
                   <a:srgbClr val="111111"/>
                 </a:solidFill>
                 <a:latin typeface="Calibri"/>
               </a:rPr>
-              <a:t>It is new evidence</a:t>
+              <a:t>It stops the attack</a:t>
             </a:r>
           </a:p>
         </p:txBody>
@@ -6815,36 +7633,36 @@
         </p:nvSpPr>
         <p:spPr>
           <a:xfrm>
-            <a:off x="4297680" y="2011680"/>
-            <a:ext cx="7159752" cy="310896"/>
-          </a:xfrm>
-          <a:prstGeom prst="rect">
-            <a:avLst/>
-          </a:prstGeom>
-          <a:noFill/>
-        </p:spPr>
-        <p:txBody>
-          <a:bodyPr wrap="square" lIns="0" rIns="0" tIns="0" bIns="0" anchor="t">
-            <a:spAutoFit/>
-          </a:bodyPr>
-          <a:lstStyle/>
-          <a:p>
-            <a:pPr algn="l">
-              <a:lnSpc>
-                <a:spcPct val="106000"/>
-              </a:lnSpc>
-              <a:spcAft>
-                <a:spcPts val="0"/>
-              </a:spcAft>
-            </a:pPr>
-            <a:r>
-              <a:rPr sz="1450" b="0" i="0">
+            <a:off x="4937759" y="2057400"/>
+            <a:ext cx="5696712" cy="310896"/>
+          </a:xfrm>
+          <a:prstGeom prst="rect">
+            <a:avLst/>
+          </a:prstGeom>
+          <a:noFill/>
+        </p:spPr>
+        <p:txBody>
+          <a:bodyPr wrap="square" lIns="0" rIns="0" tIns="0" bIns="0" anchor="t">
+            <a:spAutoFit/>
+          </a:bodyPr>
+          <a:lstStyle/>
+          <a:p>
+            <a:pPr algn="l">
+              <a:lnSpc>
+                <a:spcPct val="106000"/>
+              </a:lnSpc>
+              <a:spcAft>
+                <a:spcPts val="0"/>
+              </a:spcAft>
+            </a:pPr>
+            <a:r>
+              <a:rPr sz="1550" b="0" i="0">
                 <a:solidFill>
                   <a:srgbClr val="444444"/>
                 </a:solidFill>
                 <a:latin typeface="Calibri"/>
               </a:rPr>
-              <a:t>16 defense and attack pairs that exist in no paper. The numbers are ours, not quoted.</a:t>
+              <a:t>the attack succeeds less often with the defense switched on</a:t>
             </a:r>
           </a:p>
         </p:txBody>
@@ -6857,36 +7675,36 @@
         </p:nvSpPr>
         <p:spPr>
           <a:xfrm>
-            <a:off x="731520" y="2651760"/>
-            <a:ext cx="3566160" cy="310896"/>
-          </a:xfrm>
-          <a:prstGeom prst="rect">
-            <a:avLst/>
-          </a:prstGeom>
-          <a:noFill/>
-        </p:spPr>
-        <p:txBody>
-          <a:bodyPr wrap="square" lIns="0" rIns="0" tIns="0" bIns="0" anchor="t">
-            <a:spAutoFit/>
-          </a:bodyPr>
-          <a:lstStyle/>
-          <a:p>
-            <a:pPr algn="l">
-              <a:lnSpc>
-                <a:spcPct val="106000"/>
-              </a:lnSpc>
-              <a:spcAft>
-                <a:spcPts val="0"/>
-              </a:spcAft>
-            </a:pPr>
-            <a:r>
-              <a:rPr sz="1450" b="1" i="0">
+            <a:off x="10680192" y="2057400"/>
+            <a:ext cx="777240" cy="310896"/>
+          </a:xfrm>
+          <a:prstGeom prst="rect">
+            <a:avLst/>
+          </a:prstGeom>
+          <a:noFill/>
+        </p:spPr>
+        <p:txBody>
+          <a:bodyPr wrap="square" lIns="0" rIns="0" tIns="0" bIns="0" anchor="t">
+            <a:spAutoFit/>
+          </a:bodyPr>
+          <a:lstStyle/>
+          <a:p>
+            <a:pPr algn="r">
+              <a:lnSpc>
+                <a:spcPct val="106000"/>
+              </a:lnSpc>
+              <a:spcAft>
+                <a:spcPts val="0"/>
+              </a:spcAft>
+            </a:pPr>
+            <a:r>
+              <a:rPr sz="1550" b="1" i="0">
                 <a:solidFill>
                   <a:srgbClr val="111111"/>
                 </a:solidFill>
                 <a:latin typeface="Calibri"/>
               </a:rPr>
-              <a:t>It changes the threat model</a:t>
+              <a:t>4</a:t>
             </a:r>
           </a:p>
         </p:txBody>
@@ -6899,36 +7717,680 @@
         </p:nvSpPr>
         <p:spPr>
           <a:xfrm>
-            <a:off x="4297680" y="2651760"/>
-            <a:ext cx="7159752" cy="310896"/>
-          </a:xfrm>
-          <a:prstGeom prst="rect">
-            <a:avLst/>
-          </a:prstGeom>
-          <a:noFill/>
-        </p:spPr>
-        <p:txBody>
-          <a:bodyPr wrap="square" lIns="0" rIns="0" tIns="0" bIns="0" anchor="t">
-            <a:spAutoFit/>
-          </a:bodyPr>
-          <a:lstStyle/>
-          <a:p>
-            <a:pPr algn="l">
-              <a:lnSpc>
-                <a:spcPct val="106000"/>
-              </a:lnSpc>
-              <a:spcAft>
-                <a:spcPts val="0"/>
-              </a:spcAft>
-            </a:pPr>
-            <a:r>
-              <a:rPr sz="1450" b="0" i="0">
+            <a:off x="731520" y="2752344"/>
+            <a:ext cx="4206240" cy="310896"/>
+          </a:xfrm>
+          <a:prstGeom prst="rect">
+            <a:avLst/>
+          </a:prstGeom>
+          <a:noFill/>
+        </p:spPr>
+        <p:txBody>
+          <a:bodyPr wrap="square" lIns="0" rIns="0" tIns="0" bIns="0" anchor="t">
+            <a:spAutoFit/>
+          </a:bodyPr>
+          <a:lstStyle/>
+          <a:p>
+            <a:pPr algn="l">
+              <a:lnSpc>
+                <a:spcPct val="106000"/>
+              </a:lnSpc>
+              <a:spcAft>
+                <a:spcPts val="0"/>
+              </a:spcAft>
+            </a:pPr>
+            <a:r>
+              <a:rPr sz="1550" b="1" i="0">
+                <a:solidFill>
+                  <a:srgbClr val="111111"/>
+                </a:solidFill>
+                <a:latin typeface="Calibri"/>
+              </a:rPr>
+              <a:t>It does nothing</a:t>
+            </a:r>
+          </a:p>
+        </p:txBody>
+      </p:sp>
+      <p:sp>
+        <p:nvSpPr>
+          <p:cNvPr id="9" name="TextBox 8"/>
+          <p:cNvSpPr txBox="1"/>
+          <p:nvPr/>
+        </p:nvSpPr>
+        <p:spPr>
+          <a:xfrm>
+            <a:off x="4937759" y="2752344"/>
+            <a:ext cx="5696712" cy="310896"/>
+          </a:xfrm>
+          <a:prstGeom prst="rect">
+            <a:avLst/>
+          </a:prstGeom>
+          <a:noFill/>
+        </p:spPr>
+        <p:txBody>
+          <a:bodyPr wrap="square" lIns="0" rIns="0" tIns="0" bIns="0" anchor="t">
+            <a:spAutoFit/>
+          </a:bodyPr>
+          <a:lstStyle/>
+          <a:p>
+            <a:pPr algn="l">
+              <a:lnSpc>
+                <a:spcPct val="106000"/>
+              </a:lnSpc>
+              <a:spcAft>
+                <a:spcPts val="0"/>
+              </a:spcAft>
+            </a:pPr>
+            <a:r>
+              <a:rPr sz="1550" b="0" i="0">
                 <a:solidFill>
                   <a:srgbClr val="444444"/>
                 </a:solidFill>
                 <a:latin typeface="Calibri"/>
               </a:rPr>
-              <a:t>A defense can be the reason an attack works. That is a security claim, not a performance note.</a:t>
+              <a:t>no readable difference either way</a:t>
+            </a:r>
+          </a:p>
+        </p:txBody>
+      </p:sp>
+      <p:sp>
+        <p:nvSpPr>
+          <p:cNvPr id="10" name="TextBox 9"/>
+          <p:cNvSpPr txBox="1"/>
+          <p:nvPr/>
+        </p:nvSpPr>
+        <p:spPr>
+          <a:xfrm>
+            <a:off x="10680192" y="2752344"/>
+            <a:ext cx="777240" cy="310896"/>
+          </a:xfrm>
+          <a:prstGeom prst="rect">
+            <a:avLst/>
+          </a:prstGeom>
+          <a:noFill/>
+        </p:spPr>
+        <p:txBody>
+          <a:bodyPr wrap="square" lIns="0" rIns="0" tIns="0" bIns="0" anchor="t">
+            <a:spAutoFit/>
+          </a:bodyPr>
+          <a:lstStyle/>
+          <a:p>
+            <a:pPr algn="r">
+              <a:lnSpc>
+                <a:spcPct val="106000"/>
+              </a:lnSpc>
+              <a:spcAft>
+                <a:spcPts val="0"/>
+              </a:spcAft>
+            </a:pPr>
+            <a:r>
+              <a:rPr sz="1550" b="1" i="0">
+                <a:solidFill>
+                  <a:srgbClr val="111111"/>
+                </a:solidFill>
+                <a:latin typeface="Calibri"/>
+              </a:rPr>
+              <a:t>7</a:t>
+            </a:r>
+          </a:p>
+        </p:txBody>
+      </p:sp>
+      <p:sp>
+        <p:nvSpPr>
+          <p:cNvPr id="11" name="TextBox 10"/>
+          <p:cNvSpPr txBox="1"/>
+          <p:nvPr/>
+        </p:nvSpPr>
+        <p:spPr>
+          <a:xfrm>
+            <a:off x="731520" y="3447288"/>
+            <a:ext cx="4206240" cy="310896"/>
+          </a:xfrm>
+          <a:prstGeom prst="rect">
+            <a:avLst/>
+          </a:prstGeom>
+          <a:noFill/>
+        </p:spPr>
+        <p:txBody>
+          <a:bodyPr wrap="square" lIns="0" rIns="0" tIns="0" bIns="0" anchor="t">
+            <a:spAutoFit/>
+          </a:bodyPr>
+          <a:lstStyle/>
+          <a:p>
+            <a:pPr algn="l">
+              <a:lnSpc>
+                <a:spcPct val="106000"/>
+              </a:lnSpc>
+              <a:spcAft>
+                <a:spcPts val="0"/>
+              </a:spcAft>
+            </a:pPr>
+            <a:r>
+              <a:rPr sz="1550" b="1" i="0">
+                <a:solidFill>
+                  <a:srgbClr val="111111"/>
+                </a:solidFill>
+                <a:latin typeface="Calibri"/>
+              </a:rPr>
+              <a:t>It makes the attack worse</a:t>
+            </a:r>
+          </a:p>
+        </p:txBody>
+      </p:sp>
+      <p:sp>
+        <p:nvSpPr>
+          <p:cNvPr id="12" name="TextBox 11"/>
+          <p:cNvSpPr txBox="1"/>
+          <p:nvPr/>
+        </p:nvSpPr>
+        <p:spPr>
+          <a:xfrm>
+            <a:off x="4937759" y="3447288"/>
+            <a:ext cx="5696712" cy="310896"/>
+          </a:xfrm>
+          <a:prstGeom prst="rect">
+            <a:avLst/>
+          </a:prstGeom>
+          <a:noFill/>
+        </p:spPr>
+        <p:txBody>
+          <a:bodyPr wrap="square" lIns="0" rIns="0" tIns="0" bIns="0" anchor="t">
+            <a:spAutoFit/>
+          </a:bodyPr>
+          <a:lstStyle/>
+          <a:p>
+            <a:pPr algn="l">
+              <a:lnSpc>
+                <a:spcPct val="106000"/>
+              </a:lnSpc>
+              <a:spcAft>
+                <a:spcPts val="0"/>
+              </a:spcAft>
+            </a:pPr>
+            <a:r>
+              <a:rPr sz="1550" b="0" i="0">
+                <a:solidFill>
+                  <a:srgbClr val="444444"/>
+                </a:solidFill>
+                <a:latin typeface="Calibri"/>
+              </a:rPr>
+              <a:t>the attack succeeds MORE often with the defense switched on</a:t>
+            </a:r>
+          </a:p>
+        </p:txBody>
+      </p:sp>
+      <p:sp>
+        <p:nvSpPr>
+          <p:cNvPr id="13" name="TextBox 12"/>
+          <p:cNvSpPr txBox="1"/>
+          <p:nvPr/>
+        </p:nvSpPr>
+        <p:spPr>
+          <a:xfrm>
+            <a:off x="10680192" y="3447288"/>
+            <a:ext cx="777240" cy="310896"/>
+          </a:xfrm>
+          <a:prstGeom prst="rect">
+            <a:avLst/>
+          </a:prstGeom>
+          <a:noFill/>
+        </p:spPr>
+        <p:txBody>
+          <a:bodyPr wrap="square" lIns="0" rIns="0" tIns="0" bIns="0" anchor="t">
+            <a:spAutoFit/>
+          </a:bodyPr>
+          <a:lstStyle/>
+          <a:p>
+            <a:pPr algn="r">
+              <a:lnSpc>
+                <a:spcPct val="106000"/>
+              </a:lnSpc>
+              <a:spcAft>
+                <a:spcPts val="0"/>
+              </a:spcAft>
+            </a:pPr>
+            <a:r>
+              <a:rPr sz="1550" b="1" i="0">
+                <a:solidFill>
+                  <a:srgbClr val="111111"/>
+                </a:solidFill>
+                <a:latin typeface="Calibri"/>
+              </a:rPr>
+              <a:t>7</a:t>
+            </a:r>
+          </a:p>
+        </p:txBody>
+      </p:sp>
+      <p:sp>
+        <p:nvSpPr>
+          <p:cNvPr id="14" name="TextBox 13"/>
+          <p:cNvSpPr txBox="1"/>
+          <p:nvPr/>
+        </p:nvSpPr>
+        <p:spPr>
+          <a:xfrm>
+            <a:off x="8714232" y="4169663"/>
+            <a:ext cx="2743200" cy="274320"/>
+          </a:xfrm>
+          <a:prstGeom prst="rect">
+            <a:avLst/>
+          </a:prstGeom>
+          <a:noFill/>
+        </p:spPr>
+        <p:txBody>
+          <a:bodyPr wrap="square" lIns="0" rIns="0" tIns="0" bIns="0" anchor="t">
+            <a:spAutoFit/>
+          </a:bodyPr>
+          <a:lstStyle/>
+          <a:p>
+            <a:pPr algn="l">
+              <a:lnSpc>
+                <a:spcPct val="106000"/>
+              </a:lnSpc>
+              <a:spcAft>
+                <a:spcPts val="0"/>
+              </a:spcAft>
+            </a:pPr>
+            <a:r>
+              <a:rPr sz="1150" b="0" i="0">
+                <a:solidFill>
+                  <a:srgbClr val="777777"/>
+                </a:solidFill>
+                <a:latin typeface="Calibri"/>
+              </a:rPr>
+              <a:t>out of 18 pairs</a:t>
+            </a:r>
+          </a:p>
+        </p:txBody>
+      </p:sp>
+      <p:sp>
+        <p:nvSpPr>
+          <p:cNvPr id="15" name="TextBox 14"/>
+          <p:cNvSpPr txBox="1"/>
+          <p:nvPr/>
+        </p:nvSpPr>
+        <p:spPr>
+          <a:xfrm>
+            <a:off x="731520" y="4617720"/>
+            <a:ext cx="10725912" cy="1783080"/>
+          </a:xfrm>
+          <a:prstGeom prst="rect">
+            <a:avLst/>
+          </a:prstGeom>
+          <a:noFill/>
+        </p:spPr>
+        <p:txBody>
+          <a:bodyPr wrap="square" lIns="0" rIns="0" tIns="0" bIns="0" anchor="t">
+            <a:spAutoFit/>
+          </a:bodyPr>
+          <a:lstStyle/>
+          <a:p>
+            <a:pPr algn="l">
+              <a:lnSpc>
+                <a:spcPct val="110000"/>
+              </a:lnSpc>
+              <a:spcAft>
+                <a:spcPts val="900"/>
+              </a:spcAft>
+            </a:pPr>
+            <a:r>
+              <a:rPr sz="1500" b="1" i="0">
+                <a:solidFill>
+                  <a:srgbClr val="111111"/>
+                </a:solidFill>
+                <a:latin typeface="Calibri"/>
+              </a:rPr>
+              <a:t>A defense helped in four cases out of eighteen. In seven it made the attack work better than no defense at all.</a:t>
+            </a:r>
+          </a:p>
+          <a:p>
+            <a:pPr>
+              <a:lnSpc>
+                <a:spcPct val="110000"/>
+              </a:lnSpc>
+              <a:spcAft>
+                <a:spcPts val="900"/>
+              </a:spcAft>
+            </a:pPr>
+            <a:r>
+              <a:rPr sz="1500" b="0" i="0">
+                <a:solidFill>
+                  <a:srgbClr val="444444"/>
+                </a:solidFill>
+                <a:latin typeface="Calibri"/>
+              </a:rPr>
+              <a:t>In 4 of those seven the attack does almost nothing to a model with no defense at all. The defense is what makes it work.</a:t>
+            </a:r>
+          </a:p>
+          <a:p>
+            <a:pPr>
+              <a:lnSpc>
+                <a:spcPct val="110000"/>
+              </a:lnSpc>
+              <a:spcAft>
+                <a:spcPts val="900"/>
+              </a:spcAft>
+            </a:pPr>
+            <a:r>
+              <a:rPr sz="1500" b="1" i="0">
+                <a:solidFill>
+                  <a:srgbClr val="111111"/>
+                </a:solidFill>
+                <a:latin typeface="Calibri"/>
+              </a:rPr>
+              <a:t>That is the finding. A defense built for one kind of failure is not neutral against the other kind. It can be the reason the attack succeeds.</a:t>
+            </a:r>
+          </a:p>
+        </p:txBody>
+      </p:sp>
+    </p:spTree>
+  </p:cSld>
+  <p:clrMapOvr>
+    <a:masterClrMapping/>
+  </p:clrMapOvr>
+</p:sld>
+</file>
+
+<file path=ppt/slides/slide15.xml><?xml version="1.0" encoding="utf-8"?>
+<p:sld xmlns:a="http://schemas.openxmlformats.org/drawingml/2006/main" xmlns:p="http://schemas.openxmlformats.org/presentationml/2006/main" xmlns:r="http://schemas.openxmlformats.org/officeDocument/2006/relationships">
+  <p:cSld>
+    <p:spTree>
+      <p:nvGrpSpPr>
+        <p:cNvPr id="1" name=""/>
+        <p:cNvGrpSpPr/>
+        <p:nvPr/>
+      </p:nvGrpSpPr>
+      <p:grpSpPr/>
+      <p:sp>
+        <p:nvSpPr>
+          <p:cNvPr id="2" name="TextBox 1"/>
+          <p:cNvSpPr txBox="1"/>
+          <p:nvPr/>
+        </p:nvSpPr>
+        <p:spPr>
+          <a:xfrm>
+            <a:off x="731520" y="475488"/>
+            <a:ext cx="10725912" cy="274320"/>
+          </a:xfrm>
+          <a:prstGeom prst="rect">
+            <a:avLst/>
+          </a:prstGeom>
+          <a:noFill/>
+        </p:spPr>
+        <p:txBody>
+          <a:bodyPr wrap="square" lIns="0" rIns="0" tIns="0" bIns="0" anchor="t">
+            <a:spAutoFit/>
+          </a:bodyPr>
+          <a:lstStyle/>
+          <a:p>
+            <a:pPr algn="l">
+              <a:lnSpc>
+                <a:spcPct val="106000"/>
+              </a:lnSpc>
+              <a:spcAft>
+                <a:spcPts val="0"/>
+              </a:spcAft>
+            </a:pPr>
+            <a:r>
+              <a:rPr sz="1050" b="1" i="0">
+                <a:solidFill>
+                  <a:srgbClr val="777777"/>
+                </a:solidFill>
+                <a:latin typeface="Calibri"/>
+              </a:rPr>
+              <a:t>WHERE WE ARE NOW</a:t>
+            </a:r>
+          </a:p>
+        </p:txBody>
+      </p:sp>
+      <p:sp>
+        <p:nvSpPr>
+          <p:cNvPr id="3" name="TextBox 2"/>
+          <p:cNvSpPr txBox="1"/>
+          <p:nvPr/>
+        </p:nvSpPr>
+        <p:spPr>
+          <a:xfrm>
+            <a:off x="731520" y="841248"/>
+            <a:ext cx="10725912" cy="868680"/>
+          </a:xfrm>
+          <a:prstGeom prst="rect">
+            <a:avLst/>
+          </a:prstGeom>
+          <a:noFill/>
+        </p:spPr>
+        <p:txBody>
+          <a:bodyPr wrap="square" lIns="0" rIns="0" tIns="0" bIns="0" anchor="t">
+            <a:spAutoFit/>
+          </a:bodyPr>
+          <a:lstStyle/>
+          <a:p>
+            <a:pPr algn="l">
+              <a:lnSpc>
+                <a:spcPct val="102000"/>
+              </a:lnSpc>
+              <a:spcAft>
+                <a:spcPts val="0"/>
+              </a:spcAft>
+            </a:pPr>
+            <a:r>
+              <a:rPr sz="2800" b="1" i="0">
+                <a:solidFill>
+                  <a:srgbClr val="111111"/>
+                </a:solidFill>
+                <a:latin typeface="Cambria"/>
+              </a:rPr>
+              <a:t>What is finished and what is still running</a:t>
+            </a:r>
+          </a:p>
+        </p:txBody>
+      </p:sp>
+      <p:sp>
+        <p:nvSpPr>
+          <p:cNvPr id="4" name="TextBox 3"/>
+          <p:cNvSpPr txBox="1"/>
+          <p:nvPr/>
+        </p:nvSpPr>
+        <p:spPr>
+          <a:xfrm>
+            <a:off x="11201400" y="6419088"/>
+            <a:ext cx="457200" cy="274320"/>
+          </a:xfrm>
+          <a:prstGeom prst="rect">
+            <a:avLst/>
+          </a:prstGeom>
+          <a:noFill/>
+        </p:spPr>
+        <p:txBody>
+          <a:bodyPr wrap="square" lIns="0" rIns="0" tIns="0" bIns="0" anchor="t">
+            <a:spAutoFit/>
+          </a:bodyPr>
+          <a:lstStyle/>
+          <a:p>
+            <a:pPr algn="r">
+              <a:lnSpc>
+                <a:spcPct val="106000"/>
+              </a:lnSpc>
+              <a:spcAft>
+                <a:spcPts val="0"/>
+              </a:spcAft>
+            </a:pPr>
+            <a:r>
+              <a:rPr sz="900" b="0" i="0">
+                <a:solidFill>
+                  <a:srgbClr val="999999"/>
+                </a:solidFill>
+                <a:latin typeface="Calibri"/>
+              </a:rPr>
+              <a:t>15</a:t>
+            </a:r>
+          </a:p>
+        </p:txBody>
+      </p:sp>
+      <p:sp>
+        <p:nvSpPr>
+          <p:cNvPr id="5" name="TextBox 4"/>
+          <p:cNvSpPr txBox="1"/>
+          <p:nvPr/>
+        </p:nvSpPr>
+        <p:spPr>
+          <a:xfrm>
+            <a:off x="731520" y="1920240"/>
+            <a:ext cx="5212080" cy="292608"/>
+          </a:xfrm>
+          <a:prstGeom prst="rect">
+            <a:avLst/>
+          </a:prstGeom>
+          <a:noFill/>
+        </p:spPr>
+        <p:txBody>
+          <a:bodyPr wrap="square" lIns="0" rIns="0" tIns="0" bIns="0" anchor="t">
+            <a:spAutoFit/>
+          </a:bodyPr>
+          <a:lstStyle/>
+          <a:p>
+            <a:pPr algn="l">
+              <a:lnSpc>
+                <a:spcPct val="106000"/>
+              </a:lnSpc>
+              <a:spcAft>
+                <a:spcPts val="600"/>
+              </a:spcAft>
+            </a:pPr>
+            <a:r>
+              <a:rPr sz="1500" b="1" i="0">
+                <a:solidFill>
+                  <a:srgbClr val="111111"/>
+                </a:solidFill>
+                <a:latin typeface="Calibri"/>
+              </a:rPr>
+              <a:t>Done</a:t>
+            </a:r>
+          </a:p>
+        </p:txBody>
+      </p:sp>
+      <p:sp>
+        <p:nvSpPr>
+          <p:cNvPr id="6" name="TextBox 5"/>
+          <p:cNvSpPr txBox="1"/>
+          <p:nvPr/>
+        </p:nvSpPr>
+        <p:spPr>
+          <a:xfrm>
+            <a:off x="731520" y="2267712"/>
+            <a:ext cx="1737360" cy="310896"/>
+          </a:xfrm>
+          <a:prstGeom prst="rect">
+            <a:avLst/>
+          </a:prstGeom>
+          <a:noFill/>
+        </p:spPr>
+        <p:txBody>
+          <a:bodyPr wrap="square" lIns="0" rIns="0" tIns="0" bIns="0" anchor="t">
+            <a:spAutoFit/>
+          </a:bodyPr>
+          <a:lstStyle/>
+          <a:p>
+            <a:pPr algn="l">
+              <a:lnSpc>
+                <a:spcPct val="106000"/>
+              </a:lnSpc>
+              <a:spcAft>
+                <a:spcPts val="0"/>
+              </a:spcAft>
+            </a:pPr>
+            <a:r>
+              <a:rPr sz="1300" b="1" i="0">
+                <a:solidFill>
+                  <a:srgbClr val="111111"/>
+                </a:solidFill>
+                <a:latin typeface="Calibri"/>
+              </a:rPr>
+              <a:t>1 cell</a:t>
+            </a:r>
+          </a:p>
+        </p:txBody>
+      </p:sp>
+      <p:sp>
+        <p:nvSpPr>
+          <p:cNvPr id="7" name="TextBox 6"/>
+          <p:cNvSpPr txBox="1"/>
+          <p:nvPr/>
+        </p:nvSpPr>
+        <p:spPr>
+          <a:xfrm>
+            <a:off x="2468880" y="2267712"/>
+            <a:ext cx="8988552" cy="310896"/>
+          </a:xfrm>
+          <a:prstGeom prst="rect">
+            <a:avLst/>
+          </a:prstGeom>
+          <a:noFill/>
+        </p:spPr>
+        <p:txBody>
+          <a:bodyPr wrap="square" lIns="0" rIns="0" tIns="0" bIns="0" anchor="t">
+            <a:spAutoFit/>
+          </a:bodyPr>
+          <a:lstStyle/>
+          <a:p>
+            <a:pPr algn="l">
+              <a:lnSpc>
+                <a:spcPct val="106000"/>
+              </a:lnSpc>
+              <a:spcAft>
+                <a:spcPts val="0"/>
+              </a:spcAft>
+            </a:pPr>
+            <a:r>
+              <a:rPr sz="1300" b="0" i="0">
+                <a:solidFill>
+                  <a:srgbClr val="444444"/>
+                </a:solidFill>
+                <a:latin typeface="Calibri"/>
+              </a:rPr>
+              <a:t>worked through: the retrieved document, answering from false content</a:t>
+            </a:r>
+          </a:p>
+        </p:txBody>
+      </p:sp>
+      <p:sp>
+        <p:nvSpPr>
+          <p:cNvPr id="8" name="TextBox 7"/>
+          <p:cNvSpPr txBox="1"/>
+          <p:nvPr/>
+        </p:nvSpPr>
+        <p:spPr>
+          <a:xfrm>
+            <a:off x="731520" y="2779776"/>
+            <a:ext cx="1737360" cy="310896"/>
+          </a:xfrm>
+          <a:prstGeom prst="rect">
+            <a:avLst/>
+          </a:prstGeom>
+          <a:noFill/>
+        </p:spPr>
+        <p:txBody>
+          <a:bodyPr wrap="square" lIns="0" rIns="0" tIns="0" bIns="0" anchor="t">
+            <a:spAutoFit/>
+          </a:bodyPr>
+          <a:lstStyle/>
+          <a:p>
+            <a:pPr algn="l">
+              <a:lnSpc>
+                <a:spcPct val="106000"/>
+              </a:lnSpc>
+              <a:spcAft>
+                <a:spcPts val="0"/>
+              </a:spcAft>
+            </a:pPr>
+            <a:r>
+              <a:rPr sz="1300" b="1" i="0">
+                <a:solidFill>
+                  <a:srgbClr val="111111"/>
+                </a:solidFill>
+                <a:latin typeface="Calibri"/>
+              </a:rPr>
+              <a:t>18 pairs</a:t>
             </a:r>
           </a:p>
         </p:txBody>
@@ -6941,194 +8403,278 @@
         </p:nvSpPr>
         <p:spPr>
           <a:xfrm>
+            <a:off x="2468880" y="2779776"/>
+            <a:ext cx="8988552" cy="310896"/>
+          </a:xfrm>
+          <a:prstGeom prst="rect">
+            <a:avLst/>
+          </a:prstGeom>
+          <a:noFill/>
+        </p:spPr>
+        <p:txBody>
+          <a:bodyPr wrap="square" lIns="0" rIns="0" tIns="0" bIns="0" anchor="t">
+            <a:spAutoFit/>
+          </a:bodyPr>
+          <a:lstStyle/>
+          <a:p>
+            <a:pPr algn="l">
+              <a:lnSpc>
+                <a:spcPct val="106000"/>
+              </a:lnSpc>
+              <a:spcAft>
+                <a:spcPts val="0"/>
+              </a:spcAft>
+            </a:pPr>
+            <a:r>
+              <a:rPr sz="1300" b="0" i="0">
+                <a:solidFill>
+                  <a:srgbClr val="444444"/>
+                </a:solidFill>
+                <a:latin typeface="Calibri"/>
+              </a:rPr>
+              <a:t>measured, none of them previously tested</a:t>
+            </a:r>
+          </a:p>
+        </p:txBody>
+      </p:sp>
+      <p:sp>
+        <p:nvSpPr>
+          <p:cNvPr id="10" name="TextBox 9"/>
+          <p:cNvSpPr txBox="1"/>
+          <p:nvPr/>
+        </p:nvSpPr>
+        <p:spPr>
+          <a:xfrm>
             <a:off x="731520" y="3291840"/>
-            <a:ext cx="3566160" cy="310896"/>
-          </a:xfrm>
-          <a:prstGeom prst="rect">
-            <a:avLst/>
-          </a:prstGeom>
-          <a:noFill/>
-        </p:spPr>
-        <p:txBody>
-          <a:bodyPr wrap="square" lIns="0" rIns="0" tIns="0" bIns="0" anchor="t">
-            <a:spAutoFit/>
-          </a:bodyPr>
-          <a:lstStyle/>
-          <a:p>
-            <a:pPr algn="l">
-              <a:lnSpc>
-                <a:spcPct val="106000"/>
-              </a:lnSpc>
-              <a:spcAft>
-                <a:spcPts val="0"/>
-              </a:spcAft>
-            </a:pPr>
-            <a:r>
-              <a:rPr sz="1450" b="1" i="0">
+            <a:ext cx="1737360" cy="310896"/>
+          </a:xfrm>
+          <a:prstGeom prst="rect">
+            <a:avLst/>
+          </a:prstGeom>
+          <a:noFill/>
+        </p:spPr>
+        <p:txBody>
+          <a:bodyPr wrap="square" lIns="0" rIns="0" tIns="0" bIns="0" anchor="t">
+            <a:spAutoFit/>
+          </a:bodyPr>
+          <a:lstStyle/>
+          <a:p>
+            <a:pPr algn="l">
+              <a:lnSpc>
+                <a:spcPct val="106000"/>
+              </a:lnSpc>
+              <a:spcAft>
+                <a:spcPts val="0"/>
+              </a:spcAft>
+            </a:pPr>
+            <a:r>
+              <a:rPr sz="1300" b="1" i="0">
                 <a:solidFill>
                   <a:srgbClr val="111111"/>
                 </a:solidFill>
                 <a:latin typeface="Calibri"/>
               </a:rPr>
-              <a:t>It gives a design rule</a:t>
-            </a:r>
-          </a:p>
-        </p:txBody>
-      </p:sp>
-      <p:sp>
-        <p:nvSpPr>
-          <p:cNvPr id="10" name="TextBox 9"/>
-          <p:cNvSpPr txBox="1"/>
-          <p:nvPr/>
-        </p:nvSpPr>
-        <p:spPr>
-          <a:xfrm>
-            <a:off x="4297680" y="3291840"/>
-            <a:ext cx="7159752" cy="310896"/>
-          </a:xfrm>
-          <a:prstGeom prst="rect">
-            <a:avLst/>
-          </a:prstGeom>
-          <a:noFill/>
-        </p:spPr>
-        <p:txBody>
-          <a:bodyPr wrap="square" lIns="0" rIns="0" tIns="0" bIns="0" anchor="t">
-            <a:spAutoFit/>
-          </a:bodyPr>
-          <a:lstStyle/>
-          <a:p>
-            <a:pPr algn="l">
-              <a:lnSpc>
-                <a:spcPct val="106000"/>
-              </a:lnSpc>
-              <a:spcAft>
-                <a:spcPts val="0"/>
-              </a:spcAft>
-            </a:pPr>
-            <a:r>
-              <a:rPr sz="1450" b="0" i="0">
+              <a:t>3 models</a:t>
+            </a:r>
+          </a:p>
+        </p:txBody>
+      </p:sp>
+      <p:sp>
+        <p:nvSpPr>
+          <p:cNvPr id="11" name="TextBox 10"/>
+          <p:cNvSpPr txBox="1"/>
+          <p:nvPr/>
+        </p:nvSpPr>
+        <p:spPr>
+          <a:xfrm>
+            <a:off x="2468880" y="3291840"/>
+            <a:ext cx="8988552" cy="310896"/>
+          </a:xfrm>
+          <a:prstGeom prst="rect">
+            <a:avLst/>
+          </a:prstGeom>
+          <a:noFill/>
+        </p:spPr>
+        <p:txBody>
+          <a:bodyPr wrap="square" lIns="0" rIns="0" tIns="0" bIns="0" anchor="t">
+            <a:spAutoFit/>
+          </a:bodyPr>
+          <a:lstStyle/>
+          <a:p>
+            <a:pPr algn="l">
+              <a:lnSpc>
+                <a:spcPct val="106000"/>
+              </a:lnSpc>
+              <a:spcAft>
+                <a:spcPts val="0"/>
+              </a:spcAft>
+            </a:pPr>
+            <a:r>
+              <a:rPr sz="1300" b="0" i="0">
                 <a:solidFill>
                   <a:srgbClr val="444444"/>
                 </a:solidFill>
                 <a:latin typeface="Calibri"/>
               </a:rPr>
-              <a:t>Do not suppress the model's own memory. Held across two families and five implementations.</a:t>
-            </a:r>
-          </a:p>
-        </p:txBody>
-      </p:sp>
-      <p:sp>
-        <p:nvSpPr>
-          <p:cNvPr id="11" name="TextBox 10"/>
-          <p:cNvSpPr txBox="1"/>
-          <p:nvPr/>
-        </p:nvSpPr>
-        <p:spPr>
-          <a:xfrm>
-            <a:off x="731520" y="3931920"/>
-            <a:ext cx="3566160" cy="310896"/>
-          </a:xfrm>
-          <a:prstGeom prst="rect">
-            <a:avLst/>
-          </a:prstGeom>
-          <a:noFill/>
-        </p:spPr>
-        <p:txBody>
-          <a:bodyPr wrap="square" lIns="0" rIns="0" tIns="0" bIns="0" anchor="t">
-            <a:spAutoFit/>
-          </a:bodyPr>
-          <a:lstStyle/>
-          <a:p>
-            <a:pPr algn="l">
-              <a:lnSpc>
-                <a:spcPct val="106000"/>
-              </a:lnSpc>
-              <a:spcAft>
-                <a:spcPts val="0"/>
-              </a:spcAft>
-            </a:pPr>
-            <a:r>
-              <a:rPr sz="1450" b="1" i="0">
+              <a:t>including a controlled repeat of the same pair on a second model</a:t>
+            </a:r>
+          </a:p>
+        </p:txBody>
+      </p:sp>
+      <p:sp>
+        <p:nvSpPr>
+          <p:cNvPr id="12" name="TextBox 11"/>
+          <p:cNvSpPr txBox="1"/>
+          <p:nvPr/>
+        </p:nvSpPr>
+        <p:spPr>
+          <a:xfrm>
+            <a:off x="731520" y="4023360"/>
+            <a:ext cx="5212080" cy="292608"/>
+          </a:xfrm>
+          <a:prstGeom prst="rect">
+            <a:avLst/>
+          </a:prstGeom>
+          <a:noFill/>
+        </p:spPr>
+        <p:txBody>
+          <a:bodyPr wrap="square" lIns="0" rIns="0" tIns="0" bIns="0" anchor="t">
+            <a:spAutoFit/>
+          </a:bodyPr>
+          <a:lstStyle/>
+          <a:p>
+            <a:pPr algn="l">
+              <a:lnSpc>
+                <a:spcPct val="106000"/>
+              </a:lnSpc>
+              <a:spcAft>
+                <a:spcPts val="600"/>
+              </a:spcAft>
+            </a:pPr>
+            <a:r>
+              <a:rPr sz="1500" b="1" i="0">
                 <a:solidFill>
                   <a:srgbClr val="111111"/>
                 </a:solidFill>
                 <a:latin typeface="Calibri"/>
               </a:rPr>
-              <a:t>It predicted and then held</a:t>
-            </a:r>
-          </a:p>
-        </p:txBody>
-      </p:sp>
-      <p:sp>
-        <p:nvSpPr>
-          <p:cNvPr id="12" name="TextBox 11"/>
-          <p:cNvSpPr txBox="1"/>
-          <p:nvPr/>
-        </p:nvSpPr>
-        <p:spPr>
-          <a:xfrm>
-            <a:off x="4297680" y="3931920"/>
-            <a:ext cx="7159752" cy="310896"/>
-          </a:xfrm>
-          <a:prstGeom prst="rect">
-            <a:avLst/>
-          </a:prstGeom>
-          <a:noFill/>
-        </p:spPr>
-        <p:txBody>
-          <a:bodyPr wrap="square" lIns="0" rIns="0" tIns="0" bIns="0" anchor="t">
-            <a:spAutoFit/>
-          </a:bodyPr>
-          <a:lstStyle/>
-          <a:p>
-            <a:pPr algn="l">
-              <a:lnSpc>
-                <a:spcPct val="106000"/>
-              </a:lnSpc>
-              <a:spcAft>
-                <a:spcPts val="0"/>
-              </a:spcAft>
-            </a:pPr>
-            <a:r>
-              <a:rPr sz="1450" b="0" i="0">
+              <a:t>Running now</a:t>
+            </a:r>
+          </a:p>
+        </p:txBody>
+      </p:sp>
+      <p:sp>
+        <p:nvSpPr>
+          <p:cNvPr id="13" name="TextBox 12"/>
+          <p:cNvSpPr txBox="1"/>
+          <p:nvPr/>
+        </p:nvSpPr>
+        <p:spPr>
+          <a:xfrm>
+            <a:off x="731520" y="4370832"/>
+            <a:ext cx="1737360" cy="310896"/>
+          </a:xfrm>
+          <a:prstGeom prst="rect">
+            <a:avLst/>
+          </a:prstGeom>
+          <a:noFill/>
+        </p:spPr>
+        <p:txBody>
+          <a:bodyPr wrap="square" lIns="0" rIns="0" tIns="0" bIns="0" anchor="t">
+            <a:spAutoFit/>
+          </a:bodyPr>
+          <a:lstStyle/>
+          <a:p>
+            <a:pPr algn="l">
+              <a:lnSpc>
+                <a:spcPct val="106000"/>
+              </a:lnSpc>
+              <a:spcAft>
+                <a:spcPts val="0"/>
+              </a:spcAft>
+            </a:pPr>
+            <a:r>
+              <a:rPr sz="1300" b="1" i="0">
+                <a:solidFill>
+                  <a:srgbClr val="111111"/>
+                </a:solidFill>
+                <a:latin typeface="Calibri"/>
+              </a:rPr>
+              <a:t>5 models</a:t>
+            </a:r>
+          </a:p>
+        </p:txBody>
+      </p:sp>
+      <p:sp>
+        <p:nvSpPr>
+          <p:cNvPr id="14" name="TextBox 13"/>
+          <p:cNvSpPr txBox="1"/>
+          <p:nvPr/>
+        </p:nvSpPr>
+        <p:spPr>
+          <a:xfrm>
+            <a:off x="2468880" y="4370832"/>
+            <a:ext cx="8988552" cy="310896"/>
+          </a:xfrm>
+          <a:prstGeom prst="rect">
+            <a:avLst/>
+          </a:prstGeom>
+          <a:noFill/>
+        </p:spPr>
+        <p:txBody>
+          <a:bodyPr wrap="square" lIns="0" rIns="0" tIns="0" bIns="0" anchor="t">
+            <a:spAutoFit/>
+          </a:bodyPr>
+          <a:lstStyle/>
+          <a:p>
+            <a:pPr algn="l">
+              <a:lnSpc>
+                <a:spcPct val="106000"/>
+              </a:lnSpc>
+              <a:spcAft>
+                <a:spcPts val="0"/>
+              </a:spcAft>
+            </a:pPr>
+            <a:r>
+              <a:rPr sz="1300" b="0" i="0">
                 <a:solidFill>
                   <a:srgbClr val="444444"/>
                 </a:solidFill>
                 <a:latin typeface="Calibri"/>
               </a:rPr>
-              <a:t>We stated the cause before the test. The measurement followed the predicted shape.</a:t>
-            </a:r>
-          </a:p>
-        </p:txBody>
-      </p:sp>
-      <p:sp>
-        <p:nvSpPr>
-          <p:cNvPr id="13" name="TextBox 12"/>
-          <p:cNvSpPr txBox="1"/>
-          <p:nvPr/>
-        </p:nvSpPr>
-        <p:spPr>
-          <a:xfrm>
-            <a:off x="731520" y="4800600"/>
-            <a:ext cx="10725912" cy="320040"/>
-          </a:xfrm>
-          <a:prstGeom prst="rect">
-            <a:avLst/>
-          </a:prstGeom>
-          <a:noFill/>
-        </p:spPr>
-        <p:txBody>
-          <a:bodyPr wrap="square" lIns="0" rIns="0" tIns="0" bIns="0" anchor="t">
-            <a:spAutoFit/>
-          </a:bodyPr>
-          <a:lstStyle/>
-          <a:p>
-            <a:pPr algn="l">
-              <a:lnSpc>
-                <a:spcPct val="106000"/>
-              </a:lnSpc>
-              <a:spcAft>
-                <a:spcPts val="800"/>
+              <a:t>testing why one model breaks and another does not</a:t>
+            </a:r>
+          </a:p>
+        </p:txBody>
+      </p:sp>
+      <p:sp>
+        <p:nvSpPr>
+          <p:cNvPr id="15" name="TextBox 14"/>
+          <p:cNvSpPr txBox="1"/>
+          <p:nvPr/>
+        </p:nvSpPr>
+        <p:spPr>
+          <a:xfrm>
+            <a:off x="6766559" y="1920240"/>
+            <a:ext cx="5029200" cy="292608"/>
+          </a:xfrm>
+          <a:prstGeom prst="rect">
+            <a:avLst/>
+          </a:prstGeom>
+          <a:noFill/>
+        </p:spPr>
+        <p:txBody>
+          <a:bodyPr wrap="square" lIns="0" rIns="0" tIns="0" bIns="0" anchor="t">
+            <a:spAutoFit/>
+          </a:bodyPr>
+          <a:lstStyle/>
+          <a:p>
+            <a:pPr algn="l">
+              <a:lnSpc>
+                <a:spcPct val="106000"/>
+              </a:lnSpc>
+              <a:spcAft>
+                <a:spcPts val="600"/>
               </a:spcAft>
             </a:pPr>
             <a:r>
@@ -7138,21 +8684,21 @@
                 </a:solidFill>
                 <a:latin typeface="Calibri"/>
               </a:rPr>
-              <a:t>What is left</a:t>
-            </a:r>
-          </a:p>
-        </p:txBody>
-      </p:sp>
-      <p:sp>
-        <p:nvSpPr>
-          <p:cNvPr id="14" name="TextBox 13"/>
-          <p:cNvSpPr txBox="1"/>
-          <p:nvPr/>
-        </p:nvSpPr>
-        <p:spPr>
-          <a:xfrm>
-            <a:off x="731520" y="5129784"/>
-            <a:ext cx="10725912" cy="1271015"/>
+              <a:t>Left to do</a:t>
+            </a:r>
+          </a:p>
+        </p:txBody>
+      </p:sp>
+      <p:sp>
+        <p:nvSpPr>
+          <p:cNvPr id="16" name="TextBox 15"/>
+          <p:cNvSpPr txBox="1"/>
+          <p:nvPr/>
+        </p:nvSpPr>
+        <p:spPr>
+          <a:xfrm>
+            <a:off x="6766559" y="2267712"/>
+            <a:ext cx="5029200" cy="4133087"/>
           </a:xfrm>
           <a:prstGeom prst="rect">
             <a:avLst/>
@@ -7170,17 +8716,17 @@
                 <a:spcPct val="110000"/>
               </a:lnSpc>
               <a:spcAft>
-                <a:spcPts val="700"/>
-              </a:spcAft>
-            </a:pPr>
-            <a:r>
-              <a:rPr sz="1400" b="0" i="0">
+                <a:spcPts val="1000"/>
+              </a:spcAft>
+            </a:pPr>
+            <a:r>
+              <a:rPr sz="1300" b="0" i="0">
                 <a:solidFill>
                   <a:srgbClr val="444444"/>
                 </a:solidFill>
                 <a:latin typeface="Calibri"/>
               </a:rPr>
-              <a:t>Finish the model comparison, add a third attack, and find an aggregation defense from another group.</a:t>
+              <a:t>One more attack in this cell: a third poisoning method with released code.</a:t>
             </a:r>
           </a:p>
           <a:p>
@@ -7189,17 +8735,97 @@
                 <a:spcPct val="110000"/>
               </a:lnSpc>
               <a:spcAft>
-                <a:spcPts val="700"/>
-              </a:spcAft>
-            </a:pPr>
-            <a:r>
-              <a:rPr sz="1400" b="0" i="0">
+                <a:spcPts val="1000"/>
+              </a:spcAft>
+            </a:pPr>
+            <a:r>
+              <a:rPr sz="1300" b="0" i="0">
                 <a:solidFill>
                   <a:srgbClr val="444444"/>
                 </a:solidFill>
                 <a:latin typeface="Calibri"/>
               </a:rPr>
-              <a:t>Then the matrix is closed and the paper is written.</a:t>
+              <a:t>An aggregation defense from a different research group, to check the rule is not one laboratory's habit.</a:t>
+            </a:r>
+          </a:p>
+          <a:p>
+            <a:pPr>
+              <a:lnSpc>
+                <a:spcPct val="110000"/>
+              </a:lnSpc>
+              <a:spcAft>
+                <a:spcPts val="1000"/>
+              </a:spcAft>
+            </a:pPr>
+            <a:r>
+              <a:rPr sz="1300" b="0" i="0">
+                <a:solidFill>
+                  <a:srgbClr val="444444"/>
+                </a:solidFill>
+                <a:latin typeface="Calibri"/>
+              </a:rPr>
+              <a:t>Then the next cell on the map. The largest untested pool is a different route in, with four attacks and seventy-nine defenses facing each other and nothing between them.</a:t>
+            </a:r>
+          </a:p>
+          <a:p>
+            <a:pPr>
+              <a:lnSpc>
+                <a:spcPct val="110000"/>
+              </a:lnSpc>
+              <a:spcAft>
+                <a:spcPts val="1000"/>
+              </a:spcAft>
+            </a:pPr>
+            <a:r>
+              <a:rPr sz="1300" b="0" i="0">
+                <a:solidFill>
+                  <a:srgbClr val="444444"/>
+                </a:solidFill>
+                <a:latin typeface="Calibri"/>
+              </a:rPr>
+              <a:t>99 defense papers name an attack on our map and never test against it. Those are the next candidates after that.</a:t>
+            </a:r>
+          </a:p>
+        </p:txBody>
+      </p:sp>
+      <p:sp>
+        <p:nvSpPr>
+          <p:cNvPr id="17" name="TextBox 16"/>
+          <p:cNvSpPr txBox="1"/>
+          <p:nvPr/>
+        </p:nvSpPr>
+        <p:spPr>
+          <a:xfrm>
+            <a:off x="731520" y="5120640"/>
+            <a:ext cx="10725912" cy="1280160"/>
+          </a:xfrm>
+          <a:prstGeom prst="rect">
+            <a:avLst/>
+          </a:prstGeom>
+          <a:noFill/>
+        </p:spPr>
+        <p:txBody>
+          <a:bodyPr wrap="square" lIns="0" rIns="0" tIns="0" bIns="0" anchor="t">
+            <a:spAutoFit/>
+          </a:bodyPr>
+          <a:lstStyle/>
+          <a:p>
+            <a:pPr algn="l">
+              <a:lnSpc>
+                <a:spcPct val="110000"/>
+              </a:lnSpc>
+              <a:spcAft>
+                <a:spcPts val="600"/>
+              </a:spcAft>
+            </a:pPr>
+            <a:r>
+              <a:rPr sz="1500" b="1" i="0">
+                <a:solidFill>
+                  <a:srgbClr val="111111"/>
+                </a:solidFill>
+                <a:latin typeface="Calibri"/>
+              </a:rPr>
+              <a:t>The cell we finished took four attacks and five defenses. The map holds 10 more cells with both sides present and nothing tested between them.</a:t>
             </a:r>
           </a:p>
         </p:txBody>

--- a/advisor_meeting.pptx
+++ b/advisor_meeting.pptx
@@ -6364,7 +6364,7 @@
         </p:nvSpPr>
         <p:spPr>
           <a:xfrm>
-            <a:off x="731520" y="3218688"/>
+            <a:off x="731520" y="3182112"/>
             <a:ext cx="10725912" cy="310896"/>
           </a:xfrm>
           <a:prstGeom prst="rect">
@@ -6393,7 +6393,7 @@
                 </a:solidFill>
                 <a:latin typeface="Calibri"/>
               </a:rPr>
-              <a:t>The cell we worked in</a:t>
+              <a:t>The cell we started in</a:t>
             </a:r>
           </a:p>
         </p:txBody>
@@ -6406,7 +6406,7 @@
         </p:nvSpPr>
         <p:spPr>
           <a:xfrm>
-            <a:off x="731520" y="3602736"/>
+            <a:off x="731520" y="3547872"/>
             <a:ext cx="3291840" cy="310896"/>
           </a:xfrm>
           <a:prstGeom prst="rect">
@@ -6448,7 +6448,7 @@
         </p:nvSpPr>
         <p:spPr>
           <a:xfrm>
-            <a:off x="4023360" y="3602736"/>
+            <a:off x="4023360" y="3547872"/>
             <a:ext cx="7434072" cy="310896"/>
           </a:xfrm>
           <a:prstGeom prst="rect">
@@ -6490,7 +6490,7 @@
         </p:nvSpPr>
         <p:spPr>
           <a:xfrm>
-            <a:off x="731520" y="4041648"/>
+            <a:off x="731520" y="3968496"/>
             <a:ext cx="3291840" cy="310896"/>
           </a:xfrm>
           <a:prstGeom prst="rect">
@@ -6532,7 +6532,7 @@
         </p:nvSpPr>
         <p:spPr>
           <a:xfrm>
-            <a:off x="4023360" y="4041648"/>
+            <a:off x="4023360" y="3968496"/>
             <a:ext cx="7434072" cy="310896"/>
           </a:xfrm>
           <a:prstGeom prst="rect">
@@ -6574,7 +6574,7 @@
         </p:nvSpPr>
         <p:spPr>
           <a:xfrm>
-            <a:off x="731520" y="4480560"/>
+            <a:off x="731520" y="4389120"/>
             <a:ext cx="3291840" cy="310896"/>
           </a:xfrm>
           <a:prstGeom prst="rect">
@@ -6616,7 +6616,7 @@
         </p:nvSpPr>
         <p:spPr>
           <a:xfrm>
-            <a:off x="4023360" y="4480560"/>
+            <a:off x="4023360" y="4389120"/>
             <a:ext cx="7434072" cy="310896"/>
           </a:xfrm>
           <a:prstGeom prst="rect">
@@ -6658,7 +6658,7 @@
         </p:nvSpPr>
         <p:spPr>
           <a:xfrm>
-            <a:off x="731520" y="4919472"/>
+            <a:off x="731520" y="4809744"/>
             <a:ext cx="3291840" cy="310896"/>
           </a:xfrm>
           <a:prstGeom prst="rect">
@@ -6700,7 +6700,7 @@
         </p:nvSpPr>
         <p:spPr>
           <a:xfrm>
-            <a:off x="4023360" y="4919472"/>
+            <a:off x="4023360" y="4809744"/>
             <a:ext cx="7434072" cy="310896"/>
           </a:xfrm>
           <a:prstGeom prst="rect">
@@ -6742,7 +6742,7 @@
         </p:nvSpPr>
         <p:spPr>
           <a:xfrm>
-            <a:off x="731520" y="5358383"/>
+            <a:off x="731520" y="5230368"/>
             <a:ext cx="3291840" cy="310896"/>
           </a:xfrm>
           <a:prstGeom prst="rect">
@@ -6784,7 +6784,7 @@
         </p:nvSpPr>
         <p:spPr>
           <a:xfrm>
-            <a:off x="4023360" y="5358383"/>
+            <a:off x="4023360" y="5230368"/>
             <a:ext cx="7434072" cy="310896"/>
           </a:xfrm>
           <a:prstGeom prst="rect">
@@ -6826,8 +6826,8 @@
         </p:nvSpPr>
         <p:spPr>
           <a:xfrm>
-            <a:off x="731520" y="5907024"/>
-            <a:ext cx="10725912" cy="493776"/>
+            <a:off x="731520" y="5742432"/>
+            <a:ext cx="10725912" cy="658367"/>
           </a:xfrm>
           <a:prstGeom prst="rect">
             <a:avLst/>
@@ -6849,13 +6849,32 @@
               </a:spcAft>
             </a:pPr>
             <a:r>
-              <a:rPr sz="1500" b="1" i="0">
+              <a:rPr sz="1350" b="1" i="0">
                 <a:solidFill>
                   <a:srgbClr val="111111"/>
                 </a:solidFill>
                 <a:latin typeface="Calibri"/>
               </a:rPr>
-              <a:t>Every defense we ran lives in that cell. So does every attack. We did not pick them because they looked promising. The map picked them.</a:t>
+              <a:t>The map picked the first experiments, not us. Three of the four defenses we ran sit in that cell. The fourth answers the same failure arriving by a different route.</a:t>
+            </a:r>
+          </a:p>
+          <a:p>
+            <a:pPr>
+              <a:lnSpc>
+                <a:spcPct val="110000"/>
+              </a:lnSpc>
+              <a:spcAft>
+                <a:spcPts val="600"/>
+              </a:spcAft>
+            </a:pPr>
+            <a:r>
+              <a:rPr sz="1350" b="0" i="0">
+                <a:solidFill>
+                  <a:srgbClr val="444444"/>
+                </a:solidFill>
+                <a:latin typeface="Calibri"/>
+              </a:rPr>
+              <a:t>We then widened the attack set along the same route. Two more attacks also poison a retrieved document, and testing those as well is how we checked that a result was about the defense and not about one attack.</a:t>
             </a:r>
           </a:p>
         </p:txBody>
@@ -8320,7 +8339,7 @@
         <p:spPr>
           <a:xfrm>
             <a:off x="2468880" y="2267712"/>
-            <a:ext cx="8988552" cy="310896"/>
+            <a:ext cx="3383279" cy="310896"/>
           </a:xfrm>
           <a:prstGeom prst="rect">
             <a:avLst/>
@@ -8361,7 +8380,7 @@
         </p:nvSpPr>
         <p:spPr>
           <a:xfrm>
-            <a:off x="731520" y="2779776"/>
+            <a:off x="731520" y="2834640"/>
             <a:ext cx="1737360" cy="310896"/>
           </a:xfrm>
           <a:prstGeom prst="rect">
@@ -8403,8 +8422,8 @@
         </p:nvSpPr>
         <p:spPr>
           <a:xfrm>
-            <a:off x="2468880" y="2779776"/>
-            <a:ext cx="8988552" cy="310896"/>
+            <a:off x="2468880" y="2834640"/>
+            <a:ext cx="3383279" cy="310896"/>
           </a:xfrm>
           <a:prstGeom prst="rect">
             <a:avLst/>
@@ -8445,7 +8464,7 @@
         </p:nvSpPr>
         <p:spPr>
           <a:xfrm>
-            <a:off x="731520" y="3291840"/>
+            <a:off x="731520" y="3401568"/>
             <a:ext cx="1737360" cy="310896"/>
           </a:xfrm>
           <a:prstGeom prst="rect">
@@ -8487,8 +8506,8 @@
         </p:nvSpPr>
         <p:spPr>
           <a:xfrm>
-            <a:off x="2468880" y="3291840"/>
-            <a:ext cx="8988552" cy="310896"/>
+            <a:off x="2468880" y="3401568"/>
+            <a:ext cx="3383279" cy="310896"/>
           </a:xfrm>
           <a:prstGeom prst="rect">
             <a:avLst/>
@@ -8614,7 +8633,7 @@
         <p:spPr>
           <a:xfrm>
             <a:off x="2468880" y="4370832"/>
-            <a:ext cx="8988552" cy="310896"/>
+            <a:ext cx="3383279" cy="310896"/>
           </a:xfrm>
           <a:prstGeom prst="rect">
             <a:avLst/>

--- a/advisor_meeting.pptx
+++ b/advisor_meeting.pptx
@@ -20,6 +20,7 @@
     <p:sldId id="268" r:id="rId19"/>
     <p:sldId id="269" r:id="rId20"/>
     <p:sldId id="270" r:id="rId21"/>
+    <p:sldId id="271" r:id="rId22"/>
   </p:sldIdLst>
   <p:sldSz cx="12188952" cy="6858000" type="screen4x3"/>
   <p:notesSz cx="6858000" cy="9144000"/>
@@ -3284,7 +3285,7 @@
                 </a:solidFill>
                 <a:latin typeface="Calibri"/>
               </a:rPr>
-              <a:t>THE GAP, IN DETAIL</a:t>
+              <a:t>FINDING 2</a:t>
             </a:r>
           </a:p>
         </p:txBody>
@@ -3326,7 +3327,7 @@
                 </a:solidFill>
                 <a:latin typeface="Cambria"/>
               </a:rPr>
-              <a:t>Where an untested pair is waiting</a:t>
+              <a:t>Most defenses have never met most attacks</a:t>
             </a:r>
           </a:p>
         </p:txBody>
@@ -3381,50 +3382,176 @@
         </p:nvSpPr>
         <p:spPr>
           <a:xfrm>
-            <a:off x="731520" y="1920240"/>
-            <a:ext cx="10725912" cy="411480"/>
-          </a:xfrm>
-          <a:prstGeom prst="rect">
-            <a:avLst/>
-          </a:prstGeom>
-          <a:noFill/>
-        </p:spPr>
-        <p:txBody>
-          <a:bodyPr wrap="square" lIns="0" rIns="0" tIns="0" bIns="0" anchor="t">
-            <a:spAutoFit/>
-          </a:bodyPr>
-          <a:lstStyle/>
-          <a:p>
-            <a:pPr algn="l">
-              <a:lnSpc>
-                <a:spcPct val="106000"/>
-              </a:lnSpc>
-              <a:spcAft>
-                <a:spcPts val="0"/>
-              </a:spcAft>
-            </a:pPr>
-            <a:r>
-              <a:rPr sz="1400" b="0" i="0">
+            <a:off x="731520" y="2011680"/>
+            <a:ext cx="2651760" cy="310896"/>
+          </a:xfrm>
+          <a:prstGeom prst="rect">
+            <a:avLst/>
+          </a:prstGeom>
+          <a:noFill/>
+        </p:spPr>
+        <p:txBody>
+          <a:bodyPr wrap="square" lIns="0" rIns="0" tIns="0" bIns="0" anchor="t">
+            <a:spAutoFit/>
+          </a:bodyPr>
+          <a:lstStyle/>
+          <a:p>
+            <a:pPr algn="l">
+              <a:lnSpc>
+                <a:spcPct val="106000"/>
+              </a:lnSpc>
+              <a:spcAft>
+                <a:spcPts val="0"/>
+              </a:spcAft>
+            </a:pPr>
+            <a:r>
+              <a:rPr sz="1600" b="1" i="0">
+                <a:solidFill>
+                  <a:srgbClr val="111111"/>
+                </a:solidFill>
+                <a:latin typeface="Calibri"/>
+              </a:rPr>
+              <a:t>119 of 237</a:t>
+            </a:r>
+          </a:p>
+        </p:txBody>
+      </p:sp>
+      <p:sp>
+        <p:nvSpPr>
+          <p:cNvPr id="6" name="TextBox 5"/>
+          <p:cNvSpPr txBox="1"/>
+          <p:nvPr/>
+        </p:nvSpPr>
+        <p:spPr>
+          <a:xfrm>
+            <a:off x="3383280" y="2011680"/>
+            <a:ext cx="8074152" cy="310896"/>
+          </a:xfrm>
+          <a:prstGeom prst="rect">
+            <a:avLst/>
+          </a:prstGeom>
+          <a:noFill/>
+        </p:spPr>
+        <p:txBody>
+          <a:bodyPr wrap="square" lIns="0" rIns="0" tIns="0" bIns="0" anchor="t">
+            <a:spAutoFit/>
+          </a:bodyPr>
+          <a:lstStyle/>
+          <a:p>
+            <a:pPr algn="l">
+              <a:lnSpc>
+                <a:spcPct val="106000"/>
+              </a:lnSpc>
+              <a:spcAft>
+                <a:spcPts val="0"/>
+              </a:spcAft>
+            </a:pPr>
+            <a:r>
+              <a:rPr sz="1600" b="0" i="0">
                 <a:solidFill>
                   <a:srgbClr val="444444"/>
                 </a:solidFill>
                 <a:latin typeface="Calibri"/>
               </a:rPr>
-              <a:t>Each row is one route and one failure. The attacks are the deliberate ones. The defenses are the ones built for the same failure happening by accident.</a:t>
-            </a:r>
-          </a:p>
-        </p:txBody>
-      </p:sp>
-      <p:sp>
-        <p:nvSpPr>
-          <p:cNvPr id="6" name="TextBox 5"/>
-          <p:cNvSpPr txBox="1"/>
-          <p:nvPr/>
-        </p:nvSpPr>
-        <p:spPr>
-          <a:xfrm>
-            <a:off x="731520" y="2414016"/>
-            <a:ext cx="2468880" cy="457200"/>
+              <a:t>attacks have no tested defense at all</a:t>
+            </a:r>
+          </a:p>
+        </p:txBody>
+      </p:sp>
+      <p:sp>
+        <p:nvSpPr>
+          <p:cNvPr id="7" name="TextBox 6"/>
+          <p:cNvSpPr txBox="1"/>
+          <p:nvPr/>
+        </p:nvSpPr>
+        <p:spPr>
+          <a:xfrm>
+            <a:off x="731520" y="2578608"/>
+            <a:ext cx="2651760" cy="310896"/>
+          </a:xfrm>
+          <a:prstGeom prst="rect">
+            <a:avLst/>
+          </a:prstGeom>
+          <a:noFill/>
+        </p:spPr>
+        <p:txBody>
+          <a:bodyPr wrap="square" lIns="0" rIns="0" tIns="0" bIns="0" anchor="t">
+            <a:spAutoFit/>
+          </a:bodyPr>
+          <a:lstStyle/>
+          <a:p>
+            <a:pPr algn="l">
+              <a:lnSpc>
+                <a:spcPct val="106000"/>
+              </a:lnSpc>
+              <a:spcAft>
+                <a:spcPts val="0"/>
+              </a:spcAft>
+            </a:pPr>
+            <a:r>
+              <a:rPr sz="1600" b="1" i="0">
+                <a:solidFill>
+                  <a:srgbClr val="111111"/>
+                </a:solidFill>
+                <a:latin typeface="Calibri"/>
+              </a:rPr>
+              <a:t>15 of 534</a:t>
+            </a:r>
+          </a:p>
+        </p:txBody>
+      </p:sp>
+      <p:sp>
+        <p:nvSpPr>
+          <p:cNvPr id="8" name="TextBox 7"/>
+          <p:cNvSpPr txBox="1"/>
+          <p:nvPr/>
+        </p:nvSpPr>
+        <p:spPr>
+          <a:xfrm>
+            <a:off x="3383280" y="2578608"/>
+            <a:ext cx="8074152" cy="310896"/>
+          </a:xfrm>
+          <a:prstGeom prst="rect">
+            <a:avLst/>
+          </a:prstGeom>
+          <a:noFill/>
+        </p:spPr>
+        <p:txBody>
+          <a:bodyPr wrap="square" lIns="0" rIns="0" tIns="0" bIns="0" anchor="t">
+            <a:spAutoFit/>
+          </a:bodyPr>
+          <a:lstStyle/>
+          <a:p>
+            <a:pPr algn="l">
+              <a:lnSpc>
+                <a:spcPct val="106000"/>
+              </a:lnSpc>
+              <a:spcAft>
+                <a:spcPts val="0"/>
+              </a:spcAft>
+            </a:pPr>
+            <a:r>
+              <a:rPr sz="1600" b="0" i="0">
+                <a:solidFill>
+                  <a:srgbClr val="444444"/>
+                </a:solidFill>
+                <a:latin typeface="Calibri"/>
+              </a:rPr>
+              <a:t>defenses were tested against both threat models. That is 2.8 %.</a:t>
+            </a:r>
+          </a:p>
+        </p:txBody>
+      </p:sp>
+      <p:sp>
+        <p:nvSpPr>
+          <p:cNvPr id="9" name="TextBox 8"/>
+          <p:cNvSpPr txBox="1"/>
+          <p:nvPr/>
+        </p:nvSpPr>
+        <p:spPr>
+          <a:xfrm>
+            <a:off x="731520" y="3611880"/>
+            <a:ext cx="10725912" cy="2788920"/>
           </a:xfrm>
           <a:prstGeom prst="rect">
             <a:avLst/>
@@ -3442,1792 +3569,55 @@
                 <a:spcPct val="110000"/>
               </a:lnSpc>
               <a:spcAft>
-                <a:spcPts val="0"/>
-              </a:spcAft>
-            </a:pPr>
-            <a:r>
-              <a:rPr sz="1150" b="1" i="0">
-                <a:solidFill>
-                  <a:srgbClr val="777777"/>
-                </a:solidFill>
-                <a:latin typeface="Calibri"/>
-              </a:rPr>
-              <a:t>Route in</a:t>
-            </a:r>
-          </a:p>
-        </p:txBody>
-      </p:sp>
-      <p:sp>
-        <p:nvSpPr>
-          <p:cNvPr id="7" name="TextBox 6"/>
-          <p:cNvSpPr txBox="1"/>
-          <p:nvPr/>
-        </p:nvSpPr>
-        <p:spPr>
-          <a:xfrm>
-            <a:off x="3291839" y="2414016"/>
-            <a:ext cx="3017520" cy="457200"/>
-          </a:xfrm>
-          <a:prstGeom prst="rect">
-            <a:avLst/>
-          </a:prstGeom>
-          <a:noFill/>
-        </p:spPr>
-        <p:txBody>
-          <a:bodyPr wrap="square" lIns="0" rIns="0" tIns="0" bIns="0" anchor="t">
-            <a:spAutoFit/>
-          </a:bodyPr>
-          <a:lstStyle/>
-          <a:p>
-            <a:pPr algn="l">
+                <a:spcPts val="1100"/>
+              </a:spcAft>
+            </a:pPr>
+            <a:r>
+              <a:rPr sz="1500" b="1" i="0">
+                <a:solidFill>
+                  <a:srgbClr val="111111"/>
+                </a:solidFill>
+                <a:latin typeface="Calibri"/>
+              </a:rPr>
+              <a:t>A defense paper is not a neutral document. A defense is supposed to defend something.</a:t>
+            </a:r>
+          </a:p>
+          <a:p>
+            <a:pPr>
               <a:lnSpc>
                 <a:spcPct val="110000"/>
               </a:lnSpc>
               <a:spcAft>
-                <a:spcPts val="0"/>
-              </a:spcAft>
-            </a:pPr>
-            <a:r>
-              <a:rPr sz="1150" b="1" i="0">
-                <a:solidFill>
-                  <a:srgbClr val="777777"/>
-                </a:solidFill>
-                <a:latin typeface="Calibri"/>
-              </a:rPr>
-              <a:t>What goes wrong</a:t>
-            </a:r>
-          </a:p>
-        </p:txBody>
-      </p:sp>
-      <p:sp>
-        <p:nvSpPr>
-          <p:cNvPr id="8" name="TextBox 7"/>
-          <p:cNvSpPr txBox="1"/>
-          <p:nvPr/>
-        </p:nvSpPr>
-        <p:spPr>
-          <a:xfrm>
-            <a:off x="6492240" y="2414016"/>
-            <a:ext cx="1371600" cy="457200"/>
-          </a:xfrm>
-          <a:prstGeom prst="rect">
-            <a:avLst/>
-          </a:prstGeom>
-          <a:noFill/>
-        </p:spPr>
-        <p:txBody>
-          <a:bodyPr wrap="square" lIns="0" rIns="0" tIns="0" bIns="0" anchor="t">
-            <a:spAutoFit/>
-          </a:bodyPr>
-          <a:lstStyle/>
-          <a:p>
-            <a:pPr algn="l">
+                <a:spcPts val="1100"/>
+              </a:spcAft>
+            </a:pPr>
+            <a:r>
+              <a:rPr sz="1500" b="0" i="0">
+                <a:solidFill>
+                  <a:srgbClr val="444444"/>
+                </a:solidFill>
+                <a:latin typeface="Calibri"/>
+              </a:rPr>
+              <a:t>99 defense papers name an attack that sits in our map, and then never test against it. Those are not gaps in the field's knowledge. They are gaps in its evidence.</a:t>
+            </a:r>
+          </a:p>
+          <a:p>
+            <a:pPr>
               <a:lnSpc>
                 <a:spcPct val="110000"/>
               </a:lnSpc>
               <a:spcAft>
-                <a:spcPts val="0"/>
-              </a:spcAft>
-            </a:pPr>
-            <a:r>
-              <a:rPr sz="1150" b="1" i="0">
-                <a:solidFill>
-                  <a:srgbClr val="777777"/>
-                </a:solidFill>
-                <a:latin typeface="Calibri"/>
-              </a:rPr>
-              <a:t>Deliberate</a:t>
-            </a:r>
-          </a:p>
-          <a:p>
-            <a:pPr>
-              <a:lnSpc>
-                <a:spcPct val="110000"/>
-              </a:lnSpc>
-              <a:spcAft>
-                <a:spcPts val="0"/>
-              </a:spcAft>
-            </a:pPr>
-            <a:r>
-              <a:rPr sz="1150" b="1" i="0">
-                <a:solidFill>
-                  <a:srgbClr val="777777"/>
-                </a:solidFill>
-                <a:latin typeface="Calibri"/>
-              </a:rPr>
-              <a:t>attacks</a:t>
-            </a:r>
-          </a:p>
-        </p:txBody>
-      </p:sp>
-      <p:sp>
-        <p:nvSpPr>
-          <p:cNvPr id="9" name="TextBox 8"/>
-          <p:cNvSpPr txBox="1"/>
-          <p:nvPr/>
-        </p:nvSpPr>
-        <p:spPr>
-          <a:xfrm>
-            <a:off x="8046720" y="2414016"/>
-            <a:ext cx="1463040" cy="457200"/>
-          </a:xfrm>
-          <a:prstGeom prst="rect">
-            <a:avLst/>
-          </a:prstGeom>
-          <a:noFill/>
-        </p:spPr>
-        <p:txBody>
-          <a:bodyPr wrap="square" lIns="0" rIns="0" tIns="0" bIns="0" anchor="t">
-            <a:spAutoFit/>
-          </a:bodyPr>
-          <a:lstStyle/>
-          <a:p>
-            <a:pPr algn="l">
-              <a:lnSpc>
-                <a:spcPct val="110000"/>
-              </a:lnSpc>
-              <a:spcAft>
-                <a:spcPts val="0"/>
-              </a:spcAft>
-            </a:pPr>
-            <a:r>
-              <a:rPr sz="1150" b="1" i="0">
-                <a:solidFill>
-                  <a:srgbClr val="777777"/>
-                </a:solidFill>
-                <a:latin typeface="Calibri"/>
-              </a:rPr>
-              <a:t>Accidental</a:t>
-            </a:r>
-          </a:p>
-          <a:p>
-            <a:pPr>
-              <a:lnSpc>
-                <a:spcPct val="110000"/>
-              </a:lnSpc>
-              <a:spcAft>
-                <a:spcPts val="0"/>
-              </a:spcAft>
-            </a:pPr>
-            <a:r>
-              <a:rPr sz="1150" b="1" i="0">
-                <a:solidFill>
-                  <a:srgbClr val="777777"/>
-                </a:solidFill>
-                <a:latin typeface="Calibri"/>
-              </a:rPr>
-              <a:t>defenses</a:t>
-            </a:r>
-          </a:p>
-        </p:txBody>
-      </p:sp>
-      <p:sp>
-        <p:nvSpPr>
-          <p:cNvPr id="10" name="TextBox 9"/>
-          <p:cNvSpPr txBox="1"/>
-          <p:nvPr/>
-        </p:nvSpPr>
-        <p:spPr>
-          <a:xfrm>
-            <a:off x="9692640" y="2414016"/>
-            <a:ext cx="2011680" cy="457200"/>
-          </a:xfrm>
-          <a:prstGeom prst="rect">
-            <a:avLst/>
-          </a:prstGeom>
-          <a:noFill/>
-        </p:spPr>
-        <p:txBody>
-          <a:bodyPr wrap="square" lIns="0" rIns="0" tIns="0" bIns="0" anchor="t">
-            <a:spAutoFit/>
-          </a:bodyPr>
-          <a:lstStyle/>
-          <a:p>
-            <a:pPr algn="l">
-              <a:lnSpc>
-                <a:spcPct val="110000"/>
-              </a:lnSpc>
-              <a:spcAft>
-                <a:spcPts val="0"/>
-              </a:spcAft>
-            </a:pPr>
-            <a:r>
-              <a:rPr sz="1150" b="1" i="0">
-                <a:solidFill>
-                  <a:srgbClr val="777777"/>
-                </a:solidFill>
-                <a:latin typeface="Calibri"/>
-              </a:rPr>
-              <a:t>Ever tested</a:t>
-            </a:r>
-          </a:p>
-          <a:p>
-            <a:pPr>
-              <a:lnSpc>
-                <a:spcPct val="110000"/>
-              </a:lnSpc>
-              <a:spcAft>
-                <a:spcPts val="0"/>
-              </a:spcAft>
-            </a:pPr>
-            <a:r>
-              <a:rPr sz="1150" b="1" i="0">
-                <a:solidFill>
-                  <a:srgbClr val="777777"/>
-                </a:solidFill>
-                <a:latin typeface="Calibri"/>
-              </a:rPr>
-              <a:t>against each other</a:t>
-            </a:r>
-          </a:p>
-        </p:txBody>
-      </p:sp>
-      <p:sp>
-        <p:nvSpPr>
-          <p:cNvPr id="11" name="TextBox 10"/>
-          <p:cNvSpPr txBox="1"/>
-          <p:nvPr/>
-        </p:nvSpPr>
-        <p:spPr>
-          <a:xfrm>
-            <a:off x="731520" y="2926080"/>
-            <a:ext cx="2468880" cy="292608"/>
-          </a:xfrm>
-          <a:prstGeom prst="rect">
-            <a:avLst/>
-          </a:prstGeom>
-          <a:noFill/>
-        </p:spPr>
-        <p:txBody>
-          <a:bodyPr wrap="square" lIns="0" rIns="0" tIns="0" bIns="0" anchor="t">
-            <a:spAutoFit/>
-          </a:bodyPr>
-          <a:lstStyle/>
-          <a:p>
-            <a:pPr algn="l">
-              <a:lnSpc>
-                <a:spcPct val="106000"/>
-              </a:lnSpc>
-              <a:spcAft>
-                <a:spcPts val="0"/>
-              </a:spcAft>
-            </a:pPr>
-            <a:r>
-              <a:rPr sz="1300" b="0" i="0">
-                <a:solidFill>
-                  <a:srgbClr val="444444"/>
-                </a:solidFill>
-                <a:latin typeface="Calibri"/>
-              </a:rPr>
-              <a:t>direct-input</a:t>
-            </a:r>
-          </a:p>
-        </p:txBody>
-      </p:sp>
-      <p:sp>
-        <p:nvSpPr>
-          <p:cNvPr id="12" name="TextBox 11"/>
-          <p:cNvSpPr txBox="1"/>
-          <p:nvPr/>
-        </p:nvSpPr>
-        <p:spPr>
-          <a:xfrm>
-            <a:off x="3291839" y="2926080"/>
-            <a:ext cx="3017520" cy="292608"/>
-          </a:xfrm>
-          <a:prstGeom prst="rect">
-            <a:avLst/>
-          </a:prstGeom>
-          <a:noFill/>
-        </p:spPr>
-        <p:txBody>
-          <a:bodyPr wrap="square" lIns="0" rIns="0" tIns="0" bIns="0" anchor="t">
-            <a:spAutoFit/>
-          </a:bodyPr>
-          <a:lstStyle/>
-          <a:p>
-            <a:pPr algn="l">
-              <a:lnSpc>
-                <a:spcPct val="106000"/>
-              </a:lnSpc>
-              <a:spcAft>
-                <a:spcPts val="0"/>
-              </a:spcAft>
-            </a:pPr>
-            <a:r>
-              <a:rPr sz="1300" b="0" i="0">
-                <a:solidFill>
-                  <a:srgbClr val="444444"/>
-                </a:solidFill>
-                <a:latin typeface="Calibri"/>
-              </a:rPr>
-              <a:t>reasoning-corruption</a:t>
-            </a:r>
-          </a:p>
-        </p:txBody>
-      </p:sp>
-      <p:sp>
-        <p:nvSpPr>
-          <p:cNvPr id="13" name="TextBox 12"/>
-          <p:cNvSpPr txBox="1"/>
-          <p:nvPr/>
-        </p:nvSpPr>
-        <p:spPr>
-          <a:xfrm>
-            <a:off x="6492240" y="2926080"/>
-            <a:ext cx="1371600" cy="292608"/>
-          </a:xfrm>
-          <a:prstGeom prst="rect">
-            <a:avLst/>
-          </a:prstGeom>
-          <a:noFill/>
-        </p:spPr>
-        <p:txBody>
-          <a:bodyPr wrap="square" lIns="0" rIns="0" tIns="0" bIns="0" anchor="t">
-            <a:spAutoFit/>
-          </a:bodyPr>
-          <a:lstStyle/>
-          <a:p>
-            <a:pPr algn="l">
-              <a:lnSpc>
-                <a:spcPct val="106000"/>
-              </a:lnSpc>
-              <a:spcAft>
-                <a:spcPts val="0"/>
-              </a:spcAft>
-            </a:pPr>
-            <a:r>
-              <a:rPr sz="1300" b="0" i="0">
-                <a:solidFill>
-                  <a:srgbClr val="444444"/>
-                </a:solidFill>
-                <a:latin typeface="Calibri"/>
-              </a:rPr>
-              <a:t>4</a:t>
-            </a:r>
-          </a:p>
-        </p:txBody>
-      </p:sp>
-      <p:sp>
-        <p:nvSpPr>
-          <p:cNvPr id="14" name="TextBox 13"/>
-          <p:cNvSpPr txBox="1"/>
-          <p:nvPr/>
-        </p:nvSpPr>
-        <p:spPr>
-          <a:xfrm>
-            <a:off x="8046720" y="2926080"/>
-            <a:ext cx="1463040" cy="292608"/>
-          </a:xfrm>
-          <a:prstGeom prst="rect">
-            <a:avLst/>
-          </a:prstGeom>
-          <a:noFill/>
-        </p:spPr>
-        <p:txBody>
-          <a:bodyPr wrap="square" lIns="0" rIns="0" tIns="0" bIns="0" anchor="t">
-            <a:spAutoFit/>
-          </a:bodyPr>
-          <a:lstStyle/>
-          <a:p>
-            <a:pPr algn="l">
-              <a:lnSpc>
-                <a:spcPct val="106000"/>
-              </a:lnSpc>
-              <a:spcAft>
-                <a:spcPts val="0"/>
-              </a:spcAft>
-            </a:pPr>
-            <a:r>
-              <a:rPr sz="1300" b="0" i="0">
-                <a:solidFill>
-                  <a:srgbClr val="444444"/>
-                </a:solidFill>
-                <a:latin typeface="Calibri"/>
-              </a:rPr>
-              <a:t>79</a:t>
-            </a:r>
-          </a:p>
-        </p:txBody>
-      </p:sp>
-      <p:sp>
-        <p:nvSpPr>
-          <p:cNvPr id="15" name="TextBox 14"/>
-          <p:cNvSpPr txBox="1"/>
-          <p:nvPr/>
-        </p:nvSpPr>
-        <p:spPr>
-          <a:xfrm>
-            <a:off x="9692640" y="2926080"/>
-            <a:ext cx="2011680" cy="292608"/>
-          </a:xfrm>
-          <a:prstGeom prst="rect">
-            <a:avLst/>
-          </a:prstGeom>
-          <a:noFill/>
-        </p:spPr>
-        <p:txBody>
-          <a:bodyPr wrap="square" lIns="0" rIns="0" tIns="0" bIns="0" anchor="t">
-            <a:spAutoFit/>
-          </a:bodyPr>
-          <a:lstStyle/>
-          <a:p>
-            <a:pPr algn="l">
-              <a:lnSpc>
-                <a:spcPct val="106000"/>
-              </a:lnSpc>
-              <a:spcAft>
-                <a:spcPts val="0"/>
-              </a:spcAft>
-            </a:pPr>
-            <a:r>
-              <a:rPr sz="1300" b="1" i="0">
+                <a:spcPts val="1100"/>
+              </a:spcAft>
+            </a:pPr>
+            <a:r>
+              <a:rPr sz="1500" b="1" i="0">
                 <a:solidFill>
                   <a:srgbClr val="111111"/>
                 </a:solidFill>
                 <a:latin typeface="Calibri"/>
               </a:rPr>
-              <a:t>0</a:t>
-            </a:r>
-          </a:p>
-        </p:txBody>
-      </p:sp>
-      <p:sp>
-        <p:nvSpPr>
-          <p:cNvPr id="16" name="TextBox 15"/>
-          <p:cNvSpPr txBox="1"/>
-          <p:nvPr/>
-        </p:nvSpPr>
-        <p:spPr>
-          <a:xfrm>
-            <a:off x="731520" y="3291840"/>
-            <a:ext cx="2468880" cy="292608"/>
-          </a:xfrm>
-          <a:prstGeom prst="rect">
-            <a:avLst/>
-          </a:prstGeom>
-          <a:noFill/>
-        </p:spPr>
-        <p:txBody>
-          <a:bodyPr wrap="square" lIns="0" rIns="0" tIns="0" bIns="0" anchor="t">
-            <a:spAutoFit/>
-          </a:bodyPr>
-          <a:lstStyle/>
-          <a:p>
-            <a:pPr algn="l">
-              <a:lnSpc>
-                <a:spcPct val="106000"/>
-              </a:lnSpc>
-              <a:spcAft>
-                <a:spcPts val="0"/>
-              </a:spcAft>
-            </a:pPr>
-            <a:r>
-              <a:rPr sz="1300" b="0" i="0">
-                <a:solidFill>
-                  <a:srgbClr val="444444"/>
-                </a:solidFill>
-                <a:latin typeface="Calibri"/>
-              </a:rPr>
-              <a:t>RAG</a:t>
-            </a:r>
-          </a:p>
-        </p:txBody>
-      </p:sp>
-      <p:sp>
-        <p:nvSpPr>
-          <p:cNvPr id="17" name="TextBox 16"/>
-          <p:cNvSpPr txBox="1"/>
-          <p:nvPr/>
-        </p:nvSpPr>
-        <p:spPr>
-          <a:xfrm>
-            <a:off x="3291839" y="3291840"/>
-            <a:ext cx="3017520" cy="292608"/>
-          </a:xfrm>
-          <a:prstGeom prst="rect">
-            <a:avLst/>
-          </a:prstGeom>
-          <a:noFill/>
-        </p:spPr>
-        <p:txBody>
-          <a:bodyPr wrap="square" lIns="0" rIns="0" tIns="0" bIns="0" anchor="t">
-            <a:spAutoFit/>
-          </a:bodyPr>
-          <a:lstStyle/>
-          <a:p>
-            <a:pPr algn="l">
-              <a:lnSpc>
-                <a:spcPct val="106000"/>
-              </a:lnSpc>
-              <a:spcAft>
-                <a:spcPts val="0"/>
-              </a:spcAft>
-            </a:pPr>
-            <a:r>
-              <a:rPr sz="1300" b="0" i="0">
-                <a:solidFill>
-                  <a:srgbClr val="444444"/>
-                </a:solidFill>
-                <a:latin typeface="Calibri"/>
-              </a:rPr>
-              <a:t>silent-corruption</a:t>
-            </a:r>
-          </a:p>
-        </p:txBody>
-      </p:sp>
-      <p:sp>
-        <p:nvSpPr>
-          <p:cNvPr id="18" name="TextBox 17"/>
-          <p:cNvSpPr txBox="1"/>
-          <p:nvPr/>
-        </p:nvSpPr>
-        <p:spPr>
-          <a:xfrm>
-            <a:off x="6492240" y="3291840"/>
-            <a:ext cx="1371600" cy="292608"/>
-          </a:xfrm>
-          <a:prstGeom prst="rect">
-            <a:avLst/>
-          </a:prstGeom>
-          <a:noFill/>
-        </p:spPr>
-        <p:txBody>
-          <a:bodyPr wrap="square" lIns="0" rIns="0" tIns="0" bIns="0" anchor="t">
-            <a:spAutoFit/>
-          </a:bodyPr>
-          <a:lstStyle/>
-          <a:p>
-            <a:pPr algn="l">
-              <a:lnSpc>
-                <a:spcPct val="106000"/>
-              </a:lnSpc>
-              <a:spcAft>
-                <a:spcPts val="0"/>
-              </a:spcAft>
-            </a:pPr>
-            <a:r>
-              <a:rPr sz="1300" b="0" i="0">
-                <a:solidFill>
-                  <a:srgbClr val="444444"/>
-                </a:solidFill>
-                <a:latin typeface="Calibri"/>
-              </a:rPr>
-              <a:t>3</a:t>
-            </a:r>
-          </a:p>
-        </p:txBody>
-      </p:sp>
-      <p:sp>
-        <p:nvSpPr>
-          <p:cNvPr id="19" name="TextBox 18"/>
-          <p:cNvSpPr txBox="1"/>
-          <p:nvPr/>
-        </p:nvSpPr>
-        <p:spPr>
-          <a:xfrm>
-            <a:off x="8046720" y="3291840"/>
-            <a:ext cx="1463040" cy="292608"/>
-          </a:xfrm>
-          <a:prstGeom prst="rect">
-            <a:avLst/>
-          </a:prstGeom>
-          <a:noFill/>
-        </p:spPr>
-        <p:txBody>
-          <a:bodyPr wrap="square" lIns="0" rIns="0" tIns="0" bIns="0" anchor="t">
-            <a:spAutoFit/>
-          </a:bodyPr>
-          <a:lstStyle/>
-          <a:p>
-            <a:pPr algn="l">
-              <a:lnSpc>
-                <a:spcPct val="106000"/>
-              </a:lnSpc>
-              <a:spcAft>
-                <a:spcPts val="0"/>
-              </a:spcAft>
-            </a:pPr>
-            <a:r>
-              <a:rPr sz="1300" b="0" i="0">
-                <a:solidFill>
-                  <a:srgbClr val="444444"/>
-                </a:solidFill>
-                <a:latin typeface="Calibri"/>
-              </a:rPr>
-              <a:t>42</a:t>
-            </a:r>
-          </a:p>
-        </p:txBody>
-      </p:sp>
-      <p:sp>
-        <p:nvSpPr>
-          <p:cNvPr id="20" name="TextBox 19"/>
-          <p:cNvSpPr txBox="1"/>
-          <p:nvPr/>
-        </p:nvSpPr>
-        <p:spPr>
-          <a:xfrm>
-            <a:off x="9692640" y="3291840"/>
-            <a:ext cx="2011680" cy="292608"/>
-          </a:xfrm>
-          <a:prstGeom prst="rect">
-            <a:avLst/>
-          </a:prstGeom>
-          <a:noFill/>
-        </p:spPr>
-        <p:txBody>
-          <a:bodyPr wrap="square" lIns="0" rIns="0" tIns="0" bIns="0" anchor="t">
-            <a:spAutoFit/>
-          </a:bodyPr>
-          <a:lstStyle/>
-          <a:p>
-            <a:pPr algn="l">
-              <a:lnSpc>
-                <a:spcPct val="106000"/>
-              </a:lnSpc>
-              <a:spcAft>
-                <a:spcPts val="0"/>
-              </a:spcAft>
-            </a:pPr>
-            <a:r>
-              <a:rPr sz="1300" b="1" i="0">
-                <a:solidFill>
-                  <a:srgbClr val="111111"/>
-                </a:solidFill>
-                <a:latin typeface="Calibri"/>
-              </a:rPr>
-              <a:t>0</a:t>
-            </a:r>
-          </a:p>
-        </p:txBody>
-      </p:sp>
-      <p:sp>
-        <p:nvSpPr>
-          <p:cNvPr id="21" name="TextBox 20"/>
-          <p:cNvSpPr txBox="1"/>
-          <p:nvPr/>
-        </p:nvSpPr>
-        <p:spPr>
-          <a:xfrm>
-            <a:off x="731520" y="3657600"/>
-            <a:ext cx="2468880" cy="292608"/>
-          </a:xfrm>
-          <a:prstGeom prst="rect">
-            <a:avLst/>
-          </a:prstGeom>
-          <a:noFill/>
-        </p:spPr>
-        <p:txBody>
-          <a:bodyPr wrap="square" lIns="0" rIns="0" tIns="0" bIns="0" anchor="t">
-            <a:spAutoFit/>
-          </a:bodyPr>
-          <a:lstStyle/>
-          <a:p>
-            <a:pPr algn="l">
-              <a:lnSpc>
-                <a:spcPct val="106000"/>
-              </a:lnSpc>
-              <a:spcAft>
-                <a:spcPts val="0"/>
-              </a:spcAft>
-            </a:pPr>
-            <a:r>
-              <a:rPr sz="1300" b="0" i="0">
-                <a:solidFill>
-                  <a:srgbClr val="444444"/>
-                </a:solidFill>
-                <a:latin typeface="Calibri"/>
-              </a:rPr>
-              <a:t>tool-output</a:t>
-            </a:r>
-          </a:p>
-        </p:txBody>
-      </p:sp>
-      <p:sp>
-        <p:nvSpPr>
-          <p:cNvPr id="22" name="TextBox 21"/>
-          <p:cNvSpPr txBox="1"/>
-          <p:nvPr/>
-        </p:nvSpPr>
-        <p:spPr>
-          <a:xfrm>
-            <a:off x="3291839" y="3657600"/>
-            <a:ext cx="3017520" cy="292608"/>
-          </a:xfrm>
-          <a:prstGeom prst="rect">
-            <a:avLst/>
-          </a:prstGeom>
-          <a:noFill/>
-        </p:spPr>
-        <p:txBody>
-          <a:bodyPr wrap="square" lIns="0" rIns="0" tIns="0" bIns="0" anchor="t">
-            <a:spAutoFit/>
-          </a:bodyPr>
-          <a:lstStyle/>
-          <a:p>
-            <a:pPr algn="l">
-              <a:lnSpc>
-                <a:spcPct val="106000"/>
-              </a:lnSpc>
-              <a:spcAft>
-                <a:spcPts val="0"/>
-              </a:spcAft>
-            </a:pPr>
-            <a:r>
-              <a:rPr sz="1300" b="0" i="0">
-                <a:solidFill>
-                  <a:srgbClr val="444444"/>
-                </a:solidFill>
-                <a:latin typeface="Calibri"/>
-              </a:rPr>
-              <a:t>goal-hijack</a:t>
-            </a:r>
-          </a:p>
-        </p:txBody>
-      </p:sp>
-      <p:sp>
-        <p:nvSpPr>
-          <p:cNvPr id="23" name="TextBox 22"/>
-          <p:cNvSpPr txBox="1"/>
-          <p:nvPr/>
-        </p:nvSpPr>
-        <p:spPr>
-          <a:xfrm>
-            <a:off x="6492240" y="3657600"/>
-            <a:ext cx="1371600" cy="292608"/>
-          </a:xfrm>
-          <a:prstGeom prst="rect">
-            <a:avLst/>
-          </a:prstGeom>
-          <a:noFill/>
-        </p:spPr>
-        <p:txBody>
-          <a:bodyPr wrap="square" lIns="0" rIns="0" tIns="0" bIns="0" anchor="t">
-            <a:spAutoFit/>
-          </a:bodyPr>
-          <a:lstStyle/>
-          <a:p>
-            <a:pPr algn="l">
-              <a:lnSpc>
-                <a:spcPct val="106000"/>
-              </a:lnSpc>
-              <a:spcAft>
-                <a:spcPts val="0"/>
-              </a:spcAft>
-            </a:pPr>
-            <a:r>
-              <a:rPr sz="1300" b="0" i="0">
-                <a:solidFill>
-                  <a:srgbClr val="444444"/>
-                </a:solidFill>
-                <a:latin typeface="Calibri"/>
-              </a:rPr>
-              <a:t>61</a:t>
-            </a:r>
-          </a:p>
-        </p:txBody>
-      </p:sp>
-      <p:sp>
-        <p:nvSpPr>
-          <p:cNvPr id="24" name="TextBox 23"/>
-          <p:cNvSpPr txBox="1"/>
-          <p:nvPr/>
-        </p:nvSpPr>
-        <p:spPr>
-          <a:xfrm>
-            <a:off x="8046720" y="3657600"/>
-            <a:ext cx="1463040" cy="292608"/>
-          </a:xfrm>
-          <a:prstGeom prst="rect">
-            <a:avLst/>
-          </a:prstGeom>
-          <a:noFill/>
-        </p:spPr>
-        <p:txBody>
-          <a:bodyPr wrap="square" lIns="0" rIns="0" tIns="0" bIns="0" anchor="t">
-            <a:spAutoFit/>
-          </a:bodyPr>
-          <a:lstStyle/>
-          <a:p>
-            <a:pPr algn="l">
-              <a:lnSpc>
-                <a:spcPct val="106000"/>
-              </a:lnSpc>
-              <a:spcAft>
-                <a:spcPts val="0"/>
-              </a:spcAft>
-            </a:pPr>
-            <a:r>
-              <a:rPr sz="1300" b="0" i="0">
-                <a:solidFill>
-                  <a:srgbClr val="444444"/>
-                </a:solidFill>
-                <a:latin typeface="Calibri"/>
-              </a:rPr>
-              <a:t>1</a:t>
-            </a:r>
-          </a:p>
-        </p:txBody>
-      </p:sp>
-      <p:sp>
-        <p:nvSpPr>
-          <p:cNvPr id="25" name="TextBox 24"/>
-          <p:cNvSpPr txBox="1"/>
-          <p:nvPr/>
-        </p:nvSpPr>
-        <p:spPr>
-          <a:xfrm>
-            <a:off x="9692640" y="3657600"/>
-            <a:ext cx="2011680" cy="292608"/>
-          </a:xfrm>
-          <a:prstGeom prst="rect">
-            <a:avLst/>
-          </a:prstGeom>
-          <a:noFill/>
-        </p:spPr>
-        <p:txBody>
-          <a:bodyPr wrap="square" lIns="0" rIns="0" tIns="0" bIns="0" anchor="t">
-            <a:spAutoFit/>
-          </a:bodyPr>
-          <a:lstStyle/>
-          <a:p>
-            <a:pPr algn="l">
-              <a:lnSpc>
-                <a:spcPct val="106000"/>
-              </a:lnSpc>
-              <a:spcAft>
-                <a:spcPts val="0"/>
-              </a:spcAft>
-            </a:pPr>
-            <a:r>
-              <a:rPr sz="1300" b="1" i="0">
-                <a:solidFill>
-                  <a:srgbClr val="111111"/>
-                </a:solidFill>
-                <a:latin typeface="Calibri"/>
-              </a:rPr>
-              <a:t>0</a:t>
-            </a:r>
-          </a:p>
-        </p:txBody>
-      </p:sp>
-      <p:sp>
-        <p:nvSpPr>
-          <p:cNvPr id="26" name="TextBox 25"/>
-          <p:cNvSpPr txBox="1"/>
-          <p:nvPr/>
-        </p:nvSpPr>
-        <p:spPr>
-          <a:xfrm>
-            <a:off x="731520" y="4023360"/>
-            <a:ext cx="2468880" cy="292608"/>
-          </a:xfrm>
-          <a:prstGeom prst="rect">
-            <a:avLst/>
-          </a:prstGeom>
-          <a:noFill/>
-        </p:spPr>
-        <p:txBody>
-          <a:bodyPr wrap="square" lIns="0" rIns="0" tIns="0" bIns="0" anchor="t">
-            <a:spAutoFit/>
-          </a:bodyPr>
-          <a:lstStyle/>
-          <a:p>
-            <a:pPr algn="l">
-              <a:lnSpc>
-                <a:spcPct val="106000"/>
-              </a:lnSpc>
-              <a:spcAft>
-                <a:spcPts val="0"/>
-              </a:spcAft>
-            </a:pPr>
-            <a:r>
-              <a:rPr sz="1300" b="0" i="0">
-                <a:solidFill>
-                  <a:srgbClr val="444444"/>
-                </a:solidFill>
-                <a:latin typeface="Calibri"/>
-              </a:rPr>
-              <a:t>RAG</a:t>
-            </a:r>
-          </a:p>
-        </p:txBody>
-      </p:sp>
-      <p:sp>
-        <p:nvSpPr>
-          <p:cNvPr id="27" name="TextBox 26"/>
-          <p:cNvSpPr txBox="1"/>
-          <p:nvPr/>
-        </p:nvSpPr>
-        <p:spPr>
-          <a:xfrm>
-            <a:off x="3291839" y="4023360"/>
-            <a:ext cx="3017520" cy="292608"/>
-          </a:xfrm>
-          <a:prstGeom prst="rect">
-            <a:avLst/>
-          </a:prstGeom>
-          <a:noFill/>
-        </p:spPr>
-        <p:txBody>
-          <a:bodyPr wrap="square" lIns="0" rIns="0" tIns="0" bIns="0" anchor="t">
-            <a:spAutoFit/>
-          </a:bodyPr>
-          <a:lstStyle/>
-          <a:p>
-            <a:pPr algn="l">
-              <a:lnSpc>
-                <a:spcPct val="106000"/>
-              </a:lnSpc>
-              <a:spcAft>
-                <a:spcPts val="0"/>
-              </a:spcAft>
-            </a:pPr>
-            <a:r>
-              <a:rPr sz="1300" b="0" i="0">
-                <a:solidFill>
-                  <a:srgbClr val="444444"/>
-                </a:solidFill>
-                <a:latin typeface="Calibri"/>
-              </a:rPr>
-              <a:t>reasoning-corruption</a:t>
-            </a:r>
-          </a:p>
-        </p:txBody>
-      </p:sp>
-      <p:sp>
-        <p:nvSpPr>
-          <p:cNvPr id="28" name="TextBox 27"/>
-          <p:cNvSpPr txBox="1"/>
-          <p:nvPr/>
-        </p:nvSpPr>
-        <p:spPr>
-          <a:xfrm>
-            <a:off x="6492240" y="4023360"/>
-            <a:ext cx="1371600" cy="292608"/>
-          </a:xfrm>
-          <a:prstGeom prst="rect">
-            <a:avLst/>
-          </a:prstGeom>
-          <a:noFill/>
-        </p:spPr>
-        <p:txBody>
-          <a:bodyPr wrap="square" lIns="0" rIns="0" tIns="0" bIns="0" anchor="t">
-            <a:spAutoFit/>
-          </a:bodyPr>
-          <a:lstStyle/>
-          <a:p>
-            <a:pPr algn="l">
-              <a:lnSpc>
-                <a:spcPct val="106000"/>
-              </a:lnSpc>
-              <a:spcAft>
-                <a:spcPts val="0"/>
-              </a:spcAft>
-            </a:pPr>
-            <a:r>
-              <a:rPr sz="1300" b="0" i="0">
-                <a:solidFill>
-                  <a:srgbClr val="444444"/>
-                </a:solidFill>
-                <a:latin typeface="Calibri"/>
-              </a:rPr>
-              <a:t>2</a:t>
-            </a:r>
-          </a:p>
-        </p:txBody>
-      </p:sp>
-      <p:sp>
-        <p:nvSpPr>
-          <p:cNvPr id="29" name="TextBox 28"/>
-          <p:cNvSpPr txBox="1"/>
-          <p:nvPr/>
-        </p:nvSpPr>
-        <p:spPr>
-          <a:xfrm>
-            <a:off x="8046720" y="4023360"/>
-            <a:ext cx="1463040" cy="292608"/>
-          </a:xfrm>
-          <a:prstGeom prst="rect">
-            <a:avLst/>
-          </a:prstGeom>
-          <a:noFill/>
-        </p:spPr>
-        <p:txBody>
-          <a:bodyPr wrap="square" lIns="0" rIns="0" tIns="0" bIns="0" anchor="t">
-            <a:spAutoFit/>
-          </a:bodyPr>
-          <a:lstStyle/>
-          <a:p>
-            <a:pPr algn="l">
-              <a:lnSpc>
-                <a:spcPct val="106000"/>
-              </a:lnSpc>
-              <a:spcAft>
-                <a:spcPts val="0"/>
-              </a:spcAft>
-            </a:pPr>
-            <a:r>
-              <a:rPr sz="1300" b="0" i="0">
-                <a:solidFill>
-                  <a:srgbClr val="444444"/>
-                </a:solidFill>
-                <a:latin typeface="Calibri"/>
-              </a:rPr>
-              <a:t>17</a:t>
-            </a:r>
-          </a:p>
-        </p:txBody>
-      </p:sp>
-      <p:sp>
-        <p:nvSpPr>
-          <p:cNvPr id="30" name="TextBox 29"/>
-          <p:cNvSpPr txBox="1"/>
-          <p:nvPr/>
-        </p:nvSpPr>
-        <p:spPr>
-          <a:xfrm>
-            <a:off x="9692640" y="4023360"/>
-            <a:ext cx="2011680" cy="292608"/>
-          </a:xfrm>
-          <a:prstGeom prst="rect">
-            <a:avLst/>
-          </a:prstGeom>
-          <a:noFill/>
-        </p:spPr>
-        <p:txBody>
-          <a:bodyPr wrap="square" lIns="0" rIns="0" tIns="0" bIns="0" anchor="t">
-            <a:spAutoFit/>
-          </a:bodyPr>
-          <a:lstStyle/>
-          <a:p>
-            <a:pPr algn="l">
-              <a:lnSpc>
-                <a:spcPct val="106000"/>
-              </a:lnSpc>
-              <a:spcAft>
-                <a:spcPts val="0"/>
-              </a:spcAft>
-            </a:pPr>
-            <a:r>
-              <a:rPr sz="1300" b="1" i="0">
-                <a:solidFill>
-                  <a:srgbClr val="111111"/>
-                </a:solidFill>
-                <a:latin typeface="Calibri"/>
-              </a:rPr>
-              <a:t>0</a:t>
-            </a:r>
-          </a:p>
-        </p:txBody>
-      </p:sp>
-      <p:sp>
-        <p:nvSpPr>
-          <p:cNvPr id="31" name="TextBox 30"/>
-          <p:cNvSpPr txBox="1"/>
-          <p:nvPr/>
-        </p:nvSpPr>
-        <p:spPr>
-          <a:xfrm>
-            <a:off x="731520" y="4389120"/>
-            <a:ext cx="2468880" cy="292608"/>
-          </a:xfrm>
-          <a:prstGeom prst="rect">
-            <a:avLst/>
-          </a:prstGeom>
-          <a:noFill/>
-        </p:spPr>
-        <p:txBody>
-          <a:bodyPr wrap="square" lIns="0" rIns="0" tIns="0" bIns="0" anchor="t">
-            <a:spAutoFit/>
-          </a:bodyPr>
-          <a:lstStyle/>
-          <a:p>
-            <a:pPr algn="l">
-              <a:lnSpc>
-                <a:spcPct val="106000"/>
-              </a:lnSpc>
-              <a:spcAft>
-                <a:spcPts val="0"/>
-              </a:spcAft>
-            </a:pPr>
-            <a:r>
-              <a:rPr sz="1300" b="0" i="0">
-                <a:solidFill>
-                  <a:srgbClr val="444444"/>
-                </a:solidFill>
-                <a:latin typeface="Calibri"/>
-              </a:rPr>
-              <a:t>direct-input</a:t>
-            </a:r>
-          </a:p>
-        </p:txBody>
-      </p:sp>
-      <p:sp>
-        <p:nvSpPr>
-          <p:cNvPr id="32" name="TextBox 31"/>
-          <p:cNvSpPr txBox="1"/>
-          <p:nvPr/>
-        </p:nvSpPr>
-        <p:spPr>
-          <a:xfrm>
-            <a:off x="3291839" y="4389120"/>
-            <a:ext cx="3017520" cy="292608"/>
-          </a:xfrm>
-          <a:prstGeom prst="rect">
-            <a:avLst/>
-          </a:prstGeom>
-          <a:noFill/>
-        </p:spPr>
-        <p:txBody>
-          <a:bodyPr wrap="square" lIns="0" rIns="0" tIns="0" bIns="0" anchor="t">
-            <a:spAutoFit/>
-          </a:bodyPr>
-          <a:lstStyle/>
-          <a:p>
-            <a:pPr algn="l">
-              <a:lnSpc>
-                <a:spcPct val="106000"/>
-              </a:lnSpc>
-              <a:spcAft>
-                <a:spcPts val="0"/>
-              </a:spcAft>
-            </a:pPr>
-            <a:r>
-              <a:rPr sz="1300" b="0" i="0">
-                <a:solidFill>
-                  <a:srgbClr val="444444"/>
-                </a:solidFill>
-                <a:latin typeface="Calibri"/>
-              </a:rPr>
-              <a:t>goal-hijack</a:t>
-            </a:r>
-          </a:p>
-        </p:txBody>
-      </p:sp>
-      <p:sp>
-        <p:nvSpPr>
-          <p:cNvPr id="33" name="TextBox 32"/>
-          <p:cNvSpPr txBox="1"/>
-          <p:nvPr/>
-        </p:nvSpPr>
-        <p:spPr>
-          <a:xfrm>
-            <a:off x="6492240" y="4389120"/>
-            <a:ext cx="1371600" cy="292608"/>
-          </a:xfrm>
-          <a:prstGeom prst="rect">
-            <a:avLst/>
-          </a:prstGeom>
-          <a:noFill/>
-        </p:spPr>
-        <p:txBody>
-          <a:bodyPr wrap="square" lIns="0" rIns="0" tIns="0" bIns="0" anchor="t">
-            <a:spAutoFit/>
-          </a:bodyPr>
-          <a:lstStyle/>
-          <a:p>
-            <a:pPr algn="l">
-              <a:lnSpc>
-                <a:spcPct val="106000"/>
-              </a:lnSpc>
-              <a:spcAft>
-                <a:spcPts val="0"/>
-              </a:spcAft>
-            </a:pPr>
-            <a:r>
-              <a:rPr sz="1300" b="0" i="0">
-                <a:solidFill>
-                  <a:srgbClr val="444444"/>
-                </a:solidFill>
-                <a:latin typeface="Calibri"/>
-              </a:rPr>
-              <a:t>27</a:t>
-            </a:r>
-          </a:p>
-        </p:txBody>
-      </p:sp>
-      <p:sp>
-        <p:nvSpPr>
-          <p:cNvPr id="34" name="TextBox 33"/>
-          <p:cNvSpPr txBox="1"/>
-          <p:nvPr/>
-        </p:nvSpPr>
-        <p:spPr>
-          <a:xfrm>
-            <a:off x="8046720" y="4389120"/>
-            <a:ext cx="1463040" cy="292608"/>
-          </a:xfrm>
-          <a:prstGeom prst="rect">
-            <a:avLst/>
-          </a:prstGeom>
-          <a:noFill/>
-        </p:spPr>
-        <p:txBody>
-          <a:bodyPr wrap="square" lIns="0" rIns="0" tIns="0" bIns="0" anchor="t">
-            <a:spAutoFit/>
-          </a:bodyPr>
-          <a:lstStyle/>
-          <a:p>
-            <a:pPr algn="l">
-              <a:lnSpc>
-                <a:spcPct val="106000"/>
-              </a:lnSpc>
-              <a:spcAft>
-                <a:spcPts val="0"/>
-              </a:spcAft>
-            </a:pPr>
-            <a:r>
-              <a:rPr sz="1300" b="0" i="0">
-                <a:solidFill>
-                  <a:srgbClr val="444444"/>
-                </a:solidFill>
-                <a:latin typeface="Calibri"/>
-              </a:rPr>
-              <a:t>1</a:t>
-            </a:r>
-          </a:p>
-        </p:txBody>
-      </p:sp>
-      <p:sp>
-        <p:nvSpPr>
-          <p:cNvPr id="35" name="TextBox 34"/>
-          <p:cNvSpPr txBox="1"/>
-          <p:nvPr/>
-        </p:nvSpPr>
-        <p:spPr>
-          <a:xfrm>
-            <a:off x="9692640" y="4389120"/>
-            <a:ext cx="2011680" cy="292608"/>
-          </a:xfrm>
-          <a:prstGeom prst="rect">
-            <a:avLst/>
-          </a:prstGeom>
-          <a:noFill/>
-        </p:spPr>
-        <p:txBody>
-          <a:bodyPr wrap="square" lIns="0" rIns="0" tIns="0" bIns="0" anchor="t">
-            <a:spAutoFit/>
-          </a:bodyPr>
-          <a:lstStyle/>
-          <a:p>
-            <a:pPr algn="l">
-              <a:lnSpc>
-                <a:spcPct val="106000"/>
-              </a:lnSpc>
-              <a:spcAft>
-                <a:spcPts val="0"/>
-              </a:spcAft>
-            </a:pPr>
-            <a:r>
-              <a:rPr sz="1300" b="1" i="0">
-                <a:solidFill>
-                  <a:srgbClr val="111111"/>
-                </a:solidFill>
-                <a:latin typeface="Calibri"/>
-              </a:rPr>
-              <a:t>0</a:t>
-            </a:r>
-          </a:p>
-        </p:txBody>
-      </p:sp>
-      <p:sp>
-        <p:nvSpPr>
-          <p:cNvPr id="36" name="TextBox 35"/>
-          <p:cNvSpPr txBox="1"/>
-          <p:nvPr/>
-        </p:nvSpPr>
-        <p:spPr>
-          <a:xfrm>
-            <a:off x="731520" y="4754880"/>
-            <a:ext cx="2468880" cy="292608"/>
-          </a:xfrm>
-          <a:prstGeom prst="rect">
-            <a:avLst/>
-          </a:prstGeom>
-          <a:noFill/>
-        </p:spPr>
-        <p:txBody>
-          <a:bodyPr wrap="square" lIns="0" rIns="0" tIns="0" bIns="0" anchor="t">
-            <a:spAutoFit/>
-          </a:bodyPr>
-          <a:lstStyle/>
-          <a:p>
-            <a:pPr algn="l">
-              <a:lnSpc>
-                <a:spcPct val="106000"/>
-              </a:lnSpc>
-              <a:spcAft>
-                <a:spcPts val="0"/>
-              </a:spcAft>
-            </a:pPr>
-            <a:r>
-              <a:rPr sz="1300" b="0" i="0">
-                <a:solidFill>
-                  <a:srgbClr val="444444"/>
-                </a:solidFill>
-                <a:latin typeface="Calibri"/>
-              </a:rPr>
-              <a:t>direct-input</a:t>
-            </a:r>
-          </a:p>
-        </p:txBody>
-      </p:sp>
-      <p:sp>
-        <p:nvSpPr>
-          <p:cNvPr id="37" name="TextBox 36"/>
-          <p:cNvSpPr txBox="1"/>
-          <p:nvPr/>
-        </p:nvSpPr>
-        <p:spPr>
-          <a:xfrm>
-            <a:off x="3291839" y="4754880"/>
-            <a:ext cx="3017520" cy="292608"/>
-          </a:xfrm>
-          <a:prstGeom prst="rect">
-            <a:avLst/>
-          </a:prstGeom>
-          <a:noFill/>
-        </p:spPr>
-        <p:txBody>
-          <a:bodyPr wrap="square" lIns="0" rIns="0" tIns="0" bIns="0" anchor="t">
-            <a:spAutoFit/>
-          </a:bodyPr>
-          <a:lstStyle/>
-          <a:p>
-            <a:pPr algn="l">
-              <a:lnSpc>
-                <a:spcPct val="106000"/>
-              </a:lnSpc>
-              <a:spcAft>
-                <a:spcPts val="0"/>
-              </a:spcAft>
-            </a:pPr>
-            <a:r>
-              <a:rPr sz="1300" b="0" i="0">
-                <a:solidFill>
-                  <a:srgbClr val="444444"/>
-                </a:solidFill>
-                <a:latin typeface="Calibri"/>
-              </a:rPr>
-              <a:t>silent-corruption</a:t>
-            </a:r>
-          </a:p>
-        </p:txBody>
-      </p:sp>
-      <p:sp>
-        <p:nvSpPr>
-          <p:cNvPr id="38" name="TextBox 37"/>
-          <p:cNvSpPr txBox="1"/>
-          <p:nvPr/>
-        </p:nvSpPr>
-        <p:spPr>
-          <a:xfrm>
-            <a:off x="6492240" y="4754880"/>
-            <a:ext cx="1371600" cy="292608"/>
-          </a:xfrm>
-          <a:prstGeom prst="rect">
-            <a:avLst/>
-          </a:prstGeom>
-          <a:noFill/>
-        </p:spPr>
-        <p:txBody>
-          <a:bodyPr wrap="square" lIns="0" rIns="0" tIns="0" bIns="0" anchor="t">
-            <a:spAutoFit/>
-          </a:bodyPr>
-          <a:lstStyle/>
-          <a:p>
-            <a:pPr algn="l">
-              <a:lnSpc>
-                <a:spcPct val="106000"/>
-              </a:lnSpc>
-              <a:spcAft>
-                <a:spcPts val="0"/>
-              </a:spcAft>
-            </a:pPr>
-            <a:r>
-              <a:rPr sz="1300" b="0" i="0">
-                <a:solidFill>
-                  <a:srgbClr val="444444"/>
-                </a:solidFill>
-                <a:latin typeface="Calibri"/>
-              </a:rPr>
-              <a:t>1</a:t>
-            </a:r>
-          </a:p>
-        </p:txBody>
-      </p:sp>
-      <p:sp>
-        <p:nvSpPr>
-          <p:cNvPr id="39" name="TextBox 38"/>
-          <p:cNvSpPr txBox="1"/>
-          <p:nvPr/>
-        </p:nvSpPr>
-        <p:spPr>
-          <a:xfrm>
-            <a:off x="8046720" y="4754880"/>
-            <a:ext cx="1463040" cy="292608"/>
-          </a:xfrm>
-          <a:prstGeom prst="rect">
-            <a:avLst/>
-          </a:prstGeom>
-          <a:noFill/>
-        </p:spPr>
-        <p:txBody>
-          <a:bodyPr wrap="square" lIns="0" rIns="0" tIns="0" bIns="0" anchor="t">
-            <a:spAutoFit/>
-          </a:bodyPr>
-          <a:lstStyle/>
-          <a:p>
-            <a:pPr algn="l">
-              <a:lnSpc>
-                <a:spcPct val="106000"/>
-              </a:lnSpc>
-              <a:spcAft>
-                <a:spcPts val="0"/>
-              </a:spcAft>
-            </a:pPr>
-            <a:r>
-              <a:rPr sz="1300" b="0" i="0">
-                <a:solidFill>
-                  <a:srgbClr val="444444"/>
-                </a:solidFill>
-                <a:latin typeface="Calibri"/>
-              </a:rPr>
-              <a:t>11</a:t>
-            </a:r>
-          </a:p>
-        </p:txBody>
-      </p:sp>
-      <p:sp>
-        <p:nvSpPr>
-          <p:cNvPr id="40" name="TextBox 39"/>
-          <p:cNvSpPr txBox="1"/>
-          <p:nvPr/>
-        </p:nvSpPr>
-        <p:spPr>
-          <a:xfrm>
-            <a:off x="9692640" y="4754880"/>
-            <a:ext cx="2011680" cy="292608"/>
-          </a:xfrm>
-          <a:prstGeom prst="rect">
-            <a:avLst/>
-          </a:prstGeom>
-          <a:noFill/>
-        </p:spPr>
-        <p:txBody>
-          <a:bodyPr wrap="square" lIns="0" rIns="0" tIns="0" bIns="0" anchor="t">
-            <a:spAutoFit/>
-          </a:bodyPr>
-          <a:lstStyle/>
-          <a:p>
-            <a:pPr algn="l">
-              <a:lnSpc>
-                <a:spcPct val="106000"/>
-              </a:lnSpc>
-              <a:spcAft>
-                <a:spcPts val="0"/>
-              </a:spcAft>
-            </a:pPr>
-            <a:r>
-              <a:rPr sz="1300" b="1" i="0">
-                <a:solidFill>
-                  <a:srgbClr val="111111"/>
-                </a:solidFill>
-                <a:latin typeface="Calibri"/>
-              </a:rPr>
-              <a:t>0</a:t>
-            </a:r>
-          </a:p>
-        </p:txBody>
-      </p:sp>
-      <p:sp>
-        <p:nvSpPr>
-          <p:cNvPr id="41" name="TextBox 40"/>
-          <p:cNvSpPr txBox="1"/>
-          <p:nvPr/>
-        </p:nvSpPr>
-        <p:spPr>
-          <a:xfrm>
-            <a:off x="731520" y="5120640"/>
-            <a:ext cx="2468880" cy="292608"/>
-          </a:xfrm>
-          <a:prstGeom prst="rect">
-            <a:avLst/>
-          </a:prstGeom>
-          <a:noFill/>
-        </p:spPr>
-        <p:txBody>
-          <a:bodyPr wrap="square" lIns="0" rIns="0" tIns="0" bIns="0" anchor="t">
-            <a:spAutoFit/>
-          </a:bodyPr>
-          <a:lstStyle/>
-          <a:p>
-            <a:pPr algn="l">
-              <a:lnSpc>
-                <a:spcPct val="106000"/>
-              </a:lnSpc>
-              <a:spcAft>
-                <a:spcPts val="0"/>
-              </a:spcAft>
-            </a:pPr>
-            <a:r>
-              <a:rPr sz="1300" b="0" i="0">
-                <a:solidFill>
-                  <a:srgbClr val="444444"/>
-                </a:solidFill>
-                <a:latin typeface="Calibri"/>
-              </a:rPr>
-              <a:t>memory</a:t>
-            </a:r>
-          </a:p>
-        </p:txBody>
-      </p:sp>
-      <p:sp>
-        <p:nvSpPr>
-          <p:cNvPr id="42" name="TextBox 41"/>
-          <p:cNvSpPr txBox="1"/>
-          <p:nvPr/>
-        </p:nvSpPr>
-        <p:spPr>
-          <a:xfrm>
-            <a:off x="3291839" y="5120640"/>
-            <a:ext cx="3017520" cy="292608"/>
-          </a:xfrm>
-          <a:prstGeom prst="rect">
-            <a:avLst/>
-          </a:prstGeom>
-          <a:noFill/>
-        </p:spPr>
-        <p:txBody>
-          <a:bodyPr wrap="square" lIns="0" rIns="0" tIns="0" bIns="0" anchor="t">
-            <a:spAutoFit/>
-          </a:bodyPr>
-          <a:lstStyle/>
-          <a:p>
-            <a:pPr algn="l">
-              <a:lnSpc>
-                <a:spcPct val="106000"/>
-              </a:lnSpc>
-              <a:spcAft>
-                <a:spcPts val="0"/>
-              </a:spcAft>
-            </a:pPr>
-            <a:r>
-              <a:rPr sz="1300" b="0" i="0">
-                <a:solidFill>
-                  <a:srgbClr val="444444"/>
-                </a:solidFill>
-                <a:latin typeface="Calibri"/>
-              </a:rPr>
-              <a:t>persistence-backdoor</a:t>
-            </a:r>
-          </a:p>
-        </p:txBody>
-      </p:sp>
-      <p:sp>
-        <p:nvSpPr>
-          <p:cNvPr id="43" name="TextBox 42"/>
-          <p:cNvSpPr txBox="1"/>
-          <p:nvPr/>
-        </p:nvSpPr>
-        <p:spPr>
-          <a:xfrm>
-            <a:off x="6492240" y="5120640"/>
-            <a:ext cx="1371600" cy="292608"/>
-          </a:xfrm>
-          <a:prstGeom prst="rect">
-            <a:avLst/>
-          </a:prstGeom>
-          <a:noFill/>
-        </p:spPr>
-        <p:txBody>
-          <a:bodyPr wrap="square" lIns="0" rIns="0" tIns="0" bIns="0" anchor="t">
-            <a:spAutoFit/>
-          </a:bodyPr>
-          <a:lstStyle/>
-          <a:p>
-            <a:pPr algn="l">
-              <a:lnSpc>
-                <a:spcPct val="106000"/>
-              </a:lnSpc>
-              <a:spcAft>
-                <a:spcPts val="0"/>
-              </a:spcAft>
-            </a:pPr>
-            <a:r>
-              <a:rPr sz="1300" b="0" i="0">
-                <a:solidFill>
-                  <a:srgbClr val="444444"/>
-                </a:solidFill>
-                <a:latin typeface="Calibri"/>
-              </a:rPr>
-              <a:t>7</a:t>
-            </a:r>
-          </a:p>
-        </p:txBody>
-      </p:sp>
-      <p:sp>
-        <p:nvSpPr>
-          <p:cNvPr id="44" name="TextBox 43"/>
-          <p:cNvSpPr txBox="1"/>
-          <p:nvPr/>
-        </p:nvSpPr>
-        <p:spPr>
-          <a:xfrm>
-            <a:off x="8046720" y="5120640"/>
-            <a:ext cx="1463040" cy="292608"/>
-          </a:xfrm>
-          <a:prstGeom prst="rect">
-            <a:avLst/>
-          </a:prstGeom>
-          <a:noFill/>
-        </p:spPr>
-        <p:txBody>
-          <a:bodyPr wrap="square" lIns="0" rIns="0" tIns="0" bIns="0" anchor="t">
-            <a:spAutoFit/>
-          </a:bodyPr>
-          <a:lstStyle/>
-          <a:p>
-            <a:pPr algn="l">
-              <a:lnSpc>
-                <a:spcPct val="106000"/>
-              </a:lnSpc>
-              <a:spcAft>
-                <a:spcPts val="0"/>
-              </a:spcAft>
-            </a:pPr>
-            <a:r>
-              <a:rPr sz="1300" b="0" i="0">
-                <a:solidFill>
-                  <a:srgbClr val="444444"/>
-                </a:solidFill>
-                <a:latin typeface="Calibri"/>
-              </a:rPr>
-              <a:t>1</a:t>
-            </a:r>
-          </a:p>
-        </p:txBody>
-      </p:sp>
-      <p:sp>
-        <p:nvSpPr>
-          <p:cNvPr id="45" name="TextBox 44"/>
-          <p:cNvSpPr txBox="1"/>
-          <p:nvPr/>
-        </p:nvSpPr>
-        <p:spPr>
-          <a:xfrm>
-            <a:off x="9692640" y="5120640"/>
-            <a:ext cx="2011680" cy="292608"/>
-          </a:xfrm>
-          <a:prstGeom prst="rect">
-            <a:avLst/>
-          </a:prstGeom>
-          <a:noFill/>
-        </p:spPr>
-        <p:txBody>
-          <a:bodyPr wrap="square" lIns="0" rIns="0" tIns="0" bIns="0" anchor="t">
-            <a:spAutoFit/>
-          </a:bodyPr>
-          <a:lstStyle/>
-          <a:p>
-            <a:pPr algn="l">
-              <a:lnSpc>
-                <a:spcPct val="106000"/>
-              </a:lnSpc>
-              <a:spcAft>
-                <a:spcPts val="0"/>
-              </a:spcAft>
-            </a:pPr>
-            <a:r>
-              <a:rPr sz="1300" b="1" i="0">
-                <a:solidFill>
-                  <a:srgbClr val="111111"/>
-                </a:solidFill>
-                <a:latin typeface="Calibri"/>
-              </a:rPr>
-              <a:t>0</a:t>
-            </a:r>
-          </a:p>
-        </p:txBody>
-      </p:sp>
-      <p:sp>
-        <p:nvSpPr>
-          <p:cNvPr id="46" name="TextBox 45"/>
-          <p:cNvSpPr txBox="1"/>
-          <p:nvPr/>
-        </p:nvSpPr>
-        <p:spPr>
-          <a:xfrm>
-            <a:off x="731520" y="5504688"/>
-            <a:ext cx="10725912" cy="896112"/>
-          </a:xfrm>
-          <a:prstGeom prst="rect">
-            <a:avLst/>
-          </a:prstGeom>
-          <a:noFill/>
-        </p:spPr>
-        <p:txBody>
-          <a:bodyPr wrap="square" lIns="0" rIns="0" tIns="0" bIns="0" anchor="t">
-            <a:spAutoFit/>
-          </a:bodyPr>
-          <a:lstStyle/>
-          <a:p>
-            <a:pPr algn="l">
-              <a:lnSpc>
-                <a:spcPct val="110000"/>
-              </a:lnSpc>
-              <a:spcAft>
-                <a:spcPts val="600"/>
-              </a:spcAft>
-            </a:pPr>
-            <a:r>
-              <a:rPr sz="1350" b="1" i="0">
-                <a:solidFill>
-                  <a:srgbClr val="111111"/>
-                </a:solidFill>
-                <a:latin typeface="Calibri"/>
-              </a:rPr>
-              <a:t>Every row is zero. Not one of these pairs has been tested by anybody.</a:t>
-            </a:r>
-          </a:p>
-          <a:p>
-            <a:pPr>
-              <a:lnSpc>
-                <a:spcPct val="110000"/>
-              </a:lnSpc>
-              <a:spcAft>
-                <a:spcPts val="600"/>
-              </a:spcAft>
-            </a:pPr>
-            <a:r>
-              <a:rPr sz="1350" b="0" i="0">
-                <a:solidFill>
-                  <a:srgbClr val="444444"/>
-                </a:solidFill>
-                <a:latin typeface="Calibri"/>
-              </a:rPr>
-              <a:t>These cells are not ignored. tool-output and goal-hijack alone holds 169 tested pairs. But each one is a security defense against a security attack, or an accident defense against an accident. Nothing crosses.</a:t>
-            </a:r>
-          </a:p>
-          <a:p>
-            <a:pPr>
-              <a:lnSpc>
-                <a:spcPct val="110000"/>
-              </a:lnSpc>
-              <a:spcAft>
-                <a:spcPts val="600"/>
-              </a:spcAft>
-            </a:pPr>
-            <a:r>
-              <a:rPr sz="1350" b="0" i="0">
-                <a:solidFill>
-                  <a:srgbClr val="444444"/>
-                </a:solidFill>
-                <a:latin typeface="Calibri"/>
-              </a:rPr>
-              <a:t>The RAG row is 3 attacks against 42 defenses. 126 possible tests. None run.</a:t>
+              <a:t>At this point the survey had taken us as far as a survey can go. It can show that a test was never run. It cannot say what the test would have found.</a:t>
             </a:r>
           </a:p>
         </p:txBody>
@@ -5287,7 +3677,7 @@
                 </a:solidFill>
                 <a:latin typeface="Calibri"/>
               </a:rPr>
-              <a:t>WHAT WE CAN REBUILD</a:t>
+              <a:t>THE GAP, IN DETAIL</a:t>
             </a:r>
           </a:p>
         </p:txBody>
@@ -5329,7 +3719,7 @@
                 </a:solidFill>
                 <a:latin typeface="Cambria"/>
               </a:rPr>
-              <a:t>Released code is not the same as working code</a:t>
+              <a:t>Where an untested pair is waiting</a:t>
             </a:r>
           </a:p>
         </p:txBody>
@@ -5385,7 +3775,7 @@
         <p:spPr>
           <a:xfrm>
             <a:off x="731520" y="1920240"/>
-            <a:ext cx="10725912" cy="365760"/>
+            <a:ext cx="10725912" cy="411480"/>
           </a:xfrm>
           <a:prstGeom prst="rect">
             <a:avLst/>
@@ -5413,7 +3803,7 @@
                 </a:solidFill>
                 <a:latin typeface="Calibri"/>
               </a:rPr>
-              <a:t>We only report a number if we can run the authors' own code. So the first question is which code runs at all.</a:t>
+              <a:t>Each row is one route and one failure. The attacks are the deliberate ones. The defenses are the ones built for the same failure happening by accident.</a:t>
             </a:r>
           </a:p>
         </p:txBody>
@@ -5426,50 +3816,653 @@
         </p:nvSpPr>
         <p:spPr>
           <a:xfrm>
-            <a:off x="731520" y="2432304"/>
-            <a:ext cx="4937760" cy="292608"/>
-          </a:xfrm>
-          <a:prstGeom prst="rect">
-            <a:avLst/>
-          </a:prstGeom>
-          <a:noFill/>
-        </p:spPr>
-        <p:txBody>
-          <a:bodyPr wrap="square" lIns="0" rIns="0" tIns="0" bIns="0" anchor="t">
-            <a:spAutoFit/>
-          </a:bodyPr>
-          <a:lstStyle/>
-          <a:p>
-            <a:pPr algn="l">
-              <a:lnSpc>
-                <a:spcPct val="106000"/>
-              </a:lnSpc>
-              <a:spcAft>
-                <a:spcPts val="0"/>
-              </a:spcAft>
-            </a:pPr>
-            <a:r>
-              <a:rPr sz="1500" b="1" i="0">
+            <a:off x="731520" y="2414016"/>
+            <a:ext cx="2468880" cy="457200"/>
+          </a:xfrm>
+          <a:prstGeom prst="rect">
+            <a:avLst/>
+          </a:prstGeom>
+          <a:noFill/>
+        </p:spPr>
+        <p:txBody>
+          <a:bodyPr wrap="square" lIns="0" rIns="0" tIns="0" bIns="0" anchor="t">
+            <a:spAutoFit/>
+          </a:bodyPr>
+          <a:lstStyle/>
+          <a:p>
+            <a:pPr algn="l">
+              <a:lnSpc>
+                <a:spcPct val="110000"/>
+              </a:lnSpc>
+              <a:spcAft>
+                <a:spcPts val="0"/>
+              </a:spcAft>
+            </a:pPr>
+            <a:r>
+              <a:rPr sz="1150" b="1" i="0">
+                <a:solidFill>
+                  <a:srgbClr val="777777"/>
+                </a:solidFill>
+                <a:latin typeface="Calibri"/>
+              </a:rPr>
+              <a:t>Route in</a:t>
+            </a:r>
+          </a:p>
+        </p:txBody>
+      </p:sp>
+      <p:sp>
+        <p:nvSpPr>
+          <p:cNvPr id="7" name="TextBox 6"/>
+          <p:cNvSpPr txBox="1"/>
+          <p:nvPr/>
+        </p:nvSpPr>
+        <p:spPr>
+          <a:xfrm>
+            <a:off x="3291839" y="2414016"/>
+            <a:ext cx="3017520" cy="457200"/>
+          </a:xfrm>
+          <a:prstGeom prst="rect">
+            <a:avLst/>
+          </a:prstGeom>
+          <a:noFill/>
+        </p:spPr>
+        <p:txBody>
+          <a:bodyPr wrap="square" lIns="0" rIns="0" tIns="0" bIns="0" anchor="t">
+            <a:spAutoFit/>
+          </a:bodyPr>
+          <a:lstStyle/>
+          <a:p>
+            <a:pPr algn="l">
+              <a:lnSpc>
+                <a:spcPct val="110000"/>
+              </a:lnSpc>
+              <a:spcAft>
+                <a:spcPts val="0"/>
+              </a:spcAft>
+            </a:pPr>
+            <a:r>
+              <a:rPr sz="1150" b="1" i="0">
+                <a:solidFill>
+                  <a:srgbClr val="777777"/>
+                </a:solidFill>
+                <a:latin typeface="Calibri"/>
+              </a:rPr>
+              <a:t>What goes wrong</a:t>
+            </a:r>
+          </a:p>
+        </p:txBody>
+      </p:sp>
+      <p:sp>
+        <p:nvSpPr>
+          <p:cNvPr id="8" name="TextBox 7"/>
+          <p:cNvSpPr txBox="1"/>
+          <p:nvPr/>
+        </p:nvSpPr>
+        <p:spPr>
+          <a:xfrm>
+            <a:off x="6492240" y="2414016"/>
+            <a:ext cx="1371600" cy="457200"/>
+          </a:xfrm>
+          <a:prstGeom prst="rect">
+            <a:avLst/>
+          </a:prstGeom>
+          <a:noFill/>
+        </p:spPr>
+        <p:txBody>
+          <a:bodyPr wrap="square" lIns="0" rIns="0" tIns="0" bIns="0" anchor="t">
+            <a:spAutoFit/>
+          </a:bodyPr>
+          <a:lstStyle/>
+          <a:p>
+            <a:pPr algn="l">
+              <a:lnSpc>
+                <a:spcPct val="110000"/>
+              </a:lnSpc>
+              <a:spcAft>
+                <a:spcPts val="0"/>
+              </a:spcAft>
+            </a:pPr>
+            <a:r>
+              <a:rPr sz="1150" b="1" i="0">
+                <a:solidFill>
+                  <a:srgbClr val="777777"/>
+                </a:solidFill>
+                <a:latin typeface="Calibri"/>
+              </a:rPr>
+              <a:t>Deliberate</a:t>
+            </a:r>
+          </a:p>
+          <a:p>
+            <a:pPr>
+              <a:lnSpc>
+                <a:spcPct val="110000"/>
+              </a:lnSpc>
+              <a:spcAft>
+                <a:spcPts val="0"/>
+              </a:spcAft>
+            </a:pPr>
+            <a:r>
+              <a:rPr sz="1150" b="1" i="0">
+                <a:solidFill>
+                  <a:srgbClr val="777777"/>
+                </a:solidFill>
+                <a:latin typeface="Calibri"/>
+              </a:rPr>
+              <a:t>attacks</a:t>
+            </a:r>
+          </a:p>
+        </p:txBody>
+      </p:sp>
+      <p:sp>
+        <p:nvSpPr>
+          <p:cNvPr id="9" name="TextBox 8"/>
+          <p:cNvSpPr txBox="1"/>
+          <p:nvPr/>
+        </p:nvSpPr>
+        <p:spPr>
+          <a:xfrm>
+            <a:off x="8046720" y="2414016"/>
+            <a:ext cx="1463040" cy="457200"/>
+          </a:xfrm>
+          <a:prstGeom prst="rect">
+            <a:avLst/>
+          </a:prstGeom>
+          <a:noFill/>
+        </p:spPr>
+        <p:txBody>
+          <a:bodyPr wrap="square" lIns="0" rIns="0" tIns="0" bIns="0" anchor="t">
+            <a:spAutoFit/>
+          </a:bodyPr>
+          <a:lstStyle/>
+          <a:p>
+            <a:pPr algn="l">
+              <a:lnSpc>
+                <a:spcPct val="110000"/>
+              </a:lnSpc>
+              <a:spcAft>
+                <a:spcPts val="0"/>
+              </a:spcAft>
+            </a:pPr>
+            <a:r>
+              <a:rPr sz="1150" b="1" i="0">
+                <a:solidFill>
+                  <a:srgbClr val="777777"/>
+                </a:solidFill>
+                <a:latin typeface="Calibri"/>
+              </a:rPr>
+              <a:t>Accidental</a:t>
+            </a:r>
+          </a:p>
+          <a:p>
+            <a:pPr>
+              <a:lnSpc>
+                <a:spcPct val="110000"/>
+              </a:lnSpc>
+              <a:spcAft>
+                <a:spcPts val="0"/>
+              </a:spcAft>
+            </a:pPr>
+            <a:r>
+              <a:rPr sz="1150" b="1" i="0">
+                <a:solidFill>
+                  <a:srgbClr val="777777"/>
+                </a:solidFill>
+                <a:latin typeface="Calibri"/>
+              </a:rPr>
+              <a:t>defenses</a:t>
+            </a:r>
+          </a:p>
+        </p:txBody>
+      </p:sp>
+      <p:sp>
+        <p:nvSpPr>
+          <p:cNvPr id="10" name="TextBox 9"/>
+          <p:cNvSpPr txBox="1"/>
+          <p:nvPr/>
+        </p:nvSpPr>
+        <p:spPr>
+          <a:xfrm>
+            <a:off x="9692640" y="2414016"/>
+            <a:ext cx="2011680" cy="457200"/>
+          </a:xfrm>
+          <a:prstGeom prst="rect">
+            <a:avLst/>
+          </a:prstGeom>
+          <a:noFill/>
+        </p:spPr>
+        <p:txBody>
+          <a:bodyPr wrap="square" lIns="0" rIns="0" tIns="0" bIns="0" anchor="t">
+            <a:spAutoFit/>
+          </a:bodyPr>
+          <a:lstStyle/>
+          <a:p>
+            <a:pPr algn="l">
+              <a:lnSpc>
+                <a:spcPct val="110000"/>
+              </a:lnSpc>
+              <a:spcAft>
+                <a:spcPts val="0"/>
+              </a:spcAft>
+            </a:pPr>
+            <a:r>
+              <a:rPr sz="1150" b="1" i="0">
+                <a:solidFill>
+                  <a:srgbClr val="777777"/>
+                </a:solidFill>
+                <a:latin typeface="Calibri"/>
+              </a:rPr>
+              <a:t>Ever tested</a:t>
+            </a:r>
+          </a:p>
+          <a:p>
+            <a:pPr>
+              <a:lnSpc>
+                <a:spcPct val="110000"/>
+              </a:lnSpc>
+              <a:spcAft>
+                <a:spcPts val="0"/>
+              </a:spcAft>
+            </a:pPr>
+            <a:r>
+              <a:rPr sz="1150" b="1" i="0">
+                <a:solidFill>
+                  <a:srgbClr val="777777"/>
+                </a:solidFill>
+                <a:latin typeface="Calibri"/>
+              </a:rPr>
+              <a:t>against each other</a:t>
+            </a:r>
+          </a:p>
+        </p:txBody>
+      </p:sp>
+      <p:sp>
+        <p:nvSpPr>
+          <p:cNvPr id="11" name="TextBox 10"/>
+          <p:cNvSpPr txBox="1"/>
+          <p:nvPr/>
+        </p:nvSpPr>
+        <p:spPr>
+          <a:xfrm>
+            <a:off x="731520" y="2926080"/>
+            <a:ext cx="2468880" cy="292608"/>
+          </a:xfrm>
+          <a:prstGeom prst="rect">
+            <a:avLst/>
+          </a:prstGeom>
+          <a:noFill/>
+        </p:spPr>
+        <p:txBody>
+          <a:bodyPr wrap="square" lIns="0" rIns="0" tIns="0" bIns="0" anchor="t">
+            <a:spAutoFit/>
+          </a:bodyPr>
+          <a:lstStyle/>
+          <a:p>
+            <a:pPr algn="l">
+              <a:lnSpc>
+                <a:spcPct val="106000"/>
+              </a:lnSpc>
+              <a:spcAft>
+                <a:spcPts val="0"/>
+              </a:spcAft>
+            </a:pPr>
+            <a:r>
+              <a:rPr sz="1300" b="0" i="0">
+                <a:solidFill>
+                  <a:srgbClr val="444444"/>
+                </a:solidFill>
+                <a:latin typeface="Calibri"/>
+              </a:rPr>
+              <a:t>direct-input</a:t>
+            </a:r>
+          </a:p>
+        </p:txBody>
+      </p:sp>
+      <p:sp>
+        <p:nvSpPr>
+          <p:cNvPr id="12" name="TextBox 11"/>
+          <p:cNvSpPr txBox="1"/>
+          <p:nvPr/>
+        </p:nvSpPr>
+        <p:spPr>
+          <a:xfrm>
+            <a:off x="3291839" y="2926080"/>
+            <a:ext cx="3017520" cy="292608"/>
+          </a:xfrm>
+          <a:prstGeom prst="rect">
+            <a:avLst/>
+          </a:prstGeom>
+          <a:noFill/>
+        </p:spPr>
+        <p:txBody>
+          <a:bodyPr wrap="square" lIns="0" rIns="0" tIns="0" bIns="0" anchor="t">
+            <a:spAutoFit/>
+          </a:bodyPr>
+          <a:lstStyle/>
+          <a:p>
+            <a:pPr algn="l">
+              <a:lnSpc>
+                <a:spcPct val="106000"/>
+              </a:lnSpc>
+              <a:spcAft>
+                <a:spcPts val="0"/>
+              </a:spcAft>
+            </a:pPr>
+            <a:r>
+              <a:rPr sz="1300" b="0" i="0">
+                <a:solidFill>
+                  <a:srgbClr val="444444"/>
+                </a:solidFill>
+                <a:latin typeface="Calibri"/>
+              </a:rPr>
+              <a:t>reasoning-corruption</a:t>
+            </a:r>
+          </a:p>
+        </p:txBody>
+      </p:sp>
+      <p:sp>
+        <p:nvSpPr>
+          <p:cNvPr id="13" name="TextBox 12"/>
+          <p:cNvSpPr txBox="1"/>
+          <p:nvPr/>
+        </p:nvSpPr>
+        <p:spPr>
+          <a:xfrm>
+            <a:off x="6492240" y="2926080"/>
+            <a:ext cx="1371600" cy="292608"/>
+          </a:xfrm>
+          <a:prstGeom prst="rect">
+            <a:avLst/>
+          </a:prstGeom>
+          <a:noFill/>
+        </p:spPr>
+        <p:txBody>
+          <a:bodyPr wrap="square" lIns="0" rIns="0" tIns="0" bIns="0" anchor="t">
+            <a:spAutoFit/>
+          </a:bodyPr>
+          <a:lstStyle/>
+          <a:p>
+            <a:pPr algn="l">
+              <a:lnSpc>
+                <a:spcPct val="106000"/>
+              </a:lnSpc>
+              <a:spcAft>
+                <a:spcPts val="0"/>
+              </a:spcAft>
+            </a:pPr>
+            <a:r>
+              <a:rPr sz="1300" b="0" i="0">
+                <a:solidFill>
+                  <a:srgbClr val="444444"/>
+                </a:solidFill>
+                <a:latin typeface="Calibri"/>
+              </a:rPr>
+              <a:t>4</a:t>
+            </a:r>
+          </a:p>
+        </p:txBody>
+      </p:sp>
+      <p:sp>
+        <p:nvSpPr>
+          <p:cNvPr id="14" name="TextBox 13"/>
+          <p:cNvSpPr txBox="1"/>
+          <p:nvPr/>
+        </p:nvSpPr>
+        <p:spPr>
+          <a:xfrm>
+            <a:off x="8046720" y="2926080"/>
+            <a:ext cx="1463040" cy="292608"/>
+          </a:xfrm>
+          <a:prstGeom prst="rect">
+            <a:avLst/>
+          </a:prstGeom>
+          <a:noFill/>
+        </p:spPr>
+        <p:txBody>
+          <a:bodyPr wrap="square" lIns="0" rIns="0" tIns="0" bIns="0" anchor="t">
+            <a:spAutoFit/>
+          </a:bodyPr>
+          <a:lstStyle/>
+          <a:p>
+            <a:pPr algn="l">
+              <a:lnSpc>
+                <a:spcPct val="106000"/>
+              </a:lnSpc>
+              <a:spcAft>
+                <a:spcPts val="0"/>
+              </a:spcAft>
+            </a:pPr>
+            <a:r>
+              <a:rPr sz="1300" b="0" i="0">
+                <a:solidFill>
+                  <a:srgbClr val="444444"/>
+                </a:solidFill>
+                <a:latin typeface="Calibri"/>
+              </a:rPr>
+              <a:t>79</a:t>
+            </a:r>
+          </a:p>
+        </p:txBody>
+      </p:sp>
+      <p:sp>
+        <p:nvSpPr>
+          <p:cNvPr id="15" name="TextBox 14"/>
+          <p:cNvSpPr txBox="1"/>
+          <p:nvPr/>
+        </p:nvSpPr>
+        <p:spPr>
+          <a:xfrm>
+            <a:off x="9692640" y="2926080"/>
+            <a:ext cx="2011680" cy="292608"/>
+          </a:xfrm>
+          <a:prstGeom prst="rect">
+            <a:avLst/>
+          </a:prstGeom>
+          <a:noFill/>
+        </p:spPr>
+        <p:txBody>
+          <a:bodyPr wrap="square" lIns="0" rIns="0" tIns="0" bIns="0" anchor="t">
+            <a:spAutoFit/>
+          </a:bodyPr>
+          <a:lstStyle/>
+          <a:p>
+            <a:pPr algn="l">
+              <a:lnSpc>
+                <a:spcPct val="106000"/>
+              </a:lnSpc>
+              <a:spcAft>
+                <a:spcPts val="0"/>
+              </a:spcAft>
+            </a:pPr>
+            <a:r>
+              <a:rPr sz="1300" b="1" i="0">
                 <a:solidFill>
                   <a:srgbClr val="111111"/>
                 </a:solidFill>
                 <a:latin typeface="Calibri"/>
               </a:rPr>
-              <a:t>Attacks we rebuilt</a:t>
-            </a:r>
-          </a:p>
-        </p:txBody>
-      </p:sp>
-      <p:sp>
-        <p:nvSpPr>
-          <p:cNvPr id="7" name="TextBox 6"/>
-          <p:cNvSpPr txBox="1"/>
-          <p:nvPr/>
-        </p:nvSpPr>
-        <p:spPr>
-          <a:xfrm>
-            <a:off x="731520" y="2798064"/>
-            <a:ext cx="2286000" cy="310896"/>
+              <a:t>0</a:t>
+            </a:r>
+          </a:p>
+        </p:txBody>
+      </p:sp>
+      <p:sp>
+        <p:nvSpPr>
+          <p:cNvPr id="16" name="TextBox 15"/>
+          <p:cNvSpPr txBox="1"/>
+          <p:nvPr/>
+        </p:nvSpPr>
+        <p:spPr>
+          <a:xfrm>
+            <a:off x="731520" y="3291840"/>
+            <a:ext cx="2468880" cy="292608"/>
+          </a:xfrm>
+          <a:prstGeom prst="rect">
+            <a:avLst/>
+          </a:prstGeom>
+          <a:noFill/>
+        </p:spPr>
+        <p:txBody>
+          <a:bodyPr wrap="square" lIns="0" rIns="0" tIns="0" bIns="0" anchor="t">
+            <a:spAutoFit/>
+          </a:bodyPr>
+          <a:lstStyle/>
+          <a:p>
+            <a:pPr algn="l">
+              <a:lnSpc>
+                <a:spcPct val="106000"/>
+              </a:lnSpc>
+              <a:spcAft>
+                <a:spcPts val="0"/>
+              </a:spcAft>
+            </a:pPr>
+            <a:r>
+              <a:rPr sz="1300" b="0" i="0">
+                <a:solidFill>
+                  <a:srgbClr val="444444"/>
+                </a:solidFill>
+                <a:latin typeface="Calibri"/>
+              </a:rPr>
+              <a:t>RAG</a:t>
+            </a:r>
+          </a:p>
+        </p:txBody>
+      </p:sp>
+      <p:sp>
+        <p:nvSpPr>
+          <p:cNvPr id="17" name="TextBox 16"/>
+          <p:cNvSpPr txBox="1"/>
+          <p:nvPr/>
+        </p:nvSpPr>
+        <p:spPr>
+          <a:xfrm>
+            <a:off x="3291839" y="3291840"/>
+            <a:ext cx="3017520" cy="292608"/>
+          </a:xfrm>
+          <a:prstGeom prst="rect">
+            <a:avLst/>
+          </a:prstGeom>
+          <a:noFill/>
+        </p:spPr>
+        <p:txBody>
+          <a:bodyPr wrap="square" lIns="0" rIns="0" tIns="0" bIns="0" anchor="t">
+            <a:spAutoFit/>
+          </a:bodyPr>
+          <a:lstStyle/>
+          <a:p>
+            <a:pPr algn="l">
+              <a:lnSpc>
+                <a:spcPct val="106000"/>
+              </a:lnSpc>
+              <a:spcAft>
+                <a:spcPts val="0"/>
+              </a:spcAft>
+            </a:pPr>
+            <a:r>
+              <a:rPr sz="1300" b="0" i="0">
+                <a:solidFill>
+                  <a:srgbClr val="444444"/>
+                </a:solidFill>
+                <a:latin typeface="Calibri"/>
+              </a:rPr>
+              <a:t>silent-corruption</a:t>
+            </a:r>
+          </a:p>
+        </p:txBody>
+      </p:sp>
+      <p:sp>
+        <p:nvSpPr>
+          <p:cNvPr id="18" name="TextBox 17"/>
+          <p:cNvSpPr txBox="1"/>
+          <p:nvPr/>
+        </p:nvSpPr>
+        <p:spPr>
+          <a:xfrm>
+            <a:off x="6492240" y="3291840"/>
+            <a:ext cx="1371600" cy="292608"/>
+          </a:xfrm>
+          <a:prstGeom prst="rect">
+            <a:avLst/>
+          </a:prstGeom>
+          <a:noFill/>
+        </p:spPr>
+        <p:txBody>
+          <a:bodyPr wrap="square" lIns="0" rIns="0" tIns="0" bIns="0" anchor="t">
+            <a:spAutoFit/>
+          </a:bodyPr>
+          <a:lstStyle/>
+          <a:p>
+            <a:pPr algn="l">
+              <a:lnSpc>
+                <a:spcPct val="106000"/>
+              </a:lnSpc>
+              <a:spcAft>
+                <a:spcPts val="0"/>
+              </a:spcAft>
+            </a:pPr>
+            <a:r>
+              <a:rPr sz="1300" b="0" i="0">
+                <a:solidFill>
+                  <a:srgbClr val="444444"/>
+                </a:solidFill>
+                <a:latin typeface="Calibri"/>
+              </a:rPr>
+              <a:t>3</a:t>
+            </a:r>
+          </a:p>
+        </p:txBody>
+      </p:sp>
+      <p:sp>
+        <p:nvSpPr>
+          <p:cNvPr id="19" name="TextBox 18"/>
+          <p:cNvSpPr txBox="1"/>
+          <p:nvPr/>
+        </p:nvSpPr>
+        <p:spPr>
+          <a:xfrm>
+            <a:off x="8046720" y="3291840"/>
+            <a:ext cx="1463040" cy="292608"/>
+          </a:xfrm>
+          <a:prstGeom prst="rect">
+            <a:avLst/>
+          </a:prstGeom>
+          <a:noFill/>
+        </p:spPr>
+        <p:txBody>
+          <a:bodyPr wrap="square" lIns="0" rIns="0" tIns="0" bIns="0" anchor="t">
+            <a:spAutoFit/>
+          </a:bodyPr>
+          <a:lstStyle/>
+          <a:p>
+            <a:pPr algn="l">
+              <a:lnSpc>
+                <a:spcPct val="106000"/>
+              </a:lnSpc>
+              <a:spcAft>
+                <a:spcPts val="0"/>
+              </a:spcAft>
+            </a:pPr>
+            <a:r>
+              <a:rPr sz="1300" b="0" i="0">
+                <a:solidFill>
+                  <a:srgbClr val="444444"/>
+                </a:solidFill>
+                <a:latin typeface="Calibri"/>
+              </a:rPr>
+              <a:t>42</a:t>
+            </a:r>
+          </a:p>
+        </p:txBody>
+      </p:sp>
+      <p:sp>
+        <p:nvSpPr>
+          <p:cNvPr id="20" name="TextBox 19"/>
+          <p:cNvSpPr txBox="1"/>
+          <p:nvPr/>
+        </p:nvSpPr>
+        <p:spPr>
+          <a:xfrm>
+            <a:off x="9692640" y="3291840"/>
+            <a:ext cx="2011680" cy="292608"/>
           </a:xfrm>
           <a:prstGeom prst="rect">
             <a:avLst/>
@@ -5497,21 +4490,21 @@
                 </a:solidFill>
                 <a:latin typeface="Calibri"/>
               </a:rPr>
-              <a:t>Removes the answer</a:t>
-            </a:r>
-          </a:p>
-        </p:txBody>
-      </p:sp>
-      <p:sp>
-        <p:nvSpPr>
-          <p:cNvPr id="8" name="TextBox 7"/>
-          <p:cNvSpPr txBox="1"/>
-          <p:nvPr/>
-        </p:nvSpPr>
-        <p:spPr>
-          <a:xfrm>
-            <a:off x="3017520" y="2798064"/>
-            <a:ext cx="2651760" cy="310896"/>
+              <a:t>0</a:t>
+            </a:r>
+          </a:p>
+        </p:txBody>
+      </p:sp>
+      <p:sp>
+        <p:nvSpPr>
+          <p:cNvPr id="21" name="TextBox 20"/>
+          <p:cNvSpPr txBox="1"/>
+          <p:nvPr/>
+        </p:nvSpPr>
+        <p:spPr>
+          <a:xfrm>
+            <a:off x="731520" y="3657600"/>
+            <a:ext cx="2468880" cy="292608"/>
           </a:xfrm>
           <a:prstGeom prst="rect">
             <a:avLst/>
@@ -5539,21 +4532,147 @@
                 </a:solidFill>
                 <a:latin typeface="Calibri"/>
               </a:rPr>
-              <a:t>corpus poisoning</a:t>
-            </a:r>
-          </a:p>
-        </p:txBody>
-      </p:sp>
-      <p:sp>
-        <p:nvSpPr>
-          <p:cNvPr id="9" name="TextBox 8"/>
-          <p:cNvSpPr txBox="1"/>
-          <p:nvPr/>
-        </p:nvSpPr>
-        <p:spPr>
-          <a:xfrm>
-            <a:off x="731520" y="3218688"/>
-            <a:ext cx="2286000" cy="310896"/>
+              <a:t>tool-output</a:t>
+            </a:r>
+          </a:p>
+        </p:txBody>
+      </p:sp>
+      <p:sp>
+        <p:nvSpPr>
+          <p:cNvPr id="22" name="TextBox 21"/>
+          <p:cNvSpPr txBox="1"/>
+          <p:nvPr/>
+        </p:nvSpPr>
+        <p:spPr>
+          <a:xfrm>
+            <a:off x="3291839" y="3657600"/>
+            <a:ext cx="3017520" cy="292608"/>
+          </a:xfrm>
+          <a:prstGeom prst="rect">
+            <a:avLst/>
+          </a:prstGeom>
+          <a:noFill/>
+        </p:spPr>
+        <p:txBody>
+          <a:bodyPr wrap="square" lIns="0" rIns="0" tIns="0" bIns="0" anchor="t">
+            <a:spAutoFit/>
+          </a:bodyPr>
+          <a:lstStyle/>
+          <a:p>
+            <a:pPr algn="l">
+              <a:lnSpc>
+                <a:spcPct val="106000"/>
+              </a:lnSpc>
+              <a:spcAft>
+                <a:spcPts val="0"/>
+              </a:spcAft>
+            </a:pPr>
+            <a:r>
+              <a:rPr sz="1300" b="0" i="0">
+                <a:solidFill>
+                  <a:srgbClr val="444444"/>
+                </a:solidFill>
+                <a:latin typeface="Calibri"/>
+              </a:rPr>
+              <a:t>goal-hijack</a:t>
+            </a:r>
+          </a:p>
+        </p:txBody>
+      </p:sp>
+      <p:sp>
+        <p:nvSpPr>
+          <p:cNvPr id="23" name="TextBox 22"/>
+          <p:cNvSpPr txBox="1"/>
+          <p:nvPr/>
+        </p:nvSpPr>
+        <p:spPr>
+          <a:xfrm>
+            <a:off x="6492240" y="3657600"/>
+            <a:ext cx="1371600" cy="292608"/>
+          </a:xfrm>
+          <a:prstGeom prst="rect">
+            <a:avLst/>
+          </a:prstGeom>
+          <a:noFill/>
+        </p:spPr>
+        <p:txBody>
+          <a:bodyPr wrap="square" lIns="0" rIns="0" tIns="0" bIns="0" anchor="t">
+            <a:spAutoFit/>
+          </a:bodyPr>
+          <a:lstStyle/>
+          <a:p>
+            <a:pPr algn="l">
+              <a:lnSpc>
+                <a:spcPct val="106000"/>
+              </a:lnSpc>
+              <a:spcAft>
+                <a:spcPts val="0"/>
+              </a:spcAft>
+            </a:pPr>
+            <a:r>
+              <a:rPr sz="1300" b="0" i="0">
+                <a:solidFill>
+                  <a:srgbClr val="444444"/>
+                </a:solidFill>
+                <a:latin typeface="Calibri"/>
+              </a:rPr>
+              <a:t>61</a:t>
+            </a:r>
+          </a:p>
+        </p:txBody>
+      </p:sp>
+      <p:sp>
+        <p:nvSpPr>
+          <p:cNvPr id="24" name="TextBox 23"/>
+          <p:cNvSpPr txBox="1"/>
+          <p:nvPr/>
+        </p:nvSpPr>
+        <p:spPr>
+          <a:xfrm>
+            <a:off x="8046720" y="3657600"/>
+            <a:ext cx="1463040" cy="292608"/>
+          </a:xfrm>
+          <a:prstGeom prst="rect">
+            <a:avLst/>
+          </a:prstGeom>
+          <a:noFill/>
+        </p:spPr>
+        <p:txBody>
+          <a:bodyPr wrap="square" lIns="0" rIns="0" tIns="0" bIns="0" anchor="t">
+            <a:spAutoFit/>
+          </a:bodyPr>
+          <a:lstStyle/>
+          <a:p>
+            <a:pPr algn="l">
+              <a:lnSpc>
+                <a:spcPct val="106000"/>
+              </a:lnSpc>
+              <a:spcAft>
+                <a:spcPts val="0"/>
+              </a:spcAft>
+            </a:pPr>
+            <a:r>
+              <a:rPr sz="1300" b="0" i="0">
+                <a:solidFill>
+                  <a:srgbClr val="444444"/>
+                </a:solidFill>
+                <a:latin typeface="Calibri"/>
+              </a:rPr>
+              <a:t>1</a:t>
+            </a:r>
+          </a:p>
+        </p:txBody>
+      </p:sp>
+      <p:sp>
+        <p:nvSpPr>
+          <p:cNvPr id="25" name="TextBox 24"/>
+          <p:cNvSpPr txBox="1"/>
+          <p:nvPr/>
+        </p:nvSpPr>
+        <p:spPr>
+          <a:xfrm>
+            <a:off x="9692640" y="3657600"/>
+            <a:ext cx="2011680" cy="292608"/>
           </a:xfrm>
           <a:prstGeom prst="rect">
             <a:avLst/>
@@ -5581,21 +4700,21 @@
                 </a:solidFill>
                 <a:latin typeface="Calibri"/>
               </a:rPr>
-              <a:t>Inserts a false answer</a:t>
-            </a:r>
-          </a:p>
-        </p:txBody>
-      </p:sp>
-      <p:sp>
-        <p:nvSpPr>
-          <p:cNvPr id="10" name="TextBox 9"/>
-          <p:cNvSpPr txBox="1"/>
-          <p:nvPr/>
-        </p:nvSpPr>
-        <p:spPr>
-          <a:xfrm>
-            <a:off x="3017520" y="3218688"/>
-            <a:ext cx="2651760" cy="310896"/>
+              <a:t>0</a:t>
+            </a:r>
+          </a:p>
+        </p:txBody>
+      </p:sp>
+      <p:sp>
+        <p:nvSpPr>
+          <p:cNvPr id="26" name="TextBox 25"/>
+          <p:cNvSpPr txBox="1"/>
+          <p:nvPr/>
+        </p:nvSpPr>
+        <p:spPr>
+          <a:xfrm>
+            <a:off x="731520" y="4023360"/>
+            <a:ext cx="2468880" cy="292608"/>
           </a:xfrm>
           <a:prstGeom prst="rect">
             <a:avLst/>
@@ -5623,21 +4742,147 @@
                 </a:solidFill>
                 <a:latin typeface="Calibri"/>
               </a:rPr>
-              <a:t>PoisonedRAG</a:t>
-            </a:r>
-          </a:p>
-        </p:txBody>
-      </p:sp>
-      <p:sp>
-        <p:nvSpPr>
-          <p:cNvPr id="11" name="TextBox 10"/>
-          <p:cNvSpPr txBox="1"/>
-          <p:nvPr/>
-        </p:nvSpPr>
-        <p:spPr>
-          <a:xfrm>
-            <a:off x="731520" y="3639312"/>
-            <a:ext cx="2286000" cy="310896"/>
+              <a:t>RAG</a:t>
+            </a:r>
+          </a:p>
+        </p:txBody>
+      </p:sp>
+      <p:sp>
+        <p:nvSpPr>
+          <p:cNvPr id="27" name="TextBox 26"/>
+          <p:cNvSpPr txBox="1"/>
+          <p:nvPr/>
+        </p:nvSpPr>
+        <p:spPr>
+          <a:xfrm>
+            <a:off x="3291839" y="4023360"/>
+            <a:ext cx="3017520" cy="292608"/>
+          </a:xfrm>
+          <a:prstGeom prst="rect">
+            <a:avLst/>
+          </a:prstGeom>
+          <a:noFill/>
+        </p:spPr>
+        <p:txBody>
+          <a:bodyPr wrap="square" lIns="0" rIns="0" tIns="0" bIns="0" anchor="t">
+            <a:spAutoFit/>
+          </a:bodyPr>
+          <a:lstStyle/>
+          <a:p>
+            <a:pPr algn="l">
+              <a:lnSpc>
+                <a:spcPct val="106000"/>
+              </a:lnSpc>
+              <a:spcAft>
+                <a:spcPts val="0"/>
+              </a:spcAft>
+            </a:pPr>
+            <a:r>
+              <a:rPr sz="1300" b="0" i="0">
+                <a:solidFill>
+                  <a:srgbClr val="444444"/>
+                </a:solidFill>
+                <a:latin typeface="Calibri"/>
+              </a:rPr>
+              <a:t>reasoning-corruption</a:t>
+            </a:r>
+          </a:p>
+        </p:txBody>
+      </p:sp>
+      <p:sp>
+        <p:nvSpPr>
+          <p:cNvPr id="28" name="TextBox 27"/>
+          <p:cNvSpPr txBox="1"/>
+          <p:nvPr/>
+        </p:nvSpPr>
+        <p:spPr>
+          <a:xfrm>
+            <a:off x="6492240" y="4023360"/>
+            <a:ext cx="1371600" cy="292608"/>
+          </a:xfrm>
+          <a:prstGeom prst="rect">
+            <a:avLst/>
+          </a:prstGeom>
+          <a:noFill/>
+        </p:spPr>
+        <p:txBody>
+          <a:bodyPr wrap="square" lIns="0" rIns="0" tIns="0" bIns="0" anchor="t">
+            <a:spAutoFit/>
+          </a:bodyPr>
+          <a:lstStyle/>
+          <a:p>
+            <a:pPr algn="l">
+              <a:lnSpc>
+                <a:spcPct val="106000"/>
+              </a:lnSpc>
+              <a:spcAft>
+                <a:spcPts val="0"/>
+              </a:spcAft>
+            </a:pPr>
+            <a:r>
+              <a:rPr sz="1300" b="0" i="0">
+                <a:solidFill>
+                  <a:srgbClr val="444444"/>
+                </a:solidFill>
+                <a:latin typeface="Calibri"/>
+              </a:rPr>
+              <a:t>2</a:t>
+            </a:r>
+          </a:p>
+        </p:txBody>
+      </p:sp>
+      <p:sp>
+        <p:nvSpPr>
+          <p:cNvPr id="29" name="TextBox 28"/>
+          <p:cNvSpPr txBox="1"/>
+          <p:nvPr/>
+        </p:nvSpPr>
+        <p:spPr>
+          <a:xfrm>
+            <a:off x="8046720" y="4023360"/>
+            <a:ext cx="1463040" cy="292608"/>
+          </a:xfrm>
+          <a:prstGeom prst="rect">
+            <a:avLst/>
+          </a:prstGeom>
+          <a:noFill/>
+        </p:spPr>
+        <p:txBody>
+          <a:bodyPr wrap="square" lIns="0" rIns="0" tIns="0" bIns="0" anchor="t">
+            <a:spAutoFit/>
+          </a:bodyPr>
+          <a:lstStyle/>
+          <a:p>
+            <a:pPr algn="l">
+              <a:lnSpc>
+                <a:spcPct val="106000"/>
+              </a:lnSpc>
+              <a:spcAft>
+                <a:spcPts val="0"/>
+              </a:spcAft>
+            </a:pPr>
+            <a:r>
+              <a:rPr sz="1300" b="0" i="0">
+                <a:solidFill>
+                  <a:srgbClr val="444444"/>
+                </a:solidFill>
+                <a:latin typeface="Calibri"/>
+              </a:rPr>
+              <a:t>17</a:t>
+            </a:r>
+          </a:p>
+        </p:txBody>
+      </p:sp>
+      <p:sp>
+        <p:nvSpPr>
+          <p:cNvPr id="30" name="TextBox 29"/>
+          <p:cNvSpPr txBox="1"/>
+          <p:nvPr/>
+        </p:nvSpPr>
+        <p:spPr>
+          <a:xfrm>
+            <a:off x="9692640" y="4023360"/>
+            <a:ext cx="2011680" cy="292608"/>
           </a:xfrm>
           <a:prstGeom prst="rect">
             <a:avLst/>
@@ -5665,21 +4910,21 @@
                 </a:solidFill>
                 <a:latin typeface="Calibri"/>
               </a:rPr>
-              <a:t>Forces a refusal</a:t>
-            </a:r>
-          </a:p>
-        </p:txBody>
-      </p:sp>
-      <p:sp>
-        <p:nvSpPr>
-          <p:cNvPr id="12" name="TextBox 11"/>
-          <p:cNvSpPr txBox="1"/>
-          <p:nvPr/>
-        </p:nvSpPr>
-        <p:spPr>
-          <a:xfrm>
-            <a:off x="3017520" y="3639312"/>
-            <a:ext cx="2651760" cy="310896"/>
+              <a:t>0</a:t>
+            </a:r>
+          </a:p>
+        </p:txBody>
+      </p:sp>
+      <p:sp>
+        <p:nvSpPr>
+          <p:cNvPr id="31" name="TextBox 30"/>
+          <p:cNvSpPr txBox="1"/>
+          <p:nvPr/>
+        </p:nvSpPr>
+        <p:spPr>
+          <a:xfrm>
+            <a:off x="731520" y="4389120"/>
+            <a:ext cx="2468880" cy="292608"/>
           </a:xfrm>
           <a:prstGeom prst="rect">
             <a:avLst/>
@@ -5707,21 +4952,147 @@
                 </a:solidFill>
                 <a:latin typeface="Calibri"/>
               </a:rPr>
-              <a:t>BadRAG DoS</a:t>
-            </a:r>
-          </a:p>
-        </p:txBody>
-      </p:sp>
-      <p:sp>
-        <p:nvSpPr>
-          <p:cNvPr id="13" name="TextBox 12"/>
-          <p:cNvSpPr txBox="1"/>
-          <p:nvPr/>
-        </p:nvSpPr>
-        <p:spPr>
-          <a:xfrm>
-            <a:off x="731520" y="4059936"/>
-            <a:ext cx="2286000" cy="310896"/>
+              <a:t>direct-input</a:t>
+            </a:r>
+          </a:p>
+        </p:txBody>
+      </p:sp>
+      <p:sp>
+        <p:nvSpPr>
+          <p:cNvPr id="32" name="TextBox 31"/>
+          <p:cNvSpPr txBox="1"/>
+          <p:nvPr/>
+        </p:nvSpPr>
+        <p:spPr>
+          <a:xfrm>
+            <a:off x="3291839" y="4389120"/>
+            <a:ext cx="3017520" cy="292608"/>
+          </a:xfrm>
+          <a:prstGeom prst="rect">
+            <a:avLst/>
+          </a:prstGeom>
+          <a:noFill/>
+        </p:spPr>
+        <p:txBody>
+          <a:bodyPr wrap="square" lIns="0" rIns="0" tIns="0" bIns="0" anchor="t">
+            <a:spAutoFit/>
+          </a:bodyPr>
+          <a:lstStyle/>
+          <a:p>
+            <a:pPr algn="l">
+              <a:lnSpc>
+                <a:spcPct val="106000"/>
+              </a:lnSpc>
+              <a:spcAft>
+                <a:spcPts val="0"/>
+              </a:spcAft>
+            </a:pPr>
+            <a:r>
+              <a:rPr sz="1300" b="0" i="0">
+                <a:solidFill>
+                  <a:srgbClr val="444444"/>
+                </a:solidFill>
+                <a:latin typeface="Calibri"/>
+              </a:rPr>
+              <a:t>goal-hijack</a:t>
+            </a:r>
+          </a:p>
+        </p:txBody>
+      </p:sp>
+      <p:sp>
+        <p:nvSpPr>
+          <p:cNvPr id="33" name="TextBox 32"/>
+          <p:cNvSpPr txBox="1"/>
+          <p:nvPr/>
+        </p:nvSpPr>
+        <p:spPr>
+          <a:xfrm>
+            <a:off x="6492240" y="4389120"/>
+            <a:ext cx="1371600" cy="292608"/>
+          </a:xfrm>
+          <a:prstGeom prst="rect">
+            <a:avLst/>
+          </a:prstGeom>
+          <a:noFill/>
+        </p:spPr>
+        <p:txBody>
+          <a:bodyPr wrap="square" lIns="0" rIns="0" tIns="0" bIns="0" anchor="t">
+            <a:spAutoFit/>
+          </a:bodyPr>
+          <a:lstStyle/>
+          <a:p>
+            <a:pPr algn="l">
+              <a:lnSpc>
+                <a:spcPct val="106000"/>
+              </a:lnSpc>
+              <a:spcAft>
+                <a:spcPts val="0"/>
+              </a:spcAft>
+            </a:pPr>
+            <a:r>
+              <a:rPr sz="1300" b="0" i="0">
+                <a:solidFill>
+                  <a:srgbClr val="444444"/>
+                </a:solidFill>
+                <a:latin typeface="Calibri"/>
+              </a:rPr>
+              <a:t>27</a:t>
+            </a:r>
+          </a:p>
+        </p:txBody>
+      </p:sp>
+      <p:sp>
+        <p:nvSpPr>
+          <p:cNvPr id="34" name="TextBox 33"/>
+          <p:cNvSpPr txBox="1"/>
+          <p:nvPr/>
+        </p:nvSpPr>
+        <p:spPr>
+          <a:xfrm>
+            <a:off x="8046720" y="4389120"/>
+            <a:ext cx="1463040" cy="292608"/>
+          </a:xfrm>
+          <a:prstGeom prst="rect">
+            <a:avLst/>
+          </a:prstGeom>
+          <a:noFill/>
+        </p:spPr>
+        <p:txBody>
+          <a:bodyPr wrap="square" lIns="0" rIns="0" tIns="0" bIns="0" anchor="t">
+            <a:spAutoFit/>
+          </a:bodyPr>
+          <a:lstStyle/>
+          <a:p>
+            <a:pPr algn="l">
+              <a:lnSpc>
+                <a:spcPct val="106000"/>
+              </a:lnSpc>
+              <a:spcAft>
+                <a:spcPts val="0"/>
+              </a:spcAft>
+            </a:pPr>
+            <a:r>
+              <a:rPr sz="1300" b="0" i="0">
+                <a:solidFill>
+                  <a:srgbClr val="444444"/>
+                </a:solidFill>
+                <a:latin typeface="Calibri"/>
+              </a:rPr>
+              <a:t>1</a:t>
+            </a:r>
+          </a:p>
+        </p:txBody>
+      </p:sp>
+      <p:sp>
+        <p:nvSpPr>
+          <p:cNvPr id="35" name="TextBox 34"/>
+          <p:cNvSpPr txBox="1"/>
+          <p:nvPr/>
+        </p:nvSpPr>
+        <p:spPr>
+          <a:xfrm>
+            <a:off x="9692640" y="4389120"/>
+            <a:ext cx="2011680" cy="292608"/>
           </a:xfrm>
           <a:prstGeom prst="rect">
             <a:avLst/>
@@ -5749,21 +5120,21 @@
                 </a:solidFill>
                 <a:latin typeface="Calibri"/>
               </a:rPr>
-              <a:t>Changes only the tone</a:t>
-            </a:r>
-          </a:p>
-        </p:txBody>
-      </p:sp>
-      <p:sp>
-        <p:nvSpPr>
-          <p:cNvPr id="14" name="TextBox 13"/>
-          <p:cNvSpPr txBox="1"/>
-          <p:nvPr/>
-        </p:nvSpPr>
-        <p:spPr>
-          <a:xfrm>
-            <a:off x="3017520" y="4059936"/>
-            <a:ext cx="2651760" cy="310896"/>
+              <a:t>0</a:t>
+            </a:r>
+          </a:p>
+        </p:txBody>
+      </p:sp>
+      <p:sp>
+        <p:nvSpPr>
+          <p:cNvPr id="36" name="TextBox 35"/>
+          <p:cNvSpPr txBox="1"/>
+          <p:nvPr/>
+        </p:nvSpPr>
+        <p:spPr>
+          <a:xfrm>
+            <a:off x="731520" y="4754880"/>
+            <a:ext cx="2468880" cy="292608"/>
           </a:xfrm>
           <a:prstGeom prst="rect">
             <a:avLst/>
@@ -5791,63 +5162,357 @@
                 </a:solidFill>
                 <a:latin typeface="Calibri"/>
               </a:rPr>
-              <a:t>BadRAG Selective-Fact</a:t>
-            </a:r>
-          </a:p>
-        </p:txBody>
-      </p:sp>
-      <p:sp>
-        <p:nvSpPr>
-          <p:cNvPr id="15" name="TextBox 14"/>
-          <p:cNvSpPr txBox="1"/>
-          <p:nvPr/>
-        </p:nvSpPr>
-        <p:spPr>
-          <a:xfrm>
-            <a:off x="6492240" y="2432304"/>
-            <a:ext cx="4937760" cy="292608"/>
-          </a:xfrm>
-          <a:prstGeom prst="rect">
-            <a:avLst/>
-          </a:prstGeom>
-          <a:noFill/>
-        </p:spPr>
-        <p:txBody>
-          <a:bodyPr wrap="square" lIns="0" rIns="0" tIns="0" bIns="0" anchor="t">
-            <a:spAutoFit/>
-          </a:bodyPr>
-          <a:lstStyle/>
-          <a:p>
-            <a:pPr algn="l">
-              <a:lnSpc>
-                <a:spcPct val="106000"/>
-              </a:lnSpc>
-              <a:spcAft>
-                <a:spcPts val="0"/>
-              </a:spcAft>
-            </a:pPr>
-            <a:r>
-              <a:rPr sz="1500" b="1" i="0">
+              <a:t>direct-input</a:t>
+            </a:r>
+          </a:p>
+        </p:txBody>
+      </p:sp>
+      <p:sp>
+        <p:nvSpPr>
+          <p:cNvPr id="37" name="TextBox 36"/>
+          <p:cNvSpPr txBox="1"/>
+          <p:nvPr/>
+        </p:nvSpPr>
+        <p:spPr>
+          <a:xfrm>
+            <a:off x="3291839" y="4754880"/>
+            <a:ext cx="3017520" cy="292608"/>
+          </a:xfrm>
+          <a:prstGeom prst="rect">
+            <a:avLst/>
+          </a:prstGeom>
+          <a:noFill/>
+        </p:spPr>
+        <p:txBody>
+          <a:bodyPr wrap="square" lIns="0" rIns="0" tIns="0" bIns="0" anchor="t">
+            <a:spAutoFit/>
+          </a:bodyPr>
+          <a:lstStyle/>
+          <a:p>
+            <a:pPr algn="l">
+              <a:lnSpc>
+                <a:spcPct val="106000"/>
+              </a:lnSpc>
+              <a:spcAft>
+                <a:spcPts val="0"/>
+              </a:spcAft>
+            </a:pPr>
+            <a:r>
+              <a:rPr sz="1300" b="0" i="0">
+                <a:solidFill>
+                  <a:srgbClr val="444444"/>
+                </a:solidFill>
+                <a:latin typeface="Calibri"/>
+              </a:rPr>
+              <a:t>silent-corruption</a:t>
+            </a:r>
+          </a:p>
+        </p:txBody>
+      </p:sp>
+      <p:sp>
+        <p:nvSpPr>
+          <p:cNvPr id="38" name="TextBox 37"/>
+          <p:cNvSpPr txBox="1"/>
+          <p:nvPr/>
+        </p:nvSpPr>
+        <p:spPr>
+          <a:xfrm>
+            <a:off x="6492240" y="4754880"/>
+            <a:ext cx="1371600" cy="292608"/>
+          </a:xfrm>
+          <a:prstGeom prst="rect">
+            <a:avLst/>
+          </a:prstGeom>
+          <a:noFill/>
+        </p:spPr>
+        <p:txBody>
+          <a:bodyPr wrap="square" lIns="0" rIns="0" tIns="0" bIns="0" anchor="t">
+            <a:spAutoFit/>
+          </a:bodyPr>
+          <a:lstStyle/>
+          <a:p>
+            <a:pPr algn="l">
+              <a:lnSpc>
+                <a:spcPct val="106000"/>
+              </a:lnSpc>
+              <a:spcAft>
+                <a:spcPts val="0"/>
+              </a:spcAft>
+            </a:pPr>
+            <a:r>
+              <a:rPr sz="1300" b="0" i="0">
+                <a:solidFill>
+                  <a:srgbClr val="444444"/>
+                </a:solidFill>
+                <a:latin typeface="Calibri"/>
+              </a:rPr>
+              <a:t>1</a:t>
+            </a:r>
+          </a:p>
+        </p:txBody>
+      </p:sp>
+      <p:sp>
+        <p:nvSpPr>
+          <p:cNvPr id="39" name="TextBox 38"/>
+          <p:cNvSpPr txBox="1"/>
+          <p:nvPr/>
+        </p:nvSpPr>
+        <p:spPr>
+          <a:xfrm>
+            <a:off x="8046720" y="4754880"/>
+            <a:ext cx="1463040" cy="292608"/>
+          </a:xfrm>
+          <a:prstGeom prst="rect">
+            <a:avLst/>
+          </a:prstGeom>
+          <a:noFill/>
+        </p:spPr>
+        <p:txBody>
+          <a:bodyPr wrap="square" lIns="0" rIns="0" tIns="0" bIns="0" anchor="t">
+            <a:spAutoFit/>
+          </a:bodyPr>
+          <a:lstStyle/>
+          <a:p>
+            <a:pPr algn="l">
+              <a:lnSpc>
+                <a:spcPct val="106000"/>
+              </a:lnSpc>
+              <a:spcAft>
+                <a:spcPts val="0"/>
+              </a:spcAft>
+            </a:pPr>
+            <a:r>
+              <a:rPr sz="1300" b="0" i="0">
+                <a:solidFill>
+                  <a:srgbClr val="444444"/>
+                </a:solidFill>
+                <a:latin typeface="Calibri"/>
+              </a:rPr>
+              <a:t>11</a:t>
+            </a:r>
+          </a:p>
+        </p:txBody>
+      </p:sp>
+      <p:sp>
+        <p:nvSpPr>
+          <p:cNvPr id="40" name="TextBox 39"/>
+          <p:cNvSpPr txBox="1"/>
+          <p:nvPr/>
+        </p:nvSpPr>
+        <p:spPr>
+          <a:xfrm>
+            <a:off x="9692640" y="4754880"/>
+            <a:ext cx="2011680" cy="292608"/>
+          </a:xfrm>
+          <a:prstGeom prst="rect">
+            <a:avLst/>
+          </a:prstGeom>
+          <a:noFill/>
+        </p:spPr>
+        <p:txBody>
+          <a:bodyPr wrap="square" lIns="0" rIns="0" tIns="0" bIns="0" anchor="t">
+            <a:spAutoFit/>
+          </a:bodyPr>
+          <a:lstStyle/>
+          <a:p>
+            <a:pPr algn="l">
+              <a:lnSpc>
+                <a:spcPct val="106000"/>
+              </a:lnSpc>
+              <a:spcAft>
+                <a:spcPts val="0"/>
+              </a:spcAft>
+            </a:pPr>
+            <a:r>
+              <a:rPr sz="1300" b="1" i="0">
                 <a:solidFill>
                   <a:srgbClr val="111111"/>
                 </a:solidFill>
                 <a:latin typeface="Calibri"/>
               </a:rPr>
-              <a:t>Defense codebases we opened</a:t>
-            </a:r>
-          </a:p>
-        </p:txBody>
-      </p:sp>
-      <p:sp>
-        <p:nvSpPr>
-          <p:cNvPr id="16" name="TextBox 15"/>
-          <p:cNvSpPr txBox="1"/>
-          <p:nvPr/>
-        </p:nvSpPr>
-        <p:spPr>
-          <a:xfrm>
-            <a:off x="6492240" y="2798064"/>
-            <a:ext cx="1554480" cy="310896"/>
+              <a:t>0</a:t>
+            </a:r>
+          </a:p>
+        </p:txBody>
+      </p:sp>
+      <p:sp>
+        <p:nvSpPr>
+          <p:cNvPr id="41" name="TextBox 40"/>
+          <p:cNvSpPr txBox="1"/>
+          <p:nvPr/>
+        </p:nvSpPr>
+        <p:spPr>
+          <a:xfrm>
+            <a:off x="731520" y="5120640"/>
+            <a:ext cx="2468880" cy="292608"/>
+          </a:xfrm>
+          <a:prstGeom prst="rect">
+            <a:avLst/>
+          </a:prstGeom>
+          <a:noFill/>
+        </p:spPr>
+        <p:txBody>
+          <a:bodyPr wrap="square" lIns="0" rIns="0" tIns="0" bIns="0" anchor="t">
+            <a:spAutoFit/>
+          </a:bodyPr>
+          <a:lstStyle/>
+          <a:p>
+            <a:pPr algn="l">
+              <a:lnSpc>
+                <a:spcPct val="106000"/>
+              </a:lnSpc>
+              <a:spcAft>
+                <a:spcPts val="0"/>
+              </a:spcAft>
+            </a:pPr>
+            <a:r>
+              <a:rPr sz="1300" b="0" i="0">
+                <a:solidFill>
+                  <a:srgbClr val="444444"/>
+                </a:solidFill>
+                <a:latin typeface="Calibri"/>
+              </a:rPr>
+              <a:t>memory</a:t>
+            </a:r>
+          </a:p>
+        </p:txBody>
+      </p:sp>
+      <p:sp>
+        <p:nvSpPr>
+          <p:cNvPr id="42" name="TextBox 41"/>
+          <p:cNvSpPr txBox="1"/>
+          <p:nvPr/>
+        </p:nvSpPr>
+        <p:spPr>
+          <a:xfrm>
+            <a:off x="3291839" y="5120640"/>
+            <a:ext cx="3017520" cy="292608"/>
+          </a:xfrm>
+          <a:prstGeom prst="rect">
+            <a:avLst/>
+          </a:prstGeom>
+          <a:noFill/>
+        </p:spPr>
+        <p:txBody>
+          <a:bodyPr wrap="square" lIns="0" rIns="0" tIns="0" bIns="0" anchor="t">
+            <a:spAutoFit/>
+          </a:bodyPr>
+          <a:lstStyle/>
+          <a:p>
+            <a:pPr algn="l">
+              <a:lnSpc>
+                <a:spcPct val="106000"/>
+              </a:lnSpc>
+              <a:spcAft>
+                <a:spcPts val="0"/>
+              </a:spcAft>
+            </a:pPr>
+            <a:r>
+              <a:rPr sz="1300" b="0" i="0">
+                <a:solidFill>
+                  <a:srgbClr val="444444"/>
+                </a:solidFill>
+                <a:latin typeface="Calibri"/>
+              </a:rPr>
+              <a:t>persistence-backdoor</a:t>
+            </a:r>
+          </a:p>
+        </p:txBody>
+      </p:sp>
+      <p:sp>
+        <p:nvSpPr>
+          <p:cNvPr id="43" name="TextBox 42"/>
+          <p:cNvSpPr txBox="1"/>
+          <p:nvPr/>
+        </p:nvSpPr>
+        <p:spPr>
+          <a:xfrm>
+            <a:off x="6492240" y="5120640"/>
+            <a:ext cx="1371600" cy="292608"/>
+          </a:xfrm>
+          <a:prstGeom prst="rect">
+            <a:avLst/>
+          </a:prstGeom>
+          <a:noFill/>
+        </p:spPr>
+        <p:txBody>
+          <a:bodyPr wrap="square" lIns="0" rIns="0" tIns="0" bIns="0" anchor="t">
+            <a:spAutoFit/>
+          </a:bodyPr>
+          <a:lstStyle/>
+          <a:p>
+            <a:pPr algn="l">
+              <a:lnSpc>
+                <a:spcPct val="106000"/>
+              </a:lnSpc>
+              <a:spcAft>
+                <a:spcPts val="0"/>
+              </a:spcAft>
+            </a:pPr>
+            <a:r>
+              <a:rPr sz="1300" b="0" i="0">
+                <a:solidFill>
+                  <a:srgbClr val="444444"/>
+                </a:solidFill>
+                <a:latin typeface="Calibri"/>
+              </a:rPr>
+              <a:t>7</a:t>
+            </a:r>
+          </a:p>
+        </p:txBody>
+      </p:sp>
+      <p:sp>
+        <p:nvSpPr>
+          <p:cNvPr id="44" name="TextBox 43"/>
+          <p:cNvSpPr txBox="1"/>
+          <p:nvPr/>
+        </p:nvSpPr>
+        <p:spPr>
+          <a:xfrm>
+            <a:off x="8046720" y="5120640"/>
+            <a:ext cx="1463040" cy="292608"/>
+          </a:xfrm>
+          <a:prstGeom prst="rect">
+            <a:avLst/>
+          </a:prstGeom>
+          <a:noFill/>
+        </p:spPr>
+        <p:txBody>
+          <a:bodyPr wrap="square" lIns="0" rIns="0" tIns="0" bIns="0" anchor="t">
+            <a:spAutoFit/>
+          </a:bodyPr>
+          <a:lstStyle/>
+          <a:p>
+            <a:pPr algn="l">
+              <a:lnSpc>
+                <a:spcPct val="106000"/>
+              </a:lnSpc>
+              <a:spcAft>
+                <a:spcPts val="0"/>
+              </a:spcAft>
+            </a:pPr>
+            <a:r>
+              <a:rPr sz="1300" b="0" i="0">
+                <a:solidFill>
+                  <a:srgbClr val="444444"/>
+                </a:solidFill>
+                <a:latin typeface="Calibri"/>
+              </a:rPr>
+              <a:t>1</a:t>
+            </a:r>
+          </a:p>
+        </p:txBody>
+      </p:sp>
+      <p:sp>
+        <p:nvSpPr>
+          <p:cNvPr id="45" name="TextBox 44"/>
+          <p:cNvSpPr txBox="1"/>
+          <p:nvPr/>
+        </p:nvSpPr>
+        <p:spPr>
+          <a:xfrm>
+            <a:off x="9692640" y="5120640"/>
+            <a:ext cx="2011680" cy="292608"/>
           </a:xfrm>
           <a:prstGeom prst="rect">
             <a:avLst/>
@@ -5875,278 +5540,87 @@
                 </a:solidFill>
                 <a:latin typeface="Calibri"/>
               </a:rPr>
-              <a:t>4 run</a:t>
-            </a:r>
-          </a:p>
-        </p:txBody>
-      </p:sp>
-      <p:sp>
-        <p:nvSpPr>
-          <p:cNvPr id="17" name="TextBox 16"/>
-          <p:cNvSpPr txBox="1"/>
-          <p:nvPr/>
-        </p:nvSpPr>
-        <p:spPr>
-          <a:xfrm>
-            <a:off x="8046719" y="2798064"/>
-            <a:ext cx="3383280" cy="310896"/>
-          </a:xfrm>
-          <a:prstGeom prst="rect">
-            <a:avLst/>
-          </a:prstGeom>
-          <a:noFill/>
-        </p:spPr>
-        <p:txBody>
-          <a:bodyPr wrap="square" lIns="0" rIns="0" tIns="0" bIns="0" anchor="t">
-            <a:spAutoFit/>
-          </a:bodyPr>
-          <a:lstStyle/>
-          <a:p>
-            <a:pPr algn="l">
-              <a:lnSpc>
-                <a:spcPct val="106000"/>
-              </a:lnSpc>
-              <a:spcAft>
-                <a:spcPts val="0"/>
-              </a:spcAft>
-            </a:pPr>
-            <a:r>
-              <a:rPr sz="1300" b="0" i="0">
+              <a:t>0</a:t>
+            </a:r>
+          </a:p>
+        </p:txBody>
+      </p:sp>
+      <p:sp>
+        <p:nvSpPr>
+          <p:cNvPr id="46" name="TextBox 45"/>
+          <p:cNvSpPr txBox="1"/>
+          <p:nvPr/>
+        </p:nvSpPr>
+        <p:spPr>
+          <a:xfrm>
+            <a:off x="731520" y="5504688"/>
+            <a:ext cx="10725912" cy="896112"/>
+          </a:xfrm>
+          <a:prstGeom prst="rect">
+            <a:avLst/>
+          </a:prstGeom>
+          <a:noFill/>
+        </p:spPr>
+        <p:txBody>
+          <a:bodyPr wrap="square" lIns="0" rIns="0" tIns="0" bIns="0" anchor="t">
+            <a:spAutoFit/>
+          </a:bodyPr>
+          <a:lstStyle/>
+          <a:p>
+            <a:pPr algn="l">
+              <a:lnSpc>
+                <a:spcPct val="110000"/>
+              </a:lnSpc>
+              <a:spcAft>
+                <a:spcPts val="600"/>
+              </a:spcAft>
+            </a:pPr>
+            <a:r>
+              <a:rPr sz="1350" b="1" i="0">
+                <a:solidFill>
+                  <a:srgbClr val="111111"/>
+                </a:solidFill>
+                <a:latin typeface="Calibri"/>
+              </a:rPr>
+              <a:t>Every row is zero. Not one of these pairs has been tested by anybody.</a:t>
+            </a:r>
+          </a:p>
+          <a:p>
+            <a:pPr>
+              <a:lnSpc>
+                <a:spcPct val="110000"/>
+              </a:lnSpc>
+              <a:spcAft>
+                <a:spcPts val="600"/>
+              </a:spcAft>
+            </a:pPr>
+            <a:r>
+              <a:rPr sz="1350" b="0" i="0">
                 <a:solidFill>
                   <a:srgbClr val="444444"/>
                 </a:solidFill>
                 <a:latin typeface="Calibri"/>
               </a:rPr>
-              <a:t>and give a usable measurement</a:t>
-            </a:r>
-          </a:p>
-        </p:txBody>
-      </p:sp>
-      <p:sp>
-        <p:nvSpPr>
-          <p:cNvPr id="18" name="TextBox 17"/>
-          <p:cNvSpPr txBox="1"/>
-          <p:nvPr/>
-        </p:nvSpPr>
-        <p:spPr>
-          <a:xfrm>
-            <a:off x="6492240" y="3438144"/>
-            <a:ext cx="1554480" cy="310896"/>
-          </a:xfrm>
-          <a:prstGeom prst="rect">
-            <a:avLst/>
-          </a:prstGeom>
-          <a:noFill/>
-        </p:spPr>
-        <p:txBody>
-          <a:bodyPr wrap="square" lIns="0" rIns="0" tIns="0" bIns="0" anchor="t">
-            <a:spAutoFit/>
-          </a:bodyPr>
-          <a:lstStyle/>
-          <a:p>
-            <a:pPr algn="l">
-              <a:lnSpc>
-                <a:spcPct val="106000"/>
-              </a:lnSpc>
-              <a:spcAft>
-                <a:spcPts val="0"/>
-              </a:spcAft>
-            </a:pPr>
-            <a:r>
-              <a:rPr sz="1300" b="1" i="0">
-                <a:solidFill>
-                  <a:srgbClr val="111111"/>
-                </a:solidFill>
-                <a:latin typeface="Calibri"/>
-              </a:rPr>
-              <a:t>1 runs</a:t>
-            </a:r>
-          </a:p>
-        </p:txBody>
-      </p:sp>
-      <p:sp>
-        <p:nvSpPr>
-          <p:cNvPr id="19" name="TextBox 18"/>
-          <p:cNvSpPr txBox="1"/>
-          <p:nvPr/>
-        </p:nvSpPr>
-        <p:spPr>
-          <a:xfrm>
-            <a:off x="8046719" y="3438144"/>
-            <a:ext cx="3383280" cy="310896"/>
-          </a:xfrm>
-          <a:prstGeom prst="rect">
-            <a:avLst/>
-          </a:prstGeom>
-          <a:noFill/>
-        </p:spPr>
-        <p:txBody>
-          <a:bodyPr wrap="square" lIns="0" rIns="0" tIns="0" bIns="0" anchor="t">
-            <a:spAutoFit/>
-          </a:bodyPr>
-          <a:lstStyle/>
-          <a:p>
-            <a:pPr algn="l">
-              <a:lnSpc>
-                <a:spcPct val="106000"/>
-              </a:lnSpc>
-              <a:spcAft>
-                <a:spcPts val="0"/>
-              </a:spcAft>
-            </a:pPr>
-            <a:r>
-              <a:rPr sz="1300" b="0" i="0">
+              <a:t>These cells are not ignored. tool-output and goal-hijack alone holds 169 tested pairs. But each one is a security defense against a security attack, or an accident defense against an accident. Nothing crosses.</a:t>
+            </a:r>
+          </a:p>
+          <a:p>
+            <a:pPr>
+              <a:lnSpc>
+                <a:spcPct val="110000"/>
+              </a:lnSpc>
+              <a:spcAft>
+                <a:spcPts val="600"/>
+              </a:spcAft>
+            </a:pPr>
+            <a:r>
+              <a:rPr sz="1350" b="0" i="0">
                 <a:solidFill>
                   <a:srgbClr val="444444"/>
                 </a:solidFill>
                 <a:latin typeface="Calibri"/>
               </a:rPr>
-              <a:t>but cannot reproduce its own published benefit</a:t>
-            </a:r>
-          </a:p>
-        </p:txBody>
-      </p:sp>
-      <p:sp>
-        <p:nvSpPr>
-          <p:cNvPr id="20" name="TextBox 19"/>
-          <p:cNvSpPr txBox="1"/>
-          <p:nvPr/>
-        </p:nvSpPr>
-        <p:spPr>
-          <a:xfrm>
-            <a:off x="6492240" y="4078224"/>
-            <a:ext cx="1554480" cy="310896"/>
-          </a:xfrm>
-          <a:prstGeom prst="rect">
-            <a:avLst/>
-          </a:prstGeom>
-          <a:noFill/>
-        </p:spPr>
-        <p:txBody>
-          <a:bodyPr wrap="square" lIns="0" rIns="0" tIns="0" bIns="0" anchor="t">
-            <a:spAutoFit/>
-          </a:bodyPr>
-          <a:lstStyle/>
-          <a:p>
-            <a:pPr algn="l">
-              <a:lnSpc>
-                <a:spcPct val="106000"/>
-              </a:lnSpc>
-              <a:spcAft>
-                <a:spcPts val="0"/>
-              </a:spcAft>
-            </a:pPr>
-            <a:r>
-              <a:rPr sz="1300" b="1" i="0">
-                <a:solidFill>
-                  <a:srgbClr val="111111"/>
-                </a:solidFill>
-                <a:latin typeface="Calibri"/>
-              </a:rPr>
-              <a:t>4 do not run</a:t>
-            </a:r>
-          </a:p>
-        </p:txBody>
-      </p:sp>
-      <p:sp>
-        <p:nvSpPr>
-          <p:cNvPr id="21" name="TextBox 20"/>
-          <p:cNvSpPr txBox="1"/>
-          <p:nvPr/>
-        </p:nvSpPr>
-        <p:spPr>
-          <a:xfrm>
-            <a:off x="8046719" y="4078224"/>
-            <a:ext cx="3383280" cy="310896"/>
-          </a:xfrm>
-          <a:prstGeom prst="rect">
-            <a:avLst/>
-          </a:prstGeom>
-          <a:noFill/>
-        </p:spPr>
-        <p:txBody>
-          <a:bodyPr wrap="square" lIns="0" rIns="0" tIns="0" bIns="0" anchor="t">
-            <a:spAutoFit/>
-          </a:bodyPr>
-          <a:lstStyle/>
-          <a:p>
-            <a:pPr algn="l">
-              <a:lnSpc>
-                <a:spcPct val="106000"/>
-              </a:lnSpc>
-              <a:spcAft>
-                <a:spcPts val="0"/>
-              </a:spcAft>
-            </a:pPr>
-            <a:r>
-              <a:rPr sz="1300" b="0" i="0">
-                <a:solidFill>
-                  <a:srgbClr val="444444"/>
-                </a:solidFill>
-                <a:latin typeface="Calibri"/>
-              </a:rPr>
-              <a:t>missing data, a missing prompt file, a checkpoint with no tokenizer</a:t>
-            </a:r>
-          </a:p>
-        </p:txBody>
-      </p:sp>
-      <p:sp>
-        <p:nvSpPr>
-          <p:cNvPr id="22" name="TextBox 21"/>
-          <p:cNvSpPr txBox="1"/>
-          <p:nvPr/>
-        </p:nvSpPr>
-        <p:spPr>
-          <a:xfrm>
-            <a:off x="731520" y="4937760"/>
-            <a:ext cx="10725912" cy="1463039"/>
-          </a:xfrm>
-          <a:prstGeom prst="rect">
-            <a:avLst/>
-          </a:prstGeom>
-          <a:noFill/>
-        </p:spPr>
-        <p:txBody>
-          <a:bodyPr wrap="square" lIns="0" rIns="0" tIns="0" bIns="0" anchor="t">
-            <a:spAutoFit/>
-          </a:bodyPr>
-          <a:lstStyle/>
-          <a:p>
-            <a:pPr algn="l">
-              <a:lnSpc>
-                <a:spcPct val="110000"/>
-              </a:lnSpc>
-              <a:spcAft>
-                <a:spcPts val="800"/>
-              </a:spcAft>
-            </a:pPr>
-            <a:r>
-              <a:rPr sz="1500" b="1" i="0">
-                <a:solidFill>
-                  <a:srgbClr val="111111"/>
-                </a:solidFill>
-                <a:latin typeface="Calibri"/>
-              </a:rPr>
-              <a:t>Nine defense codebases attempted. Four produced a measurement.</a:t>
-            </a:r>
-          </a:p>
-          <a:p>
-            <a:pPr>
-              <a:lnSpc>
-                <a:spcPct val="110000"/>
-              </a:lnSpc>
-              <a:spcAft>
-                <a:spcPts val="800"/>
-              </a:spcAft>
-            </a:pPr>
-            <a:r>
-              <a:rPr sz="1500" b="0" i="0">
-                <a:solidFill>
-                  <a:srgbClr val="444444"/>
-                </a:solidFill>
-                <a:latin typeface="Calibri"/>
-              </a:rPr>
-              <a:t>That is not a complaint about other people's repositories. It sets the size of what this work can honestly cover, and it is a result the field should know.</a:t>
+              <a:t>The RAG row is 3 attacks against 42 defenses. 126 possible tests. None run.</a:t>
             </a:r>
           </a:p>
         </p:txBody>
@@ -6206,7 +5680,7 @@
                 </a:solidFill>
                 <a:latin typeface="Calibri"/>
               </a:rPr>
-              <a:t>HOW WE CHOOSE A PAIR</a:t>
+              <a:t>WHAT WE CAN REBUILD</a:t>
             </a:r>
           </a:p>
         </p:txBody>
@@ -6248,7 +5722,7 @@
                 </a:solidFill>
                 <a:latin typeface="Cambria"/>
               </a:rPr>
-              <a:t>The map tells us which pairs can even be run</a:t>
+              <a:t>Released code is not the same as working code</a:t>
             </a:r>
           </a:p>
         </p:txBody>
@@ -6304,7 +5778,721 @@
         <p:spPr>
           <a:xfrm>
             <a:off x="731520" y="1920240"/>
-            <a:ext cx="10725912" cy="4480560"/>
+            <a:ext cx="10725912" cy="365760"/>
+          </a:xfrm>
+          <a:prstGeom prst="rect">
+            <a:avLst/>
+          </a:prstGeom>
+          <a:noFill/>
+        </p:spPr>
+        <p:txBody>
+          <a:bodyPr wrap="square" lIns="0" rIns="0" tIns="0" bIns="0" anchor="t">
+            <a:spAutoFit/>
+          </a:bodyPr>
+          <a:lstStyle/>
+          <a:p>
+            <a:pPr algn="l">
+              <a:lnSpc>
+                <a:spcPct val="106000"/>
+              </a:lnSpc>
+              <a:spcAft>
+                <a:spcPts val="0"/>
+              </a:spcAft>
+            </a:pPr>
+            <a:r>
+              <a:rPr sz="1400" b="0" i="0">
+                <a:solidFill>
+                  <a:srgbClr val="444444"/>
+                </a:solidFill>
+                <a:latin typeface="Calibri"/>
+              </a:rPr>
+              <a:t>We only report a number if we can run the authors' own code. So the first question is which code runs at all.</a:t>
+            </a:r>
+          </a:p>
+        </p:txBody>
+      </p:sp>
+      <p:sp>
+        <p:nvSpPr>
+          <p:cNvPr id="6" name="TextBox 5"/>
+          <p:cNvSpPr txBox="1"/>
+          <p:nvPr/>
+        </p:nvSpPr>
+        <p:spPr>
+          <a:xfrm>
+            <a:off x="731520" y="2432304"/>
+            <a:ext cx="4937760" cy="292608"/>
+          </a:xfrm>
+          <a:prstGeom prst="rect">
+            <a:avLst/>
+          </a:prstGeom>
+          <a:noFill/>
+        </p:spPr>
+        <p:txBody>
+          <a:bodyPr wrap="square" lIns="0" rIns="0" tIns="0" bIns="0" anchor="t">
+            <a:spAutoFit/>
+          </a:bodyPr>
+          <a:lstStyle/>
+          <a:p>
+            <a:pPr algn="l">
+              <a:lnSpc>
+                <a:spcPct val="106000"/>
+              </a:lnSpc>
+              <a:spcAft>
+                <a:spcPts val="0"/>
+              </a:spcAft>
+            </a:pPr>
+            <a:r>
+              <a:rPr sz="1500" b="1" i="0">
+                <a:solidFill>
+                  <a:srgbClr val="111111"/>
+                </a:solidFill>
+                <a:latin typeface="Calibri"/>
+              </a:rPr>
+              <a:t>Attacks we rebuilt</a:t>
+            </a:r>
+          </a:p>
+        </p:txBody>
+      </p:sp>
+      <p:sp>
+        <p:nvSpPr>
+          <p:cNvPr id="7" name="TextBox 6"/>
+          <p:cNvSpPr txBox="1"/>
+          <p:nvPr/>
+        </p:nvSpPr>
+        <p:spPr>
+          <a:xfrm>
+            <a:off x="731520" y="2798064"/>
+            <a:ext cx="2286000" cy="310896"/>
+          </a:xfrm>
+          <a:prstGeom prst="rect">
+            <a:avLst/>
+          </a:prstGeom>
+          <a:noFill/>
+        </p:spPr>
+        <p:txBody>
+          <a:bodyPr wrap="square" lIns="0" rIns="0" tIns="0" bIns="0" anchor="t">
+            <a:spAutoFit/>
+          </a:bodyPr>
+          <a:lstStyle/>
+          <a:p>
+            <a:pPr algn="l">
+              <a:lnSpc>
+                <a:spcPct val="106000"/>
+              </a:lnSpc>
+              <a:spcAft>
+                <a:spcPts val="0"/>
+              </a:spcAft>
+            </a:pPr>
+            <a:r>
+              <a:rPr sz="1300" b="1" i="0">
+                <a:solidFill>
+                  <a:srgbClr val="111111"/>
+                </a:solidFill>
+                <a:latin typeface="Calibri"/>
+              </a:rPr>
+              <a:t>Removes the answer</a:t>
+            </a:r>
+          </a:p>
+        </p:txBody>
+      </p:sp>
+      <p:sp>
+        <p:nvSpPr>
+          <p:cNvPr id="8" name="TextBox 7"/>
+          <p:cNvSpPr txBox="1"/>
+          <p:nvPr/>
+        </p:nvSpPr>
+        <p:spPr>
+          <a:xfrm>
+            <a:off x="3017520" y="2798064"/>
+            <a:ext cx="2651760" cy="310896"/>
+          </a:xfrm>
+          <a:prstGeom prst="rect">
+            <a:avLst/>
+          </a:prstGeom>
+          <a:noFill/>
+        </p:spPr>
+        <p:txBody>
+          <a:bodyPr wrap="square" lIns="0" rIns="0" tIns="0" bIns="0" anchor="t">
+            <a:spAutoFit/>
+          </a:bodyPr>
+          <a:lstStyle/>
+          <a:p>
+            <a:pPr algn="l">
+              <a:lnSpc>
+                <a:spcPct val="106000"/>
+              </a:lnSpc>
+              <a:spcAft>
+                <a:spcPts val="0"/>
+              </a:spcAft>
+            </a:pPr>
+            <a:r>
+              <a:rPr sz="1300" b="0" i="0">
+                <a:solidFill>
+                  <a:srgbClr val="444444"/>
+                </a:solidFill>
+                <a:latin typeface="Calibri"/>
+              </a:rPr>
+              <a:t>corpus poisoning</a:t>
+            </a:r>
+          </a:p>
+        </p:txBody>
+      </p:sp>
+      <p:sp>
+        <p:nvSpPr>
+          <p:cNvPr id="9" name="TextBox 8"/>
+          <p:cNvSpPr txBox="1"/>
+          <p:nvPr/>
+        </p:nvSpPr>
+        <p:spPr>
+          <a:xfrm>
+            <a:off x="731520" y="3218688"/>
+            <a:ext cx="2286000" cy="310896"/>
+          </a:xfrm>
+          <a:prstGeom prst="rect">
+            <a:avLst/>
+          </a:prstGeom>
+          <a:noFill/>
+        </p:spPr>
+        <p:txBody>
+          <a:bodyPr wrap="square" lIns="0" rIns="0" tIns="0" bIns="0" anchor="t">
+            <a:spAutoFit/>
+          </a:bodyPr>
+          <a:lstStyle/>
+          <a:p>
+            <a:pPr algn="l">
+              <a:lnSpc>
+                <a:spcPct val="106000"/>
+              </a:lnSpc>
+              <a:spcAft>
+                <a:spcPts val="0"/>
+              </a:spcAft>
+            </a:pPr>
+            <a:r>
+              <a:rPr sz="1300" b="1" i="0">
+                <a:solidFill>
+                  <a:srgbClr val="111111"/>
+                </a:solidFill>
+                <a:latin typeface="Calibri"/>
+              </a:rPr>
+              <a:t>Inserts a false answer</a:t>
+            </a:r>
+          </a:p>
+        </p:txBody>
+      </p:sp>
+      <p:sp>
+        <p:nvSpPr>
+          <p:cNvPr id="10" name="TextBox 9"/>
+          <p:cNvSpPr txBox="1"/>
+          <p:nvPr/>
+        </p:nvSpPr>
+        <p:spPr>
+          <a:xfrm>
+            <a:off x="3017520" y="3218688"/>
+            <a:ext cx="2651760" cy="310896"/>
+          </a:xfrm>
+          <a:prstGeom prst="rect">
+            <a:avLst/>
+          </a:prstGeom>
+          <a:noFill/>
+        </p:spPr>
+        <p:txBody>
+          <a:bodyPr wrap="square" lIns="0" rIns="0" tIns="0" bIns="0" anchor="t">
+            <a:spAutoFit/>
+          </a:bodyPr>
+          <a:lstStyle/>
+          <a:p>
+            <a:pPr algn="l">
+              <a:lnSpc>
+                <a:spcPct val="106000"/>
+              </a:lnSpc>
+              <a:spcAft>
+                <a:spcPts val="0"/>
+              </a:spcAft>
+            </a:pPr>
+            <a:r>
+              <a:rPr sz="1300" b="0" i="0">
+                <a:solidFill>
+                  <a:srgbClr val="444444"/>
+                </a:solidFill>
+                <a:latin typeface="Calibri"/>
+              </a:rPr>
+              <a:t>PoisonedRAG</a:t>
+            </a:r>
+          </a:p>
+        </p:txBody>
+      </p:sp>
+      <p:sp>
+        <p:nvSpPr>
+          <p:cNvPr id="11" name="TextBox 10"/>
+          <p:cNvSpPr txBox="1"/>
+          <p:nvPr/>
+        </p:nvSpPr>
+        <p:spPr>
+          <a:xfrm>
+            <a:off x="731520" y="3639312"/>
+            <a:ext cx="2286000" cy="310896"/>
+          </a:xfrm>
+          <a:prstGeom prst="rect">
+            <a:avLst/>
+          </a:prstGeom>
+          <a:noFill/>
+        </p:spPr>
+        <p:txBody>
+          <a:bodyPr wrap="square" lIns="0" rIns="0" tIns="0" bIns="0" anchor="t">
+            <a:spAutoFit/>
+          </a:bodyPr>
+          <a:lstStyle/>
+          <a:p>
+            <a:pPr algn="l">
+              <a:lnSpc>
+                <a:spcPct val="106000"/>
+              </a:lnSpc>
+              <a:spcAft>
+                <a:spcPts val="0"/>
+              </a:spcAft>
+            </a:pPr>
+            <a:r>
+              <a:rPr sz="1300" b="1" i="0">
+                <a:solidFill>
+                  <a:srgbClr val="111111"/>
+                </a:solidFill>
+                <a:latin typeface="Calibri"/>
+              </a:rPr>
+              <a:t>Forces a refusal</a:t>
+            </a:r>
+          </a:p>
+        </p:txBody>
+      </p:sp>
+      <p:sp>
+        <p:nvSpPr>
+          <p:cNvPr id="12" name="TextBox 11"/>
+          <p:cNvSpPr txBox="1"/>
+          <p:nvPr/>
+        </p:nvSpPr>
+        <p:spPr>
+          <a:xfrm>
+            <a:off x="3017520" y="3639312"/>
+            <a:ext cx="2651760" cy="310896"/>
+          </a:xfrm>
+          <a:prstGeom prst="rect">
+            <a:avLst/>
+          </a:prstGeom>
+          <a:noFill/>
+        </p:spPr>
+        <p:txBody>
+          <a:bodyPr wrap="square" lIns="0" rIns="0" tIns="0" bIns="0" anchor="t">
+            <a:spAutoFit/>
+          </a:bodyPr>
+          <a:lstStyle/>
+          <a:p>
+            <a:pPr algn="l">
+              <a:lnSpc>
+                <a:spcPct val="106000"/>
+              </a:lnSpc>
+              <a:spcAft>
+                <a:spcPts val="0"/>
+              </a:spcAft>
+            </a:pPr>
+            <a:r>
+              <a:rPr sz="1300" b="0" i="0">
+                <a:solidFill>
+                  <a:srgbClr val="444444"/>
+                </a:solidFill>
+                <a:latin typeface="Calibri"/>
+              </a:rPr>
+              <a:t>BadRAG DoS</a:t>
+            </a:r>
+          </a:p>
+        </p:txBody>
+      </p:sp>
+      <p:sp>
+        <p:nvSpPr>
+          <p:cNvPr id="13" name="TextBox 12"/>
+          <p:cNvSpPr txBox="1"/>
+          <p:nvPr/>
+        </p:nvSpPr>
+        <p:spPr>
+          <a:xfrm>
+            <a:off x="731520" y="4059936"/>
+            <a:ext cx="2286000" cy="310896"/>
+          </a:xfrm>
+          <a:prstGeom prst="rect">
+            <a:avLst/>
+          </a:prstGeom>
+          <a:noFill/>
+        </p:spPr>
+        <p:txBody>
+          <a:bodyPr wrap="square" lIns="0" rIns="0" tIns="0" bIns="0" anchor="t">
+            <a:spAutoFit/>
+          </a:bodyPr>
+          <a:lstStyle/>
+          <a:p>
+            <a:pPr algn="l">
+              <a:lnSpc>
+                <a:spcPct val="106000"/>
+              </a:lnSpc>
+              <a:spcAft>
+                <a:spcPts val="0"/>
+              </a:spcAft>
+            </a:pPr>
+            <a:r>
+              <a:rPr sz="1300" b="1" i="0">
+                <a:solidFill>
+                  <a:srgbClr val="111111"/>
+                </a:solidFill>
+                <a:latin typeface="Calibri"/>
+              </a:rPr>
+              <a:t>Changes only the tone</a:t>
+            </a:r>
+          </a:p>
+        </p:txBody>
+      </p:sp>
+      <p:sp>
+        <p:nvSpPr>
+          <p:cNvPr id="14" name="TextBox 13"/>
+          <p:cNvSpPr txBox="1"/>
+          <p:nvPr/>
+        </p:nvSpPr>
+        <p:spPr>
+          <a:xfrm>
+            <a:off x="3017520" y="4059936"/>
+            <a:ext cx="2651760" cy="310896"/>
+          </a:xfrm>
+          <a:prstGeom prst="rect">
+            <a:avLst/>
+          </a:prstGeom>
+          <a:noFill/>
+        </p:spPr>
+        <p:txBody>
+          <a:bodyPr wrap="square" lIns="0" rIns="0" tIns="0" bIns="0" anchor="t">
+            <a:spAutoFit/>
+          </a:bodyPr>
+          <a:lstStyle/>
+          <a:p>
+            <a:pPr algn="l">
+              <a:lnSpc>
+                <a:spcPct val="106000"/>
+              </a:lnSpc>
+              <a:spcAft>
+                <a:spcPts val="0"/>
+              </a:spcAft>
+            </a:pPr>
+            <a:r>
+              <a:rPr sz="1300" b="0" i="0">
+                <a:solidFill>
+                  <a:srgbClr val="444444"/>
+                </a:solidFill>
+                <a:latin typeface="Calibri"/>
+              </a:rPr>
+              <a:t>BadRAG Selective-Fact</a:t>
+            </a:r>
+          </a:p>
+        </p:txBody>
+      </p:sp>
+      <p:sp>
+        <p:nvSpPr>
+          <p:cNvPr id="15" name="TextBox 14"/>
+          <p:cNvSpPr txBox="1"/>
+          <p:nvPr/>
+        </p:nvSpPr>
+        <p:spPr>
+          <a:xfrm>
+            <a:off x="6492240" y="2432304"/>
+            <a:ext cx="4937760" cy="292608"/>
+          </a:xfrm>
+          <a:prstGeom prst="rect">
+            <a:avLst/>
+          </a:prstGeom>
+          <a:noFill/>
+        </p:spPr>
+        <p:txBody>
+          <a:bodyPr wrap="square" lIns="0" rIns="0" tIns="0" bIns="0" anchor="t">
+            <a:spAutoFit/>
+          </a:bodyPr>
+          <a:lstStyle/>
+          <a:p>
+            <a:pPr algn="l">
+              <a:lnSpc>
+                <a:spcPct val="106000"/>
+              </a:lnSpc>
+              <a:spcAft>
+                <a:spcPts val="0"/>
+              </a:spcAft>
+            </a:pPr>
+            <a:r>
+              <a:rPr sz="1500" b="1" i="0">
+                <a:solidFill>
+                  <a:srgbClr val="111111"/>
+                </a:solidFill>
+                <a:latin typeface="Calibri"/>
+              </a:rPr>
+              <a:t>Defense codebases we opened</a:t>
+            </a:r>
+          </a:p>
+        </p:txBody>
+      </p:sp>
+      <p:sp>
+        <p:nvSpPr>
+          <p:cNvPr id="16" name="TextBox 15"/>
+          <p:cNvSpPr txBox="1"/>
+          <p:nvPr/>
+        </p:nvSpPr>
+        <p:spPr>
+          <a:xfrm>
+            <a:off x="6492240" y="2798064"/>
+            <a:ext cx="1554480" cy="310896"/>
+          </a:xfrm>
+          <a:prstGeom prst="rect">
+            <a:avLst/>
+          </a:prstGeom>
+          <a:noFill/>
+        </p:spPr>
+        <p:txBody>
+          <a:bodyPr wrap="square" lIns="0" rIns="0" tIns="0" bIns="0" anchor="t">
+            <a:spAutoFit/>
+          </a:bodyPr>
+          <a:lstStyle/>
+          <a:p>
+            <a:pPr algn="l">
+              <a:lnSpc>
+                <a:spcPct val="106000"/>
+              </a:lnSpc>
+              <a:spcAft>
+                <a:spcPts val="0"/>
+              </a:spcAft>
+            </a:pPr>
+            <a:r>
+              <a:rPr sz="1300" b="1" i="0">
+                <a:solidFill>
+                  <a:srgbClr val="111111"/>
+                </a:solidFill>
+                <a:latin typeface="Calibri"/>
+              </a:rPr>
+              <a:t>4 run</a:t>
+            </a:r>
+          </a:p>
+        </p:txBody>
+      </p:sp>
+      <p:sp>
+        <p:nvSpPr>
+          <p:cNvPr id="17" name="TextBox 16"/>
+          <p:cNvSpPr txBox="1"/>
+          <p:nvPr/>
+        </p:nvSpPr>
+        <p:spPr>
+          <a:xfrm>
+            <a:off x="8046719" y="2798064"/>
+            <a:ext cx="3383280" cy="310896"/>
+          </a:xfrm>
+          <a:prstGeom prst="rect">
+            <a:avLst/>
+          </a:prstGeom>
+          <a:noFill/>
+        </p:spPr>
+        <p:txBody>
+          <a:bodyPr wrap="square" lIns="0" rIns="0" tIns="0" bIns="0" anchor="t">
+            <a:spAutoFit/>
+          </a:bodyPr>
+          <a:lstStyle/>
+          <a:p>
+            <a:pPr algn="l">
+              <a:lnSpc>
+                <a:spcPct val="106000"/>
+              </a:lnSpc>
+              <a:spcAft>
+                <a:spcPts val="0"/>
+              </a:spcAft>
+            </a:pPr>
+            <a:r>
+              <a:rPr sz="1300" b="0" i="0">
+                <a:solidFill>
+                  <a:srgbClr val="444444"/>
+                </a:solidFill>
+                <a:latin typeface="Calibri"/>
+              </a:rPr>
+              <a:t>and give a usable measurement</a:t>
+            </a:r>
+          </a:p>
+        </p:txBody>
+      </p:sp>
+      <p:sp>
+        <p:nvSpPr>
+          <p:cNvPr id="18" name="TextBox 17"/>
+          <p:cNvSpPr txBox="1"/>
+          <p:nvPr/>
+        </p:nvSpPr>
+        <p:spPr>
+          <a:xfrm>
+            <a:off x="6492240" y="3438144"/>
+            <a:ext cx="1554480" cy="310896"/>
+          </a:xfrm>
+          <a:prstGeom prst="rect">
+            <a:avLst/>
+          </a:prstGeom>
+          <a:noFill/>
+        </p:spPr>
+        <p:txBody>
+          <a:bodyPr wrap="square" lIns="0" rIns="0" tIns="0" bIns="0" anchor="t">
+            <a:spAutoFit/>
+          </a:bodyPr>
+          <a:lstStyle/>
+          <a:p>
+            <a:pPr algn="l">
+              <a:lnSpc>
+                <a:spcPct val="106000"/>
+              </a:lnSpc>
+              <a:spcAft>
+                <a:spcPts val="0"/>
+              </a:spcAft>
+            </a:pPr>
+            <a:r>
+              <a:rPr sz="1300" b="1" i="0">
+                <a:solidFill>
+                  <a:srgbClr val="111111"/>
+                </a:solidFill>
+                <a:latin typeface="Calibri"/>
+              </a:rPr>
+              <a:t>1 runs</a:t>
+            </a:r>
+          </a:p>
+        </p:txBody>
+      </p:sp>
+      <p:sp>
+        <p:nvSpPr>
+          <p:cNvPr id="19" name="TextBox 18"/>
+          <p:cNvSpPr txBox="1"/>
+          <p:nvPr/>
+        </p:nvSpPr>
+        <p:spPr>
+          <a:xfrm>
+            <a:off x="8046719" y="3438144"/>
+            <a:ext cx="3383280" cy="310896"/>
+          </a:xfrm>
+          <a:prstGeom prst="rect">
+            <a:avLst/>
+          </a:prstGeom>
+          <a:noFill/>
+        </p:spPr>
+        <p:txBody>
+          <a:bodyPr wrap="square" lIns="0" rIns="0" tIns="0" bIns="0" anchor="t">
+            <a:spAutoFit/>
+          </a:bodyPr>
+          <a:lstStyle/>
+          <a:p>
+            <a:pPr algn="l">
+              <a:lnSpc>
+                <a:spcPct val="106000"/>
+              </a:lnSpc>
+              <a:spcAft>
+                <a:spcPts val="0"/>
+              </a:spcAft>
+            </a:pPr>
+            <a:r>
+              <a:rPr sz="1300" b="0" i="0">
+                <a:solidFill>
+                  <a:srgbClr val="444444"/>
+                </a:solidFill>
+                <a:latin typeface="Calibri"/>
+              </a:rPr>
+              <a:t>but cannot reproduce its own published benefit</a:t>
+            </a:r>
+          </a:p>
+        </p:txBody>
+      </p:sp>
+      <p:sp>
+        <p:nvSpPr>
+          <p:cNvPr id="20" name="TextBox 19"/>
+          <p:cNvSpPr txBox="1"/>
+          <p:nvPr/>
+        </p:nvSpPr>
+        <p:spPr>
+          <a:xfrm>
+            <a:off x="6492240" y="4078224"/>
+            <a:ext cx="1554480" cy="310896"/>
+          </a:xfrm>
+          <a:prstGeom prst="rect">
+            <a:avLst/>
+          </a:prstGeom>
+          <a:noFill/>
+        </p:spPr>
+        <p:txBody>
+          <a:bodyPr wrap="square" lIns="0" rIns="0" tIns="0" bIns="0" anchor="t">
+            <a:spAutoFit/>
+          </a:bodyPr>
+          <a:lstStyle/>
+          <a:p>
+            <a:pPr algn="l">
+              <a:lnSpc>
+                <a:spcPct val="106000"/>
+              </a:lnSpc>
+              <a:spcAft>
+                <a:spcPts val="0"/>
+              </a:spcAft>
+            </a:pPr>
+            <a:r>
+              <a:rPr sz="1300" b="1" i="0">
+                <a:solidFill>
+                  <a:srgbClr val="111111"/>
+                </a:solidFill>
+                <a:latin typeface="Calibri"/>
+              </a:rPr>
+              <a:t>4 do not run</a:t>
+            </a:r>
+          </a:p>
+        </p:txBody>
+      </p:sp>
+      <p:sp>
+        <p:nvSpPr>
+          <p:cNvPr id="21" name="TextBox 20"/>
+          <p:cNvSpPr txBox="1"/>
+          <p:nvPr/>
+        </p:nvSpPr>
+        <p:spPr>
+          <a:xfrm>
+            <a:off x="8046719" y="4078224"/>
+            <a:ext cx="3383280" cy="310896"/>
+          </a:xfrm>
+          <a:prstGeom prst="rect">
+            <a:avLst/>
+          </a:prstGeom>
+          <a:noFill/>
+        </p:spPr>
+        <p:txBody>
+          <a:bodyPr wrap="square" lIns="0" rIns="0" tIns="0" bIns="0" anchor="t">
+            <a:spAutoFit/>
+          </a:bodyPr>
+          <a:lstStyle/>
+          <a:p>
+            <a:pPr algn="l">
+              <a:lnSpc>
+                <a:spcPct val="106000"/>
+              </a:lnSpc>
+              <a:spcAft>
+                <a:spcPts val="0"/>
+              </a:spcAft>
+            </a:pPr>
+            <a:r>
+              <a:rPr sz="1300" b="0" i="0">
+                <a:solidFill>
+                  <a:srgbClr val="444444"/>
+                </a:solidFill>
+                <a:latin typeface="Calibri"/>
+              </a:rPr>
+              <a:t>missing data, a missing prompt file, a checkpoint with no tokenizer</a:t>
+            </a:r>
+          </a:p>
+        </p:txBody>
+      </p:sp>
+      <p:sp>
+        <p:nvSpPr>
+          <p:cNvPr id="22" name="TextBox 21"/>
+          <p:cNvSpPr txBox="1"/>
+          <p:nvPr/>
+        </p:nvSpPr>
+        <p:spPr>
+          <a:xfrm>
+            <a:off x="731520" y="4937760"/>
+            <a:ext cx="10725912" cy="1463039"/>
           </a:xfrm>
           <a:prstGeom prst="rect">
             <a:avLst/>
@@ -6322,7 +6510,7 @@
                 <a:spcPct val="110000"/>
               </a:lnSpc>
               <a:spcAft>
-                <a:spcPts val="900"/>
+                <a:spcPts val="800"/>
               </a:spcAft>
             </a:pPr>
             <a:r>
@@ -6332,7 +6520,7 @@
                 </a:solidFill>
                 <a:latin typeface="Calibri"/>
               </a:rPr>
-              <a:t>A defense and an attack belong together when they sit in the same place on the map: the same route in, and the same thing going wrong.</a:t>
+              <a:t>Nine defense codebases attempted. Four produced a measurement.</a:t>
             </a:r>
           </a:p>
           <a:p>
@@ -6341,7 +6529,7 @@
                 <a:spcPct val="110000"/>
               </a:lnSpc>
               <a:spcAft>
-                <a:spcPts val="900"/>
+                <a:spcPts val="800"/>
               </a:spcAft>
             </a:pPr>
             <a:r>
@@ -6351,530 +6539,7 @@
                 </a:solidFill>
                 <a:latin typeface="Calibri"/>
               </a:rPr>
-              <a:t>If a defense was built for a failure that happens by accident, and an attack causes the same failure on purpose through the same route, then the defense has a claim to answer. Nobody has made it answer.</a:t>
-            </a:r>
-          </a:p>
-        </p:txBody>
-      </p:sp>
-      <p:sp>
-        <p:nvSpPr>
-          <p:cNvPr id="6" name="TextBox 5"/>
-          <p:cNvSpPr txBox="1"/>
-          <p:nvPr/>
-        </p:nvSpPr>
-        <p:spPr>
-          <a:xfrm>
-            <a:off x="731520" y="3182112"/>
-            <a:ext cx="10725912" cy="310896"/>
-          </a:xfrm>
-          <a:prstGeom prst="rect">
-            <a:avLst/>
-          </a:prstGeom>
-          <a:noFill/>
-        </p:spPr>
-        <p:txBody>
-          <a:bodyPr wrap="square" lIns="0" rIns="0" tIns="0" bIns="0" anchor="t">
-            <a:spAutoFit/>
-          </a:bodyPr>
-          <a:lstStyle/>
-          <a:p>
-            <a:pPr algn="l">
-              <a:lnSpc>
-                <a:spcPct val="106000"/>
-              </a:lnSpc>
-              <a:spcAft>
-                <a:spcPts val="800"/>
-              </a:spcAft>
-            </a:pPr>
-            <a:r>
-              <a:rPr sz="1500" b="1" i="0">
-                <a:solidFill>
-                  <a:srgbClr val="111111"/>
-                </a:solidFill>
-                <a:latin typeface="Calibri"/>
-              </a:rPr>
-              <a:t>The cell we started in</a:t>
-            </a:r>
-          </a:p>
-        </p:txBody>
-      </p:sp>
-      <p:sp>
-        <p:nvSpPr>
-          <p:cNvPr id="7" name="TextBox 6"/>
-          <p:cNvSpPr txBox="1"/>
-          <p:nvPr/>
-        </p:nvSpPr>
-        <p:spPr>
-          <a:xfrm>
-            <a:off x="731520" y="3547872"/>
-            <a:ext cx="3291840" cy="310896"/>
-          </a:xfrm>
-          <a:prstGeom prst="rect">
-            <a:avLst/>
-          </a:prstGeom>
-          <a:noFill/>
-        </p:spPr>
-        <p:txBody>
-          <a:bodyPr wrap="square" lIns="0" rIns="0" tIns="0" bIns="0" anchor="t">
-            <a:spAutoFit/>
-          </a:bodyPr>
-          <a:lstStyle/>
-          <a:p>
-            <a:pPr algn="l">
-              <a:lnSpc>
-                <a:spcPct val="106000"/>
-              </a:lnSpc>
-              <a:spcAft>
-                <a:spcPts val="0"/>
-              </a:spcAft>
-            </a:pPr>
-            <a:r>
-              <a:rPr sz="1350" b="1" i="0">
-                <a:solidFill>
-                  <a:srgbClr val="111111"/>
-                </a:solidFill>
-                <a:latin typeface="Calibri"/>
-              </a:rPr>
-              <a:t>Route in</a:t>
-            </a:r>
-          </a:p>
-        </p:txBody>
-      </p:sp>
-      <p:sp>
-        <p:nvSpPr>
-          <p:cNvPr id="8" name="TextBox 7"/>
-          <p:cNvSpPr txBox="1"/>
-          <p:nvPr/>
-        </p:nvSpPr>
-        <p:spPr>
-          <a:xfrm>
-            <a:off x="4023360" y="3547872"/>
-            <a:ext cx="7434072" cy="310896"/>
-          </a:xfrm>
-          <a:prstGeom prst="rect">
-            <a:avLst/>
-          </a:prstGeom>
-          <a:noFill/>
-        </p:spPr>
-        <p:txBody>
-          <a:bodyPr wrap="square" lIns="0" rIns="0" tIns="0" bIns="0" anchor="t">
-            <a:spAutoFit/>
-          </a:bodyPr>
-          <a:lstStyle/>
-          <a:p>
-            <a:pPr algn="l">
-              <a:lnSpc>
-                <a:spcPct val="106000"/>
-              </a:lnSpc>
-              <a:spcAft>
-                <a:spcPts val="0"/>
-              </a:spcAft>
-            </a:pPr>
-            <a:r>
-              <a:rPr sz="1350" b="0" i="0">
-                <a:solidFill>
-                  <a:srgbClr val="444444"/>
-                </a:solidFill>
-                <a:latin typeface="Calibri"/>
-              </a:rPr>
-              <a:t>a document returned by a search step</a:t>
-            </a:r>
-          </a:p>
-        </p:txBody>
-      </p:sp>
-      <p:sp>
-        <p:nvSpPr>
-          <p:cNvPr id="9" name="TextBox 8"/>
-          <p:cNvSpPr txBox="1"/>
-          <p:nvPr/>
-        </p:nvSpPr>
-        <p:spPr>
-          <a:xfrm>
-            <a:off x="731520" y="3968496"/>
-            <a:ext cx="3291840" cy="310896"/>
-          </a:xfrm>
-          <a:prstGeom prst="rect">
-            <a:avLst/>
-          </a:prstGeom>
-          <a:noFill/>
-        </p:spPr>
-        <p:txBody>
-          <a:bodyPr wrap="square" lIns="0" rIns="0" tIns="0" bIns="0" anchor="t">
-            <a:spAutoFit/>
-          </a:bodyPr>
-          <a:lstStyle/>
-          <a:p>
-            <a:pPr algn="l">
-              <a:lnSpc>
-                <a:spcPct val="106000"/>
-              </a:lnSpc>
-              <a:spcAft>
-                <a:spcPts val="0"/>
-              </a:spcAft>
-            </a:pPr>
-            <a:r>
-              <a:rPr sz="1350" b="1" i="0">
-                <a:solidFill>
-                  <a:srgbClr val="111111"/>
-                </a:solidFill>
-                <a:latin typeface="Calibri"/>
-              </a:rPr>
-              <a:t>What goes wrong</a:t>
-            </a:r>
-          </a:p>
-        </p:txBody>
-      </p:sp>
-      <p:sp>
-        <p:nvSpPr>
-          <p:cNvPr id="10" name="TextBox 9"/>
-          <p:cNvSpPr txBox="1"/>
-          <p:nvPr/>
-        </p:nvSpPr>
-        <p:spPr>
-          <a:xfrm>
-            <a:off x="4023360" y="3968496"/>
-            <a:ext cx="7434072" cy="310896"/>
-          </a:xfrm>
-          <a:prstGeom prst="rect">
-            <a:avLst/>
-          </a:prstGeom>
-          <a:noFill/>
-        </p:spPr>
-        <p:txBody>
-          <a:bodyPr wrap="square" lIns="0" rIns="0" tIns="0" bIns="0" anchor="t">
-            <a:spAutoFit/>
-          </a:bodyPr>
-          <a:lstStyle/>
-          <a:p>
-            <a:pPr algn="l">
-              <a:lnSpc>
-                <a:spcPct val="106000"/>
-              </a:lnSpc>
-              <a:spcAft>
-                <a:spcPts val="0"/>
-              </a:spcAft>
-            </a:pPr>
-            <a:r>
-              <a:rPr sz="1350" b="0" i="0">
-                <a:solidFill>
-                  <a:srgbClr val="444444"/>
-                </a:solidFill>
-                <a:latin typeface="Calibri"/>
-              </a:rPr>
-              <a:t>the agent answers from false content and nothing signals it</a:t>
-            </a:r>
-          </a:p>
-        </p:txBody>
-      </p:sp>
-      <p:sp>
-        <p:nvSpPr>
-          <p:cNvPr id="11" name="TextBox 10"/>
-          <p:cNvSpPr txBox="1"/>
-          <p:nvPr/>
-        </p:nvSpPr>
-        <p:spPr>
-          <a:xfrm>
-            <a:off x="731520" y="4389120"/>
-            <a:ext cx="3291840" cy="310896"/>
-          </a:xfrm>
-          <a:prstGeom prst="rect">
-            <a:avLst/>
-          </a:prstGeom>
-          <a:noFill/>
-        </p:spPr>
-        <p:txBody>
-          <a:bodyPr wrap="square" lIns="0" rIns="0" tIns="0" bIns="0" anchor="t">
-            <a:spAutoFit/>
-          </a:bodyPr>
-          <a:lstStyle/>
-          <a:p>
-            <a:pPr algn="l">
-              <a:lnSpc>
-                <a:spcPct val="106000"/>
-              </a:lnSpc>
-              <a:spcAft>
-                <a:spcPts val="0"/>
-              </a:spcAft>
-            </a:pPr>
-            <a:r>
-              <a:rPr sz="1350" b="1" i="0">
-                <a:solidFill>
-                  <a:srgbClr val="111111"/>
-                </a:solidFill>
-                <a:latin typeface="Calibri"/>
-              </a:rPr>
-              <a:t>On the attack side</a:t>
-            </a:r>
-          </a:p>
-        </p:txBody>
-      </p:sp>
-      <p:sp>
-        <p:nvSpPr>
-          <p:cNvPr id="12" name="TextBox 11"/>
-          <p:cNvSpPr txBox="1"/>
-          <p:nvPr/>
-        </p:nvSpPr>
-        <p:spPr>
-          <a:xfrm>
-            <a:off x="4023360" y="4389120"/>
-            <a:ext cx="7434072" cy="310896"/>
-          </a:xfrm>
-          <a:prstGeom prst="rect">
-            <a:avLst/>
-          </a:prstGeom>
-          <a:noFill/>
-        </p:spPr>
-        <p:txBody>
-          <a:bodyPr wrap="square" lIns="0" rIns="0" tIns="0" bIns="0" anchor="t">
-            <a:spAutoFit/>
-          </a:bodyPr>
-          <a:lstStyle/>
-          <a:p>
-            <a:pPr algn="l">
-              <a:lnSpc>
-                <a:spcPct val="106000"/>
-              </a:lnSpc>
-              <a:spcAft>
-                <a:spcPts val="0"/>
-              </a:spcAft>
-            </a:pPr>
-            <a:r>
-              <a:rPr sz="1350" b="0" i="0">
-                <a:solidFill>
-                  <a:srgbClr val="444444"/>
-                </a:solidFill>
-                <a:latin typeface="Calibri"/>
-              </a:rPr>
-              <a:t>3 named attacks, all deliberate</a:t>
-            </a:r>
-          </a:p>
-        </p:txBody>
-      </p:sp>
-      <p:sp>
-        <p:nvSpPr>
-          <p:cNvPr id="13" name="TextBox 12"/>
-          <p:cNvSpPr txBox="1"/>
-          <p:nvPr/>
-        </p:nvSpPr>
-        <p:spPr>
-          <a:xfrm>
-            <a:off x="731520" y="4809744"/>
-            <a:ext cx="3291840" cy="310896"/>
-          </a:xfrm>
-          <a:prstGeom prst="rect">
-            <a:avLst/>
-          </a:prstGeom>
-          <a:noFill/>
-        </p:spPr>
-        <p:txBody>
-          <a:bodyPr wrap="square" lIns="0" rIns="0" tIns="0" bIns="0" anchor="t">
-            <a:spAutoFit/>
-          </a:bodyPr>
-          <a:lstStyle/>
-          <a:p>
-            <a:pPr algn="l">
-              <a:lnSpc>
-                <a:spcPct val="106000"/>
-              </a:lnSpc>
-              <a:spcAft>
-                <a:spcPts val="0"/>
-              </a:spcAft>
-            </a:pPr>
-            <a:r>
-              <a:rPr sz="1350" b="1" i="0">
-                <a:solidFill>
-                  <a:srgbClr val="111111"/>
-                </a:solidFill>
-                <a:latin typeface="Calibri"/>
-              </a:rPr>
-              <a:t>On the defense side</a:t>
-            </a:r>
-          </a:p>
-        </p:txBody>
-      </p:sp>
-      <p:sp>
-        <p:nvSpPr>
-          <p:cNvPr id="14" name="TextBox 13"/>
-          <p:cNvSpPr txBox="1"/>
-          <p:nvPr/>
-        </p:nvSpPr>
-        <p:spPr>
-          <a:xfrm>
-            <a:off x="4023360" y="4809744"/>
-            <a:ext cx="7434072" cy="310896"/>
-          </a:xfrm>
-          <a:prstGeom prst="rect">
-            <a:avLst/>
-          </a:prstGeom>
-          <a:noFill/>
-        </p:spPr>
-        <p:txBody>
-          <a:bodyPr wrap="square" lIns="0" rIns="0" tIns="0" bIns="0" anchor="t">
-            <a:spAutoFit/>
-          </a:bodyPr>
-          <a:lstStyle/>
-          <a:p>
-            <a:pPr algn="l">
-              <a:lnSpc>
-                <a:spcPct val="106000"/>
-              </a:lnSpc>
-              <a:spcAft>
-                <a:spcPts val="0"/>
-              </a:spcAft>
-            </a:pPr>
-            <a:r>
-              <a:rPr sz="1350" b="0" i="0">
-                <a:solidFill>
-                  <a:srgbClr val="444444"/>
-                </a:solidFill>
-                <a:latin typeface="Calibri"/>
-              </a:rPr>
-              <a:t>42 named defenses, all built for the accidental version</a:t>
-            </a:r>
-          </a:p>
-        </p:txBody>
-      </p:sp>
-      <p:sp>
-        <p:nvSpPr>
-          <p:cNvPr id="15" name="TextBox 14"/>
-          <p:cNvSpPr txBox="1"/>
-          <p:nvPr/>
-        </p:nvSpPr>
-        <p:spPr>
-          <a:xfrm>
-            <a:off x="731520" y="5230368"/>
-            <a:ext cx="3291840" cy="310896"/>
-          </a:xfrm>
-          <a:prstGeom prst="rect">
-            <a:avLst/>
-          </a:prstGeom>
-          <a:noFill/>
-        </p:spPr>
-        <p:txBody>
-          <a:bodyPr wrap="square" lIns="0" rIns="0" tIns="0" bIns="0" anchor="t">
-            <a:spAutoFit/>
-          </a:bodyPr>
-          <a:lstStyle/>
-          <a:p>
-            <a:pPr algn="l">
-              <a:lnSpc>
-                <a:spcPct val="106000"/>
-              </a:lnSpc>
-              <a:spcAft>
-                <a:spcPts val="0"/>
-              </a:spcAft>
-            </a:pPr>
-            <a:r>
-              <a:rPr sz="1350" b="1" i="0">
-                <a:solidFill>
-                  <a:srgbClr val="111111"/>
-                </a:solidFill>
-                <a:latin typeface="Calibri"/>
-              </a:rPr>
-              <a:t>Tested against each other</a:t>
-            </a:r>
-          </a:p>
-        </p:txBody>
-      </p:sp>
-      <p:sp>
-        <p:nvSpPr>
-          <p:cNvPr id="16" name="TextBox 15"/>
-          <p:cNvSpPr txBox="1"/>
-          <p:nvPr/>
-        </p:nvSpPr>
-        <p:spPr>
-          <a:xfrm>
-            <a:off x="4023360" y="5230368"/>
-            <a:ext cx="7434072" cy="310896"/>
-          </a:xfrm>
-          <a:prstGeom prst="rect">
-            <a:avLst/>
-          </a:prstGeom>
-          <a:noFill/>
-        </p:spPr>
-        <p:txBody>
-          <a:bodyPr wrap="square" lIns="0" rIns="0" tIns="0" bIns="0" anchor="t">
-            <a:spAutoFit/>
-          </a:bodyPr>
-          <a:lstStyle/>
-          <a:p>
-            <a:pPr algn="l">
-              <a:lnSpc>
-                <a:spcPct val="106000"/>
-              </a:lnSpc>
-              <a:spcAft>
-                <a:spcPts val="0"/>
-              </a:spcAft>
-            </a:pPr>
-            <a:r>
-              <a:rPr sz="1350" b="0" i="0">
-                <a:solidFill>
-                  <a:srgbClr val="444444"/>
-                </a:solidFill>
-                <a:latin typeface="Calibri"/>
-              </a:rPr>
-              <a:t>none of them, by anyone</a:t>
-            </a:r>
-          </a:p>
-        </p:txBody>
-      </p:sp>
-      <p:sp>
-        <p:nvSpPr>
-          <p:cNvPr id="17" name="TextBox 16"/>
-          <p:cNvSpPr txBox="1"/>
-          <p:nvPr/>
-        </p:nvSpPr>
-        <p:spPr>
-          <a:xfrm>
-            <a:off x="731520" y="5742432"/>
-            <a:ext cx="10725912" cy="658367"/>
-          </a:xfrm>
-          <a:prstGeom prst="rect">
-            <a:avLst/>
-          </a:prstGeom>
-          <a:noFill/>
-        </p:spPr>
-        <p:txBody>
-          <a:bodyPr wrap="square" lIns="0" rIns="0" tIns="0" bIns="0" anchor="t">
-            <a:spAutoFit/>
-          </a:bodyPr>
-          <a:lstStyle/>
-          <a:p>
-            <a:pPr algn="l">
-              <a:lnSpc>
-                <a:spcPct val="110000"/>
-              </a:lnSpc>
-              <a:spcAft>
-                <a:spcPts val="600"/>
-              </a:spcAft>
-            </a:pPr>
-            <a:r>
-              <a:rPr sz="1350" b="1" i="0">
-                <a:solidFill>
-                  <a:srgbClr val="111111"/>
-                </a:solidFill>
-                <a:latin typeface="Calibri"/>
-              </a:rPr>
-              <a:t>The map picked the first experiments, not us. Three of the four defenses we ran sit in that cell. The fourth answers the same failure arriving by a different route.</a:t>
-            </a:r>
-          </a:p>
-          <a:p>
-            <a:pPr>
-              <a:lnSpc>
-                <a:spcPct val="110000"/>
-              </a:lnSpc>
-              <a:spcAft>
-                <a:spcPts val="600"/>
-              </a:spcAft>
-            </a:pPr>
-            <a:r>
-              <a:rPr sz="1350" b="0" i="0">
-                <a:solidFill>
-                  <a:srgbClr val="444444"/>
-                </a:solidFill>
-                <a:latin typeface="Calibri"/>
-              </a:rPr>
-              <a:t>We then widened the attack set along the same route. Two more attacks also poison a retrieved document, and testing those as well is how we checked that a result was about the defense and not about one attack.</a:t>
+              <a:t>That is not a complaint about other people's repositories. It sets the size of what this work can honestly cover, and it is a result the field should know.</a:t>
             </a:r>
           </a:p>
         </p:txBody>
@@ -6934,7 +6599,7 @@
                 </a:solidFill>
                 <a:latin typeface="Calibri"/>
               </a:rPr>
-              <a:t>WHAT WE RAN</a:t>
+              <a:t>HOW WE CHOOSE A PAIR</a:t>
             </a:r>
           </a:p>
         </p:txBody>
@@ -6976,7 +6641,7 @@
                 </a:solidFill>
                 <a:latin typeface="Cambria"/>
               </a:rPr>
-              <a:t>The first measurements anyone has taken in that cell</a:t>
+              <a:t>The map tells us which pairs can even be run</a:t>
             </a:r>
           </a:p>
         </p:txBody>
@@ -7031,26 +6696,26 @@
         </p:nvSpPr>
         <p:spPr>
           <a:xfrm>
-            <a:off x="731520" y="1965960"/>
-            <a:ext cx="2743200" cy="310896"/>
-          </a:xfrm>
-          <a:prstGeom prst="rect">
-            <a:avLst/>
-          </a:prstGeom>
-          <a:noFill/>
-        </p:spPr>
-        <p:txBody>
-          <a:bodyPr wrap="square" lIns="0" rIns="0" tIns="0" bIns="0" anchor="t">
-            <a:spAutoFit/>
-          </a:bodyPr>
-          <a:lstStyle/>
-          <a:p>
-            <a:pPr algn="l">
-              <a:lnSpc>
-                <a:spcPct val="106000"/>
-              </a:lnSpc>
-              <a:spcAft>
-                <a:spcPts val="0"/>
+            <a:off x="731520" y="1920240"/>
+            <a:ext cx="10725912" cy="4480560"/>
+          </a:xfrm>
+          <a:prstGeom prst="rect">
+            <a:avLst/>
+          </a:prstGeom>
+          <a:noFill/>
+        </p:spPr>
+        <p:txBody>
+          <a:bodyPr wrap="square" lIns="0" rIns="0" tIns="0" bIns="0" anchor="t">
+            <a:spAutoFit/>
+          </a:bodyPr>
+          <a:lstStyle/>
+          <a:p>
+            <a:pPr algn="l">
+              <a:lnSpc>
+                <a:spcPct val="110000"/>
+              </a:lnSpc>
+              <a:spcAft>
+                <a:spcPts val="900"/>
               </a:spcAft>
             </a:pPr>
             <a:r>
@@ -7060,7 +6725,26 @@
                 </a:solidFill>
                 <a:latin typeface="Calibri"/>
               </a:rPr>
-              <a:t>4 attacks</a:t>
+              <a:t>A defense and an attack belong together when they sit in the same place on the map: the same route in, and the same thing going wrong.</a:t>
+            </a:r>
+          </a:p>
+          <a:p>
+            <a:pPr>
+              <a:lnSpc>
+                <a:spcPct val="110000"/>
+              </a:lnSpc>
+              <a:spcAft>
+                <a:spcPts val="900"/>
+              </a:spcAft>
+            </a:pPr>
+            <a:r>
+              <a:rPr sz="1500" b="0" i="0">
+                <a:solidFill>
+                  <a:srgbClr val="444444"/>
+                </a:solidFill>
+                <a:latin typeface="Calibri"/>
+              </a:rPr>
+              <a:t>If a defense was built for a failure that happens by accident, and an attack causes the same failure on purpose through the same route, then the defense has a claim to answer. Nobody has made it answer.</a:t>
             </a:r>
           </a:p>
         </p:txBody>
@@ -7073,302 +6757,470 @@
         </p:nvSpPr>
         <p:spPr>
           <a:xfrm>
-            <a:off x="3474720" y="1965960"/>
-            <a:ext cx="7982712" cy="310896"/>
-          </a:xfrm>
-          <a:prstGeom prst="rect">
-            <a:avLst/>
-          </a:prstGeom>
-          <a:noFill/>
-        </p:spPr>
-        <p:txBody>
-          <a:bodyPr wrap="square" lIns="0" rIns="0" tIns="0" bIns="0" anchor="t">
-            <a:spAutoFit/>
-          </a:bodyPr>
-          <a:lstStyle/>
-          <a:p>
-            <a:pPr algn="l">
-              <a:lnSpc>
-                <a:spcPct val="106000"/>
-              </a:lnSpc>
-              <a:spcAft>
-                <a:spcPts val="0"/>
-              </a:spcAft>
-            </a:pPr>
-            <a:r>
-              <a:rPr sz="1500" b="0" i="0">
+            <a:off x="731520" y="3182112"/>
+            <a:ext cx="10725912" cy="310896"/>
+          </a:xfrm>
+          <a:prstGeom prst="rect">
+            <a:avLst/>
+          </a:prstGeom>
+          <a:noFill/>
+        </p:spPr>
+        <p:txBody>
+          <a:bodyPr wrap="square" lIns="0" rIns="0" tIns="0" bIns="0" anchor="t">
+            <a:spAutoFit/>
+          </a:bodyPr>
+          <a:lstStyle/>
+          <a:p>
+            <a:pPr algn="l">
+              <a:lnSpc>
+                <a:spcPct val="106000"/>
+              </a:lnSpc>
+              <a:spcAft>
+                <a:spcPts val="800"/>
+              </a:spcAft>
+            </a:pPr>
+            <a:r>
+              <a:rPr sz="1500" b="1" i="0">
+                <a:solidFill>
+                  <a:srgbClr val="111111"/>
+                </a:solidFill>
+                <a:latin typeface="Calibri"/>
+              </a:rPr>
+              <a:t>The cell we started in</a:t>
+            </a:r>
+          </a:p>
+        </p:txBody>
+      </p:sp>
+      <p:sp>
+        <p:nvSpPr>
+          <p:cNvPr id="7" name="TextBox 6"/>
+          <p:cNvSpPr txBox="1"/>
+          <p:nvPr/>
+        </p:nvSpPr>
+        <p:spPr>
+          <a:xfrm>
+            <a:off x="731520" y="3547872"/>
+            <a:ext cx="3291840" cy="310896"/>
+          </a:xfrm>
+          <a:prstGeom prst="rect">
+            <a:avLst/>
+          </a:prstGeom>
+          <a:noFill/>
+        </p:spPr>
+        <p:txBody>
+          <a:bodyPr wrap="square" lIns="0" rIns="0" tIns="0" bIns="0" anchor="t">
+            <a:spAutoFit/>
+          </a:bodyPr>
+          <a:lstStyle/>
+          <a:p>
+            <a:pPr algn="l">
+              <a:lnSpc>
+                <a:spcPct val="106000"/>
+              </a:lnSpc>
+              <a:spcAft>
+                <a:spcPts val="0"/>
+              </a:spcAft>
+            </a:pPr>
+            <a:r>
+              <a:rPr sz="1350" b="1" i="0">
+                <a:solidFill>
+                  <a:srgbClr val="111111"/>
+                </a:solidFill>
+                <a:latin typeface="Calibri"/>
+              </a:rPr>
+              <a:t>Route in</a:t>
+            </a:r>
+          </a:p>
+        </p:txBody>
+      </p:sp>
+      <p:sp>
+        <p:nvSpPr>
+          <p:cNvPr id="8" name="TextBox 7"/>
+          <p:cNvSpPr txBox="1"/>
+          <p:nvPr/>
+        </p:nvSpPr>
+        <p:spPr>
+          <a:xfrm>
+            <a:off x="4023360" y="3547872"/>
+            <a:ext cx="7434072" cy="310896"/>
+          </a:xfrm>
+          <a:prstGeom prst="rect">
+            <a:avLst/>
+          </a:prstGeom>
+          <a:noFill/>
+        </p:spPr>
+        <p:txBody>
+          <a:bodyPr wrap="square" lIns="0" rIns="0" tIns="0" bIns="0" anchor="t">
+            <a:spAutoFit/>
+          </a:bodyPr>
+          <a:lstStyle/>
+          <a:p>
+            <a:pPr algn="l">
+              <a:lnSpc>
+                <a:spcPct val="106000"/>
+              </a:lnSpc>
+              <a:spcAft>
+                <a:spcPts val="0"/>
+              </a:spcAft>
+            </a:pPr>
+            <a:r>
+              <a:rPr sz="1350" b="0" i="0">
                 <a:solidFill>
                   <a:srgbClr val="444444"/>
                 </a:solidFill>
                 <a:latin typeface="Calibri"/>
               </a:rPr>
-              <a:t>rebuilt from released code and papers</a:t>
-            </a:r>
-          </a:p>
-        </p:txBody>
-      </p:sp>
-      <p:sp>
-        <p:nvSpPr>
-          <p:cNvPr id="7" name="TextBox 6"/>
-          <p:cNvSpPr txBox="1"/>
-          <p:nvPr/>
-        </p:nvSpPr>
-        <p:spPr>
-          <a:xfrm>
-            <a:off x="731520" y="2532888"/>
-            <a:ext cx="2743200" cy="310896"/>
-          </a:xfrm>
-          <a:prstGeom prst="rect">
-            <a:avLst/>
-          </a:prstGeom>
-          <a:noFill/>
-        </p:spPr>
-        <p:txBody>
-          <a:bodyPr wrap="square" lIns="0" rIns="0" tIns="0" bIns="0" anchor="t">
-            <a:spAutoFit/>
-          </a:bodyPr>
-          <a:lstStyle/>
-          <a:p>
-            <a:pPr algn="l">
-              <a:lnSpc>
-                <a:spcPct val="106000"/>
-              </a:lnSpc>
-              <a:spcAft>
-                <a:spcPts val="0"/>
-              </a:spcAft>
-            </a:pPr>
-            <a:r>
-              <a:rPr sz="1500" b="1" i="0">
+              <a:t>a document returned by a search step</a:t>
+            </a:r>
+          </a:p>
+        </p:txBody>
+      </p:sp>
+      <p:sp>
+        <p:nvSpPr>
+          <p:cNvPr id="9" name="TextBox 8"/>
+          <p:cNvSpPr txBox="1"/>
+          <p:nvPr/>
+        </p:nvSpPr>
+        <p:spPr>
+          <a:xfrm>
+            <a:off x="731520" y="3968496"/>
+            <a:ext cx="3291840" cy="310896"/>
+          </a:xfrm>
+          <a:prstGeom prst="rect">
+            <a:avLst/>
+          </a:prstGeom>
+          <a:noFill/>
+        </p:spPr>
+        <p:txBody>
+          <a:bodyPr wrap="square" lIns="0" rIns="0" tIns="0" bIns="0" anchor="t">
+            <a:spAutoFit/>
+          </a:bodyPr>
+          <a:lstStyle/>
+          <a:p>
+            <a:pPr algn="l">
+              <a:lnSpc>
+                <a:spcPct val="106000"/>
+              </a:lnSpc>
+              <a:spcAft>
+                <a:spcPts val="0"/>
+              </a:spcAft>
+            </a:pPr>
+            <a:r>
+              <a:rPr sz="1350" b="1" i="0">
                 <a:solidFill>
                   <a:srgbClr val="111111"/>
                 </a:solidFill>
                 <a:latin typeface="Calibri"/>
               </a:rPr>
-              <a:t>5 defenses</a:t>
-            </a:r>
-          </a:p>
-        </p:txBody>
-      </p:sp>
-      <p:sp>
-        <p:nvSpPr>
-          <p:cNvPr id="8" name="TextBox 7"/>
-          <p:cNvSpPr txBox="1"/>
-          <p:nvPr/>
-        </p:nvSpPr>
-        <p:spPr>
-          <a:xfrm>
-            <a:off x="3474720" y="2532888"/>
-            <a:ext cx="7982712" cy="310896"/>
-          </a:xfrm>
-          <a:prstGeom prst="rect">
-            <a:avLst/>
-          </a:prstGeom>
-          <a:noFill/>
-        </p:spPr>
-        <p:txBody>
-          <a:bodyPr wrap="square" lIns="0" rIns="0" tIns="0" bIns="0" anchor="t">
-            <a:spAutoFit/>
-          </a:bodyPr>
-          <a:lstStyle/>
-          <a:p>
-            <a:pPr algn="l">
-              <a:lnSpc>
-                <a:spcPct val="106000"/>
-              </a:lnSpc>
-              <a:spcAft>
-                <a:spcPts val="0"/>
-              </a:spcAft>
-            </a:pPr>
-            <a:r>
-              <a:rPr sz="1500" b="0" i="0">
+              <a:t>What goes wrong</a:t>
+            </a:r>
+          </a:p>
+        </p:txBody>
+      </p:sp>
+      <p:sp>
+        <p:nvSpPr>
+          <p:cNvPr id="10" name="TextBox 9"/>
+          <p:cNvSpPr txBox="1"/>
+          <p:nvPr/>
+        </p:nvSpPr>
+        <p:spPr>
+          <a:xfrm>
+            <a:off x="4023360" y="3968496"/>
+            <a:ext cx="7434072" cy="310896"/>
+          </a:xfrm>
+          <a:prstGeom prst="rect">
+            <a:avLst/>
+          </a:prstGeom>
+          <a:noFill/>
+        </p:spPr>
+        <p:txBody>
+          <a:bodyPr wrap="square" lIns="0" rIns="0" tIns="0" bIns="0" anchor="t">
+            <a:spAutoFit/>
+          </a:bodyPr>
+          <a:lstStyle/>
+          <a:p>
+            <a:pPr algn="l">
+              <a:lnSpc>
+                <a:spcPct val="106000"/>
+              </a:lnSpc>
+              <a:spcAft>
+                <a:spcPts val="0"/>
+              </a:spcAft>
+            </a:pPr>
+            <a:r>
+              <a:rPr sz="1350" b="0" i="0">
                 <a:solidFill>
                   <a:srgbClr val="444444"/>
                 </a:solidFill>
                 <a:latin typeface="Calibri"/>
               </a:rPr>
-              <a:t>counting two versions of one of them, all from released code</a:t>
-            </a:r>
-          </a:p>
-        </p:txBody>
-      </p:sp>
-      <p:sp>
-        <p:nvSpPr>
-          <p:cNvPr id="9" name="TextBox 8"/>
-          <p:cNvSpPr txBox="1"/>
-          <p:nvPr/>
-        </p:nvSpPr>
-        <p:spPr>
-          <a:xfrm>
-            <a:off x="731520" y="3099815"/>
-            <a:ext cx="2743200" cy="310896"/>
-          </a:xfrm>
-          <a:prstGeom prst="rect">
-            <a:avLst/>
-          </a:prstGeom>
-          <a:noFill/>
-        </p:spPr>
-        <p:txBody>
-          <a:bodyPr wrap="square" lIns="0" rIns="0" tIns="0" bIns="0" anchor="t">
-            <a:spAutoFit/>
-          </a:bodyPr>
-          <a:lstStyle/>
-          <a:p>
-            <a:pPr algn="l">
-              <a:lnSpc>
-                <a:spcPct val="106000"/>
-              </a:lnSpc>
-              <a:spcAft>
-                <a:spcPts val="0"/>
-              </a:spcAft>
-            </a:pPr>
-            <a:r>
-              <a:rPr sz="1500" b="1" i="0">
+              <a:t>the agent answers from false content and nothing signals it</a:t>
+            </a:r>
+          </a:p>
+        </p:txBody>
+      </p:sp>
+      <p:sp>
+        <p:nvSpPr>
+          <p:cNvPr id="11" name="TextBox 10"/>
+          <p:cNvSpPr txBox="1"/>
+          <p:nvPr/>
+        </p:nvSpPr>
+        <p:spPr>
+          <a:xfrm>
+            <a:off x="731520" y="4389120"/>
+            <a:ext cx="3291840" cy="310896"/>
+          </a:xfrm>
+          <a:prstGeom prst="rect">
+            <a:avLst/>
+          </a:prstGeom>
+          <a:noFill/>
+        </p:spPr>
+        <p:txBody>
+          <a:bodyPr wrap="square" lIns="0" rIns="0" tIns="0" bIns="0" anchor="t">
+            <a:spAutoFit/>
+          </a:bodyPr>
+          <a:lstStyle/>
+          <a:p>
+            <a:pPr algn="l">
+              <a:lnSpc>
+                <a:spcPct val="106000"/>
+              </a:lnSpc>
+              <a:spcAft>
+                <a:spcPts val="0"/>
+              </a:spcAft>
+            </a:pPr>
+            <a:r>
+              <a:rPr sz="1350" b="1" i="0">
                 <a:solidFill>
                   <a:srgbClr val="111111"/>
                 </a:solidFill>
                 <a:latin typeface="Calibri"/>
               </a:rPr>
-              <a:t>18 pairs</a:t>
-            </a:r>
-          </a:p>
-        </p:txBody>
-      </p:sp>
-      <p:sp>
-        <p:nvSpPr>
-          <p:cNvPr id="10" name="TextBox 9"/>
-          <p:cNvSpPr txBox="1"/>
-          <p:nvPr/>
-        </p:nvSpPr>
-        <p:spPr>
-          <a:xfrm>
-            <a:off x="3474720" y="3099815"/>
-            <a:ext cx="7982712" cy="310896"/>
-          </a:xfrm>
-          <a:prstGeom prst="rect">
-            <a:avLst/>
-          </a:prstGeom>
-          <a:noFill/>
-        </p:spPr>
-        <p:txBody>
-          <a:bodyPr wrap="square" lIns="0" rIns="0" tIns="0" bIns="0" anchor="t">
-            <a:spAutoFit/>
-          </a:bodyPr>
-          <a:lstStyle/>
-          <a:p>
-            <a:pPr algn="l">
-              <a:lnSpc>
-                <a:spcPct val="106000"/>
-              </a:lnSpc>
-              <a:spcAft>
-                <a:spcPts val="0"/>
-              </a:spcAft>
-            </a:pPr>
-            <a:r>
-              <a:rPr sz="1500" b="0" i="0">
+              <a:t>On the attack side</a:t>
+            </a:r>
+          </a:p>
+        </p:txBody>
+      </p:sp>
+      <p:sp>
+        <p:nvSpPr>
+          <p:cNvPr id="12" name="TextBox 11"/>
+          <p:cNvSpPr txBox="1"/>
+          <p:nvPr/>
+        </p:nvSpPr>
+        <p:spPr>
+          <a:xfrm>
+            <a:off x="4023360" y="4389120"/>
+            <a:ext cx="7434072" cy="310896"/>
+          </a:xfrm>
+          <a:prstGeom prst="rect">
+            <a:avLst/>
+          </a:prstGeom>
+          <a:noFill/>
+        </p:spPr>
+        <p:txBody>
+          <a:bodyPr wrap="square" lIns="0" rIns="0" tIns="0" bIns="0" anchor="t">
+            <a:spAutoFit/>
+          </a:bodyPr>
+          <a:lstStyle/>
+          <a:p>
+            <a:pPr algn="l">
+              <a:lnSpc>
+                <a:spcPct val="106000"/>
+              </a:lnSpc>
+              <a:spcAft>
+                <a:spcPts val="0"/>
+              </a:spcAft>
+            </a:pPr>
+            <a:r>
+              <a:rPr sz="1350" b="0" i="0">
                 <a:solidFill>
                   <a:srgbClr val="444444"/>
                 </a:solidFill>
                 <a:latin typeface="Calibri"/>
               </a:rPr>
-              <a:t>defense against attack, on three models, none of them reported anywhere</a:t>
-            </a:r>
-          </a:p>
-        </p:txBody>
-      </p:sp>
-      <p:sp>
-        <p:nvSpPr>
-          <p:cNvPr id="11" name="TextBox 10"/>
-          <p:cNvSpPr txBox="1"/>
-          <p:nvPr/>
-        </p:nvSpPr>
-        <p:spPr>
-          <a:xfrm>
-            <a:off x="731520" y="3666744"/>
-            <a:ext cx="2743200" cy="310896"/>
-          </a:xfrm>
-          <a:prstGeom prst="rect">
-            <a:avLst/>
-          </a:prstGeom>
-          <a:noFill/>
-        </p:spPr>
-        <p:txBody>
-          <a:bodyPr wrap="square" lIns="0" rIns="0" tIns="0" bIns="0" anchor="t">
-            <a:spAutoFit/>
-          </a:bodyPr>
-          <a:lstStyle/>
-          <a:p>
-            <a:pPr algn="l">
-              <a:lnSpc>
-                <a:spcPct val="106000"/>
-              </a:lnSpc>
-              <a:spcAft>
-                <a:spcPts val="0"/>
-              </a:spcAft>
-            </a:pPr>
-            <a:r>
-              <a:rPr sz="1500" b="1" i="0">
+              <a:t>3 named attacks, all deliberate</a:t>
+            </a:r>
+          </a:p>
+        </p:txBody>
+      </p:sp>
+      <p:sp>
+        <p:nvSpPr>
+          <p:cNvPr id="13" name="TextBox 12"/>
+          <p:cNvSpPr txBox="1"/>
+          <p:nvPr/>
+        </p:nvSpPr>
+        <p:spPr>
+          <a:xfrm>
+            <a:off x="731520" y="4809744"/>
+            <a:ext cx="3291840" cy="310896"/>
+          </a:xfrm>
+          <a:prstGeom prst="rect">
+            <a:avLst/>
+          </a:prstGeom>
+          <a:noFill/>
+        </p:spPr>
+        <p:txBody>
+          <a:bodyPr wrap="square" lIns="0" rIns="0" tIns="0" bIns="0" anchor="t">
+            <a:spAutoFit/>
+          </a:bodyPr>
+          <a:lstStyle/>
+          <a:p>
+            <a:pPr algn="l">
+              <a:lnSpc>
+                <a:spcPct val="106000"/>
+              </a:lnSpc>
+              <a:spcAft>
+                <a:spcPts val="0"/>
+              </a:spcAft>
+            </a:pPr>
+            <a:r>
+              <a:rPr sz="1350" b="1" i="0">
                 <a:solidFill>
                   <a:srgbClr val="111111"/>
                 </a:solidFill>
                 <a:latin typeface="Calibri"/>
               </a:rPr>
-              <a:t>104 conditions</a:t>
-            </a:r>
-          </a:p>
-        </p:txBody>
-      </p:sp>
-      <p:sp>
-        <p:nvSpPr>
-          <p:cNvPr id="12" name="TextBox 11"/>
-          <p:cNvSpPr txBox="1"/>
-          <p:nvPr/>
-        </p:nvSpPr>
-        <p:spPr>
-          <a:xfrm>
-            <a:off x="3474720" y="3666744"/>
-            <a:ext cx="7982712" cy="310896"/>
-          </a:xfrm>
-          <a:prstGeom prst="rect">
-            <a:avLst/>
-          </a:prstGeom>
-          <a:noFill/>
-        </p:spPr>
-        <p:txBody>
-          <a:bodyPr wrap="square" lIns="0" rIns="0" tIns="0" bIns="0" anchor="t">
-            <a:spAutoFit/>
-          </a:bodyPr>
-          <a:lstStyle/>
-          <a:p>
-            <a:pPr algn="l">
-              <a:lnSpc>
-                <a:spcPct val="106000"/>
-              </a:lnSpc>
-              <a:spcAft>
-                <a:spcPts val="0"/>
-              </a:spcAft>
-            </a:pPr>
-            <a:r>
-              <a:rPr sz="1500" b="0" i="0">
+              <a:t>On the defense side</a:t>
+            </a:r>
+          </a:p>
+        </p:txBody>
+      </p:sp>
+      <p:sp>
+        <p:nvSpPr>
+          <p:cNvPr id="14" name="TextBox 13"/>
+          <p:cNvSpPr txBox="1"/>
+          <p:nvPr/>
+        </p:nvSpPr>
+        <p:spPr>
+          <a:xfrm>
+            <a:off x="4023360" y="4809744"/>
+            <a:ext cx="7434072" cy="310896"/>
+          </a:xfrm>
+          <a:prstGeom prst="rect">
+            <a:avLst/>
+          </a:prstGeom>
+          <a:noFill/>
+        </p:spPr>
+        <p:txBody>
+          <a:bodyPr wrap="square" lIns="0" rIns="0" tIns="0" bIns="0" anchor="t">
+            <a:spAutoFit/>
+          </a:bodyPr>
+          <a:lstStyle/>
+          <a:p>
+            <a:pPr algn="l">
+              <a:lnSpc>
+                <a:spcPct val="106000"/>
+              </a:lnSpc>
+              <a:spcAft>
+                <a:spcPts val="0"/>
+              </a:spcAft>
+            </a:pPr>
+            <a:r>
+              <a:rPr sz="1350" b="0" i="0">
                 <a:solidFill>
                   <a:srgbClr val="444444"/>
                 </a:solidFill>
                 <a:latin typeface="Calibri"/>
               </a:rPr>
-              <a:t>each pair run at several attack strengths, not one</a:t>
-            </a:r>
-          </a:p>
-        </p:txBody>
-      </p:sp>
-      <p:sp>
-        <p:nvSpPr>
-          <p:cNvPr id="13" name="TextBox 12"/>
-          <p:cNvSpPr txBox="1"/>
-          <p:nvPr/>
-        </p:nvSpPr>
-        <p:spPr>
-          <a:xfrm>
-            <a:off x="731520" y="4526280"/>
-            <a:ext cx="10725912" cy="1874519"/>
+              <a:t>42 named defenses, all built for the accidental version</a:t>
+            </a:r>
+          </a:p>
+        </p:txBody>
+      </p:sp>
+      <p:sp>
+        <p:nvSpPr>
+          <p:cNvPr id="15" name="TextBox 14"/>
+          <p:cNvSpPr txBox="1"/>
+          <p:nvPr/>
+        </p:nvSpPr>
+        <p:spPr>
+          <a:xfrm>
+            <a:off x="731520" y="5230368"/>
+            <a:ext cx="3291840" cy="310896"/>
+          </a:xfrm>
+          <a:prstGeom prst="rect">
+            <a:avLst/>
+          </a:prstGeom>
+          <a:noFill/>
+        </p:spPr>
+        <p:txBody>
+          <a:bodyPr wrap="square" lIns="0" rIns="0" tIns="0" bIns="0" anchor="t">
+            <a:spAutoFit/>
+          </a:bodyPr>
+          <a:lstStyle/>
+          <a:p>
+            <a:pPr algn="l">
+              <a:lnSpc>
+                <a:spcPct val="106000"/>
+              </a:lnSpc>
+              <a:spcAft>
+                <a:spcPts val="0"/>
+              </a:spcAft>
+            </a:pPr>
+            <a:r>
+              <a:rPr sz="1350" b="1" i="0">
+                <a:solidFill>
+                  <a:srgbClr val="111111"/>
+                </a:solidFill>
+                <a:latin typeface="Calibri"/>
+              </a:rPr>
+              <a:t>Tested against each other</a:t>
+            </a:r>
+          </a:p>
+        </p:txBody>
+      </p:sp>
+      <p:sp>
+        <p:nvSpPr>
+          <p:cNvPr id="16" name="TextBox 15"/>
+          <p:cNvSpPr txBox="1"/>
+          <p:nvPr/>
+        </p:nvSpPr>
+        <p:spPr>
+          <a:xfrm>
+            <a:off x="4023360" y="5230368"/>
+            <a:ext cx="7434072" cy="310896"/>
+          </a:xfrm>
+          <a:prstGeom prst="rect">
+            <a:avLst/>
+          </a:prstGeom>
+          <a:noFill/>
+        </p:spPr>
+        <p:txBody>
+          <a:bodyPr wrap="square" lIns="0" rIns="0" tIns="0" bIns="0" anchor="t">
+            <a:spAutoFit/>
+          </a:bodyPr>
+          <a:lstStyle/>
+          <a:p>
+            <a:pPr algn="l">
+              <a:lnSpc>
+                <a:spcPct val="106000"/>
+              </a:lnSpc>
+              <a:spcAft>
+                <a:spcPts val="0"/>
+              </a:spcAft>
+            </a:pPr>
+            <a:r>
+              <a:rPr sz="1350" b="0" i="0">
+                <a:solidFill>
+                  <a:srgbClr val="444444"/>
+                </a:solidFill>
+                <a:latin typeface="Calibri"/>
+              </a:rPr>
+              <a:t>none of them, by anyone</a:t>
+            </a:r>
+          </a:p>
+        </p:txBody>
+      </p:sp>
+      <p:sp>
+        <p:nvSpPr>
+          <p:cNvPr id="17" name="TextBox 16"/>
+          <p:cNvSpPr txBox="1"/>
+          <p:nvPr/>
+        </p:nvSpPr>
+        <p:spPr>
+          <a:xfrm>
+            <a:off x="731520" y="5742432"/>
+            <a:ext cx="10725912" cy="658367"/>
           </a:xfrm>
           <a:prstGeom prst="rect">
             <a:avLst/>
@@ -7386,17 +7238,17 @@
                 <a:spcPct val="110000"/>
               </a:lnSpc>
               <a:spcAft>
-                <a:spcPts val="800"/>
-              </a:spcAft>
-            </a:pPr>
-            <a:r>
-              <a:rPr sz="1500" b="1" i="0">
+                <a:spcPts val="600"/>
+              </a:spcAft>
+            </a:pPr>
+            <a:r>
+              <a:rPr sz="1350" b="1" i="0">
                 <a:solidFill>
                   <a:srgbClr val="111111"/>
                 </a:solidFill>
                 <a:latin typeface="Calibri"/>
               </a:rPr>
-              <a:t>Two rules decide whether we are allowed to claim anything.</a:t>
+              <a:t>The map picked the first experiments, not us. Three of the four defenses we ran sit in that cell. The fourth answers the same failure arriving by a different route.</a:t>
             </a:r>
           </a:p>
           <a:p>
@@ -7405,55 +7257,17 @@
                 <a:spcPct val="110000"/>
               </a:lnSpc>
               <a:spcAft>
-                <a:spcPts val="800"/>
-              </a:spcAft>
-            </a:pPr>
-            <a:r>
-              <a:rPr sz="1500" b="0" i="0">
+                <a:spcPts val="600"/>
+              </a:spcAft>
+            </a:pPr>
+            <a:r>
+              <a:rPr sz="1350" b="0" i="0">
                 <a:solidFill>
                   <a:srgbClr val="444444"/>
                 </a:solidFill>
                 <a:latin typeface="Calibri"/>
               </a:rPr>
-              <a:t>A defense must first show its own benefit on its own task. If it cannot, we report nothing from it.</a:t>
-            </a:r>
-          </a:p>
-          <a:p>
-            <a:pPr>
-              <a:lnSpc>
-                <a:spcPct val="110000"/>
-              </a:lnSpc>
-              <a:spcAft>
-                <a:spcPts val="800"/>
-              </a:spcAft>
-            </a:pPr>
-            <a:r>
-              <a:rPr sz="1500" b="0" i="0">
-                <a:solidFill>
-                  <a:srgbClr val="444444"/>
-                </a:solidFill>
-                <a:latin typeface="Calibri"/>
-              </a:rPr>
-              <a:t>We fix in advance the smallest change the sample can detect. Below that we say nothing, in either direction.</a:t>
-            </a:r>
-          </a:p>
-          <a:p>
-            <a:pPr>
-              <a:lnSpc>
-                <a:spcPct val="110000"/>
-              </a:lnSpc>
-              <a:spcAft>
-                <a:spcPts val="800"/>
-              </a:spcAft>
-            </a:pPr>
-            <a:r>
-              <a:rPr sz="1500" b="0" i="0">
-                <a:solidFill>
-                  <a:srgbClr val="444444"/>
-                </a:solidFill>
-                <a:latin typeface="Calibri"/>
-              </a:rPr>
-              <a:t>Scoring is the authors' own code, unchanged.</a:t>
+              <a:t>We then widened the attack set along the same route. Two more attacks also poison a retrieved document, and testing those as well is how we checked that a result was about the defense and not about one attack.</a:t>
             </a:r>
           </a:p>
         </p:txBody>
@@ -7513,7 +7327,7 @@
                 </a:solidFill>
                 <a:latin typeface="Calibri"/>
               </a:rPr>
-              <a:t>THE RESULT</a:t>
+              <a:t>WHAT WE RAN</a:t>
             </a:r>
           </a:p>
         </p:txBody>
@@ -7555,7 +7369,7 @@
                 </a:solidFill>
                 <a:latin typeface="Cambria"/>
               </a:rPr>
-              <a:t>Does the defense stop the attack?</a:t>
+              <a:t>The first measurements anyone has taken in that cell</a:t>
             </a:r>
           </a:p>
         </p:txBody>
@@ -7610,36 +7424,36 @@
         </p:nvSpPr>
         <p:spPr>
           <a:xfrm>
-            <a:off x="731520" y="2057400"/>
-            <a:ext cx="4206240" cy="310896"/>
-          </a:xfrm>
-          <a:prstGeom prst="rect">
-            <a:avLst/>
-          </a:prstGeom>
-          <a:noFill/>
-        </p:spPr>
-        <p:txBody>
-          <a:bodyPr wrap="square" lIns="0" rIns="0" tIns="0" bIns="0" anchor="t">
-            <a:spAutoFit/>
-          </a:bodyPr>
-          <a:lstStyle/>
-          <a:p>
-            <a:pPr algn="l">
-              <a:lnSpc>
-                <a:spcPct val="106000"/>
-              </a:lnSpc>
-              <a:spcAft>
-                <a:spcPts val="0"/>
-              </a:spcAft>
-            </a:pPr>
-            <a:r>
-              <a:rPr sz="1550" b="1" i="0">
+            <a:off x="731520" y="1965960"/>
+            <a:ext cx="2743200" cy="310896"/>
+          </a:xfrm>
+          <a:prstGeom prst="rect">
+            <a:avLst/>
+          </a:prstGeom>
+          <a:noFill/>
+        </p:spPr>
+        <p:txBody>
+          <a:bodyPr wrap="square" lIns="0" rIns="0" tIns="0" bIns="0" anchor="t">
+            <a:spAutoFit/>
+          </a:bodyPr>
+          <a:lstStyle/>
+          <a:p>
+            <a:pPr algn="l">
+              <a:lnSpc>
+                <a:spcPct val="106000"/>
+              </a:lnSpc>
+              <a:spcAft>
+                <a:spcPts val="0"/>
+              </a:spcAft>
+            </a:pPr>
+            <a:r>
+              <a:rPr sz="1500" b="1" i="0">
                 <a:solidFill>
                   <a:srgbClr val="111111"/>
                 </a:solidFill>
                 <a:latin typeface="Calibri"/>
               </a:rPr>
-              <a:t>It stops the attack</a:t>
+              <a:t>4 attacks</a:t>
             </a:r>
           </a:p>
         </p:txBody>
@@ -7652,36 +7466,36 @@
         </p:nvSpPr>
         <p:spPr>
           <a:xfrm>
-            <a:off x="4937759" y="2057400"/>
-            <a:ext cx="5696712" cy="310896"/>
-          </a:xfrm>
-          <a:prstGeom prst="rect">
-            <a:avLst/>
-          </a:prstGeom>
-          <a:noFill/>
-        </p:spPr>
-        <p:txBody>
-          <a:bodyPr wrap="square" lIns="0" rIns="0" tIns="0" bIns="0" anchor="t">
-            <a:spAutoFit/>
-          </a:bodyPr>
-          <a:lstStyle/>
-          <a:p>
-            <a:pPr algn="l">
-              <a:lnSpc>
-                <a:spcPct val="106000"/>
-              </a:lnSpc>
-              <a:spcAft>
-                <a:spcPts val="0"/>
-              </a:spcAft>
-            </a:pPr>
-            <a:r>
-              <a:rPr sz="1550" b="0" i="0">
+            <a:off x="3474720" y="1965960"/>
+            <a:ext cx="7982712" cy="310896"/>
+          </a:xfrm>
+          <a:prstGeom prst="rect">
+            <a:avLst/>
+          </a:prstGeom>
+          <a:noFill/>
+        </p:spPr>
+        <p:txBody>
+          <a:bodyPr wrap="square" lIns="0" rIns="0" tIns="0" bIns="0" anchor="t">
+            <a:spAutoFit/>
+          </a:bodyPr>
+          <a:lstStyle/>
+          <a:p>
+            <a:pPr algn="l">
+              <a:lnSpc>
+                <a:spcPct val="106000"/>
+              </a:lnSpc>
+              <a:spcAft>
+                <a:spcPts val="0"/>
+              </a:spcAft>
+            </a:pPr>
+            <a:r>
+              <a:rPr sz="1500" b="0" i="0">
                 <a:solidFill>
                   <a:srgbClr val="444444"/>
                 </a:solidFill>
                 <a:latin typeface="Calibri"/>
               </a:rPr>
-              <a:t>the attack succeeds less often with the defense switched on</a:t>
+              <a:t>rebuilt from released code and papers</a:t>
             </a:r>
           </a:p>
         </p:txBody>
@@ -7694,36 +7508,36 @@
         </p:nvSpPr>
         <p:spPr>
           <a:xfrm>
-            <a:off x="10680192" y="2057400"/>
-            <a:ext cx="777240" cy="310896"/>
-          </a:xfrm>
-          <a:prstGeom prst="rect">
-            <a:avLst/>
-          </a:prstGeom>
-          <a:noFill/>
-        </p:spPr>
-        <p:txBody>
-          <a:bodyPr wrap="square" lIns="0" rIns="0" tIns="0" bIns="0" anchor="t">
-            <a:spAutoFit/>
-          </a:bodyPr>
-          <a:lstStyle/>
-          <a:p>
-            <a:pPr algn="r">
-              <a:lnSpc>
-                <a:spcPct val="106000"/>
-              </a:lnSpc>
-              <a:spcAft>
-                <a:spcPts val="0"/>
-              </a:spcAft>
-            </a:pPr>
-            <a:r>
-              <a:rPr sz="1550" b="1" i="0">
+            <a:off x="731520" y="2532888"/>
+            <a:ext cx="2743200" cy="310896"/>
+          </a:xfrm>
+          <a:prstGeom prst="rect">
+            <a:avLst/>
+          </a:prstGeom>
+          <a:noFill/>
+        </p:spPr>
+        <p:txBody>
+          <a:bodyPr wrap="square" lIns="0" rIns="0" tIns="0" bIns="0" anchor="t">
+            <a:spAutoFit/>
+          </a:bodyPr>
+          <a:lstStyle/>
+          <a:p>
+            <a:pPr algn="l">
+              <a:lnSpc>
+                <a:spcPct val="106000"/>
+              </a:lnSpc>
+              <a:spcAft>
+                <a:spcPts val="0"/>
+              </a:spcAft>
+            </a:pPr>
+            <a:r>
+              <a:rPr sz="1500" b="1" i="0">
                 <a:solidFill>
                   <a:srgbClr val="111111"/>
                 </a:solidFill>
                 <a:latin typeface="Calibri"/>
               </a:rPr>
-              <a:t>4</a:t>
+              <a:t>5 defenses</a:t>
             </a:r>
           </a:p>
         </p:txBody>
@@ -7736,330 +7550,284 @@
         </p:nvSpPr>
         <p:spPr>
           <a:xfrm>
-            <a:off x="731520" y="2752344"/>
-            <a:ext cx="4206240" cy="310896"/>
-          </a:xfrm>
-          <a:prstGeom prst="rect">
-            <a:avLst/>
-          </a:prstGeom>
-          <a:noFill/>
-        </p:spPr>
-        <p:txBody>
-          <a:bodyPr wrap="square" lIns="0" rIns="0" tIns="0" bIns="0" anchor="t">
-            <a:spAutoFit/>
-          </a:bodyPr>
-          <a:lstStyle/>
-          <a:p>
-            <a:pPr algn="l">
-              <a:lnSpc>
-                <a:spcPct val="106000"/>
-              </a:lnSpc>
-              <a:spcAft>
-                <a:spcPts val="0"/>
-              </a:spcAft>
-            </a:pPr>
-            <a:r>
-              <a:rPr sz="1550" b="1" i="0">
+            <a:off x="3474720" y="2532888"/>
+            <a:ext cx="7982712" cy="310896"/>
+          </a:xfrm>
+          <a:prstGeom prst="rect">
+            <a:avLst/>
+          </a:prstGeom>
+          <a:noFill/>
+        </p:spPr>
+        <p:txBody>
+          <a:bodyPr wrap="square" lIns="0" rIns="0" tIns="0" bIns="0" anchor="t">
+            <a:spAutoFit/>
+          </a:bodyPr>
+          <a:lstStyle/>
+          <a:p>
+            <a:pPr algn="l">
+              <a:lnSpc>
+                <a:spcPct val="106000"/>
+              </a:lnSpc>
+              <a:spcAft>
+                <a:spcPts val="0"/>
+              </a:spcAft>
+            </a:pPr>
+            <a:r>
+              <a:rPr sz="1500" b="0" i="0">
+                <a:solidFill>
+                  <a:srgbClr val="444444"/>
+                </a:solidFill>
+                <a:latin typeface="Calibri"/>
+              </a:rPr>
+              <a:t>counting two versions of one of them, all from released code</a:t>
+            </a:r>
+          </a:p>
+        </p:txBody>
+      </p:sp>
+      <p:sp>
+        <p:nvSpPr>
+          <p:cNvPr id="9" name="TextBox 8"/>
+          <p:cNvSpPr txBox="1"/>
+          <p:nvPr/>
+        </p:nvSpPr>
+        <p:spPr>
+          <a:xfrm>
+            <a:off x="731520" y="3099815"/>
+            <a:ext cx="2743200" cy="310896"/>
+          </a:xfrm>
+          <a:prstGeom prst="rect">
+            <a:avLst/>
+          </a:prstGeom>
+          <a:noFill/>
+        </p:spPr>
+        <p:txBody>
+          <a:bodyPr wrap="square" lIns="0" rIns="0" tIns="0" bIns="0" anchor="t">
+            <a:spAutoFit/>
+          </a:bodyPr>
+          <a:lstStyle/>
+          <a:p>
+            <a:pPr algn="l">
+              <a:lnSpc>
+                <a:spcPct val="106000"/>
+              </a:lnSpc>
+              <a:spcAft>
+                <a:spcPts val="0"/>
+              </a:spcAft>
+            </a:pPr>
+            <a:r>
+              <a:rPr sz="1500" b="1" i="0">
                 <a:solidFill>
                   <a:srgbClr val="111111"/>
                 </a:solidFill>
                 <a:latin typeface="Calibri"/>
               </a:rPr>
-              <a:t>It does nothing</a:t>
-            </a:r>
-          </a:p>
-        </p:txBody>
-      </p:sp>
-      <p:sp>
-        <p:nvSpPr>
-          <p:cNvPr id="9" name="TextBox 8"/>
-          <p:cNvSpPr txBox="1"/>
-          <p:nvPr/>
-        </p:nvSpPr>
-        <p:spPr>
-          <a:xfrm>
-            <a:off x="4937759" y="2752344"/>
-            <a:ext cx="5696712" cy="310896"/>
-          </a:xfrm>
-          <a:prstGeom prst="rect">
-            <a:avLst/>
-          </a:prstGeom>
-          <a:noFill/>
-        </p:spPr>
-        <p:txBody>
-          <a:bodyPr wrap="square" lIns="0" rIns="0" tIns="0" bIns="0" anchor="t">
-            <a:spAutoFit/>
-          </a:bodyPr>
-          <a:lstStyle/>
-          <a:p>
-            <a:pPr algn="l">
-              <a:lnSpc>
-                <a:spcPct val="106000"/>
-              </a:lnSpc>
-              <a:spcAft>
-                <a:spcPts val="0"/>
-              </a:spcAft>
-            </a:pPr>
-            <a:r>
-              <a:rPr sz="1550" b="0" i="0">
+              <a:t>19 pairs</a:t>
+            </a:r>
+          </a:p>
+        </p:txBody>
+      </p:sp>
+      <p:sp>
+        <p:nvSpPr>
+          <p:cNvPr id="10" name="TextBox 9"/>
+          <p:cNvSpPr txBox="1"/>
+          <p:nvPr/>
+        </p:nvSpPr>
+        <p:spPr>
+          <a:xfrm>
+            <a:off x="3474720" y="3099815"/>
+            <a:ext cx="7982712" cy="310896"/>
+          </a:xfrm>
+          <a:prstGeom prst="rect">
+            <a:avLst/>
+          </a:prstGeom>
+          <a:noFill/>
+        </p:spPr>
+        <p:txBody>
+          <a:bodyPr wrap="square" lIns="0" rIns="0" tIns="0" bIns="0" anchor="t">
+            <a:spAutoFit/>
+          </a:bodyPr>
+          <a:lstStyle/>
+          <a:p>
+            <a:pPr algn="l">
+              <a:lnSpc>
+                <a:spcPct val="106000"/>
+              </a:lnSpc>
+              <a:spcAft>
+                <a:spcPts val="0"/>
+              </a:spcAft>
+            </a:pPr>
+            <a:r>
+              <a:rPr sz="1500" b="0" i="0">
                 <a:solidFill>
                   <a:srgbClr val="444444"/>
                 </a:solidFill>
                 <a:latin typeface="Calibri"/>
               </a:rPr>
-              <a:t>no readable difference either way</a:t>
-            </a:r>
-          </a:p>
-        </p:txBody>
-      </p:sp>
-      <p:sp>
-        <p:nvSpPr>
-          <p:cNvPr id="10" name="TextBox 9"/>
-          <p:cNvSpPr txBox="1"/>
-          <p:nvPr/>
-        </p:nvSpPr>
-        <p:spPr>
-          <a:xfrm>
-            <a:off x="10680192" y="2752344"/>
-            <a:ext cx="777240" cy="310896"/>
-          </a:xfrm>
-          <a:prstGeom prst="rect">
-            <a:avLst/>
-          </a:prstGeom>
-          <a:noFill/>
-        </p:spPr>
-        <p:txBody>
-          <a:bodyPr wrap="square" lIns="0" rIns="0" tIns="0" bIns="0" anchor="t">
-            <a:spAutoFit/>
-          </a:bodyPr>
-          <a:lstStyle/>
-          <a:p>
-            <a:pPr algn="r">
-              <a:lnSpc>
-                <a:spcPct val="106000"/>
-              </a:lnSpc>
-              <a:spcAft>
-                <a:spcPts val="0"/>
-              </a:spcAft>
-            </a:pPr>
-            <a:r>
-              <a:rPr sz="1550" b="1" i="0">
+              <a:t>defense against attack, on three models, none of them reported anywhere</a:t>
+            </a:r>
+          </a:p>
+        </p:txBody>
+      </p:sp>
+      <p:sp>
+        <p:nvSpPr>
+          <p:cNvPr id="11" name="TextBox 10"/>
+          <p:cNvSpPr txBox="1"/>
+          <p:nvPr/>
+        </p:nvSpPr>
+        <p:spPr>
+          <a:xfrm>
+            <a:off x="731520" y="3666744"/>
+            <a:ext cx="2743200" cy="310896"/>
+          </a:xfrm>
+          <a:prstGeom prst="rect">
+            <a:avLst/>
+          </a:prstGeom>
+          <a:noFill/>
+        </p:spPr>
+        <p:txBody>
+          <a:bodyPr wrap="square" lIns="0" rIns="0" tIns="0" bIns="0" anchor="t">
+            <a:spAutoFit/>
+          </a:bodyPr>
+          <a:lstStyle/>
+          <a:p>
+            <a:pPr algn="l">
+              <a:lnSpc>
+                <a:spcPct val="106000"/>
+              </a:lnSpc>
+              <a:spcAft>
+                <a:spcPts val="0"/>
+              </a:spcAft>
+            </a:pPr>
+            <a:r>
+              <a:rPr sz="1500" b="1" i="0">
                 <a:solidFill>
                   <a:srgbClr val="111111"/>
                 </a:solidFill>
                 <a:latin typeface="Calibri"/>
               </a:rPr>
-              <a:t>7</a:t>
-            </a:r>
-          </a:p>
-        </p:txBody>
-      </p:sp>
-      <p:sp>
-        <p:nvSpPr>
-          <p:cNvPr id="11" name="TextBox 10"/>
-          <p:cNvSpPr txBox="1"/>
-          <p:nvPr/>
-        </p:nvSpPr>
-        <p:spPr>
-          <a:xfrm>
-            <a:off x="731520" y="3447288"/>
-            <a:ext cx="4206240" cy="310896"/>
-          </a:xfrm>
-          <a:prstGeom prst="rect">
-            <a:avLst/>
-          </a:prstGeom>
-          <a:noFill/>
-        </p:spPr>
-        <p:txBody>
-          <a:bodyPr wrap="square" lIns="0" rIns="0" tIns="0" bIns="0" anchor="t">
-            <a:spAutoFit/>
-          </a:bodyPr>
-          <a:lstStyle/>
-          <a:p>
-            <a:pPr algn="l">
-              <a:lnSpc>
-                <a:spcPct val="106000"/>
-              </a:lnSpc>
-              <a:spcAft>
-                <a:spcPts val="0"/>
-              </a:spcAft>
-            </a:pPr>
-            <a:r>
-              <a:rPr sz="1550" b="1" i="0">
+              <a:t>109 conditions</a:t>
+            </a:r>
+          </a:p>
+        </p:txBody>
+      </p:sp>
+      <p:sp>
+        <p:nvSpPr>
+          <p:cNvPr id="12" name="TextBox 11"/>
+          <p:cNvSpPr txBox="1"/>
+          <p:nvPr/>
+        </p:nvSpPr>
+        <p:spPr>
+          <a:xfrm>
+            <a:off x="3474720" y="3666744"/>
+            <a:ext cx="7982712" cy="310896"/>
+          </a:xfrm>
+          <a:prstGeom prst="rect">
+            <a:avLst/>
+          </a:prstGeom>
+          <a:noFill/>
+        </p:spPr>
+        <p:txBody>
+          <a:bodyPr wrap="square" lIns="0" rIns="0" tIns="0" bIns="0" anchor="t">
+            <a:spAutoFit/>
+          </a:bodyPr>
+          <a:lstStyle/>
+          <a:p>
+            <a:pPr algn="l">
+              <a:lnSpc>
+                <a:spcPct val="106000"/>
+              </a:lnSpc>
+              <a:spcAft>
+                <a:spcPts val="0"/>
+              </a:spcAft>
+            </a:pPr>
+            <a:r>
+              <a:rPr sz="1500" b="0" i="0">
+                <a:solidFill>
+                  <a:srgbClr val="444444"/>
+                </a:solidFill>
+                <a:latin typeface="Calibri"/>
+              </a:rPr>
+              <a:t>each pair run at several attack strengths, not one</a:t>
+            </a:r>
+          </a:p>
+        </p:txBody>
+      </p:sp>
+      <p:sp>
+        <p:nvSpPr>
+          <p:cNvPr id="13" name="TextBox 12"/>
+          <p:cNvSpPr txBox="1"/>
+          <p:nvPr/>
+        </p:nvSpPr>
+        <p:spPr>
+          <a:xfrm>
+            <a:off x="731520" y="4526280"/>
+            <a:ext cx="10725912" cy="1874519"/>
+          </a:xfrm>
+          <a:prstGeom prst="rect">
+            <a:avLst/>
+          </a:prstGeom>
+          <a:noFill/>
+        </p:spPr>
+        <p:txBody>
+          <a:bodyPr wrap="square" lIns="0" rIns="0" tIns="0" bIns="0" anchor="t">
+            <a:spAutoFit/>
+          </a:bodyPr>
+          <a:lstStyle/>
+          <a:p>
+            <a:pPr algn="l">
+              <a:lnSpc>
+                <a:spcPct val="110000"/>
+              </a:lnSpc>
+              <a:spcAft>
+                <a:spcPts val="800"/>
+              </a:spcAft>
+            </a:pPr>
+            <a:r>
+              <a:rPr sz="1500" b="1" i="0">
                 <a:solidFill>
                   <a:srgbClr val="111111"/>
                 </a:solidFill>
                 <a:latin typeface="Calibri"/>
               </a:rPr>
-              <a:t>It makes the attack worse</a:t>
-            </a:r>
-          </a:p>
-        </p:txBody>
-      </p:sp>
-      <p:sp>
-        <p:nvSpPr>
-          <p:cNvPr id="12" name="TextBox 11"/>
-          <p:cNvSpPr txBox="1"/>
-          <p:nvPr/>
-        </p:nvSpPr>
-        <p:spPr>
-          <a:xfrm>
-            <a:off x="4937759" y="3447288"/>
-            <a:ext cx="5696712" cy="310896"/>
-          </a:xfrm>
-          <a:prstGeom prst="rect">
-            <a:avLst/>
-          </a:prstGeom>
-          <a:noFill/>
-        </p:spPr>
-        <p:txBody>
-          <a:bodyPr wrap="square" lIns="0" rIns="0" tIns="0" bIns="0" anchor="t">
-            <a:spAutoFit/>
-          </a:bodyPr>
-          <a:lstStyle/>
-          <a:p>
-            <a:pPr algn="l">
-              <a:lnSpc>
-                <a:spcPct val="106000"/>
-              </a:lnSpc>
-              <a:spcAft>
-                <a:spcPts val="0"/>
-              </a:spcAft>
-            </a:pPr>
-            <a:r>
-              <a:rPr sz="1550" b="0" i="0">
+              <a:t>Two rules decide whether we are allowed to claim anything.</a:t>
+            </a:r>
+          </a:p>
+          <a:p>
+            <a:pPr>
+              <a:lnSpc>
+                <a:spcPct val="110000"/>
+              </a:lnSpc>
+              <a:spcAft>
+                <a:spcPts val="800"/>
+              </a:spcAft>
+            </a:pPr>
+            <a:r>
+              <a:rPr sz="1500" b="0" i="0">
                 <a:solidFill>
                   <a:srgbClr val="444444"/>
                 </a:solidFill>
                 <a:latin typeface="Calibri"/>
               </a:rPr>
-              <a:t>the attack succeeds MORE often with the defense switched on</a:t>
-            </a:r>
-          </a:p>
-        </p:txBody>
-      </p:sp>
-      <p:sp>
-        <p:nvSpPr>
-          <p:cNvPr id="13" name="TextBox 12"/>
-          <p:cNvSpPr txBox="1"/>
-          <p:nvPr/>
-        </p:nvSpPr>
-        <p:spPr>
-          <a:xfrm>
-            <a:off x="10680192" y="3447288"/>
-            <a:ext cx="777240" cy="310896"/>
-          </a:xfrm>
-          <a:prstGeom prst="rect">
-            <a:avLst/>
-          </a:prstGeom>
-          <a:noFill/>
-        </p:spPr>
-        <p:txBody>
-          <a:bodyPr wrap="square" lIns="0" rIns="0" tIns="0" bIns="0" anchor="t">
-            <a:spAutoFit/>
-          </a:bodyPr>
-          <a:lstStyle/>
-          <a:p>
-            <a:pPr algn="r">
-              <a:lnSpc>
-                <a:spcPct val="106000"/>
-              </a:lnSpc>
-              <a:spcAft>
-                <a:spcPts val="0"/>
-              </a:spcAft>
-            </a:pPr>
-            <a:r>
-              <a:rPr sz="1550" b="1" i="0">
-                <a:solidFill>
-                  <a:srgbClr val="111111"/>
-                </a:solidFill>
-                <a:latin typeface="Calibri"/>
-              </a:rPr>
-              <a:t>7</a:t>
-            </a:r>
-          </a:p>
-        </p:txBody>
-      </p:sp>
-      <p:sp>
-        <p:nvSpPr>
-          <p:cNvPr id="14" name="TextBox 13"/>
-          <p:cNvSpPr txBox="1"/>
-          <p:nvPr/>
-        </p:nvSpPr>
-        <p:spPr>
-          <a:xfrm>
-            <a:off x="8714232" y="4169663"/>
-            <a:ext cx="2743200" cy="274320"/>
-          </a:xfrm>
-          <a:prstGeom prst="rect">
-            <a:avLst/>
-          </a:prstGeom>
-          <a:noFill/>
-        </p:spPr>
-        <p:txBody>
-          <a:bodyPr wrap="square" lIns="0" rIns="0" tIns="0" bIns="0" anchor="t">
-            <a:spAutoFit/>
-          </a:bodyPr>
-          <a:lstStyle/>
-          <a:p>
-            <a:pPr algn="l">
-              <a:lnSpc>
-                <a:spcPct val="106000"/>
-              </a:lnSpc>
-              <a:spcAft>
-                <a:spcPts val="0"/>
-              </a:spcAft>
-            </a:pPr>
-            <a:r>
-              <a:rPr sz="1150" b="0" i="0">
-                <a:solidFill>
-                  <a:srgbClr val="777777"/>
-                </a:solidFill>
-                <a:latin typeface="Calibri"/>
-              </a:rPr>
-              <a:t>out of 18 pairs</a:t>
-            </a:r>
-          </a:p>
-        </p:txBody>
-      </p:sp>
-      <p:sp>
-        <p:nvSpPr>
-          <p:cNvPr id="15" name="TextBox 14"/>
-          <p:cNvSpPr txBox="1"/>
-          <p:nvPr/>
-        </p:nvSpPr>
-        <p:spPr>
-          <a:xfrm>
-            <a:off x="731520" y="4617720"/>
-            <a:ext cx="10725912" cy="1783080"/>
-          </a:xfrm>
-          <a:prstGeom prst="rect">
-            <a:avLst/>
-          </a:prstGeom>
-          <a:noFill/>
-        </p:spPr>
-        <p:txBody>
-          <a:bodyPr wrap="square" lIns="0" rIns="0" tIns="0" bIns="0" anchor="t">
-            <a:spAutoFit/>
-          </a:bodyPr>
-          <a:lstStyle/>
-          <a:p>
-            <a:pPr algn="l">
+              <a:t>A defense must first show its own benefit on its own task. If it cannot, we report nothing from it.</a:t>
+            </a:r>
+          </a:p>
+          <a:p>
+            <a:pPr>
               <a:lnSpc>
                 <a:spcPct val="110000"/>
               </a:lnSpc>
               <a:spcAft>
-                <a:spcPts val="900"/>
-              </a:spcAft>
-            </a:pPr>
-            <a:r>
-              <a:rPr sz="1500" b="1" i="0">
-                <a:solidFill>
-                  <a:srgbClr val="111111"/>
-                </a:solidFill>
-                <a:latin typeface="Calibri"/>
-              </a:rPr>
-              <a:t>A defense helped in four cases out of eighteen. In seven it made the attack work better than no defense at all.</a:t>
+                <a:spcPts val="800"/>
+              </a:spcAft>
+            </a:pPr>
+            <a:r>
+              <a:rPr sz="1500" b="0" i="0">
+                <a:solidFill>
+                  <a:srgbClr val="444444"/>
+                </a:solidFill>
+                <a:latin typeface="Calibri"/>
+              </a:rPr>
+              <a:t>We fix in advance the smallest change the sample can detect. Below that we say nothing, in either direction.</a:t>
             </a:r>
           </a:p>
           <a:p>
@@ -8068,7 +7836,7 @@
                 <a:spcPct val="110000"/>
               </a:lnSpc>
               <a:spcAft>
-                <a:spcPts val="900"/>
+                <a:spcPts val="800"/>
               </a:spcAft>
             </a:pPr>
             <a:r>
@@ -8078,26 +7846,7 @@
                 </a:solidFill>
                 <a:latin typeface="Calibri"/>
               </a:rPr>
-              <a:t>In 4 of those seven the attack does almost nothing to a model with no defense at all. The defense is what makes it work.</a:t>
-            </a:r>
-          </a:p>
-          <a:p>
-            <a:pPr>
-              <a:lnSpc>
-                <a:spcPct val="110000"/>
-              </a:lnSpc>
-              <a:spcAft>
-                <a:spcPts val="900"/>
-              </a:spcAft>
-            </a:pPr>
-            <a:r>
-              <a:rPr sz="1500" b="1" i="0">
-                <a:solidFill>
-                  <a:srgbClr val="111111"/>
-                </a:solidFill>
-                <a:latin typeface="Calibri"/>
-              </a:rPr>
-              <a:t>That is the finding. A defense built for one kind of failure is not neutral against the other kind. It can be the reason the attack succeeds.</a:t>
+              <a:t>Scoring is the authors' own code, unchanged.</a:t>
             </a:r>
           </a:p>
         </p:txBody>
@@ -8157,7 +7906,7 @@
                 </a:solidFill>
                 <a:latin typeface="Calibri"/>
               </a:rPr>
-              <a:t>WHERE WE ARE NOW</a:t>
+              <a:t>THE RESULT</a:t>
             </a:r>
           </a:p>
         </p:txBody>
@@ -8199,7 +7948,7 @@
                 </a:solidFill>
                 <a:latin typeface="Cambria"/>
               </a:rPr>
-              <a:t>What is finished and what is still running</a:t>
+              <a:t>Does the defense stop the attack?</a:t>
             </a:r>
           </a:p>
         </p:txBody>
@@ -8254,6 +8003,650 @@
         </p:nvSpPr>
         <p:spPr>
           <a:xfrm>
+            <a:off x="731520" y="2057400"/>
+            <a:ext cx="4206240" cy="310896"/>
+          </a:xfrm>
+          <a:prstGeom prst="rect">
+            <a:avLst/>
+          </a:prstGeom>
+          <a:noFill/>
+        </p:spPr>
+        <p:txBody>
+          <a:bodyPr wrap="square" lIns="0" rIns="0" tIns="0" bIns="0" anchor="t">
+            <a:spAutoFit/>
+          </a:bodyPr>
+          <a:lstStyle/>
+          <a:p>
+            <a:pPr algn="l">
+              <a:lnSpc>
+                <a:spcPct val="106000"/>
+              </a:lnSpc>
+              <a:spcAft>
+                <a:spcPts val="0"/>
+              </a:spcAft>
+            </a:pPr>
+            <a:r>
+              <a:rPr sz="1550" b="1" i="0">
+                <a:solidFill>
+                  <a:srgbClr val="111111"/>
+                </a:solidFill>
+                <a:latin typeface="Calibri"/>
+              </a:rPr>
+              <a:t>It stops the attack</a:t>
+            </a:r>
+          </a:p>
+        </p:txBody>
+      </p:sp>
+      <p:sp>
+        <p:nvSpPr>
+          <p:cNvPr id="6" name="TextBox 5"/>
+          <p:cNvSpPr txBox="1"/>
+          <p:nvPr/>
+        </p:nvSpPr>
+        <p:spPr>
+          <a:xfrm>
+            <a:off x="4937759" y="2057400"/>
+            <a:ext cx="5696712" cy="310896"/>
+          </a:xfrm>
+          <a:prstGeom prst="rect">
+            <a:avLst/>
+          </a:prstGeom>
+          <a:noFill/>
+        </p:spPr>
+        <p:txBody>
+          <a:bodyPr wrap="square" lIns="0" rIns="0" tIns="0" bIns="0" anchor="t">
+            <a:spAutoFit/>
+          </a:bodyPr>
+          <a:lstStyle/>
+          <a:p>
+            <a:pPr algn="l">
+              <a:lnSpc>
+                <a:spcPct val="106000"/>
+              </a:lnSpc>
+              <a:spcAft>
+                <a:spcPts val="0"/>
+              </a:spcAft>
+            </a:pPr>
+            <a:r>
+              <a:rPr sz="1550" b="0" i="0">
+                <a:solidFill>
+                  <a:srgbClr val="444444"/>
+                </a:solidFill>
+                <a:latin typeface="Calibri"/>
+              </a:rPr>
+              <a:t>the attack succeeds less often with the defense switched on</a:t>
+            </a:r>
+          </a:p>
+        </p:txBody>
+      </p:sp>
+      <p:sp>
+        <p:nvSpPr>
+          <p:cNvPr id="7" name="TextBox 6"/>
+          <p:cNvSpPr txBox="1"/>
+          <p:nvPr/>
+        </p:nvSpPr>
+        <p:spPr>
+          <a:xfrm>
+            <a:off x="10680192" y="2057400"/>
+            <a:ext cx="777240" cy="310896"/>
+          </a:xfrm>
+          <a:prstGeom prst="rect">
+            <a:avLst/>
+          </a:prstGeom>
+          <a:noFill/>
+        </p:spPr>
+        <p:txBody>
+          <a:bodyPr wrap="square" lIns="0" rIns="0" tIns="0" bIns="0" anchor="t">
+            <a:spAutoFit/>
+          </a:bodyPr>
+          <a:lstStyle/>
+          <a:p>
+            <a:pPr algn="r">
+              <a:lnSpc>
+                <a:spcPct val="106000"/>
+              </a:lnSpc>
+              <a:spcAft>
+                <a:spcPts val="0"/>
+              </a:spcAft>
+            </a:pPr>
+            <a:r>
+              <a:rPr sz="1550" b="1" i="0">
+                <a:solidFill>
+                  <a:srgbClr val="111111"/>
+                </a:solidFill>
+                <a:latin typeface="Calibri"/>
+              </a:rPr>
+              <a:t>4</a:t>
+            </a:r>
+          </a:p>
+        </p:txBody>
+      </p:sp>
+      <p:sp>
+        <p:nvSpPr>
+          <p:cNvPr id="8" name="TextBox 7"/>
+          <p:cNvSpPr txBox="1"/>
+          <p:nvPr/>
+        </p:nvSpPr>
+        <p:spPr>
+          <a:xfrm>
+            <a:off x="731520" y="2752344"/>
+            <a:ext cx="4206240" cy="310896"/>
+          </a:xfrm>
+          <a:prstGeom prst="rect">
+            <a:avLst/>
+          </a:prstGeom>
+          <a:noFill/>
+        </p:spPr>
+        <p:txBody>
+          <a:bodyPr wrap="square" lIns="0" rIns="0" tIns="0" bIns="0" anchor="t">
+            <a:spAutoFit/>
+          </a:bodyPr>
+          <a:lstStyle/>
+          <a:p>
+            <a:pPr algn="l">
+              <a:lnSpc>
+                <a:spcPct val="106000"/>
+              </a:lnSpc>
+              <a:spcAft>
+                <a:spcPts val="0"/>
+              </a:spcAft>
+            </a:pPr>
+            <a:r>
+              <a:rPr sz="1550" b="1" i="0">
+                <a:solidFill>
+                  <a:srgbClr val="111111"/>
+                </a:solidFill>
+                <a:latin typeface="Calibri"/>
+              </a:rPr>
+              <a:t>It does nothing</a:t>
+            </a:r>
+          </a:p>
+        </p:txBody>
+      </p:sp>
+      <p:sp>
+        <p:nvSpPr>
+          <p:cNvPr id="9" name="TextBox 8"/>
+          <p:cNvSpPr txBox="1"/>
+          <p:nvPr/>
+        </p:nvSpPr>
+        <p:spPr>
+          <a:xfrm>
+            <a:off x="4937759" y="2752344"/>
+            <a:ext cx="5696712" cy="310896"/>
+          </a:xfrm>
+          <a:prstGeom prst="rect">
+            <a:avLst/>
+          </a:prstGeom>
+          <a:noFill/>
+        </p:spPr>
+        <p:txBody>
+          <a:bodyPr wrap="square" lIns="0" rIns="0" tIns="0" bIns="0" anchor="t">
+            <a:spAutoFit/>
+          </a:bodyPr>
+          <a:lstStyle/>
+          <a:p>
+            <a:pPr algn="l">
+              <a:lnSpc>
+                <a:spcPct val="106000"/>
+              </a:lnSpc>
+              <a:spcAft>
+                <a:spcPts val="0"/>
+              </a:spcAft>
+            </a:pPr>
+            <a:r>
+              <a:rPr sz="1550" b="0" i="0">
+                <a:solidFill>
+                  <a:srgbClr val="444444"/>
+                </a:solidFill>
+                <a:latin typeface="Calibri"/>
+              </a:rPr>
+              <a:t>no readable difference either way</a:t>
+            </a:r>
+          </a:p>
+        </p:txBody>
+      </p:sp>
+      <p:sp>
+        <p:nvSpPr>
+          <p:cNvPr id="10" name="TextBox 9"/>
+          <p:cNvSpPr txBox="1"/>
+          <p:nvPr/>
+        </p:nvSpPr>
+        <p:spPr>
+          <a:xfrm>
+            <a:off x="10680192" y="2752344"/>
+            <a:ext cx="777240" cy="310896"/>
+          </a:xfrm>
+          <a:prstGeom prst="rect">
+            <a:avLst/>
+          </a:prstGeom>
+          <a:noFill/>
+        </p:spPr>
+        <p:txBody>
+          <a:bodyPr wrap="square" lIns="0" rIns="0" tIns="0" bIns="0" anchor="t">
+            <a:spAutoFit/>
+          </a:bodyPr>
+          <a:lstStyle/>
+          <a:p>
+            <a:pPr algn="r">
+              <a:lnSpc>
+                <a:spcPct val="106000"/>
+              </a:lnSpc>
+              <a:spcAft>
+                <a:spcPts val="0"/>
+              </a:spcAft>
+            </a:pPr>
+            <a:r>
+              <a:rPr sz="1550" b="1" i="0">
+                <a:solidFill>
+                  <a:srgbClr val="111111"/>
+                </a:solidFill>
+                <a:latin typeface="Calibri"/>
+              </a:rPr>
+              <a:t>7</a:t>
+            </a:r>
+          </a:p>
+        </p:txBody>
+      </p:sp>
+      <p:sp>
+        <p:nvSpPr>
+          <p:cNvPr id="11" name="TextBox 10"/>
+          <p:cNvSpPr txBox="1"/>
+          <p:nvPr/>
+        </p:nvSpPr>
+        <p:spPr>
+          <a:xfrm>
+            <a:off x="731520" y="3447288"/>
+            <a:ext cx="4206240" cy="310896"/>
+          </a:xfrm>
+          <a:prstGeom prst="rect">
+            <a:avLst/>
+          </a:prstGeom>
+          <a:noFill/>
+        </p:spPr>
+        <p:txBody>
+          <a:bodyPr wrap="square" lIns="0" rIns="0" tIns="0" bIns="0" anchor="t">
+            <a:spAutoFit/>
+          </a:bodyPr>
+          <a:lstStyle/>
+          <a:p>
+            <a:pPr algn="l">
+              <a:lnSpc>
+                <a:spcPct val="106000"/>
+              </a:lnSpc>
+              <a:spcAft>
+                <a:spcPts val="0"/>
+              </a:spcAft>
+            </a:pPr>
+            <a:r>
+              <a:rPr sz="1550" b="1" i="0">
+                <a:solidFill>
+                  <a:srgbClr val="111111"/>
+                </a:solidFill>
+                <a:latin typeface="Calibri"/>
+              </a:rPr>
+              <a:t>It makes the attack worse</a:t>
+            </a:r>
+          </a:p>
+        </p:txBody>
+      </p:sp>
+      <p:sp>
+        <p:nvSpPr>
+          <p:cNvPr id="12" name="TextBox 11"/>
+          <p:cNvSpPr txBox="1"/>
+          <p:nvPr/>
+        </p:nvSpPr>
+        <p:spPr>
+          <a:xfrm>
+            <a:off x="4937759" y="3447288"/>
+            <a:ext cx="5696712" cy="310896"/>
+          </a:xfrm>
+          <a:prstGeom prst="rect">
+            <a:avLst/>
+          </a:prstGeom>
+          <a:noFill/>
+        </p:spPr>
+        <p:txBody>
+          <a:bodyPr wrap="square" lIns="0" rIns="0" tIns="0" bIns="0" anchor="t">
+            <a:spAutoFit/>
+          </a:bodyPr>
+          <a:lstStyle/>
+          <a:p>
+            <a:pPr algn="l">
+              <a:lnSpc>
+                <a:spcPct val="106000"/>
+              </a:lnSpc>
+              <a:spcAft>
+                <a:spcPts val="0"/>
+              </a:spcAft>
+            </a:pPr>
+            <a:r>
+              <a:rPr sz="1550" b="0" i="0">
+                <a:solidFill>
+                  <a:srgbClr val="444444"/>
+                </a:solidFill>
+                <a:latin typeface="Calibri"/>
+              </a:rPr>
+              <a:t>the attack succeeds MORE often with the defense switched on</a:t>
+            </a:r>
+          </a:p>
+        </p:txBody>
+      </p:sp>
+      <p:sp>
+        <p:nvSpPr>
+          <p:cNvPr id="13" name="TextBox 12"/>
+          <p:cNvSpPr txBox="1"/>
+          <p:nvPr/>
+        </p:nvSpPr>
+        <p:spPr>
+          <a:xfrm>
+            <a:off x="10680192" y="3447288"/>
+            <a:ext cx="777240" cy="310896"/>
+          </a:xfrm>
+          <a:prstGeom prst="rect">
+            <a:avLst/>
+          </a:prstGeom>
+          <a:noFill/>
+        </p:spPr>
+        <p:txBody>
+          <a:bodyPr wrap="square" lIns="0" rIns="0" tIns="0" bIns="0" anchor="t">
+            <a:spAutoFit/>
+          </a:bodyPr>
+          <a:lstStyle/>
+          <a:p>
+            <a:pPr algn="r">
+              <a:lnSpc>
+                <a:spcPct val="106000"/>
+              </a:lnSpc>
+              <a:spcAft>
+                <a:spcPts val="0"/>
+              </a:spcAft>
+            </a:pPr>
+            <a:r>
+              <a:rPr sz="1550" b="1" i="0">
+                <a:solidFill>
+                  <a:srgbClr val="111111"/>
+                </a:solidFill>
+                <a:latin typeface="Calibri"/>
+              </a:rPr>
+              <a:t>8</a:t>
+            </a:r>
+          </a:p>
+        </p:txBody>
+      </p:sp>
+      <p:sp>
+        <p:nvSpPr>
+          <p:cNvPr id="14" name="TextBox 13"/>
+          <p:cNvSpPr txBox="1"/>
+          <p:nvPr/>
+        </p:nvSpPr>
+        <p:spPr>
+          <a:xfrm>
+            <a:off x="8714232" y="4169663"/>
+            <a:ext cx="2743200" cy="274320"/>
+          </a:xfrm>
+          <a:prstGeom prst="rect">
+            <a:avLst/>
+          </a:prstGeom>
+          <a:noFill/>
+        </p:spPr>
+        <p:txBody>
+          <a:bodyPr wrap="square" lIns="0" rIns="0" tIns="0" bIns="0" anchor="t">
+            <a:spAutoFit/>
+          </a:bodyPr>
+          <a:lstStyle/>
+          <a:p>
+            <a:pPr algn="l">
+              <a:lnSpc>
+                <a:spcPct val="106000"/>
+              </a:lnSpc>
+              <a:spcAft>
+                <a:spcPts val="0"/>
+              </a:spcAft>
+            </a:pPr>
+            <a:r>
+              <a:rPr sz="1150" b="0" i="0">
+                <a:solidFill>
+                  <a:srgbClr val="777777"/>
+                </a:solidFill>
+                <a:latin typeface="Calibri"/>
+              </a:rPr>
+              <a:t>out of 19 pairs</a:t>
+            </a:r>
+          </a:p>
+        </p:txBody>
+      </p:sp>
+      <p:sp>
+        <p:nvSpPr>
+          <p:cNvPr id="15" name="TextBox 14"/>
+          <p:cNvSpPr txBox="1"/>
+          <p:nvPr/>
+        </p:nvSpPr>
+        <p:spPr>
+          <a:xfrm>
+            <a:off x="731520" y="4617720"/>
+            <a:ext cx="10725912" cy="1783080"/>
+          </a:xfrm>
+          <a:prstGeom prst="rect">
+            <a:avLst/>
+          </a:prstGeom>
+          <a:noFill/>
+        </p:spPr>
+        <p:txBody>
+          <a:bodyPr wrap="square" lIns="0" rIns="0" tIns="0" bIns="0" anchor="t">
+            <a:spAutoFit/>
+          </a:bodyPr>
+          <a:lstStyle/>
+          <a:p>
+            <a:pPr algn="l">
+              <a:lnSpc>
+                <a:spcPct val="110000"/>
+              </a:lnSpc>
+              <a:spcAft>
+                <a:spcPts val="900"/>
+              </a:spcAft>
+            </a:pPr>
+            <a:r>
+              <a:rPr sz="1500" b="1" i="0">
+                <a:solidFill>
+                  <a:srgbClr val="111111"/>
+                </a:solidFill>
+                <a:latin typeface="Calibri"/>
+              </a:rPr>
+              <a:t>A defense helped in four cases out of eighteen. In seven it made the attack work better than no defense at all.</a:t>
+            </a:r>
+          </a:p>
+          <a:p>
+            <a:pPr>
+              <a:lnSpc>
+                <a:spcPct val="110000"/>
+              </a:lnSpc>
+              <a:spcAft>
+                <a:spcPts val="900"/>
+              </a:spcAft>
+            </a:pPr>
+            <a:r>
+              <a:rPr sz="1500" b="0" i="0">
+                <a:solidFill>
+                  <a:srgbClr val="444444"/>
+                </a:solidFill>
+                <a:latin typeface="Calibri"/>
+              </a:rPr>
+              <a:t>In 5 of those seven the attack does almost nothing to a model with no defense at all. The defense is what makes it work.</a:t>
+            </a:r>
+          </a:p>
+          <a:p>
+            <a:pPr>
+              <a:lnSpc>
+                <a:spcPct val="110000"/>
+              </a:lnSpc>
+              <a:spcAft>
+                <a:spcPts val="900"/>
+              </a:spcAft>
+            </a:pPr>
+            <a:r>
+              <a:rPr sz="1500" b="1" i="0">
+                <a:solidFill>
+                  <a:srgbClr val="111111"/>
+                </a:solidFill>
+                <a:latin typeface="Calibri"/>
+              </a:rPr>
+              <a:t>That is the finding. A defense built for one kind of failure is not neutral against the other kind. It can be the reason the attack succeeds.</a:t>
+            </a:r>
+          </a:p>
+        </p:txBody>
+      </p:sp>
+    </p:spTree>
+  </p:cSld>
+  <p:clrMapOvr>
+    <a:masterClrMapping/>
+  </p:clrMapOvr>
+</p:sld>
+</file>
+
+<file path=ppt/slides/slide16.xml><?xml version="1.0" encoding="utf-8"?>
+<p:sld xmlns:a="http://schemas.openxmlformats.org/drawingml/2006/main" xmlns:p="http://schemas.openxmlformats.org/presentationml/2006/main" xmlns:r="http://schemas.openxmlformats.org/officeDocument/2006/relationships">
+  <p:cSld>
+    <p:spTree>
+      <p:nvGrpSpPr>
+        <p:cNvPr id="1" name=""/>
+        <p:cNvGrpSpPr/>
+        <p:nvPr/>
+      </p:nvGrpSpPr>
+      <p:grpSpPr/>
+      <p:sp>
+        <p:nvSpPr>
+          <p:cNvPr id="2" name="TextBox 1"/>
+          <p:cNvSpPr txBox="1"/>
+          <p:nvPr/>
+        </p:nvSpPr>
+        <p:spPr>
+          <a:xfrm>
+            <a:off x="731520" y="475488"/>
+            <a:ext cx="10725912" cy="274320"/>
+          </a:xfrm>
+          <a:prstGeom prst="rect">
+            <a:avLst/>
+          </a:prstGeom>
+          <a:noFill/>
+        </p:spPr>
+        <p:txBody>
+          <a:bodyPr wrap="square" lIns="0" rIns="0" tIns="0" bIns="0" anchor="t">
+            <a:spAutoFit/>
+          </a:bodyPr>
+          <a:lstStyle/>
+          <a:p>
+            <a:pPr algn="l">
+              <a:lnSpc>
+                <a:spcPct val="106000"/>
+              </a:lnSpc>
+              <a:spcAft>
+                <a:spcPts val="0"/>
+              </a:spcAft>
+            </a:pPr>
+            <a:r>
+              <a:rPr sz="1050" b="1" i="0">
+                <a:solidFill>
+                  <a:srgbClr val="777777"/>
+                </a:solidFill>
+                <a:latin typeface="Calibri"/>
+              </a:rPr>
+              <a:t>WHERE WE ARE NOW</a:t>
+            </a:r>
+          </a:p>
+        </p:txBody>
+      </p:sp>
+      <p:sp>
+        <p:nvSpPr>
+          <p:cNvPr id="3" name="TextBox 2"/>
+          <p:cNvSpPr txBox="1"/>
+          <p:nvPr/>
+        </p:nvSpPr>
+        <p:spPr>
+          <a:xfrm>
+            <a:off x="731520" y="841248"/>
+            <a:ext cx="10725912" cy="868680"/>
+          </a:xfrm>
+          <a:prstGeom prst="rect">
+            <a:avLst/>
+          </a:prstGeom>
+          <a:noFill/>
+        </p:spPr>
+        <p:txBody>
+          <a:bodyPr wrap="square" lIns="0" rIns="0" tIns="0" bIns="0" anchor="t">
+            <a:spAutoFit/>
+          </a:bodyPr>
+          <a:lstStyle/>
+          <a:p>
+            <a:pPr algn="l">
+              <a:lnSpc>
+                <a:spcPct val="102000"/>
+              </a:lnSpc>
+              <a:spcAft>
+                <a:spcPts val="0"/>
+              </a:spcAft>
+            </a:pPr>
+            <a:r>
+              <a:rPr sz="2800" b="1" i="0">
+                <a:solidFill>
+                  <a:srgbClr val="111111"/>
+                </a:solidFill>
+                <a:latin typeface="Cambria"/>
+              </a:rPr>
+              <a:t>What is finished and what is still running</a:t>
+            </a:r>
+          </a:p>
+        </p:txBody>
+      </p:sp>
+      <p:sp>
+        <p:nvSpPr>
+          <p:cNvPr id="4" name="TextBox 3"/>
+          <p:cNvSpPr txBox="1"/>
+          <p:nvPr/>
+        </p:nvSpPr>
+        <p:spPr>
+          <a:xfrm>
+            <a:off x="11201400" y="6419088"/>
+            <a:ext cx="457200" cy="274320"/>
+          </a:xfrm>
+          <a:prstGeom prst="rect">
+            <a:avLst/>
+          </a:prstGeom>
+          <a:noFill/>
+        </p:spPr>
+        <p:txBody>
+          <a:bodyPr wrap="square" lIns="0" rIns="0" tIns="0" bIns="0" anchor="t">
+            <a:spAutoFit/>
+          </a:bodyPr>
+          <a:lstStyle/>
+          <a:p>
+            <a:pPr algn="r">
+              <a:lnSpc>
+                <a:spcPct val="106000"/>
+              </a:lnSpc>
+              <a:spcAft>
+                <a:spcPts val="0"/>
+              </a:spcAft>
+            </a:pPr>
+            <a:r>
+              <a:rPr sz="900" b="0" i="0">
+                <a:solidFill>
+                  <a:srgbClr val="999999"/>
+                </a:solidFill>
+                <a:latin typeface="Calibri"/>
+              </a:rPr>
+              <a:t>16</a:t>
+            </a:r>
+          </a:p>
+        </p:txBody>
+      </p:sp>
+      <p:sp>
+        <p:nvSpPr>
+          <p:cNvPr id="5" name="TextBox 4"/>
+          <p:cNvSpPr txBox="1"/>
+          <p:nvPr/>
+        </p:nvSpPr>
+        <p:spPr>
+          <a:xfrm>
             <a:off x="731520" y="1920240"/>
             <a:ext cx="5212080" cy="292608"/>
           </a:xfrm>
@@ -8409,7 +8802,7 @@
                 </a:solidFill>
                 <a:latin typeface="Calibri"/>
               </a:rPr>
-              <a:t>18 pairs</a:t>
+              <a:t>19 pairs</a:t>
             </a:r>
           </a:p>
         </p:txBody>
@@ -13146,7 +13539,7 @@
                 </a:solidFill>
                 <a:latin typeface="Calibri"/>
               </a:rPr>
-              <a:t>FINDING 1</a:t>
+              <a:t>WHAT THE MAP IS</a:t>
             </a:r>
           </a:p>
         </p:txBody>
@@ -13188,7 +13581,7 @@
                 </a:solidFill>
                 <a:latin typeface="Cambria"/>
               </a:rPr>
-              <a:t>The two communities do not read each other</a:t>
+              <a:t>One row for every attack and every defense</a:t>
             </a:r>
           </a:p>
         </p:txBody>
@@ -13243,36 +13636,55 @@
         </p:nvSpPr>
         <p:spPr>
           <a:xfrm>
-            <a:off x="731520" y="2011680"/>
-            <a:ext cx="2011680" cy="310896"/>
-          </a:xfrm>
-          <a:prstGeom prst="rect">
-            <a:avLst/>
-          </a:prstGeom>
-          <a:noFill/>
-        </p:spPr>
-        <p:txBody>
-          <a:bodyPr wrap="square" lIns="0" rIns="0" tIns="0" bIns="0" anchor="t">
-            <a:spAutoFit/>
-          </a:bodyPr>
-          <a:lstStyle/>
-          <a:p>
-            <a:pPr algn="l">
-              <a:lnSpc>
-                <a:spcPct val="106000"/>
-              </a:lnSpc>
-              <a:spcAft>
-                <a:spcPts val="0"/>
-              </a:spcAft>
-            </a:pPr>
-            <a:r>
-              <a:rPr sz="1600" b="1" i="0">
+            <a:off x="731520" y="1938528"/>
+            <a:ext cx="10725912" cy="4462272"/>
+          </a:xfrm>
+          <a:prstGeom prst="rect">
+            <a:avLst/>
+          </a:prstGeom>
+          <a:noFill/>
+        </p:spPr>
+        <p:txBody>
+          <a:bodyPr wrap="square" lIns="0" rIns="0" tIns="0" bIns="0" anchor="t">
+            <a:spAutoFit/>
+          </a:bodyPr>
+          <a:lstStyle/>
+          <a:p>
+            <a:pPr algn="l">
+              <a:lnSpc>
+                <a:spcPct val="110000"/>
+              </a:lnSpc>
+              <a:spcAft>
+                <a:spcPts val="800"/>
+              </a:spcAft>
+            </a:pPr>
+            <a:r>
+              <a:rPr sz="1400" b="1" i="0">
                 <a:solidFill>
                   <a:srgbClr val="111111"/>
                 </a:solidFill>
                 <a:latin typeface="Calibri"/>
               </a:rPr>
-              <a:t>11.7 %</a:t>
+              <a:t>The map is not a picture. It is a table. One row for each named attack, one row for each named defense, 771 rows in all.</a:t>
+            </a:r>
+          </a:p>
+          <a:p>
+            <a:pPr>
+              <a:lnSpc>
+                <a:spcPct val="110000"/>
+              </a:lnSpc>
+              <a:spcAft>
+                <a:spcPts val="800"/>
+              </a:spcAft>
+            </a:pPr>
+            <a:r>
+              <a:rPr sz="1400" b="0" i="0">
+                <a:solidFill>
+                  <a:srgbClr val="444444"/>
+                </a:solidFill>
+                <a:latin typeface="Calibri"/>
+              </a:rPr>
+              <a:t>Every row carries the same three tags: the route the text came in by, what goes wrong, and whether a person caused it. The tags are read out of the paper's full text, not its title, and they come from fixed lists, so two papers describing the same thing land in the same place.</a:t>
             </a:r>
           </a:p>
         </p:txBody>
@@ -13285,302 +13697,764 @@
         </p:nvSpPr>
         <p:spPr>
           <a:xfrm>
-            <a:off x="2743200" y="2011680"/>
-            <a:ext cx="8714232" cy="310896"/>
-          </a:xfrm>
-          <a:prstGeom prst="rect">
-            <a:avLst/>
-          </a:prstGeom>
-          <a:noFill/>
-        </p:spPr>
-        <p:txBody>
-          <a:bodyPr wrap="square" lIns="0" rIns="0" tIns="0" bIns="0" anchor="t">
-            <a:spAutoFit/>
-          </a:bodyPr>
-          <a:lstStyle/>
-          <a:p>
-            <a:pPr algn="l">
-              <a:lnSpc>
-                <a:spcPct val="106000"/>
-              </a:lnSpc>
-              <a:spcAft>
-                <a:spcPts val="0"/>
-              </a:spcAft>
-            </a:pPr>
-            <a:r>
-              <a:rPr sz="1600" b="0" i="0">
+            <a:off x="731520" y="3383280"/>
+            <a:ext cx="5029200" cy="292608"/>
+          </a:xfrm>
+          <a:prstGeom prst="rect">
+            <a:avLst/>
+          </a:prstGeom>
+          <a:noFill/>
+        </p:spPr>
+        <p:txBody>
+          <a:bodyPr wrap="square" lIns="0" rIns="0" tIns="0" bIns="0" anchor="t">
+            <a:spAutoFit/>
+          </a:bodyPr>
+          <a:lstStyle/>
+          <a:p>
+            <a:pPr algn="l">
+              <a:lnSpc>
+                <a:spcPct val="106000"/>
+              </a:lnSpc>
+              <a:spcAft>
+                <a:spcPts val="0"/>
+              </a:spcAft>
+            </a:pPr>
+            <a:r>
+              <a:rPr sz="1400" b="1" i="0">
+                <a:solidFill>
+                  <a:srgbClr val="111111"/>
+                </a:solidFill>
+                <a:latin typeface="Calibri"/>
+              </a:rPr>
+              <a:t>A row on the attack side</a:t>
+            </a:r>
+          </a:p>
+        </p:txBody>
+      </p:sp>
+      <p:sp>
+        <p:nvSpPr>
+          <p:cNvPr id="7" name="TextBox 6"/>
+          <p:cNvSpPr txBox="1"/>
+          <p:nvPr/>
+        </p:nvSpPr>
+        <p:spPr>
+          <a:xfrm>
+            <a:off x="731520" y="3712463"/>
+            <a:ext cx="2103120" cy="310896"/>
+          </a:xfrm>
+          <a:prstGeom prst="rect">
+            <a:avLst/>
+          </a:prstGeom>
+          <a:noFill/>
+        </p:spPr>
+        <p:txBody>
+          <a:bodyPr wrap="square" lIns="0" rIns="0" tIns="0" bIns="0" anchor="t">
+            <a:spAutoFit/>
+          </a:bodyPr>
+          <a:lstStyle/>
+          <a:p>
+            <a:pPr algn="l">
+              <a:lnSpc>
+                <a:spcPct val="106000"/>
+              </a:lnSpc>
+              <a:spcAft>
+                <a:spcPts val="0"/>
+              </a:spcAft>
+            </a:pPr>
+            <a:r>
+              <a:rPr sz="1300" b="1" i="0">
+                <a:solidFill>
+                  <a:srgbClr val="111111"/>
+                </a:solidFill>
+                <a:latin typeface="Calibri"/>
+              </a:rPr>
+              <a:t>Name</a:t>
+            </a:r>
+          </a:p>
+        </p:txBody>
+      </p:sp>
+      <p:sp>
+        <p:nvSpPr>
+          <p:cNvPr id="8" name="TextBox 7"/>
+          <p:cNvSpPr txBox="1"/>
+          <p:nvPr/>
+        </p:nvSpPr>
+        <p:spPr>
+          <a:xfrm>
+            <a:off x="2834639" y="3712463"/>
+            <a:ext cx="2926080" cy="310896"/>
+          </a:xfrm>
+          <a:prstGeom prst="rect">
+            <a:avLst/>
+          </a:prstGeom>
+          <a:noFill/>
+        </p:spPr>
+        <p:txBody>
+          <a:bodyPr wrap="square" lIns="0" rIns="0" tIns="0" bIns="0" anchor="t">
+            <a:spAutoFit/>
+          </a:bodyPr>
+          <a:lstStyle/>
+          <a:p>
+            <a:pPr algn="l">
+              <a:lnSpc>
+                <a:spcPct val="106000"/>
+              </a:lnSpc>
+              <a:spcAft>
+                <a:spcPts val="0"/>
+              </a:spcAft>
+            </a:pPr>
+            <a:r>
+              <a:rPr sz="1300" b="0" i="0">
                 <a:solidFill>
                   <a:srgbClr val="444444"/>
                 </a:solidFill>
                 <a:latin typeface="Calibri"/>
               </a:rPr>
-              <a:t>of security papers cite at least one machine learning paper</a:t>
-            </a:r>
-          </a:p>
-        </p:txBody>
-      </p:sp>
-      <p:sp>
-        <p:nvSpPr>
-          <p:cNvPr id="7" name="TextBox 6"/>
-          <p:cNvSpPr txBox="1"/>
-          <p:nvPr/>
-        </p:nvSpPr>
-        <p:spPr>
-          <a:xfrm>
-            <a:off x="731520" y="2560320"/>
-            <a:ext cx="2011680" cy="310896"/>
-          </a:xfrm>
-          <a:prstGeom prst="rect">
-            <a:avLst/>
-          </a:prstGeom>
-          <a:noFill/>
-        </p:spPr>
-        <p:txBody>
-          <a:bodyPr wrap="square" lIns="0" rIns="0" tIns="0" bIns="0" anchor="t">
-            <a:spAutoFit/>
-          </a:bodyPr>
-          <a:lstStyle/>
-          <a:p>
-            <a:pPr algn="l">
-              <a:lnSpc>
-                <a:spcPct val="106000"/>
-              </a:lnSpc>
-              <a:spcAft>
-                <a:spcPts val="0"/>
-              </a:spcAft>
-            </a:pPr>
-            <a:r>
-              <a:rPr sz="1600" b="1" i="0">
+              <a:t>corpus poisoning</a:t>
+            </a:r>
+          </a:p>
+        </p:txBody>
+      </p:sp>
+      <p:sp>
+        <p:nvSpPr>
+          <p:cNvPr id="9" name="TextBox 8"/>
+          <p:cNvSpPr txBox="1"/>
+          <p:nvPr/>
+        </p:nvSpPr>
+        <p:spPr>
+          <a:xfrm>
+            <a:off x="731520" y="4078224"/>
+            <a:ext cx="2103120" cy="310896"/>
+          </a:xfrm>
+          <a:prstGeom prst="rect">
+            <a:avLst/>
+          </a:prstGeom>
+          <a:noFill/>
+        </p:spPr>
+        <p:txBody>
+          <a:bodyPr wrap="square" lIns="0" rIns="0" tIns="0" bIns="0" anchor="t">
+            <a:spAutoFit/>
+          </a:bodyPr>
+          <a:lstStyle/>
+          <a:p>
+            <a:pPr algn="l">
+              <a:lnSpc>
+                <a:spcPct val="106000"/>
+              </a:lnSpc>
+              <a:spcAft>
+                <a:spcPts val="0"/>
+              </a:spcAft>
+            </a:pPr>
+            <a:r>
+              <a:rPr sz="1300" b="1" i="0">
                 <a:solidFill>
                   <a:srgbClr val="111111"/>
                 </a:solidFill>
                 <a:latin typeface="Calibri"/>
               </a:rPr>
-              <a:t>9.1 %</a:t>
-            </a:r>
-          </a:p>
-        </p:txBody>
-      </p:sp>
-      <p:sp>
-        <p:nvSpPr>
-          <p:cNvPr id="8" name="TextBox 7"/>
-          <p:cNvSpPr txBox="1"/>
-          <p:nvPr/>
-        </p:nvSpPr>
-        <p:spPr>
-          <a:xfrm>
-            <a:off x="2743200" y="2560320"/>
-            <a:ext cx="8714232" cy="310896"/>
-          </a:xfrm>
-          <a:prstGeom prst="rect">
-            <a:avLst/>
-          </a:prstGeom>
-          <a:noFill/>
-        </p:spPr>
-        <p:txBody>
-          <a:bodyPr wrap="square" lIns="0" rIns="0" tIns="0" bIns="0" anchor="t">
-            <a:spAutoFit/>
-          </a:bodyPr>
-          <a:lstStyle/>
-          <a:p>
-            <a:pPr algn="l">
-              <a:lnSpc>
-                <a:spcPct val="106000"/>
-              </a:lnSpc>
-              <a:spcAft>
-                <a:spcPts val="0"/>
-              </a:spcAft>
-            </a:pPr>
-            <a:r>
-              <a:rPr sz="1600" b="0" i="0">
+              <a:t>Route in</a:t>
+            </a:r>
+          </a:p>
+        </p:txBody>
+      </p:sp>
+      <p:sp>
+        <p:nvSpPr>
+          <p:cNvPr id="10" name="TextBox 9"/>
+          <p:cNvSpPr txBox="1"/>
+          <p:nvPr/>
+        </p:nvSpPr>
+        <p:spPr>
+          <a:xfrm>
+            <a:off x="2834639" y="4078224"/>
+            <a:ext cx="2926080" cy="310896"/>
+          </a:xfrm>
+          <a:prstGeom prst="rect">
+            <a:avLst/>
+          </a:prstGeom>
+          <a:noFill/>
+        </p:spPr>
+        <p:txBody>
+          <a:bodyPr wrap="square" lIns="0" rIns="0" tIns="0" bIns="0" anchor="t">
+            <a:spAutoFit/>
+          </a:bodyPr>
+          <a:lstStyle/>
+          <a:p>
+            <a:pPr algn="l">
+              <a:lnSpc>
+                <a:spcPct val="106000"/>
+              </a:lnSpc>
+              <a:spcAft>
+                <a:spcPts val="0"/>
+              </a:spcAft>
+            </a:pPr>
+            <a:r>
+              <a:rPr sz="1300" b="0" i="0">
                 <a:solidFill>
                   <a:srgbClr val="444444"/>
                 </a:solidFill>
                 <a:latin typeface="Calibri"/>
               </a:rPr>
-              <a:t>of machine learning papers cite at least one security paper</a:t>
-            </a:r>
-          </a:p>
-        </p:txBody>
-      </p:sp>
-      <p:sp>
-        <p:nvSpPr>
-          <p:cNvPr id="9" name="TextBox 8"/>
-          <p:cNvSpPr txBox="1"/>
-          <p:nvPr/>
-        </p:nvSpPr>
-        <p:spPr>
-          <a:xfrm>
-            <a:off x="731520" y="3108960"/>
-            <a:ext cx="2011680" cy="310896"/>
-          </a:xfrm>
-          <a:prstGeom prst="rect">
-            <a:avLst/>
-          </a:prstGeom>
-          <a:noFill/>
-        </p:spPr>
-        <p:txBody>
-          <a:bodyPr wrap="square" lIns="0" rIns="0" tIns="0" bIns="0" anchor="t">
-            <a:spAutoFit/>
-          </a:bodyPr>
-          <a:lstStyle/>
-          <a:p>
-            <a:pPr algn="l">
-              <a:lnSpc>
-                <a:spcPct val="106000"/>
-              </a:lnSpc>
-              <a:spcAft>
-                <a:spcPts val="0"/>
-              </a:spcAft>
-            </a:pPr>
-            <a:r>
-              <a:rPr sz="1600" b="1" i="0">
+              <a:t>RAG</a:t>
+            </a:r>
+          </a:p>
+        </p:txBody>
+      </p:sp>
+      <p:sp>
+        <p:nvSpPr>
+          <p:cNvPr id="11" name="TextBox 10"/>
+          <p:cNvSpPr txBox="1"/>
+          <p:nvPr/>
+        </p:nvSpPr>
+        <p:spPr>
+          <a:xfrm>
+            <a:off x="731520" y="4443983"/>
+            <a:ext cx="2103120" cy="310896"/>
+          </a:xfrm>
+          <a:prstGeom prst="rect">
+            <a:avLst/>
+          </a:prstGeom>
+          <a:noFill/>
+        </p:spPr>
+        <p:txBody>
+          <a:bodyPr wrap="square" lIns="0" rIns="0" tIns="0" bIns="0" anchor="t">
+            <a:spAutoFit/>
+          </a:bodyPr>
+          <a:lstStyle/>
+          <a:p>
+            <a:pPr algn="l">
+              <a:lnSpc>
+                <a:spcPct val="106000"/>
+              </a:lnSpc>
+              <a:spcAft>
+                <a:spcPts val="0"/>
+              </a:spcAft>
+            </a:pPr>
+            <a:r>
+              <a:rPr sz="1300" b="1" i="0">
                 <a:solidFill>
                   <a:srgbClr val="111111"/>
                 </a:solidFill>
                 <a:latin typeface="Calibri"/>
               </a:rPr>
-              <a:t>98.0 %</a:t>
-            </a:r>
-          </a:p>
-        </p:txBody>
-      </p:sp>
-      <p:sp>
-        <p:nvSpPr>
-          <p:cNvPr id="10" name="TextBox 9"/>
-          <p:cNvSpPr txBox="1"/>
-          <p:nvPr/>
-        </p:nvSpPr>
-        <p:spPr>
-          <a:xfrm>
-            <a:off x="2743200" y="3108960"/>
-            <a:ext cx="8714232" cy="310896"/>
-          </a:xfrm>
-          <a:prstGeom prst="rect">
-            <a:avLst/>
-          </a:prstGeom>
-          <a:noFill/>
-        </p:spPr>
-        <p:txBody>
-          <a:bodyPr wrap="square" lIns="0" rIns="0" tIns="0" bIns="0" anchor="t">
-            <a:spAutoFit/>
-          </a:bodyPr>
-          <a:lstStyle/>
-          <a:p>
-            <a:pPr algn="l">
-              <a:lnSpc>
-                <a:spcPct val="106000"/>
-              </a:lnSpc>
-              <a:spcAft>
-                <a:spcPts val="0"/>
-              </a:spcAft>
-            </a:pPr>
-            <a:r>
-              <a:rPr sz="1600" b="0" i="0">
+              <a:t>What goes wrong</a:t>
+            </a:r>
+          </a:p>
+        </p:txBody>
+      </p:sp>
+      <p:sp>
+        <p:nvSpPr>
+          <p:cNvPr id="12" name="TextBox 11"/>
+          <p:cNvSpPr txBox="1"/>
+          <p:nvPr/>
+        </p:nvSpPr>
+        <p:spPr>
+          <a:xfrm>
+            <a:off x="2834639" y="4443983"/>
+            <a:ext cx="2926080" cy="310896"/>
+          </a:xfrm>
+          <a:prstGeom prst="rect">
+            <a:avLst/>
+          </a:prstGeom>
+          <a:noFill/>
+        </p:spPr>
+        <p:txBody>
+          <a:bodyPr wrap="square" lIns="0" rIns="0" tIns="0" bIns="0" anchor="t">
+            <a:spAutoFit/>
+          </a:bodyPr>
+          <a:lstStyle/>
+          <a:p>
+            <a:pPr algn="l">
+              <a:lnSpc>
+                <a:spcPct val="106000"/>
+              </a:lnSpc>
+              <a:spcAft>
+                <a:spcPts val="0"/>
+              </a:spcAft>
+            </a:pPr>
+            <a:r>
+              <a:rPr sz="1300" b="0" i="0">
                 <a:solidFill>
                   <a:srgbClr val="444444"/>
                 </a:solidFill>
                 <a:latin typeface="Calibri"/>
               </a:rPr>
-              <a:t>of all tested pairs stay inside one literature</a:t>
-            </a:r>
-          </a:p>
-        </p:txBody>
-      </p:sp>
-      <p:sp>
-        <p:nvSpPr>
-          <p:cNvPr id="11" name="TextBox 10"/>
-          <p:cNvSpPr txBox="1"/>
-          <p:nvPr/>
-        </p:nvSpPr>
-        <p:spPr>
-          <a:xfrm>
-            <a:off x="731520" y="3657600"/>
-            <a:ext cx="2011680" cy="310896"/>
-          </a:xfrm>
-          <a:prstGeom prst="rect">
-            <a:avLst/>
-          </a:prstGeom>
-          <a:noFill/>
-        </p:spPr>
-        <p:txBody>
-          <a:bodyPr wrap="square" lIns="0" rIns="0" tIns="0" bIns="0" anchor="t">
-            <a:spAutoFit/>
-          </a:bodyPr>
-          <a:lstStyle/>
-          <a:p>
-            <a:pPr algn="l">
-              <a:lnSpc>
-                <a:spcPct val="106000"/>
-              </a:lnSpc>
-              <a:spcAft>
-                <a:spcPts val="0"/>
-              </a:spcAft>
-            </a:pPr>
-            <a:r>
-              <a:rPr sz="1600" b="1" i="0">
+              <a:t>silent-corruption</a:t>
+            </a:r>
+          </a:p>
+        </p:txBody>
+      </p:sp>
+      <p:sp>
+        <p:nvSpPr>
+          <p:cNvPr id="13" name="TextBox 12"/>
+          <p:cNvSpPr txBox="1"/>
+          <p:nvPr/>
+        </p:nvSpPr>
+        <p:spPr>
+          <a:xfrm>
+            <a:off x="731520" y="4809744"/>
+            <a:ext cx="2103120" cy="310896"/>
+          </a:xfrm>
+          <a:prstGeom prst="rect">
+            <a:avLst/>
+          </a:prstGeom>
+          <a:noFill/>
+        </p:spPr>
+        <p:txBody>
+          <a:bodyPr wrap="square" lIns="0" rIns="0" tIns="0" bIns="0" anchor="t">
+            <a:spAutoFit/>
+          </a:bodyPr>
+          <a:lstStyle/>
+          <a:p>
+            <a:pPr algn="l">
+              <a:lnSpc>
+                <a:spcPct val="106000"/>
+              </a:lnSpc>
+              <a:spcAft>
+                <a:spcPts val="0"/>
+              </a:spcAft>
+            </a:pPr>
+            <a:r>
+              <a:rPr sz="1300" b="1" i="0">
                 <a:solidFill>
                   <a:srgbClr val="111111"/>
                 </a:solidFill>
                 <a:latin typeface="Calibri"/>
               </a:rPr>
-              <a:t>60.5 %</a:t>
-            </a:r>
-          </a:p>
-        </p:txBody>
-      </p:sp>
-      <p:sp>
-        <p:nvSpPr>
-          <p:cNvPr id="12" name="TextBox 11"/>
-          <p:cNvSpPr txBox="1"/>
-          <p:nvPr/>
-        </p:nvSpPr>
-        <p:spPr>
-          <a:xfrm>
-            <a:off x="2743200" y="3657600"/>
-            <a:ext cx="8714232" cy="310896"/>
-          </a:xfrm>
-          <a:prstGeom prst="rect">
-            <a:avLst/>
-          </a:prstGeom>
-          <a:noFill/>
-        </p:spPr>
-        <p:txBody>
-          <a:bodyPr wrap="square" lIns="0" rIns="0" tIns="0" bIns="0" anchor="t">
-            <a:spAutoFit/>
-          </a:bodyPr>
-          <a:lstStyle/>
-          <a:p>
-            <a:pPr algn="l">
-              <a:lnSpc>
-                <a:spcPct val="106000"/>
-              </a:lnSpc>
-              <a:spcAft>
-                <a:spcPts val="0"/>
-              </a:spcAft>
-            </a:pPr>
-            <a:r>
-              <a:rPr sz="1600" b="0" i="0">
+              <a:t>Caused by a person?</a:t>
+            </a:r>
+          </a:p>
+        </p:txBody>
+      </p:sp>
+      <p:sp>
+        <p:nvSpPr>
+          <p:cNvPr id="14" name="TextBox 13"/>
+          <p:cNvSpPr txBox="1"/>
+          <p:nvPr/>
+        </p:nvSpPr>
+        <p:spPr>
+          <a:xfrm>
+            <a:off x="2834639" y="4809744"/>
+            <a:ext cx="2926080" cy="310896"/>
+          </a:xfrm>
+          <a:prstGeom prst="rect">
+            <a:avLst/>
+          </a:prstGeom>
+          <a:noFill/>
+        </p:spPr>
+        <p:txBody>
+          <a:bodyPr wrap="square" lIns="0" rIns="0" tIns="0" bIns="0" anchor="t">
+            <a:spAutoFit/>
+          </a:bodyPr>
+          <a:lstStyle/>
+          <a:p>
+            <a:pPr algn="l">
+              <a:lnSpc>
+                <a:spcPct val="106000"/>
+              </a:lnSpc>
+              <a:spcAft>
+                <a:spcPts val="0"/>
+              </a:spcAft>
+            </a:pPr>
+            <a:r>
+              <a:rPr sz="1300" b="0" i="0">
                 <a:solidFill>
                   <a:srgbClr val="444444"/>
                 </a:solidFill>
                 <a:latin typeface="Calibri"/>
               </a:rPr>
-              <a:t>of the 162 combinations in the framework have never been studied</a:t>
-            </a:r>
-          </a:p>
-        </p:txBody>
-      </p:sp>
-      <p:sp>
-        <p:nvSpPr>
-          <p:cNvPr id="13" name="TextBox 12"/>
-          <p:cNvSpPr txBox="1"/>
-          <p:nvPr/>
-        </p:nvSpPr>
-        <p:spPr>
-          <a:xfrm>
-            <a:off x="731520" y="4343400"/>
-            <a:ext cx="10725912" cy="2057400"/>
+              <a:t>yes</a:t>
+            </a:r>
+          </a:p>
+        </p:txBody>
+      </p:sp>
+      <p:sp>
+        <p:nvSpPr>
+          <p:cNvPr id="15" name="TextBox 14"/>
+          <p:cNvSpPr txBox="1"/>
+          <p:nvPr/>
+        </p:nvSpPr>
+        <p:spPr>
+          <a:xfrm>
+            <a:off x="6492240" y="3383280"/>
+            <a:ext cx="5029200" cy="292608"/>
+          </a:xfrm>
+          <a:prstGeom prst="rect">
+            <a:avLst/>
+          </a:prstGeom>
+          <a:noFill/>
+        </p:spPr>
+        <p:txBody>
+          <a:bodyPr wrap="square" lIns="0" rIns="0" tIns="0" bIns="0" anchor="t">
+            <a:spAutoFit/>
+          </a:bodyPr>
+          <a:lstStyle/>
+          <a:p>
+            <a:pPr algn="l">
+              <a:lnSpc>
+                <a:spcPct val="106000"/>
+              </a:lnSpc>
+              <a:spcAft>
+                <a:spcPts val="0"/>
+              </a:spcAft>
+            </a:pPr>
+            <a:r>
+              <a:rPr sz="1400" b="1" i="0">
+                <a:solidFill>
+                  <a:srgbClr val="111111"/>
+                </a:solidFill>
+                <a:latin typeface="Calibri"/>
+              </a:rPr>
+              <a:t>A row on the defense side</a:t>
+            </a:r>
+          </a:p>
+        </p:txBody>
+      </p:sp>
+      <p:sp>
+        <p:nvSpPr>
+          <p:cNvPr id="16" name="TextBox 15"/>
+          <p:cNvSpPr txBox="1"/>
+          <p:nvPr/>
+        </p:nvSpPr>
+        <p:spPr>
+          <a:xfrm>
+            <a:off x="6492240" y="3712463"/>
+            <a:ext cx="2103120" cy="310896"/>
+          </a:xfrm>
+          <a:prstGeom prst="rect">
+            <a:avLst/>
+          </a:prstGeom>
+          <a:noFill/>
+        </p:spPr>
+        <p:txBody>
+          <a:bodyPr wrap="square" lIns="0" rIns="0" tIns="0" bIns="0" anchor="t">
+            <a:spAutoFit/>
+          </a:bodyPr>
+          <a:lstStyle/>
+          <a:p>
+            <a:pPr algn="l">
+              <a:lnSpc>
+                <a:spcPct val="106000"/>
+              </a:lnSpc>
+              <a:spcAft>
+                <a:spcPts val="0"/>
+              </a:spcAft>
+            </a:pPr>
+            <a:r>
+              <a:rPr sz="1300" b="1" i="0">
+                <a:solidFill>
+                  <a:srgbClr val="111111"/>
+                </a:solidFill>
+                <a:latin typeface="Calibri"/>
+              </a:rPr>
+              <a:t>Name</a:t>
+            </a:r>
+          </a:p>
+        </p:txBody>
+      </p:sp>
+      <p:sp>
+        <p:nvSpPr>
+          <p:cNvPr id="17" name="TextBox 16"/>
+          <p:cNvSpPr txBox="1"/>
+          <p:nvPr/>
+        </p:nvSpPr>
+        <p:spPr>
+          <a:xfrm>
+            <a:off x="8595359" y="3712463"/>
+            <a:ext cx="2926080" cy="310896"/>
+          </a:xfrm>
+          <a:prstGeom prst="rect">
+            <a:avLst/>
+          </a:prstGeom>
+          <a:noFill/>
+        </p:spPr>
+        <p:txBody>
+          <a:bodyPr wrap="square" lIns="0" rIns="0" tIns="0" bIns="0" anchor="t">
+            <a:spAutoFit/>
+          </a:bodyPr>
+          <a:lstStyle/>
+          <a:p>
+            <a:pPr algn="l">
+              <a:lnSpc>
+                <a:spcPct val="106000"/>
+              </a:lnSpc>
+              <a:spcAft>
+                <a:spcPts val="0"/>
+              </a:spcAft>
+            </a:pPr>
+            <a:r>
+              <a:rPr sz="1300" b="0" i="0">
+                <a:solidFill>
+                  <a:srgbClr val="444444"/>
+                </a:solidFill>
+                <a:latin typeface="Calibri"/>
+              </a:rPr>
+              <a:t>ParamMute</a:t>
+            </a:r>
+          </a:p>
+        </p:txBody>
+      </p:sp>
+      <p:sp>
+        <p:nvSpPr>
+          <p:cNvPr id="18" name="TextBox 17"/>
+          <p:cNvSpPr txBox="1"/>
+          <p:nvPr/>
+        </p:nvSpPr>
+        <p:spPr>
+          <a:xfrm>
+            <a:off x="6492240" y="4078224"/>
+            <a:ext cx="2103120" cy="310896"/>
+          </a:xfrm>
+          <a:prstGeom prst="rect">
+            <a:avLst/>
+          </a:prstGeom>
+          <a:noFill/>
+        </p:spPr>
+        <p:txBody>
+          <a:bodyPr wrap="square" lIns="0" rIns="0" tIns="0" bIns="0" anchor="t">
+            <a:spAutoFit/>
+          </a:bodyPr>
+          <a:lstStyle/>
+          <a:p>
+            <a:pPr algn="l">
+              <a:lnSpc>
+                <a:spcPct val="106000"/>
+              </a:lnSpc>
+              <a:spcAft>
+                <a:spcPts val="0"/>
+              </a:spcAft>
+            </a:pPr>
+            <a:r>
+              <a:rPr sz="1300" b="1" i="0">
+                <a:solidFill>
+                  <a:srgbClr val="111111"/>
+                </a:solidFill>
+                <a:latin typeface="Calibri"/>
+              </a:rPr>
+              <a:t>Route in</a:t>
+            </a:r>
+          </a:p>
+        </p:txBody>
+      </p:sp>
+      <p:sp>
+        <p:nvSpPr>
+          <p:cNvPr id="19" name="TextBox 18"/>
+          <p:cNvSpPr txBox="1"/>
+          <p:nvPr/>
+        </p:nvSpPr>
+        <p:spPr>
+          <a:xfrm>
+            <a:off x="8595359" y="4078224"/>
+            <a:ext cx="2926080" cy="310896"/>
+          </a:xfrm>
+          <a:prstGeom prst="rect">
+            <a:avLst/>
+          </a:prstGeom>
+          <a:noFill/>
+        </p:spPr>
+        <p:txBody>
+          <a:bodyPr wrap="square" lIns="0" rIns="0" tIns="0" bIns="0" anchor="t">
+            <a:spAutoFit/>
+          </a:bodyPr>
+          <a:lstStyle/>
+          <a:p>
+            <a:pPr algn="l">
+              <a:lnSpc>
+                <a:spcPct val="106000"/>
+              </a:lnSpc>
+              <a:spcAft>
+                <a:spcPts val="0"/>
+              </a:spcAft>
+            </a:pPr>
+            <a:r>
+              <a:rPr sz="1300" b="0" i="0">
+                <a:solidFill>
+                  <a:srgbClr val="444444"/>
+                </a:solidFill>
+                <a:latin typeface="Calibri"/>
+              </a:rPr>
+              <a:t>RAG</a:t>
+            </a:r>
+          </a:p>
+        </p:txBody>
+      </p:sp>
+      <p:sp>
+        <p:nvSpPr>
+          <p:cNvPr id="20" name="TextBox 19"/>
+          <p:cNvSpPr txBox="1"/>
+          <p:nvPr/>
+        </p:nvSpPr>
+        <p:spPr>
+          <a:xfrm>
+            <a:off x="6492240" y="4443983"/>
+            <a:ext cx="2103120" cy="310896"/>
+          </a:xfrm>
+          <a:prstGeom prst="rect">
+            <a:avLst/>
+          </a:prstGeom>
+          <a:noFill/>
+        </p:spPr>
+        <p:txBody>
+          <a:bodyPr wrap="square" lIns="0" rIns="0" tIns="0" bIns="0" anchor="t">
+            <a:spAutoFit/>
+          </a:bodyPr>
+          <a:lstStyle/>
+          <a:p>
+            <a:pPr algn="l">
+              <a:lnSpc>
+                <a:spcPct val="106000"/>
+              </a:lnSpc>
+              <a:spcAft>
+                <a:spcPts val="0"/>
+              </a:spcAft>
+            </a:pPr>
+            <a:r>
+              <a:rPr sz="1300" b="1" i="0">
+                <a:solidFill>
+                  <a:srgbClr val="111111"/>
+                </a:solidFill>
+                <a:latin typeface="Calibri"/>
+              </a:rPr>
+              <a:t>What goes wrong</a:t>
+            </a:r>
+          </a:p>
+        </p:txBody>
+      </p:sp>
+      <p:sp>
+        <p:nvSpPr>
+          <p:cNvPr id="21" name="TextBox 20"/>
+          <p:cNvSpPr txBox="1"/>
+          <p:nvPr/>
+        </p:nvSpPr>
+        <p:spPr>
+          <a:xfrm>
+            <a:off x="8595359" y="4443983"/>
+            <a:ext cx="2926080" cy="310896"/>
+          </a:xfrm>
+          <a:prstGeom prst="rect">
+            <a:avLst/>
+          </a:prstGeom>
+          <a:noFill/>
+        </p:spPr>
+        <p:txBody>
+          <a:bodyPr wrap="square" lIns="0" rIns="0" tIns="0" bIns="0" anchor="t">
+            <a:spAutoFit/>
+          </a:bodyPr>
+          <a:lstStyle/>
+          <a:p>
+            <a:pPr algn="l">
+              <a:lnSpc>
+                <a:spcPct val="106000"/>
+              </a:lnSpc>
+              <a:spcAft>
+                <a:spcPts val="0"/>
+              </a:spcAft>
+            </a:pPr>
+            <a:r>
+              <a:rPr sz="1300" b="0" i="0">
+                <a:solidFill>
+                  <a:srgbClr val="444444"/>
+                </a:solidFill>
+                <a:latin typeface="Calibri"/>
+              </a:rPr>
+              <a:t>silent-corruption</a:t>
+            </a:r>
+          </a:p>
+        </p:txBody>
+      </p:sp>
+      <p:sp>
+        <p:nvSpPr>
+          <p:cNvPr id="22" name="TextBox 21"/>
+          <p:cNvSpPr txBox="1"/>
+          <p:nvPr/>
+        </p:nvSpPr>
+        <p:spPr>
+          <a:xfrm>
+            <a:off x="6492240" y="4809744"/>
+            <a:ext cx="2103120" cy="310896"/>
+          </a:xfrm>
+          <a:prstGeom prst="rect">
+            <a:avLst/>
+          </a:prstGeom>
+          <a:noFill/>
+        </p:spPr>
+        <p:txBody>
+          <a:bodyPr wrap="square" lIns="0" rIns="0" tIns="0" bIns="0" anchor="t">
+            <a:spAutoFit/>
+          </a:bodyPr>
+          <a:lstStyle/>
+          <a:p>
+            <a:pPr algn="l">
+              <a:lnSpc>
+                <a:spcPct val="106000"/>
+              </a:lnSpc>
+              <a:spcAft>
+                <a:spcPts val="0"/>
+              </a:spcAft>
+            </a:pPr>
+            <a:r>
+              <a:rPr sz="1300" b="1" i="0">
+                <a:solidFill>
+                  <a:srgbClr val="111111"/>
+                </a:solidFill>
+                <a:latin typeface="Calibri"/>
+              </a:rPr>
+              <a:t>Built for</a:t>
+            </a:r>
+          </a:p>
+        </p:txBody>
+      </p:sp>
+      <p:sp>
+        <p:nvSpPr>
+          <p:cNvPr id="23" name="TextBox 22"/>
+          <p:cNvSpPr txBox="1"/>
+          <p:nvPr/>
+        </p:nvSpPr>
+        <p:spPr>
+          <a:xfrm>
+            <a:off x="8595359" y="4809744"/>
+            <a:ext cx="2926080" cy="310896"/>
+          </a:xfrm>
+          <a:prstGeom prst="rect">
+            <a:avLst/>
+          </a:prstGeom>
+          <a:noFill/>
+        </p:spPr>
+        <p:txBody>
+          <a:bodyPr wrap="square" lIns="0" rIns="0" tIns="0" bIns="0" anchor="t">
+            <a:spAutoFit/>
+          </a:bodyPr>
+          <a:lstStyle/>
+          <a:p>
+            <a:pPr algn="l">
+              <a:lnSpc>
+                <a:spcPct val="106000"/>
+              </a:lnSpc>
+              <a:spcAft>
+                <a:spcPts val="0"/>
+              </a:spcAft>
+            </a:pPr>
+            <a:r>
+              <a:rPr sz="1300" b="0" i="0">
+                <a:solidFill>
+                  <a:srgbClr val="444444"/>
+                </a:solidFill>
+                <a:latin typeface="Calibri"/>
+              </a:rPr>
+              <a:t>the accidental version</a:t>
+            </a:r>
+          </a:p>
+        </p:txBody>
+      </p:sp>
+      <p:sp>
+        <p:nvSpPr>
+          <p:cNvPr id="24" name="TextBox 23"/>
+          <p:cNvSpPr txBox="1"/>
+          <p:nvPr/>
+        </p:nvSpPr>
+        <p:spPr>
+          <a:xfrm>
+            <a:off x="731520" y="5358384"/>
+            <a:ext cx="10725912" cy="1042415"/>
           </a:xfrm>
           <a:prstGeom prst="rect">
             <a:avLst/>
@@ -13598,17 +14472,17 @@
                 <a:spcPct val="110000"/>
               </a:lnSpc>
               <a:spcAft>
-                <a:spcPts val="1100"/>
-              </a:spcAft>
-            </a:pPr>
-            <a:r>
-              <a:rPr sz="1500" b="1" i="0">
+                <a:spcPts val="800"/>
+              </a:spcAft>
+            </a:pPr>
+            <a:r>
+              <a:rPr sz="1400" b="1" i="0">
                 <a:solidFill>
                   <a:srgbClr val="111111"/>
                 </a:solidFill>
                 <a:latin typeface="Calibri"/>
               </a:rPr>
-              <a:t>Nine of ten papers never cross. Seven pairs in the whole field do.</a:t>
+              <a:t>Same route. Same failure. So the two rows sit in the same cell of the map, and the defense has a claim to answer that attack.</a:t>
             </a:r>
           </a:p>
           <a:p>
@@ -13617,36 +14491,59 @@
                 <a:spcPct val="110000"/>
               </a:lnSpc>
               <a:spcAft>
-                <a:spcPts val="1100"/>
-              </a:spcAft>
-            </a:pPr>
-            <a:r>
-              <a:rPr sz="1500" b="0" i="0">
+                <a:spcPts val="800"/>
+              </a:spcAft>
+            </a:pPr>
+            <a:r>
+              <a:rPr sz="1400" b="0" i="0">
                 <a:solidFill>
                   <a:srgbClr val="444444"/>
                 </a:solidFill>
                 <a:latin typeface="Calibri"/>
               </a:rPr>
-              <a:t>This is not a sample. We resolved every citation edge in the corpus.</a:t>
-            </a:r>
-          </a:p>
-          <a:p>
-            <a:pPr>
-              <a:lnSpc>
-                <a:spcPct val="110000"/>
-              </a:lnSpc>
-              <a:spcAft>
-                <a:spcPts val="1100"/>
-              </a:spcAft>
-            </a:pPr>
-            <a:r>
-              <a:rPr sz="1500" b="1" i="0">
-                <a:solidFill>
-                  <a:srgbClr val="111111"/>
-                </a:solidFill>
-                <a:latin typeface="Calibri"/>
-              </a:rPr>
-              <a:t>So every claim of the form “this defense is robust” holds inside one threat model. Nobody has checked the other one.</a:t>
+              <a:t>Nobody had ever run them against each other. We did.</a:t>
+            </a:r>
+          </a:p>
+        </p:txBody>
+      </p:sp>
+      <p:sp>
+        <p:nvSpPr>
+          <p:cNvPr id="25" name="TextBox 24"/>
+          <p:cNvSpPr txBox="1"/>
+          <p:nvPr/>
+        </p:nvSpPr>
+        <p:spPr>
+          <a:xfrm>
+            <a:off x="731520" y="6400800"/>
+            <a:ext cx="10040112" cy="402336"/>
+          </a:xfrm>
+          <a:prstGeom prst="rect">
+            <a:avLst/>
+          </a:prstGeom>
+          <a:noFill/>
+        </p:spPr>
+        <p:txBody>
+          <a:bodyPr wrap="square" lIns="0" rIns="0" tIns="0" bIns="0" anchor="t">
+            <a:spAutoFit/>
+          </a:bodyPr>
+          <a:lstStyle/>
+          <a:p>
+            <a:pPr algn="l">
+              <a:lnSpc>
+                <a:spcPct val="115000"/>
+              </a:lnSpc>
+              <a:spcAft>
+                <a:spcPts val="0"/>
+              </a:spcAft>
+            </a:pPr>
+            <a:r>
+              <a:rPr sz="850" b="0" i="0">
+                <a:solidFill>
+                  <a:srgbClr val="999999"/>
+                </a:solidFill>
+                <a:latin typeface="Calibri"/>
+              </a:rPr>
+              <a:t>corpus poisoning Zhong et al., EMNLP 2023   ·   ParamMute Huang et al., NeurIPS 2025</a:t>
             </a:r>
           </a:p>
         </p:txBody>
@@ -13706,7 +14603,7 @@
                 </a:solidFill>
                 <a:latin typeface="Calibri"/>
               </a:rPr>
-              <a:t>FINDING 2</a:t>
+              <a:t>FINDING 1</a:t>
             </a:r>
           </a:p>
         </p:txBody>
@@ -13748,7 +14645,7 @@
                 </a:solidFill>
                 <a:latin typeface="Cambria"/>
               </a:rPr>
-              <a:t>Most defenses have never met most attacks</a:t>
+              <a:t>The two communities do not read each other</a:t>
             </a:r>
           </a:p>
         </p:txBody>
@@ -13804,7 +14701,7 @@
         <p:spPr>
           <a:xfrm>
             <a:off x="731520" y="2011680"/>
-            <a:ext cx="2651760" cy="310896"/>
+            <a:ext cx="2011680" cy="310896"/>
           </a:xfrm>
           <a:prstGeom prst="rect">
             <a:avLst/>
@@ -13832,7 +14729,7 @@
                 </a:solidFill>
                 <a:latin typeface="Calibri"/>
               </a:rPr>
-              <a:t>119 of 237</a:t>
+              <a:t>11.7 %</a:t>
             </a:r>
           </a:p>
         </p:txBody>
@@ -13845,8 +14742,8 @@
         </p:nvSpPr>
         <p:spPr>
           <a:xfrm>
-            <a:off x="3383280" y="2011680"/>
-            <a:ext cx="8074152" cy="310896"/>
+            <a:off x="2743200" y="2011680"/>
+            <a:ext cx="8714232" cy="310896"/>
           </a:xfrm>
           <a:prstGeom prst="rect">
             <a:avLst/>
@@ -13874,7 +14771,7 @@
                 </a:solidFill>
                 <a:latin typeface="Calibri"/>
               </a:rPr>
-              <a:t>attacks have no tested defense at all</a:t>
+              <a:t>of security papers cite at least one machine learning paper</a:t>
             </a:r>
           </a:p>
         </p:txBody>
@@ -13887,8 +14784,8 @@
         </p:nvSpPr>
         <p:spPr>
           <a:xfrm>
-            <a:off x="731520" y="2578608"/>
-            <a:ext cx="2651760" cy="310896"/>
+            <a:off x="731520" y="2560320"/>
+            <a:ext cx="2011680" cy="310896"/>
           </a:xfrm>
           <a:prstGeom prst="rect">
             <a:avLst/>
@@ -13916,7 +14813,7 @@
                 </a:solidFill>
                 <a:latin typeface="Calibri"/>
               </a:rPr>
-              <a:t>15 of 534</a:t>
+              <a:t>9.1 %</a:t>
             </a:r>
           </a:p>
         </p:txBody>
@@ -13929,8 +14826,8 @@
         </p:nvSpPr>
         <p:spPr>
           <a:xfrm>
-            <a:off x="3383280" y="2578608"/>
-            <a:ext cx="8074152" cy="310896"/>
+            <a:off x="2743200" y="2560320"/>
+            <a:ext cx="8714232" cy="310896"/>
           </a:xfrm>
           <a:prstGeom prst="rect">
             <a:avLst/>
@@ -13958,7 +14855,7 @@
                 </a:solidFill>
                 <a:latin typeface="Calibri"/>
               </a:rPr>
-              <a:t>defenses were tested against both threat models. That is 2.8 %.</a:t>
+              <a:t>of machine learning papers cite at least one security paper</a:t>
             </a:r>
           </a:p>
         </p:txBody>
@@ -13971,8 +14868,176 @@
         </p:nvSpPr>
         <p:spPr>
           <a:xfrm>
-            <a:off x="731520" y="3611880"/>
-            <a:ext cx="10725912" cy="2788920"/>
+            <a:off x="731520" y="3108960"/>
+            <a:ext cx="2011680" cy="310896"/>
+          </a:xfrm>
+          <a:prstGeom prst="rect">
+            <a:avLst/>
+          </a:prstGeom>
+          <a:noFill/>
+        </p:spPr>
+        <p:txBody>
+          <a:bodyPr wrap="square" lIns="0" rIns="0" tIns="0" bIns="0" anchor="t">
+            <a:spAutoFit/>
+          </a:bodyPr>
+          <a:lstStyle/>
+          <a:p>
+            <a:pPr algn="l">
+              <a:lnSpc>
+                <a:spcPct val="106000"/>
+              </a:lnSpc>
+              <a:spcAft>
+                <a:spcPts val="0"/>
+              </a:spcAft>
+            </a:pPr>
+            <a:r>
+              <a:rPr sz="1600" b="1" i="0">
+                <a:solidFill>
+                  <a:srgbClr val="111111"/>
+                </a:solidFill>
+                <a:latin typeface="Calibri"/>
+              </a:rPr>
+              <a:t>98.0 %</a:t>
+            </a:r>
+          </a:p>
+        </p:txBody>
+      </p:sp>
+      <p:sp>
+        <p:nvSpPr>
+          <p:cNvPr id="10" name="TextBox 9"/>
+          <p:cNvSpPr txBox="1"/>
+          <p:nvPr/>
+        </p:nvSpPr>
+        <p:spPr>
+          <a:xfrm>
+            <a:off x="2743200" y="3108960"/>
+            <a:ext cx="8714232" cy="310896"/>
+          </a:xfrm>
+          <a:prstGeom prst="rect">
+            <a:avLst/>
+          </a:prstGeom>
+          <a:noFill/>
+        </p:spPr>
+        <p:txBody>
+          <a:bodyPr wrap="square" lIns="0" rIns="0" tIns="0" bIns="0" anchor="t">
+            <a:spAutoFit/>
+          </a:bodyPr>
+          <a:lstStyle/>
+          <a:p>
+            <a:pPr algn="l">
+              <a:lnSpc>
+                <a:spcPct val="106000"/>
+              </a:lnSpc>
+              <a:spcAft>
+                <a:spcPts val="0"/>
+              </a:spcAft>
+            </a:pPr>
+            <a:r>
+              <a:rPr sz="1600" b="0" i="0">
+                <a:solidFill>
+                  <a:srgbClr val="444444"/>
+                </a:solidFill>
+                <a:latin typeface="Calibri"/>
+              </a:rPr>
+              <a:t>of all tested pairs stay inside one literature</a:t>
+            </a:r>
+          </a:p>
+        </p:txBody>
+      </p:sp>
+      <p:sp>
+        <p:nvSpPr>
+          <p:cNvPr id="11" name="TextBox 10"/>
+          <p:cNvSpPr txBox="1"/>
+          <p:nvPr/>
+        </p:nvSpPr>
+        <p:spPr>
+          <a:xfrm>
+            <a:off x="731520" y="3657600"/>
+            <a:ext cx="2011680" cy="310896"/>
+          </a:xfrm>
+          <a:prstGeom prst="rect">
+            <a:avLst/>
+          </a:prstGeom>
+          <a:noFill/>
+        </p:spPr>
+        <p:txBody>
+          <a:bodyPr wrap="square" lIns="0" rIns="0" tIns="0" bIns="0" anchor="t">
+            <a:spAutoFit/>
+          </a:bodyPr>
+          <a:lstStyle/>
+          <a:p>
+            <a:pPr algn="l">
+              <a:lnSpc>
+                <a:spcPct val="106000"/>
+              </a:lnSpc>
+              <a:spcAft>
+                <a:spcPts val="0"/>
+              </a:spcAft>
+            </a:pPr>
+            <a:r>
+              <a:rPr sz="1600" b="1" i="0">
+                <a:solidFill>
+                  <a:srgbClr val="111111"/>
+                </a:solidFill>
+                <a:latin typeface="Calibri"/>
+              </a:rPr>
+              <a:t>60.5 %</a:t>
+            </a:r>
+          </a:p>
+        </p:txBody>
+      </p:sp>
+      <p:sp>
+        <p:nvSpPr>
+          <p:cNvPr id="12" name="TextBox 11"/>
+          <p:cNvSpPr txBox="1"/>
+          <p:nvPr/>
+        </p:nvSpPr>
+        <p:spPr>
+          <a:xfrm>
+            <a:off x="2743200" y="3657600"/>
+            <a:ext cx="8714232" cy="310896"/>
+          </a:xfrm>
+          <a:prstGeom prst="rect">
+            <a:avLst/>
+          </a:prstGeom>
+          <a:noFill/>
+        </p:spPr>
+        <p:txBody>
+          <a:bodyPr wrap="square" lIns="0" rIns="0" tIns="0" bIns="0" anchor="t">
+            <a:spAutoFit/>
+          </a:bodyPr>
+          <a:lstStyle/>
+          <a:p>
+            <a:pPr algn="l">
+              <a:lnSpc>
+                <a:spcPct val="106000"/>
+              </a:lnSpc>
+              <a:spcAft>
+                <a:spcPts val="0"/>
+              </a:spcAft>
+            </a:pPr>
+            <a:r>
+              <a:rPr sz="1600" b="0" i="0">
+                <a:solidFill>
+                  <a:srgbClr val="444444"/>
+                </a:solidFill>
+                <a:latin typeface="Calibri"/>
+              </a:rPr>
+              <a:t>of the 162 combinations in the framework have never been studied</a:t>
+            </a:r>
+          </a:p>
+        </p:txBody>
+      </p:sp>
+      <p:sp>
+        <p:nvSpPr>
+          <p:cNvPr id="13" name="TextBox 12"/>
+          <p:cNvSpPr txBox="1"/>
+          <p:nvPr/>
+        </p:nvSpPr>
+        <p:spPr>
+          <a:xfrm>
+            <a:off x="731520" y="4343400"/>
+            <a:ext cx="10725912" cy="2057400"/>
           </a:xfrm>
           <a:prstGeom prst="rect">
             <a:avLst/>
@@ -14000,7 +15065,7 @@
                 </a:solidFill>
                 <a:latin typeface="Calibri"/>
               </a:rPr>
-              <a:t>A defense paper is not a neutral document. A defense is supposed to defend something.</a:t>
+              <a:t>Nine of ten papers never cross. Seven pairs in the whole field do.</a:t>
             </a:r>
           </a:p>
           <a:p>
@@ -14019,7 +15084,7 @@
                 </a:solidFill>
                 <a:latin typeface="Calibri"/>
               </a:rPr>
-              <a:t>99 defense papers name an attack that sits in our map, and then never test against it. Those are not gaps in the field's knowledge. They are gaps in its evidence.</a:t>
+              <a:t>This is not a sample. We resolved every citation edge in the corpus.</a:t>
             </a:r>
           </a:p>
           <a:p>
@@ -14038,7 +15103,7 @@
                 </a:solidFill>
                 <a:latin typeface="Calibri"/>
               </a:rPr>
-              <a:t>At this point the survey had taken us as far as a survey can go. It can show that a test was never run. It cannot say what the test would have found.</a:t>
+              <a:t>So every claim of the form “this defense is robust” holds inside one threat model. Nobody has checked the other one.</a:t>
             </a:r>
           </a:p>
         </p:txBody>

--- a/advisor_meeting.pptx
+++ b/advisor_meeting.pptx
@@ -3328,7 +3328,7 @@
                 </a:solidFill>
                 <a:latin typeface="Cambria"/>
               </a:rPr>
-              <a:t>119 attacks that no defense has been run against</a:t>
+              <a:t>Causes that nothing has ever been run against</a:t>
             </a:r>
           </a:p>
         </p:txBody>
@@ -3383,74 +3383,36 @@
         </p:nvSpPr>
         <p:spPr>
           <a:xfrm>
-            <a:off x="731520" y="1938528"/>
-            <a:ext cx="10725912" cy="4553712"/>
-          </a:xfrm>
-          <a:prstGeom prst="rect">
-            <a:avLst/>
-          </a:prstGeom>
-          <a:noFill/>
-        </p:spPr>
-        <p:txBody>
-          <a:bodyPr wrap="square" lIns="0" rIns="0" tIns="0" bIns="0" anchor="t">
-            <a:spAutoFit/>
-          </a:bodyPr>
-          <a:lstStyle/>
-          <a:p>
-            <a:pPr algn="l">
-              <a:lnSpc>
-                <a:spcPct val="112000"/>
-              </a:lnSpc>
-              <a:spcAft>
-                <a:spcPts val="800"/>
-              </a:spcAft>
-            </a:pPr>
-            <a:r>
-              <a:rPr sz="1400" b="1" i="0">
-                <a:solidFill>
-                  <a:srgbClr val="111111"/>
-                </a:solidFill>
-                <a:latin typeface="Calibri"/>
-              </a:rPr>
-              <a:t>—  Of 237 named attacks, 119 have no tested defense at all.</a:t>
-            </a:r>
-          </a:p>
-          <a:p>
-            <a:pPr>
-              <a:lnSpc>
-                <a:spcPct val="112000"/>
-              </a:lnSpc>
-              <a:spcAft>
-                <a:spcPts val="800"/>
-              </a:spcAft>
-            </a:pPr>
-            <a:r>
-              <a:rPr sz="1400" b="0" i="0">
-                <a:solidFill>
-                  <a:srgbClr val="444444"/>
-                </a:solidFill>
-                <a:latin typeface="Calibri"/>
-              </a:rPr>
-              <a:t>—  That does not mean the attack is unproven. Each paper shows the attack working. It shows it working against a system with no defense switched on.</a:t>
-            </a:r>
-          </a:p>
-          <a:p>
-            <a:pPr>
-              <a:lnSpc>
-                <a:spcPct val="112000"/>
-              </a:lnSpc>
-              <a:spcAft>
-                <a:spcPts val="800"/>
-              </a:spcAft>
-            </a:pPr>
-            <a:r>
-              <a:rPr sz="1400" b="0" i="0">
-                <a:solidFill>
-                  <a:srgbClr val="444444"/>
-                </a:solidFill>
-                <a:latin typeface="Calibri"/>
-              </a:rPr>
-              <a:t>—  What those papers compare against is other attacks, not defenses:</a:t>
+            <a:off x="731520" y="1956816"/>
+            <a:ext cx="2743200" cy="274320"/>
+          </a:xfrm>
+          <a:prstGeom prst="rect">
+            <a:avLst/>
+          </a:prstGeom>
+          <a:noFill/>
+        </p:spPr>
+        <p:txBody>
+          <a:bodyPr wrap="square" lIns="0" rIns="0" tIns="0" bIns="0" anchor="t">
+            <a:spAutoFit/>
+          </a:bodyPr>
+          <a:lstStyle/>
+          <a:p>
+            <a:pPr algn="l">
+              <a:lnSpc>
+                <a:spcPct val="106000"/>
+              </a:lnSpc>
+              <a:spcAft>
+                <a:spcPts val="0"/>
+              </a:spcAft>
+            </a:pPr>
+            <a:r>
+              <a:rPr sz="1000" b="1" i="0">
+                <a:solidFill>
+                  <a:srgbClr val="777777"/>
+                </a:solidFill>
+                <a:latin typeface="Calibri"/>
+              </a:rPr>
+              <a:t>SIDE</a:t>
             </a:r>
           </a:p>
         </p:txBody>
@@ -3463,8 +3425,8 @@
         </p:nvSpPr>
         <p:spPr>
           <a:xfrm>
-            <a:off x="731520" y="3419856"/>
-            <a:ext cx="3931920" cy="274320"/>
+            <a:off x="3474720" y="1956816"/>
+            <a:ext cx="5852160" cy="274320"/>
           </a:xfrm>
           <a:prstGeom prst="rect">
             <a:avLst/>
@@ -3492,7 +3454,7 @@
                 </a:solidFill>
                 <a:latin typeface="Calibri"/>
               </a:rPr>
-              <a:t>ATTACK</a:t>
+              <a:t>CAUSE</a:t>
             </a:r>
           </a:p>
         </p:txBody>
@@ -3505,21 +3467,21 @@
         </p:nvSpPr>
         <p:spPr>
           <a:xfrm>
-            <a:off x="4663440" y="3419856"/>
-            <a:ext cx="6766560" cy="274320"/>
-          </a:xfrm>
-          <a:prstGeom prst="rect">
-            <a:avLst/>
-          </a:prstGeom>
-          <a:noFill/>
-        </p:spPr>
-        <p:txBody>
-          <a:bodyPr wrap="square" lIns="0" rIns="0" tIns="0" bIns="0" anchor="t">
-            <a:spAutoFit/>
-          </a:bodyPr>
-          <a:lstStyle/>
-          <a:p>
-            <a:pPr algn="l">
+            <a:off x="9326880" y="1956816"/>
+            <a:ext cx="1847087" cy="274320"/>
+          </a:xfrm>
+          <a:prstGeom prst="rect">
+            <a:avLst/>
+          </a:prstGeom>
+          <a:noFill/>
+        </p:spPr>
+        <p:txBody>
+          <a:bodyPr wrap="square" lIns="0" rIns="0" tIns="0" bIns="0" anchor="t">
+            <a:spAutoFit/>
+          </a:bodyPr>
+          <a:lstStyle/>
+          <a:p>
+            <a:pPr algn="r">
               <a:lnSpc>
                 <a:spcPct val="106000"/>
               </a:lnSpc>
@@ -3534,7 +3496,7 @@
                 </a:solidFill>
                 <a:latin typeface="Calibri"/>
               </a:rPr>
-              <a:t>ITS PAPER COMPARES AGAINST</a:t>
+              <a:t>NEVER ANSWERED</a:t>
             </a:r>
           </a:p>
         </p:txBody>
@@ -3547,7 +3509,7 @@
         </p:nvSpPr>
         <p:spPr>
           <a:xfrm>
-            <a:off x="731520" y="3694176"/>
+            <a:off x="731520" y="2231136"/>
             <a:ext cx="10698480" cy="9525"/>
           </a:xfrm>
           <a:prstGeom prst="rect">
@@ -3591,7 +3553,448 @@
         </p:nvSpPr>
         <p:spPr>
           <a:xfrm>
-            <a:off x="731520" y="3803904"/>
+            <a:off x="731520" y="2340864"/>
+            <a:ext cx="2743200" cy="310896"/>
+          </a:xfrm>
+          <a:prstGeom prst="rect">
+            <a:avLst/>
+          </a:prstGeom>
+          <a:noFill/>
+        </p:spPr>
+        <p:txBody>
+          <a:bodyPr wrap="square" lIns="0" rIns="0" tIns="0" bIns="0" anchor="t">
+            <a:spAutoFit/>
+          </a:bodyPr>
+          <a:lstStyle/>
+          <a:p>
+            <a:pPr algn="l">
+              <a:lnSpc>
+                <a:spcPct val="106000"/>
+              </a:lnSpc>
+              <a:spcAft>
+                <a:spcPts val="0"/>
+              </a:spcAft>
+            </a:pPr>
+            <a:r>
+              <a:rPr sz="1400" b="0" i="0">
+                <a:solidFill>
+                  <a:srgbClr val="444444"/>
+                </a:solidFill>
+                <a:latin typeface="Calibri"/>
+              </a:rPr>
+              <a:t>security</a:t>
+            </a:r>
+          </a:p>
+        </p:txBody>
+      </p:sp>
+      <p:sp>
+        <p:nvSpPr>
+          <p:cNvPr id="10" name="TextBox 9"/>
+          <p:cNvSpPr txBox="1"/>
+          <p:nvPr/>
+        </p:nvSpPr>
+        <p:spPr>
+          <a:xfrm>
+            <a:off x="3474720" y="2340864"/>
+            <a:ext cx="5852160" cy="310896"/>
+          </a:xfrm>
+          <a:prstGeom prst="rect">
+            <a:avLst/>
+          </a:prstGeom>
+          <a:noFill/>
+        </p:spPr>
+        <p:txBody>
+          <a:bodyPr wrap="square" lIns="0" rIns="0" tIns="0" bIns="0" anchor="t">
+            <a:spAutoFit/>
+          </a:bodyPr>
+          <a:lstStyle/>
+          <a:p>
+            <a:pPr algn="l">
+              <a:lnSpc>
+                <a:spcPct val="106000"/>
+              </a:lnSpc>
+              <a:spcAft>
+                <a:spcPts val="0"/>
+              </a:spcAft>
+            </a:pPr>
+            <a:r>
+              <a:rPr sz="1400" b="0" i="0">
+                <a:solidFill>
+                  <a:srgbClr val="444444"/>
+                </a:solidFill>
+                <a:latin typeface="Calibri"/>
+              </a:rPr>
+              <a:t>attack  (182 named)</a:t>
+            </a:r>
+          </a:p>
+        </p:txBody>
+      </p:sp>
+      <p:sp>
+        <p:nvSpPr>
+          <p:cNvPr id="11" name="TextBox 10"/>
+          <p:cNvSpPr txBox="1"/>
+          <p:nvPr/>
+        </p:nvSpPr>
+        <p:spPr>
+          <a:xfrm>
+            <a:off x="9326880" y="2340864"/>
+            <a:ext cx="1847087" cy="310896"/>
+          </a:xfrm>
+          <a:prstGeom prst="rect">
+            <a:avLst/>
+          </a:prstGeom>
+          <a:noFill/>
+        </p:spPr>
+        <p:txBody>
+          <a:bodyPr wrap="square" lIns="0" rIns="0" tIns="0" bIns="0" anchor="t">
+            <a:spAutoFit/>
+          </a:bodyPr>
+          <a:lstStyle/>
+          <a:p>
+            <a:pPr algn="r">
+              <a:lnSpc>
+                <a:spcPct val="106000"/>
+              </a:lnSpc>
+              <a:spcAft>
+                <a:spcPts val="0"/>
+              </a:spcAft>
+            </a:pPr>
+            <a:r>
+              <a:rPr sz="1400" b="0" i="0">
+                <a:solidFill>
+                  <a:srgbClr val="444444"/>
+                </a:solidFill>
+                <a:latin typeface="Calibri"/>
+              </a:rPr>
+              <a:t>104</a:t>
+            </a:r>
+          </a:p>
+        </p:txBody>
+      </p:sp>
+      <p:sp>
+        <p:nvSpPr>
+          <p:cNvPr id="12" name="TextBox 11"/>
+          <p:cNvSpPr txBox="1"/>
+          <p:nvPr/>
+        </p:nvSpPr>
+        <p:spPr>
+          <a:xfrm>
+            <a:off x="731520" y="2761488"/>
+            <a:ext cx="2743200" cy="310896"/>
+          </a:xfrm>
+          <a:prstGeom prst="rect">
+            <a:avLst/>
+          </a:prstGeom>
+          <a:noFill/>
+        </p:spPr>
+        <p:txBody>
+          <a:bodyPr wrap="square" lIns="0" rIns="0" tIns="0" bIns="0" anchor="t">
+            <a:spAutoFit/>
+          </a:bodyPr>
+          <a:lstStyle/>
+          <a:p>
+            <a:pPr algn="l">
+              <a:lnSpc>
+                <a:spcPct val="106000"/>
+              </a:lnSpc>
+              <a:spcAft>
+                <a:spcPts val="0"/>
+              </a:spcAft>
+            </a:pPr>
+            <a:r>
+              <a:rPr sz="1400" b="0" i="0">
+                <a:solidFill>
+                  <a:srgbClr val="444444"/>
+                </a:solidFill>
+                <a:latin typeface="Calibri"/>
+              </a:rPr>
+              <a:t>machine learning</a:t>
+            </a:r>
+          </a:p>
+        </p:txBody>
+      </p:sp>
+      <p:sp>
+        <p:nvSpPr>
+          <p:cNvPr id="13" name="TextBox 12"/>
+          <p:cNvSpPr txBox="1"/>
+          <p:nvPr/>
+        </p:nvSpPr>
+        <p:spPr>
+          <a:xfrm>
+            <a:off x="3474720" y="2761488"/>
+            <a:ext cx="5852160" cy="310896"/>
+          </a:xfrm>
+          <a:prstGeom prst="rect">
+            <a:avLst/>
+          </a:prstGeom>
+          <a:noFill/>
+        </p:spPr>
+        <p:txBody>
+          <a:bodyPr wrap="square" lIns="0" rIns="0" tIns="0" bIns="0" anchor="t">
+            <a:spAutoFit/>
+          </a:bodyPr>
+          <a:lstStyle/>
+          <a:p>
+            <a:pPr algn="l">
+              <a:lnSpc>
+                <a:spcPct val="106000"/>
+              </a:lnSpc>
+              <a:spcAft>
+                <a:spcPts val="0"/>
+              </a:spcAft>
+            </a:pPr>
+            <a:r>
+              <a:rPr sz="1400" b="0" i="0">
+                <a:solidFill>
+                  <a:srgbClr val="444444"/>
+                </a:solidFill>
+                <a:latin typeface="Calibri"/>
+              </a:rPr>
+              <a:t>incidental mechanism  (55 named)</a:t>
+            </a:r>
+          </a:p>
+        </p:txBody>
+      </p:sp>
+      <p:sp>
+        <p:nvSpPr>
+          <p:cNvPr id="14" name="TextBox 13"/>
+          <p:cNvSpPr txBox="1"/>
+          <p:nvPr/>
+        </p:nvSpPr>
+        <p:spPr>
+          <a:xfrm>
+            <a:off x="9326880" y="2761488"/>
+            <a:ext cx="1847087" cy="310896"/>
+          </a:xfrm>
+          <a:prstGeom prst="rect">
+            <a:avLst/>
+          </a:prstGeom>
+          <a:noFill/>
+        </p:spPr>
+        <p:txBody>
+          <a:bodyPr wrap="square" lIns="0" rIns="0" tIns="0" bIns="0" anchor="t">
+            <a:spAutoFit/>
+          </a:bodyPr>
+          <a:lstStyle/>
+          <a:p>
+            <a:pPr algn="r">
+              <a:lnSpc>
+                <a:spcPct val="106000"/>
+              </a:lnSpc>
+              <a:spcAft>
+                <a:spcPts val="0"/>
+              </a:spcAft>
+            </a:pPr>
+            <a:r>
+              <a:rPr sz="1400" b="0" i="0">
+                <a:solidFill>
+                  <a:srgbClr val="444444"/>
+                </a:solidFill>
+                <a:latin typeface="Calibri"/>
+              </a:rPr>
+              <a:t>15</a:t>
+            </a:r>
+          </a:p>
+        </p:txBody>
+      </p:sp>
+      <p:sp>
+        <p:nvSpPr>
+          <p:cNvPr id="15" name="TextBox 14"/>
+          <p:cNvSpPr txBox="1"/>
+          <p:nvPr/>
+        </p:nvSpPr>
+        <p:spPr>
+          <a:xfrm>
+            <a:off x="731520" y="3108960"/>
+            <a:ext cx="10725912" cy="3383279"/>
+          </a:xfrm>
+          <a:prstGeom prst="rect">
+            <a:avLst/>
+          </a:prstGeom>
+          <a:noFill/>
+        </p:spPr>
+        <p:txBody>
+          <a:bodyPr wrap="square" lIns="0" rIns="0" tIns="0" bIns="0" anchor="t">
+            <a:spAutoFit/>
+          </a:bodyPr>
+          <a:lstStyle/>
+          <a:p>
+            <a:pPr algn="l">
+              <a:lnSpc>
+                <a:spcPct val="112000"/>
+              </a:lnSpc>
+              <a:spcAft>
+                <a:spcPts val="800"/>
+              </a:spcAft>
+            </a:pPr>
+            <a:r>
+              <a:rPr sz="1400" b="1" i="0">
+                <a:solidFill>
+                  <a:srgbClr val="111111"/>
+                </a:solidFill>
+                <a:latin typeface="Calibri"/>
+              </a:rPr>
+              <a:t>—  That does not mean an attack is unproven. Each paper shows it working, against a system with no defense switched on.</a:t>
+            </a:r>
+          </a:p>
+          <a:p>
+            <a:pPr>
+              <a:lnSpc>
+                <a:spcPct val="112000"/>
+              </a:lnSpc>
+              <a:spcAft>
+                <a:spcPts val="800"/>
+              </a:spcAft>
+            </a:pPr>
+            <a:r>
+              <a:rPr sz="1400" b="0" i="0">
+                <a:solidFill>
+                  <a:srgbClr val="444444"/>
+                </a:solidFill>
+                <a:latin typeface="Calibri"/>
+              </a:rPr>
+              <a:t>—  What those papers compare against is other attacks, not defenses:</a:t>
+            </a:r>
+          </a:p>
+        </p:txBody>
+      </p:sp>
+      <p:sp>
+        <p:nvSpPr>
+          <p:cNvPr id="16" name="TextBox 15"/>
+          <p:cNvSpPr txBox="1"/>
+          <p:nvPr/>
+        </p:nvSpPr>
+        <p:spPr>
+          <a:xfrm>
+            <a:off x="731520" y="4041648"/>
+            <a:ext cx="3931920" cy="274320"/>
+          </a:xfrm>
+          <a:prstGeom prst="rect">
+            <a:avLst/>
+          </a:prstGeom>
+          <a:noFill/>
+        </p:spPr>
+        <p:txBody>
+          <a:bodyPr wrap="square" lIns="0" rIns="0" tIns="0" bIns="0" anchor="t">
+            <a:spAutoFit/>
+          </a:bodyPr>
+          <a:lstStyle/>
+          <a:p>
+            <a:pPr algn="l">
+              <a:lnSpc>
+                <a:spcPct val="106000"/>
+              </a:lnSpc>
+              <a:spcAft>
+                <a:spcPts val="0"/>
+              </a:spcAft>
+            </a:pPr>
+            <a:r>
+              <a:rPr sz="1000" b="1" i="0">
+                <a:solidFill>
+                  <a:srgbClr val="777777"/>
+                </a:solidFill>
+                <a:latin typeface="Calibri"/>
+              </a:rPr>
+              <a:t>ATTACK</a:t>
+            </a:r>
+          </a:p>
+        </p:txBody>
+      </p:sp>
+      <p:sp>
+        <p:nvSpPr>
+          <p:cNvPr id="17" name="TextBox 16"/>
+          <p:cNvSpPr txBox="1"/>
+          <p:nvPr/>
+        </p:nvSpPr>
+        <p:spPr>
+          <a:xfrm>
+            <a:off x="4663440" y="4041648"/>
+            <a:ext cx="6766560" cy="274320"/>
+          </a:xfrm>
+          <a:prstGeom prst="rect">
+            <a:avLst/>
+          </a:prstGeom>
+          <a:noFill/>
+        </p:spPr>
+        <p:txBody>
+          <a:bodyPr wrap="square" lIns="0" rIns="0" tIns="0" bIns="0" anchor="t">
+            <a:spAutoFit/>
+          </a:bodyPr>
+          <a:lstStyle/>
+          <a:p>
+            <a:pPr algn="l">
+              <a:lnSpc>
+                <a:spcPct val="106000"/>
+              </a:lnSpc>
+              <a:spcAft>
+                <a:spcPts val="0"/>
+              </a:spcAft>
+            </a:pPr>
+            <a:r>
+              <a:rPr sz="1000" b="1" i="0">
+                <a:solidFill>
+                  <a:srgbClr val="777777"/>
+                </a:solidFill>
+                <a:latin typeface="Calibri"/>
+              </a:rPr>
+              <a:t>ITS PAPER COMPARES AGAINST</a:t>
+            </a:r>
+          </a:p>
+        </p:txBody>
+      </p:sp>
+      <p:sp>
+        <p:nvSpPr>
+          <p:cNvPr id="18" name="Rectangle 17"/>
+          <p:cNvSpPr/>
+          <p:nvPr/>
+        </p:nvSpPr>
+        <p:spPr>
+          <a:xfrm>
+            <a:off x="731520" y="4315968"/>
+            <a:ext cx="10698480" cy="9525"/>
+          </a:xfrm>
+          <a:prstGeom prst="rect">
+            <a:avLst/>
+          </a:prstGeom>
+          <a:solidFill>
+            <a:srgbClr val="CCCCCC"/>
+          </a:solidFill>
+          <a:ln>
+            <a:noFill/>
+          </a:ln>
+          <a:effectLst/>
+        </p:spPr>
+        <p:style>
+          <a:lnRef idx="1">
+            <a:schemeClr val="accent1"/>
+          </a:lnRef>
+          <a:fillRef idx="3">
+            <a:schemeClr val="accent1"/>
+          </a:fillRef>
+          <a:effectRef idx="2">
+            <a:schemeClr val="accent1"/>
+          </a:effectRef>
+          <a:fontRef idx="minor">
+            <a:schemeClr val="lt1"/>
+          </a:fontRef>
+        </p:style>
+        <p:txBody>
+          <a:bodyPr rtlCol="0" anchor="ctr"/>
+          <a:lstStyle/>
+          <a:p>
+            <a:pPr algn="ctr"/>
+          </a:p>
+        </p:txBody>
+      </p:sp>
+      <p:sp>
+        <p:nvSpPr>
+          <p:cNvPr id="19" name="TextBox 18"/>
+          <p:cNvSpPr txBox="1"/>
+          <p:nvPr/>
+        </p:nvSpPr>
+        <p:spPr>
+          <a:xfrm>
+            <a:off x="731520" y="4425696"/>
             <a:ext cx="3931920" cy="310896"/>
           </a:xfrm>
           <a:prstGeom prst="rect">
@@ -3627,13 +4030,13 @@
       </p:sp>
       <p:sp>
         <p:nvSpPr>
-          <p:cNvPr id="10" name="TextBox 9"/>
-          <p:cNvSpPr txBox="1"/>
-          <p:nvPr/>
-        </p:nvSpPr>
-        <p:spPr>
-          <a:xfrm>
-            <a:off x="4663440" y="3803904"/>
+          <p:cNvPr id="20" name="TextBox 19"/>
+          <p:cNvSpPr txBox="1"/>
+          <p:nvPr/>
+        </p:nvSpPr>
+        <p:spPr>
+          <a:xfrm>
+            <a:off x="4663440" y="4425696"/>
             <a:ext cx="6766560" cy="310896"/>
           </a:xfrm>
           <a:prstGeom prst="rect">
@@ -3669,13 +4072,13 @@
       </p:sp>
       <p:sp>
         <p:nvSpPr>
-          <p:cNvPr id="11" name="TextBox 10"/>
-          <p:cNvSpPr txBox="1"/>
-          <p:nvPr/>
-        </p:nvSpPr>
-        <p:spPr>
-          <a:xfrm>
-            <a:off x="731520" y="4206240"/>
+          <p:cNvPr id="21" name="TextBox 20"/>
+          <p:cNvSpPr txBox="1"/>
+          <p:nvPr/>
+        </p:nvSpPr>
+        <p:spPr>
+          <a:xfrm>
+            <a:off x="731520" y="4828032"/>
             <a:ext cx="3931920" cy="310896"/>
           </a:xfrm>
           <a:prstGeom prst="rect">
@@ -3711,13 +4114,13 @@
       </p:sp>
       <p:sp>
         <p:nvSpPr>
-          <p:cNvPr id="12" name="TextBox 11"/>
-          <p:cNvSpPr txBox="1"/>
-          <p:nvPr/>
-        </p:nvSpPr>
-        <p:spPr>
-          <a:xfrm>
-            <a:off x="4663440" y="4206240"/>
+          <p:cNvPr id="22" name="TextBox 21"/>
+          <p:cNvSpPr txBox="1"/>
+          <p:nvPr/>
+        </p:nvSpPr>
+        <p:spPr>
+          <a:xfrm>
+            <a:off x="4663440" y="4828032"/>
             <a:ext cx="6766560" cy="310896"/>
           </a:xfrm>
           <a:prstGeom prst="rect">
@@ -3753,13 +4156,13 @@
       </p:sp>
       <p:sp>
         <p:nvSpPr>
-          <p:cNvPr id="13" name="TextBox 12"/>
-          <p:cNvSpPr txBox="1"/>
-          <p:nvPr/>
-        </p:nvSpPr>
-        <p:spPr>
-          <a:xfrm>
-            <a:off x="731520" y="4608576"/>
+          <p:cNvPr id="23" name="TextBox 22"/>
+          <p:cNvSpPr txBox="1"/>
+          <p:nvPr/>
+        </p:nvSpPr>
+        <p:spPr>
+          <a:xfrm>
+            <a:off x="731520" y="5230368"/>
             <a:ext cx="3931920" cy="310896"/>
           </a:xfrm>
           <a:prstGeom prst="rect">
@@ -3795,13 +4198,13 @@
       </p:sp>
       <p:sp>
         <p:nvSpPr>
-          <p:cNvPr id="14" name="TextBox 13"/>
-          <p:cNvSpPr txBox="1"/>
-          <p:nvPr/>
-        </p:nvSpPr>
-        <p:spPr>
-          <a:xfrm>
-            <a:off x="4663440" y="4608576"/>
+          <p:cNvPr id="24" name="TextBox 23"/>
+          <p:cNvSpPr txBox="1"/>
+          <p:nvPr/>
+        </p:nvSpPr>
+        <p:spPr>
+          <a:xfrm>
+            <a:off x="4663440" y="5230368"/>
             <a:ext cx="6766560" cy="310896"/>
           </a:xfrm>
           <a:prstGeom prst="rect">
@@ -3837,13 +4240,13 @@
       </p:sp>
       <p:sp>
         <p:nvSpPr>
-          <p:cNvPr id="15" name="TextBox 14"/>
-          <p:cNvSpPr txBox="1"/>
-          <p:nvPr/>
-        </p:nvSpPr>
-        <p:spPr>
-          <a:xfrm>
-            <a:off x="731520" y="5010912"/>
+          <p:cNvPr id="25" name="TextBox 24"/>
+          <p:cNvSpPr txBox="1"/>
+          <p:nvPr/>
+        </p:nvSpPr>
+        <p:spPr>
+          <a:xfrm>
+            <a:off x="731520" y="5632704"/>
             <a:ext cx="3931920" cy="310896"/>
           </a:xfrm>
           <a:prstGeom prst="rect">
@@ -3879,13 +4282,13 @@
       </p:sp>
       <p:sp>
         <p:nvSpPr>
-          <p:cNvPr id="16" name="TextBox 15"/>
-          <p:cNvSpPr txBox="1"/>
-          <p:nvPr/>
-        </p:nvSpPr>
-        <p:spPr>
-          <a:xfrm>
-            <a:off x="4663440" y="5010912"/>
+          <p:cNvPr id="26" name="TextBox 25"/>
+          <p:cNvSpPr txBox="1"/>
+          <p:nvPr/>
+        </p:nvSpPr>
+        <p:spPr>
+          <a:xfrm>
+            <a:off x="4663440" y="5632704"/>
             <a:ext cx="6766560" cy="310896"/>
           </a:xfrm>
           <a:prstGeom prst="rect">
@@ -3921,14 +4324,14 @@
       </p:sp>
       <p:sp>
         <p:nvSpPr>
-          <p:cNvPr id="17" name="TextBox 16"/>
-          <p:cNvSpPr txBox="1"/>
-          <p:nvPr/>
-        </p:nvSpPr>
-        <p:spPr>
-          <a:xfrm>
-            <a:off x="731520" y="5394960"/>
-            <a:ext cx="10725912" cy="1097279"/>
+          <p:cNvPr id="27" name="TextBox 26"/>
+          <p:cNvSpPr txBox="1"/>
+          <p:nvPr/>
+        </p:nvSpPr>
+        <p:spPr>
+          <a:xfrm>
+            <a:off x="731520" y="5870448"/>
+            <a:ext cx="10725912" cy="621791"/>
           </a:xfrm>
           <a:prstGeom prst="rect">
             <a:avLst/>
@@ -3963,7 +4366,7 @@
       </p:sp>
       <p:sp>
         <p:nvSpPr>
-          <p:cNvPr id="18" name="TextBox 17"/>
+          <p:cNvPr id="28" name="TextBox 27"/>
           <p:cNvSpPr txBox="1"/>
           <p:nvPr/>
         </p:nvSpPr>
@@ -4100,7 +4503,7 @@
                 </a:solidFill>
                 <a:latin typeface="Cambria"/>
               </a:rPr>
-              <a:t>320 defenses with no attack behind them</a:t>
+              <a:t>320 protections never run against any cause</a:t>
             </a:r>
           </a:p>
         </p:txBody>
@@ -4184,7 +4587,7 @@
                 </a:solidFill>
                 <a:latin typeface="Calibri"/>
               </a:rPr>
-              <a:t>—  Of 534 defenses, 320 were never tested against any attack we can name. We read all 320 to find out what they were defending.</a:t>
+              <a:t>—  124 of 263 defenses and 194 of 266 fixes were never tested against a named cause. We read all 320 to see what they were answering.</a:t>
             </a:r>
           </a:p>
         </p:txBody>
@@ -4197,8 +4600,8 @@
         </p:nvSpPr>
         <p:spPr>
           <a:xfrm>
-            <a:off x="731520" y="2852928"/>
-            <a:ext cx="4114800" cy="274320"/>
+            <a:off x="731520" y="2798064"/>
+            <a:ext cx="3383280" cy="274320"/>
           </a:xfrm>
           <a:prstGeom prst="rect">
             <a:avLst/>
@@ -4239,8 +4642,8 @@
         </p:nvSpPr>
         <p:spPr>
           <a:xfrm>
-            <a:off x="4846320" y="2852928"/>
-            <a:ext cx="932688" cy="274320"/>
+            <a:off x="4114800" y="2798064"/>
+            <a:ext cx="658368" cy="274320"/>
           </a:xfrm>
           <a:prstGeom prst="rect">
             <a:avLst/>
@@ -4281,8 +4684,8 @@
         </p:nvSpPr>
         <p:spPr>
           <a:xfrm>
-            <a:off x="6035040" y="2852928"/>
-            <a:ext cx="5394960" cy="274320"/>
+            <a:off x="5029200" y="2798064"/>
+            <a:ext cx="1371600" cy="274320"/>
           </a:xfrm>
           <a:prstGeom prst="rect">
             <a:avLst/>
@@ -4310,6 +4713,48 @@
                 </a:solidFill>
                 <a:latin typeface="Calibri"/>
               </a:rPr>
+              <a:t>MOSTLY FROM</a:t>
+            </a:r>
+          </a:p>
+        </p:txBody>
+      </p:sp>
+      <p:sp>
+        <p:nvSpPr>
+          <p:cNvPr id="9" name="TextBox 8"/>
+          <p:cNvSpPr txBox="1"/>
+          <p:nvPr/>
+        </p:nvSpPr>
+        <p:spPr>
+          <a:xfrm>
+            <a:off x="6400800" y="2798064"/>
+            <a:ext cx="5029200" cy="274320"/>
+          </a:xfrm>
+          <a:prstGeom prst="rect">
+            <a:avLst/>
+          </a:prstGeom>
+          <a:noFill/>
+        </p:spPr>
+        <p:txBody>
+          <a:bodyPr wrap="square" lIns="0" rIns="0" tIns="0" bIns="0" anchor="t">
+            <a:spAutoFit/>
+          </a:bodyPr>
+          <a:lstStyle/>
+          <a:p>
+            <a:pPr algn="l">
+              <a:lnSpc>
+                <a:spcPct val="106000"/>
+              </a:lnSpc>
+              <a:spcAft>
+                <a:spcPts val="0"/>
+              </a:spcAft>
+            </a:pPr>
+            <a:r>
+              <a:rPr sz="1000" b="1" i="0">
+                <a:solidFill>
+                  <a:srgbClr val="777777"/>
+                </a:solidFill>
+                <a:latin typeface="Calibri"/>
+              </a:rPr>
               <a:t>WHAT IT MEANS</a:t>
             </a:r>
           </a:p>
@@ -4317,13 +4762,13 @@
       </p:sp>
       <p:sp>
         <p:nvSpPr>
-          <p:cNvPr id="9" name="Rectangle 8"/>
+          <p:cNvPr id="10" name="Rectangle 9"/>
           <p:cNvSpPr/>
           <p:nvPr/>
         </p:nvSpPr>
         <p:spPr>
           <a:xfrm>
-            <a:off x="731520" y="3127248"/>
+            <a:off x="731520" y="3072384"/>
             <a:ext cx="10698480" cy="9525"/>
           </a:xfrm>
           <a:prstGeom prst="rect">
@@ -4361,32 +4806,1059 @@
       </p:sp>
       <p:sp>
         <p:nvSpPr>
-          <p:cNvPr id="10" name="TextBox 9"/>
-          <p:cNvSpPr txBox="1"/>
-          <p:nvPr/>
-        </p:nvSpPr>
-        <p:spPr>
-          <a:xfrm>
-            <a:off x="731520" y="3236976"/>
-            <a:ext cx="4114800" cy="310896"/>
-          </a:xfrm>
-          <a:prstGeom prst="rect">
-            <a:avLst/>
-          </a:prstGeom>
-          <a:noFill/>
-        </p:spPr>
-        <p:txBody>
-          <a:bodyPr wrap="square" lIns="0" rIns="0" tIns="0" bIns="0" anchor="t">
-            <a:spAutoFit/>
-          </a:bodyPr>
-          <a:lstStyle/>
-          <a:p>
-            <a:pPr algn="l">
-              <a:lnSpc>
-                <a:spcPct val="106000"/>
-              </a:lnSpc>
-              <a:spcAft>
-                <a:spcPts val="0"/>
+          <p:cNvPr id="11" name="TextBox 10"/>
+          <p:cNvSpPr txBox="1"/>
+          <p:nvPr/>
+        </p:nvSpPr>
+        <p:spPr>
+          <a:xfrm>
+            <a:off x="731520" y="3182112"/>
+            <a:ext cx="3383280" cy="310896"/>
+          </a:xfrm>
+          <a:prstGeom prst="rect">
+            <a:avLst/>
+          </a:prstGeom>
+          <a:noFill/>
+        </p:spPr>
+        <p:txBody>
+          <a:bodyPr wrap="square" lIns="0" rIns="0" tIns="0" bIns="0" anchor="t">
+            <a:spAutoFit/>
+          </a:bodyPr>
+          <a:lstStyle/>
+          <a:p>
+            <a:pPr algn="l">
+              <a:lnSpc>
+                <a:spcPct val="106000"/>
+              </a:lnSpc>
+              <a:spcAft>
+                <a:spcPts val="0"/>
+              </a:spcAft>
+            </a:pPr>
+            <a:r>
+              <a:rPr sz="1250" b="0" i="0">
+                <a:solidFill>
+                  <a:srgbClr val="444444"/>
+                </a:solidFill>
+                <a:latin typeface="Calibri"/>
+              </a:rPr>
+              <a:t>A fix for an accidental failure</a:t>
+            </a:r>
+          </a:p>
+        </p:txBody>
+      </p:sp>
+      <p:sp>
+        <p:nvSpPr>
+          <p:cNvPr id="12" name="TextBox 11"/>
+          <p:cNvSpPr txBox="1"/>
+          <p:nvPr/>
+        </p:nvSpPr>
+        <p:spPr>
+          <a:xfrm>
+            <a:off x="4114800" y="3182112"/>
+            <a:ext cx="658368" cy="310896"/>
+          </a:xfrm>
+          <a:prstGeom prst="rect">
+            <a:avLst/>
+          </a:prstGeom>
+          <a:noFill/>
+        </p:spPr>
+        <p:txBody>
+          <a:bodyPr wrap="square" lIns="0" rIns="0" tIns="0" bIns="0" anchor="t">
+            <a:spAutoFit/>
+          </a:bodyPr>
+          <a:lstStyle/>
+          <a:p>
+            <a:pPr algn="r">
+              <a:lnSpc>
+                <a:spcPct val="106000"/>
+              </a:lnSpc>
+              <a:spcAft>
+                <a:spcPts val="0"/>
+              </a:spcAft>
+            </a:pPr>
+            <a:r>
+              <a:rPr sz="1250" b="0" i="0">
+                <a:solidFill>
+                  <a:srgbClr val="444444"/>
+                </a:solidFill>
+                <a:latin typeface="Calibri"/>
+              </a:rPr>
+              <a:t>126</a:t>
+            </a:r>
+          </a:p>
+        </p:txBody>
+      </p:sp>
+      <p:sp>
+        <p:nvSpPr>
+          <p:cNvPr id="13" name="TextBox 12"/>
+          <p:cNvSpPr txBox="1"/>
+          <p:nvPr/>
+        </p:nvSpPr>
+        <p:spPr>
+          <a:xfrm>
+            <a:off x="5029200" y="3182112"/>
+            <a:ext cx="1371600" cy="310896"/>
+          </a:xfrm>
+          <a:prstGeom prst="rect">
+            <a:avLst/>
+          </a:prstGeom>
+          <a:noFill/>
+        </p:spPr>
+        <p:txBody>
+          <a:bodyPr wrap="square" lIns="0" rIns="0" tIns="0" bIns="0" anchor="t">
+            <a:spAutoFit/>
+          </a:bodyPr>
+          <a:lstStyle/>
+          <a:p>
+            <a:pPr algn="l">
+              <a:lnSpc>
+                <a:spcPct val="106000"/>
+              </a:lnSpc>
+              <a:spcAft>
+                <a:spcPts val="0"/>
+              </a:spcAft>
+            </a:pPr>
+            <a:r>
+              <a:rPr sz="1250" b="0" i="0">
+                <a:solidFill>
+                  <a:srgbClr val="444444"/>
+                </a:solidFill>
+                <a:latin typeface="Calibri"/>
+              </a:rPr>
+              <a:t>ML side</a:t>
+            </a:r>
+          </a:p>
+        </p:txBody>
+      </p:sp>
+      <p:sp>
+        <p:nvSpPr>
+          <p:cNvPr id="14" name="TextBox 13"/>
+          <p:cNvSpPr txBox="1"/>
+          <p:nvPr/>
+        </p:nvSpPr>
+        <p:spPr>
+          <a:xfrm>
+            <a:off x="6400800" y="3182112"/>
+            <a:ext cx="5029200" cy="310896"/>
+          </a:xfrm>
+          <a:prstGeom prst="rect">
+            <a:avLst/>
+          </a:prstGeom>
+          <a:noFill/>
+        </p:spPr>
+        <p:txBody>
+          <a:bodyPr wrap="square" lIns="0" rIns="0" tIns="0" bIns="0" anchor="t">
+            <a:spAutoFit/>
+          </a:bodyPr>
+          <a:lstStyle/>
+          <a:p>
+            <a:pPr algn="l">
+              <a:lnSpc>
+                <a:spcPct val="106000"/>
+              </a:lnSpc>
+              <a:spcAft>
+                <a:spcPts val="0"/>
+              </a:spcAft>
+            </a:pPr>
+            <a:r>
+              <a:rPr sz="1250" b="0" i="0">
+                <a:solidFill>
+                  <a:srgbClr val="444444"/>
+                </a:solidFill>
+                <a:latin typeface="Calibri"/>
+              </a:rPr>
+              <a:t>it answers a real failure; it never claimed to stop an adversary</a:t>
+            </a:r>
+          </a:p>
+        </p:txBody>
+      </p:sp>
+      <p:sp>
+        <p:nvSpPr>
+          <p:cNvPr id="15" name="TextBox 14"/>
+          <p:cNvSpPr txBox="1"/>
+          <p:nvPr/>
+        </p:nvSpPr>
+        <p:spPr>
+          <a:xfrm>
+            <a:off x="731520" y="3584448"/>
+            <a:ext cx="3383280" cy="310896"/>
+          </a:xfrm>
+          <a:prstGeom prst="rect">
+            <a:avLst/>
+          </a:prstGeom>
+          <a:noFill/>
+        </p:spPr>
+        <p:txBody>
+          <a:bodyPr wrap="square" lIns="0" rIns="0" tIns="0" bIns="0" anchor="t">
+            <a:spAutoFit/>
+          </a:bodyPr>
+          <a:lstStyle/>
+          <a:p>
+            <a:pPr algn="l">
+              <a:lnSpc>
+                <a:spcPct val="106000"/>
+              </a:lnSpc>
+              <a:spcAft>
+                <a:spcPts val="0"/>
+              </a:spcAft>
+            </a:pPr>
+            <a:r>
+              <a:rPr sz="1250" b="0" i="0">
+                <a:solidFill>
+                  <a:srgbClr val="444444"/>
+                </a:solidFill>
+                <a:latin typeface="Calibri"/>
+              </a:rPr>
+              <a:t>Names a cause, never tests it</a:t>
+            </a:r>
+          </a:p>
+        </p:txBody>
+      </p:sp>
+      <p:sp>
+        <p:nvSpPr>
+          <p:cNvPr id="16" name="TextBox 15"/>
+          <p:cNvSpPr txBox="1"/>
+          <p:nvPr/>
+        </p:nvSpPr>
+        <p:spPr>
+          <a:xfrm>
+            <a:off x="4114800" y="3584448"/>
+            <a:ext cx="658368" cy="310896"/>
+          </a:xfrm>
+          <a:prstGeom prst="rect">
+            <a:avLst/>
+          </a:prstGeom>
+          <a:noFill/>
+        </p:spPr>
+        <p:txBody>
+          <a:bodyPr wrap="square" lIns="0" rIns="0" tIns="0" bIns="0" anchor="t">
+            <a:spAutoFit/>
+          </a:bodyPr>
+          <a:lstStyle/>
+          <a:p>
+            <a:pPr algn="r">
+              <a:lnSpc>
+                <a:spcPct val="106000"/>
+              </a:lnSpc>
+              <a:spcAft>
+                <a:spcPts val="0"/>
+              </a:spcAft>
+            </a:pPr>
+            <a:r>
+              <a:rPr sz="1250" b="0" i="0">
+                <a:solidFill>
+                  <a:srgbClr val="444444"/>
+                </a:solidFill>
+                <a:latin typeface="Calibri"/>
+              </a:rPr>
+              <a:t>99</a:t>
+            </a:r>
+          </a:p>
+        </p:txBody>
+      </p:sp>
+      <p:sp>
+        <p:nvSpPr>
+          <p:cNvPr id="17" name="TextBox 16"/>
+          <p:cNvSpPr txBox="1"/>
+          <p:nvPr/>
+        </p:nvSpPr>
+        <p:spPr>
+          <a:xfrm>
+            <a:off x="5029200" y="3584448"/>
+            <a:ext cx="1371600" cy="310896"/>
+          </a:xfrm>
+          <a:prstGeom prst="rect">
+            <a:avLst/>
+          </a:prstGeom>
+          <a:noFill/>
+        </p:spPr>
+        <p:txBody>
+          <a:bodyPr wrap="square" lIns="0" rIns="0" tIns="0" bIns="0" anchor="t">
+            <a:spAutoFit/>
+          </a:bodyPr>
+          <a:lstStyle/>
+          <a:p>
+            <a:pPr algn="l">
+              <a:lnSpc>
+                <a:spcPct val="106000"/>
+              </a:lnSpc>
+              <a:spcAft>
+                <a:spcPts val="0"/>
+              </a:spcAft>
+            </a:pPr>
+            <a:r>
+              <a:rPr sz="1250" b="0" i="0">
+                <a:solidFill>
+                  <a:srgbClr val="444444"/>
+                </a:solidFill>
+                <a:latin typeface="Calibri"/>
+              </a:rPr>
+              <a:t>both</a:t>
+            </a:r>
+          </a:p>
+        </p:txBody>
+      </p:sp>
+      <p:sp>
+        <p:nvSpPr>
+          <p:cNvPr id="18" name="TextBox 17"/>
+          <p:cNvSpPr txBox="1"/>
+          <p:nvPr/>
+        </p:nvSpPr>
+        <p:spPr>
+          <a:xfrm>
+            <a:off x="6400800" y="3584448"/>
+            <a:ext cx="5029200" cy="310896"/>
+          </a:xfrm>
+          <a:prstGeom prst="rect">
+            <a:avLst/>
+          </a:prstGeom>
+          <a:noFill/>
+        </p:spPr>
+        <p:txBody>
+          <a:bodyPr wrap="square" lIns="0" rIns="0" tIns="0" bIns="0" anchor="t">
+            <a:spAutoFit/>
+          </a:bodyPr>
+          <a:lstStyle/>
+          <a:p>
+            <a:pPr algn="l">
+              <a:lnSpc>
+                <a:spcPct val="106000"/>
+              </a:lnSpc>
+              <a:spcAft>
+                <a:spcPts val="0"/>
+              </a:spcAft>
+            </a:pPr>
+            <a:r>
+              <a:rPr sz="1250" b="0" i="0">
+                <a:solidFill>
+                  <a:srgbClr val="444444"/>
+                </a:solidFill>
+                <a:latin typeface="Calibri"/>
+              </a:rPr>
+              <a:t>the cause is on our map; the experiment is missing</a:t>
+            </a:r>
+          </a:p>
+        </p:txBody>
+      </p:sp>
+      <p:sp>
+        <p:nvSpPr>
+          <p:cNvPr id="19" name="TextBox 18"/>
+          <p:cNvSpPr txBox="1"/>
+          <p:nvPr/>
+        </p:nvSpPr>
+        <p:spPr>
+          <a:xfrm>
+            <a:off x="731520" y="3986784"/>
+            <a:ext cx="3383280" cy="310896"/>
+          </a:xfrm>
+          <a:prstGeom prst="rect">
+            <a:avLst/>
+          </a:prstGeom>
+          <a:noFill/>
+        </p:spPr>
+        <p:txBody>
+          <a:bodyPr wrap="square" lIns="0" rIns="0" tIns="0" bIns="0" anchor="t">
+            <a:spAutoFit/>
+          </a:bodyPr>
+          <a:lstStyle/>
+          <a:p>
+            <a:pPr algn="l">
+              <a:lnSpc>
+                <a:spcPct val="106000"/>
+              </a:lnSpc>
+              <a:spcAft>
+                <a:spcPts val="0"/>
+              </a:spcAft>
+            </a:pPr>
+            <a:r>
+              <a:rPr sz="1250" b="0" i="0">
+                <a:solidFill>
+                  <a:srgbClr val="444444"/>
+                </a:solidFill>
+                <a:latin typeface="Calibri"/>
+              </a:rPr>
+              <a:t>Threat described in prose only</a:t>
+            </a:r>
+          </a:p>
+        </p:txBody>
+      </p:sp>
+      <p:sp>
+        <p:nvSpPr>
+          <p:cNvPr id="20" name="TextBox 19"/>
+          <p:cNvSpPr txBox="1"/>
+          <p:nvPr/>
+        </p:nvSpPr>
+        <p:spPr>
+          <a:xfrm>
+            <a:off x="4114800" y="3986784"/>
+            <a:ext cx="658368" cy="310896"/>
+          </a:xfrm>
+          <a:prstGeom prst="rect">
+            <a:avLst/>
+          </a:prstGeom>
+          <a:noFill/>
+        </p:spPr>
+        <p:txBody>
+          <a:bodyPr wrap="square" lIns="0" rIns="0" tIns="0" bIns="0" anchor="t">
+            <a:spAutoFit/>
+          </a:bodyPr>
+          <a:lstStyle/>
+          <a:p>
+            <a:pPr algn="r">
+              <a:lnSpc>
+                <a:spcPct val="106000"/>
+              </a:lnSpc>
+              <a:spcAft>
+                <a:spcPts val="0"/>
+              </a:spcAft>
+            </a:pPr>
+            <a:r>
+              <a:rPr sz="1250" b="0" i="0">
+                <a:solidFill>
+                  <a:srgbClr val="444444"/>
+                </a:solidFill>
+                <a:latin typeface="Calibri"/>
+              </a:rPr>
+              <a:t>41</a:t>
+            </a:r>
+          </a:p>
+        </p:txBody>
+      </p:sp>
+      <p:sp>
+        <p:nvSpPr>
+          <p:cNvPr id="21" name="TextBox 20"/>
+          <p:cNvSpPr txBox="1"/>
+          <p:nvPr/>
+        </p:nvSpPr>
+        <p:spPr>
+          <a:xfrm>
+            <a:off x="5029200" y="3986784"/>
+            <a:ext cx="1371600" cy="310896"/>
+          </a:xfrm>
+          <a:prstGeom prst="rect">
+            <a:avLst/>
+          </a:prstGeom>
+          <a:noFill/>
+        </p:spPr>
+        <p:txBody>
+          <a:bodyPr wrap="square" lIns="0" rIns="0" tIns="0" bIns="0" anchor="t">
+            <a:spAutoFit/>
+          </a:bodyPr>
+          <a:lstStyle/>
+          <a:p>
+            <a:pPr algn="l">
+              <a:lnSpc>
+                <a:spcPct val="106000"/>
+              </a:lnSpc>
+              <a:spcAft>
+                <a:spcPts val="0"/>
+              </a:spcAft>
+            </a:pPr>
+            <a:r>
+              <a:rPr sz="1250" b="0" i="0">
+                <a:solidFill>
+                  <a:srgbClr val="444444"/>
+                </a:solidFill>
+                <a:latin typeface="Calibri"/>
+              </a:rPr>
+              <a:t>security</a:t>
+            </a:r>
+          </a:p>
+        </p:txBody>
+      </p:sp>
+      <p:sp>
+        <p:nvSpPr>
+          <p:cNvPr id="22" name="TextBox 21"/>
+          <p:cNvSpPr txBox="1"/>
+          <p:nvPr/>
+        </p:nvSpPr>
+        <p:spPr>
+          <a:xfrm>
+            <a:off x="6400800" y="3986784"/>
+            <a:ext cx="5029200" cy="310896"/>
+          </a:xfrm>
+          <a:prstGeom prst="rect">
+            <a:avLst/>
+          </a:prstGeom>
+          <a:noFill/>
+        </p:spPr>
+        <p:txBody>
+          <a:bodyPr wrap="square" lIns="0" rIns="0" tIns="0" bIns="0" anchor="t">
+            <a:spAutoFit/>
+          </a:bodyPr>
+          <a:lstStyle/>
+          <a:p>
+            <a:pPr algn="l">
+              <a:lnSpc>
+                <a:spcPct val="106000"/>
+              </a:lnSpc>
+              <a:spcAft>
+                <a:spcPts val="0"/>
+              </a:spcAft>
+            </a:pPr>
+            <a:r>
+              <a:rPr sz="1250" b="0" i="0">
+                <a:solidFill>
+                  <a:srgbClr val="444444"/>
+                </a:solidFill>
+                <a:latin typeface="Calibri"/>
+              </a:rPr>
+              <a:t>an adversary is named; no experiment follows</a:t>
+            </a:r>
+          </a:p>
+        </p:txBody>
+      </p:sp>
+      <p:sp>
+        <p:nvSpPr>
+          <p:cNvPr id="23" name="TextBox 22"/>
+          <p:cNvSpPr txBox="1"/>
+          <p:nvPr/>
+        </p:nvSpPr>
+        <p:spPr>
+          <a:xfrm>
+            <a:off x="731520" y="4389120"/>
+            <a:ext cx="3383280" cy="310896"/>
+          </a:xfrm>
+          <a:prstGeom prst="rect">
+            <a:avLst/>
+          </a:prstGeom>
+          <a:noFill/>
+        </p:spPr>
+        <p:txBody>
+          <a:bodyPr wrap="square" lIns="0" rIns="0" tIns="0" bIns="0" anchor="t">
+            <a:spAutoFit/>
+          </a:bodyPr>
+          <a:lstStyle/>
+          <a:p>
+            <a:pPr algn="l">
+              <a:lnSpc>
+                <a:spcPct val="106000"/>
+              </a:lnSpc>
+              <a:spcAft>
+                <a:spcPts val="0"/>
+              </a:spcAft>
+            </a:pPr>
+            <a:r>
+              <a:rPr sz="1250" b="0" i="0">
+                <a:solidFill>
+                  <a:srgbClr val="444444"/>
+                </a:solidFill>
+                <a:latin typeface="Calibri"/>
+              </a:rPr>
+              <a:t>Tests an attack it invented</a:t>
+            </a:r>
+          </a:p>
+        </p:txBody>
+      </p:sp>
+      <p:sp>
+        <p:nvSpPr>
+          <p:cNvPr id="24" name="TextBox 23"/>
+          <p:cNvSpPr txBox="1"/>
+          <p:nvPr/>
+        </p:nvSpPr>
+        <p:spPr>
+          <a:xfrm>
+            <a:off x="4114800" y="4389120"/>
+            <a:ext cx="658368" cy="310896"/>
+          </a:xfrm>
+          <a:prstGeom prst="rect">
+            <a:avLst/>
+          </a:prstGeom>
+          <a:noFill/>
+        </p:spPr>
+        <p:txBody>
+          <a:bodyPr wrap="square" lIns="0" rIns="0" tIns="0" bIns="0" anchor="t">
+            <a:spAutoFit/>
+          </a:bodyPr>
+          <a:lstStyle/>
+          <a:p>
+            <a:pPr algn="r">
+              <a:lnSpc>
+                <a:spcPct val="106000"/>
+              </a:lnSpc>
+              <a:spcAft>
+                <a:spcPts val="0"/>
+              </a:spcAft>
+            </a:pPr>
+            <a:r>
+              <a:rPr sz="1250" b="0" i="0">
+                <a:solidFill>
+                  <a:srgbClr val="444444"/>
+                </a:solidFill>
+                <a:latin typeface="Calibri"/>
+              </a:rPr>
+              <a:t>22</a:t>
+            </a:r>
+          </a:p>
+        </p:txBody>
+      </p:sp>
+      <p:sp>
+        <p:nvSpPr>
+          <p:cNvPr id="25" name="TextBox 24"/>
+          <p:cNvSpPr txBox="1"/>
+          <p:nvPr/>
+        </p:nvSpPr>
+        <p:spPr>
+          <a:xfrm>
+            <a:off x="5029200" y="4389120"/>
+            <a:ext cx="1371600" cy="310896"/>
+          </a:xfrm>
+          <a:prstGeom prst="rect">
+            <a:avLst/>
+          </a:prstGeom>
+          <a:noFill/>
+        </p:spPr>
+        <p:txBody>
+          <a:bodyPr wrap="square" lIns="0" rIns="0" tIns="0" bIns="0" anchor="t">
+            <a:spAutoFit/>
+          </a:bodyPr>
+          <a:lstStyle/>
+          <a:p>
+            <a:pPr algn="l">
+              <a:lnSpc>
+                <a:spcPct val="106000"/>
+              </a:lnSpc>
+              <a:spcAft>
+                <a:spcPts val="0"/>
+              </a:spcAft>
+            </a:pPr>
+            <a:r>
+              <a:rPr sz="1250" b="0" i="0">
+                <a:solidFill>
+                  <a:srgbClr val="444444"/>
+                </a:solidFill>
+                <a:latin typeface="Calibri"/>
+              </a:rPr>
+              <a:t>security</a:t>
+            </a:r>
+          </a:p>
+        </p:txBody>
+      </p:sp>
+      <p:sp>
+        <p:nvSpPr>
+          <p:cNvPr id="26" name="TextBox 25"/>
+          <p:cNvSpPr txBox="1"/>
+          <p:nvPr/>
+        </p:nvSpPr>
+        <p:spPr>
+          <a:xfrm>
+            <a:off x="6400800" y="4389120"/>
+            <a:ext cx="5029200" cy="310896"/>
+          </a:xfrm>
+          <a:prstGeom prst="rect">
+            <a:avLst/>
+          </a:prstGeom>
+          <a:noFill/>
+        </p:spPr>
+        <p:txBody>
+          <a:bodyPr wrap="square" lIns="0" rIns="0" tIns="0" bIns="0" anchor="t">
+            <a:spAutoFit/>
+          </a:bodyPr>
+          <a:lstStyle/>
+          <a:p>
+            <a:pPr algn="l">
+              <a:lnSpc>
+                <a:spcPct val="106000"/>
+              </a:lnSpc>
+              <a:spcAft>
+                <a:spcPts val="0"/>
+              </a:spcAft>
+            </a:pPr>
+            <a:r>
+              <a:rPr sz="1250" b="0" i="0">
+                <a:solidFill>
+                  <a:srgbClr val="444444"/>
+                </a:solidFill>
+                <a:latin typeface="Calibri"/>
+              </a:rPr>
+              <a:t>evaluated only against the authors' own construction</a:t>
+            </a:r>
+          </a:p>
+        </p:txBody>
+      </p:sp>
+      <p:sp>
+        <p:nvSpPr>
+          <p:cNvPr id="27" name="TextBox 26"/>
+          <p:cNvSpPr txBox="1"/>
+          <p:nvPr/>
+        </p:nvSpPr>
+        <p:spPr>
+          <a:xfrm>
+            <a:off x="731520" y="4791456"/>
+            <a:ext cx="3383280" cy="310896"/>
+          </a:xfrm>
+          <a:prstGeom prst="rect">
+            <a:avLst/>
+          </a:prstGeom>
+          <a:noFill/>
+        </p:spPr>
+        <p:txBody>
+          <a:bodyPr wrap="square" lIns="0" rIns="0" tIns="0" bIns="0" anchor="t">
+            <a:spAutoFit/>
+          </a:bodyPr>
+          <a:lstStyle/>
+          <a:p>
+            <a:pPr algn="l">
+              <a:lnSpc>
+                <a:spcPct val="106000"/>
+              </a:lnSpc>
+              <a:spcAft>
+                <a:spcPts val="0"/>
+              </a:spcAft>
+            </a:pPr>
+            <a:r>
+              <a:rPr sz="1250" b="0" i="0">
+                <a:solidFill>
+                  <a:srgbClr val="444444"/>
+                </a:solidFill>
+                <a:latin typeface="Calibri"/>
+              </a:rPr>
+              <a:t>Names a benchmark, not a cause</a:t>
+            </a:r>
+          </a:p>
+        </p:txBody>
+      </p:sp>
+      <p:sp>
+        <p:nvSpPr>
+          <p:cNvPr id="28" name="TextBox 27"/>
+          <p:cNvSpPr txBox="1"/>
+          <p:nvPr/>
+        </p:nvSpPr>
+        <p:spPr>
+          <a:xfrm>
+            <a:off x="4114800" y="4791456"/>
+            <a:ext cx="658368" cy="310896"/>
+          </a:xfrm>
+          <a:prstGeom prst="rect">
+            <a:avLst/>
+          </a:prstGeom>
+          <a:noFill/>
+        </p:spPr>
+        <p:txBody>
+          <a:bodyPr wrap="square" lIns="0" rIns="0" tIns="0" bIns="0" anchor="t">
+            <a:spAutoFit/>
+          </a:bodyPr>
+          <a:lstStyle/>
+          <a:p>
+            <a:pPr algn="r">
+              <a:lnSpc>
+                <a:spcPct val="106000"/>
+              </a:lnSpc>
+              <a:spcAft>
+                <a:spcPts val="0"/>
+              </a:spcAft>
+            </a:pPr>
+            <a:r>
+              <a:rPr sz="1250" b="0" i="0">
+                <a:solidFill>
+                  <a:srgbClr val="444444"/>
+                </a:solidFill>
+                <a:latin typeface="Calibri"/>
+              </a:rPr>
+              <a:t>11</a:t>
+            </a:r>
+          </a:p>
+        </p:txBody>
+      </p:sp>
+      <p:sp>
+        <p:nvSpPr>
+          <p:cNvPr id="29" name="TextBox 28"/>
+          <p:cNvSpPr txBox="1"/>
+          <p:nvPr/>
+        </p:nvSpPr>
+        <p:spPr>
+          <a:xfrm>
+            <a:off x="5029200" y="4791456"/>
+            <a:ext cx="1371600" cy="310896"/>
+          </a:xfrm>
+          <a:prstGeom prst="rect">
+            <a:avLst/>
+          </a:prstGeom>
+          <a:noFill/>
+        </p:spPr>
+        <p:txBody>
+          <a:bodyPr wrap="square" lIns="0" rIns="0" tIns="0" bIns="0" anchor="t">
+            <a:spAutoFit/>
+          </a:bodyPr>
+          <a:lstStyle/>
+          <a:p>
+            <a:pPr algn="l">
+              <a:lnSpc>
+                <a:spcPct val="106000"/>
+              </a:lnSpc>
+              <a:spcAft>
+                <a:spcPts val="0"/>
+              </a:spcAft>
+            </a:pPr>
+            <a:r>
+              <a:rPr sz="1250" b="0" i="0">
+                <a:solidFill>
+                  <a:srgbClr val="444444"/>
+                </a:solidFill>
+                <a:latin typeface="Calibri"/>
+              </a:rPr>
+              <a:t>security</a:t>
+            </a:r>
+          </a:p>
+        </p:txBody>
+      </p:sp>
+      <p:sp>
+        <p:nvSpPr>
+          <p:cNvPr id="30" name="TextBox 29"/>
+          <p:cNvSpPr txBox="1"/>
+          <p:nvPr/>
+        </p:nvSpPr>
+        <p:spPr>
+          <a:xfrm>
+            <a:off x="6400800" y="4791456"/>
+            <a:ext cx="5029200" cy="310896"/>
+          </a:xfrm>
+          <a:prstGeom prst="rect">
+            <a:avLst/>
+          </a:prstGeom>
+          <a:noFill/>
+        </p:spPr>
+        <p:txBody>
+          <a:bodyPr wrap="square" lIns="0" rIns="0" tIns="0" bIns="0" anchor="t">
+            <a:spAutoFit/>
+          </a:bodyPr>
+          <a:lstStyle/>
+          <a:p>
+            <a:pPr algn="l">
+              <a:lnSpc>
+                <a:spcPct val="106000"/>
+              </a:lnSpc>
+              <a:spcAft>
+                <a:spcPts val="0"/>
+              </a:spcAft>
+            </a:pPr>
+            <a:r>
+              <a:rPr sz="1250" b="0" i="0">
+                <a:solidFill>
+                  <a:srgbClr val="444444"/>
+                </a:solidFill>
+                <a:latin typeface="Calibri"/>
+              </a:rPr>
+              <a:t>reports a score, not a protection outcome</a:t>
+            </a:r>
+          </a:p>
+        </p:txBody>
+      </p:sp>
+      <p:sp>
+        <p:nvSpPr>
+          <p:cNvPr id="31" name="TextBox 30"/>
+          <p:cNvSpPr txBox="1"/>
+          <p:nvPr/>
+        </p:nvSpPr>
+        <p:spPr>
+          <a:xfrm>
+            <a:off x="731520" y="5193792"/>
+            <a:ext cx="3383280" cy="310896"/>
+          </a:xfrm>
+          <a:prstGeom prst="rect">
+            <a:avLst/>
+          </a:prstGeom>
+          <a:noFill/>
+        </p:spPr>
+        <p:txBody>
+          <a:bodyPr wrap="square" lIns="0" rIns="0" tIns="0" bIns="0" anchor="t">
+            <a:spAutoFit/>
+          </a:bodyPr>
+          <a:lstStyle/>
+          <a:p>
+            <a:pPr algn="l">
+              <a:lnSpc>
+                <a:spcPct val="106000"/>
+              </a:lnSpc>
+              <a:spcAft>
+                <a:spcPts val="0"/>
+              </a:spcAft>
+            </a:pPr>
+            <a:r>
+              <a:rPr sz="1250" b="0" i="0">
+                <a:solidFill>
+                  <a:srgbClr val="444444"/>
+                </a:solidFill>
+                <a:latin typeface="Calibri"/>
+              </a:rPr>
+              <a:t>Could not tell</a:t>
+            </a:r>
+          </a:p>
+        </p:txBody>
+      </p:sp>
+      <p:sp>
+        <p:nvSpPr>
+          <p:cNvPr id="32" name="TextBox 31"/>
+          <p:cNvSpPr txBox="1"/>
+          <p:nvPr/>
+        </p:nvSpPr>
+        <p:spPr>
+          <a:xfrm>
+            <a:off x="4114800" y="5193792"/>
+            <a:ext cx="658368" cy="310896"/>
+          </a:xfrm>
+          <a:prstGeom prst="rect">
+            <a:avLst/>
+          </a:prstGeom>
+          <a:noFill/>
+        </p:spPr>
+        <p:txBody>
+          <a:bodyPr wrap="square" lIns="0" rIns="0" tIns="0" bIns="0" anchor="t">
+            <a:spAutoFit/>
+          </a:bodyPr>
+          <a:lstStyle/>
+          <a:p>
+            <a:pPr algn="r">
+              <a:lnSpc>
+                <a:spcPct val="106000"/>
+              </a:lnSpc>
+              <a:spcAft>
+                <a:spcPts val="0"/>
+              </a:spcAft>
+            </a:pPr>
+            <a:r>
+              <a:rPr sz="1250" b="0" i="0">
+                <a:solidFill>
+                  <a:srgbClr val="444444"/>
+                </a:solidFill>
+                <a:latin typeface="Calibri"/>
+              </a:rPr>
+              <a:t>21</a:t>
+            </a:r>
+          </a:p>
+        </p:txBody>
+      </p:sp>
+      <p:sp>
+        <p:nvSpPr>
+          <p:cNvPr id="33" name="TextBox 32"/>
+          <p:cNvSpPr txBox="1"/>
+          <p:nvPr/>
+        </p:nvSpPr>
+        <p:spPr>
+          <a:xfrm>
+            <a:off x="5029200" y="5193792"/>
+            <a:ext cx="1371600" cy="310896"/>
+          </a:xfrm>
+          <a:prstGeom prst="rect">
+            <a:avLst/>
+          </a:prstGeom>
+          <a:noFill/>
+        </p:spPr>
+        <p:txBody>
+          <a:bodyPr wrap="square" lIns="0" rIns="0" tIns="0" bIns="0" anchor="t">
+            <a:spAutoFit/>
+          </a:bodyPr>
+          <a:lstStyle/>
+          <a:p>
+            <a:pPr algn="l">
+              <a:lnSpc>
+                <a:spcPct val="106000"/>
+              </a:lnSpc>
+              <a:spcAft>
+                <a:spcPts val="0"/>
+              </a:spcAft>
+            </a:pPr>
+            <a:r>
+              <a:rPr sz="1250" b="0" i="0">
+                <a:solidFill>
+                  <a:srgbClr val="444444"/>
+                </a:solidFill>
+                <a:latin typeface="Calibri"/>
+              </a:rPr>
+              <a:t>security</a:t>
+            </a:r>
+          </a:p>
+        </p:txBody>
+      </p:sp>
+      <p:sp>
+        <p:nvSpPr>
+          <p:cNvPr id="34" name="TextBox 33"/>
+          <p:cNvSpPr txBox="1"/>
+          <p:nvPr/>
+        </p:nvSpPr>
+        <p:spPr>
+          <a:xfrm>
+            <a:off x="6400800" y="5193792"/>
+            <a:ext cx="5029200" cy="310896"/>
+          </a:xfrm>
+          <a:prstGeom prst="rect">
+            <a:avLst/>
+          </a:prstGeom>
+          <a:noFill/>
+        </p:spPr>
+        <p:txBody>
+          <a:bodyPr wrap="square" lIns="0" rIns="0" tIns="0" bIns="0" anchor="t">
+            <a:spAutoFit/>
+          </a:bodyPr>
+          <a:lstStyle/>
+          <a:p>
+            <a:pPr algn="l">
+              <a:lnSpc>
+                <a:spcPct val="106000"/>
+              </a:lnSpc>
+              <a:spcAft>
+                <a:spcPts val="0"/>
+              </a:spcAft>
+            </a:pPr>
+            <a:r>
+              <a:rPr sz="1250" b="0" i="0">
+                <a:solidFill>
+                  <a:srgbClr val="444444"/>
+                </a:solidFill>
+                <a:latin typeface="Calibri"/>
+              </a:rPr>
+              <a:t>not enough extracted text to decide</a:t>
+            </a:r>
+          </a:p>
+        </p:txBody>
+      </p:sp>
+      <p:sp>
+        <p:nvSpPr>
+          <p:cNvPr id="35" name="TextBox 34"/>
+          <p:cNvSpPr txBox="1"/>
+          <p:nvPr/>
+        </p:nvSpPr>
+        <p:spPr>
+          <a:xfrm>
+            <a:off x="731520" y="5504688"/>
+            <a:ext cx="10725912" cy="987552"/>
+          </a:xfrm>
+          <a:prstGeom prst="rect">
+            <a:avLst/>
+          </a:prstGeom>
+          <a:noFill/>
+        </p:spPr>
+        <p:txBody>
+          <a:bodyPr wrap="square" lIns="0" rIns="0" tIns="0" bIns="0" anchor="t">
+            <a:spAutoFit/>
+          </a:bodyPr>
+          <a:lstStyle/>
+          <a:p>
+            <a:pPr algn="l">
+              <a:lnSpc>
+                <a:spcPct val="112000"/>
+              </a:lnSpc>
+              <a:spcAft>
+                <a:spcPts val="500"/>
+              </a:spcAft>
+            </a:pPr>
+            <a:r>
+              <a:rPr sz="1300" b="1" i="0">
+                <a:solidFill>
+                  <a:srgbClr val="111111"/>
+                </a:solidFill>
+                <a:latin typeface="Calibri"/>
+              </a:rPr>
+              <a:t>—  The 320 are not one thing. 124 of the first 126 come from the machine learning side: they are fixes for accidents, and calling them untested defenses is unfair to them.</a:t>
+            </a:r>
+          </a:p>
+          <a:p>
+            <a:pPr>
+              <a:lnSpc>
+                <a:spcPct val="112000"/>
+              </a:lnSpc>
+              <a:spcAft>
+                <a:spcPts val="500"/>
               </a:spcAft>
             </a:pPr>
             <a:r>
@@ -4396,782 +5868,7 @@
                 </a:solidFill>
                 <a:latin typeface="Calibri"/>
               </a:rPr>
-              <a:t>No threat model at all</a:t>
-            </a:r>
-          </a:p>
-        </p:txBody>
-      </p:sp>
-      <p:sp>
-        <p:nvSpPr>
-          <p:cNvPr id="11" name="TextBox 10"/>
-          <p:cNvSpPr txBox="1"/>
-          <p:nvPr/>
-        </p:nvSpPr>
-        <p:spPr>
-          <a:xfrm>
-            <a:off x="4846320" y="3236976"/>
-            <a:ext cx="932688" cy="310896"/>
-          </a:xfrm>
-          <a:prstGeom prst="rect">
-            <a:avLst/>
-          </a:prstGeom>
-          <a:noFill/>
-        </p:spPr>
-        <p:txBody>
-          <a:bodyPr wrap="square" lIns="0" rIns="0" tIns="0" bIns="0" anchor="t">
-            <a:spAutoFit/>
-          </a:bodyPr>
-          <a:lstStyle/>
-          <a:p>
-            <a:pPr algn="r">
-              <a:lnSpc>
-                <a:spcPct val="106000"/>
-              </a:lnSpc>
-              <a:spcAft>
-                <a:spcPts val="0"/>
-              </a:spcAft>
-            </a:pPr>
-            <a:r>
-              <a:rPr sz="1300" b="0" i="0">
-                <a:solidFill>
-                  <a:srgbClr val="444444"/>
-                </a:solidFill>
-                <a:latin typeface="Calibri"/>
-              </a:rPr>
-              <a:t>126</a:t>
-            </a:r>
-          </a:p>
-        </p:txBody>
-      </p:sp>
-      <p:sp>
-        <p:nvSpPr>
-          <p:cNvPr id="12" name="TextBox 11"/>
-          <p:cNvSpPr txBox="1"/>
-          <p:nvPr/>
-        </p:nvSpPr>
-        <p:spPr>
-          <a:xfrm>
-            <a:off x="6035040" y="3236976"/>
-            <a:ext cx="5394960" cy="310896"/>
-          </a:xfrm>
-          <a:prstGeom prst="rect">
-            <a:avLst/>
-          </a:prstGeom>
-          <a:noFill/>
-        </p:spPr>
-        <p:txBody>
-          <a:bodyPr wrap="square" lIns="0" rIns="0" tIns="0" bIns="0" anchor="t">
-            <a:spAutoFit/>
-          </a:bodyPr>
-          <a:lstStyle/>
-          <a:p>
-            <a:pPr algn="l">
-              <a:lnSpc>
-                <a:spcPct val="106000"/>
-              </a:lnSpc>
-              <a:spcAft>
-                <a:spcPts val="0"/>
-              </a:spcAft>
-            </a:pPr>
-            <a:r>
-              <a:rPr sz="1300" b="0" i="0">
-                <a:solidFill>
-                  <a:srgbClr val="444444"/>
-                </a:solidFill>
-                <a:latin typeface="Calibri"/>
-              </a:rPr>
-              <a:t>reliability or efficiency work; no adversary is claimed</a:t>
-            </a:r>
-          </a:p>
-        </p:txBody>
-      </p:sp>
-      <p:sp>
-        <p:nvSpPr>
-          <p:cNvPr id="13" name="TextBox 12"/>
-          <p:cNvSpPr txBox="1"/>
-          <p:nvPr/>
-        </p:nvSpPr>
-        <p:spPr>
-          <a:xfrm>
-            <a:off x="731520" y="3639312"/>
-            <a:ext cx="4114800" cy="310896"/>
-          </a:xfrm>
-          <a:prstGeom prst="rect">
-            <a:avLst/>
-          </a:prstGeom>
-          <a:noFill/>
-        </p:spPr>
-        <p:txBody>
-          <a:bodyPr wrap="square" lIns="0" rIns="0" tIns="0" bIns="0" anchor="t">
-            <a:spAutoFit/>
-          </a:bodyPr>
-          <a:lstStyle/>
-          <a:p>
-            <a:pPr algn="l">
-              <a:lnSpc>
-                <a:spcPct val="106000"/>
-              </a:lnSpc>
-              <a:spcAft>
-                <a:spcPts val="0"/>
-              </a:spcAft>
-            </a:pPr>
-            <a:r>
-              <a:rPr sz="1300" b="0" i="0">
-                <a:solidFill>
-                  <a:srgbClr val="444444"/>
-                </a:solidFill>
-                <a:latin typeface="Calibri"/>
-              </a:rPr>
-              <a:t>Names an attack, never tests it</a:t>
-            </a:r>
-          </a:p>
-        </p:txBody>
-      </p:sp>
-      <p:sp>
-        <p:nvSpPr>
-          <p:cNvPr id="14" name="TextBox 13"/>
-          <p:cNvSpPr txBox="1"/>
-          <p:nvPr/>
-        </p:nvSpPr>
-        <p:spPr>
-          <a:xfrm>
-            <a:off x="4846320" y="3639312"/>
-            <a:ext cx="932688" cy="310896"/>
-          </a:xfrm>
-          <a:prstGeom prst="rect">
-            <a:avLst/>
-          </a:prstGeom>
-          <a:noFill/>
-        </p:spPr>
-        <p:txBody>
-          <a:bodyPr wrap="square" lIns="0" rIns="0" tIns="0" bIns="0" anchor="t">
-            <a:spAutoFit/>
-          </a:bodyPr>
-          <a:lstStyle/>
-          <a:p>
-            <a:pPr algn="r">
-              <a:lnSpc>
-                <a:spcPct val="106000"/>
-              </a:lnSpc>
-              <a:spcAft>
-                <a:spcPts val="0"/>
-              </a:spcAft>
-            </a:pPr>
-            <a:r>
-              <a:rPr sz="1300" b="0" i="0">
-                <a:solidFill>
-                  <a:srgbClr val="444444"/>
-                </a:solidFill>
-                <a:latin typeface="Calibri"/>
-              </a:rPr>
-              <a:t>99</a:t>
-            </a:r>
-          </a:p>
-        </p:txBody>
-      </p:sp>
-      <p:sp>
-        <p:nvSpPr>
-          <p:cNvPr id="15" name="TextBox 14"/>
-          <p:cNvSpPr txBox="1"/>
-          <p:nvPr/>
-        </p:nvSpPr>
-        <p:spPr>
-          <a:xfrm>
-            <a:off x="6035040" y="3639312"/>
-            <a:ext cx="5394960" cy="310896"/>
-          </a:xfrm>
-          <a:prstGeom prst="rect">
-            <a:avLst/>
-          </a:prstGeom>
-          <a:noFill/>
-        </p:spPr>
-        <p:txBody>
-          <a:bodyPr wrap="square" lIns="0" rIns="0" tIns="0" bIns="0" anchor="t">
-            <a:spAutoFit/>
-          </a:bodyPr>
-          <a:lstStyle/>
-          <a:p>
-            <a:pPr algn="l">
-              <a:lnSpc>
-                <a:spcPct val="106000"/>
-              </a:lnSpc>
-              <a:spcAft>
-                <a:spcPts val="0"/>
-              </a:spcAft>
-            </a:pPr>
-            <a:r>
-              <a:rPr sz="1300" b="0" i="0">
-                <a:solidFill>
-                  <a:srgbClr val="444444"/>
-                </a:solidFill>
-                <a:latin typeface="Calibri"/>
-              </a:rPr>
-              <a:t>the attack is on our map; the experiment is missing</a:t>
-            </a:r>
-          </a:p>
-        </p:txBody>
-      </p:sp>
-      <p:sp>
-        <p:nvSpPr>
-          <p:cNvPr id="16" name="TextBox 15"/>
-          <p:cNvSpPr txBox="1"/>
-          <p:nvPr/>
-        </p:nvSpPr>
-        <p:spPr>
-          <a:xfrm>
-            <a:off x="731520" y="4041648"/>
-            <a:ext cx="4114800" cy="310896"/>
-          </a:xfrm>
-          <a:prstGeom prst="rect">
-            <a:avLst/>
-          </a:prstGeom>
-          <a:noFill/>
-        </p:spPr>
-        <p:txBody>
-          <a:bodyPr wrap="square" lIns="0" rIns="0" tIns="0" bIns="0" anchor="t">
-            <a:spAutoFit/>
-          </a:bodyPr>
-          <a:lstStyle/>
-          <a:p>
-            <a:pPr algn="l">
-              <a:lnSpc>
-                <a:spcPct val="106000"/>
-              </a:lnSpc>
-              <a:spcAft>
-                <a:spcPts val="0"/>
-              </a:spcAft>
-            </a:pPr>
-            <a:r>
-              <a:rPr sz="1300" b="0" i="0">
-                <a:solidFill>
-                  <a:srgbClr val="444444"/>
-                </a:solidFill>
-                <a:latin typeface="Calibri"/>
-              </a:rPr>
-              <a:t>Threat described in prose only</a:t>
-            </a:r>
-          </a:p>
-        </p:txBody>
-      </p:sp>
-      <p:sp>
-        <p:nvSpPr>
-          <p:cNvPr id="17" name="TextBox 16"/>
-          <p:cNvSpPr txBox="1"/>
-          <p:nvPr/>
-        </p:nvSpPr>
-        <p:spPr>
-          <a:xfrm>
-            <a:off x="4846320" y="4041648"/>
-            <a:ext cx="932688" cy="310896"/>
-          </a:xfrm>
-          <a:prstGeom prst="rect">
-            <a:avLst/>
-          </a:prstGeom>
-          <a:noFill/>
-        </p:spPr>
-        <p:txBody>
-          <a:bodyPr wrap="square" lIns="0" rIns="0" tIns="0" bIns="0" anchor="t">
-            <a:spAutoFit/>
-          </a:bodyPr>
-          <a:lstStyle/>
-          <a:p>
-            <a:pPr algn="r">
-              <a:lnSpc>
-                <a:spcPct val="106000"/>
-              </a:lnSpc>
-              <a:spcAft>
-                <a:spcPts val="0"/>
-              </a:spcAft>
-            </a:pPr>
-            <a:r>
-              <a:rPr sz="1300" b="0" i="0">
-                <a:solidFill>
-                  <a:srgbClr val="444444"/>
-                </a:solidFill>
-                <a:latin typeface="Calibri"/>
-              </a:rPr>
-              <a:t>41</a:t>
-            </a:r>
-          </a:p>
-        </p:txBody>
-      </p:sp>
-      <p:sp>
-        <p:nvSpPr>
-          <p:cNvPr id="18" name="TextBox 17"/>
-          <p:cNvSpPr txBox="1"/>
-          <p:nvPr/>
-        </p:nvSpPr>
-        <p:spPr>
-          <a:xfrm>
-            <a:off x="6035040" y="4041648"/>
-            <a:ext cx="5394960" cy="310896"/>
-          </a:xfrm>
-          <a:prstGeom prst="rect">
-            <a:avLst/>
-          </a:prstGeom>
-          <a:noFill/>
-        </p:spPr>
-        <p:txBody>
-          <a:bodyPr wrap="square" lIns="0" rIns="0" tIns="0" bIns="0" anchor="t">
-            <a:spAutoFit/>
-          </a:bodyPr>
-          <a:lstStyle/>
-          <a:p>
-            <a:pPr algn="l">
-              <a:lnSpc>
-                <a:spcPct val="106000"/>
-              </a:lnSpc>
-              <a:spcAft>
-                <a:spcPts val="0"/>
-              </a:spcAft>
-            </a:pPr>
-            <a:r>
-              <a:rPr sz="1300" b="0" i="0">
-                <a:solidFill>
-                  <a:srgbClr val="444444"/>
-                </a:solidFill>
-                <a:latin typeface="Calibri"/>
-              </a:rPr>
-              <a:t>an adversary is named; no experiment follows</a:t>
-            </a:r>
-          </a:p>
-        </p:txBody>
-      </p:sp>
-      <p:sp>
-        <p:nvSpPr>
-          <p:cNvPr id="19" name="TextBox 18"/>
-          <p:cNvSpPr txBox="1"/>
-          <p:nvPr/>
-        </p:nvSpPr>
-        <p:spPr>
-          <a:xfrm>
-            <a:off x="731520" y="4443984"/>
-            <a:ext cx="4114800" cy="310896"/>
-          </a:xfrm>
-          <a:prstGeom prst="rect">
-            <a:avLst/>
-          </a:prstGeom>
-          <a:noFill/>
-        </p:spPr>
-        <p:txBody>
-          <a:bodyPr wrap="square" lIns="0" rIns="0" tIns="0" bIns="0" anchor="t">
-            <a:spAutoFit/>
-          </a:bodyPr>
-          <a:lstStyle/>
-          <a:p>
-            <a:pPr algn="l">
-              <a:lnSpc>
-                <a:spcPct val="106000"/>
-              </a:lnSpc>
-              <a:spcAft>
-                <a:spcPts val="0"/>
-              </a:spcAft>
-            </a:pPr>
-            <a:r>
-              <a:rPr sz="1300" b="0" i="0">
-                <a:solidFill>
-                  <a:srgbClr val="444444"/>
-                </a:solidFill>
-                <a:latin typeface="Calibri"/>
-              </a:rPr>
-              <a:t>Tests an attack it invented</a:t>
-            </a:r>
-          </a:p>
-        </p:txBody>
-      </p:sp>
-      <p:sp>
-        <p:nvSpPr>
-          <p:cNvPr id="20" name="TextBox 19"/>
-          <p:cNvSpPr txBox="1"/>
-          <p:nvPr/>
-        </p:nvSpPr>
-        <p:spPr>
-          <a:xfrm>
-            <a:off x="4846320" y="4443984"/>
-            <a:ext cx="932688" cy="310896"/>
-          </a:xfrm>
-          <a:prstGeom prst="rect">
-            <a:avLst/>
-          </a:prstGeom>
-          <a:noFill/>
-        </p:spPr>
-        <p:txBody>
-          <a:bodyPr wrap="square" lIns="0" rIns="0" tIns="0" bIns="0" anchor="t">
-            <a:spAutoFit/>
-          </a:bodyPr>
-          <a:lstStyle/>
-          <a:p>
-            <a:pPr algn="r">
-              <a:lnSpc>
-                <a:spcPct val="106000"/>
-              </a:lnSpc>
-              <a:spcAft>
-                <a:spcPts val="0"/>
-              </a:spcAft>
-            </a:pPr>
-            <a:r>
-              <a:rPr sz="1300" b="0" i="0">
-                <a:solidFill>
-                  <a:srgbClr val="444444"/>
-                </a:solidFill>
-                <a:latin typeface="Calibri"/>
-              </a:rPr>
-              <a:t>22</a:t>
-            </a:r>
-          </a:p>
-        </p:txBody>
-      </p:sp>
-      <p:sp>
-        <p:nvSpPr>
-          <p:cNvPr id="21" name="TextBox 20"/>
-          <p:cNvSpPr txBox="1"/>
-          <p:nvPr/>
-        </p:nvSpPr>
-        <p:spPr>
-          <a:xfrm>
-            <a:off x="6035040" y="4443984"/>
-            <a:ext cx="5394960" cy="310896"/>
-          </a:xfrm>
-          <a:prstGeom prst="rect">
-            <a:avLst/>
-          </a:prstGeom>
-          <a:noFill/>
-        </p:spPr>
-        <p:txBody>
-          <a:bodyPr wrap="square" lIns="0" rIns="0" tIns="0" bIns="0" anchor="t">
-            <a:spAutoFit/>
-          </a:bodyPr>
-          <a:lstStyle/>
-          <a:p>
-            <a:pPr algn="l">
-              <a:lnSpc>
-                <a:spcPct val="106000"/>
-              </a:lnSpc>
-              <a:spcAft>
-                <a:spcPts val="0"/>
-              </a:spcAft>
-            </a:pPr>
-            <a:r>
-              <a:rPr sz="1300" b="0" i="0">
-                <a:solidFill>
-                  <a:srgbClr val="444444"/>
-                </a:solidFill>
-                <a:latin typeface="Calibri"/>
-              </a:rPr>
-              <a:t>evaluated only against the authors' own construction</a:t>
-            </a:r>
-          </a:p>
-        </p:txBody>
-      </p:sp>
-      <p:sp>
-        <p:nvSpPr>
-          <p:cNvPr id="22" name="TextBox 21"/>
-          <p:cNvSpPr txBox="1"/>
-          <p:nvPr/>
-        </p:nvSpPr>
-        <p:spPr>
-          <a:xfrm>
-            <a:off x="731520" y="4846320"/>
-            <a:ext cx="4114800" cy="310896"/>
-          </a:xfrm>
-          <a:prstGeom prst="rect">
-            <a:avLst/>
-          </a:prstGeom>
-          <a:noFill/>
-        </p:spPr>
-        <p:txBody>
-          <a:bodyPr wrap="square" lIns="0" rIns="0" tIns="0" bIns="0" anchor="t">
-            <a:spAutoFit/>
-          </a:bodyPr>
-          <a:lstStyle/>
-          <a:p>
-            <a:pPr algn="l">
-              <a:lnSpc>
-                <a:spcPct val="106000"/>
-              </a:lnSpc>
-              <a:spcAft>
-                <a:spcPts val="0"/>
-              </a:spcAft>
-            </a:pPr>
-            <a:r>
-              <a:rPr sz="1300" b="0" i="0">
-                <a:solidFill>
-                  <a:srgbClr val="444444"/>
-                </a:solidFill>
-                <a:latin typeface="Calibri"/>
-              </a:rPr>
-              <a:t>Names a benchmark, not a mechanism</a:t>
-            </a:r>
-          </a:p>
-        </p:txBody>
-      </p:sp>
-      <p:sp>
-        <p:nvSpPr>
-          <p:cNvPr id="23" name="TextBox 22"/>
-          <p:cNvSpPr txBox="1"/>
-          <p:nvPr/>
-        </p:nvSpPr>
-        <p:spPr>
-          <a:xfrm>
-            <a:off x="4846320" y="4846320"/>
-            <a:ext cx="932688" cy="310896"/>
-          </a:xfrm>
-          <a:prstGeom prst="rect">
-            <a:avLst/>
-          </a:prstGeom>
-          <a:noFill/>
-        </p:spPr>
-        <p:txBody>
-          <a:bodyPr wrap="square" lIns="0" rIns="0" tIns="0" bIns="0" anchor="t">
-            <a:spAutoFit/>
-          </a:bodyPr>
-          <a:lstStyle/>
-          <a:p>
-            <a:pPr algn="r">
-              <a:lnSpc>
-                <a:spcPct val="106000"/>
-              </a:lnSpc>
-              <a:spcAft>
-                <a:spcPts val="0"/>
-              </a:spcAft>
-            </a:pPr>
-            <a:r>
-              <a:rPr sz="1300" b="0" i="0">
-                <a:solidFill>
-                  <a:srgbClr val="444444"/>
-                </a:solidFill>
-                <a:latin typeface="Calibri"/>
-              </a:rPr>
-              <a:t>11</a:t>
-            </a:r>
-          </a:p>
-        </p:txBody>
-      </p:sp>
-      <p:sp>
-        <p:nvSpPr>
-          <p:cNvPr id="24" name="TextBox 23"/>
-          <p:cNvSpPr txBox="1"/>
-          <p:nvPr/>
-        </p:nvSpPr>
-        <p:spPr>
-          <a:xfrm>
-            <a:off x="6035040" y="4846320"/>
-            <a:ext cx="5394960" cy="310896"/>
-          </a:xfrm>
-          <a:prstGeom prst="rect">
-            <a:avLst/>
-          </a:prstGeom>
-          <a:noFill/>
-        </p:spPr>
-        <p:txBody>
-          <a:bodyPr wrap="square" lIns="0" rIns="0" tIns="0" bIns="0" anchor="t">
-            <a:spAutoFit/>
-          </a:bodyPr>
-          <a:lstStyle/>
-          <a:p>
-            <a:pPr algn="l">
-              <a:lnSpc>
-                <a:spcPct val="106000"/>
-              </a:lnSpc>
-              <a:spcAft>
-                <a:spcPts val="0"/>
-              </a:spcAft>
-            </a:pPr>
-            <a:r>
-              <a:rPr sz="1300" b="0" i="0">
-                <a:solidFill>
-                  <a:srgbClr val="444444"/>
-                </a:solidFill>
-                <a:latin typeface="Calibri"/>
-              </a:rPr>
-              <a:t>reports a score, not a defense outcome</a:t>
-            </a:r>
-          </a:p>
-        </p:txBody>
-      </p:sp>
-      <p:sp>
-        <p:nvSpPr>
-          <p:cNvPr id="25" name="TextBox 24"/>
-          <p:cNvSpPr txBox="1"/>
-          <p:nvPr/>
-        </p:nvSpPr>
-        <p:spPr>
-          <a:xfrm>
-            <a:off x="731520" y="5248656"/>
-            <a:ext cx="4114800" cy="310896"/>
-          </a:xfrm>
-          <a:prstGeom prst="rect">
-            <a:avLst/>
-          </a:prstGeom>
-          <a:noFill/>
-        </p:spPr>
-        <p:txBody>
-          <a:bodyPr wrap="square" lIns="0" rIns="0" tIns="0" bIns="0" anchor="t">
-            <a:spAutoFit/>
-          </a:bodyPr>
-          <a:lstStyle/>
-          <a:p>
-            <a:pPr algn="l">
-              <a:lnSpc>
-                <a:spcPct val="106000"/>
-              </a:lnSpc>
-              <a:spcAft>
-                <a:spcPts val="0"/>
-              </a:spcAft>
-            </a:pPr>
-            <a:r>
-              <a:rPr sz="1300" b="0" i="0">
-                <a:solidFill>
-                  <a:srgbClr val="444444"/>
-                </a:solidFill>
-                <a:latin typeface="Calibri"/>
-              </a:rPr>
-              <a:t>Could not tell</a:t>
-            </a:r>
-          </a:p>
-        </p:txBody>
-      </p:sp>
-      <p:sp>
-        <p:nvSpPr>
-          <p:cNvPr id="26" name="TextBox 25"/>
-          <p:cNvSpPr txBox="1"/>
-          <p:nvPr/>
-        </p:nvSpPr>
-        <p:spPr>
-          <a:xfrm>
-            <a:off x="4846320" y="5248656"/>
-            <a:ext cx="932688" cy="310896"/>
-          </a:xfrm>
-          <a:prstGeom prst="rect">
-            <a:avLst/>
-          </a:prstGeom>
-          <a:noFill/>
-        </p:spPr>
-        <p:txBody>
-          <a:bodyPr wrap="square" lIns="0" rIns="0" tIns="0" bIns="0" anchor="t">
-            <a:spAutoFit/>
-          </a:bodyPr>
-          <a:lstStyle/>
-          <a:p>
-            <a:pPr algn="r">
-              <a:lnSpc>
-                <a:spcPct val="106000"/>
-              </a:lnSpc>
-              <a:spcAft>
-                <a:spcPts val="0"/>
-              </a:spcAft>
-            </a:pPr>
-            <a:r>
-              <a:rPr sz="1300" b="0" i="0">
-                <a:solidFill>
-                  <a:srgbClr val="444444"/>
-                </a:solidFill>
-                <a:latin typeface="Calibri"/>
-              </a:rPr>
-              <a:t>21</a:t>
-            </a:r>
-          </a:p>
-        </p:txBody>
-      </p:sp>
-      <p:sp>
-        <p:nvSpPr>
-          <p:cNvPr id="27" name="TextBox 26"/>
-          <p:cNvSpPr txBox="1"/>
-          <p:nvPr/>
-        </p:nvSpPr>
-        <p:spPr>
-          <a:xfrm>
-            <a:off x="6035040" y="5248656"/>
-            <a:ext cx="5394960" cy="310896"/>
-          </a:xfrm>
-          <a:prstGeom prst="rect">
-            <a:avLst/>
-          </a:prstGeom>
-          <a:noFill/>
-        </p:spPr>
-        <p:txBody>
-          <a:bodyPr wrap="square" lIns="0" rIns="0" tIns="0" bIns="0" anchor="t">
-            <a:spAutoFit/>
-          </a:bodyPr>
-          <a:lstStyle/>
-          <a:p>
-            <a:pPr algn="l">
-              <a:lnSpc>
-                <a:spcPct val="106000"/>
-              </a:lnSpc>
-              <a:spcAft>
-                <a:spcPts val="0"/>
-              </a:spcAft>
-            </a:pPr>
-            <a:r>
-              <a:rPr sz="1300" b="0" i="0">
-                <a:solidFill>
-                  <a:srgbClr val="444444"/>
-                </a:solidFill>
-                <a:latin typeface="Calibri"/>
-              </a:rPr>
-              <a:t>not enough extracted text to decide</a:t>
-            </a:r>
-          </a:p>
-        </p:txBody>
-      </p:sp>
-      <p:sp>
-        <p:nvSpPr>
-          <p:cNvPr id="28" name="TextBox 27"/>
-          <p:cNvSpPr txBox="1"/>
-          <p:nvPr/>
-        </p:nvSpPr>
-        <p:spPr>
-          <a:xfrm>
-            <a:off x="731520" y="5632704"/>
-            <a:ext cx="10725912" cy="859535"/>
-          </a:xfrm>
-          <a:prstGeom prst="rect">
-            <a:avLst/>
-          </a:prstGeom>
-          <a:noFill/>
-        </p:spPr>
-        <p:txBody>
-          <a:bodyPr wrap="square" lIns="0" rIns="0" tIns="0" bIns="0" anchor="t">
-            <a:spAutoFit/>
-          </a:bodyPr>
-          <a:lstStyle/>
-          <a:p>
-            <a:pPr algn="l">
-              <a:lnSpc>
-                <a:spcPct val="112000"/>
-              </a:lnSpc>
-              <a:spcAft>
-                <a:spcPts val="600"/>
-              </a:spcAft>
-            </a:pPr>
-            <a:r>
-              <a:rPr sz="1350" b="1" i="0">
-                <a:solidFill>
-                  <a:srgbClr val="111111"/>
-                </a:solidFill>
-                <a:latin typeface="Calibri"/>
-              </a:rPr>
-              <a:t>—  The 320 are not all alike. 126 never claimed to stop an attack. 99 named one and stopped short of testing it.</a:t>
-            </a:r>
-          </a:p>
-          <a:p>
-            <a:pPr>
-              <a:lnSpc>
-                <a:spcPct val="112000"/>
-              </a:lnSpc>
-              <a:spcAft>
-                <a:spcPts val="600"/>
-              </a:spcAft>
-            </a:pPr>
-            <a:r>
-              <a:rPr sz="1350" b="0" i="0">
-                <a:solidFill>
-                  <a:srgbClr val="444444"/>
-                </a:solidFill>
-                <a:latin typeface="Calibri"/>
-              </a:rPr>
-              <a:t>—  Those 99 are the strongest lead in the corpus, and they are where we go next.</a:t>
+              <a:t>—  The 99 that name a cause and stop short of testing it are the real gap, and the lead we follow next.</a:t>
             </a:r>
           </a:p>
         </p:txBody>
@@ -11925,7 +12622,7 @@
                 </a:solidFill>
                 <a:latin typeface="Cambria"/>
               </a:rPr>
-              <a:t>Two communities. One failure. No contact.</a:t>
+              <a:t>Two communities, two vocabularies, one failure</a:t>
             </a:r>
           </a:p>
         </p:txBody>
@@ -11980,65 +12677,716 @@
         </p:nvSpPr>
         <p:spPr>
           <a:xfrm>
-            <a:off x="731520" y="1920240"/>
-            <a:ext cx="5212080" cy="320040"/>
-          </a:xfrm>
-          <a:prstGeom prst="rect">
-            <a:avLst/>
-          </a:prstGeom>
-          <a:noFill/>
-        </p:spPr>
-        <p:txBody>
-          <a:bodyPr wrap="square" lIns="0" rIns="0" tIns="0" bIns="0" anchor="t">
-            <a:spAutoFit/>
-          </a:bodyPr>
-          <a:lstStyle/>
-          <a:p>
-            <a:pPr algn="l">
-              <a:lnSpc>
-                <a:spcPct val="106000"/>
-              </a:lnSpc>
-              <a:spcAft>
-                <a:spcPts val="600"/>
-              </a:spcAft>
-            </a:pPr>
-            <a:r>
-              <a:rPr sz="1500" b="1" i="0">
+            <a:off x="731520" y="2011680"/>
+            <a:ext cx="3291840" cy="274320"/>
+          </a:xfrm>
+          <a:prstGeom prst="rect">
+            <a:avLst/>
+          </a:prstGeom>
+          <a:noFill/>
+        </p:spPr>
+        <p:txBody>
+          <a:bodyPr wrap="square" lIns="0" rIns="0" tIns="0" bIns="0" anchor="t">
+            <a:spAutoFit/>
+          </a:bodyPr>
+          <a:lstStyle/>
+          <a:p>
+            <a:pPr algn="l">
+              <a:lnSpc>
+                <a:spcPct val="106000"/>
+              </a:lnSpc>
+              <a:spcAft>
+                <a:spcPts val="0"/>
+              </a:spcAft>
+            </a:pPr>
+            <a:r>
+              <a:rPr sz="1000" b="1" i="0">
+                <a:solidFill>
+                  <a:srgbClr val="777777"/>
+                </a:solidFill>
+                <a:latin typeface="Calibri"/>
+              </a:rPr>
+              <a:t/>
+            </a:r>
+          </a:p>
+        </p:txBody>
+      </p:sp>
+      <p:sp>
+        <p:nvSpPr>
+          <p:cNvPr id="6" name="TextBox 5"/>
+          <p:cNvSpPr txBox="1"/>
+          <p:nvPr/>
+        </p:nvSpPr>
+        <p:spPr>
+          <a:xfrm>
+            <a:off x="4023360" y="2011680"/>
+            <a:ext cx="3749039" cy="274320"/>
+          </a:xfrm>
+          <a:prstGeom prst="rect">
+            <a:avLst/>
+          </a:prstGeom>
+          <a:noFill/>
+        </p:spPr>
+        <p:txBody>
+          <a:bodyPr wrap="square" lIns="0" rIns="0" tIns="0" bIns="0" anchor="t">
+            <a:spAutoFit/>
+          </a:bodyPr>
+          <a:lstStyle/>
+          <a:p>
+            <a:pPr algn="l">
+              <a:lnSpc>
+                <a:spcPct val="106000"/>
+              </a:lnSpc>
+              <a:spcAft>
+                <a:spcPts val="0"/>
+              </a:spcAft>
+            </a:pPr>
+            <a:r>
+              <a:rPr sz="1000" b="1" i="0">
+                <a:solidFill>
+                  <a:srgbClr val="777777"/>
+                </a:solidFill>
+                <a:latin typeface="Calibri"/>
+              </a:rPr>
+              <a:t>THE SECURITY SIDE</a:t>
+            </a:r>
+          </a:p>
+        </p:txBody>
+      </p:sp>
+      <p:sp>
+        <p:nvSpPr>
+          <p:cNvPr id="7" name="TextBox 6"/>
+          <p:cNvSpPr txBox="1"/>
+          <p:nvPr/>
+        </p:nvSpPr>
+        <p:spPr>
+          <a:xfrm>
+            <a:off x="7772400" y="2011680"/>
+            <a:ext cx="3657600" cy="274320"/>
+          </a:xfrm>
+          <a:prstGeom prst="rect">
+            <a:avLst/>
+          </a:prstGeom>
+          <a:noFill/>
+        </p:spPr>
+        <p:txBody>
+          <a:bodyPr wrap="square" lIns="0" rIns="0" tIns="0" bIns="0" anchor="t">
+            <a:spAutoFit/>
+          </a:bodyPr>
+          <a:lstStyle/>
+          <a:p>
+            <a:pPr algn="l">
+              <a:lnSpc>
+                <a:spcPct val="106000"/>
+              </a:lnSpc>
+              <a:spcAft>
+                <a:spcPts val="0"/>
+              </a:spcAft>
+            </a:pPr>
+            <a:r>
+              <a:rPr sz="1000" b="1" i="0">
+                <a:solidFill>
+                  <a:srgbClr val="777777"/>
+                </a:solidFill>
+                <a:latin typeface="Calibri"/>
+              </a:rPr>
+              <a:t>THE MACHINE LEARNING SIDE</a:t>
+            </a:r>
+          </a:p>
+        </p:txBody>
+      </p:sp>
+      <p:sp>
+        <p:nvSpPr>
+          <p:cNvPr id="8" name="Rectangle 7"/>
+          <p:cNvSpPr/>
+          <p:nvPr/>
+        </p:nvSpPr>
+        <p:spPr>
+          <a:xfrm>
+            <a:off x="731520" y="2286000"/>
+            <a:ext cx="10698480" cy="9525"/>
+          </a:xfrm>
+          <a:prstGeom prst="rect">
+            <a:avLst/>
+          </a:prstGeom>
+          <a:solidFill>
+            <a:srgbClr val="CCCCCC"/>
+          </a:solidFill>
+          <a:ln>
+            <a:noFill/>
+          </a:ln>
+          <a:effectLst/>
+        </p:spPr>
+        <p:style>
+          <a:lnRef idx="1">
+            <a:schemeClr val="accent1"/>
+          </a:lnRef>
+          <a:fillRef idx="3">
+            <a:schemeClr val="accent1"/>
+          </a:fillRef>
+          <a:effectRef idx="2">
+            <a:schemeClr val="accent1"/>
+          </a:effectRef>
+          <a:fontRef idx="minor">
+            <a:schemeClr val="lt1"/>
+          </a:fontRef>
+        </p:style>
+        <p:txBody>
+          <a:bodyPr rtlCol="0" anchor="ctr"/>
+          <a:lstStyle/>
+          <a:p>
+            <a:pPr algn="ctr"/>
+          </a:p>
+        </p:txBody>
+      </p:sp>
+      <p:sp>
+        <p:nvSpPr>
+          <p:cNvPr id="9" name="TextBox 8"/>
+          <p:cNvSpPr txBox="1"/>
+          <p:nvPr/>
+        </p:nvSpPr>
+        <p:spPr>
+          <a:xfrm>
+            <a:off x="731520" y="2395728"/>
+            <a:ext cx="3291840" cy="310896"/>
+          </a:xfrm>
+          <a:prstGeom prst="rect">
+            <a:avLst/>
+          </a:prstGeom>
+          <a:noFill/>
+        </p:spPr>
+        <p:txBody>
+          <a:bodyPr wrap="square" lIns="0" rIns="0" tIns="0" bIns="0" anchor="t">
+            <a:spAutoFit/>
+          </a:bodyPr>
+          <a:lstStyle/>
+          <a:p>
+            <a:pPr algn="l">
+              <a:lnSpc>
+                <a:spcPct val="106000"/>
+              </a:lnSpc>
+              <a:spcAft>
+                <a:spcPts val="0"/>
+              </a:spcAft>
+            </a:pPr>
+            <a:r>
+              <a:rPr sz="1350" b="0" i="0">
+                <a:solidFill>
+                  <a:srgbClr val="444444"/>
+                </a:solidFill>
+                <a:latin typeface="Calibri"/>
+              </a:rPr>
+              <a:t>What corrupts the context</a:t>
+            </a:r>
+          </a:p>
+        </p:txBody>
+      </p:sp>
+      <p:sp>
+        <p:nvSpPr>
+          <p:cNvPr id="10" name="TextBox 9"/>
+          <p:cNvSpPr txBox="1"/>
+          <p:nvPr/>
+        </p:nvSpPr>
+        <p:spPr>
+          <a:xfrm>
+            <a:off x="4023360" y="2395728"/>
+            <a:ext cx="3749039" cy="310896"/>
+          </a:xfrm>
+          <a:prstGeom prst="rect">
+            <a:avLst/>
+          </a:prstGeom>
+          <a:noFill/>
+        </p:spPr>
+        <p:txBody>
+          <a:bodyPr wrap="square" lIns="0" rIns="0" tIns="0" bIns="0" anchor="t">
+            <a:spAutoFit/>
+          </a:bodyPr>
+          <a:lstStyle/>
+          <a:p>
+            <a:pPr algn="l">
+              <a:lnSpc>
+                <a:spcPct val="106000"/>
+              </a:lnSpc>
+              <a:spcAft>
+                <a:spcPts val="0"/>
+              </a:spcAft>
+            </a:pPr>
+            <a:r>
+              <a:rPr sz="1350" b="0" i="0">
+                <a:solidFill>
+                  <a:srgbClr val="444444"/>
+                </a:solidFill>
+                <a:latin typeface="Calibri"/>
+              </a:rPr>
+              <a:t>an attack  (182)</a:t>
+            </a:r>
+          </a:p>
+        </p:txBody>
+      </p:sp>
+      <p:sp>
+        <p:nvSpPr>
+          <p:cNvPr id="11" name="TextBox 10"/>
+          <p:cNvSpPr txBox="1"/>
+          <p:nvPr/>
+        </p:nvSpPr>
+        <p:spPr>
+          <a:xfrm>
+            <a:off x="7772400" y="2395728"/>
+            <a:ext cx="3657600" cy="310896"/>
+          </a:xfrm>
+          <a:prstGeom prst="rect">
+            <a:avLst/>
+          </a:prstGeom>
+          <a:noFill/>
+        </p:spPr>
+        <p:txBody>
+          <a:bodyPr wrap="square" lIns="0" rIns="0" tIns="0" bIns="0" anchor="t">
+            <a:spAutoFit/>
+          </a:bodyPr>
+          <a:lstStyle/>
+          <a:p>
+            <a:pPr algn="l">
+              <a:lnSpc>
+                <a:spcPct val="106000"/>
+              </a:lnSpc>
+              <a:spcAft>
+                <a:spcPts val="0"/>
+              </a:spcAft>
+            </a:pPr>
+            <a:r>
+              <a:rPr sz="1350" b="0" i="0">
+                <a:solidFill>
+                  <a:srgbClr val="444444"/>
+                </a:solidFill>
+                <a:latin typeface="Calibri"/>
+              </a:rPr>
+              <a:t>an incidental mechanism  (55)</a:t>
+            </a:r>
+          </a:p>
+        </p:txBody>
+      </p:sp>
+      <p:sp>
+        <p:nvSpPr>
+          <p:cNvPr id="12" name="TextBox 11"/>
+          <p:cNvSpPr txBox="1"/>
+          <p:nvPr/>
+        </p:nvSpPr>
+        <p:spPr>
+          <a:xfrm>
+            <a:off x="731520" y="2871216"/>
+            <a:ext cx="3291840" cy="310896"/>
+          </a:xfrm>
+          <a:prstGeom prst="rect">
+            <a:avLst/>
+          </a:prstGeom>
+          <a:noFill/>
+        </p:spPr>
+        <p:txBody>
+          <a:bodyPr wrap="square" lIns="0" rIns="0" tIns="0" bIns="0" anchor="t">
+            <a:spAutoFit/>
+          </a:bodyPr>
+          <a:lstStyle/>
+          <a:p>
+            <a:pPr algn="l">
+              <a:lnSpc>
+                <a:spcPct val="106000"/>
+              </a:lnSpc>
+              <a:spcAft>
+                <a:spcPts val="0"/>
+              </a:spcAft>
+            </a:pPr>
+            <a:r>
+              <a:rPr sz="1350" b="0" i="0">
+                <a:solidFill>
+                  <a:srgbClr val="444444"/>
+                </a:solidFill>
+                <a:latin typeface="Calibri"/>
+              </a:rPr>
+              <a:t>What the field builds against it</a:t>
+            </a:r>
+          </a:p>
+        </p:txBody>
+      </p:sp>
+      <p:sp>
+        <p:nvSpPr>
+          <p:cNvPr id="13" name="TextBox 12"/>
+          <p:cNvSpPr txBox="1"/>
+          <p:nvPr/>
+        </p:nvSpPr>
+        <p:spPr>
+          <a:xfrm>
+            <a:off x="4023360" y="2871216"/>
+            <a:ext cx="3749039" cy="310896"/>
+          </a:xfrm>
+          <a:prstGeom prst="rect">
+            <a:avLst/>
+          </a:prstGeom>
+          <a:noFill/>
+        </p:spPr>
+        <p:txBody>
+          <a:bodyPr wrap="square" lIns="0" rIns="0" tIns="0" bIns="0" anchor="t">
+            <a:spAutoFit/>
+          </a:bodyPr>
+          <a:lstStyle/>
+          <a:p>
+            <a:pPr algn="l">
+              <a:lnSpc>
+                <a:spcPct val="106000"/>
+              </a:lnSpc>
+              <a:spcAft>
+                <a:spcPts val="0"/>
+              </a:spcAft>
+            </a:pPr>
+            <a:r>
+              <a:rPr sz="1350" b="0" i="0">
+                <a:solidFill>
+                  <a:srgbClr val="444444"/>
+                </a:solidFill>
+                <a:latin typeface="Calibri"/>
+              </a:rPr>
+              <a:t>a defense  (263)</a:t>
+            </a:r>
+          </a:p>
+        </p:txBody>
+      </p:sp>
+      <p:sp>
+        <p:nvSpPr>
+          <p:cNvPr id="14" name="TextBox 13"/>
+          <p:cNvSpPr txBox="1"/>
+          <p:nvPr/>
+        </p:nvSpPr>
+        <p:spPr>
+          <a:xfrm>
+            <a:off x="7772400" y="2871216"/>
+            <a:ext cx="3657600" cy="310896"/>
+          </a:xfrm>
+          <a:prstGeom prst="rect">
+            <a:avLst/>
+          </a:prstGeom>
+          <a:noFill/>
+        </p:spPr>
+        <p:txBody>
+          <a:bodyPr wrap="square" lIns="0" rIns="0" tIns="0" bIns="0" anchor="t">
+            <a:spAutoFit/>
+          </a:bodyPr>
+          <a:lstStyle/>
+          <a:p>
+            <a:pPr algn="l">
+              <a:lnSpc>
+                <a:spcPct val="106000"/>
+              </a:lnSpc>
+              <a:spcAft>
+                <a:spcPts val="0"/>
+              </a:spcAft>
+            </a:pPr>
+            <a:r>
+              <a:rPr sz="1350" b="0" i="0">
+                <a:solidFill>
+                  <a:srgbClr val="444444"/>
+                </a:solidFill>
+                <a:latin typeface="Calibri"/>
+              </a:rPr>
+              <a:t>a fix  (266)</a:t>
+            </a:r>
+          </a:p>
+        </p:txBody>
+      </p:sp>
+      <p:sp>
+        <p:nvSpPr>
+          <p:cNvPr id="15" name="TextBox 14"/>
+          <p:cNvSpPr txBox="1"/>
+          <p:nvPr/>
+        </p:nvSpPr>
+        <p:spPr>
+          <a:xfrm>
+            <a:off x="731520" y="3346704"/>
+            <a:ext cx="3291840" cy="310896"/>
+          </a:xfrm>
+          <a:prstGeom prst="rect">
+            <a:avLst/>
+          </a:prstGeom>
+          <a:noFill/>
+        </p:spPr>
+        <p:txBody>
+          <a:bodyPr wrap="square" lIns="0" rIns="0" tIns="0" bIns="0" anchor="t">
+            <a:spAutoFit/>
+          </a:bodyPr>
+          <a:lstStyle/>
+          <a:p>
+            <a:pPr algn="l">
+              <a:lnSpc>
+                <a:spcPct val="106000"/>
+              </a:lnSpc>
+              <a:spcAft>
+                <a:spcPts val="0"/>
+              </a:spcAft>
+            </a:pPr>
+            <a:r>
+              <a:rPr sz="1350" b="0" i="0">
+                <a:solidFill>
+                  <a:srgbClr val="444444"/>
+                </a:solidFill>
+                <a:latin typeface="Calibri"/>
+              </a:rPr>
+              <a:t>Who put it there</a:t>
+            </a:r>
+          </a:p>
+        </p:txBody>
+      </p:sp>
+      <p:sp>
+        <p:nvSpPr>
+          <p:cNvPr id="16" name="TextBox 15"/>
+          <p:cNvSpPr txBox="1"/>
+          <p:nvPr/>
+        </p:nvSpPr>
+        <p:spPr>
+          <a:xfrm>
+            <a:off x="4023360" y="3346704"/>
+            <a:ext cx="3749039" cy="310896"/>
+          </a:xfrm>
+          <a:prstGeom prst="rect">
+            <a:avLst/>
+          </a:prstGeom>
+          <a:noFill/>
+        </p:spPr>
+        <p:txBody>
+          <a:bodyPr wrap="square" lIns="0" rIns="0" tIns="0" bIns="0" anchor="t">
+            <a:spAutoFit/>
+          </a:bodyPr>
+          <a:lstStyle/>
+          <a:p>
+            <a:pPr algn="l">
+              <a:lnSpc>
+                <a:spcPct val="106000"/>
+              </a:lnSpc>
+              <a:spcAft>
+                <a:spcPts val="0"/>
+              </a:spcAft>
+            </a:pPr>
+            <a:r>
+              <a:rPr sz="1350" b="0" i="0">
+                <a:solidFill>
+                  <a:srgbClr val="444444"/>
+                </a:solidFill>
+                <a:latin typeface="Calibri"/>
+              </a:rPr>
+              <a:t>a person, on purpose</a:t>
+            </a:r>
+          </a:p>
+        </p:txBody>
+      </p:sp>
+      <p:sp>
+        <p:nvSpPr>
+          <p:cNvPr id="17" name="TextBox 16"/>
+          <p:cNvSpPr txBox="1"/>
+          <p:nvPr/>
+        </p:nvSpPr>
+        <p:spPr>
+          <a:xfrm>
+            <a:off x="7772400" y="3346704"/>
+            <a:ext cx="3657600" cy="310896"/>
+          </a:xfrm>
+          <a:prstGeom prst="rect">
+            <a:avLst/>
+          </a:prstGeom>
+          <a:noFill/>
+        </p:spPr>
+        <p:txBody>
+          <a:bodyPr wrap="square" lIns="0" rIns="0" tIns="0" bIns="0" anchor="t">
+            <a:spAutoFit/>
+          </a:bodyPr>
+          <a:lstStyle/>
+          <a:p>
+            <a:pPr algn="l">
+              <a:lnSpc>
+                <a:spcPct val="106000"/>
+              </a:lnSpc>
+              <a:spcAft>
+                <a:spcPts val="0"/>
+              </a:spcAft>
+            </a:pPr>
+            <a:r>
+              <a:rPr sz="1350" b="0" i="0">
+                <a:solidFill>
+                  <a:srgbClr val="444444"/>
+                </a:solidFill>
+                <a:latin typeface="Calibri"/>
+              </a:rPr>
+              <a:t>nobody</a:t>
+            </a:r>
+          </a:p>
+        </p:txBody>
+      </p:sp>
+      <p:sp>
+        <p:nvSpPr>
+          <p:cNvPr id="18" name="TextBox 17"/>
+          <p:cNvSpPr txBox="1"/>
+          <p:nvPr/>
+        </p:nvSpPr>
+        <p:spPr>
+          <a:xfrm>
+            <a:off x="731520" y="3822191"/>
+            <a:ext cx="3291840" cy="310896"/>
+          </a:xfrm>
+          <a:prstGeom prst="rect">
+            <a:avLst/>
+          </a:prstGeom>
+          <a:noFill/>
+        </p:spPr>
+        <p:txBody>
+          <a:bodyPr wrap="square" lIns="0" rIns="0" tIns="0" bIns="0" anchor="t">
+            <a:spAutoFit/>
+          </a:bodyPr>
+          <a:lstStyle/>
+          <a:p>
+            <a:pPr algn="l">
+              <a:lnSpc>
+                <a:spcPct val="106000"/>
+              </a:lnSpc>
+              <a:spcAft>
+                <a:spcPts val="0"/>
+              </a:spcAft>
+            </a:pPr>
+            <a:r>
+              <a:rPr sz="1350" b="0" i="0">
+                <a:solidFill>
+                  <a:srgbClr val="444444"/>
+                </a:solidFill>
+                <a:latin typeface="Calibri"/>
+              </a:rPr>
+              <a:t>Examples</a:t>
+            </a:r>
+          </a:p>
+        </p:txBody>
+      </p:sp>
+      <p:sp>
+        <p:nvSpPr>
+          <p:cNvPr id="19" name="TextBox 18"/>
+          <p:cNvSpPr txBox="1"/>
+          <p:nvPr/>
+        </p:nvSpPr>
+        <p:spPr>
+          <a:xfrm>
+            <a:off x="4023360" y="3822191"/>
+            <a:ext cx="3749039" cy="310896"/>
+          </a:xfrm>
+          <a:prstGeom prst="rect">
+            <a:avLst/>
+          </a:prstGeom>
+          <a:noFill/>
+        </p:spPr>
+        <p:txBody>
+          <a:bodyPr wrap="square" lIns="0" rIns="0" tIns="0" bIns="0" anchor="t">
+            <a:spAutoFit/>
+          </a:bodyPr>
+          <a:lstStyle/>
+          <a:p>
+            <a:pPr algn="l">
+              <a:lnSpc>
+                <a:spcPct val="106000"/>
+              </a:lnSpc>
+              <a:spcAft>
+                <a:spcPts val="0"/>
+              </a:spcAft>
+            </a:pPr>
+            <a:r>
+              <a:rPr sz="1350" b="0" i="0">
+                <a:solidFill>
+                  <a:srgbClr val="444444"/>
+                </a:solidFill>
+                <a:latin typeface="Calibri"/>
+              </a:rPr>
+              <a:t>indirect prompt injection, poisoned retrieval</a:t>
+            </a:r>
+          </a:p>
+        </p:txBody>
+      </p:sp>
+      <p:sp>
+        <p:nvSpPr>
+          <p:cNvPr id="20" name="TextBox 19"/>
+          <p:cNvSpPr txBox="1"/>
+          <p:nvPr/>
+        </p:nvSpPr>
+        <p:spPr>
+          <a:xfrm>
+            <a:off x="7772400" y="3822191"/>
+            <a:ext cx="3657600" cy="310896"/>
+          </a:xfrm>
+          <a:prstGeom prst="rect">
+            <a:avLst/>
+          </a:prstGeom>
+          <a:noFill/>
+        </p:spPr>
+        <p:txBody>
+          <a:bodyPr wrap="square" lIns="0" rIns="0" tIns="0" bIns="0" anchor="t">
+            <a:spAutoFit/>
+          </a:bodyPr>
+          <a:lstStyle/>
+          <a:p>
+            <a:pPr algn="l">
+              <a:lnSpc>
+                <a:spcPct val="106000"/>
+              </a:lnSpc>
+              <a:spcAft>
+                <a:spcPts val="0"/>
+              </a:spcAft>
+            </a:pPr>
+            <a:r>
+              <a:rPr sz="1350" b="0" i="0">
+                <a:solidFill>
+                  <a:srgbClr val="444444"/>
+                </a:solidFill>
+                <a:latin typeface="Calibri"/>
+              </a:rPr>
+              <a:t>lost in the middle, knowledge conflict</a:t>
+            </a:r>
+          </a:p>
+        </p:txBody>
+      </p:sp>
+      <p:sp>
+        <p:nvSpPr>
+          <p:cNvPr id="21" name="TextBox 20"/>
+          <p:cNvSpPr txBox="1"/>
+          <p:nvPr/>
+        </p:nvSpPr>
+        <p:spPr>
+          <a:xfrm>
+            <a:off x="731520" y="4480560"/>
+            <a:ext cx="10725912" cy="2011679"/>
+          </a:xfrm>
+          <a:prstGeom prst="rect">
+            <a:avLst/>
+          </a:prstGeom>
+          <a:noFill/>
+        </p:spPr>
+        <p:txBody>
+          <a:bodyPr wrap="square" lIns="0" rIns="0" tIns="0" bIns="0" anchor="t">
+            <a:spAutoFit/>
+          </a:bodyPr>
+          <a:lstStyle/>
+          <a:p>
+            <a:pPr algn="l">
+              <a:lnSpc>
+                <a:spcPct val="112000"/>
+              </a:lnSpc>
+              <a:spcAft>
+                <a:spcPts val="900"/>
+              </a:spcAft>
+            </a:pPr>
+            <a:r>
+              <a:rPr sz="1400" b="1" i="0">
                 <a:solidFill>
                   <a:srgbClr val="111111"/>
                 </a:solidFill>
                 <a:latin typeface="Calibri"/>
               </a:rPr>
-              <a:t>The security literature</a:t>
-            </a:r>
-          </a:p>
-        </p:txBody>
-      </p:sp>
-      <p:sp>
-        <p:nvSpPr>
-          <p:cNvPr id="6" name="TextBox 5"/>
-          <p:cNvSpPr txBox="1"/>
-          <p:nvPr/>
-        </p:nvSpPr>
-        <p:spPr>
-          <a:xfrm>
-            <a:off x="731520" y="2286000"/>
-            <a:ext cx="5029200" cy="4114800"/>
-          </a:xfrm>
-          <a:prstGeom prst="rect">
-            <a:avLst/>
-          </a:prstGeom>
-          <a:noFill/>
-        </p:spPr>
-        <p:txBody>
-          <a:bodyPr wrap="square" lIns="0" rIns="0" tIns="0" bIns="0" anchor="t">
-            <a:spAutoFit/>
-          </a:bodyPr>
-          <a:lstStyle/>
-          <a:p>
-            <a:pPr algn="l">
-              <a:lnSpc>
-                <a:spcPct val="110000"/>
+              <a:t>—  We keep both sets of words, because the two sides are not doing the same thing. A fix was never built to stop an adversary.</a:t>
+            </a:r>
+          </a:p>
+          <a:p>
+            <a:pPr>
+              <a:lnSpc>
+                <a:spcPct val="112000"/>
               </a:lnSpc>
               <a:spcAft>
                 <a:spcPts val="900"/>
@@ -12051,216 +13399,33 @@
                 </a:solidFill>
                 <a:latin typeface="Calibri"/>
               </a:rPr>
-              <a:t>It treats the text as an attack. Someone wrote it to take the agent over.</a:t>
+              <a:t>—  A tool returns a page with a hidden order. A tool returns a page that is ten times too long. Both arrive by the same route and end in the same window. One has an author.</a:t>
             </a:r>
           </a:p>
           <a:p>
             <a:pPr>
               <a:lnSpc>
-                <a:spcPct val="110000"/>
+                <a:spcPct val="112000"/>
               </a:lnSpc>
               <a:spcAft>
                 <a:spcPts val="900"/>
               </a:spcAft>
             </a:pPr>
             <a:r>
-              <a:rPr sz="1400" b="0" i="0">
-                <a:solidFill>
-                  <a:srgbClr val="444444"/>
-                </a:solidFill>
-                <a:latin typeface="Calibri"/>
-              </a:rPr>
-              <a:t>Indirect prompt injection. Poisoned retrieval. Poisoned memory.</a:t>
-            </a:r>
-          </a:p>
-        </p:txBody>
-      </p:sp>
-      <p:sp>
-        <p:nvSpPr>
-          <p:cNvPr id="7" name="TextBox 6"/>
-          <p:cNvSpPr txBox="1"/>
-          <p:nvPr/>
-        </p:nvSpPr>
-        <p:spPr>
-          <a:xfrm>
-            <a:off x="6583680" y="1920240"/>
-            <a:ext cx="5212080" cy="320040"/>
-          </a:xfrm>
-          <a:prstGeom prst="rect">
-            <a:avLst/>
-          </a:prstGeom>
-          <a:noFill/>
-        </p:spPr>
-        <p:txBody>
-          <a:bodyPr wrap="square" lIns="0" rIns="0" tIns="0" bIns="0" anchor="t">
-            <a:spAutoFit/>
-          </a:bodyPr>
-          <a:lstStyle/>
-          <a:p>
-            <a:pPr algn="l">
-              <a:lnSpc>
-                <a:spcPct val="106000"/>
-              </a:lnSpc>
-              <a:spcAft>
-                <a:spcPts val="600"/>
-              </a:spcAft>
-            </a:pPr>
-            <a:r>
-              <a:rPr sz="1500" b="1" i="0">
+              <a:rPr sz="1400" b="1" i="0">
                 <a:solidFill>
                   <a:srgbClr val="111111"/>
                 </a:solidFill>
                 <a:latin typeface="Calibri"/>
               </a:rPr>
-              <a:t>The machine learning literature</a:t>
-            </a:r>
-          </a:p>
-        </p:txBody>
-      </p:sp>
-      <p:sp>
-        <p:nvSpPr>
-          <p:cNvPr id="8" name="TextBox 7"/>
-          <p:cNvSpPr txBox="1"/>
-          <p:nvPr/>
-        </p:nvSpPr>
-        <p:spPr>
-          <a:xfrm>
-            <a:off x="6583680" y="2286000"/>
-            <a:ext cx="5029200" cy="4114800"/>
-          </a:xfrm>
-          <a:prstGeom prst="rect">
-            <a:avLst/>
-          </a:prstGeom>
-          <a:noFill/>
-        </p:spPr>
-        <p:txBody>
-          <a:bodyPr wrap="square" lIns="0" rIns="0" tIns="0" bIns="0" anchor="t">
-            <a:spAutoFit/>
-          </a:bodyPr>
-          <a:lstStyle/>
-          <a:p>
-            <a:pPr algn="l">
-              <a:lnSpc>
-                <a:spcPct val="110000"/>
-              </a:lnSpc>
-              <a:spcAft>
-                <a:spcPts val="900"/>
-              </a:spcAft>
-            </a:pPr>
-            <a:r>
-              <a:rPr sz="1400" b="0" i="0">
-                <a:solidFill>
-                  <a:srgbClr val="444444"/>
-                </a:solidFill>
-                <a:latin typeface="Calibri"/>
-              </a:rPr>
-              <a:t>It treats the same corruption as an accident. Nobody wrote it to cause harm.</a:t>
-            </a:r>
-          </a:p>
-          <a:p>
-            <a:pPr>
-              <a:lnSpc>
-                <a:spcPct val="110000"/>
-              </a:lnSpc>
-              <a:spcAft>
-                <a:spcPts val="900"/>
-              </a:spcAft>
-            </a:pPr>
-            <a:r>
-              <a:rPr sz="1400" b="0" i="0">
-                <a:solidFill>
-                  <a:srgbClr val="444444"/>
-                </a:solidFill>
-                <a:latin typeface="Calibri"/>
-              </a:rPr>
-              <a:t>Lost in the middle. Distraction by irrelevant text. Knowledge conflict.</a:t>
-            </a:r>
-          </a:p>
-        </p:txBody>
-      </p:sp>
-      <p:sp>
-        <p:nvSpPr>
-          <p:cNvPr id="9" name="TextBox 8"/>
-          <p:cNvSpPr txBox="1"/>
-          <p:nvPr/>
-        </p:nvSpPr>
-        <p:spPr>
-          <a:xfrm>
-            <a:off x="731520" y="3703320"/>
-            <a:ext cx="10725912" cy="2697480"/>
-          </a:xfrm>
-          <a:prstGeom prst="rect">
-            <a:avLst/>
-          </a:prstGeom>
-          <a:noFill/>
-        </p:spPr>
-        <p:txBody>
-          <a:bodyPr wrap="square" lIns="0" rIns="0" tIns="0" bIns="0" anchor="t">
-            <a:spAutoFit/>
-          </a:bodyPr>
-          <a:lstStyle/>
-          <a:p>
-            <a:pPr algn="l">
-              <a:lnSpc>
-                <a:spcPct val="110000"/>
-              </a:lnSpc>
-              <a:spcAft>
-                <a:spcPts val="1100"/>
-              </a:spcAft>
-            </a:pPr>
-            <a:r>
-              <a:rPr sz="1500" b="1" i="0">
-                <a:solidFill>
-                  <a:srgbClr val="111111"/>
-                </a:solidFill>
-                <a:latin typeface="Calibri"/>
-              </a:rPr>
-              <a:t>Both build defenses. Each side tests its defenses on its own failures.</a:t>
-            </a:r>
-          </a:p>
-          <a:p>
-            <a:pPr>
-              <a:lnSpc>
-                <a:spcPct val="110000"/>
-              </a:lnSpc>
-              <a:spcAft>
-                <a:spcPts val="1100"/>
-              </a:spcAft>
-            </a:pPr>
-            <a:r>
-              <a:rPr sz="1500" b="0" i="0">
-                <a:solidFill>
-                  <a:srgbClr val="444444"/>
-                </a:solidFill>
-                <a:latin typeface="Calibri"/>
-              </a:rPr>
-              <a:t>A tool returns a page with a hidden order. A tool returns a page that is ten times too long. Both arrive through the same route. Both end in the same window. One has an author and one does not, and that is the only difference.</a:t>
-            </a:r>
-          </a:p>
-          <a:p>
-            <a:pPr>
-              <a:lnSpc>
-                <a:spcPct val="110000"/>
-              </a:lnSpc>
-              <a:spcAft>
-                <a:spcPts val="1100"/>
-              </a:spcAft>
-            </a:pPr>
-            <a:r>
-              <a:rPr sz="1500" b="1" i="0">
-                <a:solidFill>
-                  <a:srgbClr val="111111"/>
-                </a:solidFill>
-                <a:latin typeface="Calibri"/>
-              </a:rPr>
-              <a:t>Our question: does that difference justify two separate sets of defenses?</a:t>
-            </a:r>
-          </a:p>
-        </p:txBody>
-      </p:sp>
-      <p:sp>
-        <p:nvSpPr>
-          <p:cNvPr id="10" name="TextBox 9"/>
+              <a:t>—  Our question: does that difference justify two separate sets of protection?</a:t>
+            </a:r>
+          </a:p>
+        </p:txBody>
+      </p:sp>
+      <p:sp>
+        <p:nvSpPr>
+          <p:cNvPr id="22" name="TextBox 21"/>
           <p:cNvSpPr txBox="1"/>
           <p:nvPr/>
         </p:nvSpPr>
@@ -12295,7 +13460,7 @@
                 </a:solidFill>
                 <a:latin typeface="Calibri"/>
               </a:rPr>
-              <a:t>Security end: Greshake et al., AISec@CCS 2023, arXiv:2302.12173   ·   ML end: Liu et al., TACL 2023, arXiv:2307.03172; Shi et al., ICML 2023, arXiv:2302.00093   ·   Knowledge conflict: Xu et al., EMNLP 2024, arXiv:2403.08319</a:t>
+              <a:t>Security side: Greshake et al., AISec@CCS 2023, arXiv:2302.12173   ·   ML side: Liu et al., TACL 2023, arXiv:2307.03172; Shi et al., ICML 2023, arXiv:2302.00093   ·   Knowledge conflict: Xu et al., EMNLP 2024, arXiv:2403.08319</a:t>
             </a:r>
           </a:p>
         </p:txBody>
@@ -16080,7 +17245,7 @@
               </a:spcAft>
             </a:pPr>
             <a:r>
-              <a:rPr sz="1500" b="0" i="0">
+              <a:rPr sz="1450" b="0" i="0">
                 <a:solidFill>
                   <a:srgbClr val="444444"/>
                 </a:solidFill>
@@ -16122,7 +17287,7 @@
               </a:spcAft>
             </a:pPr>
             <a:r>
-              <a:rPr sz="1500" b="0" i="0">
+              <a:rPr sz="1450" b="0" i="0">
                 <a:solidFill>
                   <a:srgbClr val="444444"/>
                 </a:solidFill>
@@ -16141,7 +17306,7 @@
         </p:nvSpPr>
         <p:spPr>
           <a:xfrm>
-            <a:off x="731520" y="2971800"/>
+            <a:off x="731520" y="2898648"/>
             <a:ext cx="2743200" cy="310896"/>
           </a:xfrm>
           <a:prstGeom prst="rect">
@@ -16164,13 +17329,13 @@
               </a:spcAft>
             </a:pPr>
             <a:r>
-              <a:rPr sz="1500" b="0" i="0">
-                <a:solidFill>
-                  <a:srgbClr val="444444"/>
-                </a:solidFill>
-                <a:latin typeface="Calibri"/>
-              </a:rPr>
-              <a:t>237 attacks</a:t>
+              <a:rPr sz="1450" b="0" i="0">
+                <a:solidFill>
+                  <a:srgbClr val="444444"/>
+                </a:solidFill>
+                <a:latin typeface="Calibri"/>
+              </a:rPr>
+              <a:t>182 attacks</a:t>
             </a:r>
           </a:p>
         </p:txBody>
@@ -16183,7 +17348,7 @@
         </p:nvSpPr>
         <p:spPr>
           <a:xfrm>
-            <a:off x="3474720" y="2971800"/>
+            <a:off x="3474720" y="2898648"/>
             <a:ext cx="7955279" cy="310896"/>
           </a:xfrm>
           <a:prstGeom prst="rect">
@@ -16206,13 +17371,13 @@
               </a:spcAft>
             </a:pPr>
             <a:r>
-              <a:rPr sz="1500" b="0" i="0">
-                <a:solidFill>
-                  <a:srgbClr val="444444"/>
-                </a:solidFill>
-                <a:latin typeface="Calibri"/>
-              </a:rPr>
-              <a:t>distinct named ways to corrupt a context window</a:t>
+              <a:rPr sz="1450" b="0" i="0">
+                <a:solidFill>
+                  <a:srgbClr val="444444"/>
+                </a:solidFill>
+                <a:latin typeface="Calibri"/>
+              </a:rPr>
+              <a:t>deliberate ways to corrupt a context window</a:t>
             </a:r>
           </a:p>
         </p:txBody>
@@ -16225,7 +17390,7 @@
         </p:nvSpPr>
         <p:spPr>
           <a:xfrm>
-            <a:off x="731520" y="3502152"/>
+            <a:off x="731520" y="3355848"/>
             <a:ext cx="2743200" cy="310896"/>
           </a:xfrm>
           <a:prstGeom prst="rect">
@@ -16248,13 +17413,13 @@
               </a:spcAft>
             </a:pPr>
             <a:r>
-              <a:rPr sz="1500" b="0" i="0">
-                <a:solidFill>
-                  <a:srgbClr val="444444"/>
-                </a:solidFill>
-                <a:latin typeface="Calibri"/>
-              </a:rPr>
-              <a:t>534 defenses</a:t>
+              <a:rPr sz="1450" b="0" i="0">
+                <a:solidFill>
+                  <a:srgbClr val="444444"/>
+                </a:solidFill>
+                <a:latin typeface="Calibri"/>
+              </a:rPr>
+              <a:t>55 mechanisms</a:t>
             </a:r>
           </a:p>
         </p:txBody>
@@ -16267,7 +17432,7 @@
         </p:nvSpPr>
         <p:spPr>
           <a:xfrm>
-            <a:off x="3474720" y="3502152"/>
+            <a:off x="3474720" y="3355848"/>
             <a:ext cx="7955279" cy="310896"/>
           </a:xfrm>
           <a:prstGeom prst="rect">
@@ -16290,13 +17455,13 @@
               </a:spcAft>
             </a:pPr>
             <a:r>
-              <a:rPr sz="1500" b="0" i="0">
-                <a:solidFill>
-                  <a:srgbClr val="444444"/>
-                </a:solidFill>
-                <a:latin typeface="Calibri"/>
-              </a:rPr>
-              <a:t>distinct named ways the field protects against them</a:t>
+              <a:rPr sz="1450" b="0" i="0">
+                <a:solidFill>
+                  <a:srgbClr val="444444"/>
+                </a:solidFill>
+                <a:latin typeface="Calibri"/>
+              </a:rPr>
+              <a:t>the same corruption arriving by accident</a:t>
             </a:r>
           </a:p>
         </p:txBody>
@@ -16309,7 +17474,7 @@
         </p:nvSpPr>
         <p:spPr>
           <a:xfrm>
-            <a:off x="731520" y="4032504"/>
+            <a:off x="731520" y="3813048"/>
             <a:ext cx="2743200" cy="310896"/>
           </a:xfrm>
           <a:prstGeom prst="rect">
@@ -16332,7 +17497,175 @@
               </a:spcAft>
             </a:pPr>
             <a:r>
-              <a:rPr sz="1500" b="0" i="0">
+              <a:rPr sz="1450" b="0" i="0">
+                <a:solidFill>
+                  <a:srgbClr val="444444"/>
+                </a:solidFill>
+                <a:latin typeface="Calibri"/>
+              </a:rPr>
+              <a:t>263 defenses</a:t>
+            </a:r>
+          </a:p>
+        </p:txBody>
+      </p:sp>
+      <p:sp>
+        <p:nvSpPr>
+          <p:cNvPr id="15" name="TextBox 14"/>
+          <p:cNvSpPr txBox="1"/>
+          <p:nvPr/>
+        </p:nvSpPr>
+        <p:spPr>
+          <a:xfrm>
+            <a:off x="3474720" y="3813048"/>
+            <a:ext cx="7955279" cy="310896"/>
+          </a:xfrm>
+          <a:prstGeom prst="rect">
+            <a:avLst/>
+          </a:prstGeom>
+          <a:noFill/>
+        </p:spPr>
+        <p:txBody>
+          <a:bodyPr wrap="square" lIns="0" rIns="0" tIns="0" bIns="0" anchor="t">
+            <a:spAutoFit/>
+          </a:bodyPr>
+          <a:lstStyle/>
+          <a:p>
+            <a:pPr algn="l">
+              <a:lnSpc>
+                <a:spcPct val="106000"/>
+              </a:lnSpc>
+              <a:spcAft>
+                <a:spcPts val="0"/>
+              </a:spcAft>
+            </a:pPr>
+            <a:r>
+              <a:rPr sz="1450" b="0" i="0">
+                <a:solidFill>
+                  <a:srgbClr val="444444"/>
+                </a:solidFill>
+                <a:latin typeface="Calibri"/>
+              </a:rPr>
+              <a:t>built to stop an adversary</a:t>
+            </a:r>
+          </a:p>
+        </p:txBody>
+      </p:sp>
+      <p:sp>
+        <p:nvSpPr>
+          <p:cNvPr id="16" name="TextBox 15"/>
+          <p:cNvSpPr txBox="1"/>
+          <p:nvPr/>
+        </p:nvSpPr>
+        <p:spPr>
+          <a:xfrm>
+            <a:off x="731520" y="4270248"/>
+            <a:ext cx="2743200" cy="310896"/>
+          </a:xfrm>
+          <a:prstGeom prst="rect">
+            <a:avLst/>
+          </a:prstGeom>
+          <a:noFill/>
+        </p:spPr>
+        <p:txBody>
+          <a:bodyPr wrap="square" lIns="0" rIns="0" tIns="0" bIns="0" anchor="t">
+            <a:spAutoFit/>
+          </a:bodyPr>
+          <a:lstStyle/>
+          <a:p>
+            <a:pPr algn="l">
+              <a:lnSpc>
+                <a:spcPct val="106000"/>
+              </a:lnSpc>
+              <a:spcAft>
+                <a:spcPts val="0"/>
+              </a:spcAft>
+            </a:pPr>
+            <a:r>
+              <a:rPr sz="1450" b="0" i="0">
+                <a:solidFill>
+                  <a:srgbClr val="444444"/>
+                </a:solidFill>
+                <a:latin typeface="Calibri"/>
+              </a:rPr>
+              <a:t>266 fixes</a:t>
+            </a:r>
+          </a:p>
+        </p:txBody>
+      </p:sp>
+      <p:sp>
+        <p:nvSpPr>
+          <p:cNvPr id="17" name="TextBox 16"/>
+          <p:cNvSpPr txBox="1"/>
+          <p:nvPr/>
+        </p:nvSpPr>
+        <p:spPr>
+          <a:xfrm>
+            <a:off x="3474720" y="4270248"/>
+            <a:ext cx="7955279" cy="310896"/>
+          </a:xfrm>
+          <a:prstGeom prst="rect">
+            <a:avLst/>
+          </a:prstGeom>
+          <a:noFill/>
+        </p:spPr>
+        <p:txBody>
+          <a:bodyPr wrap="square" lIns="0" rIns="0" tIns="0" bIns="0" anchor="t">
+            <a:spAutoFit/>
+          </a:bodyPr>
+          <a:lstStyle/>
+          <a:p>
+            <a:pPr algn="l">
+              <a:lnSpc>
+                <a:spcPct val="106000"/>
+              </a:lnSpc>
+              <a:spcAft>
+                <a:spcPts val="0"/>
+              </a:spcAft>
+            </a:pPr>
+            <a:r>
+              <a:rPr sz="1450" b="0" i="0">
+                <a:solidFill>
+                  <a:srgbClr val="444444"/>
+                </a:solidFill>
+                <a:latin typeface="Calibri"/>
+              </a:rPr>
+              <a:t>built to stop the accident</a:t>
+            </a:r>
+          </a:p>
+        </p:txBody>
+      </p:sp>
+      <p:sp>
+        <p:nvSpPr>
+          <p:cNvPr id="18" name="TextBox 17"/>
+          <p:cNvSpPr txBox="1"/>
+          <p:nvPr/>
+        </p:nvSpPr>
+        <p:spPr>
+          <a:xfrm>
+            <a:off x="731520" y="4727448"/>
+            <a:ext cx="2743200" cy="310896"/>
+          </a:xfrm>
+          <a:prstGeom prst="rect">
+            <a:avLst/>
+          </a:prstGeom>
+          <a:noFill/>
+        </p:spPr>
+        <p:txBody>
+          <a:bodyPr wrap="square" lIns="0" rIns="0" tIns="0" bIns="0" anchor="t">
+            <a:spAutoFit/>
+          </a:bodyPr>
+          <a:lstStyle/>
+          <a:p>
+            <a:pPr algn="l">
+              <a:lnSpc>
+                <a:spcPct val="106000"/>
+              </a:lnSpc>
+              <a:spcAft>
+                <a:spcPts val="0"/>
+              </a:spcAft>
+            </a:pPr>
+            <a:r>
+              <a:rPr sz="1450" b="0" i="0">
                 <a:solidFill>
                   <a:srgbClr val="444444"/>
                 </a:solidFill>
@@ -16345,13 +17678,13 @@
       </p:sp>
       <p:sp>
         <p:nvSpPr>
-          <p:cNvPr id="15" name="TextBox 14"/>
-          <p:cNvSpPr txBox="1"/>
-          <p:nvPr/>
-        </p:nvSpPr>
-        <p:spPr>
-          <a:xfrm>
-            <a:off x="3474720" y="4032504"/>
+          <p:cNvPr id="19" name="TextBox 18"/>
+          <p:cNvSpPr txBox="1"/>
+          <p:nvPr/>
+        </p:nvSpPr>
+        <p:spPr>
+          <a:xfrm>
+            <a:off x="3474720" y="4727448"/>
             <a:ext cx="7955279" cy="310896"/>
           </a:xfrm>
           <a:prstGeom prst="rect">
@@ -16374,7 +17707,7 @@
               </a:spcAft>
             </a:pPr>
             <a:r>
-              <a:rPr sz="1500" b="0" i="0">
+              <a:rPr sz="1450" b="0" i="0">
                 <a:solidFill>
                   <a:srgbClr val="444444"/>
                 </a:solidFill>
@@ -16387,14 +17720,14 @@
       </p:sp>
       <p:sp>
         <p:nvSpPr>
-          <p:cNvPr id="16" name="TextBox 15"/>
-          <p:cNvSpPr txBox="1"/>
-          <p:nvPr/>
-        </p:nvSpPr>
-        <p:spPr>
-          <a:xfrm>
-            <a:off x="731520" y="4526280"/>
-            <a:ext cx="10725912" cy="1965959"/>
+          <p:cNvPr id="20" name="TextBox 19"/>
+          <p:cNvSpPr txBox="1"/>
+          <p:nvPr/>
+        </p:nvSpPr>
+        <p:spPr>
+          <a:xfrm>
+            <a:off x="731520" y="4617720"/>
+            <a:ext cx="10725912" cy="1874519"/>
           </a:xfrm>
           <a:prstGeom prst="rect">
             <a:avLst/>
@@ -16448,7 +17781,7 @@
       </p:sp>
       <p:sp>
         <p:nvSpPr>
-          <p:cNvPr id="17" name="TextBox 16"/>
+          <p:cNvPr id="21" name="TextBox 20"/>
           <p:cNvSpPr txBox="1"/>
           <p:nvPr/>
         </p:nvSpPr>

--- a/advisor_meeting.pptx
+++ b/advisor_meeting.pptx
@@ -6054,7 +6054,7 @@
                 </a:solidFill>
                 <a:latin typeface="Calibri"/>
               </a:rPr>
-              <a:t>Each row is one route and one failure. The attacks are the deliberate ones. The defenses are the ones built for the same failure happening by accident.</a:t>
+              <a:t>Each row is one route and one failure. Deliberate attacks on one side, and on the other the fixes built for that same failure arriving by accident.</a:t>
             </a:r>
           </a:p>
         </p:txBody>
@@ -6180,26 +6180,7 @@
                 </a:solidFill>
                 <a:latin typeface="Calibri"/>
               </a:rPr>
-              <a:t>Deliberate</a:t>
-            </a:r>
-          </a:p>
-          <a:p>
-            <a:pPr>
-              <a:lnSpc>
-                <a:spcPct val="110000"/>
-              </a:lnSpc>
-              <a:spcAft>
-                <a:spcPts val="0"/>
-              </a:spcAft>
-            </a:pPr>
-            <a:r>
-              <a:rPr sz="1150" b="1" i="0">
-                <a:solidFill>
-                  <a:srgbClr val="777777"/>
-                </a:solidFill>
-                <a:latin typeface="Calibri"/>
-              </a:rPr>
-              <a:t>attacks</a:t>
+              <a:t>Attacks</a:t>
             </a:r>
           </a:p>
         </p:txBody>
@@ -6241,26 +6222,7 @@
                 </a:solidFill>
                 <a:latin typeface="Calibri"/>
               </a:rPr>
-              <a:t>Accidental</a:t>
-            </a:r>
-          </a:p>
-          <a:p>
-            <a:pPr>
-              <a:lnSpc>
-                <a:spcPct val="110000"/>
-              </a:lnSpc>
-              <a:spcAft>
-                <a:spcPts val="0"/>
-              </a:spcAft>
-            </a:pPr>
-            <a:r>
-              <a:rPr sz="1150" b="1" i="0">
-                <a:solidFill>
-                  <a:srgbClr val="777777"/>
-                </a:solidFill>
-                <a:latin typeface="Calibri"/>
-              </a:rPr>
-              <a:t>defenses</a:t>
+              <a:t>Fixes</a:t>
             </a:r>
           </a:p>
         </p:txBody>
@@ -7852,7 +7814,7 @@
                 </a:solidFill>
                 <a:latin typeface="Calibri"/>
               </a:rPr>
-              <a:t>These cells are not ignored. tool-output and goal-hijack alone holds 169 tested pairs. But each one is a security defense against a security attack, or an accident defense against an accident. Nothing crosses.</a:t>
+              <a:t>These cells are not ignored. tool-output and goal-hijack alone holds 169 tested pairs. But each one is a defense against an attack, or a fix against an accident. Nothing crosses.</a:t>
             </a:r>
           </a:p>
           <a:p>
@@ -7871,7 +7833,7 @@
                 </a:solidFill>
                 <a:latin typeface="Calibri"/>
               </a:rPr>
-              <a:t>The RAG row is 3 attacks against 42 defenses. 126 possible tests. None run.</a:t>
+              <a:t>The RAG row is 3 attacks against 42 fixes. 126 possible tests. None run.</a:t>
             </a:r>
           </a:p>
         </p:txBody>
@@ -9589,7 +9551,7 @@
                 </a:solidFill>
                 <a:latin typeface="Calibri"/>
               </a:rPr>
-              <a:t>On the defense side</a:t>
+              <a:t>On the fix side</a:t>
             </a:r>
           </a:p>
         </p:txBody>
@@ -9631,7 +9593,7 @@
                 </a:solidFill>
                 <a:latin typeface="Calibri"/>
               </a:rPr>
-              <a:t>42 named defenses, all built for the accidental version</a:t>
+              <a:t>42 named fixes, all built for the accidental version</a:t>
             </a:r>
           </a:p>
         </p:txBody>

--- a/advisor_meeting.pptx
+++ b/advisor_meeting.pptx
@@ -3834,7 +3834,7 @@
                 </a:solidFill>
                 <a:latin typeface="Calibri"/>
               </a:rPr>
-              <a:t>—  That does not mean an attack is unproven. Each paper shows it working, against a system with no defense switched on.</a:t>
+              <a:t>—  Each paper proves its attack works, against a system with no defense switched on.</a:t>
             </a:r>
           </a:p>
           <a:p>
@@ -4587,7 +4587,7 @@
                 </a:solidFill>
                 <a:latin typeface="Calibri"/>
               </a:rPr>
-              <a:t>—  124 of 263 defenses and 194 of 266 fixes were never tested against a named cause. We read all 320 to see what they were answering.</a:t>
+              <a:t>—  124 of 263 defenses and 194 of 266 fixes have no tested pair. Reading all 320 shows what each one answers.</a:t>
             </a:r>
           </a:p>
         </p:txBody>
@@ -5849,7 +5849,7 @@
                 </a:solidFill>
                 <a:latin typeface="Calibri"/>
               </a:rPr>
-              <a:t>—  The 320 are not one thing. 124 of the first 126 come from the machine learning side: they are fixes for accidents, and calling them untested defenses is unfair to them.</a:t>
+              <a:t>—  126 of them answer an accidental failure and never set out to stop an adversary. 99 name a cause that is on our map and stop short of testing against it.</a:t>
             </a:r>
           </a:p>
           <a:p>
@@ -5868,7 +5868,7 @@
                 </a:solidFill>
                 <a:latin typeface="Calibri"/>
               </a:rPr>
-              <a:t>—  The 99 that name a cause and stop short of testing it are the real gap, and the lead we follow next.</a:t>
+              <a:t>—  Those 99 are the gap, and the lead we follow next.</a:t>
             </a:r>
           </a:p>
         </p:txBody>
@@ -7814,7 +7814,7 @@
                 </a:solidFill>
                 <a:latin typeface="Calibri"/>
               </a:rPr>
-              <a:t>These cells are not ignored. tool-output and goal-hijack alone holds 169 tested pairs. But each one is a defense against an attack, or a fix against an accident. Nothing crosses.</a:t>
+              <a:t>tool-output and goal-hijack alone holds 169 tested pairs, every one a defense against an attack or a fix against an accident. None crosses.</a:t>
             </a:r>
           </a:p>
           <a:p>
@@ -8032,7 +8032,7 @@
         </p:nvSpPr>
         <p:spPr>
           <a:xfrm>
-            <a:off x="731520" y="2377440"/>
+            <a:off x="731520" y="2231136"/>
             <a:ext cx="3108960" cy="274320"/>
           </a:xfrm>
           <a:prstGeom prst="rect">
@@ -8074,7 +8074,7 @@
         </p:nvSpPr>
         <p:spPr>
           <a:xfrm>
-            <a:off x="3840480" y="2377440"/>
+            <a:off x="3840480" y="2231136"/>
             <a:ext cx="7589520" cy="274320"/>
           </a:xfrm>
           <a:prstGeom prst="rect">
@@ -8116,7 +8116,7 @@
         </p:nvSpPr>
         <p:spPr>
           <a:xfrm>
-            <a:off x="731520" y="2651760"/>
+            <a:off x="731520" y="2505456"/>
             <a:ext cx="10698480" cy="9525"/>
           </a:xfrm>
           <a:prstGeom prst="rect">
@@ -8160,7 +8160,7 @@
         </p:nvSpPr>
         <p:spPr>
           <a:xfrm>
-            <a:off x="731520" y="2761488"/>
+            <a:off x="731520" y="2615184"/>
             <a:ext cx="3108960" cy="310896"/>
           </a:xfrm>
           <a:prstGeom prst="rect">
@@ -8202,7 +8202,7 @@
         </p:nvSpPr>
         <p:spPr>
           <a:xfrm>
-            <a:off x="3840480" y="2761488"/>
+            <a:off x="3840480" y="2615184"/>
             <a:ext cx="7589520" cy="310896"/>
           </a:xfrm>
           <a:prstGeom prst="rect">
@@ -8244,7 +8244,7 @@
         </p:nvSpPr>
         <p:spPr>
           <a:xfrm>
-            <a:off x="731520" y="3163824"/>
+            <a:off x="731520" y="2999232"/>
             <a:ext cx="3108960" cy="310896"/>
           </a:xfrm>
           <a:prstGeom prst="rect">
@@ -8286,7 +8286,7 @@
         </p:nvSpPr>
         <p:spPr>
           <a:xfrm>
-            <a:off x="3840480" y="3163824"/>
+            <a:off x="3840480" y="2999232"/>
             <a:ext cx="7589520" cy="310896"/>
           </a:xfrm>
           <a:prstGeom prst="rect">
@@ -8328,7 +8328,7 @@
         </p:nvSpPr>
         <p:spPr>
           <a:xfrm>
-            <a:off x="731520" y="3566160"/>
+            <a:off x="731520" y="3383279"/>
             <a:ext cx="3108960" cy="310896"/>
           </a:xfrm>
           <a:prstGeom prst="rect">
@@ -8370,7 +8370,7 @@
         </p:nvSpPr>
         <p:spPr>
           <a:xfrm>
-            <a:off x="3840480" y="3566160"/>
+            <a:off x="3840480" y="3383279"/>
             <a:ext cx="7589520" cy="310896"/>
           </a:xfrm>
           <a:prstGeom prst="rect">
@@ -8412,7 +8412,7 @@
         </p:nvSpPr>
         <p:spPr>
           <a:xfrm>
-            <a:off x="731520" y="3968496"/>
+            <a:off x="731520" y="3767328"/>
             <a:ext cx="3108960" cy="310896"/>
           </a:xfrm>
           <a:prstGeom prst="rect">
@@ -8454,7 +8454,7 @@
         </p:nvSpPr>
         <p:spPr>
           <a:xfrm>
-            <a:off x="3840480" y="3968496"/>
+            <a:off x="3840480" y="3767328"/>
             <a:ext cx="7589520" cy="310896"/>
           </a:xfrm>
           <a:prstGeom prst="rect">
@@ -8496,7 +8496,7 @@
         </p:nvSpPr>
         <p:spPr>
           <a:xfrm>
-            <a:off x="731520" y="4279392"/>
+            <a:off x="731520" y="4315968"/>
             <a:ext cx="3108960" cy="274320"/>
           </a:xfrm>
           <a:prstGeom prst="rect">
@@ -8538,7 +8538,7 @@
         </p:nvSpPr>
         <p:spPr>
           <a:xfrm>
-            <a:off x="3840480" y="4279392"/>
+            <a:off x="3840480" y="4315968"/>
             <a:ext cx="7589520" cy="274320"/>
           </a:xfrm>
           <a:prstGeom prst="rect">
@@ -8580,7 +8580,7 @@
         </p:nvSpPr>
         <p:spPr>
           <a:xfrm>
-            <a:off x="731520" y="4553712"/>
+            <a:off x="731520" y="4590288"/>
             <a:ext cx="10698480" cy="9525"/>
           </a:xfrm>
           <a:prstGeom prst="rect">
@@ -8624,7 +8624,7 @@
         </p:nvSpPr>
         <p:spPr>
           <a:xfrm>
-            <a:off x="731520" y="4663440"/>
+            <a:off x="731520" y="4700016"/>
             <a:ext cx="3108960" cy="310896"/>
           </a:xfrm>
           <a:prstGeom prst="rect">
@@ -8666,7 +8666,7 @@
         </p:nvSpPr>
         <p:spPr>
           <a:xfrm>
-            <a:off x="3840480" y="4663440"/>
+            <a:off x="3840480" y="4700016"/>
             <a:ext cx="7589520" cy="310896"/>
           </a:xfrm>
           <a:prstGeom prst="rect">
@@ -8708,7 +8708,7 @@
         </p:nvSpPr>
         <p:spPr>
           <a:xfrm>
-            <a:off x="731520" y="5065776"/>
+            <a:off x="731520" y="5084064"/>
             <a:ext cx="3108960" cy="310896"/>
           </a:xfrm>
           <a:prstGeom prst="rect">
@@ -8750,7 +8750,7 @@
         </p:nvSpPr>
         <p:spPr>
           <a:xfrm>
-            <a:off x="3840480" y="5065776"/>
+            <a:off x="3840480" y="5084064"/>
             <a:ext cx="7589520" cy="310896"/>
           </a:xfrm>
           <a:prstGeom prst="rect">
@@ -8876,8 +8876,8 @@
         </p:nvSpPr>
         <p:spPr>
           <a:xfrm>
-            <a:off x="731520" y="4937760"/>
-            <a:ext cx="10725912" cy="1463039"/>
+            <a:off x="731520" y="5870448"/>
+            <a:ext cx="10725912" cy="530352"/>
           </a:xfrm>
           <a:prstGeom prst="rect">
             <a:avLst/>
@@ -8895,11 +8895,11 @@
                 <a:spcPct val="110000"/>
               </a:lnSpc>
               <a:spcAft>
-                <a:spcPts val="800"/>
-              </a:spcAft>
-            </a:pPr>
-            <a:r>
-              <a:rPr sz="1500" b="1" i="0">
+                <a:spcPts val="700"/>
+              </a:spcAft>
+            </a:pPr>
+            <a:r>
+              <a:rPr sz="1400" b="1" i="0">
                 <a:solidFill>
                   <a:srgbClr val="111111"/>
                 </a:solidFill>
@@ -8914,17 +8914,17 @@
                 <a:spcPct val="110000"/>
               </a:lnSpc>
               <a:spcAft>
-                <a:spcPts val="800"/>
-              </a:spcAft>
-            </a:pPr>
-            <a:r>
-              <a:rPr sz="1500" b="0" i="0">
-                <a:solidFill>
-                  <a:srgbClr val="444444"/>
-                </a:solidFill>
-                <a:latin typeface="Calibri"/>
-              </a:rPr>
-              <a:t>That is not a complaint about other people's repositories. It sets the size of what this work can honestly cover, and it is a result the field should know.</a:t>
+                <a:spcPts val="700"/>
+              </a:spcAft>
+            </a:pPr>
+            <a:r>
+              <a:rPr sz="1400" b="0" i="0">
+                <a:solidFill>
+                  <a:srgbClr val="444444"/>
+                </a:solidFill>
+                <a:latin typeface="Calibri"/>
+              </a:rPr>
+              <a:t>This sets the size of what the work can cover, and it is a finding in its own right.</a:t>
             </a:r>
           </a:p>
         </p:txBody>
@@ -17056,7 +17056,7 @@
         </p:nvSpPr>
         <p:spPr>
           <a:xfrm>
-            <a:off x="731520" y="2057400"/>
+            <a:off x="731520" y="2011680"/>
             <a:ext cx="2743200" cy="274320"/>
           </a:xfrm>
           <a:prstGeom prst="rect">
@@ -17098,7 +17098,7 @@
         </p:nvSpPr>
         <p:spPr>
           <a:xfrm>
-            <a:off x="3474720" y="2057400"/>
+            <a:off x="3474720" y="2011680"/>
             <a:ext cx="7955279" cy="274320"/>
           </a:xfrm>
           <a:prstGeom prst="rect">
@@ -17140,7 +17140,7 @@
         </p:nvSpPr>
         <p:spPr>
           <a:xfrm>
-            <a:off x="731520" y="2331720"/>
+            <a:off x="731520" y="2286000"/>
             <a:ext cx="10698480" cy="9525"/>
           </a:xfrm>
           <a:prstGeom prst="rect">
@@ -17184,7 +17184,7 @@
         </p:nvSpPr>
         <p:spPr>
           <a:xfrm>
-            <a:off x="731520" y="2441448"/>
+            <a:off x="731520" y="2395728"/>
             <a:ext cx="2743200" cy="310896"/>
           </a:xfrm>
           <a:prstGeom prst="rect">
@@ -17226,7 +17226,7 @@
         </p:nvSpPr>
         <p:spPr>
           <a:xfrm>
-            <a:off x="3474720" y="2441448"/>
+            <a:off x="3474720" y="2395728"/>
             <a:ext cx="7955279" cy="310896"/>
           </a:xfrm>
           <a:prstGeom prst="rect">
@@ -17268,7 +17268,7 @@
         </p:nvSpPr>
         <p:spPr>
           <a:xfrm>
-            <a:off x="731520" y="2898648"/>
+            <a:off x="731520" y="2834640"/>
             <a:ext cx="2743200" cy="310896"/>
           </a:xfrm>
           <a:prstGeom prst="rect">
@@ -17310,7 +17310,7 @@
         </p:nvSpPr>
         <p:spPr>
           <a:xfrm>
-            <a:off x="3474720" y="2898648"/>
+            <a:off x="3474720" y="2834640"/>
             <a:ext cx="7955279" cy="310896"/>
           </a:xfrm>
           <a:prstGeom prst="rect">
@@ -17352,7 +17352,7 @@
         </p:nvSpPr>
         <p:spPr>
           <a:xfrm>
-            <a:off x="731520" y="3355848"/>
+            <a:off x="731520" y="3273552"/>
             <a:ext cx="2743200" cy="310896"/>
           </a:xfrm>
           <a:prstGeom prst="rect">
@@ -17394,7 +17394,7 @@
         </p:nvSpPr>
         <p:spPr>
           <a:xfrm>
-            <a:off x="3474720" y="3355848"/>
+            <a:off x="3474720" y="3273552"/>
             <a:ext cx="7955279" cy="310896"/>
           </a:xfrm>
           <a:prstGeom prst="rect">
@@ -17436,7 +17436,7 @@
         </p:nvSpPr>
         <p:spPr>
           <a:xfrm>
-            <a:off x="731520" y="3813048"/>
+            <a:off x="731520" y="3712464"/>
             <a:ext cx="2743200" cy="310896"/>
           </a:xfrm>
           <a:prstGeom prst="rect">
@@ -17478,7 +17478,7 @@
         </p:nvSpPr>
         <p:spPr>
           <a:xfrm>
-            <a:off x="3474720" y="3813048"/>
+            <a:off x="3474720" y="3712464"/>
             <a:ext cx="7955279" cy="310896"/>
           </a:xfrm>
           <a:prstGeom prst="rect">
@@ -17520,7 +17520,7 @@
         </p:nvSpPr>
         <p:spPr>
           <a:xfrm>
-            <a:off x="731520" y="4270248"/>
+            <a:off x="731520" y="4151376"/>
             <a:ext cx="2743200" cy="310896"/>
           </a:xfrm>
           <a:prstGeom prst="rect">
@@ -17562,7 +17562,7 @@
         </p:nvSpPr>
         <p:spPr>
           <a:xfrm>
-            <a:off x="3474720" y="4270248"/>
+            <a:off x="3474720" y="4151376"/>
             <a:ext cx="7955279" cy="310896"/>
           </a:xfrm>
           <a:prstGeom prst="rect">
@@ -17604,7 +17604,7 @@
         </p:nvSpPr>
         <p:spPr>
           <a:xfrm>
-            <a:off x="731520" y="4727448"/>
+            <a:off x="731520" y="4590288"/>
             <a:ext cx="2743200" cy="310896"/>
           </a:xfrm>
           <a:prstGeom prst="rect">
@@ -17646,7 +17646,7 @@
         </p:nvSpPr>
         <p:spPr>
           <a:xfrm>
-            <a:off x="3474720" y="4727448"/>
+            <a:off x="3474720" y="4590288"/>
             <a:ext cx="7955279" cy="310896"/>
           </a:xfrm>
           <a:prstGeom prst="rect">
@@ -17688,8 +17688,8 @@
         </p:nvSpPr>
         <p:spPr>
           <a:xfrm>
-            <a:off x="731520" y="4617720"/>
-            <a:ext cx="10725912" cy="1874519"/>
+            <a:off x="731520" y="5120640"/>
+            <a:ext cx="10725912" cy="1371600"/>
           </a:xfrm>
           <a:prstGeom prst="rect">
             <a:avLst/>

--- a/advisor_meeting.pptx
+++ b/advisor_meeting.pptx
@@ -22,6 +22,8 @@
     <p:sldId id="270" r:id="rId21"/>
     <p:sldId id="271" r:id="rId22"/>
     <p:sldId id="272" r:id="rId23"/>
+    <p:sldId id="273" r:id="rId24"/>
+    <p:sldId id="274" r:id="rId25"/>
   </p:sldIdLst>
   <p:sldSz cx="12188952" cy="6858000" type="screen4x3"/>
   <p:notesSz cx="6858000" cy="9144000"/>
@@ -10220,7 +10222,7 @@
                 </a:solidFill>
                 <a:latin typeface="Calibri"/>
               </a:rPr>
-              <a:t>19 pairs</a:t>
+              <a:t>20 pairs</a:t>
             </a:r>
           </a:p>
         </p:txBody>
@@ -10304,7 +10306,7 @@
                 </a:solidFill>
                 <a:latin typeface="Calibri"/>
               </a:rPr>
-              <a:t>109 conditions</a:t>
+              <a:t>113 conditions</a:t>
             </a:r>
           </a:p>
         </p:txBody>
@@ -10885,7 +10887,7 @@
                 </a:solidFill>
                 <a:latin typeface="Calibri"/>
               </a:rPr>
-              <a:t>4</a:t>
+              <a:t>5</a:t>
             </a:r>
           </a:p>
         </p:txBody>
@@ -11179,7 +11181,7 @@
                 </a:solidFill>
                 <a:latin typeface="Calibri"/>
               </a:rPr>
-              <a:t>out of 19 pairs measured</a:t>
+              <a:t>out of 20 pairs measured</a:t>
             </a:r>
           </a:p>
         </p:txBody>
@@ -11221,7 +11223,7 @@
                 </a:solidFill>
                 <a:latin typeface="Calibri"/>
               </a:rPr>
-              <a:t>A defense helped in four cases out of eighteen. In seven it made the attack work better than no defense at all.</a:t>
+              <a:t>A defense helped in 5 cases out of 20. In 8 it made the attack work better than no defense at all.</a:t>
             </a:r>
           </a:p>
           <a:p>
@@ -11240,7 +11242,7 @@
                 </a:solidFill>
                 <a:latin typeface="Calibri"/>
               </a:rPr>
-              <a:t>In 5 of those seven the attack does almost nothing to a model with no defense at all. The defense is what makes it work.</a:t>
+              <a:t>In 5 of those 8 the attack does almost nothing to a model with no defense at all. The defense is what makes it work.</a:t>
             </a:r>
           </a:p>
           <a:p>
@@ -11319,7 +11321,7 @@
                 </a:solidFill>
                 <a:latin typeface="Calibri"/>
               </a:rPr>
-              <a:t>WHERE WE ARE NOW</a:t>
+              <a:t>THE RESULT, CONTINUED</a:t>
             </a:r>
           </a:p>
         </p:txBody>
@@ -11361,7 +11363,7 @@
                 </a:solidFill>
                 <a:latin typeface="Cambria"/>
               </a:rPr>
-              <a:t>What is finished and what is still running</a:t>
+              <a:t>The same defense, the same attack, two models</a:t>
             </a:r>
           </a:p>
         </p:txBody>
@@ -11416,8 +11418,50 @@
         </p:nvSpPr>
         <p:spPr>
           <a:xfrm>
-            <a:off x="731520" y="2011680"/>
-            <a:ext cx="1737360" cy="274320"/>
+            <a:off x="731520" y="1874519"/>
+            <a:ext cx="10725912" cy="365760"/>
+          </a:xfrm>
+          <a:prstGeom prst="rect">
+            <a:avLst/>
+          </a:prstGeom>
+          <a:noFill/>
+        </p:spPr>
+        <p:txBody>
+          <a:bodyPr wrap="square" lIns="0" rIns="0" tIns="0" bIns="0" anchor="t">
+            <a:spAutoFit/>
+          </a:bodyPr>
+          <a:lstStyle/>
+          <a:p>
+            <a:pPr algn="l">
+              <a:lnSpc>
+                <a:spcPct val="106000"/>
+              </a:lnSpc>
+              <a:spcAft>
+                <a:spcPts val="0"/>
+              </a:spcAft>
+            </a:pPr>
+            <a:r>
+              <a:rPr sz="1400" b="0" i="0">
+                <a:solidFill>
+                  <a:srgbClr val="444444"/>
+                </a:solidFill>
+                <a:latin typeface="Calibri"/>
+              </a:rPr>
+              <a:t>We repeated pairs on a second model. The answer did not repeat with them.</a:t>
+            </a:r>
+          </a:p>
+        </p:txBody>
+      </p:sp>
+      <p:sp>
+        <p:nvSpPr>
+          <p:cNvPr id="6" name="TextBox 5"/>
+          <p:cNvSpPr txBox="1"/>
+          <p:nvPr/>
+        </p:nvSpPr>
+        <p:spPr>
+          <a:xfrm>
+            <a:off x="731520" y="2304288"/>
+            <a:ext cx="4206240" cy="274320"/>
           </a:xfrm>
           <a:prstGeom prst="rect">
             <a:avLst/>
@@ -11445,21 +11489,21 @@
                 </a:solidFill>
                 <a:latin typeface="Calibri"/>
               </a:rPr>
-              <a:t>DONE</a:t>
-            </a:r>
-          </a:p>
-        </p:txBody>
-      </p:sp>
-      <p:sp>
-        <p:nvSpPr>
-          <p:cNvPr id="6" name="TextBox 5"/>
-          <p:cNvSpPr txBox="1"/>
-          <p:nvPr/>
-        </p:nvSpPr>
-        <p:spPr>
-          <a:xfrm>
-            <a:off x="2468880" y="2011680"/>
-            <a:ext cx="3474720" cy="274320"/>
+              <a:t>DEFENSE AND ATTACK</a:t>
+            </a:r>
+          </a:p>
+        </p:txBody>
+      </p:sp>
+      <p:sp>
+        <p:nvSpPr>
+          <p:cNvPr id="7" name="TextBox 6"/>
+          <p:cNvSpPr txBox="1"/>
+          <p:nvPr/>
+        </p:nvSpPr>
+        <p:spPr>
+          <a:xfrm>
+            <a:off x="4937759" y="2304288"/>
+            <a:ext cx="2011680" cy="274320"/>
           </a:xfrm>
           <a:prstGeom prst="rect">
             <a:avLst/>
@@ -11487,21 +11531,105 @@
                 </a:solidFill>
                 <a:latin typeface="Calibri"/>
               </a:rPr>
-              <a:t/>
-            </a:r>
-          </a:p>
-        </p:txBody>
-      </p:sp>
-      <p:sp>
-        <p:nvSpPr>
-          <p:cNvPr id="7" name="Rectangle 6"/>
+              <a:t>ON LLAMA-3</a:t>
+            </a:r>
+          </a:p>
+        </p:txBody>
+      </p:sp>
+      <p:sp>
+        <p:nvSpPr>
+          <p:cNvPr id="8" name="TextBox 7"/>
+          <p:cNvSpPr txBox="1"/>
+          <p:nvPr/>
+        </p:nvSpPr>
+        <p:spPr>
+          <a:xfrm>
+            <a:off x="6949440" y="2304288"/>
+            <a:ext cx="2011680" cy="274320"/>
+          </a:xfrm>
+          <a:prstGeom prst="rect">
+            <a:avLst/>
+          </a:prstGeom>
+          <a:noFill/>
+        </p:spPr>
+        <p:txBody>
+          <a:bodyPr wrap="square" lIns="0" rIns="0" tIns="0" bIns="0" anchor="t">
+            <a:spAutoFit/>
+          </a:bodyPr>
+          <a:lstStyle/>
+          <a:p>
+            <a:pPr algn="l">
+              <a:lnSpc>
+                <a:spcPct val="106000"/>
+              </a:lnSpc>
+              <a:spcAft>
+                <a:spcPts val="0"/>
+              </a:spcAft>
+            </a:pPr>
+            <a:r>
+              <a:rPr sz="1000" b="1" i="0">
+                <a:solidFill>
+                  <a:srgbClr val="777777"/>
+                </a:solidFill>
+                <a:latin typeface="Calibri"/>
+              </a:rPr>
+              <a:t>ON MISTRAL</a:t>
+            </a:r>
+          </a:p>
+        </p:txBody>
+      </p:sp>
+      <p:sp>
+        <p:nvSpPr>
+          <p:cNvPr id="9" name="TextBox 8"/>
+          <p:cNvSpPr txBox="1"/>
+          <p:nvPr/>
+        </p:nvSpPr>
+        <p:spPr>
+          <a:xfrm>
+            <a:off x="8961120" y="2304288"/>
+            <a:ext cx="2468880" cy="274320"/>
+          </a:xfrm>
+          <a:prstGeom prst="rect">
+            <a:avLst/>
+          </a:prstGeom>
+          <a:noFill/>
+        </p:spPr>
+        <p:txBody>
+          <a:bodyPr wrap="square" lIns="0" rIns="0" tIns="0" bIns="0" anchor="t">
+            <a:spAutoFit/>
+          </a:bodyPr>
+          <a:lstStyle/>
+          <a:p>
+            <a:pPr algn="l">
+              <a:lnSpc>
+                <a:spcPct val="106000"/>
+              </a:lnSpc>
+              <a:spcAft>
+                <a:spcPts val="0"/>
+              </a:spcAft>
+            </a:pPr>
+            <a:r>
+              <a:rPr sz="1000" b="1" i="0">
+                <a:solidFill>
+                  <a:srgbClr val="777777"/>
+                </a:solidFill>
+                <a:latin typeface="Calibri"/>
+              </a:rPr>
+              <a:t>WHAT MOVED</a:t>
+            </a:r>
+          </a:p>
+        </p:txBody>
+      </p:sp>
+      <p:sp>
+        <p:nvSpPr>
+          <p:cNvPr id="10" name="Rectangle 9"/>
           <p:cNvSpPr/>
           <p:nvPr/>
         </p:nvSpPr>
         <p:spPr>
           <a:xfrm>
-            <a:off x="731520" y="2286000"/>
-            <a:ext cx="5212079" cy="9525"/>
+            <a:off x="731520" y="2578608"/>
+            <a:ext cx="10698480" cy="9525"/>
           </a:xfrm>
           <a:prstGeom prst="rect">
             <a:avLst/>
@@ -11538,168 +11666,42 @@
       </p:sp>
       <p:sp>
         <p:nvSpPr>
-          <p:cNvPr id="8" name="TextBox 7"/>
-          <p:cNvSpPr txBox="1"/>
-          <p:nvPr/>
-        </p:nvSpPr>
-        <p:spPr>
-          <a:xfrm>
-            <a:off x="731520" y="2395728"/>
-            <a:ext cx="1737360" cy="310896"/>
-          </a:xfrm>
-          <a:prstGeom prst="rect">
-            <a:avLst/>
-          </a:prstGeom>
-          <a:noFill/>
-        </p:spPr>
-        <p:txBody>
-          <a:bodyPr wrap="square" lIns="0" rIns="0" tIns="0" bIns="0" anchor="t">
-            <a:spAutoFit/>
-          </a:bodyPr>
-          <a:lstStyle/>
-          <a:p>
-            <a:pPr algn="l">
-              <a:lnSpc>
-                <a:spcPct val="106000"/>
-              </a:lnSpc>
-              <a:spcAft>
-                <a:spcPts val="0"/>
-              </a:spcAft>
-            </a:pPr>
-            <a:r>
-              <a:rPr sz="1300" b="0" i="0">
-                <a:solidFill>
-                  <a:srgbClr val="444444"/>
-                </a:solidFill>
-                <a:latin typeface="Calibri"/>
-              </a:rPr>
-              <a:t>1 cell</a:t>
-            </a:r>
-          </a:p>
-        </p:txBody>
-      </p:sp>
-      <p:sp>
-        <p:nvSpPr>
-          <p:cNvPr id="9" name="TextBox 8"/>
-          <p:cNvSpPr txBox="1"/>
-          <p:nvPr/>
-        </p:nvSpPr>
-        <p:spPr>
-          <a:xfrm>
-            <a:off x="2468880" y="2395728"/>
-            <a:ext cx="3474720" cy="310896"/>
-          </a:xfrm>
-          <a:prstGeom prst="rect">
-            <a:avLst/>
-          </a:prstGeom>
-          <a:noFill/>
-        </p:spPr>
-        <p:txBody>
-          <a:bodyPr wrap="square" lIns="0" rIns="0" tIns="0" bIns="0" anchor="t">
-            <a:spAutoFit/>
-          </a:bodyPr>
-          <a:lstStyle/>
-          <a:p>
-            <a:pPr algn="l">
-              <a:lnSpc>
-                <a:spcPct val="106000"/>
-              </a:lnSpc>
-              <a:spcAft>
-                <a:spcPts val="0"/>
-              </a:spcAft>
-            </a:pPr>
-            <a:r>
-              <a:rPr sz="1300" b="0" i="0">
-                <a:solidFill>
-                  <a:srgbClr val="444444"/>
-                </a:solidFill>
-                <a:latin typeface="Calibri"/>
-              </a:rPr>
-              <a:t>worked through: the retrieved document, answering from false content</a:t>
-            </a:r>
-          </a:p>
-        </p:txBody>
-      </p:sp>
-      <p:sp>
-        <p:nvSpPr>
-          <p:cNvPr id="10" name="TextBox 9"/>
-          <p:cNvSpPr txBox="1"/>
-          <p:nvPr/>
-        </p:nvSpPr>
-        <p:spPr>
-          <a:xfrm>
-            <a:off x="731520" y="2944368"/>
-            <a:ext cx="1737360" cy="310896"/>
-          </a:xfrm>
-          <a:prstGeom prst="rect">
-            <a:avLst/>
-          </a:prstGeom>
-          <a:noFill/>
-        </p:spPr>
-        <p:txBody>
-          <a:bodyPr wrap="square" lIns="0" rIns="0" tIns="0" bIns="0" anchor="t">
-            <a:spAutoFit/>
-          </a:bodyPr>
-          <a:lstStyle/>
-          <a:p>
-            <a:pPr algn="l">
-              <a:lnSpc>
-                <a:spcPct val="106000"/>
-              </a:lnSpc>
-              <a:spcAft>
-                <a:spcPts val="0"/>
-              </a:spcAft>
-            </a:pPr>
-            <a:r>
-              <a:rPr sz="1300" b="0" i="0">
-                <a:solidFill>
-                  <a:srgbClr val="444444"/>
-                </a:solidFill>
-                <a:latin typeface="Calibri"/>
-              </a:rPr>
-              <a:t>19 pairs</a:t>
-            </a:r>
-          </a:p>
-        </p:txBody>
-      </p:sp>
-      <p:sp>
-        <p:nvSpPr>
           <p:cNvPr id="11" name="TextBox 10"/>
           <p:cNvSpPr txBox="1"/>
           <p:nvPr/>
         </p:nvSpPr>
         <p:spPr>
           <a:xfrm>
-            <a:off x="2468880" y="2944368"/>
-            <a:ext cx="3474720" cy="310896"/>
-          </a:xfrm>
-          <a:prstGeom prst="rect">
-            <a:avLst/>
-          </a:prstGeom>
-          <a:noFill/>
-        </p:spPr>
-        <p:txBody>
-          <a:bodyPr wrap="square" lIns="0" rIns="0" tIns="0" bIns="0" anchor="t">
-            <a:spAutoFit/>
-          </a:bodyPr>
-          <a:lstStyle/>
-          <a:p>
-            <a:pPr algn="l">
-              <a:lnSpc>
-                <a:spcPct val="106000"/>
-              </a:lnSpc>
-              <a:spcAft>
-                <a:spcPts val="0"/>
-              </a:spcAft>
-            </a:pPr>
-            <a:r>
-              <a:rPr sz="1300" b="0" i="0">
-                <a:solidFill>
-                  <a:srgbClr val="444444"/>
-                </a:solidFill>
-                <a:latin typeface="Calibri"/>
-              </a:rPr>
-              <a:t>measured, none of them previously tested</a:t>
+            <a:off x="731520" y="2688336"/>
+            <a:ext cx="4206240" cy="310896"/>
+          </a:xfrm>
+          <a:prstGeom prst="rect">
+            <a:avLst/>
+          </a:prstGeom>
+          <a:noFill/>
+        </p:spPr>
+        <p:txBody>
+          <a:bodyPr wrap="square" lIns="0" rIns="0" tIns="0" bIns="0" anchor="t">
+            <a:spAutoFit/>
+          </a:bodyPr>
+          <a:lstStyle/>
+          <a:p>
+            <a:pPr algn="l">
+              <a:lnSpc>
+                <a:spcPct val="106000"/>
+              </a:lnSpc>
+              <a:spcAft>
+                <a:spcPts val="0"/>
+              </a:spcAft>
+            </a:pPr>
+            <a:r>
+              <a:rPr sz="1350" b="0" i="0">
+                <a:solidFill>
+                  <a:srgbClr val="444444"/>
+                </a:solidFill>
+                <a:latin typeface="Calibri"/>
+              </a:rPr>
+              <a:t>Context-reliance vs tone steering</a:t>
             </a:r>
           </a:p>
         </p:txBody>
@@ -11712,36 +11714,36 @@
         </p:nvSpPr>
         <p:spPr>
           <a:xfrm>
-            <a:off x="731520" y="3493008"/>
-            <a:ext cx="1737360" cy="310896"/>
-          </a:xfrm>
-          <a:prstGeom prst="rect">
-            <a:avLst/>
-          </a:prstGeom>
-          <a:noFill/>
-        </p:spPr>
-        <p:txBody>
-          <a:bodyPr wrap="square" lIns="0" rIns="0" tIns="0" bIns="0" anchor="t">
-            <a:spAutoFit/>
-          </a:bodyPr>
-          <a:lstStyle/>
-          <a:p>
-            <a:pPr algn="l">
-              <a:lnSpc>
-                <a:spcPct val="106000"/>
-              </a:lnSpc>
-              <a:spcAft>
-                <a:spcPts val="0"/>
-              </a:spcAft>
-            </a:pPr>
-            <a:r>
-              <a:rPr sz="1300" b="0" i="0">
-                <a:solidFill>
-                  <a:srgbClr val="444444"/>
-                </a:solidFill>
-                <a:latin typeface="Calibri"/>
-              </a:rPr>
-              <a:t>3 models</a:t>
+            <a:off x="4937759" y="2688336"/>
+            <a:ext cx="2011680" cy="310896"/>
+          </a:xfrm>
+          <a:prstGeom prst="rect">
+            <a:avLst/>
+          </a:prstGeom>
+          <a:noFill/>
+        </p:spPr>
+        <p:txBody>
+          <a:bodyPr wrap="square" lIns="0" rIns="0" tIns="0" bIns="0" anchor="t">
+            <a:spAutoFit/>
+          </a:bodyPr>
+          <a:lstStyle/>
+          <a:p>
+            <a:pPr algn="l">
+              <a:lnSpc>
+                <a:spcPct val="106000"/>
+              </a:lnSpc>
+              <a:spcAft>
+                <a:spcPts val="0"/>
+              </a:spcAft>
+            </a:pPr>
+            <a:r>
+              <a:rPr sz="1350" b="0" i="0">
+                <a:solidFill>
+                  <a:srgbClr val="444444"/>
+                </a:solidFill>
+                <a:latin typeface="Calibri"/>
+              </a:rPr>
+              <a:t>+95 pts worse</a:t>
             </a:r>
           </a:p>
         </p:txBody>
@@ -11754,36 +11756,36 @@
         </p:nvSpPr>
         <p:spPr>
           <a:xfrm>
-            <a:off x="2468880" y="3493008"/>
-            <a:ext cx="3474720" cy="310896"/>
-          </a:xfrm>
-          <a:prstGeom prst="rect">
-            <a:avLst/>
-          </a:prstGeom>
-          <a:noFill/>
-        </p:spPr>
-        <p:txBody>
-          <a:bodyPr wrap="square" lIns="0" rIns="0" tIns="0" bIns="0" anchor="t">
-            <a:spAutoFit/>
-          </a:bodyPr>
-          <a:lstStyle/>
-          <a:p>
-            <a:pPr algn="l">
-              <a:lnSpc>
-                <a:spcPct val="106000"/>
-              </a:lnSpc>
-              <a:spcAft>
-                <a:spcPts val="0"/>
-              </a:spcAft>
-            </a:pPr>
-            <a:r>
-              <a:rPr sz="1300" b="0" i="0">
-                <a:solidFill>
-                  <a:srgbClr val="444444"/>
-                </a:solidFill>
-                <a:latin typeface="Calibri"/>
-              </a:rPr>
-              <a:t>including a controlled repeat of the same pair on a second model</a:t>
+            <a:off x="6949440" y="2688336"/>
+            <a:ext cx="2011680" cy="310896"/>
+          </a:xfrm>
+          <a:prstGeom prst="rect">
+            <a:avLst/>
+          </a:prstGeom>
+          <a:noFill/>
+        </p:spPr>
+        <p:txBody>
+          <a:bodyPr wrap="square" lIns="0" rIns="0" tIns="0" bIns="0" anchor="t">
+            <a:spAutoFit/>
+          </a:bodyPr>
+          <a:lstStyle/>
+          <a:p>
+            <a:pPr algn="l">
+              <a:lnSpc>
+                <a:spcPct val="106000"/>
+              </a:lnSpc>
+              <a:spcAft>
+                <a:spcPts val="0"/>
+              </a:spcAft>
+            </a:pPr>
+            <a:r>
+              <a:rPr sz="1350" b="0" i="0">
+                <a:solidFill>
+                  <a:srgbClr val="444444"/>
+                </a:solidFill>
+                <a:latin typeface="Calibri"/>
+              </a:rPr>
+              <a:t>+20 pts worse</a:t>
             </a:r>
           </a:p>
         </p:txBody>
@@ -11796,8 +11798,633 @@
         </p:nvSpPr>
         <p:spPr>
           <a:xfrm>
-            <a:off x="731520" y="4114800"/>
-            <a:ext cx="1737360" cy="274320"/>
+            <a:off x="8961120" y="2688336"/>
+            <a:ext cx="2468880" cy="310896"/>
+          </a:xfrm>
+          <a:prstGeom prst="rect">
+            <a:avLst/>
+          </a:prstGeom>
+          <a:noFill/>
+        </p:spPr>
+        <p:txBody>
+          <a:bodyPr wrap="square" lIns="0" rIns="0" tIns="0" bIns="0" anchor="t">
+            <a:spAutoFit/>
+          </a:bodyPr>
+          <a:lstStyle/>
+          <a:p>
+            <a:pPr algn="l">
+              <a:lnSpc>
+                <a:spcPct val="106000"/>
+              </a:lnSpc>
+              <a:spcAft>
+                <a:spcPts val="0"/>
+              </a:spcAft>
+            </a:pPr>
+            <a:r>
+              <a:rPr sz="1350" b="0" i="0">
+                <a:solidFill>
+                  <a:srgbClr val="444444"/>
+                </a:solidFill>
+                <a:latin typeface="Calibri"/>
+              </a:rPr>
+              <a:t>the size of the harm</a:t>
+            </a:r>
+          </a:p>
+        </p:txBody>
+      </p:sp>
+      <p:sp>
+        <p:nvSpPr>
+          <p:cNvPr id="15" name="TextBox 14"/>
+          <p:cNvSpPr txBox="1"/>
+          <p:nvPr/>
+        </p:nvSpPr>
+        <p:spPr>
+          <a:xfrm>
+            <a:off x="731520" y="3346704"/>
+            <a:ext cx="4206240" cy="310896"/>
+          </a:xfrm>
+          <a:prstGeom prst="rect">
+            <a:avLst/>
+          </a:prstGeom>
+          <a:noFill/>
+        </p:spPr>
+        <p:txBody>
+          <a:bodyPr wrap="square" lIns="0" rIns="0" tIns="0" bIns="0" anchor="t">
+            <a:spAutoFit/>
+          </a:bodyPr>
+          <a:lstStyle/>
+          <a:p>
+            <a:pPr algn="l">
+              <a:lnSpc>
+                <a:spcPct val="106000"/>
+              </a:lnSpc>
+              <a:spcAft>
+                <a:spcPts val="0"/>
+              </a:spcAft>
+            </a:pPr>
+            <a:r>
+              <a:rPr sz="1350" b="0" i="0">
+                <a:solidFill>
+                  <a:srgbClr val="444444"/>
+                </a:solidFill>
+                <a:latin typeface="Calibri"/>
+              </a:rPr>
+              <a:t>Aggregation vs forced refusal</a:t>
+            </a:r>
+          </a:p>
+        </p:txBody>
+      </p:sp>
+      <p:sp>
+        <p:nvSpPr>
+          <p:cNvPr id="16" name="TextBox 15"/>
+          <p:cNvSpPr txBox="1"/>
+          <p:nvPr/>
+        </p:nvSpPr>
+        <p:spPr>
+          <a:xfrm>
+            <a:off x="4937759" y="3346704"/>
+            <a:ext cx="2011680" cy="310896"/>
+          </a:xfrm>
+          <a:prstGeom prst="rect">
+            <a:avLst/>
+          </a:prstGeom>
+          <a:noFill/>
+        </p:spPr>
+        <p:txBody>
+          <a:bodyPr wrap="square" lIns="0" rIns="0" tIns="0" bIns="0" anchor="t">
+            <a:spAutoFit/>
+          </a:bodyPr>
+          <a:lstStyle/>
+          <a:p>
+            <a:pPr algn="l">
+              <a:lnSpc>
+                <a:spcPct val="106000"/>
+              </a:lnSpc>
+              <a:spcAft>
+                <a:spcPts val="0"/>
+              </a:spcAft>
+            </a:pPr>
+            <a:r>
+              <a:rPr sz="1350" b="0" i="0">
+                <a:solidFill>
+                  <a:srgbClr val="444444"/>
+                </a:solidFill>
+                <a:latin typeface="Calibri"/>
+              </a:rPr>
+              <a:t>+85 pts worse</a:t>
+            </a:r>
+          </a:p>
+        </p:txBody>
+      </p:sp>
+      <p:sp>
+        <p:nvSpPr>
+          <p:cNvPr id="17" name="TextBox 16"/>
+          <p:cNvSpPr txBox="1"/>
+          <p:nvPr/>
+        </p:nvSpPr>
+        <p:spPr>
+          <a:xfrm>
+            <a:off x="6949440" y="3346704"/>
+            <a:ext cx="2011680" cy="310896"/>
+          </a:xfrm>
+          <a:prstGeom prst="rect">
+            <a:avLst/>
+          </a:prstGeom>
+          <a:noFill/>
+        </p:spPr>
+        <p:txBody>
+          <a:bodyPr wrap="square" lIns="0" rIns="0" tIns="0" bIns="0" anchor="t">
+            <a:spAutoFit/>
+          </a:bodyPr>
+          <a:lstStyle/>
+          <a:p>
+            <a:pPr algn="l">
+              <a:lnSpc>
+                <a:spcPct val="106000"/>
+              </a:lnSpc>
+              <a:spcAft>
+                <a:spcPts val="0"/>
+              </a:spcAft>
+            </a:pPr>
+            <a:r>
+              <a:rPr sz="1350" b="0" i="0">
+                <a:solidFill>
+                  <a:srgbClr val="444444"/>
+                </a:solidFill>
+                <a:latin typeface="Calibri"/>
+              </a:rPr>
+              <a:t>no readable effect</a:t>
+            </a:r>
+          </a:p>
+        </p:txBody>
+      </p:sp>
+      <p:sp>
+        <p:nvSpPr>
+          <p:cNvPr id="18" name="TextBox 17"/>
+          <p:cNvSpPr txBox="1"/>
+          <p:nvPr/>
+        </p:nvSpPr>
+        <p:spPr>
+          <a:xfrm>
+            <a:off x="8961120" y="3346704"/>
+            <a:ext cx="2468880" cy="310896"/>
+          </a:xfrm>
+          <a:prstGeom prst="rect">
+            <a:avLst/>
+          </a:prstGeom>
+          <a:noFill/>
+        </p:spPr>
+        <p:txBody>
+          <a:bodyPr wrap="square" lIns="0" rIns="0" tIns="0" bIns="0" anchor="t">
+            <a:spAutoFit/>
+          </a:bodyPr>
+          <a:lstStyle/>
+          <a:p>
+            <a:pPr algn="l">
+              <a:lnSpc>
+                <a:spcPct val="106000"/>
+              </a:lnSpc>
+              <a:spcAft>
+                <a:spcPts val="0"/>
+              </a:spcAft>
+            </a:pPr>
+            <a:r>
+              <a:rPr sz="1350" b="0" i="0">
+                <a:solidFill>
+                  <a:srgbClr val="444444"/>
+                </a:solidFill>
+                <a:latin typeface="Calibri"/>
+              </a:rPr>
+              <a:t>whether it happens at all</a:t>
+            </a:r>
+          </a:p>
+        </p:txBody>
+      </p:sp>
+      <p:sp>
+        <p:nvSpPr>
+          <p:cNvPr id="19" name="TextBox 18"/>
+          <p:cNvSpPr txBox="1"/>
+          <p:nvPr/>
+        </p:nvSpPr>
+        <p:spPr>
+          <a:xfrm>
+            <a:off x="731520" y="4005072"/>
+            <a:ext cx="4206240" cy="310896"/>
+          </a:xfrm>
+          <a:prstGeom prst="rect">
+            <a:avLst/>
+          </a:prstGeom>
+          <a:noFill/>
+        </p:spPr>
+        <p:txBody>
+          <a:bodyPr wrap="square" lIns="0" rIns="0" tIns="0" bIns="0" anchor="t">
+            <a:spAutoFit/>
+          </a:bodyPr>
+          <a:lstStyle/>
+          <a:p>
+            <a:pPr algn="l">
+              <a:lnSpc>
+                <a:spcPct val="106000"/>
+              </a:lnSpc>
+              <a:spcAft>
+                <a:spcPts val="0"/>
+              </a:spcAft>
+            </a:pPr>
+            <a:r>
+              <a:rPr sz="1350" b="0" i="0">
+                <a:solidFill>
+                  <a:srgbClr val="444444"/>
+                </a:solidFill>
+                <a:latin typeface="Calibri"/>
+              </a:rPr>
+              <a:t>Context-reliance vs false answers</a:t>
+            </a:r>
+          </a:p>
+        </p:txBody>
+      </p:sp>
+      <p:sp>
+        <p:nvSpPr>
+          <p:cNvPr id="20" name="TextBox 19"/>
+          <p:cNvSpPr txBox="1"/>
+          <p:nvPr/>
+        </p:nvSpPr>
+        <p:spPr>
+          <a:xfrm>
+            <a:off x="4937759" y="4005072"/>
+            <a:ext cx="2011680" cy="310896"/>
+          </a:xfrm>
+          <a:prstGeom prst="rect">
+            <a:avLst/>
+          </a:prstGeom>
+          <a:noFill/>
+        </p:spPr>
+        <p:txBody>
+          <a:bodyPr wrap="square" lIns="0" rIns="0" tIns="0" bIns="0" anchor="t">
+            <a:spAutoFit/>
+          </a:bodyPr>
+          <a:lstStyle/>
+          <a:p>
+            <a:pPr algn="l">
+              <a:lnSpc>
+                <a:spcPct val="106000"/>
+              </a:lnSpc>
+              <a:spcAft>
+                <a:spcPts val="0"/>
+              </a:spcAft>
+            </a:pPr>
+            <a:r>
+              <a:rPr sz="1350" b="0" i="0">
+                <a:solidFill>
+                  <a:srgbClr val="444444"/>
+                </a:solidFill>
+                <a:latin typeface="Calibri"/>
+              </a:rPr>
+              <a:t>+9 pts worse</a:t>
+            </a:r>
+          </a:p>
+        </p:txBody>
+      </p:sp>
+      <p:sp>
+        <p:nvSpPr>
+          <p:cNvPr id="21" name="TextBox 20"/>
+          <p:cNvSpPr txBox="1"/>
+          <p:nvPr/>
+        </p:nvSpPr>
+        <p:spPr>
+          <a:xfrm>
+            <a:off x="6949440" y="4005072"/>
+            <a:ext cx="2011680" cy="310896"/>
+          </a:xfrm>
+          <a:prstGeom prst="rect">
+            <a:avLst/>
+          </a:prstGeom>
+          <a:noFill/>
+        </p:spPr>
+        <p:txBody>
+          <a:bodyPr wrap="square" lIns="0" rIns="0" tIns="0" bIns="0" anchor="t">
+            <a:spAutoFit/>
+          </a:bodyPr>
+          <a:lstStyle/>
+          <a:p>
+            <a:pPr algn="l">
+              <a:lnSpc>
+                <a:spcPct val="106000"/>
+              </a:lnSpc>
+              <a:spcAft>
+                <a:spcPts val="0"/>
+              </a:spcAft>
+            </a:pPr>
+            <a:r>
+              <a:rPr sz="1350" b="0" i="0">
+                <a:solidFill>
+                  <a:srgbClr val="444444"/>
+                </a:solidFill>
+                <a:latin typeface="Calibri"/>
+              </a:rPr>
+              <a:t>11 pts BETTER</a:t>
+            </a:r>
+          </a:p>
+        </p:txBody>
+      </p:sp>
+      <p:sp>
+        <p:nvSpPr>
+          <p:cNvPr id="22" name="TextBox 21"/>
+          <p:cNvSpPr txBox="1"/>
+          <p:nvPr/>
+        </p:nvSpPr>
+        <p:spPr>
+          <a:xfrm>
+            <a:off x="8961120" y="4005072"/>
+            <a:ext cx="2468880" cy="310896"/>
+          </a:xfrm>
+          <a:prstGeom prst="rect">
+            <a:avLst/>
+          </a:prstGeom>
+          <a:noFill/>
+        </p:spPr>
+        <p:txBody>
+          <a:bodyPr wrap="square" lIns="0" rIns="0" tIns="0" bIns="0" anchor="t">
+            <a:spAutoFit/>
+          </a:bodyPr>
+          <a:lstStyle/>
+          <a:p>
+            <a:pPr algn="l">
+              <a:lnSpc>
+                <a:spcPct val="106000"/>
+              </a:lnSpc>
+              <a:spcAft>
+                <a:spcPts val="0"/>
+              </a:spcAft>
+            </a:pPr>
+            <a:r>
+              <a:rPr sz="1350" b="0" i="0">
+                <a:solidFill>
+                  <a:srgbClr val="444444"/>
+                </a:solidFill>
+                <a:latin typeface="Calibri"/>
+              </a:rPr>
+              <a:t>which way it points</a:t>
+            </a:r>
+          </a:p>
+        </p:txBody>
+      </p:sp>
+      <p:sp>
+        <p:nvSpPr>
+          <p:cNvPr id="23" name="TextBox 22"/>
+          <p:cNvSpPr txBox="1"/>
+          <p:nvPr/>
+        </p:nvSpPr>
+        <p:spPr>
+          <a:xfrm>
+            <a:off x="731520" y="4526280"/>
+            <a:ext cx="10725912" cy="1874519"/>
+          </a:xfrm>
+          <a:prstGeom prst="rect">
+            <a:avLst/>
+          </a:prstGeom>
+          <a:noFill/>
+        </p:spPr>
+        <p:txBody>
+          <a:bodyPr wrap="square" lIns="0" rIns="0" tIns="0" bIns="0" anchor="t">
+            <a:spAutoFit/>
+          </a:bodyPr>
+          <a:lstStyle/>
+          <a:p>
+            <a:pPr algn="l">
+              <a:lnSpc>
+                <a:spcPct val="110000"/>
+              </a:lnSpc>
+              <a:spcAft>
+                <a:spcPts val="900"/>
+              </a:spcAft>
+            </a:pPr>
+            <a:r>
+              <a:rPr sz="1500" b="1" i="0">
+                <a:solidFill>
+                  <a:srgbClr val="111111"/>
+                </a:solidFill>
+                <a:latin typeface="Calibri"/>
+              </a:rPr>
+              <a:t>In the last row the same defense stops the attack on one model and helps it on the other. Not a smaller effect. The opposite effect.</a:t>
+            </a:r>
+          </a:p>
+          <a:p>
+            <a:pPr>
+              <a:lnSpc>
+                <a:spcPct val="110000"/>
+              </a:lnSpc>
+              <a:spcAft>
+                <a:spcPts val="900"/>
+              </a:spcAft>
+            </a:pPr>
+            <a:r>
+              <a:rPr sz="1500" b="0" i="0">
+                <a:solidFill>
+                  <a:srgbClr val="444444"/>
+                </a:solidFill>
+                <a:latin typeface="Calibri"/>
+              </a:rPr>
+              <a:t>So a result from one model is one measurement, not a property of the defense. Almost every paper in our map reports one model.</a:t>
+            </a:r>
+          </a:p>
+        </p:txBody>
+      </p:sp>
+    </p:spTree>
+  </p:cSld>
+  <p:clrMapOvr>
+    <a:masterClrMapping/>
+  </p:clrMapOvr>
+</p:sld>
+</file>
+
+<file path=ppt/slides/slide18.xml><?xml version="1.0" encoding="utf-8"?>
+<p:sld xmlns:a="http://schemas.openxmlformats.org/drawingml/2006/main" xmlns:p="http://schemas.openxmlformats.org/presentationml/2006/main" xmlns:r="http://schemas.openxmlformats.org/officeDocument/2006/relationships">
+  <p:cSld>
+    <p:spTree>
+      <p:nvGrpSpPr>
+        <p:cNvPr id="1" name=""/>
+        <p:cNvGrpSpPr/>
+        <p:nvPr/>
+      </p:nvGrpSpPr>
+      <p:grpSpPr/>
+      <p:sp>
+        <p:nvSpPr>
+          <p:cNvPr id="2" name="TextBox 1"/>
+          <p:cNvSpPr txBox="1"/>
+          <p:nvPr/>
+        </p:nvSpPr>
+        <p:spPr>
+          <a:xfrm>
+            <a:off x="731520" y="475488"/>
+            <a:ext cx="10725912" cy="274320"/>
+          </a:xfrm>
+          <a:prstGeom prst="rect">
+            <a:avLst/>
+          </a:prstGeom>
+          <a:noFill/>
+        </p:spPr>
+        <p:txBody>
+          <a:bodyPr wrap="square" lIns="0" rIns="0" tIns="0" bIns="0" anchor="t">
+            <a:spAutoFit/>
+          </a:bodyPr>
+          <a:lstStyle/>
+          <a:p>
+            <a:pPr algn="l">
+              <a:lnSpc>
+                <a:spcPct val="106000"/>
+              </a:lnSpc>
+              <a:spcAft>
+                <a:spcPts val="0"/>
+              </a:spcAft>
+            </a:pPr>
+            <a:r>
+              <a:rPr sz="1050" b="1" i="0">
+                <a:solidFill>
+                  <a:srgbClr val="777777"/>
+                </a:solidFill>
+                <a:latin typeface="Calibri"/>
+              </a:rPr>
+              <a:t>WHY IT HAPPENS</a:t>
+            </a:r>
+          </a:p>
+        </p:txBody>
+      </p:sp>
+      <p:sp>
+        <p:nvSpPr>
+          <p:cNvPr id="3" name="TextBox 2"/>
+          <p:cNvSpPr txBox="1"/>
+          <p:nvPr/>
+        </p:nvSpPr>
+        <p:spPr>
+          <a:xfrm>
+            <a:off x="731520" y="841248"/>
+            <a:ext cx="10725912" cy="868680"/>
+          </a:xfrm>
+          <a:prstGeom prst="rect">
+            <a:avLst/>
+          </a:prstGeom>
+          <a:noFill/>
+        </p:spPr>
+        <p:txBody>
+          <a:bodyPr wrap="square" lIns="0" rIns="0" tIns="0" bIns="0" anchor="t">
+            <a:spAutoFit/>
+          </a:bodyPr>
+          <a:lstStyle/>
+          <a:p>
+            <a:pPr algn="l">
+              <a:lnSpc>
+                <a:spcPct val="102000"/>
+              </a:lnSpc>
+              <a:spcAft>
+                <a:spcPts val="0"/>
+              </a:spcAft>
+            </a:pPr>
+            <a:r>
+              <a:rPr sz="2800" b="1" i="0">
+                <a:solidFill>
+                  <a:srgbClr val="111111"/>
+                </a:solidFill>
+                <a:latin typeface="Cambria"/>
+              </a:rPr>
+              <a:t>A cheap test predicts it. Two guesses failed.</a:t>
+            </a:r>
+          </a:p>
+        </p:txBody>
+      </p:sp>
+      <p:sp>
+        <p:nvSpPr>
+          <p:cNvPr id="4" name="TextBox 3"/>
+          <p:cNvSpPr txBox="1"/>
+          <p:nvPr/>
+        </p:nvSpPr>
+        <p:spPr>
+          <a:xfrm>
+            <a:off x="11201400" y="6419088"/>
+            <a:ext cx="457200" cy="274320"/>
+          </a:xfrm>
+          <a:prstGeom prst="rect">
+            <a:avLst/>
+          </a:prstGeom>
+          <a:noFill/>
+        </p:spPr>
+        <p:txBody>
+          <a:bodyPr wrap="square" lIns="0" rIns="0" tIns="0" bIns="0" anchor="t">
+            <a:spAutoFit/>
+          </a:bodyPr>
+          <a:lstStyle/>
+          <a:p>
+            <a:pPr algn="r">
+              <a:lnSpc>
+                <a:spcPct val="106000"/>
+              </a:lnSpc>
+              <a:spcAft>
+                <a:spcPts val="0"/>
+              </a:spcAft>
+            </a:pPr>
+            <a:r>
+              <a:rPr sz="900" b="0" i="0">
+                <a:solidFill>
+                  <a:srgbClr val="999999"/>
+                </a:solidFill>
+                <a:latin typeface="Calibri"/>
+              </a:rPr>
+              <a:t>18</a:t>
+            </a:r>
+          </a:p>
+        </p:txBody>
+      </p:sp>
+      <p:sp>
+        <p:nvSpPr>
+          <p:cNvPr id="5" name="TextBox 4"/>
+          <p:cNvSpPr txBox="1"/>
+          <p:nvPr/>
+        </p:nvSpPr>
+        <p:spPr>
+          <a:xfrm>
+            <a:off x="731520" y="1874519"/>
+            <a:ext cx="10725912" cy="4526280"/>
+          </a:xfrm>
+          <a:prstGeom prst="rect">
+            <a:avLst/>
+          </a:prstGeom>
+          <a:noFill/>
+        </p:spPr>
+        <p:txBody>
+          <a:bodyPr wrap="square" lIns="0" rIns="0" tIns="0" bIns="0" anchor="t">
+            <a:spAutoFit/>
+          </a:bodyPr>
+          <a:lstStyle/>
+          <a:p>
+            <a:pPr algn="l">
+              <a:lnSpc>
+                <a:spcPct val="110000"/>
+              </a:lnSpc>
+              <a:spcAft>
+                <a:spcPts val="600"/>
+              </a:spcAft>
+            </a:pPr>
+            <a:r>
+              <a:rPr sz="1500" b="1" i="0">
+                <a:solidFill>
+                  <a:srgbClr val="111111"/>
+                </a:solidFill>
+                <a:latin typeface="Calibri"/>
+              </a:rPr>
+              <a:t>An aggregating defense reads each passage on its own. So we measured what each model does when shown one poisoned passage alone, and compared that with what the defense then did overall.</a:t>
+            </a:r>
+          </a:p>
+        </p:txBody>
+      </p:sp>
+      <p:sp>
+        <p:nvSpPr>
+          <p:cNvPr id="6" name="TextBox 5"/>
+          <p:cNvSpPr txBox="1"/>
+          <p:nvPr/>
+        </p:nvSpPr>
+        <p:spPr>
+          <a:xfrm>
+            <a:off x="731520" y="2651760"/>
+            <a:ext cx="5852160" cy="274320"/>
           </a:xfrm>
           <a:prstGeom prst="rect">
             <a:avLst/>
@@ -11825,21 +12452,21 @@
                 </a:solidFill>
                 <a:latin typeface="Calibri"/>
               </a:rPr>
-              <a:t>RUNNING NOW</a:t>
-            </a:r>
-          </a:p>
-        </p:txBody>
-      </p:sp>
-      <p:sp>
-        <p:nvSpPr>
-          <p:cNvPr id="15" name="TextBox 14"/>
-          <p:cNvSpPr txBox="1"/>
-          <p:nvPr/>
-        </p:nvSpPr>
-        <p:spPr>
-          <a:xfrm>
-            <a:off x="2468880" y="4114800"/>
-            <a:ext cx="3474720" cy="274320"/>
+              <a:t/>
+            </a:r>
+          </a:p>
+        </p:txBody>
+      </p:sp>
+      <p:sp>
+        <p:nvSpPr>
+          <p:cNvPr id="7" name="TextBox 6"/>
+          <p:cNvSpPr txBox="1"/>
+          <p:nvPr/>
+        </p:nvSpPr>
+        <p:spPr>
+          <a:xfrm>
+            <a:off x="6583680" y="2651760"/>
+            <a:ext cx="4846320" cy="274320"/>
           </a:xfrm>
           <a:prstGeom prst="rect">
             <a:avLst/>
@@ -11867,21 +12494,21 @@
                 </a:solidFill>
                 <a:latin typeface="Calibri"/>
               </a:rPr>
-              <a:t/>
-            </a:r>
-          </a:p>
-        </p:txBody>
-      </p:sp>
-      <p:sp>
-        <p:nvSpPr>
-          <p:cNvPr id="16" name="Rectangle 15"/>
+              <a:t>ACROSS FIVE MODELS</a:t>
+            </a:r>
+          </a:p>
+        </p:txBody>
+      </p:sp>
+      <p:sp>
+        <p:nvSpPr>
+          <p:cNvPr id="8" name="Rectangle 7"/>
           <p:cNvSpPr/>
           <p:nvPr/>
         </p:nvSpPr>
         <p:spPr>
           <a:xfrm>
-            <a:off x="731520" y="4389120"/>
-            <a:ext cx="5212079" cy="9525"/>
+            <a:off x="731520" y="2926079"/>
+            <a:ext cx="10698480" cy="9525"/>
           </a:xfrm>
           <a:prstGeom prst="rect">
             <a:avLst/>
@@ -11918,7 +12545,1310 @@
       </p:sp>
       <p:sp>
         <p:nvSpPr>
+          <p:cNvPr id="9" name="TextBox 8"/>
+          <p:cNvSpPr txBox="1"/>
+          <p:nvPr/>
+        </p:nvSpPr>
+        <p:spPr>
+          <a:xfrm>
+            <a:off x="731520" y="3035808"/>
+            <a:ext cx="5852160" cy="310896"/>
+          </a:xfrm>
+          <a:prstGeom prst="rect">
+            <a:avLst/>
+          </a:prstGeom>
+          <a:noFill/>
+        </p:spPr>
+        <p:txBody>
+          <a:bodyPr wrap="square" lIns="0" rIns="0" tIns="0" bIns="0" anchor="t">
+            <a:spAutoFit/>
+          </a:bodyPr>
+          <a:lstStyle/>
+          <a:p>
+            <a:pPr algn="l">
+              <a:lnSpc>
+                <a:spcPct val="106000"/>
+              </a:lnSpc>
+              <a:spcAft>
+                <a:spcPts val="0"/>
+              </a:spcAft>
+            </a:pPr>
+            <a:r>
+              <a:rPr sz="1350" b="0" i="0">
+                <a:solidFill>
+                  <a:srgbClr val="444444"/>
+                </a:solidFill>
+                <a:latin typeface="Calibri"/>
+              </a:rPr>
+              <a:t>One-passage behaviour predicts the defended outcome</a:t>
+            </a:r>
+          </a:p>
+        </p:txBody>
+      </p:sp>
+      <p:sp>
+        <p:nvSpPr>
+          <p:cNvPr id="10" name="TextBox 9"/>
+          <p:cNvSpPr txBox="1"/>
+          <p:nvPr/>
+        </p:nvSpPr>
+        <p:spPr>
+          <a:xfrm>
+            <a:off x="6583680" y="3035808"/>
+            <a:ext cx="4846320" cy="310896"/>
+          </a:xfrm>
+          <a:prstGeom prst="rect">
+            <a:avLst/>
+          </a:prstGeom>
+          <a:noFill/>
+        </p:spPr>
+        <p:txBody>
+          <a:bodyPr wrap="square" lIns="0" rIns="0" tIns="0" bIns="0" anchor="t">
+            <a:spAutoFit/>
+          </a:bodyPr>
+          <a:lstStyle/>
+          <a:p>
+            <a:pPr algn="l">
+              <a:lnSpc>
+                <a:spcPct val="106000"/>
+              </a:lnSpc>
+              <a:spcAft>
+                <a:spcPts val="0"/>
+              </a:spcAft>
+            </a:pPr>
+            <a:r>
+              <a:rPr sz="1350" b="0" i="0">
+                <a:solidFill>
+                  <a:srgbClr val="444444"/>
+                </a:solidFill>
+                <a:latin typeface="Calibri"/>
+              </a:rPr>
+              <a:t>correlation 0.9999</a:t>
+            </a:r>
+          </a:p>
+        </p:txBody>
+      </p:sp>
+      <p:sp>
+        <p:nvSpPr>
+          <p:cNvPr id="11" name="TextBox 10"/>
+          <p:cNvSpPr txBox="1"/>
+          <p:nvPr/>
+        </p:nvSpPr>
+        <p:spPr>
+          <a:xfrm>
+            <a:off x="731520" y="3547872"/>
+            <a:ext cx="5852160" cy="310896"/>
+          </a:xfrm>
+          <a:prstGeom prst="rect">
+            <a:avLst/>
+          </a:prstGeom>
+          <a:noFill/>
+        </p:spPr>
+        <p:txBody>
+          <a:bodyPr wrap="square" lIns="0" rIns="0" tIns="0" bIns="0" anchor="t">
+            <a:spAutoFit/>
+          </a:bodyPr>
+          <a:lstStyle/>
+          <a:p>
+            <a:pPr algn="l">
+              <a:lnSpc>
+                <a:spcPct val="106000"/>
+              </a:lnSpc>
+              <a:spcAft>
+                <a:spcPts val="0"/>
+              </a:spcAft>
+            </a:pPr>
+            <a:r>
+              <a:rPr sz="1350" b="0" i="0">
+                <a:solidFill>
+                  <a:srgbClr val="444444"/>
+                </a:solidFill>
+                <a:latin typeface="Calibri"/>
+              </a:rPr>
+              <a:t>The attack with no defense at all</a:t>
+            </a:r>
+          </a:p>
+        </p:txBody>
+      </p:sp>
+      <p:sp>
+        <p:nvSpPr>
+          <p:cNvPr id="12" name="TextBox 11"/>
+          <p:cNvSpPr txBox="1"/>
+          <p:nvPr/>
+        </p:nvSpPr>
+        <p:spPr>
+          <a:xfrm>
+            <a:off x="6583680" y="3547872"/>
+            <a:ext cx="4846320" cy="310896"/>
+          </a:xfrm>
+          <a:prstGeom prst="rect">
+            <a:avLst/>
+          </a:prstGeom>
+          <a:noFill/>
+        </p:spPr>
+        <p:txBody>
+          <a:bodyPr wrap="square" lIns="0" rIns="0" tIns="0" bIns="0" anchor="t">
+            <a:spAutoFit/>
+          </a:bodyPr>
+          <a:lstStyle/>
+          <a:p>
+            <a:pPr algn="l">
+              <a:lnSpc>
+                <a:spcPct val="106000"/>
+              </a:lnSpc>
+              <a:spcAft>
+                <a:spcPts val="0"/>
+              </a:spcAft>
+            </a:pPr>
+            <a:r>
+              <a:rPr sz="1350" b="0" i="0">
+                <a:solidFill>
+                  <a:srgbClr val="444444"/>
+                </a:solidFill>
+                <a:latin typeface="Calibri"/>
+              </a:rPr>
+              <a:t>0.0%, every model, every time</a:t>
+            </a:r>
+          </a:p>
+        </p:txBody>
+      </p:sp>
+      <p:sp>
+        <p:nvSpPr>
+          <p:cNvPr id="13" name="TextBox 12"/>
+          <p:cNvSpPr txBox="1"/>
+          <p:nvPr/>
+        </p:nvSpPr>
+        <p:spPr>
+          <a:xfrm>
+            <a:off x="731520" y="3840480"/>
+            <a:ext cx="10725912" cy="292608"/>
+          </a:xfrm>
+          <a:prstGeom prst="rect">
+            <a:avLst/>
+          </a:prstGeom>
+          <a:noFill/>
+        </p:spPr>
+        <p:txBody>
+          <a:bodyPr wrap="square" lIns="0" rIns="0" tIns="0" bIns="0" anchor="t">
+            <a:spAutoFit/>
+          </a:bodyPr>
+          <a:lstStyle/>
+          <a:p>
+            <a:pPr algn="l">
+              <a:lnSpc>
+                <a:spcPct val="106000"/>
+              </a:lnSpc>
+              <a:spcAft>
+                <a:spcPts val="800"/>
+              </a:spcAft>
+            </a:pPr>
+            <a:r>
+              <a:rPr sz="1500" b="1" i="0">
+                <a:solidFill>
+                  <a:srgbClr val="111111"/>
+                </a:solidFill>
+                <a:latin typeface="Calibri"/>
+              </a:rPr>
+              <a:t>Two explanations we tested and had to drop</a:t>
+            </a:r>
+          </a:p>
+        </p:txBody>
+      </p:sp>
+      <p:sp>
+        <p:nvSpPr>
+          <p:cNvPr id="14" name="TextBox 13"/>
+          <p:cNvSpPr txBox="1"/>
+          <p:nvPr/>
+        </p:nvSpPr>
+        <p:spPr>
+          <a:xfrm>
+            <a:off x="731520" y="4224528"/>
+            <a:ext cx="4389120" cy="274320"/>
+          </a:xfrm>
+          <a:prstGeom prst="rect">
+            <a:avLst/>
+          </a:prstGeom>
+          <a:noFill/>
+        </p:spPr>
+        <p:txBody>
+          <a:bodyPr wrap="square" lIns="0" rIns="0" tIns="0" bIns="0" anchor="t">
+            <a:spAutoFit/>
+          </a:bodyPr>
+          <a:lstStyle/>
+          <a:p>
+            <a:pPr algn="l">
+              <a:lnSpc>
+                <a:spcPct val="106000"/>
+              </a:lnSpc>
+              <a:spcAft>
+                <a:spcPts val="0"/>
+              </a:spcAft>
+            </a:pPr>
+            <a:r>
+              <a:rPr sz="1000" b="1" i="0">
+                <a:solidFill>
+                  <a:srgbClr val="777777"/>
+                </a:solidFill>
+                <a:latin typeface="Calibri"/>
+              </a:rPr>
+              <a:t>WE EXPECTED</a:t>
+            </a:r>
+          </a:p>
+        </p:txBody>
+      </p:sp>
+      <p:sp>
+        <p:nvSpPr>
+          <p:cNvPr id="15" name="TextBox 14"/>
+          <p:cNvSpPr txBox="1"/>
+          <p:nvPr/>
+        </p:nvSpPr>
+        <p:spPr>
+          <a:xfrm>
+            <a:off x="5120640" y="4224528"/>
+            <a:ext cx="6309360" cy="274320"/>
+          </a:xfrm>
+          <a:prstGeom prst="rect">
+            <a:avLst/>
+          </a:prstGeom>
+          <a:noFill/>
+        </p:spPr>
+        <p:txBody>
+          <a:bodyPr wrap="square" lIns="0" rIns="0" tIns="0" bIns="0" anchor="t">
+            <a:spAutoFit/>
+          </a:bodyPr>
+          <a:lstStyle/>
+          <a:p>
+            <a:pPr algn="l">
+              <a:lnSpc>
+                <a:spcPct val="106000"/>
+              </a:lnSpc>
+              <a:spcAft>
+                <a:spcPts val="0"/>
+              </a:spcAft>
+            </a:pPr>
+            <a:r>
+              <a:rPr sz="1000" b="1" i="0">
+                <a:solidFill>
+                  <a:srgbClr val="777777"/>
+                </a:solidFill>
+                <a:latin typeface="Calibri"/>
+              </a:rPr>
+              <a:t>WHAT HAPPENED</a:t>
+            </a:r>
+          </a:p>
+        </p:txBody>
+      </p:sp>
+      <p:sp>
+        <p:nvSpPr>
+          <p:cNvPr id="16" name="Rectangle 15"/>
+          <p:cNvSpPr/>
+          <p:nvPr/>
+        </p:nvSpPr>
+        <p:spPr>
+          <a:xfrm>
+            <a:off x="731520" y="4498848"/>
+            <a:ext cx="10698480" cy="9525"/>
+          </a:xfrm>
+          <a:prstGeom prst="rect">
+            <a:avLst/>
+          </a:prstGeom>
+          <a:solidFill>
+            <a:srgbClr val="CCCCCC"/>
+          </a:solidFill>
+          <a:ln>
+            <a:noFill/>
+          </a:ln>
+          <a:effectLst/>
+        </p:spPr>
+        <p:style>
+          <a:lnRef idx="1">
+            <a:schemeClr val="accent1"/>
+          </a:lnRef>
+          <a:fillRef idx="3">
+            <a:schemeClr val="accent1"/>
+          </a:fillRef>
+          <a:effectRef idx="2">
+            <a:schemeClr val="accent1"/>
+          </a:effectRef>
+          <a:fontRef idx="minor">
+            <a:schemeClr val="lt1"/>
+          </a:fontRef>
+        </p:style>
+        <p:txBody>
+          <a:bodyPr rtlCol="0" anchor="ctr"/>
+          <a:lstStyle/>
+          <a:p>
+            <a:pPr algn="ctr"/>
+          </a:p>
+        </p:txBody>
+      </p:sp>
+      <p:sp>
+        <p:nvSpPr>
           <p:cNvPr id="17" name="TextBox 16"/>
+          <p:cNvSpPr txBox="1"/>
+          <p:nvPr/>
+        </p:nvSpPr>
+        <p:spPr>
+          <a:xfrm>
+            <a:off x="731520" y="4608576"/>
+            <a:ext cx="4389120" cy="310896"/>
+          </a:xfrm>
+          <a:prstGeom prst="rect">
+            <a:avLst/>
+          </a:prstGeom>
+          <a:noFill/>
+        </p:spPr>
+        <p:txBody>
+          <a:bodyPr wrap="square" lIns="0" rIns="0" tIns="0" bIns="0" anchor="t">
+            <a:spAutoFit/>
+          </a:bodyPr>
+          <a:lstStyle/>
+          <a:p>
+            <a:pPr algn="l">
+              <a:lnSpc>
+                <a:spcPct val="106000"/>
+              </a:lnSpc>
+              <a:spcAft>
+                <a:spcPts val="0"/>
+              </a:spcAft>
+            </a:pPr>
+            <a:r>
+              <a:rPr sz="1300" b="0" i="0">
+                <a:solidFill>
+                  <a:srgbClr val="444444"/>
+                </a:solidFill>
+                <a:latin typeface="Calibri"/>
+              </a:rPr>
+              <a:t>the attack needs a cautious model</a:t>
+            </a:r>
+          </a:p>
+        </p:txBody>
+      </p:sp>
+      <p:sp>
+        <p:nvSpPr>
+          <p:cNvPr id="18" name="TextBox 17"/>
+          <p:cNvSpPr txBox="1"/>
+          <p:nvPr/>
+        </p:nvSpPr>
+        <p:spPr>
+          <a:xfrm>
+            <a:off x="5120640" y="4608576"/>
+            <a:ext cx="6309360" cy="310896"/>
+          </a:xfrm>
+          <a:prstGeom prst="rect">
+            <a:avLst/>
+          </a:prstGeom>
+          <a:noFill/>
+        </p:spPr>
+        <p:txBody>
+          <a:bodyPr wrap="square" lIns="0" rIns="0" tIns="0" bIns="0" anchor="t">
+            <a:spAutoFit/>
+          </a:bodyPr>
+          <a:lstStyle/>
+          <a:p>
+            <a:pPr algn="l">
+              <a:lnSpc>
+                <a:spcPct val="106000"/>
+              </a:lnSpc>
+              <a:spcAft>
+                <a:spcPts val="0"/>
+              </a:spcAft>
+            </a:pPr>
+            <a:r>
+              <a:rPr sz="1300" b="0" i="0">
+                <a:solidFill>
+                  <a:srgbClr val="444444"/>
+                </a:solidFill>
+                <a:latin typeface="Calibri"/>
+              </a:rPr>
+              <a:t>the most safety-trained model we have never falls for it</a:t>
+            </a:r>
+          </a:p>
+        </p:txBody>
+      </p:sp>
+      <p:sp>
+        <p:nvSpPr>
+          <p:cNvPr id="19" name="TextBox 18"/>
+          <p:cNvSpPr txBox="1"/>
+          <p:nvPr/>
+        </p:nvSpPr>
+        <p:spPr>
+          <a:xfrm>
+            <a:off x="731520" y="5138928"/>
+            <a:ext cx="4389120" cy="310896"/>
+          </a:xfrm>
+          <a:prstGeom prst="rect">
+            <a:avLst/>
+          </a:prstGeom>
+          <a:noFill/>
+        </p:spPr>
+        <p:txBody>
+          <a:bodyPr wrap="square" lIns="0" rIns="0" tIns="0" bIns="0" anchor="t">
+            <a:spAutoFit/>
+          </a:bodyPr>
+          <a:lstStyle/>
+          <a:p>
+            <a:pPr algn="l">
+              <a:lnSpc>
+                <a:spcPct val="106000"/>
+              </a:lnSpc>
+              <a:spcAft>
+                <a:spcPts val="0"/>
+              </a:spcAft>
+            </a:pPr>
+            <a:r>
+              <a:rPr sz="1300" b="0" i="0">
+                <a:solidFill>
+                  <a:srgbClr val="444444"/>
+                </a:solidFill>
+                <a:latin typeface="Calibri"/>
+              </a:rPr>
+              <a:t>the attack needs an obedient model</a:t>
+            </a:r>
+          </a:p>
+        </p:txBody>
+      </p:sp>
+      <p:sp>
+        <p:nvSpPr>
+          <p:cNvPr id="20" name="TextBox 19"/>
+          <p:cNvSpPr txBox="1"/>
+          <p:nvPr/>
+        </p:nvSpPr>
+        <p:spPr>
+          <a:xfrm>
+            <a:off x="5120640" y="5138928"/>
+            <a:ext cx="6309360" cy="310896"/>
+          </a:xfrm>
+          <a:prstGeom prst="rect">
+            <a:avLst/>
+          </a:prstGeom>
+          <a:noFill/>
+        </p:spPr>
+        <p:txBody>
+          <a:bodyPr wrap="square" lIns="0" rIns="0" tIns="0" bIns="0" anchor="t">
+            <a:spAutoFit/>
+          </a:bodyPr>
+          <a:lstStyle/>
+          <a:p>
+            <a:pPr algn="l">
+              <a:lnSpc>
+                <a:spcPct val="106000"/>
+              </a:lnSpc>
+              <a:spcAft>
+                <a:spcPts val="0"/>
+              </a:spcAft>
+            </a:pPr>
+            <a:r>
+              <a:rPr sz="1300" b="0" i="0">
+                <a:solidFill>
+                  <a:srgbClr val="444444"/>
+                </a:solidFill>
+                <a:latin typeface="Calibri"/>
+              </a:rPr>
+              <a:t>a model that obeys 70% of planted orders still never falls for it</a:t>
+            </a:r>
+          </a:p>
+        </p:txBody>
+      </p:sp>
+      <p:sp>
+        <p:nvSpPr>
+          <p:cNvPr id="21" name="TextBox 20"/>
+          <p:cNvSpPr txBox="1"/>
+          <p:nvPr/>
+        </p:nvSpPr>
+        <p:spPr>
+          <a:xfrm>
+            <a:off x="731520" y="5394960"/>
+            <a:ext cx="10725912" cy="1005839"/>
+          </a:xfrm>
+          <a:prstGeom prst="rect">
+            <a:avLst/>
+          </a:prstGeom>
+          <a:noFill/>
+        </p:spPr>
+        <p:txBody>
+          <a:bodyPr wrap="square" lIns="0" rIns="0" tIns="0" bIns="0" anchor="t">
+            <a:spAutoFit/>
+          </a:bodyPr>
+          <a:lstStyle/>
+          <a:p>
+            <a:pPr algn="l">
+              <a:lnSpc>
+                <a:spcPct val="110000"/>
+              </a:lnSpc>
+              <a:spcAft>
+                <a:spcPts val="800"/>
+              </a:spcAft>
+            </a:pPr>
+            <a:r>
+              <a:rPr sz="1500" b="1" i="0">
+                <a:solidFill>
+                  <a:srgbClr val="111111"/>
+                </a:solidFill>
+                <a:latin typeface="Calibri"/>
+              </a:rPr>
+              <a:t>What is left is narrower and more useful. The attack needs a model that lets a retrieved document decide whether it answers at all.</a:t>
+            </a:r>
+          </a:p>
+          <a:p>
+            <a:pPr>
+              <a:lnSpc>
+                <a:spcPct val="110000"/>
+              </a:lnSpc>
+              <a:spcAft>
+                <a:spcPts val="800"/>
+              </a:spcAft>
+            </a:pPr>
+            <a:r>
+              <a:rPr sz="1500" b="0" i="0">
+                <a:solidFill>
+                  <a:srgbClr val="444444"/>
+                </a:solidFill>
+                <a:latin typeface="Calibri"/>
+              </a:rPr>
+              <a:t>That is one cheap test away, and it is not the same thing as being safe. The safest model here is the one the attack cannot touch.</a:t>
+            </a:r>
+          </a:p>
+        </p:txBody>
+      </p:sp>
+    </p:spTree>
+  </p:cSld>
+  <p:clrMapOvr>
+    <a:masterClrMapping/>
+  </p:clrMapOvr>
+</p:sld>
+</file>
+
+<file path=ppt/slides/slide19.xml><?xml version="1.0" encoding="utf-8"?>
+<p:sld xmlns:a="http://schemas.openxmlformats.org/drawingml/2006/main" xmlns:p="http://schemas.openxmlformats.org/presentationml/2006/main" xmlns:r="http://schemas.openxmlformats.org/officeDocument/2006/relationships">
+  <p:cSld>
+    <p:spTree>
+      <p:nvGrpSpPr>
+        <p:cNvPr id="1" name=""/>
+        <p:cNvGrpSpPr/>
+        <p:nvPr/>
+      </p:nvGrpSpPr>
+      <p:grpSpPr/>
+      <p:sp>
+        <p:nvSpPr>
+          <p:cNvPr id="2" name="TextBox 1"/>
+          <p:cNvSpPr txBox="1"/>
+          <p:nvPr/>
+        </p:nvSpPr>
+        <p:spPr>
+          <a:xfrm>
+            <a:off x="731520" y="475488"/>
+            <a:ext cx="10725912" cy="274320"/>
+          </a:xfrm>
+          <a:prstGeom prst="rect">
+            <a:avLst/>
+          </a:prstGeom>
+          <a:noFill/>
+        </p:spPr>
+        <p:txBody>
+          <a:bodyPr wrap="square" lIns="0" rIns="0" tIns="0" bIns="0" anchor="t">
+            <a:spAutoFit/>
+          </a:bodyPr>
+          <a:lstStyle/>
+          <a:p>
+            <a:pPr algn="l">
+              <a:lnSpc>
+                <a:spcPct val="106000"/>
+              </a:lnSpc>
+              <a:spcAft>
+                <a:spcPts val="0"/>
+              </a:spcAft>
+            </a:pPr>
+            <a:r>
+              <a:rPr sz="1050" b="1" i="0">
+                <a:solidFill>
+                  <a:srgbClr val="777777"/>
+                </a:solidFill>
+                <a:latin typeface="Calibri"/>
+              </a:rPr>
+              <a:t>WHERE WE ARE NOW</a:t>
+            </a:r>
+          </a:p>
+        </p:txBody>
+      </p:sp>
+      <p:sp>
+        <p:nvSpPr>
+          <p:cNvPr id="3" name="TextBox 2"/>
+          <p:cNvSpPr txBox="1"/>
+          <p:nvPr/>
+        </p:nvSpPr>
+        <p:spPr>
+          <a:xfrm>
+            <a:off x="731520" y="841248"/>
+            <a:ext cx="10725912" cy="868680"/>
+          </a:xfrm>
+          <a:prstGeom prst="rect">
+            <a:avLst/>
+          </a:prstGeom>
+          <a:noFill/>
+        </p:spPr>
+        <p:txBody>
+          <a:bodyPr wrap="square" lIns="0" rIns="0" tIns="0" bIns="0" anchor="t">
+            <a:spAutoFit/>
+          </a:bodyPr>
+          <a:lstStyle/>
+          <a:p>
+            <a:pPr algn="l">
+              <a:lnSpc>
+                <a:spcPct val="102000"/>
+              </a:lnSpc>
+              <a:spcAft>
+                <a:spcPts val="0"/>
+              </a:spcAft>
+            </a:pPr>
+            <a:r>
+              <a:rPr sz="2800" b="1" i="0">
+                <a:solidFill>
+                  <a:srgbClr val="111111"/>
+                </a:solidFill>
+                <a:latin typeface="Cambria"/>
+              </a:rPr>
+              <a:t>What is finished and what is still running</a:t>
+            </a:r>
+          </a:p>
+        </p:txBody>
+      </p:sp>
+      <p:sp>
+        <p:nvSpPr>
+          <p:cNvPr id="4" name="TextBox 3"/>
+          <p:cNvSpPr txBox="1"/>
+          <p:nvPr/>
+        </p:nvSpPr>
+        <p:spPr>
+          <a:xfrm>
+            <a:off x="11201400" y="6419088"/>
+            <a:ext cx="457200" cy="274320"/>
+          </a:xfrm>
+          <a:prstGeom prst="rect">
+            <a:avLst/>
+          </a:prstGeom>
+          <a:noFill/>
+        </p:spPr>
+        <p:txBody>
+          <a:bodyPr wrap="square" lIns="0" rIns="0" tIns="0" bIns="0" anchor="t">
+            <a:spAutoFit/>
+          </a:bodyPr>
+          <a:lstStyle/>
+          <a:p>
+            <a:pPr algn="r">
+              <a:lnSpc>
+                <a:spcPct val="106000"/>
+              </a:lnSpc>
+              <a:spcAft>
+                <a:spcPts val="0"/>
+              </a:spcAft>
+            </a:pPr>
+            <a:r>
+              <a:rPr sz="900" b="0" i="0">
+                <a:solidFill>
+                  <a:srgbClr val="999999"/>
+                </a:solidFill>
+                <a:latin typeface="Calibri"/>
+              </a:rPr>
+              <a:t>19</a:t>
+            </a:r>
+          </a:p>
+        </p:txBody>
+      </p:sp>
+      <p:sp>
+        <p:nvSpPr>
+          <p:cNvPr id="5" name="TextBox 4"/>
+          <p:cNvSpPr txBox="1"/>
+          <p:nvPr/>
+        </p:nvSpPr>
+        <p:spPr>
+          <a:xfrm>
+            <a:off x="731520" y="2011680"/>
+            <a:ext cx="1737360" cy="274320"/>
+          </a:xfrm>
+          <a:prstGeom prst="rect">
+            <a:avLst/>
+          </a:prstGeom>
+          <a:noFill/>
+        </p:spPr>
+        <p:txBody>
+          <a:bodyPr wrap="square" lIns="0" rIns="0" tIns="0" bIns="0" anchor="t">
+            <a:spAutoFit/>
+          </a:bodyPr>
+          <a:lstStyle/>
+          <a:p>
+            <a:pPr algn="l">
+              <a:lnSpc>
+                <a:spcPct val="106000"/>
+              </a:lnSpc>
+              <a:spcAft>
+                <a:spcPts val="0"/>
+              </a:spcAft>
+            </a:pPr>
+            <a:r>
+              <a:rPr sz="1000" b="1" i="0">
+                <a:solidFill>
+                  <a:srgbClr val="777777"/>
+                </a:solidFill>
+                <a:latin typeface="Calibri"/>
+              </a:rPr>
+              <a:t>DONE</a:t>
+            </a:r>
+          </a:p>
+        </p:txBody>
+      </p:sp>
+      <p:sp>
+        <p:nvSpPr>
+          <p:cNvPr id="6" name="TextBox 5"/>
+          <p:cNvSpPr txBox="1"/>
+          <p:nvPr/>
+        </p:nvSpPr>
+        <p:spPr>
+          <a:xfrm>
+            <a:off x="2468880" y="2011680"/>
+            <a:ext cx="3474720" cy="274320"/>
+          </a:xfrm>
+          <a:prstGeom prst="rect">
+            <a:avLst/>
+          </a:prstGeom>
+          <a:noFill/>
+        </p:spPr>
+        <p:txBody>
+          <a:bodyPr wrap="square" lIns="0" rIns="0" tIns="0" bIns="0" anchor="t">
+            <a:spAutoFit/>
+          </a:bodyPr>
+          <a:lstStyle/>
+          <a:p>
+            <a:pPr algn="l">
+              <a:lnSpc>
+                <a:spcPct val="106000"/>
+              </a:lnSpc>
+              <a:spcAft>
+                <a:spcPts val="0"/>
+              </a:spcAft>
+            </a:pPr>
+            <a:r>
+              <a:rPr sz="1000" b="1" i="0">
+                <a:solidFill>
+                  <a:srgbClr val="777777"/>
+                </a:solidFill>
+                <a:latin typeface="Calibri"/>
+              </a:rPr>
+              <a:t/>
+            </a:r>
+          </a:p>
+        </p:txBody>
+      </p:sp>
+      <p:sp>
+        <p:nvSpPr>
+          <p:cNvPr id="7" name="Rectangle 6"/>
+          <p:cNvSpPr/>
+          <p:nvPr/>
+        </p:nvSpPr>
+        <p:spPr>
+          <a:xfrm>
+            <a:off x="731520" y="2286000"/>
+            <a:ext cx="5212079" cy="9525"/>
+          </a:xfrm>
+          <a:prstGeom prst="rect">
+            <a:avLst/>
+          </a:prstGeom>
+          <a:solidFill>
+            <a:srgbClr val="CCCCCC"/>
+          </a:solidFill>
+          <a:ln>
+            <a:noFill/>
+          </a:ln>
+          <a:effectLst/>
+        </p:spPr>
+        <p:style>
+          <a:lnRef idx="1">
+            <a:schemeClr val="accent1"/>
+          </a:lnRef>
+          <a:fillRef idx="3">
+            <a:schemeClr val="accent1"/>
+          </a:fillRef>
+          <a:effectRef idx="2">
+            <a:schemeClr val="accent1"/>
+          </a:effectRef>
+          <a:fontRef idx="minor">
+            <a:schemeClr val="lt1"/>
+          </a:fontRef>
+        </p:style>
+        <p:txBody>
+          <a:bodyPr rtlCol="0" anchor="ctr"/>
+          <a:lstStyle/>
+          <a:p>
+            <a:pPr algn="ctr"/>
+          </a:p>
+        </p:txBody>
+      </p:sp>
+      <p:sp>
+        <p:nvSpPr>
+          <p:cNvPr id="8" name="TextBox 7"/>
+          <p:cNvSpPr txBox="1"/>
+          <p:nvPr/>
+        </p:nvSpPr>
+        <p:spPr>
+          <a:xfrm>
+            <a:off x="731520" y="2395728"/>
+            <a:ext cx="1737360" cy="310896"/>
+          </a:xfrm>
+          <a:prstGeom prst="rect">
+            <a:avLst/>
+          </a:prstGeom>
+          <a:noFill/>
+        </p:spPr>
+        <p:txBody>
+          <a:bodyPr wrap="square" lIns="0" rIns="0" tIns="0" bIns="0" anchor="t">
+            <a:spAutoFit/>
+          </a:bodyPr>
+          <a:lstStyle/>
+          <a:p>
+            <a:pPr algn="l">
+              <a:lnSpc>
+                <a:spcPct val="106000"/>
+              </a:lnSpc>
+              <a:spcAft>
+                <a:spcPts val="0"/>
+              </a:spcAft>
+            </a:pPr>
+            <a:r>
+              <a:rPr sz="1300" b="0" i="0">
+                <a:solidFill>
+                  <a:srgbClr val="444444"/>
+                </a:solidFill>
+                <a:latin typeface="Calibri"/>
+              </a:rPr>
+              <a:t>1 cell</a:t>
+            </a:r>
+          </a:p>
+        </p:txBody>
+      </p:sp>
+      <p:sp>
+        <p:nvSpPr>
+          <p:cNvPr id="9" name="TextBox 8"/>
+          <p:cNvSpPr txBox="1"/>
+          <p:nvPr/>
+        </p:nvSpPr>
+        <p:spPr>
+          <a:xfrm>
+            <a:off x="2468880" y="2395728"/>
+            <a:ext cx="3474720" cy="310896"/>
+          </a:xfrm>
+          <a:prstGeom prst="rect">
+            <a:avLst/>
+          </a:prstGeom>
+          <a:noFill/>
+        </p:spPr>
+        <p:txBody>
+          <a:bodyPr wrap="square" lIns="0" rIns="0" tIns="0" bIns="0" anchor="t">
+            <a:spAutoFit/>
+          </a:bodyPr>
+          <a:lstStyle/>
+          <a:p>
+            <a:pPr algn="l">
+              <a:lnSpc>
+                <a:spcPct val="106000"/>
+              </a:lnSpc>
+              <a:spcAft>
+                <a:spcPts val="0"/>
+              </a:spcAft>
+            </a:pPr>
+            <a:r>
+              <a:rPr sz="1300" b="0" i="0">
+                <a:solidFill>
+                  <a:srgbClr val="444444"/>
+                </a:solidFill>
+                <a:latin typeface="Calibri"/>
+              </a:rPr>
+              <a:t>worked through: the retrieved document, answering from false content</a:t>
+            </a:r>
+          </a:p>
+        </p:txBody>
+      </p:sp>
+      <p:sp>
+        <p:nvSpPr>
+          <p:cNvPr id="10" name="TextBox 9"/>
+          <p:cNvSpPr txBox="1"/>
+          <p:nvPr/>
+        </p:nvSpPr>
+        <p:spPr>
+          <a:xfrm>
+            <a:off x="731520" y="2944368"/>
+            <a:ext cx="1737360" cy="310896"/>
+          </a:xfrm>
+          <a:prstGeom prst="rect">
+            <a:avLst/>
+          </a:prstGeom>
+          <a:noFill/>
+        </p:spPr>
+        <p:txBody>
+          <a:bodyPr wrap="square" lIns="0" rIns="0" tIns="0" bIns="0" anchor="t">
+            <a:spAutoFit/>
+          </a:bodyPr>
+          <a:lstStyle/>
+          <a:p>
+            <a:pPr algn="l">
+              <a:lnSpc>
+                <a:spcPct val="106000"/>
+              </a:lnSpc>
+              <a:spcAft>
+                <a:spcPts val="0"/>
+              </a:spcAft>
+            </a:pPr>
+            <a:r>
+              <a:rPr sz="1300" b="0" i="0">
+                <a:solidFill>
+                  <a:srgbClr val="444444"/>
+                </a:solidFill>
+                <a:latin typeface="Calibri"/>
+              </a:rPr>
+              <a:t>20 pairs</a:t>
+            </a:r>
+          </a:p>
+        </p:txBody>
+      </p:sp>
+      <p:sp>
+        <p:nvSpPr>
+          <p:cNvPr id="11" name="TextBox 10"/>
+          <p:cNvSpPr txBox="1"/>
+          <p:nvPr/>
+        </p:nvSpPr>
+        <p:spPr>
+          <a:xfrm>
+            <a:off x="2468880" y="2944368"/>
+            <a:ext cx="3474720" cy="310896"/>
+          </a:xfrm>
+          <a:prstGeom prst="rect">
+            <a:avLst/>
+          </a:prstGeom>
+          <a:noFill/>
+        </p:spPr>
+        <p:txBody>
+          <a:bodyPr wrap="square" lIns="0" rIns="0" tIns="0" bIns="0" anchor="t">
+            <a:spAutoFit/>
+          </a:bodyPr>
+          <a:lstStyle/>
+          <a:p>
+            <a:pPr algn="l">
+              <a:lnSpc>
+                <a:spcPct val="106000"/>
+              </a:lnSpc>
+              <a:spcAft>
+                <a:spcPts val="0"/>
+              </a:spcAft>
+            </a:pPr>
+            <a:r>
+              <a:rPr sz="1300" b="0" i="0">
+                <a:solidFill>
+                  <a:srgbClr val="444444"/>
+                </a:solidFill>
+                <a:latin typeface="Calibri"/>
+              </a:rPr>
+              <a:t>measured, none of them previously tested</a:t>
+            </a:r>
+          </a:p>
+        </p:txBody>
+      </p:sp>
+      <p:sp>
+        <p:nvSpPr>
+          <p:cNvPr id="12" name="TextBox 11"/>
+          <p:cNvSpPr txBox="1"/>
+          <p:nvPr/>
+        </p:nvSpPr>
+        <p:spPr>
+          <a:xfrm>
+            <a:off x="731520" y="3493008"/>
+            <a:ext cx="1737360" cy="310896"/>
+          </a:xfrm>
+          <a:prstGeom prst="rect">
+            <a:avLst/>
+          </a:prstGeom>
+          <a:noFill/>
+        </p:spPr>
+        <p:txBody>
+          <a:bodyPr wrap="square" lIns="0" rIns="0" tIns="0" bIns="0" anchor="t">
+            <a:spAutoFit/>
+          </a:bodyPr>
+          <a:lstStyle/>
+          <a:p>
+            <a:pPr algn="l">
+              <a:lnSpc>
+                <a:spcPct val="106000"/>
+              </a:lnSpc>
+              <a:spcAft>
+                <a:spcPts val="0"/>
+              </a:spcAft>
+            </a:pPr>
+            <a:r>
+              <a:rPr sz="1300" b="0" i="0">
+                <a:solidFill>
+                  <a:srgbClr val="444444"/>
+                </a:solidFill>
+                <a:latin typeface="Calibri"/>
+              </a:rPr>
+              <a:t>3 models</a:t>
+            </a:r>
+          </a:p>
+        </p:txBody>
+      </p:sp>
+      <p:sp>
+        <p:nvSpPr>
+          <p:cNvPr id="13" name="TextBox 12"/>
+          <p:cNvSpPr txBox="1"/>
+          <p:nvPr/>
+        </p:nvSpPr>
+        <p:spPr>
+          <a:xfrm>
+            <a:off x="2468880" y="3493008"/>
+            <a:ext cx="3474720" cy="310896"/>
+          </a:xfrm>
+          <a:prstGeom prst="rect">
+            <a:avLst/>
+          </a:prstGeom>
+          <a:noFill/>
+        </p:spPr>
+        <p:txBody>
+          <a:bodyPr wrap="square" lIns="0" rIns="0" tIns="0" bIns="0" anchor="t">
+            <a:spAutoFit/>
+          </a:bodyPr>
+          <a:lstStyle/>
+          <a:p>
+            <a:pPr algn="l">
+              <a:lnSpc>
+                <a:spcPct val="106000"/>
+              </a:lnSpc>
+              <a:spcAft>
+                <a:spcPts val="0"/>
+              </a:spcAft>
+            </a:pPr>
+            <a:r>
+              <a:rPr sz="1300" b="0" i="0">
+                <a:solidFill>
+                  <a:srgbClr val="444444"/>
+                </a:solidFill>
+                <a:latin typeface="Calibri"/>
+              </a:rPr>
+              <a:t>including controlled repeats of the same pair on a second model</a:t>
+            </a:r>
+          </a:p>
+        </p:txBody>
+      </p:sp>
+      <p:sp>
+        <p:nvSpPr>
+          <p:cNvPr id="14" name="TextBox 13"/>
+          <p:cNvSpPr txBox="1"/>
+          <p:nvPr/>
+        </p:nvSpPr>
+        <p:spPr>
+          <a:xfrm>
+            <a:off x="731520" y="4041648"/>
+            <a:ext cx="1737360" cy="310896"/>
+          </a:xfrm>
+          <a:prstGeom prst="rect">
+            <a:avLst/>
+          </a:prstGeom>
+          <a:noFill/>
+        </p:spPr>
+        <p:txBody>
+          <a:bodyPr wrap="square" lIns="0" rIns="0" tIns="0" bIns="0" anchor="t">
+            <a:spAutoFit/>
+          </a:bodyPr>
+          <a:lstStyle/>
+          <a:p>
+            <a:pPr algn="l">
+              <a:lnSpc>
+                <a:spcPct val="106000"/>
+              </a:lnSpc>
+              <a:spcAft>
+                <a:spcPts val="0"/>
+              </a:spcAft>
+            </a:pPr>
+            <a:r>
+              <a:rPr sz="1300" b="0" i="0">
+                <a:solidFill>
+                  <a:srgbClr val="444444"/>
+                </a:solidFill>
+                <a:latin typeface="Calibri"/>
+              </a:rPr>
+              <a:t>5 models</a:t>
+            </a:r>
+          </a:p>
+        </p:txBody>
+      </p:sp>
+      <p:sp>
+        <p:nvSpPr>
+          <p:cNvPr id="15" name="TextBox 14"/>
+          <p:cNvSpPr txBox="1"/>
+          <p:nvPr/>
+        </p:nvSpPr>
+        <p:spPr>
+          <a:xfrm>
+            <a:off x="2468880" y="4041648"/>
+            <a:ext cx="3474720" cy="310896"/>
+          </a:xfrm>
+          <a:prstGeom prst="rect">
+            <a:avLst/>
+          </a:prstGeom>
+          <a:noFill/>
+        </p:spPr>
+        <p:txBody>
+          <a:bodyPr wrap="square" lIns="0" rIns="0" tIns="0" bIns="0" anchor="t">
+            <a:spAutoFit/>
+          </a:bodyPr>
+          <a:lstStyle/>
+          <a:p>
+            <a:pPr algn="l">
+              <a:lnSpc>
+                <a:spcPct val="106000"/>
+              </a:lnSpc>
+              <a:spcAft>
+                <a:spcPts val="0"/>
+              </a:spcAft>
+            </a:pPr>
+            <a:r>
+              <a:rPr sz="1300" b="0" i="0">
+                <a:solidFill>
+                  <a:srgbClr val="444444"/>
+                </a:solidFill>
+                <a:latin typeface="Calibri"/>
+              </a:rPr>
+              <a:t>swept to find what makes one model break where another does not</a:t>
+            </a:r>
+          </a:p>
+        </p:txBody>
+      </p:sp>
+      <p:sp>
+        <p:nvSpPr>
+          <p:cNvPr id="16" name="TextBox 15"/>
+          <p:cNvSpPr txBox="1"/>
+          <p:nvPr/>
+        </p:nvSpPr>
+        <p:spPr>
+          <a:xfrm>
+            <a:off x="731520" y="4114800"/>
+            <a:ext cx="1737360" cy="274320"/>
+          </a:xfrm>
+          <a:prstGeom prst="rect">
+            <a:avLst/>
+          </a:prstGeom>
+          <a:noFill/>
+        </p:spPr>
+        <p:txBody>
+          <a:bodyPr wrap="square" lIns="0" rIns="0" tIns="0" bIns="0" anchor="t">
+            <a:spAutoFit/>
+          </a:bodyPr>
+          <a:lstStyle/>
+          <a:p>
+            <a:pPr algn="l">
+              <a:lnSpc>
+                <a:spcPct val="106000"/>
+              </a:lnSpc>
+              <a:spcAft>
+                <a:spcPts val="0"/>
+              </a:spcAft>
+            </a:pPr>
+            <a:r>
+              <a:rPr sz="1000" b="1" i="0">
+                <a:solidFill>
+                  <a:srgbClr val="777777"/>
+                </a:solidFill>
+                <a:latin typeface="Calibri"/>
+              </a:rPr>
+              <a:t>RUNNING NOW</a:t>
+            </a:r>
+          </a:p>
+        </p:txBody>
+      </p:sp>
+      <p:sp>
+        <p:nvSpPr>
+          <p:cNvPr id="17" name="TextBox 16"/>
+          <p:cNvSpPr txBox="1"/>
+          <p:nvPr/>
+        </p:nvSpPr>
+        <p:spPr>
+          <a:xfrm>
+            <a:off x="2468880" y="4114800"/>
+            <a:ext cx="3474720" cy="274320"/>
+          </a:xfrm>
+          <a:prstGeom prst="rect">
+            <a:avLst/>
+          </a:prstGeom>
+          <a:noFill/>
+        </p:spPr>
+        <p:txBody>
+          <a:bodyPr wrap="square" lIns="0" rIns="0" tIns="0" bIns="0" anchor="t">
+            <a:spAutoFit/>
+          </a:bodyPr>
+          <a:lstStyle/>
+          <a:p>
+            <a:pPr algn="l">
+              <a:lnSpc>
+                <a:spcPct val="106000"/>
+              </a:lnSpc>
+              <a:spcAft>
+                <a:spcPts val="0"/>
+              </a:spcAft>
+            </a:pPr>
+            <a:r>
+              <a:rPr sz="1000" b="1" i="0">
+                <a:solidFill>
+                  <a:srgbClr val="777777"/>
+                </a:solidFill>
+                <a:latin typeface="Calibri"/>
+              </a:rPr>
+              <a:t/>
+            </a:r>
+          </a:p>
+        </p:txBody>
+      </p:sp>
+      <p:sp>
+        <p:nvSpPr>
+          <p:cNvPr id="18" name="Rectangle 17"/>
+          <p:cNvSpPr/>
+          <p:nvPr/>
+        </p:nvSpPr>
+        <p:spPr>
+          <a:xfrm>
+            <a:off x="731520" y="4389120"/>
+            <a:ext cx="5212079" cy="9525"/>
+          </a:xfrm>
+          <a:prstGeom prst="rect">
+            <a:avLst/>
+          </a:prstGeom>
+          <a:solidFill>
+            <a:srgbClr val="CCCCCC"/>
+          </a:solidFill>
+          <a:ln>
+            <a:noFill/>
+          </a:ln>
+          <a:effectLst/>
+        </p:spPr>
+        <p:style>
+          <a:lnRef idx="1">
+            <a:schemeClr val="accent1"/>
+          </a:lnRef>
+          <a:fillRef idx="3">
+            <a:schemeClr val="accent1"/>
+          </a:fillRef>
+          <a:effectRef idx="2">
+            <a:schemeClr val="accent1"/>
+          </a:effectRef>
+          <a:fontRef idx="minor">
+            <a:schemeClr val="lt1"/>
+          </a:fontRef>
+        </p:style>
+        <p:txBody>
+          <a:bodyPr rtlCol="0" anchor="ctr"/>
+          <a:lstStyle/>
+          <a:p>
+            <a:pPr algn="ctr"/>
+          </a:p>
+        </p:txBody>
+      </p:sp>
+      <p:sp>
+        <p:nvSpPr>
+          <p:cNvPr id="19" name="TextBox 18"/>
           <p:cNvSpPr txBox="1"/>
           <p:nvPr/>
         </p:nvSpPr>
@@ -11960,7 +13890,7 @@
       </p:sp>
       <p:sp>
         <p:nvSpPr>
-          <p:cNvPr id="18" name="TextBox 17"/>
+          <p:cNvPr id="20" name="TextBox 19"/>
           <p:cNvSpPr txBox="1"/>
           <p:nvPr/>
         </p:nvSpPr>
@@ -11995,14 +13925,14 @@
                 </a:solidFill>
                 <a:latin typeface="Calibri"/>
               </a:rPr>
-              <a:t>testing why one model breaks and another does not</a:t>
-            </a:r>
-          </a:p>
-        </p:txBody>
-      </p:sp>
-      <p:sp>
-        <p:nvSpPr>
-          <p:cNvPr id="19" name="TextBox 18"/>
+              <a:t>the second version of the aggregating defense, across the same five</a:t>
+            </a:r>
+          </a:p>
+        </p:txBody>
+      </p:sp>
+      <p:sp>
+        <p:nvSpPr>
+          <p:cNvPr id="21" name="TextBox 20"/>
           <p:cNvSpPr txBox="1"/>
           <p:nvPr/>
         </p:nvSpPr>
@@ -12044,7 +13974,7 @@
       </p:sp>
       <p:sp>
         <p:nvSpPr>
-          <p:cNvPr id="20" name="TextBox 19"/>
+          <p:cNvPr id="22" name="TextBox 21"/>
           <p:cNvSpPr txBox="1"/>
           <p:nvPr/>
         </p:nvSpPr>
@@ -12079,6 +14009,25 @@
                 </a:solidFill>
                 <a:latin typeface="Calibri"/>
               </a:rPr>
+              <a:t>Measure directly whether a model lets a document decide if it answers — the property the sweep left pointing at, with no measurement yet attached.</a:t>
+            </a:r>
+          </a:p>
+          <a:p>
+            <a:pPr>
+              <a:lnSpc>
+                <a:spcPct val="110000"/>
+              </a:lnSpc>
+              <a:spcAft>
+                <a:spcPts val="1000"/>
+              </a:spcAft>
+            </a:pPr>
+            <a:r>
+              <a:rPr sz="1300" b="0" i="0">
+                <a:solidFill>
+                  <a:srgbClr val="444444"/>
+                </a:solidFill>
+                <a:latin typeface="Calibri"/>
+              </a:rPr>
               <a:t>One more attack in this cell: a third poisoning method with released code.</a:t>
             </a:r>
           </a:p>
@@ -12143,7 +14092,7 @@
       </p:sp>
       <p:sp>
         <p:nvSpPr>
-          <p:cNvPr id="21" name="TextBox 20"/>
+          <p:cNvPr id="23" name="TextBox 22"/>
           <p:cNvSpPr txBox="1"/>
           <p:nvPr/>
         </p:nvSpPr>
